--- a/blocks/E_autonomy_logic/M16_ros2_control/M16_ros2_control_gz_ros2_control.pptx
+++ b/blocks/E_autonomy_logic/M16_ros2_control/M16_ros2_control_gz_ros2_control.pptx
@@ -32,6 +32,7 @@
     <p:sldId id="280" r:id="rId32"/>
     <p:sldId id="281" r:id="rId33"/>
     <p:sldId id="282" r:id="rId34"/>
+    <p:sldId id="283" r:id="rId35"/>
   </p:sldIdLst>
   <p:sldSz cx="12191999" cy="6858000" type="screen4x3"/>
   <p:notesSz cx="6858000" cy="9144000"/>
@@ -708,7 +709,7 @@
           <a:lstStyle/>
           <a:p>
             <a:r>
-              <a:t>[설명] ~/agv_ws/src/agv_description/urdf/agv.urdf.xacro의 전체 파일을 1/10 구간으로 작성한다.</a:t>
+              <a:t>[설명] ~/agv_ws/src/agv_description/urdf/agv.urdf.xacro의 전체 파일을 1/11 구간으로 작성한다.</a:t>
             </a:r>
           </a:p>
           <a:p>
@@ -798,7 +799,7 @@
           <a:lstStyle/>
           <a:p>
             <a:r>
-              <a:t>[설명] ~/agv_ws/src/agv_description/urdf/agv.urdf.xacro의 전체 파일을 2/10 구간으로 작성한다.</a:t>
+              <a:t>[설명] ~/agv_ws/src/agv_description/urdf/agv.urdf.xacro의 전체 파일을 2/11 구간으로 작성한다.</a:t>
             </a:r>
           </a:p>
           <a:p>
@@ -888,7 +889,7 @@
           <a:lstStyle/>
           <a:p>
             <a:r>
-              <a:t>[설명] ~/agv_ws/src/agv_description/urdf/agv.urdf.xacro의 전체 파일을 3/10 구간으로 작성한다.</a:t>
+              <a:t>[설명] ~/agv_ws/src/agv_description/urdf/agv.urdf.xacro의 전체 파일을 3/11 구간으로 작성한다.</a:t>
             </a:r>
           </a:p>
           <a:p>
@@ -978,7 +979,7 @@
           <a:lstStyle/>
           <a:p>
             <a:r>
-              <a:t>[설명] ~/agv_ws/src/agv_description/urdf/agv.urdf.xacro의 전체 파일을 4/10 구간으로 작성한다.</a:t>
+              <a:t>[설명] ~/agv_ws/src/agv_description/urdf/agv.urdf.xacro의 전체 파일을 4/11 구간으로 작성한다.</a:t>
             </a:r>
           </a:p>
           <a:p>
@@ -1068,7 +1069,7 @@
           <a:lstStyle/>
           <a:p>
             <a:r>
-              <a:t>[설명] ~/agv_ws/src/agv_description/urdf/agv.urdf.xacro의 전체 파일을 5/10 구간으로 작성한다.</a:t>
+              <a:t>[설명] ~/agv_ws/src/agv_description/urdf/agv.urdf.xacro의 전체 파일을 5/11 구간으로 작성한다.</a:t>
             </a:r>
           </a:p>
           <a:p>
@@ -1158,7 +1159,7 @@
           <a:lstStyle/>
           <a:p>
             <a:r>
-              <a:t>[설명] ~/agv_ws/src/agv_description/urdf/agv.urdf.xacro의 전체 파일을 6/10 구간으로 작성한다.</a:t>
+              <a:t>[설명] ~/agv_ws/src/agv_description/urdf/agv.urdf.xacro의 전체 파일을 6/11 구간으로 작성한다.</a:t>
             </a:r>
           </a:p>
           <a:p>
@@ -1248,7 +1249,7 @@
           <a:lstStyle/>
           <a:p>
             <a:r>
-              <a:t>[설명] ~/agv_ws/src/agv_description/urdf/agv.urdf.xacro의 전체 파일을 7/10 구간으로 작성한다.</a:t>
+              <a:t>[설명] ~/agv_ws/src/agv_description/urdf/agv.urdf.xacro의 전체 파일을 7/11 구간으로 작성한다.</a:t>
             </a:r>
           </a:p>
           <a:p>
@@ -1338,7 +1339,7 @@
           <a:lstStyle/>
           <a:p>
             <a:r>
-              <a:t>[설명] ~/agv_ws/src/agv_description/urdf/agv.urdf.xacro의 전체 파일을 8/10 구간으로 작성한다.</a:t>
+              <a:t>[설명] ~/agv_ws/src/agv_description/urdf/agv.urdf.xacro의 전체 파일을 8/11 구간으로 작성한다.</a:t>
             </a:r>
           </a:p>
           <a:p>
@@ -1428,7 +1429,7 @@
           <a:lstStyle/>
           <a:p>
             <a:r>
-              <a:t>[설명] ~/agv_ws/src/agv_description/urdf/agv.urdf.xacro의 전체 파일을 9/10 구간으로 작성한다.</a:t>
+              <a:t>[설명] ~/agv_ws/src/agv_description/urdf/agv.urdf.xacro의 전체 파일을 9/11 구간으로 작성한다.</a:t>
             </a:r>
           </a:p>
           <a:p>
@@ -1608,7 +1609,7 @@
           <a:lstStyle/>
           <a:p>
             <a:r>
-              <a:t>[설명] ~/agv_ws/src/agv_description/urdf/agv.urdf.xacro의 전체 파일을 10/10 구간으로 작성한다.</a:t>
+              <a:t>[설명] ~/agv_ws/src/agv_description/urdf/agv.urdf.xacro의 전체 파일을 10/11 구간으로 작성한다.</a:t>
             </a:r>
           </a:p>
           <a:p>
@@ -1698,27 +1699,17 @@
           <a:lstStyle/>
           <a:p>
             <a:r>
-              <a:t>[설명] build/source/run을 생략 없이 실행한다.</a:t>
-            </a:r>
-          </a:p>
-          <a:p>
-            <a:r>
-              <a:t>[실행] source ~/agv_ws/install/setup.bash</a:t>
-            </a:r>
-          </a:p>
-          <a:p>
-            <a:r>
-              <a:t>ros2 pkg prefix gz_ros2_control</a:t>
-            </a:r>
-          </a:p>
-          <a:p>
-            <a:r>
-              <a:t>ros2 pkg prefix controller_manager</a:t>
-            </a:r>
-          </a:p>
-          <a:p>
-            <a:r>
-              <a:t>[확인] wheel joint 이름과 controller YAML의 좌·우 목록·반지름·wheel separation을 일치시킨다.</a:t>
+              <a:t>[설명] ~/agv_ws/src/agv_description/urdf/agv.urdf.xacro의 전체 파일을 11/11 구간으로 작성한다.</a:t>
+            </a:r>
+          </a:p>
+          <a:p>
+            <a:r>
+              <a:t>[실행] nano ~/agv_ws/src/agv_description/urdf/agv.urdf.xacro</a:t>
+            </a:r>
+          </a:p>
+          <a:p>
+            <a:r>
+              <a:t>[확인] 코드를 저장하고 다음 코드 슬라이드 또는 build 단계로 이동한다.</a:t>
             </a:r>
           </a:p>
           <a:p>
@@ -1728,7 +1719,7 @@
           </a:p>
           <a:p>
             <a:r>
-              <a:t>[오류] 오류가 나면 현재 폴더, source, 파일 경로를 먼저 확인한다.</a:t>
+              <a:t>[오류] 들여쓰기·XML 태그·따옴표가 슬라이드와 정확히 같은지 확인한다.</a:t>
             </a:r>
           </a:p>
         </p:txBody>
@@ -1798,17 +1789,27 @@
           <a:lstStyle/>
           <a:p>
             <a:r>
-              <a:t>[설명] 실제 Ubuntu/ROS 2 환경에서 생성한 검증 화면이다.</a:t>
-            </a:r>
-          </a:p>
-          <a:p>
-            <a:r>
-              <a:t>[실행] 슬라이드의 명령 또는 파일 작성 단계를 진행한다.</a:t>
-            </a:r>
-          </a:p>
-          <a:p>
-            <a:r>
-              <a:t>[확인] 캡처의 명령과 다음 슬라이드의 검증 명령을 비교한다.</a:t>
+              <a:t>[설명] build/source/run을 생략 없이 실행한다.</a:t>
+            </a:r>
+          </a:p>
+          <a:p>
+            <a:r>
+              <a:t>[실행] source ~/agv_ws/install/setup.bash</a:t>
+            </a:r>
+          </a:p>
+          <a:p>
+            <a:r>
+              <a:t>ros2 pkg prefix gz_ros2_control</a:t>
+            </a:r>
+          </a:p>
+          <a:p>
+            <a:r>
+              <a:t>ros2 pkg prefix controller_manager</a:t>
+            </a:r>
+          </a:p>
+          <a:p>
+            <a:r>
+              <a:t>[확인] wheel joint 이름과 controller YAML의 좌·우 목록·반지름·wheel separation을 일치시킨다.</a:t>
             </a:r>
           </a:p>
           <a:p>
@@ -1888,22 +1889,17 @@
           <a:lstStyle/>
           <a:p>
             <a:r>
-              <a:t>[설명] 검증 명령은 GUI 결과와 별도로 실행해 재현 가능한 완료 기준을 만든다.</a:t>
-            </a:r>
-          </a:p>
-          <a:p>
-            <a:r>
-              <a:t>[실행] rg -n 'left_wheel_joint|right_wheel_joint|wheel_separation|wheel_radius' ~/agv_ws/src/agv_control/config/controllers.yaml</a:t>
-            </a:r>
-          </a:p>
-          <a:p>
-            <a:r>
-              <a:t>rg -n 'left_wheel_joint|right_wheel_joint' ~/agv_ws/src/agv_gazebo/models/agv/model.sdf</a:t>
-            </a:r>
-          </a:p>
-          <a:p>
-            <a:r>
-              <a:t>[확인] wheel joint 이름과 controller YAML의 좌·우 목록·반지름·wheel separation을 일치시킨다.</a:t>
+              <a:t>[설명] 실제 Ubuntu/ROS 2 환경에서 생성한 검증 화면이다.</a:t>
+            </a:r>
+          </a:p>
+          <a:p>
+            <a:r>
+              <a:t>[실행] 슬라이드의 명령 또는 파일 작성 단계를 진행한다.</a:t>
+            </a:r>
+          </a:p>
+          <a:p>
+            <a:r>
+              <a:t>[확인] 캡처의 명령과 다음 슬라이드의 검증 명령을 비교한다.</a:t>
             </a:r>
           </a:p>
           <a:p>
@@ -1983,17 +1979,22 @@
           <a:lstStyle/>
           <a:p>
             <a:r>
-              <a:t>[설명] 오류를 대신 해결하지 말고 증상부터 우선 확인 순서대로 교육생이 실행하게 한다.</a:t>
-            </a:r>
-          </a:p>
-          <a:p>
-            <a:r>
-              <a:t>[실행] 슬라이드의 명령 또는 파일 작성 단계를 진행한다.</a:t>
-            </a:r>
-          </a:p>
-          <a:p>
-            <a:r>
-              <a:t>[확인] 수정 뒤 첫 검증 명령을 다시 실행한다.</a:t>
+              <a:t>[설명] 검증 명령은 GUI 결과와 별도로 실행해 재현 가능한 완료 기준을 만든다.</a:t>
+            </a:r>
+          </a:p>
+          <a:p>
+            <a:r>
+              <a:t>[실행] rg -n 'left_wheel_joint|right_wheel_joint|wheel_separation|wheel_radius' ~/agv_ws/src/agv_control/config/controllers.yaml</a:t>
+            </a:r>
+          </a:p>
+          <a:p>
+            <a:r>
+              <a:t>rg -n 'left_wheel_joint|right_wheel_joint' ~/agv_ws/src/agv_gazebo/models/agv/model.sdf</a:t>
+            </a:r>
+          </a:p>
+          <a:p>
+            <a:r>
+              <a:t>[확인] wheel joint 이름과 controller YAML의 좌·우 목록·반지름·wheel separation을 일치시킨다.</a:t>
             </a:r>
           </a:p>
           <a:p>
@@ -2003,7 +2004,7 @@
           </a:p>
           <a:p>
             <a:r>
-              <a:t>[오류] 슬라이드의 두 대표 오류를 먼저 사용한다.</a:t>
+              <a:t>[오류] 오류가 나면 현재 폴더, source, 파일 경로를 먼저 확인한다.</a:t>
             </a:r>
           </a:p>
         </p:txBody>
@@ -2073,7 +2074,7 @@
           <a:lstStyle/>
           <a:p>
             <a:r>
-              <a:t>[설명] 교육생이 직접 한 값만 바꿔 원인과 결과를 연결하게 한다.</a:t>
+              <a:t>[설명] 오류를 대신 해결하지 말고 증상부터 우선 확인 순서대로 교육생이 실행하게 한다.</a:t>
             </a:r>
           </a:p>
           <a:p>
@@ -2083,7 +2084,7 @@
           </a:p>
           <a:p>
             <a:r>
-              <a:t>[확인] 원래 값과 변경 값을 모두 기록한다.</a:t>
+              <a:t>[확인] 수정 뒤 첫 검증 명령을 다시 실행한다.</a:t>
             </a:r>
           </a:p>
           <a:p>
@@ -2093,7 +2094,7 @@
           </a:p>
           <a:p>
             <a:r>
-              <a:t>[오류] 오류가 나면 현재 폴더, source, 파일 경로를 먼저 확인한다.</a:t>
+              <a:t>[오류] 슬라이드의 두 대표 오류를 먼저 사용한다.</a:t>
             </a:r>
           </a:p>
         </p:txBody>
@@ -2163,7 +2164,7 @@
           <a:lstStyle/>
           <a:p>
             <a:r>
-              <a:t>[설명] 교육생이 Complete·캡처·로그를 저장했는지 확인하고 다음 모듈의 시작 상태를 읽는다.</a:t>
+              <a:t>[설명] 교육생이 직접 한 값만 바꿔 원인과 결과를 연결하게 한다.</a:t>
             </a:r>
           </a:p>
           <a:p>
@@ -2173,7 +2174,7 @@
           </a:p>
           <a:p>
             <a:r>
-              <a:t>[확인] M17~M20 autonomy command 시작 조건을 말할 수 있다.</a:t>
+              <a:t>[확인] 원래 값과 변경 값을 모두 기록한다.</a:t>
             </a:r>
           </a:p>
           <a:p>
@@ -2209,6 +2210,96 @@
 </file>
 
 <file path=ppt/notesSlides/notesSlide27.xml><?xml version="1.0" encoding="utf-8"?>
+<p:notes xmlns:a="http://schemas.openxmlformats.org/drawingml/2006/main" xmlns:p="http://schemas.openxmlformats.org/presentationml/2006/main" xmlns:r="http://schemas.openxmlformats.org/officeDocument/2006/relationships">
+  <p:cSld>
+    <p:spTree>
+      <p:nvGrpSpPr>
+        <p:cNvPr id="1" name=""/>
+        <p:cNvGrpSpPr/>
+        <p:nvPr/>
+      </p:nvGrpSpPr>
+      <p:grpSpPr>
+        <a:xfrm>
+          <a:off x="0" y="0"/>
+          <a:ext cx="0" cy="0"/>
+          <a:chOff x="0" y="0"/>
+          <a:chExt cx="0" cy="0"/>
+        </a:xfrm>
+      </p:grpSpPr>
+      <p:sp>
+        <p:nvSpPr>
+          <p:cNvPr id="2" name="Slide Image Placeholder 1"/>
+          <p:cNvSpPr>
+            <a:spLocks noGrp="1"/>
+          </p:cNvSpPr>
+          <p:nvPr>
+            <p:ph type="sldImg" idx="2"/>
+          </p:nvPr>
+        </p:nvSpPr>
+        <p:spPr/>
+      </p:sp>
+      <p:sp>
+        <p:nvSpPr>
+          <p:cNvPr id="3" name="Notes Placeholder 2"/>
+          <p:cNvSpPr>
+            <a:spLocks noGrp="1"/>
+          </p:cNvSpPr>
+          <p:nvPr>
+            <p:ph type="body" idx="3" sz="quarter"/>
+          </p:nvPr>
+        </p:nvSpPr>
+        <p:spPr/>
+        <p:txBody>
+          <a:bodyPr/>
+          <a:lstStyle/>
+          <a:p>
+            <a:r>
+              <a:t>[설명] 교육생이 Complete·캡처·로그를 저장했는지 확인하고 다음 모듈의 시작 상태를 읽는다.</a:t>
+            </a:r>
+          </a:p>
+          <a:p>
+            <a:r>
+              <a:t>[실행] 슬라이드의 명령 또는 파일 작성 단계를 진행한다.</a:t>
+            </a:r>
+          </a:p>
+          <a:p>
+            <a:r>
+              <a:t>[확인] M17~M20 autonomy command 시작 조건을 말할 수 있다.</a:t>
+            </a:r>
+          </a:p>
+          <a:p>
+            <a:r>
+              <a:t>[멈춤] 교육생이 현재 체크포인트를 통과할 때까지 기다린다.</a:t>
+            </a:r>
+          </a:p>
+          <a:p>
+            <a:r>
+              <a:t>[오류] 오류가 나면 현재 폴더, source, 파일 경로를 먼저 확인한다.</a:t>
+            </a:r>
+          </a:p>
+        </p:txBody>
+      </p:sp>
+      <p:sp>
+        <p:nvSpPr>
+          <p:cNvPr id="4" name="Slide Number Placeholder 3"/>
+          <p:cNvSpPr>
+            <a:spLocks noGrp="1"/>
+          </p:cNvSpPr>
+          <p:nvPr>
+            <p:ph type="sldNum" idx="5" sz="quarter"/>
+          </p:nvPr>
+        </p:nvSpPr>
+        <p:spPr/>
+      </p:sp>
+    </p:spTree>
+  </p:cSld>
+  <p:clrMapOvr>
+    <a:masterClrMapping/>
+  </p:clrMapOvr>
+</p:notes>
+</file>
+
+<file path=ppt/notesSlides/notesSlide28.xml><?xml version="1.0" encoding="utf-8"?>
 <p:notes xmlns:a="http://schemas.openxmlformats.org/drawingml/2006/main" xmlns:p="http://schemas.openxmlformats.org/presentationml/2006/main" xmlns:r="http://schemas.openxmlformats.org/officeDocument/2006/relationships">
   <p:cSld>
     <p:spTree>
@@ -6479,8 +6570,8 @@
         </p:nvSpPr>
         <p:spPr>
           <a:xfrm>
-            <a:off x="658368" y="1682496"/>
-            <a:ext cx="10972800" cy="347472"/>
+            <a:off x="658368" y="1627632"/>
+            <a:ext cx="10972800" cy="256032"/>
           </a:xfrm>
           <a:prstGeom prst="rect">
             <a:avLst/>
@@ -6497,7 +6588,7 @@
               <a:spcAft>
                 <a:spcPts val="0"/>
               </a:spcAft>
-              <a:defRPr sz="1700" b="1">
+              <a:defRPr sz="1500" b="1">
                 <a:solidFill>
                   <a:srgbClr val="122C4E"/>
                 </a:solidFill>
@@ -6518,8 +6609,8 @@
         </p:nvSpPr>
         <p:spPr>
           <a:xfrm>
-            <a:off x="658368" y="2103120"/>
-            <a:ext cx="10972800" cy="493776"/>
+            <a:off x="658368" y="1956816"/>
+            <a:ext cx="10972800" cy="603504"/>
           </a:xfrm>
           <a:prstGeom prst="rect">
             <a:avLst/>
@@ -6563,7 +6654,11 @@
               </a:defRPr>
             </a:pPr>
             <a:r>
-              <a:t>파일 생성/열기: mkdir -p ~/agv_ws/src/agv_control/config    &amp;&amp;    nano ~/agv_ws/src/agv_control/config/controllers.yaml</a:t>
+              <a:t>파일 생성: mkdir -p ~/agv_ws/src/agv_control/config</a:t>
+            </a:r>
+            <a:br/>
+            <a:r>
+              <a:t>파일 열기: nano ~/agv_ws/src/agv_control/config/controllers.yaml</a:t>
             </a:r>
           </a:p>
         </p:txBody>
@@ -6576,8 +6671,8 @@
         </p:nvSpPr>
         <p:spPr>
           <a:xfrm>
-            <a:off x="658368" y="2761488"/>
-            <a:ext cx="10972800" cy="3383280"/>
+            <a:off x="658368" y="2706624"/>
+            <a:ext cx="10972800" cy="3364992"/>
           </a:xfrm>
           <a:prstGeom prst="rect">
             <a:avLst/>
@@ -6621,6 +6716,14 @@
               </a:defRPr>
             </a:pPr>
             <a:r>
+              <a:t>    wheel_radius: 0.08</a:t>
+            </a:r>
+            <a:br/>
+            <a:r>
+              <a:t>    base_frame_id: base_link</a:t>
+            </a:r>
+            <a:br/>
+            <a:r>
               <a:t>    odom_frame_id: odom</a:t>
             </a:r>
             <a:br/>
@@ -6638,7 +6741,7 @@
         </p:nvSpPr>
         <p:spPr>
           <a:xfrm>
-            <a:off x="749808" y="6199632"/>
+            <a:off x="749808" y="6181344"/>
             <a:ext cx="10789920" cy="201168"/>
           </a:xfrm>
           <a:prstGeom prst="rect">
@@ -6721,7 +6824,7 @@
               </a:defRPr>
             </a:pPr>
             <a:r>
-              <a:t>파일을 새로 만들고 저장한다 (1/10)</a:t>
+              <a:t>파일을 새로 만들고 저장한다 (1/11)</a:t>
             </a:r>
           </a:p>
         </p:txBody>
@@ -6896,7 +6999,7 @@
               </a:defRPr>
             </a:pPr>
             <a:r>
-              <a:t>현재 단계 5/15    |    현재 폴더 ~/agv_ws    |    현재 터미널</a:t>
+              <a:t>현재 단계 5/16    |    현재 폴더 ~/agv_ws    |    현재 터미널</a:t>
             </a:r>
           </a:p>
         </p:txBody>
@@ -6909,8 +7012,8 @@
         </p:nvSpPr>
         <p:spPr>
           <a:xfrm>
-            <a:off x="658368" y="1682496"/>
-            <a:ext cx="10972800" cy="347472"/>
+            <a:off x="658368" y="1627632"/>
+            <a:ext cx="10972800" cy="256032"/>
           </a:xfrm>
           <a:prstGeom prst="rect">
             <a:avLst/>
@@ -6927,7 +7030,7 @@
               <a:spcAft>
                 <a:spcPts val="0"/>
               </a:spcAft>
-              <a:defRPr sz="1700" b="1">
+              <a:defRPr sz="1500" b="1">
                 <a:solidFill>
                   <a:srgbClr val="122C4E"/>
                 </a:solidFill>
@@ -6948,8 +7051,8 @@
         </p:nvSpPr>
         <p:spPr>
           <a:xfrm>
-            <a:off x="658368" y="2103120"/>
-            <a:ext cx="10972800" cy="493776"/>
+            <a:off x="658368" y="1956816"/>
+            <a:ext cx="10972800" cy="603504"/>
           </a:xfrm>
           <a:prstGeom prst="rect">
             <a:avLst/>
@@ -6993,7 +7096,11 @@
               </a:defRPr>
             </a:pPr>
             <a:r>
-              <a:t>파일 생성/열기: mkdir -p ~/agv_ws/src/agv_description/urdf    &amp;&amp;    nano ~/agv_ws/src/agv_description/urdf/agv.urdf.xacro</a:t>
+              <a:t>파일 생성: mkdir -p ~/agv_ws/src/agv_description/urdf</a:t>
+            </a:r>
+            <a:br/>
+            <a:r>
+              <a:t>파일 열기: nano ~/agv_ws/src/agv_description/urdf/agv.urdf.xacro</a:t>
             </a:r>
           </a:p>
         </p:txBody>
@@ -7006,8 +7113,8 @@
         </p:nvSpPr>
         <p:spPr>
           <a:xfrm>
-            <a:off x="658368" y="2761488"/>
-            <a:ext cx="10972800" cy="3383280"/>
+            <a:off x="658368" y="2706624"/>
+            <a:ext cx="10972800" cy="3364992"/>
           </a:xfrm>
           <a:prstGeom prst="rect">
             <a:avLst/>
@@ -7097,11 +7204,6 @@
             <a:r>
               <a:t>  </a:t>
             </a:r>
-            <a:br/>
-            <a:br/>
-            <a:r>
-              <a:t>  </a:t>
-            </a:r>
           </a:p>
         </p:txBody>
       </p:sp>
@@ -7113,7 +7215,7 @@
         </p:nvSpPr>
         <p:spPr>
           <a:xfrm>
-            <a:off x="749808" y="6199632"/>
+            <a:off x="749808" y="6181344"/>
             <a:ext cx="10789920" cy="201168"/>
           </a:xfrm>
           <a:prstGeom prst="rect">
@@ -7139,7 +7241,7 @@
               </a:defRPr>
             </a:pPr>
             <a:r>
-              <a:t>파일 전체 1/10 · 이 슬라이드 다음에 같은 파일의 나머지 줄이 이어집니다.</a:t>
+              <a:t>파일 전체 1/11 · 이 슬라이드 다음에 같은 파일의 나머지 줄이 이어집니다.</a:t>
             </a:r>
           </a:p>
         </p:txBody>
@@ -7196,7 +7298,7 @@
               </a:defRPr>
             </a:pPr>
             <a:r>
-              <a:t>파일을 계속 작성하고 저장한다 (2/10)</a:t>
+              <a:t>파일을 계속 작성하고 저장한다 (2/11)</a:t>
             </a:r>
           </a:p>
         </p:txBody>
@@ -7371,7 +7473,7 @@
               </a:defRPr>
             </a:pPr>
             <a:r>
-              <a:t>현재 단계 6/15    |    현재 폴더 ~/agv_ws    |    현재 터미널</a:t>
+              <a:t>현재 단계 6/16    |    현재 폴더 ~/agv_ws    |    현재 터미널</a:t>
             </a:r>
           </a:p>
         </p:txBody>
@@ -7384,8 +7486,8 @@
         </p:nvSpPr>
         <p:spPr>
           <a:xfrm>
-            <a:off x="658368" y="1682496"/>
-            <a:ext cx="10972800" cy="347472"/>
+            <a:off x="658368" y="1627632"/>
+            <a:ext cx="10972800" cy="256032"/>
           </a:xfrm>
           <a:prstGeom prst="rect">
             <a:avLst/>
@@ -7402,7 +7504,7 @@
               <a:spcAft>
                 <a:spcPts val="0"/>
               </a:spcAft>
-              <a:defRPr sz="1700" b="1">
+              <a:defRPr sz="1500" b="1">
                 <a:solidFill>
                   <a:srgbClr val="122C4E"/>
                 </a:solidFill>
@@ -7423,8 +7525,8 @@
         </p:nvSpPr>
         <p:spPr>
           <a:xfrm>
-            <a:off x="658368" y="2103120"/>
-            <a:ext cx="10972800" cy="493776"/>
+            <a:off x="658368" y="1956816"/>
+            <a:ext cx="10972800" cy="603504"/>
           </a:xfrm>
           <a:prstGeom prst="rect">
             <a:avLst/>
@@ -7468,7 +7570,11 @@
               </a:defRPr>
             </a:pPr>
             <a:r>
-              <a:t>파일 생성/열기: mkdir -p ~/agv_ws/src/agv_description/urdf    &amp;&amp;    nano ~/agv_ws/src/agv_description/urdf/agv.urdf.xacro</a:t>
+              <a:t>파일 생성: mkdir -p ~/agv_ws/src/agv_description/urdf</a:t>
+            </a:r>
+            <a:br/>
+            <a:r>
+              <a:t>파일 열기: nano ~/agv_ws/src/agv_description/urdf/agv.urdf.xacro</a:t>
             </a:r>
           </a:p>
         </p:txBody>
@@ -7481,8 +7587,8 @@
         </p:nvSpPr>
         <p:spPr>
           <a:xfrm>
-            <a:off x="658368" y="2761488"/>
-            <a:ext cx="10972800" cy="3383280"/>
+            <a:off x="658368" y="2706624"/>
+            <a:ext cx="10972800" cy="3364992"/>
           </a:xfrm>
           <a:prstGeom prst="rect">
             <a:avLst/>
@@ -7525,6 +7631,11 @@
                 <a:latin typeface="DejaVu Sans Mono"/>
               </a:defRPr>
             </a:pPr>
+            <a:br/>
+            <a:r>
+              <a:t>  </a:t>
+            </a:r>
+            <a:br/>
             <a:r>
               <a:t>  &lt;xacro:property name="body_length" value="0.60"/&gt;</a:t>
             </a:r>
@@ -7563,22 +7674,6 @@
             <a:br/>
             <a:r>
               <a:t>  &lt;xacro:property name="wheel_radius" value="0.08"/&gt;</a:t>
-            </a:r>
-            <a:br/>
-            <a:r>
-              <a:t>  </a:t>
-            </a:r>
-            <a:br/>
-            <a:r>
-              <a:t>  </a:t>
-            </a:r>
-            <a:br/>
-            <a:r>
-              <a:t>  &lt;xacro:property name="wheel_width" value="0.05"/&gt;</a:t>
-            </a:r>
-            <a:br/>
-            <a:r>
-              <a:t>  </a:t>
             </a:r>
           </a:p>
         </p:txBody>
@@ -7591,7 +7686,7 @@
         </p:nvSpPr>
         <p:spPr>
           <a:xfrm>
-            <a:off x="749808" y="6199632"/>
+            <a:off x="749808" y="6181344"/>
             <a:ext cx="10789920" cy="201168"/>
           </a:xfrm>
           <a:prstGeom prst="rect">
@@ -7617,7 +7712,7 @@
               </a:defRPr>
             </a:pPr>
             <a:r>
-              <a:t>파일 전체 2/10 · 이 슬라이드 다음에 같은 파일의 나머지 줄이 이어집니다.</a:t>
+              <a:t>파일 전체 2/11 · 이 슬라이드 다음에 같은 파일의 나머지 줄이 이어집니다.</a:t>
             </a:r>
           </a:p>
         </p:txBody>
@@ -7674,7 +7769,7 @@
               </a:defRPr>
             </a:pPr>
             <a:r>
-              <a:t>파일을 계속 작성하고 저장한다 (3/10)</a:t>
+              <a:t>파일을 계속 작성하고 저장한다 (3/11)</a:t>
             </a:r>
           </a:p>
         </p:txBody>
@@ -7849,7 +7944,7 @@
               </a:defRPr>
             </a:pPr>
             <a:r>
-              <a:t>현재 단계 7/15    |    현재 폴더 ~/agv_ws    |    현재 터미널</a:t>
+              <a:t>현재 단계 7/16    |    현재 폴더 ~/agv_ws    |    현재 터미널</a:t>
             </a:r>
           </a:p>
         </p:txBody>
@@ -7862,8 +7957,8 @@
         </p:nvSpPr>
         <p:spPr>
           <a:xfrm>
-            <a:off x="658368" y="1682496"/>
-            <a:ext cx="10972800" cy="347472"/>
+            <a:off x="658368" y="1627632"/>
+            <a:ext cx="10972800" cy="256032"/>
           </a:xfrm>
           <a:prstGeom prst="rect">
             <a:avLst/>
@@ -7880,7 +7975,7 @@
               <a:spcAft>
                 <a:spcPts val="0"/>
               </a:spcAft>
-              <a:defRPr sz="1700" b="1">
+              <a:defRPr sz="1500" b="1">
                 <a:solidFill>
                   <a:srgbClr val="122C4E"/>
                 </a:solidFill>
@@ -7901,8 +7996,8 @@
         </p:nvSpPr>
         <p:spPr>
           <a:xfrm>
-            <a:off x="658368" y="2103120"/>
-            <a:ext cx="10972800" cy="493776"/>
+            <a:off x="658368" y="1956816"/>
+            <a:ext cx="10972800" cy="603504"/>
           </a:xfrm>
           <a:prstGeom prst="rect">
             <a:avLst/>
@@ -7946,7 +8041,11 @@
               </a:defRPr>
             </a:pPr>
             <a:r>
-              <a:t>파일 생성/열기: mkdir -p ~/agv_ws/src/agv_description/urdf    &amp;&amp;    nano ~/agv_ws/src/agv_description/urdf/agv.urdf.xacro</a:t>
+              <a:t>파일 생성: mkdir -p ~/agv_ws/src/agv_description/urdf</a:t>
+            </a:r>
+            <a:br/>
+            <a:r>
+              <a:t>파일 열기: nano ~/agv_ws/src/agv_description/urdf/agv.urdf.xacro</a:t>
             </a:r>
           </a:p>
         </p:txBody>
@@ -7959,8 +8058,8 @@
         </p:nvSpPr>
         <p:spPr>
           <a:xfrm>
-            <a:off x="658368" y="2761488"/>
-            <a:ext cx="10972800" cy="3383280"/>
+            <a:off x="658368" y="2706624"/>
+            <a:ext cx="10972800" cy="3364992"/>
           </a:xfrm>
           <a:prstGeom prst="rect">
             <a:avLst/>
@@ -8008,6 +8107,22 @@
             </a:r>
             <a:br/>
             <a:r>
+              <a:t>  </a:t>
+            </a:r>
+            <a:br/>
+            <a:r>
+              <a:t>  &lt;xacro:property name="wheel_width" value="0.05"/&gt;</a:t>
+            </a:r>
+            <a:br/>
+            <a:r>
+              <a:t>  </a:t>
+            </a:r>
+            <a:br/>
+            <a:r>
+              <a:t>  </a:t>
+            </a:r>
+            <a:br/>
+            <a:r>
               <a:t>  &lt;xacro:property name="wheel_base" value="0.38"/&gt;</a:t>
             </a:r>
             <a:br/>
@@ -8031,30 +8146,6 @@
             <a:r>
               <a:t>  </a:t>
             </a:r>
-            <a:br/>
-            <a:r>
-              <a:t>  &lt;link name="base_link"&gt;</a:t>
-            </a:r>
-            <a:br/>
-            <a:r>
-              <a:t>    </a:t>
-            </a:r>
-            <a:br/>
-            <a:r>
-              <a:t>    </a:t>
-            </a:r>
-            <a:br/>
-            <a:r>
-              <a:t>    &lt;visual&gt;</a:t>
-            </a:r>
-            <a:br/>
-            <a:r>
-              <a:t>      &lt;origin xyz="0 0 ${wheel_radius + body_height/2}"/&gt;</a:t>
-            </a:r>
-            <a:br/>
-            <a:r>
-              <a:t>      &lt;geometry&gt;</a:t>
-            </a:r>
           </a:p>
         </p:txBody>
       </p:sp>
@@ -8066,7 +8157,7 @@
         </p:nvSpPr>
         <p:spPr>
           <a:xfrm>
-            <a:off x="749808" y="6199632"/>
+            <a:off x="749808" y="6181344"/>
             <a:ext cx="10789920" cy="201168"/>
           </a:xfrm>
           <a:prstGeom prst="rect">
@@ -8092,7 +8183,7 @@
               </a:defRPr>
             </a:pPr>
             <a:r>
-              <a:t>파일 전체 3/10 · 이 슬라이드 다음에 같은 파일의 나머지 줄이 이어집니다.</a:t>
+              <a:t>파일 전체 3/11 · 이 슬라이드 다음에 같은 파일의 나머지 줄이 이어집니다.</a:t>
             </a:r>
           </a:p>
         </p:txBody>
@@ -8149,7 +8240,7 @@
               </a:defRPr>
             </a:pPr>
             <a:r>
-              <a:t>파일을 계속 작성하고 저장한다 (4/10)</a:t>
+              <a:t>파일을 계속 작성하고 저장한다 (4/11)</a:t>
             </a:r>
           </a:p>
         </p:txBody>
@@ -8324,7 +8415,7 @@
               </a:defRPr>
             </a:pPr>
             <a:r>
-              <a:t>현재 단계 8/15    |    현재 폴더 ~/agv_ws    |    현재 터미널</a:t>
+              <a:t>현재 단계 8/16    |    현재 폴더 ~/agv_ws    |    현재 터미널</a:t>
             </a:r>
           </a:p>
         </p:txBody>
@@ -8337,8 +8428,8 @@
         </p:nvSpPr>
         <p:spPr>
           <a:xfrm>
-            <a:off x="658368" y="1682496"/>
-            <a:ext cx="10972800" cy="347472"/>
+            <a:off x="658368" y="1627632"/>
+            <a:ext cx="10972800" cy="256032"/>
           </a:xfrm>
           <a:prstGeom prst="rect">
             <a:avLst/>
@@ -8355,7 +8446,7 @@
               <a:spcAft>
                 <a:spcPts val="0"/>
               </a:spcAft>
-              <a:defRPr sz="1700" b="1">
+              <a:defRPr sz="1500" b="1">
                 <a:solidFill>
                   <a:srgbClr val="122C4E"/>
                 </a:solidFill>
@@ -8376,8 +8467,8 @@
         </p:nvSpPr>
         <p:spPr>
           <a:xfrm>
-            <a:off x="658368" y="2103120"/>
-            <a:ext cx="10972800" cy="493776"/>
+            <a:off x="658368" y="1956816"/>
+            <a:ext cx="10972800" cy="603504"/>
           </a:xfrm>
           <a:prstGeom prst="rect">
             <a:avLst/>
@@ -8421,7 +8512,11 @@
               </a:defRPr>
             </a:pPr>
             <a:r>
-              <a:t>파일 생성/열기: mkdir -p ~/agv_ws/src/agv_description/urdf    &amp;&amp;    nano ~/agv_ws/src/agv_description/urdf/agv.urdf.xacro</a:t>
+              <a:t>파일 생성: mkdir -p ~/agv_ws/src/agv_description/urdf</a:t>
+            </a:r>
+            <a:br/>
+            <a:r>
+              <a:t>파일 열기: nano ~/agv_ws/src/agv_description/urdf/agv.urdf.xacro</a:t>
             </a:r>
           </a:p>
         </p:txBody>
@@ -8434,8 +8529,8 @@
         </p:nvSpPr>
         <p:spPr>
           <a:xfrm>
-            <a:off x="658368" y="2761488"/>
-            <a:ext cx="10972800" cy="3383280"/>
+            <a:off x="658368" y="2706624"/>
+            <a:ext cx="10972800" cy="3364992"/>
           </a:xfrm>
           <a:prstGeom prst="rect">
             <a:avLst/>
@@ -8479,6 +8574,30 @@
               </a:defRPr>
             </a:pPr>
             <a:r>
+              <a:t>  &lt;link name="base_link"&gt;</a:t>
+            </a:r>
+            <a:br/>
+            <a:r>
+              <a:t>    </a:t>
+            </a:r>
+            <a:br/>
+            <a:r>
+              <a:t>    </a:t>
+            </a:r>
+            <a:br/>
+            <a:r>
+              <a:t>    &lt;visual&gt;</a:t>
+            </a:r>
+            <a:br/>
+            <a:r>
+              <a:t>      &lt;origin xyz="0 0 ${wheel_radius + body_height/2}"/&gt;</a:t>
+            </a:r>
+            <a:br/>
+            <a:r>
+              <a:t>      &lt;geometry&gt;</a:t>
+            </a:r>
+            <a:br/>
+            <a:r>
               <a:t>        &lt;box size="${body_length} ${body_width} ${body_height}"/&gt;</a:t>
             </a:r>
             <a:br/>
@@ -8492,38 +8611,6 @@
             <a:br/>
             <a:r>
               <a:t>    &lt;/visual&gt;</a:t>
-            </a:r>
-            <a:br/>
-            <a:r>
-              <a:t>    </a:t>
-            </a:r>
-            <a:br/>
-            <a:r>
-              <a:t>    </a:t>
-            </a:r>
-            <a:br/>
-            <a:r>
-              <a:t>    &lt;collision&gt;</a:t>
-            </a:r>
-            <a:br/>
-            <a:r>
-              <a:t>      &lt;origin xyz="0 0 ${wheel_radius + body_height/2}"/&gt;</a:t>
-            </a:r>
-            <a:br/>
-            <a:r>
-              <a:t>      &lt;geometry&gt;</a:t>
-            </a:r>
-            <a:br/>
-            <a:r>
-              <a:t>        &lt;box size="${body_length} ${body_width} ${body_height}"/&gt;</a:t>
-            </a:r>
-            <a:br/>
-            <a:r>
-              <a:t>      &lt;/geometry&gt;</a:t>
-            </a:r>
-            <a:br/>
-            <a:r>
-              <a:t>    &lt;/collision&gt;</a:t>
             </a:r>
             <a:br/>
             <a:r>
@@ -8544,7 +8631,7 @@
         </p:nvSpPr>
         <p:spPr>
           <a:xfrm>
-            <a:off x="749808" y="6199632"/>
+            <a:off x="749808" y="6181344"/>
             <a:ext cx="10789920" cy="201168"/>
           </a:xfrm>
           <a:prstGeom prst="rect">
@@ -8570,7 +8657,7 @@
               </a:defRPr>
             </a:pPr>
             <a:r>
-              <a:t>파일 전체 4/10 · 이 슬라이드 다음에 같은 파일의 나머지 줄이 이어집니다.</a:t>
+              <a:t>파일 전체 4/11 · 이 슬라이드 다음에 같은 파일의 나머지 줄이 이어집니다.</a:t>
             </a:r>
           </a:p>
         </p:txBody>
@@ -8627,7 +8714,7 @@
               </a:defRPr>
             </a:pPr>
             <a:r>
-              <a:t>파일을 계속 작성하고 저장한다 (5/10)</a:t>
+              <a:t>파일을 계속 작성하고 저장한다 (5/11)</a:t>
             </a:r>
           </a:p>
         </p:txBody>
@@ -8802,7 +8889,7 @@
               </a:defRPr>
             </a:pPr>
             <a:r>
-              <a:t>현재 단계 9/15    |    현재 폴더 ~/agv_ws    |    현재 터미널</a:t>
+              <a:t>현재 단계 9/16    |    현재 폴더 ~/agv_ws    |    현재 터미널</a:t>
             </a:r>
           </a:p>
         </p:txBody>
@@ -8815,8 +8902,8 @@
         </p:nvSpPr>
         <p:spPr>
           <a:xfrm>
-            <a:off x="658368" y="1682496"/>
-            <a:ext cx="10972800" cy="347472"/>
+            <a:off x="658368" y="1627632"/>
+            <a:ext cx="10972800" cy="256032"/>
           </a:xfrm>
           <a:prstGeom prst="rect">
             <a:avLst/>
@@ -8833,7 +8920,7 @@
               <a:spcAft>
                 <a:spcPts val="0"/>
               </a:spcAft>
-              <a:defRPr sz="1700" b="1">
+              <a:defRPr sz="1500" b="1">
                 <a:solidFill>
                   <a:srgbClr val="122C4E"/>
                 </a:solidFill>
@@ -8854,8 +8941,8 @@
         </p:nvSpPr>
         <p:spPr>
           <a:xfrm>
-            <a:off x="658368" y="2103120"/>
-            <a:ext cx="10972800" cy="493776"/>
+            <a:off x="658368" y="1956816"/>
+            <a:ext cx="10972800" cy="603504"/>
           </a:xfrm>
           <a:prstGeom prst="rect">
             <a:avLst/>
@@ -8899,7 +8986,11 @@
               </a:defRPr>
             </a:pPr>
             <a:r>
-              <a:t>파일 생성/열기: mkdir -p ~/agv_ws/src/agv_description/urdf    &amp;&amp;    nano ~/agv_ws/src/agv_description/urdf/agv.urdf.xacro</a:t>
+              <a:t>파일 생성: mkdir -p ~/agv_ws/src/agv_description/urdf</a:t>
+            </a:r>
+            <a:br/>
+            <a:r>
+              <a:t>파일 열기: nano ~/agv_ws/src/agv_description/urdf/agv.urdf.xacro</a:t>
             </a:r>
           </a:p>
         </p:txBody>
@@ -8912,8 +9003,8 @@
         </p:nvSpPr>
         <p:spPr>
           <a:xfrm>
-            <a:off x="658368" y="2761488"/>
-            <a:ext cx="10972800" cy="3383280"/>
+            <a:off x="658368" y="2706624"/>
+            <a:ext cx="10972800" cy="3364992"/>
           </a:xfrm>
           <a:prstGeom prst="rect">
             <a:avLst/>
@@ -8957,6 +9048,38 @@
               </a:defRPr>
             </a:pPr>
             <a:r>
+              <a:t>    &lt;collision&gt;</a:t>
+            </a:r>
+            <a:br/>
+            <a:r>
+              <a:t>      &lt;origin xyz="0 0 ${wheel_radius + body_height/2}"/&gt;</a:t>
+            </a:r>
+            <a:br/>
+            <a:r>
+              <a:t>      &lt;geometry&gt;</a:t>
+            </a:r>
+            <a:br/>
+            <a:r>
+              <a:t>        &lt;box size="${body_length} ${body_width} ${body_height}"/&gt;</a:t>
+            </a:r>
+            <a:br/>
+            <a:r>
+              <a:t>      &lt;/geometry&gt;</a:t>
+            </a:r>
+            <a:br/>
+            <a:r>
+              <a:t>    &lt;/collision&gt;</a:t>
+            </a:r>
+            <a:br/>
+            <a:r>
+              <a:t>    </a:t>
+            </a:r>
+            <a:br/>
+            <a:r>
+              <a:t>    </a:t>
+            </a:r>
+            <a:br/>
+            <a:r>
               <a:t>    &lt;xacro:box_inertia mass="12.0" x="${body_length}" y="${body_width}"</a:t>
             </a:r>
             <a:br/>
@@ -8967,43 +9090,6 @@
             <a:r>
               <a:t>    </a:t>
             </a:r>
-            <a:br/>
-            <a:r>
-              <a:t>  </a:t>
-            </a:r>
-            <a:br/>
-            <a:r>
-              <a:t>  &lt;/link&gt;</a:t>
-            </a:r>
-            <a:br/>
-            <a:r>
-              <a:t>  </a:t>
-            </a:r>
-            <a:br/>
-            <a:r>
-              <a:t>  </a:t>
-            </a:r>
-            <a:br/>
-            <a:r>
-              <a:t>  &lt;joint name="base_footprint_joint" type="fixed"&gt;</a:t>
-            </a:r>
-            <a:br/>
-            <a:r>
-              <a:t>    &lt;parent link="base_footprint"/&gt;</a:t>
-            </a:r>
-            <a:br/>
-            <a:r>
-              <a:t>    &lt;child link="base_link"/&gt;</a:t>
-            </a:r>
-            <a:br/>
-            <a:r>
-              <a:t>  &lt;/joint&gt;</a:t>
-            </a:r>
-            <a:br/>
-            <a:r>
-              <a:t>  </a:t>
-            </a:r>
-            <a:br/>
             <a:br/>
             <a:r>
               <a:t>  </a:t>
@@ -9019,7 +9105,7 @@
         </p:nvSpPr>
         <p:spPr>
           <a:xfrm>
-            <a:off x="749808" y="6199632"/>
+            <a:off x="749808" y="6181344"/>
             <a:ext cx="10789920" cy="201168"/>
           </a:xfrm>
           <a:prstGeom prst="rect">
@@ -9045,7 +9131,7 @@
               </a:defRPr>
             </a:pPr>
             <a:r>
-              <a:t>파일 전체 5/10 · 이 슬라이드 다음에 같은 파일의 나머지 줄이 이어집니다.</a:t>
+              <a:t>파일 전체 5/11 · 이 슬라이드 다음에 같은 파일의 나머지 줄이 이어집니다.</a:t>
             </a:r>
           </a:p>
         </p:txBody>
@@ -9102,7 +9188,7 @@
               </a:defRPr>
             </a:pPr>
             <a:r>
-              <a:t>파일을 계속 작성하고 저장한다 (6/10)</a:t>
+              <a:t>파일을 계속 작성하고 저장한다 (6/11)</a:t>
             </a:r>
           </a:p>
         </p:txBody>
@@ -9277,7 +9363,7 @@
               </a:defRPr>
             </a:pPr>
             <a:r>
-              <a:t>현재 단계 10/15    |    현재 폴더 ~/agv_ws    |    현재 터미널</a:t>
+              <a:t>현재 단계 10/16    |    현재 폴더 ~/agv_ws    |    현재 터미널</a:t>
             </a:r>
           </a:p>
         </p:txBody>
@@ -9290,8 +9376,8 @@
         </p:nvSpPr>
         <p:spPr>
           <a:xfrm>
-            <a:off x="658368" y="1682496"/>
-            <a:ext cx="10972800" cy="347472"/>
+            <a:off x="658368" y="1627632"/>
+            <a:ext cx="10972800" cy="256032"/>
           </a:xfrm>
           <a:prstGeom prst="rect">
             <a:avLst/>
@@ -9308,7 +9394,7 @@
               <a:spcAft>
                 <a:spcPts val="0"/>
               </a:spcAft>
-              <a:defRPr sz="1700" b="1">
+              <a:defRPr sz="1500" b="1">
                 <a:solidFill>
                   <a:srgbClr val="122C4E"/>
                 </a:solidFill>
@@ -9329,8 +9415,8 @@
         </p:nvSpPr>
         <p:spPr>
           <a:xfrm>
-            <a:off x="658368" y="2103120"/>
-            <a:ext cx="10972800" cy="493776"/>
+            <a:off x="658368" y="1956816"/>
+            <a:ext cx="10972800" cy="603504"/>
           </a:xfrm>
           <a:prstGeom prst="rect">
             <a:avLst/>
@@ -9374,7 +9460,11 @@
               </a:defRPr>
             </a:pPr>
             <a:r>
-              <a:t>파일 생성/열기: mkdir -p ~/agv_ws/src/agv_description/urdf    &amp;&amp;    nano ~/agv_ws/src/agv_description/urdf/agv.urdf.xacro</a:t>
+              <a:t>파일 생성: mkdir -p ~/agv_ws/src/agv_description/urdf</a:t>
+            </a:r>
+            <a:br/>
+            <a:r>
+              <a:t>파일 열기: nano ~/agv_ws/src/agv_description/urdf/agv.urdf.xacro</a:t>
             </a:r>
           </a:p>
         </p:txBody>
@@ -9387,8 +9477,8 @@
         </p:nvSpPr>
         <p:spPr>
           <a:xfrm>
-            <a:off x="658368" y="2761488"/>
-            <a:ext cx="10972800" cy="3383280"/>
+            <a:off x="658368" y="2706624"/>
+            <a:ext cx="10972800" cy="3364992"/>
           </a:xfrm>
           <a:prstGeom prst="rect">
             <a:avLst/>
@@ -9432,11 +9522,11 @@
               </a:defRPr>
             </a:pPr>
             <a:r>
-              <a:t>  &lt;xacro:agv_wheel side="left" y="${wheel_base/2}" radius="${wheel_radius}"</a:t>
+              <a:t>  &lt;/link&gt;</a:t>
             </a:r>
             <a:br/>
             <a:r>
-              <a:t>    width="${wheel_width}"/&gt;</a:t>
+              <a:t>  </a:t>
             </a:r>
             <a:br/>
             <a:r>
@@ -9444,15 +9534,19 @@
             </a:r>
             <a:br/>
             <a:r>
-              <a:t>  </a:t>
+              <a:t>  &lt;joint name="base_footprint_joint" type="fixed"&gt;</a:t>
             </a:r>
             <a:br/>
             <a:r>
-              <a:t>  &lt;xacro:agv_wheel side="right" y="${-wheel_base/2}" radius="${wheel_radius}"</a:t>
+              <a:t>    &lt;parent link="base_footprint"/&gt;</a:t>
             </a:r>
             <a:br/>
             <a:r>
-              <a:t>    width="${wheel_width}"/&gt;</a:t>
+              <a:t>    &lt;child link="base_link"/&gt;</a:t>
+            </a:r>
+            <a:br/>
+            <a:r>
+              <a:t>  &lt;/joint&gt;</a:t>
             </a:r>
             <a:br/>
             <a:r>
@@ -9465,23 +9559,11 @@
             </a:r>
             <a:br/>
             <a:r>
-              <a:t>  &lt;link name="caster_link"&gt;</a:t>
+              <a:t>  &lt;xacro:agv_wheel side="left" y="${wheel_base/2}" radius="${wheel_radius}"</a:t>
             </a:r>
             <a:br/>
             <a:r>
-              <a:t>    &lt;visual&gt;</a:t>
-            </a:r>
-            <a:br/>
-            <a:r>
-              <a:t>      &lt;geometry&gt;</a:t>
-            </a:r>
-            <a:br/>
-            <a:r>
-              <a:t>        &lt;sphere radius="0.04"/&gt;</a:t>
-            </a:r>
-            <a:br/>
-            <a:r>
-              <a:t>      &lt;/geometry&gt;</a:t>
+              <a:t>    width="${wheel_width}"/&gt;</a:t>
             </a:r>
           </a:p>
         </p:txBody>
@@ -9494,7 +9576,7 @@
         </p:nvSpPr>
         <p:spPr>
           <a:xfrm>
-            <a:off x="749808" y="6199632"/>
+            <a:off x="749808" y="6181344"/>
             <a:ext cx="10789920" cy="201168"/>
           </a:xfrm>
           <a:prstGeom prst="rect">
@@ -9520,7 +9602,7 @@
               </a:defRPr>
             </a:pPr>
             <a:r>
-              <a:t>파일 전체 6/10 · 이 슬라이드 다음에 같은 파일의 나머지 줄이 이어집니다.</a:t>
+              <a:t>파일 전체 6/11 · 이 슬라이드 다음에 같은 파일의 나머지 줄이 이어집니다.</a:t>
             </a:r>
           </a:p>
         </p:txBody>
@@ -9577,7 +9659,7 @@
               </a:defRPr>
             </a:pPr>
             <a:r>
-              <a:t>파일을 계속 작성하고 저장한다 (7/10)</a:t>
+              <a:t>파일을 계속 작성하고 저장한다 (7/11)</a:t>
             </a:r>
           </a:p>
         </p:txBody>
@@ -9752,7 +9834,7 @@
               </a:defRPr>
             </a:pPr>
             <a:r>
-              <a:t>현재 단계 11/15    |    현재 폴더 ~/agv_ws    |    현재 터미널</a:t>
+              <a:t>현재 단계 11/16    |    현재 폴더 ~/agv_ws    |    현재 터미널</a:t>
             </a:r>
           </a:p>
         </p:txBody>
@@ -9765,8 +9847,8 @@
         </p:nvSpPr>
         <p:spPr>
           <a:xfrm>
-            <a:off x="658368" y="1682496"/>
-            <a:ext cx="10972800" cy="347472"/>
+            <a:off x="658368" y="1627632"/>
+            <a:ext cx="10972800" cy="256032"/>
           </a:xfrm>
           <a:prstGeom prst="rect">
             <a:avLst/>
@@ -9783,7 +9865,7 @@
               <a:spcAft>
                 <a:spcPts val="0"/>
               </a:spcAft>
-              <a:defRPr sz="1700" b="1">
+              <a:defRPr sz="1500" b="1">
                 <a:solidFill>
                   <a:srgbClr val="122C4E"/>
                 </a:solidFill>
@@ -9804,8 +9886,8 @@
         </p:nvSpPr>
         <p:spPr>
           <a:xfrm>
-            <a:off x="658368" y="2103120"/>
-            <a:ext cx="10972800" cy="493776"/>
+            <a:off x="658368" y="1956816"/>
+            <a:ext cx="10972800" cy="603504"/>
           </a:xfrm>
           <a:prstGeom prst="rect">
             <a:avLst/>
@@ -9849,7 +9931,11 @@
               </a:defRPr>
             </a:pPr>
             <a:r>
-              <a:t>파일 생성/열기: mkdir -p ~/agv_ws/src/agv_description/urdf    &amp;&amp;    nano ~/agv_ws/src/agv_description/urdf/agv.urdf.xacro</a:t>
+              <a:t>파일 생성: mkdir -p ~/agv_ws/src/agv_description/urdf</a:t>
+            </a:r>
+            <a:br/>
+            <a:r>
+              <a:t>파일 열기: nano ~/agv_ws/src/agv_description/urdf/agv.urdf.xacro</a:t>
             </a:r>
           </a:p>
         </p:txBody>
@@ -9862,8 +9948,8 @@
         </p:nvSpPr>
         <p:spPr>
           <a:xfrm>
-            <a:off x="658368" y="2761488"/>
-            <a:ext cx="10972800" cy="3383280"/>
+            <a:off x="658368" y="2706624"/>
+            <a:ext cx="10972800" cy="3364992"/>
           </a:xfrm>
           <a:prstGeom prst="rect">
             <a:avLst/>
@@ -9907,18 +9993,39 @@
               </a:defRPr>
             </a:pPr>
             <a:r>
-              <a:t>      &lt;material name="wheel_gray"/&gt;</a:t>
+              <a:t>  </a:t>
             </a:r>
             <a:br/>
             <a:r>
-              <a:t>    &lt;/visual&gt;</a:t>
+              <a:t>  </a:t>
             </a:r>
             <a:br/>
             <a:r>
-              <a:t>    &lt;collision&gt;</a:t>
+              <a:t>  &lt;xacro:agv_wheel side="right" y="${-wheel_base/2}" radius="${wheel_radius}"</a:t>
             </a:r>
             <a:br/>
             <a:r>
+              <a:t>    width="${wheel_width}"/&gt;</a:t>
+            </a:r>
+            <a:br/>
+            <a:r>
+              <a:t>  </a:t>
+            </a:r>
+            <a:br/>
+            <a:br/>
+            <a:r>
+              <a:t>  </a:t>
+            </a:r>
+            <a:br/>
+            <a:r>
+              <a:t>  &lt;link name="caster_link"&gt;</a:t>
+            </a:r>
+            <a:br/>
+            <a:r>
+              <a:t>    &lt;visual&gt;</a:t>
+            </a:r>
+            <a:br/>
+            <a:r>
               <a:t>      &lt;geometry&gt;</a:t>
             </a:r>
             <a:br/>
@@ -9928,38 +10035,6 @@
             <a:br/>
             <a:r>
               <a:t>      &lt;/geometry&gt;</a:t>
-            </a:r>
-            <a:br/>
-            <a:r>
-              <a:t>    &lt;/collision&gt;</a:t>
-            </a:r>
-            <a:br/>
-            <a:r>
-              <a:t>    &lt;inertial&gt;</a:t>
-            </a:r>
-            <a:br/>
-            <a:r>
-              <a:t>      &lt;mass value="0.15"/&gt;</a:t>
-            </a:r>
-            <a:br/>
-            <a:r>
-              <a:t>      &lt;inertia ixx="0.0001" ixy="0" ixz="0" iyy="0.0001" iyz="0" izz="0.0001"/&gt;</a:t>
-            </a:r>
-            <a:br/>
-            <a:r>
-              <a:t>    &lt;/inertial&gt;</a:t>
-            </a:r>
-            <a:br/>
-            <a:r>
-              <a:t>  &lt;/link&gt;</a:t>
-            </a:r>
-            <a:br/>
-            <a:r>
-              <a:t>  </a:t>
-            </a:r>
-            <a:br/>
-            <a:r>
-              <a:t>  </a:t>
             </a:r>
           </a:p>
         </p:txBody>
@@ -9972,7 +10047,7 @@
         </p:nvSpPr>
         <p:spPr>
           <a:xfrm>
-            <a:off x="749808" y="6199632"/>
+            <a:off x="749808" y="6181344"/>
             <a:ext cx="10789920" cy="201168"/>
           </a:xfrm>
           <a:prstGeom prst="rect">
@@ -9998,7 +10073,7 @@
               </a:defRPr>
             </a:pPr>
             <a:r>
-              <a:t>파일 전체 7/10 · 이 슬라이드 다음에 같은 파일의 나머지 줄이 이어집니다.</a:t>
+              <a:t>파일 전체 7/11 · 이 슬라이드 다음에 같은 파일의 나머지 줄이 이어집니다.</a:t>
             </a:r>
           </a:p>
         </p:txBody>
@@ -10055,7 +10130,7 @@
               </a:defRPr>
             </a:pPr>
             <a:r>
-              <a:t>파일을 계속 작성하고 저장한다 (8/10)</a:t>
+              <a:t>파일을 계속 작성하고 저장한다 (8/11)</a:t>
             </a:r>
           </a:p>
         </p:txBody>
@@ -10230,7 +10305,7 @@
               </a:defRPr>
             </a:pPr>
             <a:r>
-              <a:t>현재 단계 12/15    |    현재 폴더 ~/agv_ws    |    현재 터미널</a:t>
+              <a:t>현재 단계 12/16    |    현재 폴더 ~/agv_ws    |    현재 터미널</a:t>
             </a:r>
           </a:p>
         </p:txBody>
@@ -10243,8 +10318,8 @@
         </p:nvSpPr>
         <p:spPr>
           <a:xfrm>
-            <a:off x="658368" y="1682496"/>
-            <a:ext cx="10972800" cy="347472"/>
+            <a:off x="658368" y="1627632"/>
+            <a:ext cx="10972800" cy="256032"/>
           </a:xfrm>
           <a:prstGeom prst="rect">
             <a:avLst/>
@@ -10261,7 +10336,7 @@
               <a:spcAft>
                 <a:spcPts val="0"/>
               </a:spcAft>
-              <a:defRPr sz="1700" b="1">
+              <a:defRPr sz="1500" b="1">
                 <a:solidFill>
                   <a:srgbClr val="122C4E"/>
                 </a:solidFill>
@@ -10282,8 +10357,8 @@
         </p:nvSpPr>
         <p:spPr>
           <a:xfrm>
-            <a:off x="658368" y="2103120"/>
-            <a:ext cx="10972800" cy="493776"/>
+            <a:off x="658368" y="1956816"/>
+            <a:ext cx="10972800" cy="603504"/>
           </a:xfrm>
           <a:prstGeom prst="rect">
             <a:avLst/>
@@ -10327,7 +10402,11 @@
               </a:defRPr>
             </a:pPr>
             <a:r>
-              <a:t>파일 생성/열기: mkdir -p ~/agv_ws/src/agv_description/urdf    &amp;&amp;    nano ~/agv_ws/src/agv_description/urdf/agv.urdf.xacro</a:t>
+              <a:t>파일 생성: mkdir -p ~/agv_ws/src/agv_description/urdf</a:t>
+            </a:r>
+            <a:br/>
+            <a:r>
+              <a:t>파일 열기: nano ~/agv_ws/src/agv_description/urdf/agv.urdf.xacro</a:t>
             </a:r>
           </a:p>
         </p:txBody>
@@ -10340,8 +10419,8 @@
         </p:nvSpPr>
         <p:spPr>
           <a:xfrm>
-            <a:off x="658368" y="2761488"/>
-            <a:ext cx="10972800" cy="3383280"/>
+            <a:off x="658368" y="2706624"/>
+            <a:ext cx="10972800" cy="3364992"/>
           </a:xfrm>
           <a:prstGeom prst="rect">
             <a:avLst/>
@@ -10385,56 +10464,51 @@
               </a:defRPr>
             </a:pPr>
             <a:r>
-              <a:t>  &lt;joint name="caster_joint" type="fixed"&gt;</a:t>
+              <a:t>      &lt;material name="wheel_gray"/&gt;</a:t>
             </a:r>
             <a:br/>
             <a:r>
-              <a:t>    &lt;parent link="base_link"/&gt;</a:t>
+              <a:t>    &lt;/visual&gt;</a:t>
             </a:r>
             <a:br/>
             <a:r>
-              <a:t>    &lt;child link="caster_link"/&gt;</a:t>
+              <a:t>    &lt;collision&gt;</a:t>
             </a:r>
             <a:br/>
             <a:r>
-              <a:t>    &lt;origin xyz="-0.24 0 0.04"/&gt;</a:t>
+              <a:t>      &lt;geometry&gt;</a:t>
             </a:r>
             <a:br/>
             <a:r>
-              <a:t>  &lt;/joint&gt;</a:t>
+              <a:t>        &lt;sphere radius="0.04"/&gt;</a:t>
             </a:r>
             <a:br/>
             <a:r>
-              <a:t>  </a:t>
+              <a:t>      &lt;/geometry&gt;</a:t>
             </a:r>
             <a:br/>
+            <a:r>
+              <a:t>    &lt;/collision&gt;</a:t>
+            </a:r>
             <a:br/>
             <a:r>
-              <a:t>  </a:t>
+              <a:t>    &lt;inertial&gt;</a:t>
             </a:r>
             <a:br/>
             <a:r>
-              <a:t>  &lt;xacro:fixed_sensor name="lidar" parent="base_link" xyz="0.12 0 ${wheel_radius +</a:t>
+              <a:t>      &lt;mass value="0.15"/&gt;</a:t>
             </a:r>
             <a:br/>
             <a:r>
-              <a:t>    body_height + 0.04}" rpy="0 0 0" size="0.09 0.09 0.05"/&gt;</a:t>
+              <a:t>      &lt;inertia ixx="0.0001" ixy="0" ixz="0" iyy="0.0001" iyz="0" izz="0.0001"/&gt;</a:t>
             </a:r>
             <a:br/>
             <a:r>
-              <a:t>  </a:t>
+              <a:t>    &lt;/inertial&gt;</a:t>
             </a:r>
             <a:br/>
             <a:r>
-              <a:t>  </a:t>
-            </a:r>
-            <a:br/>
-            <a:r>
-              <a:t>  &lt;xacro:fixed_sensor name="camera" parent="base_link" xyz="0.28 0 ${wheel_radius +</a:t>
-            </a:r>
-            <a:br/>
-            <a:r>
-              <a:t>    body_height + 0.04}" rpy="0 0 0" size="0.05 0.08 0.05"/&gt;</a:t>
+              <a:t>  &lt;/link&gt;</a:t>
             </a:r>
           </a:p>
         </p:txBody>
@@ -10447,7 +10521,7 @@
         </p:nvSpPr>
         <p:spPr>
           <a:xfrm>
-            <a:off x="749808" y="6199632"/>
+            <a:off x="749808" y="6181344"/>
             <a:ext cx="10789920" cy="201168"/>
           </a:xfrm>
           <a:prstGeom prst="rect">
@@ -10473,7 +10547,7 @@
               </a:defRPr>
             </a:pPr>
             <a:r>
-              <a:t>파일 전체 8/10 · 이 슬라이드 다음에 같은 파일의 나머지 줄이 이어집니다.</a:t>
+              <a:t>파일 전체 8/11 · 이 슬라이드 다음에 같은 파일의 나머지 줄이 이어집니다.</a:t>
             </a:r>
           </a:p>
         </p:txBody>
@@ -10530,7 +10604,7 @@
               </a:defRPr>
             </a:pPr>
             <a:r>
-              <a:t>파일을 계속 작성하고 저장한다 (9/10)</a:t>
+              <a:t>파일을 계속 작성하고 저장한다 (9/11)</a:t>
             </a:r>
           </a:p>
         </p:txBody>
@@ -10705,7 +10779,7 @@
               </a:defRPr>
             </a:pPr>
             <a:r>
-              <a:t>현재 단계 13/15    |    현재 폴더 ~/agv_ws    |    현재 터미널</a:t>
+              <a:t>현재 단계 13/16    |    현재 폴더 ~/agv_ws    |    현재 터미널</a:t>
             </a:r>
           </a:p>
         </p:txBody>
@@ -10718,8 +10792,8 @@
         </p:nvSpPr>
         <p:spPr>
           <a:xfrm>
-            <a:off x="658368" y="1682496"/>
-            <a:ext cx="10972800" cy="347472"/>
+            <a:off x="658368" y="1627632"/>
+            <a:ext cx="10972800" cy="256032"/>
           </a:xfrm>
           <a:prstGeom prst="rect">
             <a:avLst/>
@@ -10736,7 +10810,7 @@
               <a:spcAft>
                 <a:spcPts val="0"/>
               </a:spcAft>
-              <a:defRPr sz="1700" b="1">
+              <a:defRPr sz="1500" b="1">
                 <a:solidFill>
                   <a:srgbClr val="122C4E"/>
                 </a:solidFill>
@@ -10757,8 +10831,8 @@
         </p:nvSpPr>
         <p:spPr>
           <a:xfrm>
-            <a:off x="658368" y="2103120"/>
-            <a:ext cx="10972800" cy="493776"/>
+            <a:off x="658368" y="1956816"/>
+            <a:ext cx="10972800" cy="603504"/>
           </a:xfrm>
           <a:prstGeom prst="rect">
             <a:avLst/>
@@ -10802,7 +10876,11 @@
               </a:defRPr>
             </a:pPr>
             <a:r>
-              <a:t>파일 생성/열기: mkdir -p ~/agv_ws/src/agv_description/urdf    &amp;&amp;    nano ~/agv_ws/src/agv_description/urdf/agv.urdf.xacro</a:t>
+              <a:t>파일 생성: mkdir -p ~/agv_ws/src/agv_description/urdf</a:t>
+            </a:r>
+            <a:br/>
+            <a:r>
+              <a:t>파일 열기: nano ~/agv_ws/src/agv_description/urdf/agv.urdf.xacro</a:t>
             </a:r>
           </a:p>
         </p:txBody>
@@ -10815,8 +10893,8 @@
         </p:nvSpPr>
         <p:spPr>
           <a:xfrm>
-            <a:off x="658368" y="2761488"/>
-            <a:ext cx="10972800" cy="3383280"/>
+            <a:off x="658368" y="2706624"/>
+            <a:ext cx="10972800" cy="3364992"/>
           </a:xfrm>
           <a:prstGeom prst="rect">
             <a:avLst/>
@@ -10868,51 +10946,40 @@
             </a:r>
             <a:br/>
             <a:r>
-              <a:t>  &lt;link name="camera_optical_frame"/&gt;</a:t>
+              <a:t>  &lt;joint name="caster_joint" type="fixed"&gt;</a:t>
             </a:r>
             <a:br/>
             <a:r>
+              <a:t>    &lt;parent link="base_link"/&gt;</a:t>
+            </a:r>
+            <a:br/>
+            <a:r>
+              <a:t>    &lt;child link="caster_link"/&gt;</a:t>
+            </a:r>
+            <a:br/>
+            <a:r>
+              <a:t>    &lt;origin xyz="-0.24 0 0.04"/&gt;</a:t>
+            </a:r>
+            <a:br/>
+            <a:r>
+              <a:t>  &lt;/joint&gt;</a:t>
+            </a:r>
+            <a:br/>
+            <a:r>
               <a:t>  </a:t>
             </a:r>
             <a:br/>
+            <a:br/>
             <a:r>
               <a:t>  </a:t>
             </a:r>
             <a:br/>
             <a:r>
-              <a:t>  &lt;joint name="camera_optical_joint" type="fixed"&gt;</a:t>
+              <a:t>  &lt;xacro:fixed_sensor name="lidar" parent="base_link" xyz="0.12 0 ${wheel_radius +</a:t>
             </a:r>
             <a:br/>
             <a:r>
-              <a:t>    &lt;parent link="camera_link"/&gt;</a:t>
-            </a:r>
-            <a:br/>
-            <a:r>
-              <a:t>    &lt;child link="camera_optical_frame"/&gt;</a:t>
-            </a:r>
-            <a:br/>
-            <a:r>
-              <a:t>    &lt;origin xyz="0 0 0" rpy="-1.5708 0 -1.5708"/&gt;</a:t>
-            </a:r>
-            <a:br/>
-            <a:r>
-              <a:t>  &lt;/joint&gt;</a:t>
-            </a:r>
-            <a:br/>
-            <a:r>
-              <a:t>  </a:t>
-            </a:r>
-            <a:br/>
-            <a:r>
-              <a:t>  </a:t>
-            </a:r>
-            <a:br/>
-            <a:r>
-              <a:t>  &lt;xacro:fixed_sensor name="imu" parent="base_link" xyz="0 0 ${wheel_radius +</a:t>
-            </a:r>
-            <a:br/>
-            <a:r>
-              <a:t>    body_height + 0.02}" rpy="0 0 0" size="0.03 0.03 0.02"/&gt;</a:t>
+              <a:t>    body_height + 0.04}" rpy="0 0 0" size="0.09 0.09 0.05"/&gt;</a:t>
             </a:r>
           </a:p>
         </p:txBody>
@@ -10925,7 +10992,7 @@
         </p:nvSpPr>
         <p:spPr>
           <a:xfrm>
-            <a:off x="749808" y="6199632"/>
+            <a:off x="749808" y="6181344"/>
             <a:ext cx="10789920" cy="201168"/>
           </a:xfrm>
           <a:prstGeom prst="rect">
@@ -10951,7 +11018,7 @@
               </a:defRPr>
             </a:pPr>
             <a:r>
-              <a:t>파일 전체 9/10 · 이 슬라이드 다음에 같은 파일의 나머지 줄이 이어집니다.</a:t>
+              <a:t>파일 전체 9/11 · 이 슬라이드 다음에 같은 파일의 나머지 줄이 이어집니다.</a:t>
             </a:r>
           </a:p>
         </p:txBody>
@@ -11469,7 +11536,7 @@
               </a:defRPr>
             </a:pPr>
             <a:r>
-              <a:t>파일을 계속 작성하고 저장한다 (10/10)</a:t>
+              <a:t>파일을 계속 작성하고 저장한다 (10/11)</a:t>
             </a:r>
           </a:p>
         </p:txBody>
@@ -11644,7 +11711,7 @@
               </a:defRPr>
             </a:pPr>
             <a:r>
-              <a:t>현재 단계 14/15    |    현재 폴더 ~/agv_ws    |    현재 터미널</a:t>
+              <a:t>현재 단계 14/16    |    현재 폴더 ~/agv_ws    |    현재 터미널</a:t>
             </a:r>
           </a:p>
         </p:txBody>
@@ -11657,8 +11724,8 @@
         </p:nvSpPr>
         <p:spPr>
           <a:xfrm>
-            <a:off x="658368" y="1682496"/>
-            <a:ext cx="10972800" cy="347472"/>
+            <a:off x="658368" y="1627632"/>
+            <a:ext cx="10972800" cy="256032"/>
           </a:xfrm>
           <a:prstGeom prst="rect">
             <a:avLst/>
@@ -11675,7 +11742,7 @@
               <a:spcAft>
                 <a:spcPts val="0"/>
               </a:spcAft>
-              <a:defRPr sz="1700" b="1">
+              <a:defRPr sz="1500" b="1">
                 <a:solidFill>
                   <a:srgbClr val="122C4E"/>
                 </a:solidFill>
@@ -11696,8 +11763,8 @@
         </p:nvSpPr>
         <p:spPr>
           <a:xfrm>
-            <a:off x="658368" y="2103120"/>
-            <a:ext cx="10972800" cy="493776"/>
+            <a:off x="658368" y="1956816"/>
+            <a:ext cx="10972800" cy="603504"/>
           </a:xfrm>
           <a:prstGeom prst="rect">
             <a:avLst/>
@@ -11741,7 +11808,11 @@
               </a:defRPr>
             </a:pPr>
             <a:r>
-              <a:t>파일 생성/열기: mkdir -p ~/agv_ws/src/agv_description/urdf    &amp;&amp;    nano ~/agv_ws/src/agv_description/urdf/agv.urdf.xacro</a:t>
+              <a:t>파일 생성: mkdir -p ~/agv_ws/src/agv_description/urdf</a:t>
+            </a:r>
+            <a:br/>
+            <a:r>
+              <a:t>파일 열기: nano ~/agv_ws/src/agv_description/urdf/agv.urdf.xacro</a:t>
             </a:r>
           </a:p>
         </p:txBody>
@@ -11754,8 +11825,8 @@
         </p:nvSpPr>
         <p:spPr>
           <a:xfrm>
-            <a:off x="658368" y="2761488"/>
-            <a:ext cx="10972800" cy="3383280"/>
+            <a:off x="658368" y="2706624"/>
+            <a:ext cx="10972800" cy="3364992"/>
           </a:xfrm>
           <a:prstGeom prst="rect">
             <a:avLst/>
@@ -11802,9 +11873,48 @@
               <a:t>  </a:t>
             </a:r>
             <a:br/>
+            <a:r>
+              <a:t>  </a:t>
+            </a:r>
             <a:br/>
             <a:r>
-              <a:t>&lt;/robot&gt;</a:t>
+              <a:t>  &lt;xacro:fixed_sensor name="camera" parent="base_link" xyz="0.28 0 ${wheel_radius +</a:t>
+            </a:r>
+            <a:br/>
+            <a:r>
+              <a:t>    body_height + 0.04}" rpy="0 0 0" size="0.05 0.08 0.05"/&gt;</a:t>
+            </a:r>
+            <a:br/>
+            <a:r>
+              <a:t>  </a:t>
+            </a:r>
+            <a:br/>
+            <a:r>
+              <a:t>  </a:t>
+            </a:r>
+            <a:br/>
+            <a:r>
+              <a:t>  &lt;link name="camera_optical_frame"/&gt;</a:t>
+            </a:r>
+            <a:br/>
+            <a:r>
+              <a:t>  </a:t>
+            </a:r>
+            <a:br/>
+            <a:r>
+              <a:t>  </a:t>
+            </a:r>
+            <a:br/>
+            <a:r>
+              <a:t>  &lt;joint name="camera_optical_joint" type="fixed"&gt;</a:t>
+            </a:r>
+            <a:br/>
+            <a:r>
+              <a:t>    &lt;parent link="camera_link"/&gt;</a:t>
+            </a:r>
+            <a:br/>
+            <a:r>
+              <a:t>    &lt;child link="camera_optical_frame"/&gt;</a:t>
             </a:r>
           </a:p>
         </p:txBody>
@@ -11817,7 +11927,7 @@
         </p:nvSpPr>
         <p:spPr>
           <a:xfrm>
-            <a:off x="749808" y="6199632"/>
+            <a:off x="749808" y="6181344"/>
             <a:ext cx="10789920" cy="201168"/>
           </a:xfrm>
           <a:prstGeom prst="rect">
@@ -11843,7 +11953,7 @@
               </a:defRPr>
             </a:pPr>
             <a:r>
-              <a:t>파일 전체 10/10 · 이 슬라이드 다음에 같은 파일의 나머지 줄이 이어집니다.</a:t>
+              <a:t>파일 전체 10/11 · 이 슬라이드 다음에 같은 파일의 나머지 줄이 이어집니다.</a:t>
             </a:r>
           </a:p>
         </p:txBody>
@@ -11900,7 +12010,7 @@
               </a:defRPr>
             </a:pPr>
             <a:r>
-              <a:t>build → source → run 순서로 실행한다</a:t>
+              <a:t>파일을 계속 작성하고 저장한다 (11/11)</a:t>
             </a:r>
           </a:p>
         </p:txBody>
@@ -11939,7 +12049,7 @@
               </a:defRPr>
             </a:pPr>
             <a:r>
-              <a:t>새 파일 또는 수정 파일은 build와 source 뒤에만 실행 이름·설정에 반영됩니다.</a:t>
+              <a:t>~/agv_ws/src/agv_description/urdf/agv.urdf.xacro</a:t>
             </a:r>
           </a:p>
         </p:txBody>
@@ -12075,23 +12185,124 @@
               </a:defRPr>
             </a:pPr>
             <a:r>
-              <a:t>현재 단계 실행    |    현재 폴더 ~/agv_ws    |    현재 터미널</a:t>
-            </a:r>
-          </a:p>
-        </p:txBody>
-      </p:sp>
-      <p:sp>
-        <p:nvSpPr>
-          <p:cNvPr id="7" name="Rounded Rectangle 6"/>
+              <a:t>현재 단계 15/16    |    현재 폴더 ~/agv_ws    |    현재 터미널</a:t>
+            </a:r>
+          </a:p>
+        </p:txBody>
+      </p:sp>
+      <p:sp>
+        <p:nvSpPr>
+          <p:cNvPr id="7" name="TextBox 6"/>
+          <p:cNvSpPr txBox="1"/>
+          <p:nvPr/>
+        </p:nvSpPr>
+        <p:spPr>
+          <a:xfrm>
+            <a:off x="658368" y="1627632"/>
+            <a:ext cx="10972800" cy="256032"/>
+          </a:xfrm>
+          <a:prstGeom prst="rect">
+            <a:avLst/>
+          </a:prstGeom>
+          <a:noFill/>
+        </p:spPr>
+        <p:txBody>
+          <a:bodyPr wrap="square" lIns="73152" rIns="73152" tIns="36576" bIns="36576">
+            <a:spAutoFit/>
+          </a:bodyPr>
+          <a:lstStyle/>
+          <a:p>
+            <a:pPr algn="l">
+              <a:spcAft>
+                <a:spcPts val="0"/>
+              </a:spcAft>
+              <a:defRPr sz="1500" b="1">
+                <a:solidFill>
+                  <a:srgbClr val="122C4E"/>
+                </a:solidFill>
+                <a:latin typeface="Noto Sans CJK KR"/>
+              </a:defRPr>
+            </a:pPr>
+            <a:r>
+              <a:t>이번 단계: 파일의 전체 내용을 중간 생략 없이 작성합니다. 아래 줄 범위를 끝까지 입력하세요.</a:t>
+            </a:r>
+          </a:p>
+        </p:txBody>
+      </p:sp>
+      <p:sp>
+        <p:nvSpPr>
+          <p:cNvPr id="8" name="Rectangle 7"/>
           <p:cNvSpPr/>
           <p:nvPr/>
         </p:nvSpPr>
         <p:spPr>
           <a:xfrm>
-            <a:off x="658368" y="1700784"/>
-            <a:ext cx="10972800" cy="3182112"/>
-          </a:xfrm>
-          <a:prstGeom prst="roundRect">
+            <a:off x="658368" y="1956816"/>
+            <a:ext cx="10972800" cy="603504"/>
+          </a:xfrm>
+          <a:prstGeom prst="rect">
+            <a:avLst/>
+          </a:prstGeom>
+          <a:solidFill>
+            <a:srgbClr val="F4F7FB"/>
+          </a:solidFill>
+          <a:ln>
+            <a:solidFill>
+              <a:srgbClr val="F4F7FB"/>
+            </a:solidFill>
+          </a:ln>
+        </p:spPr>
+        <p:style>
+          <a:lnRef idx="1">
+            <a:schemeClr val="accent1"/>
+          </a:lnRef>
+          <a:fillRef idx="3">
+            <a:schemeClr val="accent1"/>
+          </a:fillRef>
+          <a:effectRef idx="2">
+            <a:schemeClr val="accent1"/>
+          </a:effectRef>
+          <a:fontRef idx="minor">
+            <a:schemeClr val="lt1"/>
+          </a:fontRef>
+        </p:style>
+        <p:txBody>
+          <a:bodyPr rtlCol="0" anchor="ctr" wrap="square" lIns="73152" rIns="73152" tIns="36576" bIns="36576"/>
+          <a:lstStyle/>
+          <a:p>
+            <a:pPr algn="l">
+              <a:spcAft>
+                <a:spcPts val="0"/>
+              </a:spcAft>
+              <a:defRPr sz="1400" b="0">
+                <a:solidFill>
+                  <a:srgbClr val="122C4E"/>
+                </a:solidFill>
+                <a:latin typeface="DejaVu Sans Mono"/>
+              </a:defRPr>
+            </a:pPr>
+            <a:r>
+              <a:t>파일 생성: mkdir -p ~/agv_ws/src/agv_description/urdf</a:t>
+            </a:r>
+            <a:br/>
+            <a:r>
+              <a:t>파일 열기: nano ~/agv_ws/src/agv_description/urdf/agv.urdf.xacro</a:t>
+            </a:r>
+          </a:p>
+        </p:txBody>
+      </p:sp>
+      <p:sp>
+        <p:nvSpPr>
+          <p:cNvPr id="9" name="Rectangle 8"/>
+          <p:cNvSpPr/>
+          <p:nvPr/>
+        </p:nvSpPr>
+        <p:spPr>
+          <a:xfrm>
+            <a:off x="658368" y="2706624"/>
+            <a:ext cx="10972800" cy="3364992"/>
+          </a:xfrm>
+          <a:prstGeom prst="rect">
             <a:avLst/>
           </a:prstGeom>
           <a:solidFill>
@@ -12118,14 +12329,14 @@
           </a:fontRef>
         </p:style>
         <p:txBody>
-          <a:bodyPr rtlCol="0" anchor="ctr" wrap="square" lIns="73152" rIns="73152" tIns="36576" bIns="36576"/>
+          <a:bodyPr rtlCol="0" anchor="ctr" wrap="square" lIns="164592" rIns="164592" tIns="109728" bIns="36576"/>
           <a:lstStyle/>
           <a:p>
             <a:pPr algn="l">
               <a:spcAft>
                 <a:spcPts val="0"/>
               </a:spcAft>
-              <a:defRPr sz="1600" b="0">
+              <a:defRPr sz="1400" b="0">
                 <a:solidFill>
                   <a:srgbClr val="FFFFFF"/>
                 </a:solidFill>
@@ -12133,29 +12344,50 @@
               </a:defRPr>
             </a:pPr>
             <a:r>
-              <a:t>source ~/agv_ws/install/setup.bash</a:t>
+              <a:t>    &lt;origin xyz="0 0 0" rpy="-1.5708 0 -1.5708"/&gt;</a:t>
             </a:r>
             <a:br/>
             <a:r>
-              <a:t>ros2 pkg prefix gz_ros2_control</a:t>
+              <a:t>  &lt;/joint&gt;</a:t>
             </a:r>
             <a:br/>
             <a:r>
-              <a:t>ros2 pkg prefix controller_manager</a:t>
-            </a:r>
-          </a:p>
-        </p:txBody>
-      </p:sp>
-      <p:sp>
-        <p:nvSpPr>
-          <p:cNvPr id="8" name="TextBox 7"/>
+              <a:t>  </a:t>
+            </a:r>
+            <a:br/>
+            <a:r>
+              <a:t>  </a:t>
+            </a:r>
+            <a:br/>
+            <a:r>
+              <a:t>  &lt;xacro:fixed_sensor name="imu" parent="base_link" xyz="0 0 ${wheel_radius +</a:t>
+            </a:r>
+            <a:br/>
+            <a:r>
+              <a:t>    body_height + 0.02}" rpy="0 0 0" size="0.03 0.03 0.02"/&gt;</a:t>
+            </a:r>
+            <a:br/>
+            <a:r>
+              <a:t>  </a:t>
+            </a:r>
+            <a:br/>
+            <a:br/>
+            <a:r>
+              <a:t>&lt;/robot&gt;</a:t>
+            </a:r>
+          </a:p>
+        </p:txBody>
+      </p:sp>
+      <p:sp>
+        <p:nvSpPr>
+          <p:cNvPr id="10" name="TextBox 9"/>
           <p:cNvSpPr txBox="1"/>
           <p:nvPr/>
         </p:nvSpPr>
         <p:spPr>
           <a:xfrm>
-            <a:off x="786384" y="5239512"/>
-            <a:ext cx="1261872" cy="237744"/>
+            <a:off x="749808" y="6181344"/>
+            <a:ext cx="10789920" cy="201168"/>
           </a:xfrm>
           <a:prstGeom prst="rect">
             <a:avLst/>
@@ -12172,54 +12404,15 @@
               <a:spcAft>
                 <a:spcPts val="0"/>
               </a:spcAft>
-              <a:defRPr sz="1800" b="1">
-                <a:solidFill>
-                  <a:srgbClr val="2A8B5A"/>
-                </a:solidFill>
-                <a:latin typeface="Noto Sans CJK KR"/>
-              </a:defRPr>
-            </a:pPr>
-            <a:r>
-              <a:t>확인 기준</a:t>
-            </a:r>
-          </a:p>
-        </p:txBody>
-      </p:sp>
-      <p:sp>
-        <p:nvSpPr>
-          <p:cNvPr id="9" name="TextBox 8"/>
-          <p:cNvSpPr txBox="1"/>
-          <p:nvPr/>
-        </p:nvSpPr>
-        <p:spPr>
-          <a:xfrm>
-            <a:off x="786384" y="5532120"/>
-            <a:ext cx="10469880" cy="420624"/>
-          </a:xfrm>
-          <a:prstGeom prst="rect">
-            <a:avLst/>
-          </a:prstGeom>
-          <a:noFill/>
-        </p:spPr>
-        <p:txBody>
-          <a:bodyPr wrap="square" lIns="73152" rIns="73152" tIns="36576" bIns="36576">
-            <a:spAutoFit/>
-          </a:bodyPr>
-          <a:lstStyle/>
-          <a:p>
-            <a:pPr algn="l">
-              <a:spcAft>
-                <a:spcPts val="0"/>
-              </a:spcAft>
-              <a:defRPr sz="1800" b="0">
-                <a:solidFill>
-                  <a:srgbClr val="122C4E"/>
-                </a:solidFill>
-                <a:latin typeface="Noto Sans CJK KR"/>
-              </a:defRPr>
-            </a:pPr>
-            <a:r>
-              <a:t>wheel joint 이름과 controller YAML의 좌·우 목록·반지름·wheel separation을 일치시킨다.</a:t>
+              <a:defRPr sz="1000" b="0">
+                <a:solidFill>
+                  <a:srgbClr val="5C6672"/>
+                </a:solidFill>
+                <a:latin typeface="Noto Sans CJK KR"/>
+              </a:defRPr>
+            </a:pPr>
+            <a:r>
+              <a:t>파일 전체 11/11 · 이 슬라이드 다음에 같은 파일의 나머지 줄이 이어집니다.</a:t>
             </a:r>
           </a:p>
         </p:txBody>
@@ -12276,7 +12469,7 @@
               </a:defRPr>
             </a:pPr>
             <a:r>
-              <a:t>정상 결과: 실제 환경에서 확인한 출력</a:t>
+              <a:t>build → source → run 순서로 실행한다</a:t>
             </a:r>
           </a:p>
         </p:txBody>
@@ -12315,7 +12508,7 @@
               </a:defRPr>
             </a:pPr>
             <a:r>
-              <a:t>실제 ROS 2 환경의 파일·패키지·구성 검증 로그</a:t>
+              <a:t>새 파일 또는 수정 파일은 build와 source 뒤에만 실행 이름·설정에 반영됩니다.</a:t>
             </a:r>
           </a:p>
         </p:txBody>
@@ -12398,40 +12591,140 @@
           </a:p>
         </p:txBody>
       </p:sp>
-      <p:pic>
-        <p:nvPicPr>
-          <p:cNvPr id="6" name="Picture 5" descr="validation_terminal.png"/>
-          <p:cNvPicPr>
-            <a:picLocks noChangeAspect="1"/>
-          </p:cNvPicPr>
-          <p:nvPr/>
-        </p:nvPicPr>
-        <p:blipFill>
-          <a:blip r:embed="rId2"/>
-          <a:stretch>
-            <a:fillRect/>
-          </a:stretch>
-        </p:blipFill>
-        <p:spPr>
-          <a:xfrm>
-            <a:off x="1246187" y="1353312"/>
-            <a:ext cx="9696576" cy="4800600"/>
-          </a:xfrm>
-          <a:prstGeom prst="rect">
-            <a:avLst/>
-          </a:prstGeom>
-        </p:spPr>
-      </p:pic>
-      <p:sp>
-        <p:nvSpPr>
-          <p:cNvPr id="7" name="TextBox 6"/>
+      <p:sp>
+        <p:nvSpPr>
+          <p:cNvPr id="6" name="Rectangle 5"/>
+          <p:cNvSpPr/>
+          <p:nvPr/>
+        </p:nvSpPr>
+        <p:spPr>
+          <a:xfrm>
+            <a:off x="566928" y="1188720"/>
+            <a:ext cx="11064240" cy="347472"/>
+          </a:xfrm>
+          <a:prstGeom prst="rect">
+            <a:avLst/>
+          </a:prstGeom>
+          <a:solidFill>
+            <a:srgbClr val="F4F7FB"/>
+          </a:solidFill>
+          <a:ln>
+            <a:solidFill>
+              <a:srgbClr val="F4F7FB"/>
+            </a:solidFill>
+          </a:ln>
+        </p:spPr>
+        <p:style>
+          <a:lnRef idx="1">
+            <a:schemeClr val="accent1"/>
+          </a:lnRef>
+          <a:fillRef idx="3">
+            <a:schemeClr val="accent1"/>
+          </a:fillRef>
+          <a:effectRef idx="2">
+            <a:schemeClr val="accent1"/>
+          </a:effectRef>
+          <a:fontRef idx="minor">
+            <a:schemeClr val="lt1"/>
+          </a:fontRef>
+        </p:style>
+        <p:txBody>
+          <a:bodyPr rtlCol="0" anchor="ctr" wrap="square" lIns="73152" rIns="73152" tIns="36576" bIns="36576"/>
+          <a:lstStyle/>
+          <a:p>
+            <a:pPr algn="l">
+              <a:spcAft>
+                <a:spcPts val="0"/>
+              </a:spcAft>
+              <a:defRPr sz="1300" b="1">
+                <a:solidFill>
+                  <a:srgbClr val="122C4E"/>
+                </a:solidFill>
+                <a:latin typeface="Noto Sans CJK KR"/>
+              </a:defRPr>
+            </a:pPr>
+            <a:r>
+              <a:t>현재 단계 실행    |    현재 폴더 ~/agv_ws    |    현재 터미널</a:t>
+            </a:r>
+          </a:p>
+        </p:txBody>
+      </p:sp>
+      <p:sp>
+        <p:nvSpPr>
+          <p:cNvPr id="7" name="Rounded Rectangle 6"/>
+          <p:cNvSpPr/>
+          <p:nvPr/>
+        </p:nvSpPr>
+        <p:spPr>
+          <a:xfrm>
+            <a:off x="658368" y="1700784"/>
+            <a:ext cx="10972800" cy="3182112"/>
+          </a:xfrm>
+          <a:prstGeom prst="roundRect">
+            <a:avLst/>
+          </a:prstGeom>
+          <a:solidFill>
+            <a:srgbClr val="1D232D"/>
+          </a:solidFill>
+          <a:ln>
+            <a:solidFill>
+              <a:srgbClr val="1D232D"/>
+            </a:solidFill>
+          </a:ln>
+        </p:spPr>
+        <p:style>
+          <a:lnRef idx="1">
+            <a:schemeClr val="accent1"/>
+          </a:lnRef>
+          <a:fillRef idx="3">
+            <a:schemeClr val="accent1"/>
+          </a:fillRef>
+          <a:effectRef idx="2">
+            <a:schemeClr val="accent1"/>
+          </a:effectRef>
+          <a:fontRef idx="minor">
+            <a:schemeClr val="lt1"/>
+          </a:fontRef>
+        </p:style>
+        <p:txBody>
+          <a:bodyPr rtlCol="0" anchor="ctr" wrap="square" lIns="73152" rIns="73152" tIns="36576" bIns="36576"/>
+          <a:lstStyle/>
+          <a:p>
+            <a:pPr algn="l">
+              <a:spcAft>
+                <a:spcPts val="0"/>
+              </a:spcAft>
+              <a:defRPr sz="1600" b="0">
+                <a:solidFill>
+                  <a:srgbClr val="FFFFFF"/>
+                </a:solidFill>
+                <a:latin typeface="DejaVu Sans Mono"/>
+              </a:defRPr>
+            </a:pPr>
+            <a:r>
+              <a:t>source ~/agv_ws/install/setup.bash</a:t>
+            </a:r>
+            <a:br/>
+            <a:r>
+              <a:t>ros2 pkg prefix gz_ros2_control</a:t>
+            </a:r>
+            <a:br/>
+            <a:r>
+              <a:t>ros2 pkg prefix controller_manager</a:t>
+            </a:r>
+          </a:p>
+        </p:txBody>
+      </p:sp>
+      <p:sp>
+        <p:nvSpPr>
+          <p:cNvPr id="8" name="TextBox 7"/>
           <p:cNvSpPr txBox="1"/>
           <p:nvPr/>
         </p:nvSpPr>
         <p:spPr>
           <a:xfrm>
-            <a:off x="777240" y="6217920"/>
-            <a:ext cx="10607040" cy="182880"/>
+            <a:off x="786384" y="5239512"/>
+            <a:ext cx="1261872" cy="237744"/>
           </a:xfrm>
           <a:prstGeom prst="rect">
             <a:avLst/>
@@ -12444,11 +12737,11 @@
           </a:bodyPr>
           <a:lstStyle/>
           <a:p>
-            <a:pPr algn="ctr">
-              <a:spcAft>
-                <a:spcPts val="0"/>
-              </a:spcAft>
-              <a:defRPr sz="1100" b="1">
+            <a:pPr algn="l">
+              <a:spcAft>
+                <a:spcPts val="0"/>
+              </a:spcAft>
+              <a:defRPr sz="1800" b="1">
                 <a:solidFill>
                   <a:srgbClr val="2A8B5A"/>
                 </a:solidFill>
@@ -12456,7 +12749,46 @@
               </a:defRPr>
             </a:pPr>
             <a:r>
-              <a:t>① 명령/설정  ② 정상 출력 또는 화면  ③ 다음 검증 명령으로 재확인</a:t>
+              <a:t>확인 기준</a:t>
+            </a:r>
+          </a:p>
+        </p:txBody>
+      </p:sp>
+      <p:sp>
+        <p:nvSpPr>
+          <p:cNvPr id="9" name="TextBox 8"/>
+          <p:cNvSpPr txBox="1"/>
+          <p:nvPr/>
+        </p:nvSpPr>
+        <p:spPr>
+          <a:xfrm>
+            <a:off x="786384" y="5532120"/>
+            <a:ext cx="10469880" cy="420624"/>
+          </a:xfrm>
+          <a:prstGeom prst="rect">
+            <a:avLst/>
+          </a:prstGeom>
+          <a:noFill/>
+        </p:spPr>
+        <p:txBody>
+          <a:bodyPr wrap="square" lIns="73152" rIns="73152" tIns="36576" bIns="36576">
+            <a:spAutoFit/>
+          </a:bodyPr>
+          <a:lstStyle/>
+          <a:p>
+            <a:pPr algn="l">
+              <a:spcAft>
+                <a:spcPts val="0"/>
+              </a:spcAft>
+              <a:defRPr sz="1800" b="0">
+                <a:solidFill>
+                  <a:srgbClr val="122C4E"/>
+                </a:solidFill>
+                <a:latin typeface="Noto Sans CJK KR"/>
+              </a:defRPr>
+            </a:pPr>
+            <a:r>
+              <a:t>wheel joint 이름과 controller YAML의 좌·우 목록·반지름·wheel separation을 일치시킨다.</a:t>
             </a:r>
           </a:p>
         </p:txBody>
@@ -12513,7 +12845,7 @@
               </a:defRPr>
             </a:pPr>
             <a:r>
-              <a:t>객관적 검증 명령으로 완료를 확인한다</a:t>
+              <a:t>정상 결과: 실제 환경에서 확인한 출력</a:t>
             </a:r>
           </a:p>
         </p:txBody>
@@ -12552,7 +12884,7 @@
               </a:defRPr>
             </a:pPr>
             <a:r>
-              <a:t>화면만 보지 말고 topic·frame·파일·parameter를 다시 확인합니다.</a:t>
+              <a:t>실제 ROS 2 환경의 파일·패키지·구성 검증 로그</a:t>
             </a:r>
           </a:p>
         </p:txBody>
@@ -12635,206 +12967,40 @@
           </a:p>
         </p:txBody>
       </p:sp>
-      <p:sp>
-        <p:nvSpPr>
-          <p:cNvPr id="6" name="Rectangle 5"/>
-          <p:cNvSpPr/>
-          <p:nvPr/>
-        </p:nvSpPr>
-        <p:spPr>
-          <a:xfrm>
-            <a:off x="566928" y="1188720"/>
-            <a:ext cx="11064240" cy="347472"/>
-          </a:xfrm>
-          <a:prstGeom prst="rect">
-            <a:avLst/>
-          </a:prstGeom>
-          <a:solidFill>
-            <a:srgbClr val="F4F7FB"/>
-          </a:solidFill>
-          <a:ln>
-            <a:solidFill>
-              <a:srgbClr val="F4F7FB"/>
-            </a:solidFill>
-          </a:ln>
-        </p:spPr>
-        <p:style>
-          <a:lnRef idx="1">
-            <a:schemeClr val="accent1"/>
-          </a:lnRef>
-          <a:fillRef idx="3">
-            <a:schemeClr val="accent1"/>
-          </a:fillRef>
-          <a:effectRef idx="2">
-            <a:schemeClr val="accent1"/>
-          </a:effectRef>
-          <a:fontRef idx="minor">
-            <a:schemeClr val="lt1"/>
-          </a:fontRef>
-        </p:style>
-        <p:txBody>
-          <a:bodyPr rtlCol="0" anchor="ctr" wrap="square" lIns="73152" rIns="73152" tIns="36576" bIns="36576"/>
-          <a:lstStyle/>
-          <a:p>
-            <a:pPr algn="l">
-              <a:spcAft>
-                <a:spcPts val="0"/>
-              </a:spcAft>
-              <a:defRPr sz="1300" b="1">
-                <a:solidFill>
-                  <a:srgbClr val="122C4E"/>
-                </a:solidFill>
-                <a:latin typeface="Noto Sans CJK KR"/>
-              </a:defRPr>
-            </a:pPr>
-            <a:r>
-              <a:t>현재 단계 검증    |    현재 폴더 ~/agv_ws    |    현재 터미널</a:t>
-            </a:r>
-          </a:p>
-        </p:txBody>
-      </p:sp>
-      <p:sp>
-        <p:nvSpPr>
-          <p:cNvPr id="7" name="Rounded Rectangle 6"/>
-          <p:cNvSpPr/>
-          <p:nvPr/>
-        </p:nvSpPr>
-        <p:spPr>
-          <a:xfrm>
-            <a:off x="658368" y="1755648"/>
-            <a:ext cx="10972800" cy="2148840"/>
-          </a:xfrm>
-          <a:prstGeom prst="roundRect">
-            <a:avLst/>
-          </a:prstGeom>
-          <a:solidFill>
-            <a:srgbClr val="1D232D"/>
-          </a:solidFill>
-          <a:ln>
-            <a:solidFill>
-              <a:srgbClr val="1D232D"/>
-            </a:solidFill>
-          </a:ln>
-        </p:spPr>
-        <p:style>
-          <a:lnRef idx="1">
-            <a:schemeClr val="accent1"/>
-          </a:lnRef>
-          <a:fillRef idx="3">
-            <a:schemeClr val="accent1"/>
-          </a:fillRef>
-          <a:effectRef idx="2">
-            <a:schemeClr val="accent1"/>
-          </a:effectRef>
-          <a:fontRef idx="minor">
-            <a:schemeClr val="lt1"/>
-          </a:fontRef>
-        </p:style>
-        <p:txBody>
-          <a:bodyPr rtlCol="0" anchor="ctr" wrap="square" lIns="73152" rIns="73152" tIns="36576" bIns="36576"/>
-          <a:lstStyle/>
-          <a:p>
-            <a:pPr algn="l">
-              <a:spcAft>
-                <a:spcPts val="0"/>
-              </a:spcAft>
-              <a:defRPr sz="1600" b="0">
-                <a:solidFill>
-                  <a:srgbClr val="FFFFFF"/>
-                </a:solidFill>
-                <a:latin typeface="DejaVu Sans Mono"/>
-              </a:defRPr>
-            </a:pPr>
-            <a:r>
-              <a:t>rg -n 'left_wheel_joint|right_wheel_joint|wheel_separation|wheel_radius' ~/agv_ws/src/agv_control/config/controllers.yaml</a:t>
-            </a:r>
-            <a:br/>
-            <a:r>
-              <a:t>rg -n 'left_wheel_joint|right_wheel_joint' ~/agv_ws/src/agv_gazebo/models/agv/model.sdf</a:t>
-            </a:r>
-          </a:p>
-        </p:txBody>
-      </p:sp>
-      <p:sp>
-        <p:nvSpPr>
-          <p:cNvPr id="8" name="Rounded Rectangle 7"/>
-          <p:cNvSpPr/>
-          <p:nvPr/>
-        </p:nvSpPr>
-        <p:spPr>
-          <a:xfrm>
-            <a:off x="658368" y="4206240"/>
-            <a:ext cx="10972800" cy="1554480"/>
-          </a:xfrm>
-          <a:prstGeom prst="roundRect">
-            <a:avLst/>
-          </a:prstGeom>
-          <a:solidFill>
-            <a:srgbClr val="F4F7FB"/>
-          </a:solidFill>
-          <a:ln>
-            <a:solidFill>
-              <a:srgbClr val="D1DFD5"/>
-            </a:solidFill>
-          </a:ln>
-        </p:spPr>
-        <p:style>
-          <a:lnRef idx="1">
-            <a:schemeClr val="accent1"/>
-          </a:lnRef>
-          <a:fillRef idx="3">
-            <a:schemeClr val="accent1"/>
-          </a:fillRef>
-          <a:effectRef idx="2">
-            <a:schemeClr val="accent1"/>
-          </a:effectRef>
-          <a:fontRef idx="minor">
-            <a:schemeClr val="lt1"/>
-          </a:fontRef>
-        </p:style>
-        <p:txBody>
-          <a:bodyPr rtlCol="0" anchor="ctr" wrap="square" lIns="73152" rIns="73152" tIns="36576" bIns="36576"/>
-          <a:lstStyle/>
-          <a:p>
-            <a:pPr algn="l">
-              <a:spcAft>
-                <a:spcPts val="0"/>
-              </a:spcAft>
-              <a:defRPr sz="1800" b="1">
-                <a:solidFill>
-                  <a:srgbClr val="2A8B5A"/>
-                </a:solidFill>
-                <a:latin typeface="Noto Sans CJK KR"/>
-              </a:defRPr>
-            </a:pPr>
-            <a:r>
-              <a:t>완료 체크</a:t>
-            </a:r>
-            <a:br/>
-            <a:r>
-              <a:t>□ 명령이 오류 없이 실행된다.</a:t>
-            </a:r>
-            <a:br/>
-            <a:r>
-              <a:t>□ 기대한 파일·topic·frame·parameter 이름이 보인다.</a:t>
-            </a:r>
-            <a:br/>
-            <a:r>
-              <a:t>□ 값의 단위와 방향을 한 문장으로 설명할 수 있다.</a:t>
-            </a:r>
-          </a:p>
-        </p:txBody>
-      </p:sp>
-      <p:sp>
-        <p:nvSpPr>
-          <p:cNvPr id="9" name="TextBox 8"/>
+      <p:pic>
+        <p:nvPicPr>
+          <p:cNvPr id="6" name="Picture 5" descr="validation_terminal.png"/>
+          <p:cNvPicPr>
+            <a:picLocks noChangeAspect="1"/>
+          </p:cNvPicPr>
+          <p:nvPr/>
+        </p:nvPicPr>
+        <p:blipFill>
+          <a:blip r:embed="rId2"/>
+          <a:stretch>
+            <a:fillRect/>
+          </a:stretch>
+        </p:blipFill>
+        <p:spPr>
+          <a:xfrm>
+            <a:off x="1246187" y="1353312"/>
+            <a:ext cx="9696576" cy="4800600"/>
+          </a:xfrm>
+          <a:prstGeom prst="rect">
+            <a:avLst/>
+          </a:prstGeom>
+        </p:spPr>
+      </p:pic>
+      <p:sp>
+        <p:nvSpPr>
+          <p:cNvPr id="7" name="TextBox 6"/>
           <p:cNvSpPr txBox="1"/>
           <p:nvPr/>
         </p:nvSpPr>
         <p:spPr>
           <a:xfrm>
-            <a:off x="731520" y="5989320"/>
-            <a:ext cx="10789920" cy="237744"/>
+            <a:off x="777240" y="6217920"/>
+            <a:ext cx="10607040" cy="182880"/>
           </a:xfrm>
           <a:prstGeom prst="rect">
             <a:avLst/>
@@ -12847,19 +13013,19 @@
           </a:bodyPr>
           <a:lstStyle/>
           <a:p>
-            <a:pPr algn="l">
-              <a:spcAft>
-                <a:spcPts val="0"/>
-              </a:spcAft>
-              <a:defRPr sz="1500" b="1">
-                <a:solidFill>
-                  <a:srgbClr val="122C4E"/>
-                </a:solidFill>
-                <a:latin typeface="Noto Sans CJK KR"/>
-              </a:defRPr>
-            </a:pPr>
-            <a:r>
-              <a:t>완료 조건: wheel joint 이름과 controller YAML의 좌·우 목록·반지름·wheel separation을 일치시킨다.</a:t>
+            <a:pPr algn="ctr">
+              <a:spcAft>
+                <a:spcPts val="0"/>
+              </a:spcAft>
+              <a:defRPr sz="1100" b="1">
+                <a:solidFill>
+                  <a:srgbClr val="2A8B5A"/>
+                </a:solidFill>
+                <a:latin typeface="Noto Sans CJK KR"/>
+              </a:defRPr>
+            </a:pPr>
+            <a:r>
+              <a:t>① 명령/설정  ② 정상 출력 또는 화면  ③ 다음 검증 명령으로 재확인</a:t>
             </a:r>
           </a:p>
         </p:txBody>
@@ -12916,7 +13082,7 @@
               </a:defRPr>
             </a:pPr>
             <a:r>
-              <a:t>막히면: 증상 → 우선 확인 → 재검증</a:t>
+              <a:t>객관적 검증 명령으로 완료를 확인한다</a:t>
             </a:r>
           </a:p>
         </p:txBody>
@@ -12955,7 +13121,7 @@
               </a:defRPr>
             </a:pPr>
             <a:r>
-              <a:t>오류 메시지를 숨기지 않고 같은 순서로 점검합니다.</a:t>
+              <a:t>화면만 보지 말고 topic·frame·파일·parameter를 다시 확인합니다.</a:t>
             </a:r>
           </a:p>
         </p:txBody>
@@ -13091,7 +13257,7 @@
               </a:defRPr>
             </a:pPr>
             <a:r>
-              <a:t>현재 단계 오류 대응    |    현재 폴더 ~/agv_ws    |    현재 터미널</a:t>
+              <a:t>현재 단계 검증    |    현재 폴더 ~/agv_ws    |    현재 터미널</a:t>
             </a:r>
           </a:p>
         </p:txBody>
@@ -13104,18 +13270,18 @@
         </p:nvSpPr>
         <p:spPr>
           <a:xfrm>
-            <a:off x="694944" y="1755648"/>
-            <a:ext cx="10972800" cy="1115568"/>
+            <a:off x="658368" y="1755648"/>
+            <a:ext cx="10972800" cy="2148840"/>
           </a:xfrm>
           <a:prstGeom prst="roundRect">
             <a:avLst/>
           </a:prstGeom>
           <a:solidFill>
-            <a:srgbClr val="FFF7F4"/>
+            <a:srgbClr val="1D232D"/>
           </a:solidFill>
           <a:ln>
             <a:solidFill>
-              <a:srgbClr val="EDBEB4"/>
+              <a:srgbClr val="1D232D"/>
             </a:solidFill>
           </a:ln>
         </p:spPr>
@@ -13134,115 +13300,50 @@
           </a:fontRef>
         </p:style>
         <p:txBody>
-          <a:bodyPr rtlCol="0" anchor="ctr"/>
-          <a:lstStyle/>
-          <a:p>
-            <a:pPr algn="ctr"/>
-          </a:p>
-        </p:txBody>
-      </p:sp>
-      <p:sp>
-        <p:nvSpPr>
-          <p:cNvPr id="8" name="TextBox 7"/>
-          <p:cNvSpPr txBox="1"/>
-          <p:nvPr/>
-        </p:nvSpPr>
-        <p:spPr>
-          <a:xfrm>
-            <a:off x="896112" y="1901952"/>
-            <a:ext cx="2926080" cy="274320"/>
-          </a:xfrm>
-          <a:prstGeom prst="rect">
-            <a:avLst/>
-          </a:prstGeom>
-          <a:noFill/>
-        </p:spPr>
-        <p:txBody>
-          <a:bodyPr wrap="square" lIns="73152" rIns="73152" tIns="36576" bIns="36576">
-            <a:spAutoFit/>
-          </a:bodyPr>
+          <a:bodyPr rtlCol="0" anchor="ctr" wrap="square" lIns="73152" rIns="73152" tIns="36576" bIns="36576"/>
           <a:lstStyle/>
           <a:p>
             <a:pPr algn="l">
               <a:spcAft>
                 <a:spcPts val="0"/>
               </a:spcAft>
-              <a:defRPr sz="1800" b="1">
-                <a:solidFill>
-                  <a:srgbClr val="BE3B3B"/>
-                </a:solidFill>
-                <a:latin typeface="Noto Sans CJK KR"/>
-              </a:defRPr>
-            </a:pPr>
-            <a:r>
-              <a:t>증상 1: controller가 inactive</a:t>
-            </a:r>
-          </a:p>
-        </p:txBody>
-      </p:sp>
-      <p:sp>
-        <p:nvSpPr>
-          <p:cNvPr id="9" name="TextBox 8"/>
-          <p:cNvSpPr txBox="1"/>
-          <p:nvPr/>
-        </p:nvSpPr>
-        <p:spPr>
-          <a:xfrm>
-            <a:off x="3794760" y="1883664"/>
-            <a:ext cx="7543800" cy="621792"/>
-          </a:xfrm>
-          <a:prstGeom prst="rect">
-            <a:avLst/>
-          </a:prstGeom>
-          <a:noFill/>
-        </p:spPr>
-        <p:txBody>
-          <a:bodyPr wrap="square" lIns="73152" rIns="73152" tIns="36576" bIns="36576">
-            <a:spAutoFit/>
-          </a:bodyPr>
-          <a:lstStyle/>
-          <a:p>
-            <a:pPr algn="l">
-              <a:spcAft>
-                <a:spcPts val="0"/>
-              </a:spcAft>
               <a:defRPr sz="1600" b="0">
                 <a:solidFill>
-                  <a:srgbClr val="122C4E"/>
-                </a:solidFill>
-                <a:latin typeface="Noto Sans CJK KR"/>
-              </a:defRPr>
-            </a:pPr>
-            <a:r>
-              <a:t>우선 확인: load/activate 순서와 YAML controller 이름을 확인한다.</a:t>
+                  <a:srgbClr val="FFFFFF"/>
+                </a:solidFill>
+                <a:latin typeface="DejaVu Sans Mono"/>
+              </a:defRPr>
+            </a:pPr>
+            <a:r>
+              <a:t>rg -n 'left_wheel_joint|right_wheel_joint|wheel_separation|wheel_radius' ~/agv_ws/src/agv_control/config/controllers.yaml</a:t>
             </a:r>
             <a:br/>
             <a:r>
-              <a:t>수정 후: rg -n 'left_wheel_joint|right_wheel_joint|wheel_separation|wheel_radius' ~/agv_ws/src/agv_control/config/controllers.yaml</a:t>
-            </a:r>
-          </a:p>
-        </p:txBody>
-      </p:sp>
-      <p:sp>
-        <p:nvSpPr>
-          <p:cNvPr id="10" name="Rounded Rectangle 9"/>
+              <a:t>rg -n 'left_wheel_joint|right_wheel_joint' ~/agv_ws/src/agv_gazebo/models/agv/model.sdf</a:t>
+            </a:r>
+          </a:p>
+        </p:txBody>
+      </p:sp>
+      <p:sp>
+        <p:nvSpPr>
+          <p:cNvPr id="8" name="Rounded Rectangle 7"/>
           <p:cNvSpPr/>
           <p:nvPr/>
         </p:nvSpPr>
         <p:spPr>
           <a:xfrm>
-            <a:off x="694944" y="3172968"/>
-            <a:ext cx="10972800" cy="1115568"/>
+            <a:off x="658368" y="4206240"/>
+            <a:ext cx="10972800" cy="1554480"/>
           </a:xfrm>
           <a:prstGeom prst="roundRect">
             <a:avLst/>
           </a:prstGeom>
           <a:solidFill>
-            <a:srgbClr val="FFF7F4"/>
+            <a:srgbClr val="F4F7FB"/>
           </a:solidFill>
           <a:ln>
             <a:solidFill>
-              <a:srgbClr val="EDBEB4"/>
+              <a:srgbClr val="D1DFD5"/>
             </a:solidFill>
           </a:ln>
         </p:spPr>
@@ -13261,23 +13362,48 @@
           </a:fontRef>
         </p:style>
         <p:txBody>
-          <a:bodyPr rtlCol="0" anchor="ctr"/>
-          <a:lstStyle/>
-          <a:p>
-            <a:pPr algn="ctr"/>
-          </a:p>
-        </p:txBody>
-      </p:sp>
-      <p:sp>
-        <p:nvSpPr>
-          <p:cNvPr id="11" name="TextBox 10"/>
+          <a:bodyPr rtlCol="0" anchor="ctr" wrap="square" lIns="73152" rIns="73152" tIns="36576" bIns="36576"/>
+          <a:lstStyle/>
+          <a:p>
+            <a:pPr algn="l">
+              <a:spcAft>
+                <a:spcPts val="0"/>
+              </a:spcAft>
+              <a:defRPr sz="1800" b="1">
+                <a:solidFill>
+                  <a:srgbClr val="2A8B5A"/>
+                </a:solidFill>
+                <a:latin typeface="Noto Sans CJK KR"/>
+              </a:defRPr>
+            </a:pPr>
+            <a:r>
+              <a:t>완료 체크</a:t>
+            </a:r>
+            <a:br/>
+            <a:r>
+              <a:t>□ 명령이 오류 없이 실행된다.</a:t>
+            </a:r>
+            <a:br/>
+            <a:r>
+              <a:t>□ 기대한 파일·topic·frame·parameter 이름이 보인다.</a:t>
+            </a:r>
+            <a:br/>
+            <a:r>
+              <a:t>□ 값의 단위와 방향을 한 문장으로 설명할 수 있다.</a:t>
+            </a:r>
+          </a:p>
+        </p:txBody>
+      </p:sp>
+      <p:sp>
+        <p:nvSpPr>
+          <p:cNvPr id="9" name="TextBox 8"/>
           <p:cNvSpPr txBox="1"/>
           <p:nvPr/>
         </p:nvSpPr>
         <p:spPr>
           <a:xfrm>
-            <a:off x="896112" y="3319272"/>
-            <a:ext cx="2926080" cy="274320"/>
+            <a:off x="731520" y="5989320"/>
+            <a:ext cx="10789920" cy="237744"/>
           </a:xfrm>
           <a:prstGeom prst="rect">
             <a:avLst/>
@@ -13294,46 +13420,7 @@
               <a:spcAft>
                 <a:spcPts val="0"/>
               </a:spcAft>
-              <a:defRPr sz="1800" b="1">
-                <a:solidFill>
-                  <a:srgbClr val="BE3B3B"/>
-                </a:solidFill>
-                <a:latin typeface="Noto Sans CJK KR"/>
-              </a:defRPr>
-            </a:pPr>
-            <a:r>
-              <a:t>증상 2: joint를 찾을 수 없음</a:t>
-            </a:r>
-          </a:p>
-        </p:txBody>
-      </p:sp>
-      <p:sp>
-        <p:nvSpPr>
-          <p:cNvPr id="12" name="TextBox 11"/>
-          <p:cNvSpPr txBox="1"/>
-          <p:nvPr/>
-        </p:nvSpPr>
-        <p:spPr>
-          <a:xfrm>
-            <a:off x="3794760" y="3300984"/>
-            <a:ext cx="7543800" cy="621792"/>
-          </a:xfrm>
-          <a:prstGeom prst="rect">
-            <a:avLst/>
-          </a:prstGeom>
-          <a:noFill/>
-        </p:spPr>
-        <p:txBody>
-          <a:bodyPr wrap="square" lIns="73152" rIns="73152" tIns="36576" bIns="36576">
-            <a:spAutoFit/>
-          </a:bodyPr>
-          <a:lstStyle/>
-          <a:p>
-            <a:pPr algn="l">
-              <a:spcAft>
-                <a:spcPts val="0"/>
-              </a:spcAft>
-              <a:defRPr sz="1600" b="0">
+              <a:defRPr sz="1500" b="1">
                 <a:solidFill>
                   <a:srgbClr val="122C4E"/>
                 </a:solidFill>
@@ -13341,50 +13428,7 @@
               </a:defRPr>
             </a:pPr>
             <a:r>
-              <a:t>우선 확인: URDF/SDF joint 이름과 controller 목록을 한 글자씩 비교한다.</a:t>
-            </a:r>
-            <a:br/>
-            <a:r>
-              <a:t>수정 후: rg -n 'left_wheel_joint|right_wheel_joint|wheel_separation|wheel_radius' ~/agv_ws/src/agv_control/config/controllers.yaml</a:t>
-            </a:r>
-          </a:p>
-        </p:txBody>
-      </p:sp>
-      <p:sp>
-        <p:nvSpPr>
-          <p:cNvPr id="13" name="TextBox 12"/>
-          <p:cNvSpPr txBox="1"/>
-          <p:nvPr/>
-        </p:nvSpPr>
-        <p:spPr>
-          <a:xfrm>
-            <a:off x="822960" y="5102352"/>
-            <a:ext cx="10607040" cy="402336"/>
-          </a:xfrm>
-          <a:prstGeom prst="rect">
-            <a:avLst/>
-          </a:prstGeom>
-          <a:noFill/>
-        </p:spPr>
-        <p:txBody>
-          <a:bodyPr wrap="square" lIns="73152" rIns="73152" tIns="36576" bIns="36576">
-            <a:spAutoFit/>
-          </a:bodyPr>
-          <a:lstStyle/>
-          <a:p>
-            <a:pPr algn="ctr">
-              <a:spcAft>
-                <a:spcPts val="0"/>
-              </a:spcAft>
-              <a:defRPr sz="1800" b="1">
-                <a:solidFill>
-                  <a:srgbClr val="DB7E22"/>
-                </a:solidFill>
-                <a:latin typeface="Noto Sans CJK KR"/>
-              </a:defRPr>
-            </a:pPr>
-            <a:r>
-              <a:t>공통 순서: ① 현재 폴더 ② source ③ 파일 경로 ④ 이름/타입/단위 ⑤ build·source 후 재실행</a:t>
+              <a:t>완료 조건: wheel joint 이름과 controller YAML의 좌·우 목록·반지름·wheel separation을 일치시킨다.</a:t>
             </a:r>
           </a:p>
         </p:txBody>
@@ -13441,7 +13485,7 @@
               </a:defRPr>
             </a:pPr>
             <a:r>
-              <a:t>미니 실습: 값 하나를 바꾸고 결과를 비교한다</a:t>
+              <a:t>막히면: 증상 → 우선 확인 → 재검증</a:t>
             </a:r>
           </a:p>
         </p:txBody>
@@ -13480,7 +13524,7 @@
               </a:defRPr>
             </a:pPr>
             <a:r>
-              <a:t>정상 결과를 만든 뒤에는 한 번에 하나의 값만 바꿉니다.</a:t>
+              <a:t>오류 메시지를 숨기지 않고 같은 순서로 점검합니다.</a:t>
             </a:r>
           </a:p>
         </p:txBody>
@@ -13616,7 +13660,7 @@
               </a:defRPr>
             </a:pPr>
             <a:r>
-              <a:t>현재 단계 미니 실습    |    현재 폴더 ~/agv_ws    |    현재 터미널</a:t>
+              <a:t>현재 단계 오류 대응    |    현재 폴더 ~/agv_ws    |    현재 터미널</a:t>
             </a:r>
           </a:p>
         </p:txBody>
@@ -13629,18 +13673,18 @@
         </p:nvSpPr>
         <p:spPr>
           <a:xfrm>
-            <a:off x="749808" y="1874519"/>
-            <a:ext cx="10652760" cy="1993392"/>
+            <a:off x="694944" y="1755648"/>
+            <a:ext cx="10972800" cy="1115568"/>
           </a:xfrm>
           <a:prstGeom prst="roundRect">
             <a:avLst/>
           </a:prstGeom>
           <a:solidFill>
-            <a:srgbClr val="FFF8EB"/>
+            <a:srgbClr val="FFF7F4"/>
           </a:solidFill>
           <a:ln>
             <a:solidFill>
-              <a:srgbClr val="ECC680"/>
+              <a:srgbClr val="EDBEB4"/>
             </a:solidFill>
           </a:ln>
         </p:spPr>
@@ -13659,23 +13703,10 @@
           </a:fontRef>
         </p:style>
         <p:txBody>
-          <a:bodyPr rtlCol="0" anchor="ctr" wrap="square" lIns="73152" rIns="73152" tIns="36576" bIns="36576"/>
-          <a:lstStyle/>
-          <a:p>
-            <a:pPr algn="ctr">
-              <a:spcAft>
-                <a:spcPts val="0"/>
-              </a:spcAft>
-              <a:defRPr sz="2300" b="1">
-                <a:solidFill>
-                  <a:srgbClr val="122C4E"/>
-                </a:solidFill>
-                <a:latin typeface="Noto Sans CJK KR"/>
-              </a:defRPr>
-            </a:pPr>
-            <a:r>
-              <a:t>controllers.yaml의 wheel_radius와 model.sdf의 wheel_radius가 모두 0.08 m인지 확인하고 한쪽만 바꿨을 때 생길 오차를 설명한다.</a:t>
-            </a:r>
+          <a:bodyPr rtlCol="0" anchor="ctr"/>
+          <a:lstStyle/>
+          <a:p>
+            <a:pPr algn="ctr"/>
           </a:p>
         </p:txBody>
       </p:sp>
@@ -13687,8 +13718,8 @@
         </p:nvSpPr>
         <p:spPr>
           <a:xfrm>
-            <a:off x="877824" y="4590288"/>
-            <a:ext cx="10241280" cy="594360"/>
+            <a:off x="896112" y="1901952"/>
+            <a:ext cx="2926080" cy="274320"/>
           </a:xfrm>
           <a:prstGeom prst="rect">
             <a:avLst/>
@@ -13701,11 +13732,220 @@
           </a:bodyPr>
           <a:lstStyle/>
           <a:p>
+            <a:pPr algn="l">
+              <a:spcAft>
+                <a:spcPts val="0"/>
+              </a:spcAft>
+              <a:defRPr sz="1800" b="1">
+                <a:solidFill>
+                  <a:srgbClr val="BE3B3B"/>
+                </a:solidFill>
+                <a:latin typeface="Noto Sans CJK KR"/>
+              </a:defRPr>
+            </a:pPr>
+            <a:r>
+              <a:t>증상 1: controller가 inactive</a:t>
+            </a:r>
+          </a:p>
+        </p:txBody>
+      </p:sp>
+      <p:sp>
+        <p:nvSpPr>
+          <p:cNvPr id="9" name="TextBox 8"/>
+          <p:cNvSpPr txBox="1"/>
+          <p:nvPr/>
+        </p:nvSpPr>
+        <p:spPr>
+          <a:xfrm>
+            <a:off x="3794760" y="1883664"/>
+            <a:ext cx="7543800" cy="621792"/>
+          </a:xfrm>
+          <a:prstGeom prst="rect">
+            <a:avLst/>
+          </a:prstGeom>
+          <a:noFill/>
+        </p:spPr>
+        <p:txBody>
+          <a:bodyPr wrap="square" lIns="73152" rIns="73152" tIns="36576" bIns="36576">
+            <a:spAutoFit/>
+          </a:bodyPr>
+          <a:lstStyle/>
+          <a:p>
+            <a:pPr algn="l">
+              <a:spcAft>
+                <a:spcPts val="0"/>
+              </a:spcAft>
+              <a:defRPr sz="1600" b="0">
+                <a:solidFill>
+                  <a:srgbClr val="122C4E"/>
+                </a:solidFill>
+                <a:latin typeface="Noto Sans CJK KR"/>
+              </a:defRPr>
+            </a:pPr>
+            <a:r>
+              <a:t>우선 확인: load/activate 순서와 YAML controller 이름을 확인한다.</a:t>
+            </a:r>
+            <a:br/>
+            <a:r>
+              <a:t>수정 후: rg -n 'left_wheel_joint|right_wheel_joint|wheel_separation|wheel_radius' ~/agv_ws/src/agv_control/config/controllers.yaml</a:t>
+            </a:r>
+          </a:p>
+        </p:txBody>
+      </p:sp>
+      <p:sp>
+        <p:nvSpPr>
+          <p:cNvPr id="10" name="Rounded Rectangle 9"/>
+          <p:cNvSpPr/>
+          <p:nvPr/>
+        </p:nvSpPr>
+        <p:spPr>
+          <a:xfrm>
+            <a:off x="694944" y="3172968"/>
+            <a:ext cx="10972800" cy="1115568"/>
+          </a:xfrm>
+          <a:prstGeom prst="roundRect">
+            <a:avLst/>
+          </a:prstGeom>
+          <a:solidFill>
+            <a:srgbClr val="FFF7F4"/>
+          </a:solidFill>
+          <a:ln>
+            <a:solidFill>
+              <a:srgbClr val="EDBEB4"/>
+            </a:solidFill>
+          </a:ln>
+        </p:spPr>
+        <p:style>
+          <a:lnRef idx="1">
+            <a:schemeClr val="accent1"/>
+          </a:lnRef>
+          <a:fillRef idx="3">
+            <a:schemeClr val="accent1"/>
+          </a:fillRef>
+          <a:effectRef idx="2">
+            <a:schemeClr val="accent1"/>
+          </a:effectRef>
+          <a:fontRef idx="minor">
+            <a:schemeClr val="lt1"/>
+          </a:fontRef>
+        </p:style>
+        <p:txBody>
+          <a:bodyPr rtlCol="0" anchor="ctr"/>
+          <a:lstStyle/>
+          <a:p>
+            <a:pPr algn="ctr"/>
+          </a:p>
+        </p:txBody>
+      </p:sp>
+      <p:sp>
+        <p:nvSpPr>
+          <p:cNvPr id="11" name="TextBox 10"/>
+          <p:cNvSpPr txBox="1"/>
+          <p:nvPr/>
+        </p:nvSpPr>
+        <p:spPr>
+          <a:xfrm>
+            <a:off x="896112" y="3319272"/>
+            <a:ext cx="2926080" cy="274320"/>
+          </a:xfrm>
+          <a:prstGeom prst="rect">
+            <a:avLst/>
+          </a:prstGeom>
+          <a:noFill/>
+        </p:spPr>
+        <p:txBody>
+          <a:bodyPr wrap="square" lIns="73152" rIns="73152" tIns="36576" bIns="36576">
+            <a:spAutoFit/>
+          </a:bodyPr>
+          <a:lstStyle/>
+          <a:p>
+            <a:pPr algn="l">
+              <a:spcAft>
+                <a:spcPts val="0"/>
+              </a:spcAft>
+              <a:defRPr sz="1800" b="1">
+                <a:solidFill>
+                  <a:srgbClr val="BE3B3B"/>
+                </a:solidFill>
+                <a:latin typeface="Noto Sans CJK KR"/>
+              </a:defRPr>
+            </a:pPr>
+            <a:r>
+              <a:t>증상 2: joint를 찾을 수 없음</a:t>
+            </a:r>
+          </a:p>
+        </p:txBody>
+      </p:sp>
+      <p:sp>
+        <p:nvSpPr>
+          <p:cNvPr id="12" name="TextBox 11"/>
+          <p:cNvSpPr txBox="1"/>
+          <p:nvPr/>
+        </p:nvSpPr>
+        <p:spPr>
+          <a:xfrm>
+            <a:off x="3794760" y="3300984"/>
+            <a:ext cx="7543800" cy="621792"/>
+          </a:xfrm>
+          <a:prstGeom prst="rect">
+            <a:avLst/>
+          </a:prstGeom>
+          <a:noFill/>
+        </p:spPr>
+        <p:txBody>
+          <a:bodyPr wrap="square" lIns="73152" rIns="73152" tIns="36576" bIns="36576">
+            <a:spAutoFit/>
+          </a:bodyPr>
+          <a:lstStyle/>
+          <a:p>
+            <a:pPr algn="l">
+              <a:spcAft>
+                <a:spcPts val="0"/>
+              </a:spcAft>
+              <a:defRPr sz="1600" b="0">
+                <a:solidFill>
+                  <a:srgbClr val="122C4E"/>
+                </a:solidFill>
+                <a:latin typeface="Noto Sans CJK KR"/>
+              </a:defRPr>
+            </a:pPr>
+            <a:r>
+              <a:t>우선 확인: URDF/SDF joint 이름과 controller 목록을 한 글자씩 비교한다.</a:t>
+            </a:r>
+            <a:br/>
+            <a:r>
+              <a:t>수정 후: rg -n 'left_wheel_joint|right_wheel_joint|wheel_separation|wheel_radius' ~/agv_ws/src/agv_control/config/controllers.yaml</a:t>
+            </a:r>
+          </a:p>
+        </p:txBody>
+      </p:sp>
+      <p:sp>
+        <p:nvSpPr>
+          <p:cNvPr id="13" name="TextBox 12"/>
+          <p:cNvSpPr txBox="1"/>
+          <p:nvPr/>
+        </p:nvSpPr>
+        <p:spPr>
+          <a:xfrm>
+            <a:off x="822960" y="5102352"/>
+            <a:ext cx="10607040" cy="402336"/>
+          </a:xfrm>
+          <a:prstGeom prst="rect">
+            <a:avLst/>
+          </a:prstGeom>
+          <a:noFill/>
+        </p:spPr>
+        <p:txBody>
+          <a:bodyPr wrap="square" lIns="73152" rIns="73152" tIns="36576" bIns="36576">
+            <a:spAutoFit/>
+          </a:bodyPr>
+          <a:lstStyle/>
+          <a:p>
             <a:pPr algn="ctr">
               <a:spcAft>
                 <a:spcPts val="0"/>
               </a:spcAft>
-              <a:defRPr sz="1900" b="1">
+              <a:defRPr sz="1800" b="1">
                 <a:solidFill>
                   <a:srgbClr val="DB7E22"/>
                 </a:solidFill>
@@ -13713,7 +13953,7 @@
               </a:defRPr>
             </a:pPr>
             <a:r>
-              <a:t>기록할 것: 바꾼 값(단위) · 기대한 변화 · 실제 출력/화면 · 원래 값으로 되돌린 결과</a:t>
+              <a:t>공통 순서: ① 현재 폴더 ② source ③ 파일 경로 ④ 이름/타입/단위 ⑤ build·source 후 재실행</a:t>
             </a:r>
           </a:p>
         </p:txBody>
@@ -13770,7 +14010,7 @@
               </a:defRPr>
             </a:pPr>
             <a:r>
-              <a:t>체크포인트를 저장하고 다음 모듈로 넘긴다</a:t>
+              <a:t>미니 실습: 값 하나를 바꾸고 결과를 비교한다</a:t>
             </a:r>
           </a:p>
         </p:txBody>
@@ -13809,7 +14049,7 @@
               </a:defRPr>
             </a:pPr>
             <a:r>
-              <a:t>현재 Complete는 다음 Starter의 기준선입니다.</a:t>
+              <a:t>정상 결과를 만든 뒤에는 한 번에 하나의 값만 바꿉니다.</a:t>
             </a:r>
           </a:p>
         </p:txBody>
@@ -13945,7 +14185,7 @@
               </a:defRPr>
             </a:pPr>
             <a:r>
-              <a:t>현재 단계 체크포인트    |    현재 폴더 ~/agv_ws    |    현재 터미널</a:t>
+              <a:t>현재 단계 미니 실습    |    현재 폴더 ~/agv_ws    |    현재 터미널</a:t>
             </a:r>
           </a:p>
         </p:txBody>
@@ -13958,18 +14198,18 @@
         </p:nvSpPr>
         <p:spPr>
           <a:xfrm>
-            <a:off x="685800" y="1737360"/>
-            <a:ext cx="10972800" cy="3611880"/>
+            <a:off x="749808" y="1874519"/>
+            <a:ext cx="10652760" cy="1993392"/>
           </a:xfrm>
           <a:prstGeom prst="roundRect">
             <a:avLst/>
           </a:prstGeom>
           <a:solidFill>
-            <a:srgbClr val="F4F7FB"/>
+            <a:srgbClr val="FFF8EB"/>
           </a:solidFill>
           <a:ln>
             <a:solidFill>
-              <a:srgbClr val="D2DCE8"/>
+              <a:srgbClr val="ECC680"/>
             </a:solidFill>
           </a:ln>
         </p:spPr>
@@ -13988,10 +14228,23 @@
           </a:fontRef>
         </p:style>
         <p:txBody>
-          <a:bodyPr rtlCol="0" anchor="ctr"/>
-          <a:lstStyle/>
-          <a:p>
-            <a:pPr algn="ctr"/>
+          <a:bodyPr rtlCol="0" anchor="ctr" wrap="square" lIns="73152" rIns="73152" tIns="36576" bIns="36576"/>
+          <a:lstStyle/>
+          <a:p>
+            <a:pPr algn="ctr">
+              <a:spcAft>
+                <a:spcPts val="0"/>
+              </a:spcAft>
+              <a:defRPr sz="2300" b="1">
+                <a:solidFill>
+                  <a:srgbClr val="122C4E"/>
+                </a:solidFill>
+                <a:latin typeface="Noto Sans CJK KR"/>
+              </a:defRPr>
+            </a:pPr>
+            <a:r>
+              <a:t>controllers.yaml의 wheel_radius와 model.sdf의 wheel_radius가 모두 0.08 m인지 확인하고 한쪽만 바꿨을 때 생길 오차를 설명한다.</a:t>
+            </a:r>
           </a:p>
         </p:txBody>
       </p:sp>
@@ -14003,111 +14256,8 @@
         </p:nvSpPr>
         <p:spPr>
           <a:xfrm>
-            <a:off x="896112" y="1993392"/>
-            <a:ext cx="10332720" cy="2971800"/>
-          </a:xfrm>
-          <a:prstGeom prst="rect">
-            <a:avLst/>
-          </a:prstGeom>
-          <a:noFill/>
-        </p:spPr>
-        <p:txBody>
-          <a:bodyPr wrap="square" lIns="109728" rIns="109728">
-            <a:spAutoFit/>
-          </a:bodyPr>
-          <a:lstStyle/>
-          <a:p>
-            <a:pPr>
-              <a:spcAft>
-                <a:spcPts val="800"/>
-              </a:spcAft>
-              <a:defRPr sz="1800">
-                <a:solidFill>
-                  <a:srgbClr val="122C4E"/>
-                </a:solidFill>
-                <a:latin typeface="Noto Sans CJK KR"/>
-              </a:defRPr>
-            </a:pPr>
-            <a:r>
-              <a:t>• □ 완료 화면: wheel joint 이름과 controller YAML의 좌·우 목록·반지름·wheel separation을 일치시킨다.</a:t>
-            </a:r>
-          </a:p>
-          <a:p>
-            <a:pPr>
-              <a:spcAft>
-                <a:spcPts val="800"/>
-              </a:spcAft>
-              <a:defRPr sz="1800">
-                <a:solidFill>
-                  <a:srgbClr val="122C4E"/>
-                </a:solidFill>
-                <a:latin typeface="Noto Sans CJK KR"/>
-              </a:defRPr>
-            </a:pPr>
-            <a:r>
-              <a:t>• □ Complete 파일: blocks/E_autonomy_logic/M16_ros2_control/complete/</a:t>
-            </a:r>
-          </a:p>
-          <a:p>
-            <a:pPr>
-              <a:spcAft>
-                <a:spcPts val="800"/>
-              </a:spcAft>
-              <a:defRPr sz="1800">
-                <a:solidFill>
-                  <a:srgbClr val="122C4E"/>
-                </a:solidFill>
-                <a:latin typeface="Noto Sans CJK KR"/>
-              </a:defRPr>
-            </a:pPr>
-            <a:r>
-              <a:t>• □ 정상 로그·캡처: logs/validation.log, screenshots/validation_terminal.png</a:t>
-            </a:r>
-          </a:p>
-          <a:p>
-            <a:pPr>
-              <a:spcAft>
-                <a:spcPts val="800"/>
-              </a:spcAft>
-              <a:defRPr sz="1800">
-                <a:solidFill>
-                  <a:srgbClr val="122C4E"/>
-                </a:solidFill>
-                <a:latin typeface="Noto Sans CJK KR"/>
-              </a:defRPr>
-            </a:pPr>
-            <a:r>
-              <a:t>• □ 버전 식별: CHECKSUM_or_TAG.txt의 SHA-256 manifest</a:t>
-            </a:r>
-          </a:p>
-          <a:p>
-            <a:pPr>
-              <a:spcAft>
-                <a:spcPts val="800"/>
-              </a:spcAft>
-              <a:defRPr sz="1800">
-                <a:solidFill>
-                  <a:srgbClr val="122C4E"/>
-                </a:solidFill>
-                <a:latin typeface="Noto Sans CJK KR"/>
-              </a:defRPr>
-            </a:pPr>
-            <a:r>
-              <a:t>• □ 다음 시작 조건: M17~M20 autonomy command</a:t>
-            </a:r>
-          </a:p>
-        </p:txBody>
-      </p:sp>
-      <p:sp>
-        <p:nvSpPr>
-          <p:cNvPr id="9" name="TextBox 8"/>
-          <p:cNvSpPr txBox="1"/>
-          <p:nvPr/>
-        </p:nvSpPr>
-        <p:spPr>
-          <a:xfrm>
-            <a:off x="868680" y="5596128"/>
-            <a:ext cx="10515600" cy="338328"/>
+            <a:off x="877824" y="4590288"/>
+            <a:ext cx="10241280" cy="594360"/>
           </a:xfrm>
           <a:prstGeom prst="rect">
             <a:avLst/>
@@ -14124,15 +14274,15 @@
               <a:spcAft>
                 <a:spcPts val="0"/>
               </a:spcAft>
-              <a:defRPr sz="1700" b="1">
-                <a:solidFill>
-                  <a:srgbClr val="2A8B5A"/>
-                </a:solidFill>
-                <a:latin typeface="Noto Sans CJK KR"/>
-              </a:defRPr>
-            </a:pPr>
-            <a:r>
-              <a:t>다음 모듈을 시작하기 전, 이 슬라이드의 Complete와 다음 모듈의 Starter를 비교합니다.</a:t>
+              <a:defRPr sz="1900" b="1">
+                <a:solidFill>
+                  <a:srgbClr val="DB7E22"/>
+                </a:solidFill>
+                <a:latin typeface="Noto Sans CJK KR"/>
+              </a:defRPr>
+            </a:pPr>
+            <a:r>
+              <a:t>기록할 것: 바꾼 값(단위) · 기대한 변화 · 실제 출력/화면 · 원래 값으로 되돌린 결과</a:t>
             </a:r>
           </a:p>
         </p:txBody>
@@ -14189,6 +14339,425 @@
               </a:defRPr>
             </a:pPr>
             <a:r>
+              <a:t>체크포인트를 저장하고 다음 모듈로 넘긴다</a:t>
+            </a:r>
+          </a:p>
+        </p:txBody>
+      </p:sp>
+      <p:sp>
+        <p:nvSpPr>
+          <p:cNvPr id="3" name="TextBox 2"/>
+          <p:cNvSpPr txBox="1"/>
+          <p:nvPr/>
+        </p:nvSpPr>
+        <p:spPr>
+          <a:xfrm>
+            <a:off x="603504" y="859536"/>
+            <a:ext cx="10698480" cy="292608"/>
+          </a:xfrm>
+          <a:prstGeom prst="rect">
+            <a:avLst/>
+          </a:prstGeom>
+          <a:noFill/>
+        </p:spPr>
+        <p:txBody>
+          <a:bodyPr wrap="square" lIns="73152" rIns="73152" tIns="36576" bIns="36576">
+            <a:spAutoFit/>
+          </a:bodyPr>
+          <a:lstStyle/>
+          <a:p>
+            <a:pPr algn="l">
+              <a:spcAft>
+                <a:spcPts val="0"/>
+              </a:spcAft>
+              <a:defRPr sz="1700" b="0">
+                <a:solidFill>
+                  <a:srgbClr val="5C6672"/>
+                </a:solidFill>
+                <a:latin typeface="Noto Sans CJK KR"/>
+              </a:defRPr>
+            </a:pPr>
+            <a:r>
+              <a:t>현재 Complete는 다음 Starter의 기준선입니다.</a:t>
+            </a:r>
+          </a:p>
+        </p:txBody>
+      </p:sp>
+      <p:sp>
+        <p:nvSpPr>
+          <p:cNvPr id="4" name="TextBox 3"/>
+          <p:cNvSpPr txBox="1"/>
+          <p:nvPr/>
+        </p:nvSpPr>
+        <p:spPr>
+          <a:xfrm>
+            <a:off x="530352" y="6510528"/>
+            <a:ext cx="7772400" cy="201168"/>
+          </a:xfrm>
+          <a:prstGeom prst="rect">
+            <a:avLst/>
+          </a:prstGeom>
+          <a:noFill/>
+        </p:spPr>
+        <p:txBody>
+          <a:bodyPr wrap="square" lIns="73152" rIns="73152" tIns="36576" bIns="36576">
+            <a:spAutoFit/>
+          </a:bodyPr>
+          <a:lstStyle/>
+          <a:p>
+            <a:pPr algn="l">
+              <a:spcAft>
+                <a:spcPts val="0"/>
+              </a:spcAft>
+              <a:defRPr sz="1000" b="0">
+                <a:solidFill>
+                  <a:srgbClr val="5C6672"/>
+                </a:solidFill>
+                <a:latin typeface="Noto Sans CJK KR"/>
+              </a:defRPr>
+            </a:pPr>
+            <a:r>
+              <a:t>ROS 2 Jazzy · Gazebo Harmonic · M16 · 따라 하기형 AGV 실습</a:t>
+            </a:r>
+          </a:p>
+        </p:txBody>
+      </p:sp>
+      <p:sp>
+        <p:nvSpPr>
+          <p:cNvPr id="5" name="TextBox 4"/>
+          <p:cNvSpPr txBox="1"/>
+          <p:nvPr/>
+        </p:nvSpPr>
+        <p:spPr>
+          <a:xfrm>
+            <a:off x="9144000" y="6510528"/>
+            <a:ext cx="2468880" cy="201168"/>
+          </a:xfrm>
+          <a:prstGeom prst="rect">
+            <a:avLst/>
+          </a:prstGeom>
+          <a:noFill/>
+        </p:spPr>
+        <p:txBody>
+          <a:bodyPr wrap="square" lIns="73152" rIns="73152" tIns="36576" bIns="36576">
+            <a:spAutoFit/>
+          </a:bodyPr>
+          <a:lstStyle/>
+          <a:p>
+            <a:pPr algn="r">
+              <a:spcAft>
+                <a:spcPts val="0"/>
+              </a:spcAft>
+              <a:defRPr sz="1000" b="0">
+                <a:solidFill>
+                  <a:srgbClr val="5C6672"/>
+                </a:solidFill>
+                <a:latin typeface="Noto Sans CJK KR"/>
+              </a:defRPr>
+            </a:pPr>
+            <a:r>
+              <a:t>명령·파일 경로는 슬라이드에서 복사 가능</a:t>
+            </a:r>
+          </a:p>
+        </p:txBody>
+      </p:sp>
+      <p:sp>
+        <p:nvSpPr>
+          <p:cNvPr id="6" name="Rectangle 5"/>
+          <p:cNvSpPr/>
+          <p:nvPr/>
+        </p:nvSpPr>
+        <p:spPr>
+          <a:xfrm>
+            <a:off x="566928" y="1188720"/>
+            <a:ext cx="11064240" cy="347472"/>
+          </a:xfrm>
+          <a:prstGeom prst="rect">
+            <a:avLst/>
+          </a:prstGeom>
+          <a:solidFill>
+            <a:srgbClr val="F4F7FB"/>
+          </a:solidFill>
+          <a:ln>
+            <a:solidFill>
+              <a:srgbClr val="F4F7FB"/>
+            </a:solidFill>
+          </a:ln>
+        </p:spPr>
+        <p:style>
+          <a:lnRef idx="1">
+            <a:schemeClr val="accent1"/>
+          </a:lnRef>
+          <a:fillRef idx="3">
+            <a:schemeClr val="accent1"/>
+          </a:fillRef>
+          <a:effectRef idx="2">
+            <a:schemeClr val="accent1"/>
+          </a:effectRef>
+          <a:fontRef idx="minor">
+            <a:schemeClr val="lt1"/>
+          </a:fontRef>
+        </p:style>
+        <p:txBody>
+          <a:bodyPr rtlCol="0" anchor="ctr" wrap="square" lIns="73152" rIns="73152" tIns="36576" bIns="36576"/>
+          <a:lstStyle/>
+          <a:p>
+            <a:pPr algn="l">
+              <a:spcAft>
+                <a:spcPts val="0"/>
+              </a:spcAft>
+              <a:defRPr sz="1300" b="1">
+                <a:solidFill>
+                  <a:srgbClr val="122C4E"/>
+                </a:solidFill>
+                <a:latin typeface="Noto Sans CJK KR"/>
+              </a:defRPr>
+            </a:pPr>
+            <a:r>
+              <a:t>현재 단계 체크포인트    |    현재 폴더 ~/agv_ws    |    현재 터미널</a:t>
+            </a:r>
+          </a:p>
+        </p:txBody>
+      </p:sp>
+      <p:sp>
+        <p:nvSpPr>
+          <p:cNvPr id="7" name="Rounded Rectangle 6"/>
+          <p:cNvSpPr/>
+          <p:nvPr/>
+        </p:nvSpPr>
+        <p:spPr>
+          <a:xfrm>
+            <a:off x="685800" y="1737360"/>
+            <a:ext cx="10972800" cy="3611880"/>
+          </a:xfrm>
+          <a:prstGeom prst="roundRect">
+            <a:avLst/>
+          </a:prstGeom>
+          <a:solidFill>
+            <a:srgbClr val="F4F7FB"/>
+          </a:solidFill>
+          <a:ln>
+            <a:solidFill>
+              <a:srgbClr val="D2DCE8"/>
+            </a:solidFill>
+          </a:ln>
+        </p:spPr>
+        <p:style>
+          <a:lnRef idx="1">
+            <a:schemeClr val="accent1"/>
+          </a:lnRef>
+          <a:fillRef idx="3">
+            <a:schemeClr val="accent1"/>
+          </a:fillRef>
+          <a:effectRef idx="2">
+            <a:schemeClr val="accent1"/>
+          </a:effectRef>
+          <a:fontRef idx="minor">
+            <a:schemeClr val="lt1"/>
+          </a:fontRef>
+        </p:style>
+        <p:txBody>
+          <a:bodyPr rtlCol="0" anchor="ctr"/>
+          <a:lstStyle/>
+          <a:p>
+            <a:pPr algn="ctr"/>
+          </a:p>
+        </p:txBody>
+      </p:sp>
+      <p:sp>
+        <p:nvSpPr>
+          <p:cNvPr id="8" name="TextBox 7"/>
+          <p:cNvSpPr txBox="1"/>
+          <p:nvPr/>
+        </p:nvSpPr>
+        <p:spPr>
+          <a:xfrm>
+            <a:off x="896112" y="1993392"/>
+            <a:ext cx="10332720" cy="2971800"/>
+          </a:xfrm>
+          <a:prstGeom prst="rect">
+            <a:avLst/>
+          </a:prstGeom>
+          <a:noFill/>
+        </p:spPr>
+        <p:txBody>
+          <a:bodyPr wrap="square" lIns="109728" rIns="109728">
+            <a:spAutoFit/>
+          </a:bodyPr>
+          <a:lstStyle/>
+          <a:p>
+            <a:pPr>
+              <a:spcAft>
+                <a:spcPts val="800"/>
+              </a:spcAft>
+              <a:defRPr sz="1800">
+                <a:solidFill>
+                  <a:srgbClr val="122C4E"/>
+                </a:solidFill>
+                <a:latin typeface="Noto Sans CJK KR"/>
+              </a:defRPr>
+            </a:pPr>
+            <a:r>
+              <a:t>• □ 완료 화면: wheel joint 이름과 controller YAML의 좌·우 목록·반지름·wheel separation을 일치시킨다.</a:t>
+            </a:r>
+          </a:p>
+          <a:p>
+            <a:pPr>
+              <a:spcAft>
+                <a:spcPts val="800"/>
+              </a:spcAft>
+              <a:defRPr sz="1800">
+                <a:solidFill>
+                  <a:srgbClr val="122C4E"/>
+                </a:solidFill>
+                <a:latin typeface="Noto Sans CJK KR"/>
+              </a:defRPr>
+            </a:pPr>
+            <a:r>
+              <a:t>• □ Complete 파일: blocks/E_autonomy_logic/M16_ros2_control/complete/</a:t>
+            </a:r>
+          </a:p>
+          <a:p>
+            <a:pPr>
+              <a:spcAft>
+                <a:spcPts val="800"/>
+              </a:spcAft>
+              <a:defRPr sz="1800">
+                <a:solidFill>
+                  <a:srgbClr val="122C4E"/>
+                </a:solidFill>
+                <a:latin typeface="Noto Sans CJK KR"/>
+              </a:defRPr>
+            </a:pPr>
+            <a:r>
+              <a:t>• □ 정상 로그·캡처: logs/validation.log, screenshots/validation_terminal.png</a:t>
+            </a:r>
+          </a:p>
+          <a:p>
+            <a:pPr>
+              <a:spcAft>
+                <a:spcPts val="800"/>
+              </a:spcAft>
+              <a:defRPr sz="1800">
+                <a:solidFill>
+                  <a:srgbClr val="122C4E"/>
+                </a:solidFill>
+                <a:latin typeface="Noto Sans CJK KR"/>
+              </a:defRPr>
+            </a:pPr>
+            <a:r>
+              <a:t>• □ 버전 식별: CHECKSUM_or_TAG.txt의 SHA-256 manifest</a:t>
+            </a:r>
+          </a:p>
+          <a:p>
+            <a:pPr>
+              <a:spcAft>
+                <a:spcPts val="800"/>
+              </a:spcAft>
+              <a:defRPr sz="1800">
+                <a:solidFill>
+                  <a:srgbClr val="122C4E"/>
+                </a:solidFill>
+                <a:latin typeface="Noto Sans CJK KR"/>
+              </a:defRPr>
+            </a:pPr>
+            <a:r>
+              <a:t>• □ 다음 시작 조건: M17~M20 autonomy command</a:t>
+            </a:r>
+          </a:p>
+        </p:txBody>
+      </p:sp>
+      <p:sp>
+        <p:nvSpPr>
+          <p:cNvPr id="9" name="TextBox 8"/>
+          <p:cNvSpPr txBox="1"/>
+          <p:nvPr/>
+        </p:nvSpPr>
+        <p:spPr>
+          <a:xfrm>
+            <a:off x="868680" y="5596128"/>
+            <a:ext cx="10515600" cy="338328"/>
+          </a:xfrm>
+          <a:prstGeom prst="rect">
+            <a:avLst/>
+          </a:prstGeom>
+          <a:noFill/>
+        </p:spPr>
+        <p:txBody>
+          <a:bodyPr wrap="square" lIns="73152" rIns="73152" tIns="36576" bIns="36576">
+            <a:spAutoFit/>
+          </a:bodyPr>
+          <a:lstStyle/>
+          <a:p>
+            <a:pPr algn="ctr">
+              <a:spcAft>
+                <a:spcPts val="0"/>
+              </a:spcAft>
+              <a:defRPr sz="1700" b="1">
+                <a:solidFill>
+                  <a:srgbClr val="2A8B5A"/>
+                </a:solidFill>
+                <a:latin typeface="Noto Sans CJK KR"/>
+              </a:defRPr>
+            </a:pPr>
+            <a:r>
+              <a:t>다음 모듈을 시작하기 전, 이 슬라이드의 Complete와 다음 모듈의 Starter를 비교합니다.</a:t>
+            </a:r>
+          </a:p>
+        </p:txBody>
+      </p:sp>
+    </p:spTree>
+  </p:cSld>
+  <p:clrMapOvr>
+    <a:masterClrMapping/>
+  </p:clrMapOvr>
+</p:sld>
+</file>
+
+<file path=ppt/slides/slide28.xml><?xml version="1.0" encoding="utf-8"?>
+<p:sld xmlns:a="http://schemas.openxmlformats.org/drawingml/2006/main" xmlns:p="http://schemas.openxmlformats.org/presentationml/2006/main" xmlns:r="http://schemas.openxmlformats.org/officeDocument/2006/relationships">
+  <p:cSld>
+    <p:spTree>
+      <p:nvGrpSpPr>
+        <p:cNvPr id="1" name=""/>
+        <p:cNvGrpSpPr/>
+        <p:nvPr/>
+      </p:nvGrpSpPr>
+      <p:grpSpPr/>
+      <p:sp>
+        <p:nvSpPr>
+          <p:cNvPr id="2" name="TextBox 1"/>
+          <p:cNvSpPr txBox="1"/>
+          <p:nvPr/>
+        </p:nvSpPr>
+        <p:spPr>
+          <a:xfrm>
+            <a:off x="566928" y="347472"/>
+            <a:ext cx="10881360" cy="438912"/>
+          </a:xfrm>
+          <a:prstGeom prst="rect">
+            <a:avLst/>
+          </a:prstGeom>
+          <a:noFill/>
+        </p:spPr>
+        <p:txBody>
+          <a:bodyPr wrap="square" lIns="73152" rIns="73152" tIns="36576" bIns="36576">
+            <a:spAutoFit/>
+          </a:bodyPr>
+          <a:lstStyle/>
+          <a:p>
+            <a:pPr algn="l">
+              <a:spcAft>
+                <a:spcPts val="0"/>
+              </a:spcAft>
+              <a:defRPr sz="3200" b="1">
+                <a:solidFill>
+                  <a:srgbClr val="122C4E"/>
+                </a:solidFill>
+                <a:latin typeface="Noto Sans CJK KR"/>
+              </a:defRPr>
+            </a:pPr>
+            <a:r>
               <a:t>공식 참고 자료</a:t>
             </a:r>
           </a:p>
@@ -14364,7 +14933,7 @@
         </p:nvSpPr>
         <p:spPr>
           <a:xfrm>
-            <a:off x="914400" y="1810512"/>
+            <a:off x="914400" y="1773936"/>
             <a:ext cx="3840480" cy="256032"/>
           </a:xfrm>
           <a:prstGeom prst="rect">
@@ -14403,8 +14972,8 @@
         </p:nvSpPr>
         <p:spPr>
           <a:xfrm>
-            <a:off x="914400" y="2121408"/>
-            <a:ext cx="9966960" cy="256032"/>
+            <a:off x="914400" y="2048255"/>
+            <a:ext cx="9966960" cy="475488"/>
           </a:xfrm>
           <a:prstGeom prst="rect">
             <a:avLst/>
@@ -14421,7 +14990,7 @@
               <a:spcAft>
                 <a:spcPts val="0"/>
               </a:spcAft>
-              <a:defRPr sz="1200" b="0">
+              <a:defRPr sz="1000" b="0">
                 <a:solidFill>
                   <a:srgbClr val="225B9B"/>
                 </a:solidFill>
@@ -14442,7 +15011,7 @@
         </p:nvSpPr>
         <p:spPr>
           <a:xfrm>
-            <a:off x="914400" y="2816352"/>
+            <a:off x="914400" y="2852928"/>
             <a:ext cx="3840480" cy="256032"/>
           </a:xfrm>
           <a:prstGeom prst="rect">
@@ -14482,7 +15051,7 @@
         <p:spPr>
           <a:xfrm>
             <a:off x="914400" y="3127248"/>
-            <a:ext cx="9966960" cy="256032"/>
+            <a:ext cx="9966960" cy="475488"/>
           </a:xfrm>
           <a:prstGeom prst="rect">
             <a:avLst/>
@@ -14499,7 +15068,7 @@
               <a:spcAft>
                 <a:spcPts val="0"/>
               </a:spcAft>
-              <a:defRPr sz="1200" b="0">
+              <a:defRPr sz="1000" b="0">
                 <a:solidFill>
                   <a:srgbClr val="225B9B"/>
                 </a:solidFill>
@@ -14520,7 +15089,7 @@
         </p:nvSpPr>
         <p:spPr>
           <a:xfrm>
-            <a:off x="914400" y="3822191"/>
+            <a:off x="914400" y="3931920"/>
             <a:ext cx="3840480" cy="256032"/>
           </a:xfrm>
           <a:prstGeom prst="rect">
@@ -14559,8 +15128,8 @@
         </p:nvSpPr>
         <p:spPr>
           <a:xfrm>
-            <a:off x="914400" y="4133087"/>
-            <a:ext cx="9966960" cy="256032"/>
+            <a:off x="914400" y="4206240"/>
+            <a:ext cx="9966960" cy="475488"/>
           </a:xfrm>
           <a:prstGeom prst="rect">
             <a:avLst/>
@@ -14577,7 +15146,7 @@
               <a:spcAft>
                 <a:spcPts val="0"/>
               </a:spcAft>
-              <a:defRPr sz="1200" b="0">
+              <a:defRPr sz="1000" b="0">
                 <a:solidFill>
                   <a:srgbClr val="225B9B"/>
                 </a:solidFill>
@@ -14598,7 +15167,7 @@
         </p:nvSpPr>
         <p:spPr>
           <a:xfrm>
-            <a:off x="914400" y="4828032"/>
+            <a:off x="914400" y="5010912"/>
             <a:ext cx="3840480" cy="256032"/>
           </a:xfrm>
           <a:prstGeom prst="rect">
@@ -14637,8 +15206,8 @@
         </p:nvSpPr>
         <p:spPr>
           <a:xfrm>
-            <a:off x="914400" y="5138928"/>
-            <a:ext cx="9966960" cy="256032"/>
+            <a:off x="914400" y="5285232"/>
+            <a:ext cx="9966960" cy="475488"/>
           </a:xfrm>
           <a:prstGeom prst="rect">
             <a:avLst/>
@@ -14655,7 +15224,7 @@
               <a:spcAft>
                 <a:spcPts val="0"/>
               </a:spcAft>
-              <a:defRPr sz="1200" b="0">
+              <a:defRPr sz="1000" b="0">
                 <a:solidFill>
                   <a:srgbClr val="225B9B"/>
                 </a:solidFill>
@@ -17393,8 +17962,8 @@
         </p:nvSpPr>
         <p:spPr>
           <a:xfrm>
-            <a:off x="658368" y="1682496"/>
-            <a:ext cx="10972800" cy="347472"/>
+            <a:off x="658368" y="1627632"/>
+            <a:ext cx="10972800" cy="256032"/>
           </a:xfrm>
           <a:prstGeom prst="rect">
             <a:avLst/>
@@ -17411,7 +17980,7 @@
               <a:spcAft>
                 <a:spcPts val="0"/>
               </a:spcAft>
-              <a:defRPr sz="1700" b="1">
+              <a:defRPr sz="1500" b="1">
                 <a:solidFill>
                   <a:srgbClr val="122C4E"/>
                 </a:solidFill>
@@ -17432,8 +18001,8 @@
         </p:nvSpPr>
         <p:spPr>
           <a:xfrm>
-            <a:off x="658368" y="2103120"/>
-            <a:ext cx="10972800" cy="493776"/>
+            <a:off x="658368" y="1956816"/>
+            <a:ext cx="10972800" cy="603504"/>
           </a:xfrm>
           <a:prstGeom prst="rect">
             <a:avLst/>
@@ -17477,7 +18046,11 @@
               </a:defRPr>
             </a:pPr>
             <a:r>
-              <a:t>파일 생성/열기: mkdir -p ~/agv_ws/src/agv_control/config    &amp;&amp;    nano ~/agv_ws/src/agv_control/config/controllers.yaml</a:t>
+              <a:t>파일 생성: mkdir -p ~/agv_ws/src/agv_control/config</a:t>
+            </a:r>
+            <a:br/>
+            <a:r>
+              <a:t>파일 열기: nano ~/agv_ws/src/agv_control/config/controllers.yaml</a:t>
             </a:r>
           </a:p>
         </p:txBody>
@@ -17490,8 +18063,8 @@
         </p:nvSpPr>
         <p:spPr>
           <a:xfrm>
-            <a:off x="658368" y="2761488"/>
-            <a:ext cx="10972800" cy="3383280"/>
+            <a:off x="658368" y="2706624"/>
+            <a:ext cx="10972800" cy="3364992"/>
           </a:xfrm>
           <a:prstGeom prst="rect">
             <a:avLst/>
@@ -17581,14 +18154,6 @@
             <a:r>
               <a:t>    wheel_separation: 0.38</a:t>
             </a:r>
-            <a:br/>
-            <a:r>
-              <a:t>    wheel_radius: 0.08</a:t>
-            </a:r>
-            <a:br/>
-            <a:r>
-              <a:t>    base_frame_id: base_link</a:t>
-            </a:r>
           </a:p>
         </p:txBody>
       </p:sp>
@@ -17600,7 +18165,7 @@
         </p:nvSpPr>
         <p:spPr>
           <a:xfrm>
-            <a:off x="749808" y="6199632"/>
+            <a:off x="749808" y="6181344"/>
             <a:ext cx="10789920" cy="201168"/>
           </a:xfrm>
           <a:prstGeom prst="rect">

--- a/blocks/E_autonomy_logic/M16_ros2_control/M16_ros2_control_gz_ros2_control.pptx
+++ b/blocks/E_autonomy_logic/M16_ros2_control/M16_ros2_control_gz_ros2_control.pptx
@@ -46,6 +46,8 @@
     <p:sldId id="294" r:id="rId46"/>
     <p:sldId id="295" r:id="rId47"/>
     <p:sldId id="296" r:id="rId48"/>
+    <p:sldId id="297" r:id="rId49"/>
+    <p:sldId id="298" r:id="rId50"/>
   </p:sldIdLst>
   <p:sldSz cx="12191999" cy="6858000" type="screen4x3"/>
   <p:notesSz cx="6858000" cy="9144000"/>
@@ -632,17 +634,27 @@
           <a:lstStyle/>
           <a:p>
             <a:r>
-              <a:t>[설명] ~/ros2_curri/agv_ws/src/agv_control/config/controllers.yaml의 전체 파일을 2/2 구간으로 작성한다.</a:t>
-            </a:r>
-          </a:p>
-          <a:p>
-            <a:r>
-              <a:t>[실행] nano ~/ros2_curri/agv_ws/src/agv_control/config/controllers.yaml</a:t>
-            </a:r>
-          </a:p>
-          <a:p>
-            <a:r>
-              <a:t>[확인] 코드를 저장하고 다음 코드 슬라이드 또는 build 단계로 이동한다.</a:t>
+              <a:t>[설명] M16은 M09 native DiffDrive와 별도 launch를 사용한다. plugin이 controller_manager를 만들고 spawner가 두 controller를 active로 전환한다.</a:t>
+            </a:r>
+          </a:p>
+          <a:p>
+            <a:r>
+              <a:t>[실행] ros2 launch agv_gazebo ros2_control.launch.py</a:t>
+            </a:r>
+          </a:p>
+          <a:p>
+            <a:r>
+              <a:t># 새 터미널</a:t>
+            </a:r>
+          </a:p>
+          <a:p>
+            <a:r>
+              <a:t>ros2 control list_controllers -c /controller_manager</a:t>
+            </a:r>
+          </a:p>
+          <a:p>
+            <a:r>
+              <a:t>[확인] 명령 출력에서 슬라이드의 확인 항목을 찾는다.</a:t>
             </a:r>
           </a:p>
           <a:p>
@@ -652,7 +664,7 @@
           </a:p>
           <a:p>
             <a:r>
-              <a:t>[오류] 들여쓰기·XML 태그·따옴표가 슬라이드와 정확히 같은지 확인한다.</a:t>
+              <a:t>[오류] 오류가 나면 현재 폴더, source, 파일 경로를 먼저 확인한다.</a:t>
             </a:r>
           </a:p>
         </p:txBody>
@@ -722,12 +734,12 @@
           <a:lstStyle/>
           <a:p>
             <a:r>
-              <a:t>[설명] ~/ros2_curri/agv_ws/src/agv_description/urdf/agv_ros2_control.urdf.xacro의 전체 파일을 1/5 구간으로 작성한다.</a:t>
-            </a:r>
-          </a:p>
-          <a:p>
-            <a:r>
-              <a:t>[실행] nano ~/ros2_curri/agv_ws/src/agv_description/urdf/agv_ros2_control.urdf.xacro</a:t>
+              <a:t>[설명] ~/ros2_curri/agv_ws/src/agv_control/config/controllers.yaml의 전체 파일을 1/2 구간으로 작성한다.</a:t>
+            </a:r>
+          </a:p>
+          <a:p>
+            <a:r>
+              <a:t>[실행] nano ~/ros2_curri/agv_ws/src/agv_control/config/controllers.yaml</a:t>
             </a:r>
           </a:p>
           <a:p>
@@ -812,12 +824,12 @@
           <a:lstStyle/>
           <a:p>
             <a:r>
-              <a:t>[설명] ~/ros2_curri/agv_ws/src/agv_description/urdf/agv_ros2_control.urdf.xacro의 전체 파일을 2/5 구간으로 작성한다.</a:t>
-            </a:r>
-          </a:p>
-          <a:p>
-            <a:r>
-              <a:t>[실행] nano ~/ros2_curri/agv_ws/src/agv_description/urdf/agv_ros2_control.urdf.xacro</a:t>
+              <a:t>[설명] ~/ros2_curri/agv_ws/src/agv_control/config/controllers.yaml의 전체 파일을 2/2 구간으로 작성한다.</a:t>
+            </a:r>
+          </a:p>
+          <a:p>
+            <a:r>
+              <a:t>[실행] nano ~/ros2_curri/agv_ws/src/agv_control/config/controllers.yaml</a:t>
             </a:r>
           </a:p>
           <a:p>
@@ -902,7 +914,7 @@
           <a:lstStyle/>
           <a:p>
             <a:r>
-              <a:t>[설명] ~/ros2_curri/agv_ws/src/agv_description/urdf/agv_ros2_control.urdf.xacro의 전체 파일을 3/5 구간으로 작성한다.</a:t>
+              <a:t>[설명] ~/ros2_curri/agv_ws/src/agv_description/urdf/agv_ros2_control.urdf.xacro의 전체 파일을 1/5 구간으로 작성한다.</a:t>
             </a:r>
           </a:p>
           <a:p>
@@ -992,7 +1004,7 @@
           <a:lstStyle/>
           <a:p>
             <a:r>
-              <a:t>[설명] ~/ros2_curri/agv_ws/src/agv_description/urdf/agv_ros2_control.urdf.xacro의 전체 파일을 4/5 구간으로 작성한다.</a:t>
+              <a:t>[설명] ~/ros2_curri/agv_ws/src/agv_description/urdf/agv_ros2_control.urdf.xacro의 전체 파일을 2/5 구간으로 작성한다.</a:t>
             </a:r>
           </a:p>
           <a:p>
@@ -1082,7 +1094,7 @@
           <a:lstStyle/>
           <a:p>
             <a:r>
-              <a:t>[설명] ~/ros2_curri/agv_ws/src/agv_description/urdf/agv_ros2_control.urdf.xacro의 전체 파일을 5/5 구간으로 작성한다.</a:t>
+              <a:t>[설명] ~/ros2_curri/agv_ws/src/agv_description/urdf/agv_ros2_control.urdf.xacro의 전체 파일을 3/5 구간으로 작성한다.</a:t>
             </a:r>
           </a:p>
           <a:p>
@@ -1172,12 +1184,12 @@
           <a:lstStyle/>
           <a:p>
             <a:r>
-              <a:t>[설명] ~/ros2_curri/agv_ws/src/agv_gazebo/models/agv_ros2_control/model.sdf의 전체 파일을 1/15 구간으로 작성한다.</a:t>
-            </a:r>
-          </a:p>
-          <a:p>
-            <a:r>
-              <a:t>[실행] nano ~/ros2_curri/agv_ws/src/agv_gazebo/models/agv_ros2_control/model.sdf</a:t>
+              <a:t>[설명] ~/ros2_curri/agv_ws/src/agv_description/urdf/agv_ros2_control.urdf.xacro의 전체 파일을 4/5 구간으로 작성한다.</a:t>
+            </a:r>
+          </a:p>
+          <a:p>
+            <a:r>
+              <a:t>[실행] nano ~/ros2_curri/agv_ws/src/agv_description/urdf/agv_ros2_control.urdf.xacro</a:t>
             </a:r>
           </a:p>
           <a:p>
@@ -1262,12 +1274,12 @@
           <a:lstStyle/>
           <a:p>
             <a:r>
-              <a:t>[설명] ~/ros2_curri/agv_ws/src/agv_gazebo/models/agv_ros2_control/model.sdf의 전체 파일을 2/15 구간으로 작성한다.</a:t>
-            </a:r>
-          </a:p>
-          <a:p>
-            <a:r>
-              <a:t>[실행] nano ~/ros2_curri/agv_ws/src/agv_gazebo/models/agv_ros2_control/model.sdf</a:t>
+              <a:t>[설명] ~/ros2_curri/agv_ws/src/agv_description/urdf/agv_ros2_control.urdf.xacro의 전체 파일을 5/5 구간으로 작성한다.</a:t>
+            </a:r>
+          </a:p>
+          <a:p>
+            <a:r>
+              <a:t>[실행] nano ~/ros2_curri/agv_ws/src/agv_description/urdf/agv_ros2_control.urdf.xacro</a:t>
             </a:r>
           </a:p>
           <a:p>
@@ -1352,7 +1364,7 @@
           <a:lstStyle/>
           <a:p>
             <a:r>
-              <a:t>[설명] ~/ros2_curri/agv_ws/src/agv_gazebo/models/agv_ros2_control/model.sdf의 전체 파일을 3/15 구간으로 작성한다.</a:t>
+              <a:t>[설명] ~/ros2_curri/agv_ws/src/agv_gazebo/models/agv_ros2_control/model.sdf의 전체 파일을 1/15 구간으로 작성한다.</a:t>
             </a:r>
           </a:p>
           <a:p>
@@ -1442,7 +1454,7 @@
           <a:lstStyle/>
           <a:p>
             <a:r>
-              <a:t>[설명] ~/ros2_curri/agv_ws/src/agv_gazebo/models/agv_ros2_control/model.sdf의 전체 파일을 4/15 구간으로 작성한다.</a:t>
+              <a:t>[설명] ~/ros2_curri/agv_ws/src/agv_gazebo/models/agv_ros2_control/model.sdf의 전체 파일을 2/15 구간으로 작성한다.</a:t>
             </a:r>
           </a:p>
           <a:p>
@@ -1622,7 +1634,7 @@
           <a:lstStyle/>
           <a:p>
             <a:r>
-              <a:t>[설명] ~/ros2_curri/agv_ws/src/agv_gazebo/models/agv_ros2_control/model.sdf의 전체 파일을 5/15 구간으로 작성한다.</a:t>
+              <a:t>[설명] ~/ros2_curri/agv_ws/src/agv_gazebo/models/agv_ros2_control/model.sdf의 전체 파일을 3/15 구간으로 작성한다.</a:t>
             </a:r>
           </a:p>
           <a:p>
@@ -1712,7 +1724,7 @@
           <a:lstStyle/>
           <a:p>
             <a:r>
-              <a:t>[설명] ~/ros2_curri/agv_ws/src/agv_gazebo/models/agv_ros2_control/model.sdf의 전체 파일을 6/15 구간으로 작성한다.</a:t>
+              <a:t>[설명] ~/ros2_curri/agv_ws/src/agv_gazebo/models/agv_ros2_control/model.sdf의 전체 파일을 4/15 구간으로 작성한다.</a:t>
             </a:r>
           </a:p>
           <a:p>
@@ -1802,7 +1814,7 @@
           <a:lstStyle/>
           <a:p>
             <a:r>
-              <a:t>[설명] ~/ros2_curri/agv_ws/src/agv_gazebo/models/agv_ros2_control/model.sdf의 전체 파일을 7/15 구간으로 작성한다.</a:t>
+              <a:t>[설명] ~/ros2_curri/agv_ws/src/agv_gazebo/models/agv_ros2_control/model.sdf의 전체 파일을 5/15 구간으로 작성한다.</a:t>
             </a:r>
           </a:p>
           <a:p>
@@ -1892,7 +1904,7 @@
           <a:lstStyle/>
           <a:p>
             <a:r>
-              <a:t>[설명] ~/ros2_curri/agv_ws/src/agv_gazebo/models/agv_ros2_control/model.sdf의 전체 파일을 8/15 구간으로 작성한다.</a:t>
+              <a:t>[설명] ~/ros2_curri/agv_ws/src/agv_gazebo/models/agv_ros2_control/model.sdf의 전체 파일을 6/15 구간으로 작성한다.</a:t>
             </a:r>
           </a:p>
           <a:p>
@@ -1982,7 +1994,7 @@
           <a:lstStyle/>
           <a:p>
             <a:r>
-              <a:t>[설명] ~/ros2_curri/agv_ws/src/agv_gazebo/models/agv_ros2_control/model.sdf의 전체 파일을 9/15 구간으로 작성한다.</a:t>
+              <a:t>[설명] ~/ros2_curri/agv_ws/src/agv_gazebo/models/agv_ros2_control/model.sdf의 전체 파일을 7/15 구간으로 작성한다.</a:t>
             </a:r>
           </a:p>
           <a:p>
@@ -2072,7 +2084,7 @@
           <a:lstStyle/>
           <a:p>
             <a:r>
-              <a:t>[설명] ~/ros2_curri/agv_ws/src/agv_gazebo/models/agv_ros2_control/model.sdf의 전체 파일을 10/15 구간으로 작성한다.</a:t>
+              <a:t>[설명] ~/ros2_curri/agv_ws/src/agv_gazebo/models/agv_ros2_control/model.sdf의 전체 파일을 8/15 구간으로 작성한다.</a:t>
             </a:r>
           </a:p>
           <a:p>
@@ -2162,7 +2174,7 @@
           <a:lstStyle/>
           <a:p>
             <a:r>
-              <a:t>[설명] ~/ros2_curri/agv_ws/src/agv_gazebo/models/agv_ros2_control/model.sdf의 전체 파일을 11/15 구간으로 작성한다.</a:t>
+              <a:t>[설명] ~/ros2_curri/agv_ws/src/agv_gazebo/models/agv_ros2_control/model.sdf의 전체 파일을 9/15 구간으로 작성한다.</a:t>
             </a:r>
           </a:p>
           <a:p>
@@ -2252,7 +2264,7 @@
           <a:lstStyle/>
           <a:p>
             <a:r>
-              <a:t>[설명] ~/ros2_curri/agv_ws/src/agv_gazebo/models/agv_ros2_control/model.sdf의 전체 파일을 12/15 구간으로 작성한다.</a:t>
+              <a:t>[설명] ~/ros2_curri/agv_ws/src/agv_gazebo/models/agv_ros2_control/model.sdf의 전체 파일을 10/15 구간으로 작성한다.</a:t>
             </a:r>
           </a:p>
           <a:p>
@@ -2342,7 +2354,7 @@
           <a:lstStyle/>
           <a:p>
             <a:r>
-              <a:t>[설명] ~/ros2_curri/agv_ws/src/agv_gazebo/models/agv_ros2_control/model.sdf의 전체 파일을 13/15 구간으로 작성한다.</a:t>
+              <a:t>[설명] ~/ros2_curri/agv_ws/src/agv_gazebo/models/agv_ros2_control/model.sdf의 전체 파일을 11/15 구간으로 작성한다.</a:t>
             </a:r>
           </a:p>
           <a:p>
@@ -2432,7 +2444,7 @@
           <a:lstStyle/>
           <a:p>
             <a:r>
-              <a:t>[설명] ~/ros2_curri/agv_ws/src/agv_gazebo/models/agv_ros2_control/model.sdf의 전체 파일을 14/15 구간으로 작성한다.</a:t>
+              <a:t>[설명] ~/ros2_curri/agv_ws/src/agv_gazebo/models/agv_ros2_control/model.sdf의 전체 파일을 12/15 구간으로 작성한다.</a:t>
             </a:r>
           </a:p>
           <a:p>
@@ -2612,7 +2624,7 @@
           <a:lstStyle/>
           <a:p>
             <a:r>
-              <a:t>[설명] ~/ros2_curri/agv_ws/src/agv_gazebo/models/agv_ros2_control/model.sdf의 전체 파일을 15/15 구간으로 작성한다.</a:t>
+              <a:t>[설명] ~/ros2_curri/agv_ws/src/agv_gazebo/models/agv_ros2_control/model.sdf의 전체 파일을 13/15 구간으로 작성한다.</a:t>
             </a:r>
           </a:p>
           <a:p>
@@ -2702,12 +2714,12 @@
           <a:lstStyle/>
           <a:p>
             <a:r>
-              <a:t>[설명] ~/ros2_curri/agv_ws/src/agv_gazebo/launch/ros2_control.launch.py의 전체 파일을 1/3 구간으로 작성한다.</a:t>
-            </a:r>
-          </a:p>
-          <a:p>
-            <a:r>
-              <a:t>[실행] nano ~/ros2_curri/agv_ws/src/agv_gazebo/launch/ros2_control.launch.py</a:t>
+              <a:t>[설명] ~/ros2_curri/agv_ws/src/agv_gazebo/models/agv_ros2_control/model.sdf의 전체 파일을 14/15 구간으로 작성한다.</a:t>
+            </a:r>
+          </a:p>
+          <a:p>
+            <a:r>
+              <a:t>[실행] nano ~/ros2_curri/agv_ws/src/agv_gazebo/models/agv_ros2_control/model.sdf</a:t>
             </a:r>
           </a:p>
           <a:p>
@@ -2792,12 +2804,12 @@
           <a:lstStyle/>
           <a:p>
             <a:r>
-              <a:t>[설명] ~/ros2_curri/agv_ws/src/agv_gazebo/launch/ros2_control.launch.py의 전체 파일을 2/3 구간으로 작성한다.</a:t>
-            </a:r>
-          </a:p>
-          <a:p>
-            <a:r>
-              <a:t>[실행] nano ~/ros2_curri/agv_ws/src/agv_gazebo/launch/ros2_control.launch.py</a:t>
+              <a:t>[설명] ~/ros2_curri/agv_ws/src/agv_gazebo/models/agv_ros2_control/model.sdf의 전체 파일을 15/15 구간으로 작성한다.</a:t>
+            </a:r>
+          </a:p>
+          <a:p>
+            <a:r>
+              <a:t>[실행] nano ~/ros2_curri/agv_ws/src/agv_gazebo/models/agv_ros2_control/model.sdf</a:t>
             </a:r>
           </a:p>
           <a:p>
@@ -2882,7 +2894,7 @@
           <a:lstStyle/>
           <a:p>
             <a:r>
-              <a:t>[설명] ~/ros2_curri/agv_ws/src/agv_gazebo/launch/ros2_control.launch.py의 전체 파일을 3/3 구간으로 작성한다.</a:t>
+              <a:t>[설명] ~/ros2_curri/agv_ws/src/agv_gazebo/launch/ros2_control.launch.py의 전체 파일을 1/3 구간으로 작성한다.</a:t>
             </a:r>
           </a:p>
           <a:p>
@@ -2972,27 +2984,17 @@
           <a:lstStyle/>
           <a:p>
             <a:r>
-              <a:t>[설명] build/source/run을 생략 없이 실행한다.</a:t>
-            </a:r>
-          </a:p>
-          <a:p>
-            <a:r>
-              <a:t>[실행] source ~/ros2_curri/agv_ws/install/setup.bash</a:t>
-            </a:r>
-          </a:p>
-          <a:p>
-            <a:r>
-              <a:t>ros2 launch agv_gazebo ros2_control.launch.py</a:t>
-            </a:r>
-          </a:p>
-          <a:p>
-            <a:r>
-              <a:t># 새 터미널: ros2 control list_controllers -c /controller_manager</a:t>
-            </a:r>
-          </a:p>
-          <a:p>
-            <a:r>
-              <a:t>[확인] `ros2 control list_controllers`에서 joint_state_broadcaster와 diff_drive_controller가 모두 active이고 wheel joint state가 publish된다.</a:t>
+              <a:t>[설명] ~/ros2_curri/agv_ws/src/agv_gazebo/launch/ros2_control.launch.py의 전체 파일을 2/3 구간으로 작성한다.</a:t>
+            </a:r>
+          </a:p>
+          <a:p>
+            <a:r>
+              <a:t>[실행] nano ~/ros2_curri/agv_ws/src/agv_gazebo/launch/ros2_control.launch.py</a:t>
+            </a:r>
+          </a:p>
+          <a:p>
+            <a:r>
+              <a:t>[확인] 코드를 저장하고 다음 코드 슬라이드 또는 build 단계로 이동한다.</a:t>
             </a:r>
           </a:p>
           <a:p>
@@ -3002,7 +3004,7 @@
           </a:p>
           <a:p>
             <a:r>
-              <a:t>[오류] 오류가 나면 현재 폴더, source, 파일 경로를 먼저 확인한다.</a:t>
+              <a:t>[오류] 들여쓰기·XML 태그·따옴표가 슬라이드와 정확히 같은지 확인한다.</a:t>
             </a:r>
           </a:p>
         </p:txBody>
@@ -3072,17 +3074,17 @@
           <a:lstStyle/>
           <a:p>
             <a:r>
-              <a:t>[설명] 실제 Ubuntu/ROS 2 환경에서 생성한 검증 화면이다.</a:t>
-            </a:r>
-          </a:p>
-          <a:p>
-            <a:r>
-              <a:t>[실행] 슬라이드의 명령 또는 파일 작성 단계를 진행한다.</a:t>
-            </a:r>
-          </a:p>
-          <a:p>
-            <a:r>
-              <a:t>[확인] 캡처의 명령과 다음 슬라이드의 검증 명령을 비교한다.</a:t>
+              <a:t>[설명] ~/ros2_curri/agv_ws/src/agv_gazebo/launch/ros2_control.launch.py의 전체 파일을 3/3 구간으로 작성한다.</a:t>
+            </a:r>
+          </a:p>
+          <a:p>
+            <a:r>
+              <a:t>[실행] nano ~/ros2_curri/agv_ws/src/agv_gazebo/launch/ros2_control.launch.py</a:t>
+            </a:r>
+          </a:p>
+          <a:p>
+            <a:r>
+              <a:t>[확인] 코드를 저장하고 다음 코드 슬라이드 또는 build 단계로 이동한다.</a:t>
             </a:r>
           </a:p>
           <a:p>
@@ -3092,7 +3094,7 @@
           </a:p>
           <a:p>
             <a:r>
-              <a:t>[오류] 오류가 나면 현재 폴더, source, 파일 경로를 먼저 확인한다.</a:t>
+              <a:t>[오류] 들여쓰기·XML 태그·따옴표가 슬라이드와 정확히 같은지 확인한다.</a:t>
             </a:r>
           </a:p>
         </p:txBody>
@@ -3162,17 +3164,27 @@
           <a:lstStyle/>
           <a:p>
             <a:r>
-              <a:t>[설명] 실제 Ubuntu/ROS 2 환경에서 생성한 검증 화면이다.</a:t>
-            </a:r>
-          </a:p>
-          <a:p>
-            <a:r>
-              <a:t>[실행] 슬라이드의 명령 또는 파일 작성 단계를 진행한다.</a:t>
-            </a:r>
-          </a:p>
-          <a:p>
-            <a:r>
-              <a:t>[확인] 캡처의 명령과 다음 슬라이드의 검증 명령을 비교한다.</a:t>
+              <a:t>[설명] build/source/run을 생략 없이 실행한다.</a:t>
+            </a:r>
+          </a:p>
+          <a:p>
+            <a:r>
+              <a:t>[실행] source ~/ros2_curri/agv_ws/install/setup.bash</a:t>
+            </a:r>
+          </a:p>
+          <a:p>
+            <a:r>
+              <a:t>ros2 launch agv_gazebo ros2_control.launch.py</a:t>
+            </a:r>
+          </a:p>
+          <a:p>
+            <a:r>
+              <a:t># 새 터미널: ros2 control list_controllers -c /controller_manager</a:t>
+            </a:r>
+          </a:p>
+          <a:p>
+            <a:r>
+              <a:t>[확인] `ros2 control list_controllers`에서 joint_state_broadcaster와 diff_drive_controller가 모두 active이고 wheel joint state가 publish된다.</a:t>
             </a:r>
           </a:p>
           <a:p>
@@ -3252,22 +3264,17 @@
           <a:lstStyle/>
           <a:p>
             <a:r>
-              <a:t>[설명] 검증 명령은 GUI 결과와 별도로 실행해 재현 가능한 완료 기준을 만든다.</a:t>
-            </a:r>
-          </a:p>
-          <a:p>
-            <a:r>
-              <a:t>[실행] ros2 control list_controllers -c /controller_manager</a:t>
-            </a:r>
-          </a:p>
-          <a:p>
-            <a:r>
-              <a:t>ros2 topic echo /joint_states --once</a:t>
-            </a:r>
-          </a:p>
-          <a:p>
-            <a:r>
-              <a:t>[확인] `ros2 control list_controllers`에서 joint_state_broadcaster와 diff_drive_controller가 모두 active이고 wheel joint state가 publish된다.</a:t>
+              <a:t>[설명] 실제 Ubuntu/ROS 2 환경에서 생성한 검증 화면이다.</a:t>
+            </a:r>
+          </a:p>
+          <a:p>
+            <a:r>
+              <a:t>[실행] 슬라이드의 명령 또는 파일 작성 단계를 진행한다.</a:t>
+            </a:r>
+          </a:p>
+          <a:p>
+            <a:r>
+              <a:t>[확인] ① 명령/설정  ② 정상 출력 또는 화면  ③ 다음 검증 명령으로 재확인</a:t>
             </a:r>
           </a:p>
           <a:p>
@@ -3347,7 +3354,7 @@
           <a:lstStyle/>
           <a:p>
             <a:r>
-              <a:t>[설명] 오류를 대신 해결하지 말고 증상부터 우선 확인 순서대로 교육생이 실행하게 한다.</a:t>
+              <a:t>[설명] 실제 Ubuntu/ROS 2 환경에서 생성한 검증 화면이다.</a:t>
             </a:r>
           </a:p>
           <a:p>
@@ -3357,7 +3364,7 @@
           </a:p>
           <a:p>
             <a:r>
-              <a:t>[확인] 수정 뒤 첫 검증 명령을 다시 실행한다.</a:t>
+              <a:t>[확인] 명령·설정과 화면의 topic·frame·결과 이름을 대조합니다.</a:t>
             </a:r>
           </a:p>
           <a:p>
@@ -3367,7 +3374,7 @@
           </a:p>
           <a:p>
             <a:r>
-              <a:t>[오류] 슬라이드의 두 대표 오류를 먼저 사용한다.</a:t>
+              <a:t>[오류] 오류가 나면 현재 폴더, source, 파일 경로를 먼저 확인한다.</a:t>
             </a:r>
           </a:p>
         </p:txBody>
@@ -3437,17 +3444,22 @@
           <a:lstStyle/>
           <a:p>
             <a:r>
-              <a:t>[설명] 교육생이 직접 한 값만 바꿔 원인과 결과를 연결하게 한다.</a:t>
-            </a:r>
-          </a:p>
-          <a:p>
-            <a:r>
-              <a:t>[실행] 슬라이드의 명령 또는 파일 작성 단계를 진행한다.</a:t>
-            </a:r>
-          </a:p>
-          <a:p>
-            <a:r>
-              <a:t>[확인] 원래 값과 변경 값을 모두 기록한다.</a:t>
+              <a:t>[설명] 검증 명령은 GUI 결과와 별도로 실행해 재현 가능한 완료 기준을 만든다.</a:t>
+            </a:r>
+          </a:p>
+          <a:p>
+            <a:r>
+              <a:t>[실행] ros2 control list_controllers -c /controller_manager</a:t>
+            </a:r>
+          </a:p>
+          <a:p>
+            <a:r>
+              <a:t>ros2 topic echo /joint_states --once</a:t>
+            </a:r>
+          </a:p>
+          <a:p>
+            <a:r>
+              <a:t>[확인] `ros2 control list_controllers`에서 joint_state_broadcaster와 diff_drive_controller가 모두 active이고 wheel joint state가 publish된다.</a:t>
             </a:r>
           </a:p>
           <a:p>
@@ -3617,7 +3629,7 @@
           <a:lstStyle/>
           <a:p>
             <a:r>
-              <a:t>[설명] 교육생이 Complete·캡처·로그를 저장했는지 확인하고 다음 모듈의 시작 상태를 읽는다.</a:t>
+              <a:t>[설명] 오류를 대신 해결하지 말고 증상부터 우선 확인 순서대로 교육생이 실행하게 한다.</a:t>
             </a:r>
           </a:p>
           <a:p>
@@ -3627,7 +3639,7 @@
           </a:p>
           <a:p>
             <a:r>
-              <a:t>[확인] M17~M20 autonomy command 시작 조건을 말할 수 있다.</a:t>
+              <a:t>[확인] 수정 뒤 첫 검증 명령을 다시 실행한다.</a:t>
             </a:r>
           </a:p>
           <a:p>
@@ -3637,7 +3649,7 @@
           </a:p>
           <a:p>
             <a:r>
-              <a:t>[오류] 오류가 나면 현재 폴더, source, 파일 경로를 먼저 확인한다.</a:t>
+              <a:t>[오류] 슬라이드의 두 대표 오류를 먼저 사용한다.</a:t>
             </a:r>
           </a:p>
         </p:txBody>
@@ -3707,6 +3719,186 @@
           <a:lstStyle/>
           <a:p>
             <a:r>
+              <a:t>[설명] 교육생이 직접 한 값만 바꿔 원인과 결과를 연결하게 한다.</a:t>
+            </a:r>
+          </a:p>
+          <a:p>
+            <a:r>
+              <a:t>[실행] 슬라이드의 명령 또는 파일 작성 단계를 진행한다.</a:t>
+            </a:r>
+          </a:p>
+          <a:p>
+            <a:r>
+              <a:t>[확인] 원래 값과 변경 값을 모두 기록한다.</a:t>
+            </a:r>
+          </a:p>
+          <a:p>
+            <a:r>
+              <a:t>[멈춤] 교육생이 현재 체크포인트를 통과할 때까지 기다린다.</a:t>
+            </a:r>
+          </a:p>
+          <a:p>
+            <a:r>
+              <a:t>[오류] 오류가 나면 현재 폴더, source, 파일 경로를 먼저 확인한다.</a:t>
+            </a:r>
+          </a:p>
+        </p:txBody>
+      </p:sp>
+      <p:sp>
+        <p:nvSpPr>
+          <p:cNvPr id="4" name="Slide Number Placeholder 3"/>
+          <p:cNvSpPr>
+            <a:spLocks noGrp="1"/>
+          </p:cNvSpPr>
+          <p:nvPr>
+            <p:ph type="sldNum" idx="5" sz="quarter"/>
+          </p:nvPr>
+        </p:nvSpPr>
+        <p:spPr/>
+      </p:sp>
+    </p:spTree>
+  </p:cSld>
+  <p:clrMapOvr>
+    <a:masterClrMapping/>
+  </p:clrMapOvr>
+</p:notes>
+</file>
+
+<file path=ppt/notesSlides/notesSlide42.xml><?xml version="1.0" encoding="utf-8"?>
+<p:notes xmlns:a="http://schemas.openxmlformats.org/drawingml/2006/main" xmlns:p="http://schemas.openxmlformats.org/presentationml/2006/main" xmlns:r="http://schemas.openxmlformats.org/officeDocument/2006/relationships">
+  <p:cSld>
+    <p:spTree>
+      <p:nvGrpSpPr>
+        <p:cNvPr id="1" name=""/>
+        <p:cNvGrpSpPr/>
+        <p:nvPr/>
+      </p:nvGrpSpPr>
+      <p:grpSpPr>
+        <a:xfrm>
+          <a:off x="0" y="0"/>
+          <a:ext cx="0" cy="0"/>
+          <a:chOff x="0" y="0"/>
+          <a:chExt cx="0" cy="0"/>
+        </a:xfrm>
+      </p:grpSpPr>
+      <p:sp>
+        <p:nvSpPr>
+          <p:cNvPr id="2" name="Slide Image Placeholder 1"/>
+          <p:cNvSpPr>
+            <a:spLocks noGrp="1"/>
+          </p:cNvSpPr>
+          <p:nvPr>
+            <p:ph type="sldImg" idx="2"/>
+          </p:nvPr>
+        </p:nvSpPr>
+        <p:spPr/>
+      </p:sp>
+      <p:sp>
+        <p:nvSpPr>
+          <p:cNvPr id="3" name="Notes Placeholder 2"/>
+          <p:cNvSpPr>
+            <a:spLocks noGrp="1"/>
+          </p:cNvSpPr>
+          <p:nvPr>
+            <p:ph type="body" idx="3" sz="quarter"/>
+          </p:nvPr>
+        </p:nvSpPr>
+        <p:spPr/>
+        <p:txBody>
+          <a:bodyPr/>
+          <a:lstStyle/>
+          <a:p>
+            <a:r>
+              <a:t>[설명] 교육생이 Complete·캡처·로그를 저장했는지 확인하고 다음 모듈의 시작 상태를 읽는다.</a:t>
+            </a:r>
+          </a:p>
+          <a:p>
+            <a:r>
+              <a:t>[실행] 슬라이드의 명령 또는 파일 작성 단계를 진행한다.</a:t>
+            </a:r>
+          </a:p>
+          <a:p>
+            <a:r>
+              <a:t>[확인] M17~M20 autonomy command 시작 조건을 말할 수 있다.</a:t>
+            </a:r>
+          </a:p>
+          <a:p>
+            <a:r>
+              <a:t>[멈춤] 교육생이 현재 체크포인트를 통과할 때까지 기다린다.</a:t>
+            </a:r>
+          </a:p>
+          <a:p>
+            <a:r>
+              <a:t>[오류] 오류가 나면 현재 폴더, source, 파일 경로를 먼저 확인한다.</a:t>
+            </a:r>
+          </a:p>
+        </p:txBody>
+      </p:sp>
+      <p:sp>
+        <p:nvSpPr>
+          <p:cNvPr id="4" name="Slide Number Placeholder 3"/>
+          <p:cNvSpPr>
+            <a:spLocks noGrp="1"/>
+          </p:cNvSpPr>
+          <p:nvPr>
+            <p:ph type="sldNum" idx="5" sz="quarter"/>
+          </p:nvPr>
+        </p:nvSpPr>
+        <p:spPr/>
+      </p:sp>
+    </p:spTree>
+  </p:cSld>
+  <p:clrMapOvr>
+    <a:masterClrMapping/>
+  </p:clrMapOvr>
+</p:notes>
+</file>
+
+<file path=ppt/notesSlides/notesSlide43.xml><?xml version="1.0" encoding="utf-8"?>
+<p:notes xmlns:a="http://schemas.openxmlformats.org/drawingml/2006/main" xmlns:p="http://schemas.openxmlformats.org/presentationml/2006/main" xmlns:r="http://schemas.openxmlformats.org/officeDocument/2006/relationships">
+  <p:cSld>
+    <p:spTree>
+      <p:nvGrpSpPr>
+        <p:cNvPr id="1" name=""/>
+        <p:cNvGrpSpPr/>
+        <p:nvPr/>
+      </p:nvGrpSpPr>
+      <p:grpSpPr>
+        <a:xfrm>
+          <a:off x="0" y="0"/>
+          <a:ext cx="0" cy="0"/>
+          <a:chOff x="0" y="0"/>
+          <a:chExt cx="0" cy="0"/>
+        </a:xfrm>
+      </p:grpSpPr>
+      <p:sp>
+        <p:nvSpPr>
+          <p:cNvPr id="2" name="Slide Image Placeholder 1"/>
+          <p:cNvSpPr>
+            <a:spLocks noGrp="1"/>
+          </p:cNvSpPr>
+          <p:nvPr>
+            <p:ph type="sldImg" idx="2"/>
+          </p:nvPr>
+        </p:nvSpPr>
+        <p:spPr/>
+      </p:sp>
+      <p:sp>
+        <p:nvSpPr>
+          <p:cNvPr id="3" name="Notes Placeholder 2"/>
+          <p:cNvSpPr>
+            <a:spLocks noGrp="1"/>
+          </p:cNvSpPr>
+          <p:nvPr>
+            <p:ph type="body" idx="3" sz="quarter"/>
+          </p:nvPr>
+        </p:nvSpPr>
+        <p:spPr/>
+        <p:txBody>
+          <a:bodyPr/>
+          <a:lstStyle/>
+          <a:p>
+            <a:r>
               <a:t>[설명] 공식 문서는 버전 차이와 확장 학습을 확인할 때 사용한다.</a:t>
             </a:r>
           </a:p>
@@ -3977,22 +4169,17 @@
           <a:lstStyle/>
           <a:p>
             <a:r>
-              <a:t>[설명] controller type과 wheel parameter는 URDF/SDF joint 이름과 같아야 한다.</a:t>
-            </a:r>
-          </a:p>
-          <a:p>
-            <a:r>
-              <a:t>[실행] nano ~/ros2_curri/agv_ws/src/agv_control/config/controllers.yaml</a:t>
-            </a:r>
-          </a:p>
-          <a:p>
-            <a:r>
-              <a:t>ros2 pkg prefix gz_ros2_control</a:t>
-            </a:r>
-          </a:p>
-          <a:p>
-            <a:r>
-              <a:t>[확인] 명령 출력에서 슬라이드의 확인 항목을 찾는다.</a:t>
+              <a:t>[설명] 파일을 코드 문법보다 먼저 역할·사용법·확인 화면으로 설명한다.</a:t>
+            </a:r>
+          </a:p>
+          <a:p>
+            <a:r>
+              <a:t>[실행] 슬라이드의 명령 또는 파일 작성 단계를 진행한다.</a:t>
+            </a:r>
+          </a:p>
+          <a:p>
+            <a:r>
+              <a:t>[확인] 교육생이 각 파일의 산출물과 확인 위치를 말할 수 있다.</a:t>
             </a:r>
           </a:p>
           <a:p>
@@ -4072,27 +4259,17 @@
           <a:lstStyle/>
           <a:p>
             <a:r>
-              <a:t>[설명] M16은 M09 native DiffDrive와 별도 launch를 사용한다. plugin이 controller_manager를 만들고 spawner가 두 controller를 active로 전환한다.</a:t>
-            </a:r>
-          </a:p>
-          <a:p>
-            <a:r>
-              <a:t>[실행] ros2 launch agv_gazebo ros2_control.launch.py</a:t>
-            </a:r>
-          </a:p>
-          <a:p>
-            <a:r>
-              <a:t># 새 터미널</a:t>
-            </a:r>
-          </a:p>
-          <a:p>
-            <a:r>
-              <a:t>ros2 control list_controllers -c /controller_manager</a:t>
-            </a:r>
-          </a:p>
-          <a:p>
-            <a:r>
-              <a:t>[확인] 명령 출력에서 슬라이드의 확인 항목을 찾는다.</a:t>
+              <a:t>[설명] 파일을 코드 문법보다 먼저 역할·사용법·확인 화면으로 설명한다.</a:t>
+            </a:r>
+          </a:p>
+          <a:p>
+            <a:r>
+              <a:t>[실행] 슬라이드의 명령 또는 파일 작성 단계를 진행한다.</a:t>
+            </a:r>
+          </a:p>
+          <a:p>
+            <a:r>
+              <a:t>[확인] 교육생이 각 파일의 산출물과 확인 위치를 말할 수 있다.</a:t>
             </a:r>
           </a:p>
           <a:p>
@@ -4172,7 +4349,7 @@
           <a:lstStyle/>
           <a:p>
             <a:r>
-              <a:t>[설명] ~/ros2_curri/agv_ws/src/agv_control/config/controllers.yaml의 전체 파일을 1/2 구간으로 작성한다.</a:t>
+              <a:t>[설명] controller type과 wheel parameter는 URDF/SDF joint 이름과 같아야 한다.</a:t>
             </a:r>
           </a:p>
           <a:p>
@@ -4182,7 +4359,12 @@
           </a:p>
           <a:p>
             <a:r>
-              <a:t>[확인] 코드를 저장하고 다음 코드 슬라이드 또는 build 단계로 이동한다.</a:t>
+              <a:t>ros2 pkg prefix gz_ros2_control</a:t>
+            </a:r>
+          </a:p>
+          <a:p>
+            <a:r>
+              <a:t>[확인] 명령 출력에서 슬라이드의 확인 항목을 찾는다.</a:t>
             </a:r>
           </a:p>
           <a:p>
@@ -4192,7 +4374,7 @@
           </a:p>
           <a:p>
             <a:r>
-              <a:t>[오류] 들여쓰기·XML 태그·따옴표가 슬라이드와 정확히 같은지 확인한다.</a:t>
+              <a:t>[오류] 오류가 나면 현재 폴더, source, 파일 경로를 먼저 확인한다.</a:t>
             </a:r>
           </a:p>
         </p:txBody>
@@ -7565,7 +7747,7 @@
               </a:defRPr>
             </a:pPr>
             <a:r>
-              <a:t>파일을 계속 작성하고 저장한다 (2/2)</a:t>
+              <a:t>실제 controller를 활성화한다</a:t>
             </a:r>
           </a:p>
         </p:txBody>
@@ -7604,7 +7786,7 @@
               </a:defRPr>
             </a:pPr>
             <a:r>
-              <a:t>~/ros2_curri/agv_ws/src/agv_control/config/controllers.yaml</a:t>
+              <a:t>한 장에는 한 행동만 수행합니다.</a:t>
             </a:r>
           </a:p>
         </p:txBody>
@@ -7740,7 +7922,7 @@
               </a:defRPr>
             </a:pPr>
             <a:r>
-              <a:t>현재 단계 4/5    |    현재 폴더 ~/ros2_curri/agv_ws    |    현재 터미널</a:t>
+              <a:t>현재 단계 2/2    |    현재 폴더 ~/ros2_curri/agv_ws    |    새 터미널</a:t>
             </a:r>
           </a:p>
         </p:txBody>
@@ -7753,25 +7935,64 @@
         </p:nvSpPr>
         <p:spPr>
           <a:xfrm>
-            <a:off x="658368" y="1627632"/>
-            <a:ext cx="10972800" cy="256032"/>
-          </a:xfrm>
-          <a:prstGeom prst="rect">
-            <a:avLst/>
-          </a:prstGeom>
-          <a:noFill/>
-        </p:spPr>
-        <p:txBody>
-          <a:bodyPr wrap="square" lIns="73152" rIns="73152" tIns="36576" bIns="36576">
-            <a:spAutoFit/>
-          </a:bodyPr>
-          <a:lstStyle/>
-          <a:p>
-            <a:pPr algn="l">
-              <a:spcAft>
-                <a:spcPts val="0"/>
-              </a:spcAft>
-              <a:defRPr sz="1500" b="1">
+            <a:off x="676656" y="1764792"/>
+            <a:ext cx="1828800" cy="347472"/>
+          </a:xfrm>
+          <a:prstGeom prst="rect">
+            <a:avLst/>
+          </a:prstGeom>
+          <a:noFill/>
+        </p:spPr>
+        <p:txBody>
+          <a:bodyPr wrap="square" lIns="73152" rIns="73152" tIns="36576" bIns="36576">
+            <a:spAutoFit/>
+          </a:bodyPr>
+          <a:lstStyle/>
+          <a:p>
+            <a:pPr algn="l">
+              <a:spcAft>
+                <a:spcPts val="0"/>
+              </a:spcAft>
+              <a:defRPr sz="1800" b="1">
+                <a:solidFill>
+                  <a:srgbClr val="225B9B"/>
+                </a:solidFill>
+                <a:latin typeface="Noto Sans CJK KR"/>
+              </a:defRPr>
+            </a:pPr>
+            <a:r>
+              <a:t>왜 하는가</a:t>
+            </a:r>
+          </a:p>
+        </p:txBody>
+      </p:sp>
+      <p:sp>
+        <p:nvSpPr>
+          <p:cNvPr id="8" name="TextBox 7"/>
+          <p:cNvSpPr txBox="1"/>
+          <p:nvPr/>
+        </p:nvSpPr>
+        <p:spPr>
+          <a:xfrm>
+            <a:off x="676656" y="2103120"/>
+            <a:ext cx="10789920" cy="512064"/>
+          </a:xfrm>
+          <a:prstGeom prst="rect">
+            <a:avLst/>
+          </a:prstGeom>
+          <a:noFill/>
+        </p:spPr>
+        <p:txBody>
+          <a:bodyPr wrap="square" lIns="73152" rIns="73152" tIns="36576" bIns="36576">
+            <a:spAutoFit/>
+          </a:bodyPr>
+          <a:lstStyle/>
+          <a:p>
+            <a:pPr algn="l">
+              <a:spcAft>
+                <a:spcPts val="0"/>
+              </a:spcAft>
+              <a:defRPr sz="2000" b="0">
                 <a:solidFill>
                   <a:srgbClr val="122C4E"/>
                 </a:solidFill>
@@ -7779,85 +8000,23 @@
               </a:defRPr>
             </a:pPr>
             <a:r>
-              <a:t>이번 단계: 파일의 전체 내용을 중간 생략 없이 작성합니다. 아래 줄 범위를 끝까지 입력하세요.</a:t>
-            </a:r>
-          </a:p>
-        </p:txBody>
-      </p:sp>
-      <p:sp>
-        <p:nvSpPr>
-          <p:cNvPr id="8" name="Rectangle 7"/>
+              <a:t>M16은 M09 native DiffDrive와 별도 launch를 사용한다. plugin이 controller_manager를 만들고 spawner가 두 controller를 active로 전환한다.</a:t>
+            </a:r>
+          </a:p>
+        </p:txBody>
+      </p:sp>
+      <p:sp>
+        <p:nvSpPr>
+          <p:cNvPr id="9" name="Rounded Rectangle 8"/>
           <p:cNvSpPr/>
           <p:nvPr/>
         </p:nvSpPr>
         <p:spPr>
           <a:xfrm>
-            <a:off x="658368" y="1956816"/>
-            <a:ext cx="10972800" cy="603504"/>
-          </a:xfrm>
-          <a:prstGeom prst="rect">
-            <a:avLst/>
-          </a:prstGeom>
-          <a:solidFill>
-            <a:srgbClr val="F4F7FB"/>
-          </a:solidFill>
-          <a:ln>
-            <a:solidFill>
-              <a:srgbClr val="F4F7FB"/>
-            </a:solidFill>
-          </a:ln>
-        </p:spPr>
-        <p:style>
-          <a:lnRef idx="1">
-            <a:schemeClr val="accent1"/>
-          </a:lnRef>
-          <a:fillRef idx="3">
-            <a:schemeClr val="accent1"/>
-          </a:fillRef>
-          <a:effectRef idx="2">
-            <a:schemeClr val="accent1"/>
-          </a:effectRef>
-          <a:fontRef idx="minor">
-            <a:schemeClr val="lt1"/>
-          </a:fontRef>
-        </p:style>
-        <p:txBody>
-          <a:bodyPr rtlCol="0" anchor="ctr" wrap="square" lIns="73152" rIns="73152" tIns="36576" bIns="36576"/>
-          <a:lstStyle/>
-          <a:p>
-            <a:pPr algn="l">
-              <a:spcAft>
-                <a:spcPts val="0"/>
-              </a:spcAft>
-              <a:defRPr sz="1400" b="0">
-                <a:solidFill>
-                  <a:srgbClr val="122C4E"/>
-                </a:solidFill>
-                <a:latin typeface="DejaVu Sans Mono"/>
-              </a:defRPr>
-            </a:pPr>
-            <a:r>
-              <a:t>파일 생성: mkdir -p ~/ros2_curri/agv_ws/src/agv_control/config</a:t>
-            </a:r>
-            <a:br/>
-            <a:r>
-              <a:t>파일 열기: nano ~/ros2_curri/agv_ws/src/agv_control/config/controllers.yaml</a:t>
-            </a:r>
-          </a:p>
-        </p:txBody>
-      </p:sp>
-      <p:sp>
-        <p:nvSpPr>
-          <p:cNvPr id="9" name="Rectangle 8"/>
-          <p:cNvSpPr/>
-          <p:nvPr/>
-        </p:nvSpPr>
-        <p:spPr>
-          <a:xfrm>
-            <a:off x="658368" y="2706624"/>
-            <a:ext cx="10972800" cy="3364992"/>
-          </a:xfrm>
-          <a:prstGeom prst="rect">
+            <a:off x="676656" y="2871216"/>
+            <a:ext cx="10835640" cy="2331720"/>
+          </a:xfrm>
+          <a:prstGeom prst="roundRect">
             <a:avLst/>
           </a:prstGeom>
           <a:solidFill>
@@ -7884,14 +8043,14 @@
           </a:fontRef>
         </p:style>
         <p:txBody>
-          <a:bodyPr rtlCol="0" anchor="ctr" wrap="square" lIns="164592" rIns="164592" tIns="109728" bIns="36576"/>
-          <a:lstStyle/>
-          <a:p>
-            <a:pPr algn="l">
-              <a:spcAft>
-                <a:spcPts val="0"/>
-              </a:spcAft>
-              <a:defRPr sz="1400" b="0">
+          <a:bodyPr rtlCol="0" anchor="ctr" wrap="square" lIns="73152" rIns="73152" tIns="36576" bIns="36576"/>
+          <a:lstStyle/>
+          <a:p>
+            <a:pPr algn="l">
+              <a:spcAft>
+                <a:spcPts val="0"/>
+              </a:spcAft>
+              <a:defRPr sz="1600" b="0">
                 <a:solidFill>
                   <a:srgbClr val="FFFFFF"/>
                 </a:solidFill>
@@ -7899,19 +8058,15 @@
               </a:defRPr>
             </a:pPr>
             <a:r>
-              <a:t>    wheel_radius: 0.08</a:t>
-            </a:r>
-            <a:br/>
-            <a:r>
-              <a:t>    base_frame_id: base_link</a:t>
-            </a:r>
-            <a:br/>
-            <a:r>
-              <a:t>    odom_frame_id: odom</a:t>
-            </a:r>
-            <a:br/>
-            <a:r>
-              <a:t>    publish_rate: 50.0</a:t>
+              <a:t>ros2 launch agv_gazebo ros2_control.launch.py</a:t>
+            </a:r>
+            <a:br/>
+            <a:r>
+              <a:t># 새 터미널</a:t>
+            </a:r>
+            <a:br/>
+            <a:r>
+              <a:t>ros2 control list_controllers -c /controller_manager</a:t>
             </a:r>
           </a:p>
         </p:txBody>
@@ -7924,33 +8079,72 @@
         </p:nvSpPr>
         <p:spPr>
           <a:xfrm>
-            <a:off x="749808" y="6181344"/>
-            <a:ext cx="10789920" cy="201168"/>
-          </a:xfrm>
-          <a:prstGeom prst="rect">
-            <a:avLst/>
-          </a:prstGeom>
-          <a:noFill/>
-        </p:spPr>
-        <p:txBody>
-          <a:bodyPr wrap="square" lIns="73152" rIns="73152" tIns="36576" bIns="36576">
-            <a:spAutoFit/>
-          </a:bodyPr>
-          <a:lstStyle/>
-          <a:p>
-            <a:pPr algn="l">
-              <a:spcAft>
-                <a:spcPts val="0"/>
-              </a:spcAft>
-              <a:defRPr sz="1000" b="0">
-                <a:solidFill>
-                  <a:srgbClr val="5C6672"/>
-                </a:solidFill>
-                <a:latin typeface="Noto Sans CJK KR"/>
-              </a:defRPr>
-            </a:pPr>
-            <a:r>
-              <a:t>파일 전체 2/2 · 이 슬라이드 다음에 같은 파일의 나머지 줄이 이어집니다.</a:t>
+            <a:off x="768096" y="5468112"/>
+            <a:ext cx="1143000" cy="256032"/>
+          </a:xfrm>
+          <a:prstGeom prst="rect">
+            <a:avLst/>
+          </a:prstGeom>
+          <a:noFill/>
+        </p:spPr>
+        <p:txBody>
+          <a:bodyPr wrap="square" lIns="73152" rIns="73152" tIns="36576" bIns="36576">
+            <a:spAutoFit/>
+          </a:bodyPr>
+          <a:lstStyle/>
+          <a:p>
+            <a:pPr algn="l">
+              <a:spcAft>
+                <a:spcPts val="0"/>
+              </a:spcAft>
+              <a:defRPr sz="1800" b="1">
+                <a:solidFill>
+                  <a:srgbClr val="2A8B5A"/>
+                </a:solidFill>
+                <a:latin typeface="Noto Sans CJK KR"/>
+              </a:defRPr>
+            </a:pPr>
+            <a:r>
+              <a:t>확인</a:t>
+            </a:r>
+          </a:p>
+        </p:txBody>
+      </p:sp>
+      <p:sp>
+        <p:nvSpPr>
+          <p:cNvPr id="11" name="TextBox 10"/>
+          <p:cNvSpPr txBox="1"/>
+          <p:nvPr/>
+        </p:nvSpPr>
+        <p:spPr>
+          <a:xfrm>
+            <a:off x="768096" y="5742432"/>
+            <a:ext cx="10561320" cy="347472"/>
+          </a:xfrm>
+          <a:prstGeom prst="rect">
+            <a:avLst/>
+          </a:prstGeom>
+          <a:noFill/>
+        </p:spPr>
+        <p:txBody>
+          <a:bodyPr wrap="square" lIns="73152" rIns="73152" tIns="36576" bIns="36576">
+            <a:spAutoFit/>
+          </a:bodyPr>
+          <a:lstStyle/>
+          <a:p>
+            <a:pPr algn="l">
+              <a:spcAft>
+                <a:spcPts val="0"/>
+              </a:spcAft>
+              <a:defRPr sz="1800" b="0">
+                <a:solidFill>
+                  <a:srgbClr val="122C4E"/>
+                </a:solidFill>
+                <a:latin typeface="Noto Sans CJK KR"/>
+              </a:defRPr>
+            </a:pPr>
+            <a:r>
+              <a:t>명령의 출력에서 topic·frame·파일 이름 또는 성공 메시지를 찾으면 이 단계가 완료됩니다.</a:t>
             </a:r>
           </a:p>
         </p:txBody>
@@ -8007,7 +8201,7 @@
               </a:defRPr>
             </a:pPr>
             <a:r>
-              <a:t>파일을 새로 만들고 저장한다 (1/5)</a:t>
+              <a:t>파일을 새로 만들고 저장한다 (1/2)</a:t>
             </a:r>
           </a:p>
         </p:txBody>
@@ -8046,7 +8240,7 @@
               </a:defRPr>
             </a:pPr>
             <a:r>
-              <a:t>~/ros2_curri/agv_ws/src/agv_description/urdf/agv_ros2_control.urdf.xacro</a:t>
+              <a:t>~/ros2_curri/agv_ws/src/agv_control/config/controllers.yaml</a:t>
             </a:r>
           </a:p>
         </p:txBody>
@@ -8182,7 +8376,7 @@
               </a:defRPr>
             </a:pPr>
             <a:r>
-              <a:t>현재 단계 5/10    |    현재 폴더 ~/ros2_curri/agv_ws    |    현재 터미널</a:t>
+              <a:t>현재 단계 3/5    |    현재 폴더 ~/ros2_curri/agv_ws    |    현재 터미널</a:t>
             </a:r>
           </a:p>
         </p:txBody>
@@ -8279,11 +8473,11 @@
               </a:defRPr>
             </a:pPr>
             <a:r>
-              <a:t>파일 생성: mkdir -p ~/ros2_curri/agv_ws/src/agv_description/urdf</a:t>
-            </a:r>
-            <a:br/>
-            <a:r>
-              <a:t>파일 열기: nano ~/ros2_curri/agv_ws/src/agv_description/urdf/agv_ros2_control.urdf.xacro</a:t>
+              <a:t>파일 생성: mkdir -p ~/ros2_curri/agv_ws/src/agv_control/config</a:t>
+            </a:r>
+            <a:br/>
+            <a:r>
+              <a:t>파일 열기: nano ~/ros2_curri/agv_ws/src/agv_control/config/controllers.yaml</a:t>
             </a:r>
           </a:p>
         </p:txBody>
@@ -8341,51 +8535,51 @@
               </a:defRPr>
             </a:pPr>
             <a:r>
-              <a:t>&lt;?xml version="1.0" ?&gt;</a:t>
-            </a:r>
-            <a:br/>
-            <a:r>
-              <a:t>&lt;!-- M16 controller description. Gazebo uses model.sdf for physics; this URDF gives</a:t>
-            </a:r>
-            <a:br/>
-            <a:r>
-              <a:t>  controller_manager its interfaces and RViz the matching joint tree. --&gt;</a:t>
-            </a:r>
-            <a:br/>
-            <a:r>
-              <a:t>&lt;robot xmlns:xacro="http://www.ros.org/wiki/xacro" name="agv_ros2_control"&gt;</a:t>
-            </a:r>
-            <a:br/>
-            <a:r>
-              <a:t>  </a:t>
-            </a:r>
-            <a:br/>
-            <a:r>
-              <a:t>  </a:t>
-            </a:r>
-            <a:br/>
-            <a:r>
-              <a:t>  &lt;link name="base_link"/&gt;</a:t>
-            </a:r>
-            <a:br/>
-            <a:r>
-              <a:t>  &lt;link name="left_wheel_link"/&gt;</a:t>
-            </a:r>
-            <a:br/>
-            <a:r>
-              <a:t>  &lt;link name="right_wheel_link"/&gt;</a:t>
-            </a:r>
-            <a:br/>
-            <a:r>
-              <a:t>  </a:t>
-            </a:r>
-            <a:br/>
-            <a:r>
-              <a:t>  </a:t>
-            </a:r>
-            <a:br/>
-            <a:r>
-              <a:t>  &lt;joint name="left_wheel_joint" type="continuous"&gt;</a:t>
+              <a:t>controller_manager:</a:t>
+            </a:r>
+            <a:br/>
+            <a:r>
+              <a:t>  ros__parameters:</a:t>
+            </a:r>
+            <a:br/>
+            <a:r>
+              <a:t>    update_rate: 50</a:t>
+            </a:r>
+            <a:br/>
+            <a:r>
+              <a:t>    joint_state_broadcaster:</a:t>
+            </a:r>
+            <a:br/>
+            <a:r>
+              <a:t>      type: joint_state_broadcaster/JointStateBroadcaster</a:t>
+            </a:r>
+            <a:br/>
+            <a:r>
+              <a:t>    diff_drive_controller:</a:t>
+            </a:r>
+            <a:br/>
+            <a:r>
+              <a:t>      type: diff_drive_controller/DiffDriveController</a:t>
+            </a:r>
+            <a:br/>
+            <a:r>
+              <a:t>diff_drive_controller:</a:t>
+            </a:r>
+            <a:br/>
+            <a:r>
+              <a:t>  ros__parameters:</a:t>
+            </a:r>
+            <a:br/>
+            <a:r>
+              <a:t>    left_wheel_names: [left_wheel_joint]</a:t>
+            </a:r>
+            <a:br/>
+            <a:r>
+              <a:t>    right_wheel_names: [right_wheel_joint]</a:t>
+            </a:r>
+            <a:br/>
+            <a:r>
+              <a:t>    wheel_separation: 0.38</a:t>
             </a:r>
           </a:p>
         </p:txBody>
@@ -8424,7 +8618,7 @@
               </a:defRPr>
             </a:pPr>
             <a:r>
-              <a:t>파일 전체 1/5 · 이 슬라이드 다음에 같은 파일의 나머지 줄이 이어집니다.</a:t>
+              <a:t>파일 전체 1/2 · 이 슬라이드 다음에 같은 파일의 나머지 줄이 이어집니다.</a:t>
             </a:r>
           </a:p>
         </p:txBody>
@@ -8481,7 +8675,7 @@
               </a:defRPr>
             </a:pPr>
             <a:r>
-              <a:t>파일을 계속 작성하고 저장한다 (2/5)</a:t>
+              <a:t>파일을 계속 작성하고 저장한다 (2/2)</a:t>
             </a:r>
           </a:p>
         </p:txBody>
@@ -8520,7 +8714,7 @@
               </a:defRPr>
             </a:pPr>
             <a:r>
-              <a:t>~/ros2_curri/agv_ws/src/agv_description/urdf/agv_ros2_control.urdf.xacro</a:t>
+              <a:t>~/ros2_curri/agv_ws/src/agv_control/config/controllers.yaml</a:t>
             </a:r>
           </a:p>
         </p:txBody>
@@ -8656,7 +8850,7 @@
               </a:defRPr>
             </a:pPr>
             <a:r>
-              <a:t>현재 단계 6/10    |    현재 폴더 ~/ros2_curri/agv_ws    |    현재 터미널</a:t>
+              <a:t>현재 단계 4/5    |    현재 폴더 ~/ros2_curri/agv_ws    |    현재 터미널</a:t>
             </a:r>
           </a:p>
         </p:txBody>
@@ -8753,11 +8947,11 @@
               </a:defRPr>
             </a:pPr>
             <a:r>
-              <a:t>파일 생성: mkdir -p ~/ros2_curri/agv_ws/src/agv_description/urdf</a:t>
-            </a:r>
-            <a:br/>
-            <a:r>
-              <a:t>파일 열기: nano ~/ros2_curri/agv_ws/src/agv_description/urdf/agv_ros2_control.urdf.xacro</a:t>
+              <a:t>파일 생성: mkdir -p ~/ros2_curri/agv_ws/src/agv_control/config</a:t>
+            </a:r>
+            <a:br/>
+            <a:r>
+              <a:t>파일 열기: nano ~/ros2_curri/agv_ws/src/agv_control/config/controllers.yaml</a:t>
             </a:r>
           </a:p>
         </p:txBody>
@@ -8815,51 +9009,19 @@
               </a:defRPr>
             </a:pPr>
             <a:r>
-              <a:t>    &lt;parent link="base_link"/&gt;</a:t>
-            </a:r>
-            <a:br/>
-            <a:r>
-              <a:t>    &lt;child link="left_wheel_link"/&gt;</a:t>
-            </a:r>
-            <a:br/>
-            <a:r>
-              <a:t>    &lt;origin xyz="0 0.19 -0.08"/&gt;</a:t>
-            </a:r>
-            <a:br/>
-            <a:r>
-              <a:t>    &lt;axis xyz="0 1 0"/&gt;</a:t>
-            </a:r>
-            <a:br/>
-            <a:r>
-              <a:t>  &lt;/joint&gt;</a:t>
-            </a:r>
-            <a:br/>
-            <a:r>
-              <a:t>  </a:t>
-            </a:r>
-            <a:br/>
-            <a:r>
-              <a:t>  </a:t>
-            </a:r>
-            <a:br/>
-            <a:r>
-              <a:t>  &lt;joint name="right_wheel_joint" type="continuous"&gt;</a:t>
-            </a:r>
-            <a:br/>
-            <a:r>
-              <a:t>    &lt;parent link="base_link"/&gt;</a:t>
-            </a:r>
-            <a:br/>
-            <a:r>
-              <a:t>    &lt;child link="right_wheel_link"/&gt;</a:t>
-            </a:r>
-            <a:br/>
-            <a:r>
-              <a:t>    &lt;origin xyz="0 -0.19 -0.08"/&gt;</a:t>
-            </a:r>
-            <a:br/>
-            <a:r>
-              <a:t>    &lt;axis xyz="0 1 0"/&gt;</a:t>
+              <a:t>    wheel_radius: 0.08</a:t>
+            </a:r>
+            <a:br/>
+            <a:r>
+              <a:t>    base_frame_id: base_link</a:t>
+            </a:r>
+            <a:br/>
+            <a:r>
+              <a:t>    odom_frame_id: odom</a:t>
+            </a:r>
+            <a:br/>
+            <a:r>
+              <a:t>    publish_rate: 50.0</a:t>
             </a:r>
           </a:p>
         </p:txBody>
@@ -8898,7 +9060,7 @@
               </a:defRPr>
             </a:pPr>
             <a:r>
-              <a:t>파일 전체 2/5 · 이 슬라이드 다음에 같은 파일의 나머지 줄이 이어집니다.</a:t>
+              <a:t>파일 전체 2/2 · 이 슬라이드 다음에 같은 파일의 나머지 줄이 이어집니다.</a:t>
             </a:r>
           </a:p>
         </p:txBody>
@@ -8955,7 +9117,7 @@
               </a:defRPr>
             </a:pPr>
             <a:r>
-              <a:t>파일을 계속 작성하고 저장한다 (3/5)</a:t>
+              <a:t>파일을 새로 만들고 저장한다 (1/5)</a:t>
             </a:r>
           </a:p>
         </p:txBody>
@@ -9130,7 +9292,7 @@
               </a:defRPr>
             </a:pPr>
             <a:r>
-              <a:t>현재 단계 7/10    |    현재 폴더 ~/ros2_curri/agv_ws    |    현재 터미널</a:t>
+              <a:t>현재 단계 5/10    |    현재 폴더 ~/ros2_curri/agv_ws    |    현재 터미널</a:t>
             </a:r>
           </a:p>
         </p:txBody>
@@ -9289,7 +9451,19 @@
               </a:defRPr>
             </a:pPr>
             <a:r>
-              <a:t>  &lt;/joint&gt;</a:t>
+              <a:t>&lt;?xml version="1.0" ?&gt;</a:t>
+            </a:r>
+            <a:br/>
+            <a:r>
+              <a:t>&lt;!-- M16 controller description. Gazebo uses model.sdf for physics; this URDF gives</a:t>
+            </a:r>
+            <a:br/>
+            <a:r>
+              <a:t>  controller_manager its interfaces and RViz the matching joint tree. --&gt;</a:t>
+            </a:r>
+            <a:br/>
+            <a:r>
+              <a:t>&lt;robot xmlns:xacro="http://www.ros.org/wiki/xacro" name="agv_ros2_control"&gt;</a:t>
             </a:r>
             <a:br/>
             <a:r>
@@ -9301,39 +9475,27 @@
             </a:r>
             <a:br/>
             <a:r>
-              <a:t>  &lt;ros2_control name="GazeboSimSystem" type="system"&gt;</a:t>
-            </a:r>
-            <a:br/>
-            <a:r>
-              <a:t>    &lt;hardware&gt;</a:t>
-            </a:r>
-            <a:br/>
-            <a:r>
-              <a:t>      &lt;plugin&gt;gz_ros2_control/GazeboSimSystem&lt;/plugin&gt;</a:t>
-            </a:r>
-            <a:br/>
-            <a:r>
-              <a:t>    &lt;/hardware&gt;</a:t>
-            </a:r>
-            <a:br/>
-            <a:r>
-              <a:t>    &lt;joint name="left_wheel_joint"&gt;</a:t>
-            </a:r>
-            <a:br/>
-            <a:r>
-              <a:t>      &lt;command_interface name="velocity"&gt;</a:t>
-            </a:r>
-            <a:br/>
-            <a:r>
-              <a:t>        &lt;param name="min"&gt;-20&lt;/param&gt;</a:t>
-            </a:r>
-            <a:br/>
-            <a:r>
-              <a:t>        &lt;param name="max"&gt;20&lt;/param&gt;</a:t>
-            </a:r>
-            <a:br/>
-            <a:r>
-              <a:t>      &lt;/command_interface&gt;</a:t>
+              <a:t>  &lt;link name="base_link"/&gt;</a:t>
+            </a:r>
+            <a:br/>
+            <a:r>
+              <a:t>  &lt;link name="left_wheel_link"/&gt;</a:t>
+            </a:r>
+            <a:br/>
+            <a:r>
+              <a:t>  &lt;link name="right_wheel_link"/&gt;</a:t>
+            </a:r>
+            <a:br/>
+            <a:r>
+              <a:t>  </a:t>
+            </a:r>
+            <a:br/>
+            <a:r>
+              <a:t>  </a:t>
+            </a:r>
+            <a:br/>
+            <a:r>
+              <a:t>  &lt;joint name="left_wheel_joint" type="continuous"&gt;</a:t>
             </a:r>
           </a:p>
         </p:txBody>
@@ -9372,7 +9534,7 @@
               </a:defRPr>
             </a:pPr>
             <a:r>
-              <a:t>파일 전체 3/5 · 이 슬라이드 다음에 같은 파일의 나머지 줄이 이어집니다.</a:t>
+              <a:t>파일 전체 1/5 · 이 슬라이드 다음에 같은 파일의 나머지 줄이 이어집니다.</a:t>
             </a:r>
           </a:p>
         </p:txBody>
@@ -9429,7 +9591,7 @@
               </a:defRPr>
             </a:pPr>
             <a:r>
-              <a:t>파일을 계속 작성하고 저장한다 (4/5)</a:t>
+              <a:t>파일을 계속 작성하고 저장한다 (2/5)</a:t>
             </a:r>
           </a:p>
         </p:txBody>
@@ -9604,7 +9766,7 @@
               </a:defRPr>
             </a:pPr>
             <a:r>
-              <a:t>현재 단계 8/10    |    현재 폴더 ~/ros2_curri/agv_ws    |    현재 터미널</a:t>
+              <a:t>현재 단계 6/10    |    현재 폴더 ~/ros2_curri/agv_ws    |    현재 터미널</a:t>
             </a:r>
           </a:p>
         </p:txBody>
@@ -9763,51 +9925,51 @@
               </a:defRPr>
             </a:pPr>
             <a:r>
-              <a:t>      &lt;state_interface name="position"/&gt;</a:t>
-            </a:r>
-            <a:br/>
-            <a:r>
-              <a:t>      &lt;state_interface name="velocity"/&gt;</a:t>
-            </a:r>
-            <a:br/>
-            <a:r>
-              <a:t>    &lt;/joint&gt;</a:t>
-            </a:r>
-            <a:br/>
-            <a:r>
-              <a:t>    &lt;joint name="right_wheel_joint"&gt;</a:t>
-            </a:r>
-            <a:br/>
-            <a:r>
-              <a:t>      &lt;command_interface name="velocity"&gt;</a:t>
-            </a:r>
-            <a:br/>
-            <a:r>
-              <a:t>        &lt;param name="min"&gt;-20&lt;/param&gt;</a:t>
-            </a:r>
-            <a:br/>
-            <a:r>
-              <a:t>        &lt;param name="max"&gt;20&lt;/param&gt;</a:t>
-            </a:r>
-            <a:br/>
-            <a:r>
-              <a:t>      &lt;/command_interface&gt;</a:t>
-            </a:r>
-            <a:br/>
-            <a:r>
-              <a:t>      &lt;state_interface name="position"/&gt;</a:t>
-            </a:r>
-            <a:br/>
-            <a:r>
-              <a:t>      &lt;state_interface name="velocity"/&gt;</a:t>
-            </a:r>
-            <a:br/>
-            <a:r>
-              <a:t>    &lt;/joint&gt;</a:t>
-            </a:r>
-            <a:br/>
-            <a:r>
-              <a:t>  &lt;/ros2_control&gt;</a:t>
+              <a:t>    &lt;parent link="base_link"/&gt;</a:t>
+            </a:r>
+            <a:br/>
+            <a:r>
+              <a:t>    &lt;child link="left_wheel_link"/&gt;</a:t>
+            </a:r>
+            <a:br/>
+            <a:r>
+              <a:t>    &lt;origin xyz="0 0.19 -0.08"/&gt;</a:t>
+            </a:r>
+            <a:br/>
+            <a:r>
+              <a:t>    &lt;axis xyz="0 1 0"/&gt;</a:t>
+            </a:r>
+            <a:br/>
+            <a:r>
+              <a:t>  &lt;/joint&gt;</a:t>
+            </a:r>
+            <a:br/>
+            <a:r>
+              <a:t>  </a:t>
+            </a:r>
+            <a:br/>
+            <a:r>
+              <a:t>  </a:t>
+            </a:r>
+            <a:br/>
+            <a:r>
+              <a:t>  &lt;joint name="right_wheel_joint" type="continuous"&gt;</a:t>
+            </a:r>
+            <a:br/>
+            <a:r>
+              <a:t>    &lt;parent link="base_link"/&gt;</a:t>
+            </a:r>
+            <a:br/>
+            <a:r>
+              <a:t>    &lt;child link="right_wheel_link"/&gt;</a:t>
+            </a:r>
+            <a:br/>
+            <a:r>
+              <a:t>    &lt;origin xyz="0 -0.19 -0.08"/&gt;</a:t>
+            </a:r>
+            <a:br/>
+            <a:r>
+              <a:t>    &lt;axis xyz="0 1 0"/&gt;</a:t>
             </a:r>
           </a:p>
         </p:txBody>
@@ -9846,7 +10008,7 @@
               </a:defRPr>
             </a:pPr>
             <a:r>
-              <a:t>파일 전체 4/5 · 이 슬라이드 다음에 같은 파일의 나머지 줄이 이어집니다.</a:t>
+              <a:t>파일 전체 2/5 · 이 슬라이드 다음에 같은 파일의 나머지 줄이 이어집니다.</a:t>
             </a:r>
           </a:p>
         </p:txBody>
@@ -9903,7 +10065,7 @@
               </a:defRPr>
             </a:pPr>
             <a:r>
-              <a:t>파일을 계속 작성하고 저장한다 (5/5)</a:t>
+              <a:t>파일을 계속 작성하고 저장한다 (3/5)</a:t>
             </a:r>
           </a:p>
         </p:txBody>
@@ -10078,7 +10240,7 @@
               </a:defRPr>
             </a:pPr>
             <a:r>
-              <a:t>현재 단계 9/10    |    현재 폴더 ~/ros2_curri/agv_ws    |    현재 터미널</a:t>
+              <a:t>현재 단계 7/10    |    현재 폴더 ~/ros2_curri/agv_ws    |    현재 터미널</a:t>
             </a:r>
           </a:p>
         </p:txBody>
@@ -10237,12 +10399,51 @@
               </a:defRPr>
             </a:pPr>
             <a:r>
+              <a:t>  &lt;/joint&gt;</a:t>
+            </a:r>
+            <a:br/>
+            <a:r>
               <a:t>  </a:t>
             </a:r>
             <a:br/>
-            <a:br/>
-            <a:r>
-              <a:t>&lt;/robot&gt;</a:t>
+            <a:r>
+              <a:t>  </a:t>
+            </a:r>
+            <a:br/>
+            <a:r>
+              <a:t>  &lt;ros2_control name="GazeboSimSystem" type="system"&gt;</a:t>
+            </a:r>
+            <a:br/>
+            <a:r>
+              <a:t>    &lt;hardware&gt;</a:t>
+            </a:r>
+            <a:br/>
+            <a:r>
+              <a:t>      &lt;plugin&gt;gz_ros2_control/GazeboSimSystem&lt;/plugin&gt;</a:t>
+            </a:r>
+            <a:br/>
+            <a:r>
+              <a:t>    &lt;/hardware&gt;</a:t>
+            </a:r>
+            <a:br/>
+            <a:r>
+              <a:t>    &lt;joint name="left_wheel_joint"&gt;</a:t>
+            </a:r>
+            <a:br/>
+            <a:r>
+              <a:t>      &lt;command_interface name="velocity"&gt;</a:t>
+            </a:r>
+            <a:br/>
+            <a:r>
+              <a:t>        &lt;param name="min"&gt;-20&lt;/param&gt;</a:t>
+            </a:r>
+            <a:br/>
+            <a:r>
+              <a:t>        &lt;param name="max"&gt;20&lt;/param&gt;</a:t>
+            </a:r>
+            <a:br/>
+            <a:r>
+              <a:t>      &lt;/command_interface&gt;</a:t>
             </a:r>
           </a:p>
         </p:txBody>
@@ -10281,7 +10482,7 @@
               </a:defRPr>
             </a:pPr>
             <a:r>
-              <a:t>파일 전체 5/5 · 이 슬라이드 다음에 같은 파일의 나머지 줄이 이어집니다.</a:t>
+              <a:t>파일 전체 3/5 · 이 슬라이드 다음에 같은 파일의 나머지 줄이 이어집니다.</a:t>
             </a:r>
           </a:p>
         </p:txBody>
@@ -10338,7 +10539,7 @@
               </a:defRPr>
             </a:pPr>
             <a:r>
-              <a:t>파일을 새로 만들고 저장한다 (1/15)</a:t>
+              <a:t>파일을 계속 작성하고 저장한다 (4/5)</a:t>
             </a:r>
           </a:p>
         </p:txBody>
@@ -10377,7 +10578,7 @@
               </a:defRPr>
             </a:pPr>
             <a:r>
-              <a:t>~/ros2_curri/agv_ws/src/agv_gazebo/models/agv_ros2_control/model.sdf</a:t>
+              <a:t>~/ros2_curri/agv_ws/src/agv_description/urdf/agv_ros2_control.urdf.xacro</a:t>
             </a:r>
           </a:p>
         </p:txBody>
@@ -10513,7 +10714,7 @@
               </a:defRPr>
             </a:pPr>
             <a:r>
-              <a:t>현재 단계 10/25    |    현재 폴더 ~/ros2_curri/agv_ws    |    현재 터미널</a:t>
+              <a:t>현재 단계 8/10    |    현재 폴더 ~/ros2_curri/agv_ws    |    현재 터미널</a:t>
             </a:r>
           </a:p>
         </p:txBody>
@@ -10610,11 +10811,11 @@
               </a:defRPr>
             </a:pPr>
             <a:r>
-              <a:t>파일 생성: mkdir -p ~/ros2_curri/agv_ws/src/agv_gazebo/models/agv_ros2_control</a:t>
-            </a:r>
-            <a:br/>
-            <a:r>
-              <a:t>파일 열기: nano ~/ros2_curri/agv_ws/src/agv_gazebo/models/agv_ros2_control/model.sdf</a:t>
+              <a:t>파일 생성: mkdir -p ~/ros2_curri/agv_ws/src/agv_description/urdf</a:t>
+            </a:r>
+            <a:br/>
+            <a:r>
+              <a:t>파일 열기: nano ~/ros2_curri/agv_ws/src/agv_description/urdf/agv_ros2_control.urdf.xacro</a:t>
             </a:r>
           </a:p>
         </p:txBody>
@@ -10672,51 +10873,51 @@
               </a:defRPr>
             </a:pPr>
             <a:r>
-              <a:t>&lt;?xml version="1.0" ?&gt;</a:t>
-            </a:r>
-            <a:br/>
-            <a:r>
-              <a:t>&lt;!-- M16-only model: gz_ros2_control owns wheel velocity commands. No native DiffDrive</a:t>
-            </a:r>
-            <a:br/>
-            <a:r>
-              <a:t>  plugin is present. --&gt;</a:t>
-            </a:r>
-            <a:br/>
-            <a:r>
-              <a:t>&lt;sdf version="1.10"&gt;</a:t>
-            </a:r>
-            <a:br/>
-            <a:r>
-              <a:t>  </a:t>
-            </a:r>
-            <a:br/>
-            <a:r>
-              <a:t>  </a:t>
-            </a:r>
-            <a:br/>
-            <a:r>
-              <a:t>  &lt;model name="agv_ros2_control"&gt;</a:t>
-            </a:r>
-            <a:br/>
-            <a:r>
-              <a:t>    </a:t>
-            </a:r>
-            <a:br/>
-            <a:r>
-              <a:t>    </a:t>
-            </a:r>
-            <a:br/>
-            <a:r>
-              <a:t>    &lt;link name="base_link"&gt;</a:t>
-            </a:r>
-            <a:br/>
-            <a:r>
-              <a:t>      &lt;pose&gt;0 0 0.16 0 0 0&lt;/pose&gt;</a:t>
-            </a:r>
-            <a:br/>
-            <a:r>
-              <a:t>      &lt;inertial&gt;</a:t>
+              <a:t>      &lt;state_interface name="position"/&gt;</a:t>
+            </a:r>
+            <a:br/>
+            <a:r>
+              <a:t>      &lt;state_interface name="velocity"/&gt;</a:t>
+            </a:r>
+            <a:br/>
+            <a:r>
+              <a:t>    &lt;/joint&gt;</a:t>
+            </a:r>
+            <a:br/>
+            <a:r>
+              <a:t>    &lt;joint name="right_wheel_joint"&gt;</a:t>
+            </a:r>
+            <a:br/>
+            <a:r>
+              <a:t>      &lt;command_interface name="velocity"&gt;</a:t>
+            </a:r>
+            <a:br/>
+            <a:r>
+              <a:t>        &lt;param name="min"&gt;-20&lt;/param&gt;</a:t>
+            </a:r>
+            <a:br/>
+            <a:r>
+              <a:t>        &lt;param name="max"&gt;20&lt;/param&gt;</a:t>
+            </a:r>
+            <a:br/>
+            <a:r>
+              <a:t>      &lt;/command_interface&gt;</a:t>
+            </a:r>
+            <a:br/>
+            <a:r>
+              <a:t>      &lt;state_interface name="position"/&gt;</a:t>
+            </a:r>
+            <a:br/>
+            <a:r>
+              <a:t>      &lt;state_interface name="velocity"/&gt;</a:t>
+            </a:r>
+            <a:br/>
+            <a:r>
+              <a:t>    &lt;/joint&gt;</a:t>
+            </a:r>
+            <a:br/>
+            <a:r>
+              <a:t>  &lt;/ros2_control&gt;</a:t>
             </a:r>
           </a:p>
         </p:txBody>
@@ -10755,7 +10956,7 @@
               </a:defRPr>
             </a:pPr>
             <a:r>
-              <a:t>파일 전체 1/15 · 이 슬라이드 다음에 같은 파일의 나머지 줄이 이어집니다.</a:t>
+              <a:t>파일 전체 4/5 · 이 슬라이드 다음에 같은 파일의 나머지 줄이 이어집니다.</a:t>
             </a:r>
           </a:p>
         </p:txBody>
@@ -10812,7 +11013,7 @@
               </a:defRPr>
             </a:pPr>
             <a:r>
-              <a:t>파일을 계속 작성하고 저장한다 (2/15)</a:t>
+              <a:t>파일을 계속 작성하고 저장한다 (5/5)</a:t>
             </a:r>
           </a:p>
         </p:txBody>
@@ -10851,7 +11052,7 @@
               </a:defRPr>
             </a:pPr>
             <a:r>
-              <a:t>~/ros2_curri/agv_ws/src/agv_gazebo/models/agv_ros2_control/model.sdf</a:t>
+              <a:t>~/ros2_curri/agv_ws/src/agv_description/urdf/agv_ros2_control.urdf.xacro</a:t>
             </a:r>
           </a:p>
         </p:txBody>
@@ -10987,7 +11188,7 @@
               </a:defRPr>
             </a:pPr>
             <a:r>
-              <a:t>현재 단계 11/25    |    현재 폴더 ~/ros2_curri/agv_ws    |    현재 터미널</a:t>
+              <a:t>현재 단계 9/10    |    현재 폴더 ~/ros2_curri/agv_ws    |    현재 터미널</a:t>
             </a:r>
           </a:p>
         </p:txBody>
@@ -11084,11 +11285,11 @@
               </a:defRPr>
             </a:pPr>
             <a:r>
-              <a:t>파일 생성: mkdir -p ~/ros2_curri/agv_ws/src/agv_gazebo/models/agv_ros2_control</a:t>
-            </a:r>
-            <a:br/>
-            <a:r>
-              <a:t>파일 열기: nano ~/ros2_curri/agv_ws/src/agv_gazebo/models/agv_ros2_control/model.sdf</a:t>
+              <a:t>파일 생성: mkdir -p ~/ros2_curri/agv_ws/src/agv_description/urdf</a:t>
+            </a:r>
+            <a:br/>
+            <a:r>
+              <a:t>파일 열기: nano ~/ros2_curri/agv_ws/src/agv_description/urdf/agv_ros2_control.urdf.xacro</a:t>
             </a:r>
           </a:p>
         </p:txBody>
@@ -11146,51 +11347,12 @@
               </a:defRPr>
             </a:pPr>
             <a:r>
-              <a:t>        &lt;mass&gt;12.0&lt;/mass&gt;</a:t>
-            </a:r>
-            <a:br/>
-            <a:r>
-              <a:t>        &lt;inertia&gt;</a:t>
-            </a:r>
-            <a:br/>
-            <a:r>
-              <a:t>          &lt;ixx&gt;0.20&lt;/ixx&gt;</a:t>
-            </a:r>
-            <a:br/>
-            <a:r>
-              <a:t>          &lt;iyy&gt;0.40&lt;/iyy&gt;</a:t>
-            </a:r>
-            <a:br/>
-            <a:r>
-              <a:t>          &lt;izz&gt;0.50&lt;/izz&gt;</a:t>
-            </a:r>
-            <a:br/>
-            <a:r>
-              <a:t>        &lt;/inertia&gt;</a:t>
-            </a:r>
-            <a:br/>
-            <a:r>
-              <a:t>      &lt;/inertial&gt;</a:t>
-            </a:r>
-            <a:br/>
-            <a:r>
-              <a:t>      &lt;visual name="body"&gt;</a:t>
-            </a:r>
-            <a:br/>
-            <a:r>
-              <a:t>        &lt;geometry&gt;</a:t>
-            </a:r>
-            <a:br/>
-            <a:r>
-              <a:t>          &lt;box&gt;</a:t>
-            </a:r>
-            <a:br/>
-            <a:r>
-              <a:t>            &lt;size&gt;0.60 0.42 0.16&lt;/size&gt;</a:t>
-            </a:r>
-            <a:br/>
-            <a:r>
-              <a:t>          &lt;/box&gt;</a:t>
+              <a:t>  </a:t>
+            </a:r>
+            <a:br/>
+            <a:br/>
+            <a:r>
+              <a:t>&lt;/robot&gt;</a:t>
             </a:r>
           </a:p>
         </p:txBody>
@@ -11229,7 +11391,7 @@
               </a:defRPr>
             </a:pPr>
             <a:r>
-              <a:t>파일 전체 2/15 · 이 슬라이드 다음에 같은 파일의 나머지 줄이 이어집니다.</a:t>
+              <a:t>파일 전체 5/5 · 이 슬라이드 다음에 같은 파일의 나머지 줄이 이어집니다.</a:t>
             </a:r>
           </a:p>
         </p:txBody>
@@ -11286,7 +11448,7 @@
               </a:defRPr>
             </a:pPr>
             <a:r>
-              <a:t>파일을 계속 작성하고 저장한다 (3/15)</a:t>
+              <a:t>파일을 새로 만들고 저장한다 (1/15)</a:t>
             </a:r>
           </a:p>
         </p:txBody>
@@ -11461,7 +11623,7 @@
               </a:defRPr>
             </a:pPr>
             <a:r>
-              <a:t>현재 단계 12/25    |    현재 폴더 ~/ros2_curri/agv_ws    |    현재 터미널</a:t>
+              <a:t>현재 단계 10/25    |    현재 폴더 ~/ros2_curri/agv_ws    |    현재 터미널</a:t>
             </a:r>
           </a:p>
         </p:txBody>
@@ -11620,51 +11782,51 @@
               </a:defRPr>
             </a:pPr>
             <a:r>
-              <a:t>        &lt;/geometry&gt;</a:t>
-            </a:r>
-            <a:br/>
-            <a:r>
-              <a:t>        &lt;material&gt;</a:t>
-            </a:r>
-            <a:br/>
-            <a:r>
-              <a:t>          &lt;diffuse&gt;0.10 0.35 0.80 1&lt;/diffuse&gt;</a:t>
-            </a:r>
-            <a:br/>
-            <a:r>
-              <a:t>        &lt;/material&gt;</a:t>
-            </a:r>
-            <a:br/>
-            <a:r>
-              <a:t>      &lt;/visual&gt;</a:t>
-            </a:r>
-            <a:br/>
-            <a:r>
-              <a:t>      &lt;collision name="body_collision"&gt;</a:t>
-            </a:r>
-            <a:br/>
-            <a:r>
-              <a:t>        &lt;geometry&gt;</a:t>
-            </a:r>
-            <a:br/>
-            <a:r>
-              <a:t>          &lt;box&gt;</a:t>
-            </a:r>
-            <a:br/>
-            <a:r>
-              <a:t>            &lt;size&gt;0.60 0.42 0.16&lt;/size&gt;</a:t>
-            </a:r>
-            <a:br/>
-            <a:r>
-              <a:t>          &lt;/box&gt;</a:t>
-            </a:r>
-            <a:br/>
-            <a:r>
-              <a:t>        &lt;/geometry&gt;</a:t>
-            </a:r>
-            <a:br/>
-            <a:r>
-              <a:t>      &lt;/collision&gt;</a:t>
+              <a:t>&lt;?xml version="1.0" ?&gt;</a:t>
+            </a:r>
+            <a:br/>
+            <a:r>
+              <a:t>&lt;!-- M16-only model: gz_ros2_control owns wheel velocity commands. No native DiffDrive</a:t>
+            </a:r>
+            <a:br/>
+            <a:r>
+              <a:t>  plugin is present. --&gt;</a:t>
+            </a:r>
+            <a:br/>
+            <a:r>
+              <a:t>&lt;sdf version="1.10"&gt;</a:t>
+            </a:r>
+            <a:br/>
+            <a:r>
+              <a:t>  </a:t>
+            </a:r>
+            <a:br/>
+            <a:r>
+              <a:t>  </a:t>
+            </a:r>
+            <a:br/>
+            <a:r>
+              <a:t>  &lt;model name="agv_ros2_control"&gt;</a:t>
+            </a:r>
+            <a:br/>
+            <a:r>
+              <a:t>    </a:t>
+            </a:r>
+            <a:br/>
+            <a:r>
+              <a:t>    </a:t>
+            </a:r>
+            <a:br/>
+            <a:r>
+              <a:t>    &lt;link name="base_link"&gt;</a:t>
+            </a:r>
+            <a:br/>
+            <a:r>
+              <a:t>      &lt;pose&gt;0 0 0.16 0 0 0&lt;/pose&gt;</a:t>
+            </a:r>
+            <a:br/>
+            <a:r>
+              <a:t>      &lt;inertial&gt;</a:t>
             </a:r>
           </a:p>
         </p:txBody>
@@ -11703,7 +11865,7 @@
               </a:defRPr>
             </a:pPr>
             <a:r>
-              <a:t>파일 전체 3/15 · 이 슬라이드 다음에 같은 파일의 나머지 줄이 이어집니다.</a:t>
+              <a:t>파일 전체 1/15 · 이 슬라이드 다음에 같은 파일의 나머지 줄이 이어집니다.</a:t>
             </a:r>
           </a:p>
         </p:txBody>
@@ -11760,7 +11922,7 @@
               </a:defRPr>
             </a:pPr>
             <a:r>
-              <a:t>파일을 계속 작성하고 저장한다 (4/15)</a:t>
+              <a:t>파일을 계속 작성하고 저장한다 (2/15)</a:t>
             </a:r>
           </a:p>
         </p:txBody>
@@ -11935,7 +12097,7 @@
               </a:defRPr>
             </a:pPr>
             <a:r>
-              <a:t>현재 단계 13/25    |    현재 폴더 ~/ros2_curri/agv_ws    |    현재 터미널</a:t>
+              <a:t>현재 단계 11/25    |    현재 폴더 ~/ros2_curri/agv_ws    |    현재 터미널</a:t>
             </a:r>
           </a:p>
         </p:txBody>
@@ -12094,31 +12256,7 @@
               </a:defRPr>
             </a:pPr>
             <a:r>
-              <a:t>    &lt;/link&gt;</a:t>
-            </a:r>
-            <a:br/>
-            <a:r>
-              <a:t>    </a:t>
-            </a:r>
-            <a:br/>
-            <a:r>
-              <a:t>    </a:t>
-            </a:r>
-            <a:br/>
-            <a:r>
-              <a:t>    &lt;link name="left_wheel_link"&gt;</a:t>
-            </a:r>
-            <a:br/>
-            <a:r>
-              <a:t>      &lt;pose relative_to="base_link"&gt;0 0.19 -0.08 1.5708 0 0&lt;/pose&gt;</a:t>
-            </a:r>
-            <a:br/>
-            <a:r>
-              <a:t>      &lt;inertial&gt;</a:t>
-            </a:r>
-            <a:br/>
-            <a:r>
-              <a:t>        &lt;mass&gt;0.6&lt;/mass&gt;</a:t>
+              <a:t>        &lt;mass&gt;12.0&lt;/mass&gt;</a:t>
             </a:r>
             <a:br/>
             <a:r>
@@ -12126,19 +12264,43 @@
             </a:r>
             <a:br/>
             <a:r>
-              <a:t>          &lt;ixx&gt;0.002&lt;/ixx&gt;</a:t>
-            </a:r>
-            <a:br/>
-            <a:r>
-              <a:t>          &lt;iyy&gt;0.002&lt;/iyy&gt;</a:t>
-            </a:r>
-            <a:br/>
-            <a:r>
-              <a:t>          &lt;izz&gt;0.001&lt;/izz&gt;</a:t>
+              <a:t>          &lt;ixx&gt;0.20&lt;/ixx&gt;</a:t>
+            </a:r>
+            <a:br/>
+            <a:r>
+              <a:t>          &lt;iyy&gt;0.40&lt;/iyy&gt;</a:t>
+            </a:r>
+            <a:br/>
+            <a:r>
+              <a:t>          &lt;izz&gt;0.50&lt;/izz&gt;</a:t>
             </a:r>
             <a:br/>
             <a:r>
               <a:t>        &lt;/inertia&gt;</a:t>
+            </a:r>
+            <a:br/>
+            <a:r>
+              <a:t>      &lt;/inertial&gt;</a:t>
+            </a:r>
+            <a:br/>
+            <a:r>
+              <a:t>      &lt;visual name="body"&gt;</a:t>
+            </a:r>
+            <a:br/>
+            <a:r>
+              <a:t>        &lt;geometry&gt;</a:t>
+            </a:r>
+            <a:br/>
+            <a:r>
+              <a:t>          &lt;box&gt;</a:t>
+            </a:r>
+            <a:br/>
+            <a:r>
+              <a:t>            &lt;size&gt;0.60 0.42 0.16&lt;/size&gt;</a:t>
+            </a:r>
+            <a:br/>
+            <a:r>
+              <a:t>          &lt;/box&gt;</a:t>
             </a:r>
           </a:p>
         </p:txBody>
@@ -12177,7 +12339,7 @@
               </a:defRPr>
             </a:pPr>
             <a:r>
-              <a:t>파일 전체 4/15 · 이 슬라이드 다음에 같은 파일의 나머지 줄이 이어집니다.</a:t>
+              <a:t>파일 전체 2/15 · 이 슬라이드 다음에 같은 파일의 나머지 줄이 이어집니다.</a:t>
             </a:r>
           </a:p>
         </p:txBody>
@@ -12695,7 +12857,7 @@
               </a:defRPr>
             </a:pPr>
             <a:r>
-              <a:t>파일을 계속 작성하고 저장한다 (5/15)</a:t>
+              <a:t>파일을 계속 작성하고 저장한다 (3/15)</a:t>
             </a:r>
           </a:p>
         </p:txBody>
@@ -12870,7 +13032,7 @@
               </a:defRPr>
             </a:pPr>
             <a:r>
-              <a:t>현재 단계 14/25    |    현재 폴더 ~/ros2_curri/agv_ws    |    현재 터미널</a:t>
+              <a:t>현재 단계 12/25    |    현재 폴더 ~/ros2_curri/agv_ws    |    현재 터미널</a:t>
             </a:r>
           </a:p>
         </p:txBody>
@@ -13029,11 +13191,27 @@
               </a:defRPr>
             </a:pPr>
             <a:r>
-              <a:t>      &lt;/inertial&gt;</a:t>
-            </a:r>
-            <a:br/>
-            <a:r>
-              <a:t>      &lt;visual name="wheel"&gt;</a:t>
+              <a:t>        &lt;/geometry&gt;</a:t>
+            </a:r>
+            <a:br/>
+            <a:r>
+              <a:t>        &lt;material&gt;</a:t>
+            </a:r>
+            <a:br/>
+            <a:r>
+              <a:t>          &lt;diffuse&gt;0.10 0.35 0.80 1&lt;/diffuse&gt;</a:t>
+            </a:r>
+            <a:br/>
+            <a:r>
+              <a:t>        &lt;/material&gt;</a:t>
+            </a:r>
+            <a:br/>
+            <a:r>
+              <a:t>      &lt;/visual&gt;</a:t>
+            </a:r>
+            <a:br/>
+            <a:r>
+              <a:t>      &lt;collision name="body_collision"&gt;</a:t>
             </a:r>
             <a:br/>
             <a:r>
@@ -13041,19 +13219,15 @@
             </a:r>
             <a:br/>
             <a:r>
-              <a:t>          &lt;cylinder&gt;</a:t>
-            </a:r>
-            <a:br/>
-            <a:r>
-              <a:t>            &lt;radius&gt;0.08&lt;/radius&gt;</a:t>
-            </a:r>
-            <a:br/>
-            <a:r>
-              <a:t>            &lt;length&gt;0.05&lt;/length&gt;</a:t>
-            </a:r>
-            <a:br/>
-            <a:r>
-              <a:t>          &lt;/cylinder&gt;</a:t>
+              <a:t>          &lt;box&gt;</a:t>
+            </a:r>
+            <a:br/>
+            <a:r>
+              <a:t>            &lt;size&gt;0.60 0.42 0.16&lt;/size&gt;</a:t>
+            </a:r>
+            <a:br/>
+            <a:r>
+              <a:t>          &lt;/box&gt;</a:t>
             </a:r>
             <a:br/>
             <a:r>
@@ -13061,19 +13235,7 @@
             </a:r>
             <a:br/>
             <a:r>
-              <a:t>      &lt;/visual&gt;</a:t>
-            </a:r>
-            <a:br/>
-            <a:r>
-              <a:t>      &lt;collision name="collision"&gt;</a:t>
-            </a:r>
-            <a:br/>
-            <a:r>
-              <a:t>        &lt;geometry&gt;</a:t>
-            </a:r>
-            <a:br/>
-            <a:r>
-              <a:t>          &lt;cylinder&gt;</a:t>
+              <a:t>      &lt;/collision&gt;</a:t>
             </a:r>
           </a:p>
         </p:txBody>
@@ -13112,7 +13274,7 @@
               </a:defRPr>
             </a:pPr>
             <a:r>
-              <a:t>파일 전체 5/15 · 이 슬라이드 다음에 같은 파일의 나머지 줄이 이어집니다.</a:t>
+              <a:t>파일 전체 3/15 · 이 슬라이드 다음에 같은 파일의 나머지 줄이 이어집니다.</a:t>
             </a:r>
           </a:p>
         </p:txBody>
@@ -13169,7 +13331,7 @@
               </a:defRPr>
             </a:pPr>
             <a:r>
-              <a:t>파일을 계속 작성하고 저장한다 (6/15)</a:t>
+              <a:t>파일을 계속 작성하고 저장한다 (4/15)</a:t>
             </a:r>
           </a:p>
         </p:txBody>
@@ -13344,7 +13506,7 @@
               </a:defRPr>
             </a:pPr>
             <a:r>
-              <a:t>현재 단계 15/25    |    현재 폴더 ~/ros2_curri/agv_ws    |    현재 터미널</a:t>
+              <a:t>현재 단계 13/25    |    현재 폴더 ~/ros2_curri/agv_ws    |    현재 터미널</a:t>
             </a:r>
           </a:p>
         </p:txBody>
@@ -13503,51 +13665,51 @@
               </a:defRPr>
             </a:pPr>
             <a:r>
-              <a:t>            &lt;radius&gt;0.08&lt;/radius&gt;</a:t>
-            </a:r>
-            <a:br/>
-            <a:r>
-              <a:t>            &lt;length&gt;0.05&lt;/length&gt;</a:t>
-            </a:r>
-            <a:br/>
-            <a:r>
-              <a:t>          &lt;/cylinder&gt;</a:t>
-            </a:r>
-            <a:br/>
-            <a:r>
-              <a:t>        &lt;/geometry&gt;</a:t>
-            </a:r>
-            <a:br/>
-            <a:r>
-              <a:t>        &lt;surface&gt;</a:t>
-            </a:r>
-            <a:br/>
-            <a:r>
-              <a:t>          &lt;friction&gt;</a:t>
-            </a:r>
-            <a:br/>
-            <a:r>
-              <a:t>            &lt;ode&gt;</a:t>
-            </a:r>
-            <a:br/>
-            <a:r>
-              <a:t>              &lt;mu&gt;1.0&lt;/mu&gt;</a:t>
-            </a:r>
-            <a:br/>
-            <a:r>
-              <a:t>              &lt;mu2&gt;1.0&lt;/mu2&gt;</a:t>
-            </a:r>
-            <a:br/>
-            <a:r>
-              <a:t>            &lt;/ode&gt;</a:t>
-            </a:r>
-            <a:br/>
-            <a:r>
-              <a:t>          &lt;/friction&gt;</a:t>
-            </a:r>
-            <a:br/>
-            <a:r>
-              <a:t>        &lt;/surface&gt;</a:t>
+              <a:t>    &lt;/link&gt;</a:t>
+            </a:r>
+            <a:br/>
+            <a:r>
+              <a:t>    </a:t>
+            </a:r>
+            <a:br/>
+            <a:r>
+              <a:t>    </a:t>
+            </a:r>
+            <a:br/>
+            <a:r>
+              <a:t>    &lt;link name="left_wheel_link"&gt;</a:t>
+            </a:r>
+            <a:br/>
+            <a:r>
+              <a:t>      &lt;pose relative_to="base_link"&gt;0 0.19 -0.08 1.5708 0 0&lt;/pose&gt;</a:t>
+            </a:r>
+            <a:br/>
+            <a:r>
+              <a:t>      &lt;inertial&gt;</a:t>
+            </a:r>
+            <a:br/>
+            <a:r>
+              <a:t>        &lt;mass&gt;0.6&lt;/mass&gt;</a:t>
+            </a:r>
+            <a:br/>
+            <a:r>
+              <a:t>        &lt;inertia&gt;</a:t>
+            </a:r>
+            <a:br/>
+            <a:r>
+              <a:t>          &lt;ixx&gt;0.002&lt;/ixx&gt;</a:t>
+            </a:r>
+            <a:br/>
+            <a:r>
+              <a:t>          &lt;iyy&gt;0.002&lt;/iyy&gt;</a:t>
+            </a:r>
+            <a:br/>
+            <a:r>
+              <a:t>          &lt;izz&gt;0.001&lt;/izz&gt;</a:t>
+            </a:r>
+            <a:br/>
+            <a:r>
+              <a:t>        &lt;/inertia&gt;</a:t>
             </a:r>
           </a:p>
         </p:txBody>
@@ -13586,7 +13748,7 @@
               </a:defRPr>
             </a:pPr>
             <a:r>
-              <a:t>파일 전체 6/15 · 이 슬라이드 다음에 같은 파일의 나머지 줄이 이어집니다.</a:t>
+              <a:t>파일 전체 4/15 · 이 슬라이드 다음에 같은 파일의 나머지 줄이 이어집니다.</a:t>
             </a:r>
           </a:p>
         </p:txBody>
@@ -13643,7 +13805,7 @@
               </a:defRPr>
             </a:pPr>
             <a:r>
-              <a:t>파일을 계속 작성하고 저장한다 (7/15)</a:t>
+              <a:t>파일을 계속 작성하고 저장한다 (5/15)</a:t>
             </a:r>
           </a:p>
         </p:txBody>
@@ -13818,7 +13980,7 @@
               </a:defRPr>
             </a:pPr>
             <a:r>
-              <a:t>현재 단계 16/25    |    현재 폴더 ~/ros2_curri/agv_ws    |    현재 터미널</a:t>
+              <a:t>현재 단계 14/25    |    현재 폴더 ~/ros2_curri/agv_ws    |    현재 터미널</a:t>
             </a:r>
           </a:p>
         </p:txBody>
@@ -13977,51 +14139,51 @@
               </a:defRPr>
             </a:pPr>
             <a:r>
-              <a:t>      &lt;/collision&gt;</a:t>
-            </a:r>
-            <a:br/>
-            <a:r>
-              <a:t>    &lt;/link&gt;</a:t>
-            </a:r>
-            <a:br/>
-            <a:r>
-              <a:t>    </a:t>
-            </a:r>
-            <a:br/>
-            <a:r>
-              <a:t>    </a:t>
-            </a:r>
-            <a:br/>
-            <a:r>
-              <a:t>    &lt;link name="right_wheel_link"&gt;</a:t>
-            </a:r>
-            <a:br/>
-            <a:r>
-              <a:t>      &lt;pose relative_to="base_link"&gt;0 -0.19 -0.08 1.5708 0 0&lt;/pose&gt;</a:t>
-            </a:r>
-            <a:br/>
-            <a:r>
-              <a:t>      &lt;inertial&gt;</a:t>
-            </a:r>
-            <a:br/>
-            <a:r>
-              <a:t>        &lt;mass&gt;0.6&lt;/mass&gt;</a:t>
-            </a:r>
-            <a:br/>
-            <a:r>
-              <a:t>        &lt;inertia&gt;</a:t>
-            </a:r>
-            <a:br/>
-            <a:r>
-              <a:t>          &lt;ixx&gt;0.002&lt;/ixx&gt;</a:t>
-            </a:r>
-            <a:br/>
-            <a:r>
-              <a:t>          &lt;iyy&gt;0.002&lt;/iyy&gt;</a:t>
-            </a:r>
-            <a:br/>
-            <a:r>
-              <a:t>          &lt;izz&gt;0.001&lt;/izz&gt;</a:t>
+              <a:t>      &lt;/inertial&gt;</a:t>
+            </a:r>
+            <a:br/>
+            <a:r>
+              <a:t>      &lt;visual name="wheel"&gt;</a:t>
+            </a:r>
+            <a:br/>
+            <a:r>
+              <a:t>        &lt;geometry&gt;</a:t>
+            </a:r>
+            <a:br/>
+            <a:r>
+              <a:t>          &lt;cylinder&gt;</a:t>
+            </a:r>
+            <a:br/>
+            <a:r>
+              <a:t>            &lt;radius&gt;0.08&lt;/radius&gt;</a:t>
+            </a:r>
+            <a:br/>
+            <a:r>
+              <a:t>            &lt;length&gt;0.05&lt;/length&gt;</a:t>
+            </a:r>
+            <a:br/>
+            <a:r>
+              <a:t>          &lt;/cylinder&gt;</a:t>
+            </a:r>
+            <a:br/>
+            <a:r>
+              <a:t>        &lt;/geometry&gt;</a:t>
+            </a:r>
+            <a:br/>
+            <a:r>
+              <a:t>      &lt;/visual&gt;</a:t>
+            </a:r>
+            <a:br/>
+            <a:r>
+              <a:t>      &lt;collision name="collision"&gt;</a:t>
+            </a:r>
+            <a:br/>
+            <a:r>
+              <a:t>        &lt;geometry&gt;</a:t>
+            </a:r>
+            <a:br/>
+            <a:r>
+              <a:t>          &lt;cylinder&gt;</a:t>
             </a:r>
           </a:p>
         </p:txBody>
@@ -14060,7 +14222,7 @@
               </a:defRPr>
             </a:pPr>
             <a:r>
-              <a:t>파일 전체 7/15 · 이 슬라이드 다음에 같은 파일의 나머지 줄이 이어집니다.</a:t>
+              <a:t>파일 전체 5/15 · 이 슬라이드 다음에 같은 파일의 나머지 줄이 이어집니다.</a:t>
             </a:r>
           </a:p>
         </p:txBody>
@@ -14117,7 +14279,7 @@
               </a:defRPr>
             </a:pPr>
             <a:r>
-              <a:t>파일을 계속 작성하고 저장한다 (8/15)</a:t>
+              <a:t>파일을 계속 작성하고 저장한다 (6/15)</a:t>
             </a:r>
           </a:p>
         </p:txBody>
@@ -14292,7 +14454,7 @@
               </a:defRPr>
             </a:pPr>
             <a:r>
-              <a:t>현재 단계 17/25    |    현재 폴더 ~/ros2_curri/agv_ws    |    현재 터미널</a:t>
+              <a:t>현재 단계 15/25    |    현재 폴더 ~/ros2_curri/agv_ws    |    현재 터미널</a:t>
             </a:r>
           </a:p>
         </p:txBody>
@@ -14451,26 +14613,6 @@
               </a:defRPr>
             </a:pPr>
             <a:r>
-              <a:t>        &lt;/inertia&gt;</a:t>
-            </a:r>
-            <a:br/>
-            <a:r>
-              <a:t>      &lt;/inertial&gt;</a:t>
-            </a:r>
-            <a:br/>
-            <a:r>
-              <a:t>      &lt;visual name="wheel"&gt;</a:t>
-            </a:r>
-            <a:br/>
-            <a:r>
-              <a:t>        &lt;geometry&gt;</a:t>
-            </a:r>
-            <a:br/>
-            <a:r>
-              <a:t>          &lt;cylinder&gt;</a:t>
-            </a:r>
-            <a:br/>
-            <a:r>
               <a:t>            &lt;radius&gt;0.08&lt;/radius&gt;</a:t>
             </a:r>
             <a:br/>
@@ -14487,15 +14629,35 @@
             </a:r>
             <a:br/>
             <a:r>
-              <a:t>      &lt;/visual&gt;</a:t>
-            </a:r>
-            <a:br/>
-            <a:r>
-              <a:t>      &lt;collision name="collision"&gt;</a:t>
-            </a:r>
-            <a:br/>
-            <a:r>
-              <a:t>        &lt;geometry&gt;</a:t>
+              <a:t>        &lt;surface&gt;</a:t>
+            </a:r>
+            <a:br/>
+            <a:r>
+              <a:t>          &lt;friction&gt;</a:t>
+            </a:r>
+            <a:br/>
+            <a:r>
+              <a:t>            &lt;ode&gt;</a:t>
+            </a:r>
+            <a:br/>
+            <a:r>
+              <a:t>              &lt;mu&gt;1.0&lt;/mu&gt;</a:t>
+            </a:r>
+            <a:br/>
+            <a:r>
+              <a:t>              &lt;mu2&gt;1.0&lt;/mu2&gt;</a:t>
+            </a:r>
+            <a:br/>
+            <a:r>
+              <a:t>            &lt;/ode&gt;</a:t>
+            </a:r>
+            <a:br/>
+            <a:r>
+              <a:t>          &lt;/friction&gt;</a:t>
+            </a:r>
+            <a:br/>
+            <a:r>
+              <a:t>        &lt;/surface&gt;</a:t>
             </a:r>
           </a:p>
         </p:txBody>
@@ -14534,7 +14696,7 @@
               </a:defRPr>
             </a:pPr>
             <a:r>
-              <a:t>파일 전체 8/15 · 이 슬라이드 다음에 같은 파일의 나머지 줄이 이어집니다.</a:t>
+              <a:t>파일 전체 6/15 · 이 슬라이드 다음에 같은 파일의 나머지 줄이 이어집니다.</a:t>
             </a:r>
           </a:p>
         </p:txBody>
@@ -14591,7 +14753,7 @@
               </a:defRPr>
             </a:pPr>
             <a:r>
-              <a:t>파일을 계속 작성하고 저장한다 (9/15)</a:t>
+              <a:t>파일을 계속 작성하고 저장한다 (7/15)</a:t>
             </a:r>
           </a:p>
         </p:txBody>
@@ -14766,7 +14928,7 @@
               </a:defRPr>
             </a:pPr>
             <a:r>
-              <a:t>현재 단계 18/25    |    현재 폴더 ~/ros2_curri/agv_ws    |    현재 터미널</a:t>
+              <a:t>현재 단계 16/25    |    현재 폴더 ~/ros2_curri/agv_ws    |    현재 터미널</a:t>
             </a:r>
           </a:p>
         </p:txBody>
@@ -14925,51 +15087,51 @@
               </a:defRPr>
             </a:pPr>
             <a:r>
-              <a:t>          &lt;cylinder&gt;</a:t>
-            </a:r>
-            <a:br/>
-            <a:r>
-              <a:t>            &lt;radius&gt;0.08&lt;/radius&gt;</a:t>
-            </a:r>
-            <a:br/>
-            <a:r>
-              <a:t>            &lt;length&gt;0.05&lt;/length&gt;</a:t>
-            </a:r>
-            <a:br/>
-            <a:r>
-              <a:t>          &lt;/cylinder&gt;</a:t>
-            </a:r>
-            <a:br/>
-            <a:r>
-              <a:t>        &lt;/geometry&gt;</a:t>
-            </a:r>
-            <a:br/>
-            <a:r>
-              <a:t>        &lt;surface&gt;</a:t>
-            </a:r>
-            <a:br/>
-            <a:r>
-              <a:t>          &lt;friction&gt;</a:t>
-            </a:r>
-            <a:br/>
-            <a:r>
-              <a:t>            &lt;ode&gt;</a:t>
-            </a:r>
-            <a:br/>
-            <a:r>
-              <a:t>              &lt;mu&gt;1.0&lt;/mu&gt;</a:t>
-            </a:r>
-            <a:br/>
-            <a:r>
-              <a:t>              &lt;mu2&gt;1.0&lt;/mu2&gt;</a:t>
-            </a:r>
-            <a:br/>
-            <a:r>
-              <a:t>            &lt;/ode&gt;</a:t>
-            </a:r>
-            <a:br/>
-            <a:r>
-              <a:t>          &lt;/friction&gt;</a:t>
+              <a:t>      &lt;/collision&gt;</a:t>
+            </a:r>
+            <a:br/>
+            <a:r>
+              <a:t>    &lt;/link&gt;</a:t>
+            </a:r>
+            <a:br/>
+            <a:r>
+              <a:t>    </a:t>
+            </a:r>
+            <a:br/>
+            <a:r>
+              <a:t>    </a:t>
+            </a:r>
+            <a:br/>
+            <a:r>
+              <a:t>    &lt;link name="right_wheel_link"&gt;</a:t>
+            </a:r>
+            <a:br/>
+            <a:r>
+              <a:t>      &lt;pose relative_to="base_link"&gt;0 -0.19 -0.08 1.5708 0 0&lt;/pose&gt;</a:t>
+            </a:r>
+            <a:br/>
+            <a:r>
+              <a:t>      &lt;inertial&gt;</a:t>
+            </a:r>
+            <a:br/>
+            <a:r>
+              <a:t>        &lt;mass&gt;0.6&lt;/mass&gt;</a:t>
+            </a:r>
+            <a:br/>
+            <a:r>
+              <a:t>        &lt;inertia&gt;</a:t>
+            </a:r>
+            <a:br/>
+            <a:r>
+              <a:t>          &lt;ixx&gt;0.002&lt;/ixx&gt;</a:t>
+            </a:r>
+            <a:br/>
+            <a:r>
+              <a:t>          &lt;iyy&gt;0.002&lt;/iyy&gt;</a:t>
+            </a:r>
+            <a:br/>
+            <a:r>
+              <a:t>          &lt;izz&gt;0.001&lt;/izz&gt;</a:t>
             </a:r>
           </a:p>
         </p:txBody>
@@ -15008,7 +15170,7 @@
               </a:defRPr>
             </a:pPr>
             <a:r>
-              <a:t>파일 전체 9/15 · 이 슬라이드 다음에 같은 파일의 나머지 줄이 이어집니다.</a:t>
+              <a:t>파일 전체 7/15 · 이 슬라이드 다음에 같은 파일의 나머지 줄이 이어집니다.</a:t>
             </a:r>
           </a:p>
         </p:txBody>
@@ -15065,7 +15227,7 @@
               </a:defRPr>
             </a:pPr>
             <a:r>
-              <a:t>파일을 계속 작성하고 저장한다 (10/15)</a:t>
+              <a:t>파일을 계속 작성하고 저장한다 (8/15)</a:t>
             </a:r>
           </a:p>
         </p:txBody>
@@ -15240,7 +15402,7 @@
               </a:defRPr>
             </a:pPr>
             <a:r>
-              <a:t>현재 단계 19/25    |    현재 폴더 ~/ros2_curri/agv_ws    |    현재 터미널</a:t>
+              <a:t>현재 단계 17/25    |    현재 폴더 ~/ros2_curri/agv_ws    |    현재 터미널</a:t>
             </a:r>
           </a:p>
         </p:txBody>
@@ -15399,51 +15561,51 @@
               </a:defRPr>
             </a:pPr>
             <a:r>
-              <a:t>        &lt;/surface&gt;</a:t>
-            </a:r>
-            <a:br/>
-            <a:r>
-              <a:t>      &lt;/collision&gt;</a:t>
-            </a:r>
-            <a:br/>
-            <a:r>
-              <a:t>    &lt;/link&gt;</a:t>
-            </a:r>
-            <a:br/>
-            <a:r>
-              <a:t>    </a:t>
-            </a:r>
-            <a:br/>
-            <a:r>
-              <a:t>    </a:t>
-            </a:r>
-            <a:br/>
-            <a:r>
-              <a:t>    &lt;joint name="left_wheel_joint" type="revolute"&gt;</a:t>
-            </a:r>
-            <a:br/>
-            <a:r>
-              <a:t>      &lt;parent&gt;base_link&lt;/parent&gt;</a:t>
-            </a:r>
-            <a:br/>
-            <a:r>
-              <a:t>      &lt;child&gt;left_wheel_link&lt;/child&gt;</a:t>
-            </a:r>
-            <a:br/>
-            <a:r>
-              <a:t>      &lt;axis&gt;</a:t>
-            </a:r>
-            <a:br/>
-            <a:r>
-              <a:t>        &lt;xyz&gt;0 1 0&lt;/xyz&gt;</a:t>
-            </a:r>
-            <a:br/>
-            <a:r>
-              <a:t>        &lt;limit&gt;</a:t>
-            </a:r>
-            <a:br/>
-            <a:r>
-              <a:t>          &lt;lower&gt;-1e16&lt;/lower&gt;</a:t>
+              <a:t>        &lt;/inertia&gt;</a:t>
+            </a:r>
+            <a:br/>
+            <a:r>
+              <a:t>      &lt;/inertial&gt;</a:t>
+            </a:r>
+            <a:br/>
+            <a:r>
+              <a:t>      &lt;visual name="wheel"&gt;</a:t>
+            </a:r>
+            <a:br/>
+            <a:r>
+              <a:t>        &lt;geometry&gt;</a:t>
+            </a:r>
+            <a:br/>
+            <a:r>
+              <a:t>          &lt;cylinder&gt;</a:t>
+            </a:r>
+            <a:br/>
+            <a:r>
+              <a:t>            &lt;radius&gt;0.08&lt;/radius&gt;</a:t>
+            </a:r>
+            <a:br/>
+            <a:r>
+              <a:t>            &lt;length&gt;0.05&lt;/length&gt;</a:t>
+            </a:r>
+            <a:br/>
+            <a:r>
+              <a:t>          &lt;/cylinder&gt;</a:t>
+            </a:r>
+            <a:br/>
+            <a:r>
+              <a:t>        &lt;/geometry&gt;</a:t>
+            </a:r>
+            <a:br/>
+            <a:r>
+              <a:t>      &lt;/visual&gt;</a:t>
+            </a:r>
+            <a:br/>
+            <a:r>
+              <a:t>      &lt;collision name="collision"&gt;</a:t>
+            </a:r>
+            <a:br/>
+            <a:r>
+              <a:t>        &lt;geometry&gt;</a:t>
             </a:r>
           </a:p>
         </p:txBody>
@@ -15482,7 +15644,7 @@
               </a:defRPr>
             </a:pPr>
             <a:r>
-              <a:t>파일 전체 10/15 · 이 슬라이드 다음에 같은 파일의 나머지 줄이 이어집니다.</a:t>
+              <a:t>파일 전체 8/15 · 이 슬라이드 다음에 같은 파일의 나머지 줄이 이어집니다.</a:t>
             </a:r>
           </a:p>
         </p:txBody>
@@ -15539,7 +15701,7 @@
               </a:defRPr>
             </a:pPr>
             <a:r>
-              <a:t>파일을 계속 작성하고 저장한다 (11/15)</a:t>
+              <a:t>파일을 계속 작성하고 저장한다 (9/15)</a:t>
             </a:r>
           </a:p>
         </p:txBody>
@@ -15714,7 +15876,7 @@
               </a:defRPr>
             </a:pPr>
             <a:r>
-              <a:t>현재 단계 20/25    |    현재 폴더 ~/ros2_curri/agv_ws    |    현재 터미널</a:t>
+              <a:t>현재 단계 18/25    |    현재 폴더 ~/ros2_curri/agv_ws    |    현재 터미널</a:t>
             </a:r>
           </a:p>
         </p:txBody>
@@ -15873,51 +16035,51 @@
               </a:defRPr>
             </a:pPr>
             <a:r>
-              <a:t>          &lt;upper&gt;1e16&lt;/upper&gt;</a:t>
-            </a:r>
-            <a:br/>
-            <a:r>
-              <a:t>        &lt;/limit&gt;</a:t>
-            </a:r>
-            <a:br/>
-            <a:r>
-              <a:t>      &lt;/axis&gt;</a:t>
-            </a:r>
-            <a:br/>
-            <a:r>
-              <a:t>    &lt;/joint&gt;</a:t>
-            </a:r>
-            <a:br/>
-            <a:r>
-              <a:t>    </a:t>
-            </a:r>
-            <a:br/>
-            <a:r>
-              <a:t>    </a:t>
-            </a:r>
-            <a:br/>
-            <a:r>
-              <a:t>    &lt;joint name="right_wheel_joint" type="revolute"&gt;</a:t>
-            </a:r>
-            <a:br/>
-            <a:r>
-              <a:t>      &lt;parent&gt;base_link&lt;/parent&gt;</a:t>
-            </a:r>
-            <a:br/>
-            <a:r>
-              <a:t>      &lt;child&gt;right_wheel_link&lt;/child&gt;</a:t>
-            </a:r>
-            <a:br/>
-            <a:r>
-              <a:t>      &lt;axis&gt;</a:t>
-            </a:r>
-            <a:br/>
-            <a:r>
-              <a:t>        &lt;xyz&gt;0 1 0&lt;/xyz&gt;</a:t>
-            </a:r>
-            <a:br/>
-            <a:r>
-              <a:t>        &lt;limit&gt;</a:t>
+              <a:t>          &lt;cylinder&gt;</a:t>
+            </a:r>
+            <a:br/>
+            <a:r>
+              <a:t>            &lt;radius&gt;0.08&lt;/radius&gt;</a:t>
+            </a:r>
+            <a:br/>
+            <a:r>
+              <a:t>            &lt;length&gt;0.05&lt;/length&gt;</a:t>
+            </a:r>
+            <a:br/>
+            <a:r>
+              <a:t>          &lt;/cylinder&gt;</a:t>
+            </a:r>
+            <a:br/>
+            <a:r>
+              <a:t>        &lt;/geometry&gt;</a:t>
+            </a:r>
+            <a:br/>
+            <a:r>
+              <a:t>        &lt;surface&gt;</a:t>
+            </a:r>
+            <a:br/>
+            <a:r>
+              <a:t>          &lt;friction&gt;</a:t>
+            </a:r>
+            <a:br/>
+            <a:r>
+              <a:t>            &lt;ode&gt;</a:t>
+            </a:r>
+            <a:br/>
+            <a:r>
+              <a:t>              &lt;mu&gt;1.0&lt;/mu&gt;</a:t>
+            </a:r>
+            <a:br/>
+            <a:r>
+              <a:t>              &lt;mu2&gt;1.0&lt;/mu2&gt;</a:t>
+            </a:r>
+            <a:br/>
+            <a:r>
+              <a:t>            &lt;/ode&gt;</a:t>
+            </a:r>
+            <a:br/>
+            <a:r>
+              <a:t>          &lt;/friction&gt;</a:t>
             </a:r>
           </a:p>
         </p:txBody>
@@ -15956,7 +16118,7 @@
               </a:defRPr>
             </a:pPr>
             <a:r>
-              <a:t>파일 전체 11/15 · 이 슬라이드 다음에 같은 파일의 나머지 줄이 이어집니다.</a:t>
+              <a:t>파일 전체 9/15 · 이 슬라이드 다음에 같은 파일의 나머지 줄이 이어집니다.</a:t>
             </a:r>
           </a:p>
         </p:txBody>
@@ -16013,7 +16175,7 @@
               </a:defRPr>
             </a:pPr>
             <a:r>
-              <a:t>파일을 계속 작성하고 저장한다 (12/15)</a:t>
+              <a:t>파일을 계속 작성하고 저장한다 (10/15)</a:t>
             </a:r>
           </a:p>
         </p:txBody>
@@ -16188,7 +16350,7 @@
               </a:defRPr>
             </a:pPr>
             <a:r>
-              <a:t>현재 단계 21/25    |    현재 폴더 ~/ros2_curri/agv_ws    |    현재 터미널</a:t>
+              <a:t>현재 단계 19/25    |    현재 폴더 ~/ros2_curri/agv_ws    |    현재 터미널</a:t>
             </a:r>
           </a:p>
         </p:txBody>
@@ -16347,51 +16509,51 @@
               </a:defRPr>
             </a:pPr>
             <a:r>
+              <a:t>        &lt;/surface&gt;</a:t>
+            </a:r>
+            <a:br/>
+            <a:r>
+              <a:t>      &lt;/collision&gt;</a:t>
+            </a:r>
+            <a:br/>
+            <a:r>
+              <a:t>    &lt;/link&gt;</a:t>
+            </a:r>
+            <a:br/>
+            <a:r>
+              <a:t>    </a:t>
+            </a:r>
+            <a:br/>
+            <a:r>
+              <a:t>    </a:t>
+            </a:r>
+            <a:br/>
+            <a:r>
+              <a:t>    &lt;joint name="left_wheel_joint" type="revolute"&gt;</a:t>
+            </a:r>
+            <a:br/>
+            <a:r>
+              <a:t>      &lt;parent&gt;base_link&lt;/parent&gt;</a:t>
+            </a:r>
+            <a:br/>
+            <a:r>
+              <a:t>      &lt;child&gt;left_wheel_link&lt;/child&gt;</a:t>
+            </a:r>
+            <a:br/>
+            <a:r>
+              <a:t>      &lt;axis&gt;</a:t>
+            </a:r>
+            <a:br/>
+            <a:r>
+              <a:t>        &lt;xyz&gt;0 1 0&lt;/xyz&gt;</a:t>
+            </a:r>
+            <a:br/>
+            <a:r>
+              <a:t>        &lt;limit&gt;</a:t>
+            </a:r>
+            <a:br/>
+            <a:r>
               <a:t>          &lt;lower&gt;-1e16&lt;/lower&gt;</a:t>
-            </a:r>
-            <a:br/>
-            <a:r>
-              <a:t>          &lt;upper&gt;1e16&lt;/upper&gt;</a:t>
-            </a:r>
-            <a:br/>
-            <a:r>
-              <a:t>        &lt;/limit&gt;</a:t>
-            </a:r>
-            <a:br/>
-            <a:r>
-              <a:t>      &lt;/axis&gt;</a:t>
-            </a:r>
-            <a:br/>
-            <a:r>
-              <a:t>    &lt;/joint&gt;</a:t>
-            </a:r>
-            <a:br/>
-            <a:r>
-              <a:t>    </a:t>
-            </a:r>
-            <a:br/>
-            <a:r>
-              <a:t>    </a:t>
-            </a:r>
-            <a:br/>
-            <a:r>
-              <a:t>    &lt;ros2_control name="GazeboSimSystem" type="system"&gt;</a:t>
-            </a:r>
-            <a:br/>
-            <a:r>
-              <a:t>      &lt;hardware&gt;</a:t>
-            </a:r>
-            <a:br/>
-            <a:r>
-              <a:t>        &lt;plugin&gt;gz_ros2_control/GazeboSimSystem&lt;/plugin&gt;</a:t>
-            </a:r>
-            <a:br/>
-            <a:r>
-              <a:t>      &lt;/hardware&gt;</a:t>
-            </a:r>
-            <a:br/>
-            <a:r>
-              <a:t>      &lt;joint name="left_wheel_joint"&gt;</a:t>
             </a:r>
           </a:p>
         </p:txBody>
@@ -16430,7 +16592,7 @@
               </a:defRPr>
             </a:pPr>
             <a:r>
-              <a:t>파일 전체 12/15 · 이 슬라이드 다음에 같은 파일의 나머지 줄이 이어집니다.</a:t>
+              <a:t>파일 전체 10/15 · 이 슬라이드 다음에 같은 파일의 나머지 줄이 이어집니다.</a:t>
             </a:r>
           </a:p>
         </p:txBody>
@@ -16487,7 +16649,7 @@
               </a:defRPr>
             </a:pPr>
             <a:r>
-              <a:t>파일을 계속 작성하고 저장한다 (13/15)</a:t>
+              <a:t>파일을 계속 작성하고 저장한다 (11/15)</a:t>
             </a:r>
           </a:p>
         </p:txBody>
@@ -16662,7 +16824,7 @@
               </a:defRPr>
             </a:pPr>
             <a:r>
-              <a:t>현재 단계 22/25    |    현재 폴더 ~/ros2_curri/agv_ws    |    현재 터미널</a:t>
+              <a:t>현재 단계 20/25    |    현재 폴더 ~/ros2_curri/agv_ws    |    현재 터미널</a:t>
             </a:r>
           </a:p>
         </p:txBody>
@@ -16821,51 +16983,51 @@
               </a:defRPr>
             </a:pPr>
             <a:r>
-              <a:t>        &lt;command_interface name="velocity"&gt;</a:t>
-            </a:r>
-            <a:br/>
-            <a:r>
-              <a:t>          &lt;param name="min"&gt;-20&lt;/param&gt;</a:t>
-            </a:r>
-            <a:br/>
-            <a:r>
-              <a:t>          &lt;param name="max"&gt;20&lt;/param&gt;</a:t>
-            </a:r>
-            <a:br/>
-            <a:r>
-              <a:t>        &lt;/command_interface&gt;</a:t>
-            </a:r>
-            <a:br/>
-            <a:r>
-              <a:t>        &lt;state_interface name="position"/&gt;</a:t>
-            </a:r>
-            <a:br/>
-            <a:r>
-              <a:t>        &lt;state_interface name="velocity"/&gt;</a:t>
-            </a:r>
-            <a:br/>
-            <a:r>
-              <a:t>      &lt;/joint&gt;</a:t>
-            </a:r>
-            <a:br/>
-            <a:r>
-              <a:t>      &lt;joint name="right_wheel_joint"&gt;</a:t>
-            </a:r>
-            <a:br/>
-            <a:r>
-              <a:t>        &lt;command_interface name="velocity"&gt;</a:t>
-            </a:r>
-            <a:br/>
-            <a:r>
-              <a:t>          &lt;param name="min"&gt;-20&lt;/param&gt;</a:t>
-            </a:r>
-            <a:br/>
-            <a:r>
-              <a:t>          &lt;param name="max"&gt;20&lt;/param&gt;</a:t>
-            </a:r>
-            <a:br/>
-            <a:r>
-              <a:t>        &lt;/command_interface&gt;</a:t>
+              <a:t>          &lt;upper&gt;1e16&lt;/upper&gt;</a:t>
+            </a:r>
+            <a:br/>
+            <a:r>
+              <a:t>        &lt;/limit&gt;</a:t>
+            </a:r>
+            <a:br/>
+            <a:r>
+              <a:t>      &lt;/axis&gt;</a:t>
+            </a:r>
+            <a:br/>
+            <a:r>
+              <a:t>    &lt;/joint&gt;</a:t>
+            </a:r>
+            <a:br/>
+            <a:r>
+              <a:t>    </a:t>
+            </a:r>
+            <a:br/>
+            <a:r>
+              <a:t>    </a:t>
+            </a:r>
+            <a:br/>
+            <a:r>
+              <a:t>    &lt;joint name="right_wheel_joint" type="revolute"&gt;</a:t>
+            </a:r>
+            <a:br/>
+            <a:r>
+              <a:t>      &lt;parent&gt;base_link&lt;/parent&gt;</a:t>
+            </a:r>
+            <a:br/>
+            <a:r>
+              <a:t>      &lt;child&gt;right_wheel_link&lt;/child&gt;</a:t>
+            </a:r>
+            <a:br/>
+            <a:r>
+              <a:t>      &lt;axis&gt;</a:t>
+            </a:r>
+            <a:br/>
+            <a:r>
+              <a:t>        &lt;xyz&gt;0 1 0&lt;/xyz&gt;</a:t>
+            </a:r>
+            <a:br/>
+            <a:r>
+              <a:t>        &lt;limit&gt;</a:t>
             </a:r>
           </a:p>
         </p:txBody>
@@ -16904,7 +17066,7 @@
               </a:defRPr>
             </a:pPr>
             <a:r>
-              <a:t>파일 전체 13/15 · 이 슬라이드 다음에 같은 파일의 나머지 줄이 이어집니다.</a:t>
+              <a:t>파일 전체 11/15 · 이 슬라이드 다음에 같은 파일의 나머지 줄이 이어집니다.</a:t>
             </a:r>
           </a:p>
         </p:txBody>
@@ -16961,7 +17123,7 @@
               </a:defRPr>
             </a:pPr>
             <a:r>
-              <a:t>파일을 계속 작성하고 저장한다 (14/15)</a:t>
+              <a:t>파일을 계속 작성하고 저장한다 (12/15)</a:t>
             </a:r>
           </a:p>
         </p:txBody>
@@ -17136,7 +17298,7 @@
               </a:defRPr>
             </a:pPr>
             <a:r>
-              <a:t>현재 단계 23/25    |    현재 폴더 ~/ros2_curri/agv_ws    |    현재 터미널</a:t>
+              <a:t>현재 단계 21/25    |    현재 폴더 ~/ros2_curri/agv_ws    |    현재 터미널</a:t>
             </a:r>
           </a:p>
         </p:txBody>
@@ -17295,19 +17457,23 @@
               </a:defRPr>
             </a:pPr>
             <a:r>
-              <a:t>        &lt;state_interface name="position"/&gt;</a:t>
-            </a:r>
-            <a:br/>
-            <a:r>
-              <a:t>        &lt;state_interface name="velocity"/&gt;</a:t>
-            </a:r>
-            <a:br/>
-            <a:r>
-              <a:t>      &lt;/joint&gt;</a:t>
-            </a:r>
-            <a:br/>
-            <a:r>
-              <a:t>    &lt;/ros2_control&gt;</a:t>
+              <a:t>          &lt;lower&gt;-1e16&lt;/lower&gt;</a:t>
+            </a:r>
+            <a:br/>
+            <a:r>
+              <a:t>          &lt;upper&gt;1e16&lt;/upper&gt;</a:t>
+            </a:r>
+            <a:br/>
+            <a:r>
+              <a:t>        &lt;/limit&gt;</a:t>
+            </a:r>
+            <a:br/>
+            <a:r>
+              <a:t>      &lt;/axis&gt;</a:t>
+            </a:r>
+            <a:br/>
+            <a:r>
+              <a:t>    &lt;/joint&gt;</a:t>
             </a:r>
             <a:br/>
             <a:r>
@@ -17319,27 +17485,23 @@
             </a:r>
             <a:br/>
             <a:r>
-              <a:t>    &lt;!-- The course workspace is fixed at ~/ros2_curri/agv_ws; run colcon build before</a:t>
-            </a:r>
-            <a:br/>
-            <a:r>
-              <a:t>      this M16 launch. --&gt;</a:t>
-            </a:r>
-            <a:br/>
-            <a:r>
-              <a:t>    </a:t>
-            </a:r>
-            <a:br/>
-            <a:r>
-              <a:t>    </a:t>
-            </a:r>
-            <a:br/>
-            <a:r>
-              <a:t>    &lt;plugin filename="libgz_ros2_control-system.so"</a:t>
-            </a:r>
-            <a:br/>
-            <a:r>
-              <a:t>      name="gz_ros2_control::GazeboSimROS2ControlPlugin"&gt;</a:t>
+              <a:t>    &lt;ros2_control name="GazeboSimSystem" type="system"&gt;</a:t>
+            </a:r>
+            <a:br/>
+            <a:r>
+              <a:t>      &lt;hardware&gt;</a:t>
+            </a:r>
+            <a:br/>
+            <a:r>
+              <a:t>        &lt;plugin&gt;gz_ros2_control/GazeboSimSystem&lt;/plugin&gt;</a:t>
+            </a:r>
+            <a:br/>
+            <a:r>
+              <a:t>      &lt;/hardware&gt;</a:t>
+            </a:r>
+            <a:br/>
+            <a:r>
+              <a:t>      &lt;joint name="left_wheel_joint"&gt;</a:t>
             </a:r>
           </a:p>
         </p:txBody>
@@ -17378,7 +17540,7 @@
               </a:defRPr>
             </a:pPr>
             <a:r>
-              <a:t>파일 전체 14/15 · 이 슬라이드 다음에 같은 파일의 나머지 줄이 이어집니다.</a:t>
+              <a:t>파일 전체 12/15 · 이 슬라이드 다음에 같은 파일의 나머지 줄이 이어집니다.</a:t>
             </a:r>
           </a:p>
         </p:txBody>
@@ -17854,7 +18016,7 @@
               </a:defRPr>
             </a:pPr>
             <a:r>
-              <a:t>파일을 계속 작성하고 저장한다 (15/15)</a:t>
+              <a:t>파일을 계속 작성하고 저장한다 (13/15)</a:t>
             </a:r>
           </a:p>
         </p:txBody>
@@ -18029,7 +18191,7 @@
               </a:defRPr>
             </a:pPr>
             <a:r>
-              <a:t>현재 단계 24/25    |    현재 폴더 ~/ros2_curri/agv_ws    |    현재 터미널</a:t>
+              <a:t>현재 단계 22/25    |    현재 폴더 ~/ros2_curri/agv_ws    |    현재 터미널</a:t>
             </a:r>
           </a:p>
         </p:txBody>
@@ -18188,32 +18350,51 @@
               </a:defRPr>
             </a:pPr>
             <a:r>
-              <a:t>      &lt;parameters&gt;/home/lab4090/ros2_curri/agv_ws/install/agv_control/share/agv_control/config/controllers.yaml&lt;/parameters&gt;</a:t>
-            </a:r>
-            <a:br/>
-            <a:r>
-              <a:t>    &lt;/plugin&gt;</a:t>
-            </a:r>
-            <a:br/>
-            <a:r>
-              <a:t>    </a:t>
-            </a:r>
-            <a:br/>
-            <a:r>
-              <a:t>  </a:t>
-            </a:r>
-            <a:br/>
-            <a:r>
-              <a:t>  &lt;/model&gt;</a:t>
-            </a:r>
-            <a:br/>
-            <a:r>
-              <a:t>  </a:t>
-            </a:r>
-            <a:br/>
-            <a:br/>
-            <a:r>
-              <a:t>&lt;/sdf&gt;</a:t>
+              <a:t>        &lt;command_interface name="velocity"&gt;</a:t>
+            </a:r>
+            <a:br/>
+            <a:r>
+              <a:t>          &lt;param name="min"&gt;-20&lt;/param&gt;</a:t>
+            </a:r>
+            <a:br/>
+            <a:r>
+              <a:t>          &lt;param name="max"&gt;20&lt;/param&gt;</a:t>
+            </a:r>
+            <a:br/>
+            <a:r>
+              <a:t>        &lt;/command_interface&gt;</a:t>
+            </a:r>
+            <a:br/>
+            <a:r>
+              <a:t>        &lt;state_interface name="position"/&gt;</a:t>
+            </a:r>
+            <a:br/>
+            <a:r>
+              <a:t>        &lt;state_interface name="velocity"/&gt;</a:t>
+            </a:r>
+            <a:br/>
+            <a:r>
+              <a:t>      &lt;/joint&gt;</a:t>
+            </a:r>
+            <a:br/>
+            <a:r>
+              <a:t>      &lt;joint name="right_wheel_joint"&gt;</a:t>
+            </a:r>
+            <a:br/>
+            <a:r>
+              <a:t>        &lt;command_interface name="velocity"&gt;</a:t>
+            </a:r>
+            <a:br/>
+            <a:r>
+              <a:t>          &lt;param name="min"&gt;-20&lt;/param&gt;</a:t>
+            </a:r>
+            <a:br/>
+            <a:r>
+              <a:t>          &lt;param name="max"&gt;20&lt;/param&gt;</a:t>
+            </a:r>
+            <a:br/>
+            <a:r>
+              <a:t>        &lt;/command_interface&gt;</a:t>
             </a:r>
           </a:p>
         </p:txBody>
@@ -18252,7 +18433,7 @@
               </a:defRPr>
             </a:pPr>
             <a:r>
-              <a:t>파일 전체 15/15 · 이 슬라이드 다음에 같은 파일의 나머지 줄이 이어집니다.</a:t>
+              <a:t>파일 전체 13/15 · 이 슬라이드 다음에 같은 파일의 나머지 줄이 이어집니다.</a:t>
             </a:r>
           </a:p>
         </p:txBody>
@@ -18309,7 +18490,7 @@
               </a:defRPr>
             </a:pPr>
             <a:r>
-              <a:t>파일을 새로 만들고 저장한다 (1/3)</a:t>
+              <a:t>파일을 계속 작성하고 저장한다 (14/15)</a:t>
             </a:r>
           </a:p>
         </p:txBody>
@@ -18348,7 +18529,7 @@
               </a:defRPr>
             </a:pPr>
             <a:r>
-              <a:t>~/ros2_curri/agv_ws/src/agv_gazebo/launch/ros2_control.launch.py</a:t>
+              <a:t>~/ros2_curri/agv_ws/src/agv_gazebo/models/agv_ros2_control/model.sdf</a:t>
             </a:r>
           </a:p>
         </p:txBody>
@@ -18484,7 +18665,7 @@
               </a:defRPr>
             </a:pPr>
             <a:r>
-              <a:t>현재 단계 25/28    |    현재 폴더 ~/ros2_curri/agv_ws    |    현재 터미널</a:t>
+              <a:t>현재 단계 23/25    |    현재 폴더 ~/ros2_curri/agv_ws    |    현재 터미널</a:t>
             </a:r>
           </a:p>
         </p:txBody>
@@ -18581,11 +18762,11 @@
               </a:defRPr>
             </a:pPr>
             <a:r>
-              <a:t>파일 생성: mkdir -p ~/ros2_curri/agv_ws/src/agv_gazebo/launch</a:t>
-            </a:r>
-            <a:br/>
-            <a:r>
-              <a:t>파일 열기: nano ~/ros2_curri/agv_ws/src/agv_gazebo/launch/ros2_control.launch.py</a:t>
+              <a:t>파일 생성: mkdir -p ~/ros2_curri/agv_ws/src/agv_gazebo/models/agv_ros2_control</a:t>
+            </a:r>
+            <a:br/>
+            <a:r>
+              <a:t>파일 열기: nano ~/ros2_curri/agv_ws/src/agv_gazebo/models/agv_ros2_control/model.sdf</a:t>
             </a:r>
           </a:p>
         </p:txBody>
@@ -18643,48 +18824,51 @@
               </a:defRPr>
             </a:pPr>
             <a:r>
-              <a:t>"""M16 isolated launch: gz_ros2_control, two active controllers, and a physical AGV."""</a:t>
-            </a:r>
-            <a:br/>
-            <a:r>
-              <a:t>import os</a:t>
-            </a:r>
-            <a:br/>
-            <a:r>
-              <a:t>from ament_index_python.packages import get_package_share_directory</a:t>
-            </a:r>
-            <a:br/>
-            <a:r>
-              <a:t>from launch import LaunchDescription</a:t>
-            </a:r>
-            <a:br/>
-            <a:r>
-              <a:t>from launch.actions import IncludeLaunchDescription, RegisterEventHandler, SetEnvironmentVariable, TimerAction</a:t>
-            </a:r>
-            <a:br/>
-            <a:r>
-              <a:t>from launch.event_handlers import OnProcessExit</a:t>
-            </a:r>
-            <a:br/>
-            <a:r>
-              <a:t>from launch.launch_description_sources import PythonLaunchDescriptionSource</a:t>
-            </a:r>
-            <a:br/>
-            <a:r>
-              <a:t>from launch.substitutions import Command</a:t>
-            </a:r>
-            <a:br/>
-            <a:r>
-              <a:t>from launch_ros.actions import Node</a:t>
-            </a:r>
-            <a:br/>
-            <a:r>
-              <a:t>from launch_ros.parameter_descriptions import ParameterValue</a:t>
-            </a:r>
-            <a:br/>
-            <a:br/>
-            <a:r>
-              <a:t>def generate_launch_description():</a:t>
+              <a:t>        &lt;state_interface name="position"/&gt;</a:t>
+            </a:r>
+            <a:br/>
+            <a:r>
+              <a:t>        &lt;state_interface name="velocity"/&gt;</a:t>
+            </a:r>
+            <a:br/>
+            <a:r>
+              <a:t>      &lt;/joint&gt;</a:t>
+            </a:r>
+            <a:br/>
+            <a:r>
+              <a:t>    &lt;/ros2_control&gt;</a:t>
+            </a:r>
+            <a:br/>
+            <a:r>
+              <a:t>    </a:t>
+            </a:r>
+            <a:br/>
+            <a:r>
+              <a:t>    </a:t>
+            </a:r>
+            <a:br/>
+            <a:r>
+              <a:t>    &lt;!-- The course workspace is fixed at ~/ros2_curri/agv_ws; run colcon build before</a:t>
+            </a:r>
+            <a:br/>
+            <a:r>
+              <a:t>      this M16 launch. --&gt;</a:t>
+            </a:r>
+            <a:br/>
+            <a:r>
+              <a:t>    </a:t>
+            </a:r>
+            <a:br/>
+            <a:r>
+              <a:t>    </a:t>
+            </a:r>
+            <a:br/>
+            <a:r>
+              <a:t>    &lt;plugin filename="libgz_ros2_control-system.so"</a:t>
+            </a:r>
+            <a:br/>
+            <a:r>
+              <a:t>      name="gz_ros2_control::GazeboSimROS2ControlPlugin"&gt;</a:t>
             </a:r>
           </a:p>
         </p:txBody>
@@ -18723,7 +18907,7 @@
               </a:defRPr>
             </a:pPr>
             <a:r>
-              <a:t>파일 전체 1/3 · 이 슬라이드 다음에 같은 파일의 나머지 줄이 이어집니다.</a:t>
+              <a:t>파일 전체 14/15 · 이 슬라이드 다음에 같은 파일의 나머지 줄이 이어집니다.</a:t>
             </a:r>
           </a:p>
         </p:txBody>
@@ -18780,7 +18964,7 @@
               </a:defRPr>
             </a:pPr>
             <a:r>
-              <a:t>파일을 계속 작성하고 저장한다 (2/3)</a:t>
+              <a:t>파일을 계속 작성하고 저장한다 (15/15)</a:t>
             </a:r>
           </a:p>
         </p:txBody>
@@ -18819,7 +19003,7 @@
               </a:defRPr>
             </a:pPr>
             <a:r>
-              <a:t>~/ros2_curri/agv_ws/src/agv_gazebo/launch/ros2_control.launch.py</a:t>
+              <a:t>~/ros2_curri/agv_ws/src/agv_gazebo/models/agv_ros2_control/model.sdf</a:t>
             </a:r>
           </a:p>
         </p:txBody>
@@ -18955,7 +19139,7 @@
               </a:defRPr>
             </a:pPr>
             <a:r>
-              <a:t>현재 단계 26/28    |    현재 폴더 ~/ros2_curri/agv_ws    |    현재 터미널</a:t>
+              <a:t>현재 단계 24/25    |    현재 폴더 ~/ros2_curri/agv_ws    |    현재 터미널</a:t>
             </a:r>
           </a:p>
         </p:txBody>
@@ -19052,11 +19236,11 @@
               </a:defRPr>
             </a:pPr>
             <a:r>
-              <a:t>파일 생성: mkdir -p ~/ros2_curri/agv_ws/src/agv_gazebo/launch</a:t>
-            </a:r>
-            <a:br/>
-            <a:r>
-              <a:t>파일 열기: nano ~/ros2_curri/agv_ws/src/agv_gazebo/launch/ros2_control.launch.py</a:t>
+              <a:t>파일 생성: mkdir -p ~/ros2_curri/agv_ws/src/agv_gazebo/models/agv_ros2_control</a:t>
+            </a:r>
+            <a:br/>
+            <a:r>
+              <a:t>파일 열기: nano ~/ros2_curri/agv_ws/src/agv_gazebo/models/agv_ros2_control/model.sdf</a:t>
             </a:r>
           </a:p>
         </p:txBody>
@@ -19114,51 +19298,32 @@
               </a:defRPr>
             </a:pPr>
             <a:r>
-              <a:t>    gazebo = get_package_share_directory('agv_gazebo')</a:t>
-            </a:r>
-            <a:br/>
-            <a:r>
-              <a:t>    models = os.path.join(gazebo, 'models')</a:t>
-            </a:r>
-            <a:br/>
-            <a:r>
-              <a:t>    world = os.path.join(gazebo, 'worlds', 'warehouse_ros2_control.sdf')</a:t>
-            </a:r>
-            <a:br/>
-            <a:r>
-              <a:t>    description = get_package_share_directory('agv_description')</a:t>
-            </a:r>
-            <a:br/>
-            <a:r>
-              <a:t>    gz_launch = os.path.join(get_package_share_directory('ros_gz_sim'), 'launch', 'gz_sim.launch.py')</a:t>
-            </a:r>
-            <a:br/>
-            <a:r>
-              <a:t>    previous = os.environ.get('GZ_SIM_RESOURCE_PATH', '')</a:t>
-            </a:r>
-            <a:br/>
-            <a:r>
-              <a:t>    simulator = IncludeLaunchDescription(PythonLaunchDescriptionSource(gz_launch),</a:t>
-            </a:r>
-            <a:br/>
-            <a:r>
-              <a:t>        launch_arguments={'gz_args': '-r ' + world}.items())</a:t>
-            </a:r>
-            <a:br/>
-            <a:r>
-              <a:t>    robot_description = ParameterValue(Command(['xacro ', os.path.join(description, 'urdf',</a:t>
-            </a:r>
-            <a:br/>
-            <a:r>
-              <a:t>         'agv_ros2_control.urdf.xacro')]), value_type=str)</a:t>
-            </a:r>
-            <a:br/>
-            <a:r>
-              <a:t>    jsb = Node(package='controller_manager', executable='spawner', arguments=['joint_state_broadcaster',</a:t>
-            </a:r>
-            <a:br/>
-            <a:r>
-              <a:t>         '-c', '/controller_manager'], output='screen')</a:t>
+              <a:t>      &lt;parameters&gt;/home/lab4090/ros2_curri/agv_ws/install/agv_control/share/agv_control/config/controllers.yaml&lt;/parameters&gt;</a:t>
+            </a:r>
+            <a:br/>
+            <a:r>
+              <a:t>    &lt;/plugin&gt;</a:t>
+            </a:r>
+            <a:br/>
+            <a:r>
+              <a:t>    </a:t>
+            </a:r>
+            <a:br/>
+            <a:r>
+              <a:t>  </a:t>
+            </a:r>
+            <a:br/>
+            <a:r>
+              <a:t>  &lt;/model&gt;</a:t>
+            </a:r>
+            <a:br/>
+            <a:r>
+              <a:t>  </a:t>
+            </a:r>
+            <a:br/>
+            <a:br/>
+            <a:r>
+              <a:t>&lt;/sdf&gt;</a:t>
             </a:r>
           </a:p>
         </p:txBody>
@@ -19197,7 +19362,7 @@
               </a:defRPr>
             </a:pPr>
             <a:r>
-              <a:t>파일 전체 2/3 · 이 슬라이드 다음에 같은 파일의 나머지 줄이 이어집니다.</a:t>
+              <a:t>파일 전체 15/15 · 이 슬라이드 다음에 같은 파일의 나머지 줄이 이어집니다.</a:t>
             </a:r>
           </a:p>
         </p:txBody>
@@ -19254,7 +19419,7 @@
               </a:defRPr>
             </a:pPr>
             <a:r>
-              <a:t>파일을 계속 작성하고 저장한다 (3/3)</a:t>
+              <a:t>파일을 새로 만들고 저장한다 (1/3)</a:t>
             </a:r>
           </a:p>
         </p:txBody>
@@ -19429,7 +19594,7 @@
               </a:defRPr>
             </a:pPr>
             <a:r>
-              <a:t>현재 단계 27/28    |    현재 폴더 ~/ros2_curri/agv_ws    |    현재 터미널</a:t>
+              <a:t>현재 단계 25/28    |    현재 폴더 ~/ros2_curri/agv_ws    |    현재 터미널</a:t>
             </a:r>
           </a:p>
         </p:txBody>
@@ -19588,43 +19753,48 @@
               </a:defRPr>
             </a:pPr>
             <a:r>
-              <a:t>    drive = Node(package='controller_manager', executable='spawner', arguments=['diff_drive_controller',</a:t>
-            </a:r>
-            <a:br/>
-            <a:r>
-              <a:t>         '-c', '/controller_manager'], output='screen')</a:t>
-            </a:r>
-            <a:br/>
-            <a:r>
-              <a:t>    return LaunchDescription([SetEnvironmentVariable('GZ_SIM_RESOURCE_PATH',</a:t>
-            </a:r>
-            <a:br/>
-            <a:r>
-              <a:t>        models + (':' + previous if previous else '')), simulator, Node(package='robot_state_publisher',</a:t>
-            </a:r>
-            <a:br/>
-            <a:r>
-              <a:t>         executable='robot_state_publisher',</a:t>
-            </a:r>
-            <a:br/>
-            <a:r>
-              <a:t>        parameters=[{'robot_description': robot_description, 'use_sim_time': True}],</a:t>
-            </a:r>
-            <a:br/>
-            <a:r>
-              <a:t>        output='screen'), Node(package='ros_gz_bridge', executable='parameter_bridge',</a:t>
-            </a:r>
-            <a:br/>
-            <a:r>
-              <a:t>        arguments=['/clock@rosgraph_msgs/msg/Clock[gz.msgs.Clock'], output='screen'),</a:t>
-            </a:r>
-            <a:br/>
-            <a:r>
-              <a:t>        TimerAction(period=6.0, actions=[jsb]),</a:t>
-            </a:r>
-            <a:br/>
-            <a:r>
-              <a:t>        RegisterEventHandler(OnProcessExit(target_action=jsb, on_exit=[drive]))])</a:t>
+              <a:t>"""M16 isolated launch: gz_ros2_control, two active controllers, and a physical AGV."""</a:t>
+            </a:r>
+            <a:br/>
+            <a:r>
+              <a:t>import os</a:t>
+            </a:r>
+            <a:br/>
+            <a:r>
+              <a:t>from ament_index_python.packages import get_package_share_directory</a:t>
+            </a:r>
+            <a:br/>
+            <a:r>
+              <a:t>from launch import LaunchDescription</a:t>
+            </a:r>
+            <a:br/>
+            <a:r>
+              <a:t>from launch.actions import IncludeLaunchDescription, RegisterEventHandler, SetEnvironmentVariable, TimerAction</a:t>
+            </a:r>
+            <a:br/>
+            <a:r>
+              <a:t>from launch.event_handlers import OnProcessExit</a:t>
+            </a:r>
+            <a:br/>
+            <a:r>
+              <a:t>from launch.launch_description_sources import PythonLaunchDescriptionSource</a:t>
+            </a:r>
+            <a:br/>
+            <a:r>
+              <a:t>from launch.substitutions import Command</a:t>
+            </a:r>
+            <a:br/>
+            <a:r>
+              <a:t>from launch_ros.actions import Node</a:t>
+            </a:r>
+            <a:br/>
+            <a:r>
+              <a:t>from launch_ros.parameter_descriptions import ParameterValue</a:t>
+            </a:r>
+            <a:br/>
+            <a:br/>
+            <a:r>
+              <a:t>def generate_launch_description():</a:t>
             </a:r>
           </a:p>
         </p:txBody>
@@ -19663,7 +19833,7 @@
               </a:defRPr>
             </a:pPr>
             <a:r>
-              <a:t>파일 전체 3/3 · 이 슬라이드 다음에 같은 파일의 나머지 줄이 이어집니다.</a:t>
+              <a:t>파일 전체 1/3 · 이 슬라이드 다음에 같은 파일의 나머지 줄이 이어집니다.</a:t>
             </a:r>
           </a:p>
         </p:txBody>
@@ -19720,7 +19890,7 @@
               </a:defRPr>
             </a:pPr>
             <a:r>
-              <a:t>build → source → run 순서로 실행한다</a:t>
+              <a:t>파일을 계속 작성하고 저장한다 (2/3)</a:t>
             </a:r>
           </a:p>
         </p:txBody>
@@ -19759,7 +19929,7 @@
               </a:defRPr>
             </a:pPr>
             <a:r>
-              <a:t>새 파일 또는 수정 파일은 build와 source 뒤에만 실행 이름·설정에 반영됩니다.</a:t>
+              <a:t>~/ros2_curri/agv_ws/src/agv_gazebo/launch/ros2_control.launch.py</a:t>
             </a:r>
           </a:p>
         </p:txBody>
@@ -19895,23 +20065,124 @@
               </a:defRPr>
             </a:pPr>
             <a:r>
-              <a:t>현재 단계 실행    |    현재 폴더 ~/ros2_curri/agv_ws    |    현재 터미널</a:t>
-            </a:r>
-          </a:p>
-        </p:txBody>
-      </p:sp>
-      <p:sp>
-        <p:nvSpPr>
-          <p:cNvPr id="7" name="Rounded Rectangle 6"/>
+              <a:t>현재 단계 26/28    |    현재 폴더 ~/ros2_curri/agv_ws    |    현재 터미널</a:t>
+            </a:r>
+          </a:p>
+        </p:txBody>
+      </p:sp>
+      <p:sp>
+        <p:nvSpPr>
+          <p:cNvPr id="7" name="TextBox 6"/>
+          <p:cNvSpPr txBox="1"/>
+          <p:nvPr/>
+        </p:nvSpPr>
+        <p:spPr>
+          <a:xfrm>
+            <a:off x="658368" y="1627632"/>
+            <a:ext cx="10972800" cy="256032"/>
+          </a:xfrm>
+          <a:prstGeom prst="rect">
+            <a:avLst/>
+          </a:prstGeom>
+          <a:noFill/>
+        </p:spPr>
+        <p:txBody>
+          <a:bodyPr wrap="square" lIns="73152" rIns="73152" tIns="36576" bIns="36576">
+            <a:spAutoFit/>
+          </a:bodyPr>
+          <a:lstStyle/>
+          <a:p>
+            <a:pPr algn="l">
+              <a:spcAft>
+                <a:spcPts val="0"/>
+              </a:spcAft>
+              <a:defRPr sz="1500" b="1">
+                <a:solidFill>
+                  <a:srgbClr val="122C4E"/>
+                </a:solidFill>
+                <a:latin typeface="Noto Sans CJK KR"/>
+              </a:defRPr>
+            </a:pPr>
+            <a:r>
+              <a:t>이번 단계: 파일의 전체 내용을 중간 생략 없이 작성합니다. 아래 줄 범위를 끝까지 입력하세요.</a:t>
+            </a:r>
+          </a:p>
+        </p:txBody>
+      </p:sp>
+      <p:sp>
+        <p:nvSpPr>
+          <p:cNvPr id="8" name="Rectangle 7"/>
           <p:cNvSpPr/>
           <p:nvPr/>
         </p:nvSpPr>
         <p:spPr>
           <a:xfrm>
-            <a:off x="658368" y="1700784"/>
-            <a:ext cx="10972800" cy="3182112"/>
-          </a:xfrm>
-          <a:prstGeom prst="roundRect">
+            <a:off x="658368" y="1956816"/>
+            <a:ext cx="10972800" cy="603504"/>
+          </a:xfrm>
+          <a:prstGeom prst="rect">
+            <a:avLst/>
+          </a:prstGeom>
+          <a:solidFill>
+            <a:srgbClr val="F4F7FB"/>
+          </a:solidFill>
+          <a:ln>
+            <a:solidFill>
+              <a:srgbClr val="F4F7FB"/>
+            </a:solidFill>
+          </a:ln>
+        </p:spPr>
+        <p:style>
+          <a:lnRef idx="1">
+            <a:schemeClr val="accent1"/>
+          </a:lnRef>
+          <a:fillRef idx="3">
+            <a:schemeClr val="accent1"/>
+          </a:fillRef>
+          <a:effectRef idx="2">
+            <a:schemeClr val="accent1"/>
+          </a:effectRef>
+          <a:fontRef idx="minor">
+            <a:schemeClr val="lt1"/>
+          </a:fontRef>
+        </p:style>
+        <p:txBody>
+          <a:bodyPr rtlCol="0" anchor="ctr" wrap="square" lIns="73152" rIns="73152" tIns="36576" bIns="36576"/>
+          <a:lstStyle/>
+          <a:p>
+            <a:pPr algn="l">
+              <a:spcAft>
+                <a:spcPts val="0"/>
+              </a:spcAft>
+              <a:defRPr sz="1400" b="0">
+                <a:solidFill>
+                  <a:srgbClr val="122C4E"/>
+                </a:solidFill>
+                <a:latin typeface="DejaVu Sans Mono"/>
+              </a:defRPr>
+            </a:pPr>
+            <a:r>
+              <a:t>파일 생성: mkdir -p ~/ros2_curri/agv_ws/src/agv_gazebo/launch</a:t>
+            </a:r>
+            <a:br/>
+            <a:r>
+              <a:t>파일 열기: nano ~/ros2_curri/agv_ws/src/agv_gazebo/launch/ros2_control.launch.py</a:t>
+            </a:r>
+          </a:p>
+        </p:txBody>
+      </p:sp>
+      <p:sp>
+        <p:nvSpPr>
+          <p:cNvPr id="9" name="Rectangle 8"/>
+          <p:cNvSpPr/>
+          <p:nvPr/>
+        </p:nvSpPr>
+        <p:spPr>
+          <a:xfrm>
+            <a:off x="658368" y="2706624"/>
+            <a:ext cx="10972800" cy="3364992"/>
+          </a:xfrm>
+          <a:prstGeom prst="rect">
             <a:avLst/>
           </a:prstGeom>
           <a:solidFill>
@@ -19938,14 +20209,14 @@
           </a:fontRef>
         </p:style>
         <p:txBody>
-          <a:bodyPr rtlCol="0" anchor="ctr" wrap="square" lIns="73152" rIns="73152" tIns="36576" bIns="36576"/>
-          <a:lstStyle/>
-          <a:p>
-            <a:pPr algn="l">
-              <a:spcAft>
-                <a:spcPts val="0"/>
-              </a:spcAft>
-              <a:defRPr sz="1600" b="0">
+          <a:bodyPr rtlCol="0" anchor="ctr" wrap="square" lIns="164592" rIns="164592" tIns="109728" bIns="36576"/>
+          <a:lstStyle/>
+          <a:p>
+            <a:pPr algn="l">
+              <a:spcAft>
+                <a:spcPts val="0"/>
+              </a:spcAft>
+              <a:defRPr sz="1400" b="0">
                 <a:solidFill>
                   <a:srgbClr val="FFFFFF"/>
                 </a:solidFill>
@@ -19953,93 +20224,90 @@
               </a:defRPr>
             </a:pPr>
             <a:r>
-              <a:t>source ~/ros2_curri/agv_ws/install/setup.bash</a:t>
-            </a:r>
-            <a:br/>
-            <a:r>
-              <a:t>ros2 launch agv_gazebo ros2_control.launch.py</a:t>
-            </a:r>
-            <a:br/>
-            <a:r>
-              <a:t># 새 터미널: ros2 control list_controllers -c /controller_manager</a:t>
-            </a:r>
-          </a:p>
-        </p:txBody>
-      </p:sp>
-      <p:sp>
-        <p:nvSpPr>
-          <p:cNvPr id="8" name="TextBox 7"/>
-          <p:cNvSpPr txBox="1"/>
-          <p:nvPr/>
-        </p:nvSpPr>
-        <p:spPr>
-          <a:xfrm>
-            <a:off x="786384" y="5239512"/>
-            <a:ext cx="1261872" cy="237744"/>
-          </a:xfrm>
-          <a:prstGeom prst="rect">
-            <a:avLst/>
-          </a:prstGeom>
-          <a:noFill/>
-        </p:spPr>
-        <p:txBody>
-          <a:bodyPr wrap="square" lIns="73152" rIns="73152" tIns="36576" bIns="36576">
-            <a:spAutoFit/>
-          </a:bodyPr>
-          <a:lstStyle/>
-          <a:p>
-            <a:pPr algn="l">
-              <a:spcAft>
-                <a:spcPts val="0"/>
-              </a:spcAft>
-              <a:defRPr sz="1800" b="1">
-                <a:solidFill>
-                  <a:srgbClr val="2A8B5A"/>
-                </a:solidFill>
-                <a:latin typeface="Noto Sans CJK KR"/>
-              </a:defRPr>
-            </a:pPr>
-            <a:r>
-              <a:t>확인 기준</a:t>
-            </a:r>
-          </a:p>
-        </p:txBody>
-      </p:sp>
-      <p:sp>
-        <p:nvSpPr>
-          <p:cNvPr id="9" name="TextBox 8"/>
-          <p:cNvSpPr txBox="1"/>
-          <p:nvPr/>
-        </p:nvSpPr>
-        <p:spPr>
-          <a:xfrm>
-            <a:off x="786384" y="5532120"/>
-            <a:ext cx="10469880" cy="420624"/>
-          </a:xfrm>
-          <a:prstGeom prst="rect">
-            <a:avLst/>
-          </a:prstGeom>
-          <a:noFill/>
-        </p:spPr>
-        <p:txBody>
-          <a:bodyPr wrap="square" lIns="73152" rIns="73152" tIns="36576" bIns="36576">
-            <a:spAutoFit/>
-          </a:bodyPr>
-          <a:lstStyle/>
-          <a:p>
-            <a:pPr algn="l">
-              <a:spcAft>
-                <a:spcPts val="0"/>
-              </a:spcAft>
-              <a:defRPr sz="1800" b="0">
-                <a:solidFill>
-                  <a:srgbClr val="122C4E"/>
-                </a:solidFill>
-                <a:latin typeface="Noto Sans CJK KR"/>
-              </a:defRPr>
-            </a:pPr>
-            <a:r>
-              <a:t>`ros2 control list_controllers`에서 joint_state_broadcaster와 diff_drive_controller가 모두 active이고 wheel joint state가 publish된다.</a:t>
+              <a:t>    gazebo = get_package_share_directory('agv_gazebo')</a:t>
+            </a:r>
+            <a:br/>
+            <a:r>
+              <a:t>    models = os.path.join(gazebo, 'models')</a:t>
+            </a:r>
+            <a:br/>
+            <a:r>
+              <a:t>    world = os.path.join(gazebo, 'worlds', 'warehouse_ros2_control.sdf')</a:t>
+            </a:r>
+            <a:br/>
+            <a:r>
+              <a:t>    description = get_package_share_directory('agv_description')</a:t>
+            </a:r>
+            <a:br/>
+            <a:r>
+              <a:t>    gz_launch = os.path.join(get_package_share_directory('ros_gz_sim'), 'launch', 'gz_sim.launch.py')</a:t>
+            </a:r>
+            <a:br/>
+            <a:r>
+              <a:t>    previous = os.environ.get('GZ_SIM_RESOURCE_PATH', '')</a:t>
+            </a:r>
+            <a:br/>
+            <a:r>
+              <a:t>    simulator = IncludeLaunchDescription(PythonLaunchDescriptionSource(gz_launch),</a:t>
+            </a:r>
+            <a:br/>
+            <a:r>
+              <a:t>        launch_arguments={'gz_args': '-r ' + world}.items())</a:t>
+            </a:r>
+            <a:br/>
+            <a:r>
+              <a:t>    robot_description = ParameterValue(Command(['xacro ', os.path.join(description, 'urdf',</a:t>
+            </a:r>
+            <a:br/>
+            <a:r>
+              <a:t>         'agv_ros2_control.urdf.xacro')]), value_type=str)</a:t>
+            </a:r>
+            <a:br/>
+            <a:r>
+              <a:t>    jsb = Node(package='controller_manager', executable='spawner', arguments=['joint_state_broadcaster',</a:t>
+            </a:r>
+            <a:br/>
+            <a:r>
+              <a:t>         '-c', '/controller_manager'], output='screen')</a:t>
+            </a:r>
+          </a:p>
+        </p:txBody>
+      </p:sp>
+      <p:sp>
+        <p:nvSpPr>
+          <p:cNvPr id="10" name="TextBox 9"/>
+          <p:cNvSpPr txBox="1"/>
+          <p:nvPr/>
+        </p:nvSpPr>
+        <p:spPr>
+          <a:xfrm>
+            <a:off x="749808" y="6181344"/>
+            <a:ext cx="10789920" cy="201168"/>
+          </a:xfrm>
+          <a:prstGeom prst="rect">
+            <a:avLst/>
+          </a:prstGeom>
+          <a:noFill/>
+        </p:spPr>
+        <p:txBody>
+          <a:bodyPr wrap="square" lIns="73152" rIns="73152" tIns="36576" bIns="36576">
+            <a:spAutoFit/>
+          </a:bodyPr>
+          <a:lstStyle/>
+          <a:p>
+            <a:pPr algn="l">
+              <a:spcAft>
+                <a:spcPts val="0"/>
+              </a:spcAft>
+              <a:defRPr sz="1000" b="0">
+                <a:solidFill>
+                  <a:srgbClr val="5C6672"/>
+                </a:solidFill>
+                <a:latin typeface="Noto Sans CJK KR"/>
+              </a:defRPr>
+            </a:pPr>
+            <a:r>
+              <a:t>파일 전체 2/3 · 이 슬라이드 다음에 같은 파일의 나머지 줄이 이어집니다.</a:t>
             </a:r>
           </a:p>
         </p:txBody>
@@ -20096,7 +20364,7 @@
               </a:defRPr>
             </a:pPr>
             <a:r>
-              <a:t>정상 결과: 실제 환경에서 확인한 출력</a:t>
+              <a:t>파일을 계속 작성하고 저장한다 (3/3)</a:t>
             </a:r>
           </a:p>
         </p:txBody>
@@ -20135,7 +20403,7 @@
               </a:defRPr>
             </a:pPr>
             <a:r>
-              <a:t>실제 ROS 2 환경의 파일·패키지·구성 검증 로그</a:t>
+              <a:t>~/ros2_curri/agv_ws/src/agv_gazebo/launch/ros2_control.launch.py</a:t>
             </a:r>
           </a:p>
         </p:txBody>
@@ -20218,30 +20486,64 @@
           </a:p>
         </p:txBody>
       </p:sp>
-      <p:pic>
-        <p:nvPicPr>
-          <p:cNvPr id="6" name="Picture 5" descr="validation_terminal.png"/>
-          <p:cNvPicPr>
-            <a:picLocks noChangeAspect="1"/>
-          </p:cNvPicPr>
-          <p:nvPr/>
-        </p:nvPicPr>
-        <p:blipFill>
-          <a:blip r:embed="rId2"/>
-          <a:stretch>
-            <a:fillRect/>
-          </a:stretch>
-        </p:blipFill>
-        <p:spPr>
-          <a:xfrm>
-            <a:off x="1246187" y="1353312"/>
-            <a:ext cx="9696576" cy="4800600"/>
-          </a:xfrm>
-          <a:prstGeom prst="rect">
-            <a:avLst/>
-          </a:prstGeom>
-        </p:spPr>
-      </p:pic>
+      <p:sp>
+        <p:nvSpPr>
+          <p:cNvPr id="6" name="Rectangle 5"/>
+          <p:cNvSpPr/>
+          <p:nvPr/>
+        </p:nvSpPr>
+        <p:spPr>
+          <a:xfrm>
+            <a:off x="566928" y="1188720"/>
+            <a:ext cx="11064240" cy="347472"/>
+          </a:xfrm>
+          <a:prstGeom prst="rect">
+            <a:avLst/>
+          </a:prstGeom>
+          <a:solidFill>
+            <a:srgbClr val="F4F7FB"/>
+          </a:solidFill>
+          <a:ln>
+            <a:solidFill>
+              <a:srgbClr val="F4F7FB"/>
+            </a:solidFill>
+          </a:ln>
+        </p:spPr>
+        <p:style>
+          <a:lnRef idx="1">
+            <a:schemeClr val="accent1"/>
+          </a:lnRef>
+          <a:fillRef idx="3">
+            <a:schemeClr val="accent1"/>
+          </a:fillRef>
+          <a:effectRef idx="2">
+            <a:schemeClr val="accent1"/>
+          </a:effectRef>
+          <a:fontRef idx="minor">
+            <a:schemeClr val="lt1"/>
+          </a:fontRef>
+        </p:style>
+        <p:txBody>
+          <a:bodyPr rtlCol="0" anchor="ctr" wrap="square" lIns="73152" rIns="73152" tIns="36576" bIns="36576"/>
+          <a:lstStyle/>
+          <a:p>
+            <a:pPr algn="l">
+              <a:spcAft>
+                <a:spcPts val="0"/>
+              </a:spcAft>
+              <a:defRPr sz="1300" b="1">
+                <a:solidFill>
+                  <a:srgbClr val="122C4E"/>
+                </a:solidFill>
+                <a:latin typeface="Noto Sans CJK KR"/>
+              </a:defRPr>
+            </a:pPr>
+            <a:r>
+              <a:t>현재 단계 27/28    |    현재 폴더 ~/ros2_curri/agv_ws    |    현재 터미널</a:t>
+            </a:r>
+          </a:p>
+        </p:txBody>
+      </p:sp>
       <p:sp>
         <p:nvSpPr>
           <p:cNvPr id="7" name="TextBox 6"/>
@@ -20250,33 +20552,228 @@
         </p:nvSpPr>
         <p:spPr>
           <a:xfrm>
-            <a:off x="777240" y="6217920"/>
-            <a:ext cx="10607040" cy="182880"/>
-          </a:xfrm>
-          <a:prstGeom prst="rect">
-            <a:avLst/>
-          </a:prstGeom>
-          <a:noFill/>
-        </p:spPr>
-        <p:txBody>
-          <a:bodyPr wrap="square" lIns="73152" rIns="73152" tIns="36576" bIns="36576">
-            <a:spAutoFit/>
-          </a:bodyPr>
-          <a:lstStyle/>
-          <a:p>
-            <a:pPr algn="ctr">
-              <a:spcAft>
-                <a:spcPts val="0"/>
-              </a:spcAft>
-              <a:defRPr sz="1100" b="1">
-                <a:solidFill>
-                  <a:srgbClr val="2A8B5A"/>
-                </a:solidFill>
-                <a:latin typeface="Noto Sans CJK KR"/>
-              </a:defRPr>
-            </a:pPr>
-            <a:r>
-              <a:t>① 명령/설정  ② 정상 출력 또는 화면  ③ 다음 검증 명령으로 재확인</a:t>
+            <a:off x="658368" y="1627632"/>
+            <a:ext cx="10972800" cy="256032"/>
+          </a:xfrm>
+          <a:prstGeom prst="rect">
+            <a:avLst/>
+          </a:prstGeom>
+          <a:noFill/>
+        </p:spPr>
+        <p:txBody>
+          <a:bodyPr wrap="square" lIns="73152" rIns="73152" tIns="36576" bIns="36576">
+            <a:spAutoFit/>
+          </a:bodyPr>
+          <a:lstStyle/>
+          <a:p>
+            <a:pPr algn="l">
+              <a:spcAft>
+                <a:spcPts val="0"/>
+              </a:spcAft>
+              <a:defRPr sz="1500" b="1">
+                <a:solidFill>
+                  <a:srgbClr val="122C4E"/>
+                </a:solidFill>
+                <a:latin typeface="Noto Sans CJK KR"/>
+              </a:defRPr>
+            </a:pPr>
+            <a:r>
+              <a:t>이번 단계: 파일의 전체 내용을 중간 생략 없이 작성합니다. 아래 줄 범위를 끝까지 입력하세요.</a:t>
+            </a:r>
+          </a:p>
+        </p:txBody>
+      </p:sp>
+      <p:sp>
+        <p:nvSpPr>
+          <p:cNvPr id="8" name="Rectangle 7"/>
+          <p:cNvSpPr/>
+          <p:nvPr/>
+        </p:nvSpPr>
+        <p:spPr>
+          <a:xfrm>
+            <a:off x="658368" y="1956816"/>
+            <a:ext cx="10972800" cy="603504"/>
+          </a:xfrm>
+          <a:prstGeom prst="rect">
+            <a:avLst/>
+          </a:prstGeom>
+          <a:solidFill>
+            <a:srgbClr val="F4F7FB"/>
+          </a:solidFill>
+          <a:ln>
+            <a:solidFill>
+              <a:srgbClr val="F4F7FB"/>
+            </a:solidFill>
+          </a:ln>
+        </p:spPr>
+        <p:style>
+          <a:lnRef idx="1">
+            <a:schemeClr val="accent1"/>
+          </a:lnRef>
+          <a:fillRef idx="3">
+            <a:schemeClr val="accent1"/>
+          </a:fillRef>
+          <a:effectRef idx="2">
+            <a:schemeClr val="accent1"/>
+          </a:effectRef>
+          <a:fontRef idx="minor">
+            <a:schemeClr val="lt1"/>
+          </a:fontRef>
+        </p:style>
+        <p:txBody>
+          <a:bodyPr rtlCol="0" anchor="ctr" wrap="square" lIns="73152" rIns="73152" tIns="36576" bIns="36576"/>
+          <a:lstStyle/>
+          <a:p>
+            <a:pPr algn="l">
+              <a:spcAft>
+                <a:spcPts val="0"/>
+              </a:spcAft>
+              <a:defRPr sz="1400" b="0">
+                <a:solidFill>
+                  <a:srgbClr val="122C4E"/>
+                </a:solidFill>
+                <a:latin typeface="DejaVu Sans Mono"/>
+              </a:defRPr>
+            </a:pPr>
+            <a:r>
+              <a:t>파일 생성: mkdir -p ~/ros2_curri/agv_ws/src/agv_gazebo/launch</a:t>
+            </a:r>
+            <a:br/>
+            <a:r>
+              <a:t>파일 열기: nano ~/ros2_curri/agv_ws/src/agv_gazebo/launch/ros2_control.launch.py</a:t>
+            </a:r>
+          </a:p>
+        </p:txBody>
+      </p:sp>
+      <p:sp>
+        <p:nvSpPr>
+          <p:cNvPr id="9" name="Rectangle 8"/>
+          <p:cNvSpPr/>
+          <p:nvPr/>
+        </p:nvSpPr>
+        <p:spPr>
+          <a:xfrm>
+            <a:off x="658368" y="2706624"/>
+            <a:ext cx="10972800" cy="3364992"/>
+          </a:xfrm>
+          <a:prstGeom prst="rect">
+            <a:avLst/>
+          </a:prstGeom>
+          <a:solidFill>
+            <a:srgbClr val="1D232D"/>
+          </a:solidFill>
+          <a:ln>
+            <a:solidFill>
+              <a:srgbClr val="1D232D"/>
+            </a:solidFill>
+          </a:ln>
+        </p:spPr>
+        <p:style>
+          <a:lnRef idx="1">
+            <a:schemeClr val="accent1"/>
+          </a:lnRef>
+          <a:fillRef idx="3">
+            <a:schemeClr val="accent1"/>
+          </a:fillRef>
+          <a:effectRef idx="2">
+            <a:schemeClr val="accent1"/>
+          </a:effectRef>
+          <a:fontRef idx="minor">
+            <a:schemeClr val="lt1"/>
+          </a:fontRef>
+        </p:style>
+        <p:txBody>
+          <a:bodyPr rtlCol="0" anchor="ctr" wrap="square" lIns="164592" rIns="164592" tIns="109728" bIns="36576"/>
+          <a:lstStyle/>
+          <a:p>
+            <a:pPr algn="l">
+              <a:spcAft>
+                <a:spcPts val="0"/>
+              </a:spcAft>
+              <a:defRPr sz="1400" b="0">
+                <a:solidFill>
+                  <a:srgbClr val="FFFFFF"/>
+                </a:solidFill>
+                <a:latin typeface="DejaVu Sans Mono"/>
+              </a:defRPr>
+            </a:pPr>
+            <a:r>
+              <a:t>    drive = Node(package='controller_manager', executable='spawner', arguments=['diff_drive_controller',</a:t>
+            </a:r>
+            <a:br/>
+            <a:r>
+              <a:t>         '-c', '/controller_manager'], output='screen')</a:t>
+            </a:r>
+            <a:br/>
+            <a:r>
+              <a:t>    return LaunchDescription([SetEnvironmentVariable('GZ_SIM_RESOURCE_PATH',</a:t>
+            </a:r>
+            <a:br/>
+            <a:r>
+              <a:t>        models + (':' + previous if previous else '')), simulator, Node(package='robot_state_publisher',</a:t>
+            </a:r>
+            <a:br/>
+            <a:r>
+              <a:t>         executable='robot_state_publisher',</a:t>
+            </a:r>
+            <a:br/>
+            <a:r>
+              <a:t>        parameters=[{'robot_description': robot_description, 'use_sim_time': True}],</a:t>
+            </a:r>
+            <a:br/>
+            <a:r>
+              <a:t>        output='screen'), Node(package='ros_gz_bridge', executable='parameter_bridge',</a:t>
+            </a:r>
+            <a:br/>
+            <a:r>
+              <a:t>        arguments=['/clock@rosgraph_msgs/msg/Clock[gz.msgs.Clock'], output='screen'),</a:t>
+            </a:r>
+            <a:br/>
+            <a:r>
+              <a:t>        TimerAction(period=6.0, actions=[jsb]),</a:t>
+            </a:r>
+            <a:br/>
+            <a:r>
+              <a:t>        RegisterEventHandler(OnProcessExit(target_action=jsb, on_exit=[drive]))])</a:t>
+            </a:r>
+          </a:p>
+        </p:txBody>
+      </p:sp>
+      <p:sp>
+        <p:nvSpPr>
+          <p:cNvPr id="10" name="TextBox 9"/>
+          <p:cNvSpPr txBox="1"/>
+          <p:nvPr/>
+        </p:nvSpPr>
+        <p:spPr>
+          <a:xfrm>
+            <a:off x="749808" y="6181344"/>
+            <a:ext cx="10789920" cy="201168"/>
+          </a:xfrm>
+          <a:prstGeom prst="rect">
+            <a:avLst/>
+          </a:prstGeom>
+          <a:noFill/>
+        </p:spPr>
+        <p:txBody>
+          <a:bodyPr wrap="square" lIns="73152" rIns="73152" tIns="36576" bIns="36576">
+            <a:spAutoFit/>
+          </a:bodyPr>
+          <a:lstStyle/>
+          <a:p>
+            <a:pPr algn="l">
+              <a:spcAft>
+                <a:spcPts val="0"/>
+              </a:spcAft>
+              <a:defRPr sz="1000" b="0">
+                <a:solidFill>
+                  <a:srgbClr val="5C6672"/>
+                </a:solidFill>
+                <a:latin typeface="Noto Sans CJK KR"/>
+              </a:defRPr>
+            </a:pPr>
+            <a:r>
+              <a:t>파일 전체 3/3 · 이 슬라이드 다음에 같은 파일의 나머지 줄이 이어집니다.</a:t>
             </a:r>
           </a:p>
         </p:txBody>
@@ -20333,7 +20830,7 @@
               </a:defRPr>
             </a:pPr>
             <a:r>
-              <a:t>정상 결과: 실제 환경에서 확인한 출력</a:t>
+              <a:t>build → source → run 순서로 실행한다</a:t>
             </a:r>
           </a:p>
         </p:txBody>
@@ -20372,7 +20869,7 @@
               </a:defRPr>
             </a:pPr>
             <a:r>
-              <a:t>실제 M16 격리 launch의 ros2 control 출력: 두 controller가 모두 active</a:t>
+              <a:t>새 파일 또는 수정 파일은 build와 source 뒤에만 실행 이름·설정에 반영됩니다.</a:t>
             </a:r>
           </a:p>
         </p:txBody>
@@ -20455,57 +20952,157 @@
           </a:p>
         </p:txBody>
       </p:sp>
-      <p:pic>
-        <p:nvPicPr>
-          <p:cNvPr id="6" name="Picture 5" descr="01_controller_active_actual.png"/>
-          <p:cNvPicPr>
-            <a:picLocks noChangeAspect="1"/>
-          </p:cNvPicPr>
-          <p:nvPr/>
-        </p:nvPicPr>
-        <p:blipFill>
-          <a:blip r:embed="rId2"/>
-          <a:stretch>
-            <a:fillRect/>
-          </a:stretch>
-        </p:blipFill>
-        <p:spPr>
-          <a:xfrm>
-            <a:off x="790956" y="1884338"/>
-            <a:ext cx="10607040" cy="3738546"/>
-          </a:xfrm>
-          <a:prstGeom prst="rect">
-            <a:avLst/>
-          </a:prstGeom>
-        </p:spPr>
-      </p:pic>
-      <p:sp>
-        <p:nvSpPr>
-          <p:cNvPr id="7" name="TextBox 6"/>
-          <p:cNvSpPr txBox="1"/>
-          <p:nvPr/>
-        </p:nvSpPr>
-        <p:spPr>
-          <a:xfrm>
-            <a:off x="777240" y="6217920"/>
-            <a:ext cx="10607040" cy="182880"/>
-          </a:xfrm>
-          <a:prstGeom prst="rect">
-            <a:avLst/>
-          </a:prstGeom>
-          <a:noFill/>
-        </p:spPr>
-        <p:txBody>
-          <a:bodyPr wrap="square" lIns="73152" rIns="73152" tIns="36576" bIns="36576">
-            <a:spAutoFit/>
-          </a:bodyPr>
-          <a:lstStyle/>
-          <a:p>
-            <a:pPr algn="ctr">
-              <a:spcAft>
-                <a:spcPts val="0"/>
-              </a:spcAft>
-              <a:defRPr sz="1100" b="1">
+      <p:sp>
+        <p:nvSpPr>
+          <p:cNvPr id="6" name="Rectangle 5"/>
+          <p:cNvSpPr/>
+          <p:nvPr/>
+        </p:nvSpPr>
+        <p:spPr>
+          <a:xfrm>
+            <a:off x="566928" y="1188720"/>
+            <a:ext cx="11064240" cy="347472"/>
+          </a:xfrm>
+          <a:prstGeom prst="rect">
+            <a:avLst/>
+          </a:prstGeom>
+          <a:solidFill>
+            <a:srgbClr val="F4F7FB"/>
+          </a:solidFill>
+          <a:ln>
+            <a:solidFill>
+              <a:srgbClr val="F4F7FB"/>
+            </a:solidFill>
+          </a:ln>
+        </p:spPr>
+        <p:style>
+          <a:lnRef idx="1">
+            <a:schemeClr val="accent1"/>
+          </a:lnRef>
+          <a:fillRef idx="3">
+            <a:schemeClr val="accent1"/>
+          </a:fillRef>
+          <a:effectRef idx="2">
+            <a:schemeClr val="accent1"/>
+          </a:effectRef>
+          <a:fontRef idx="minor">
+            <a:schemeClr val="lt1"/>
+          </a:fontRef>
+        </p:style>
+        <p:txBody>
+          <a:bodyPr rtlCol="0" anchor="ctr" wrap="square" lIns="73152" rIns="73152" tIns="36576" bIns="36576"/>
+          <a:lstStyle/>
+          <a:p>
+            <a:pPr algn="l">
+              <a:spcAft>
+                <a:spcPts val="0"/>
+              </a:spcAft>
+              <a:defRPr sz="1300" b="1">
+                <a:solidFill>
+                  <a:srgbClr val="122C4E"/>
+                </a:solidFill>
+                <a:latin typeface="Noto Sans CJK KR"/>
+              </a:defRPr>
+            </a:pPr>
+            <a:r>
+              <a:t>현재 단계 실행    |    현재 폴더 ~/ros2_curri/agv_ws    |    현재 터미널</a:t>
+            </a:r>
+          </a:p>
+        </p:txBody>
+      </p:sp>
+      <p:sp>
+        <p:nvSpPr>
+          <p:cNvPr id="7" name="Rounded Rectangle 6"/>
+          <p:cNvSpPr/>
+          <p:nvPr/>
+        </p:nvSpPr>
+        <p:spPr>
+          <a:xfrm>
+            <a:off x="658368" y="1700784"/>
+            <a:ext cx="10972800" cy="3182112"/>
+          </a:xfrm>
+          <a:prstGeom prst="roundRect">
+            <a:avLst/>
+          </a:prstGeom>
+          <a:solidFill>
+            <a:srgbClr val="1D232D"/>
+          </a:solidFill>
+          <a:ln>
+            <a:solidFill>
+              <a:srgbClr val="1D232D"/>
+            </a:solidFill>
+          </a:ln>
+        </p:spPr>
+        <p:style>
+          <a:lnRef idx="1">
+            <a:schemeClr val="accent1"/>
+          </a:lnRef>
+          <a:fillRef idx="3">
+            <a:schemeClr val="accent1"/>
+          </a:fillRef>
+          <a:effectRef idx="2">
+            <a:schemeClr val="accent1"/>
+          </a:effectRef>
+          <a:fontRef idx="minor">
+            <a:schemeClr val="lt1"/>
+          </a:fontRef>
+        </p:style>
+        <p:txBody>
+          <a:bodyPr rtlCol="0" anchor="ctr" wrap="square" lIns="73152" rIns="73152" tIns="36576" bIns="36576"/>
+          <a:lstStyle/>
+          <a:p>
+            <a:pPr algn="l">
+              <a:spcAft>
+                <a:spcPts val="0"/>
+              </a:spcAft>
+              <a:defRPr sz="1600" b="0">
+                <a:solidFill>
+                  <a:srgbClr val="FFFFFF"/>
+                </a:solidFill>
+                <a:latin typeface="DejaVu Sans Mono"/>
+              </a:defRPr>
+            </a:pPr>
+            <a:r>
+              <a:t>source ~/ros2_curri/agv_ws/install/setup.bash</a:t>
+            </a:r>
+            <a:br/>
+            <a:r>
+              <a:t>ros2 launch agv_gazebo ros2_control.launch.py</a:t>
+            </a:r>
+            <a:br/>
+            <a:r>
+              <a:t># 새 터미널: ros2 control list_controllers -c /controller_manager</a:t>
+            </a:r>
+          </a:p>
+        </p:txBody>
+      </p:sp>
+      <p:sp>
+        <p:nvSpPr>
+          <p:cNvPr id="8" name="TextBox 7"/>
+          <p:cNvSpPr txBox="1"/>
+          <p:nvPr/>
+        </p:nvSpPr>
+        <p:spPr>
+          <a:xfrm>
+            <a:off x="786384" y="5239512"/>
+            <a:ext cx="1261872" cy="237744"/>
+          </a:xfrm>
+          <a:prstGeom prst="rect">
+            <a:avLst/>
+          </a:prstGeom>
+          <a:noFill/>
+        </p:spPr>
+        <p:txBody>
+          <a:bodyPr wrap="square" lIns="73152" rIns="73152" tIns="36576" bIns="36576">
+            <a:spAutoFit/>
+          </a:bodyPr>
+          <a:lstStyle/>
+          <a:p>
+            <a:pPr algn="l">
+              <a:spcAft>
+                <a:spcPts val="0"/>
+              </a:spcAft>
+              <a:defRPr sz="1800" b="1">
                 <a:solidFill>
                   <a:srgbClr val="2A8B5A"/>
                 </a:solidFill>
@@ -20513,7 +21110,46 @@
               </a:defRPr>
             </a:pPr>
             <a:r>
-              <a:t>① 명령/설정  ② 정상 출력 또는 화면  ③ 다음 검증 명령으로 재확인</a:t>
+              <a:t>확인 기준</a:t>
+            </a:r>
+          </a:p>
+        </p:txBody>
+      </p:sp>
+      <p:sp>
+        <p:nvSpPr>
+          <p:cNvPr id="9" name="TextBox 8"/>
+          <p:cNvSpPr txBox="1"/>
+          <p:nvPr/>
+        </p:nvSpPr>
+        <p:spPr>
+          <a:xfrm>
+            <a:off x="786384" y="5532120"/>
+            <a:ext cx="10469880" cy="420624"/>
+          </a:xfrm>
+          <a:prstGeom prst="rect">
+            <a:avLst/>
+          </a:prstGeom>
+          <a:noFill/>
+        </p:spPr>
+        <p:txBody>
+          <a:bodyPr wrap="square" lIns="73152" rIns="73152" tIns="36576" bIns="36576">
+            <a:spAutoFit/>
+          </a:bodyPr>
+          <a:lstStyle/>
+          <a:p>
+            <a:pPr algn="l">
+              <a:spcAft>
+                <a:spcPts val="0"/>
+              </a:spcAft>
+              <a:defRPr sz="1800" b="0">
+                <a:solidFill>
+                  <a:srgbClr val="122C4E"/>
+                </a:solidFill>
+                <a:latin typeface="Noto Sans CJK KR"/>
+              </a:defRPr>
+            </a:pPr>
+            <a:r>
+              <a:t>`ros2 control list_controllers`에서 joint_state_broadcaster와 diff_drive_controller가 모두 active이고 wheel joint state가 publish된다.</a:t>
             </a:r>
           </a:p>
         </p:txBody>
@@ -20570,7 +21206,7 @@
               </a:defRPr>
             </a:pPr>
             <a:r>
-              <a:t>객관적 검증 명령으로 완료를 확인한다</a:t>
+              <a:t>정상 결과: 실제 환경에서 확인한 출력</a:t>
             </a:r>
           </a:p>
         </p:txBody>
@@ -20609,7 +21245,7 @@
               </a:defRPr>
             </a:pPr>
             <a:r>
-              <a:t>화면만 보지 말고 topic·frame·파일·parameter를 다시 확인합니다.</a:t>
+              <a:t>실제 ROS 2 환경의 파일·패키지·구성 검증 로그</a:t>
             </a:r>
           </a:p>
         </p:txBody>
@@ -20692,172 +21328,57 @@
           </a:p>
         </p:txBody>
       </p:sp>
-      <p:sp>
-        <p:nvSpPr>
-          <p:cNvPr id="6" name="Rectangle 5"/>
-          <p:cNvSpPr/>
-          <p:nvPr/>
-        </p:nvSpPr>
-        <p:spPr>
-          <a:xfrm>
-            <a:off x="566928" y="1188720"/>
-            <a:ext cx="11064240" cy="347472"/>
-          </a:xfrm>
-          <a:prstGeom prst="rect">
-            <a:avLst/>
-          </a:prstGeom>
-          <a:solidFill>
-            <a:srgbClr val="F4F7FB"/>
-          </a:solidFill>
-          <a:ln>
-            <a:solidFill>
-              <a:srgbClr val="F4F7FB"/>
-            </a:solidFill>
-          </a:ln>
-        </p:spPr>
-        <p:style>
-          <a:lnRef idx="1">
-            <a:schemeClr val="accent1"/>
-          </a:lnRef>
-          <a:fillRef idx="3">
-            <a:schemeClr val="accent1"/>
-          </a:fillRef>
-          <a:effectRef idx="2">
-            <a:schemeClr val="accent1"/>
-          </a:effectRef>
-          <a:fontRef idx="minor">
-            <a:schemeClr val="lt1"/>
-          </a:fontRef>
-        </p:style>
-        <p:txBody>
-          <a:bodyPr rtlCol="0" anchor="ctr" wrap="square" lIns="73152" rIns="73152" tIns="36576" bIns="36576"/>
-          <a:lstStyle/>
-          <a:p>
-            <a:pPr algn="l">
-              <a:spcAft>
-                <a:spcPts val="0"/>
-              </a:spcAft>
-              <a:defRPr sz="1300" b="1">
-                <a:solidFill>
-                  <a:srgbClr val="122C4E"/>
-                </a:solidFill>
-                <a:latin typeface="Noto Sans CJK KR"/>
-              </a:defRPr>
-            </a:pPr>
-            <a:r>
-              <a:t>현재 단계 검증    |    현재 폴더 ~/ros2_curri/agv_ws    |    현재 터미널</a:t>
-            </a:r>
-          </a:p>
-        </p:txBody>
-      </p:sp>
-      <p:sp>
-        <p:nvSpPr>
-          <p:cNvPr id="7" name="Rounded Rectangle 6"/>
-          <p:cNvSpPr/>
-          <p:nvPr/>
-        </p:nvSpPr>
-        <p:spPr>
-          <a:xfrm>
-            <a:off x="658368" y="1755648"/>
-            <a:ext cx="10972800" cy="2148840"/>
-          </a:xfrm>
-          <a:prstGeom prst="roundRect">
-            <a:avLst/>
-          </a:prstGeom>
-          <a:solidFill>
-            <a:srgbClr val="1D232D"/>
-          </a:solidFill>
-          <a:ln>
-            <a:solidFill>
-              <a:srgbClr val="1D232D"/>
-            </a:solidFill>
-          </a:ln>
-        </p:spPr>
-        <p:style>
-          <a:lnRef idx="1">
-            <a:schemeClr val="accent1"/>
-          </a:lnRef>
-          <a:fillRef idx="3">
-            <a:schemeClr val="accent1"/>
-          </a:fillRef>
-          <a:effectRef idx="2">
-            <a:schemeClr val="accent1"/>
-          </a:effectRef>
-          <a:fontRef idx="minor">
-            <a:schemeClr val="lt1"/>
-          </a:fontRef>
-        </p:style>
-        <p:txBody>
-          <a:bodyPr rtlCol="0" anchor="ctr" wrap="square" lIns="73152" rIns="73152" tIns="36576" bIns="36576"/>
-          <a:lstStyle/>
-          <a:p>
-            <a:pPr algn="l">
-              <a:spcAft>
-                <a:spcPts val="0"/>
-              </a:spcAft>
-              <a:defRPr sz="1600" b="0">
-                <a:solidFill>
-                  <a:srgbClr val="FFFFFF"/>
-                </a:solidFill>
-                <a:latin typeface="DejaVu Sans Mono"/>
-              </a:defRPr>
-            </a:pPr>
-            <a:r>
-              <a:t>ros2 control list_controllers -c /controller_manager</a:t>
-            </a:r>
-            <a:br/>
-            <a:r>
-              <a:t>ros2 topic echo /joint_states --once</a:t>
-            </a:r>
-          </a:p>
-        </p:txBody>
-      </p:sp>
-      <p:sp>
-        <p:nvSpPr>
-          <p:cNvPr id="8" name="Rounded Rectangle 7"/>
-          <p:cNvSpPr/>
-          <p:nvPr/>
-        </p:nvSpPr>
-        <p:spPr>
-          <a:xfrm>
-            <a:off x="658368" y="4206240"/>
-            <a:ext cx="10972800" cy="1554480"/>
-          </a:xfrm>
-          <a:prstGeom prst="roundRect">
-            <a:avLst/>
-          </a:prstGeom>
-          <a:solidFill>
-            <a:srgbClr val="F4F7FB"/>
-          </a:solidFill>
-          <a:ln>
-            <a:solidFill>
-              <a:srgbClr val="D1DFD5"/>
-            </a:solidFill>
-          </a:ln>
-        </p:spPr>
-        <p:style>
-          <a:lnRef idx="1">
-            <a:schemeClr val="accent1"/>
-          </a:lnRef>
-          <a:fillRef idx="3">
-            <a:schemeClr val="accent1"/>
-          </a:fillRef>
-          <a:effectRef idx="2">
-            <a:schemeClr val="accent1"/>
-          </a:effectRef>
-          <a:fontRef idx="minor">
-            <a:schemeClr val="lt1"/>
-          </a:fontRef>
-        </p:style>
-        <p:txBody>
-          <a:bodyPr rtlCol="0" anchor="ctr" wrap="square" lIns="73152" rIns="73152" tIns="36576" bIns="36576"/>
-          <a:lstStyle/>
-          <a:p>
-            <a:pPr algn="l">
-              <a:spcAft>
-                <a:spcPts val="0"/>
-              </a:spcAft>
-              <a:defRPr sz="1800" b="1">
+      <p:pic>
+        <p:nvPicPr>
+          <p:cNvPr id="6" name="Picture 5" descr="validation_terminal.png"/>
+          <p:cNvPicPr>
+            <a:picLocks noChangeAspect="1"/>
+          </p:cNvPicPr>
+          <p:nvPr/>
+        </p:nvPicPr>
+        <p:blipFill>
+          <a:blip r:embed="rId2"/>
+          <a:stretch>
+            <a:fillRect/>
+          </a:stretch>
+        </p:blipFill>
+        <p:spPr>
+          <a:xfrm>
+            <a:off x="1246187" y="1353312"/>
+            <a:ext cx="9696576" cy="4800600"/>
+          </a:xfrm>
+          <a:prstGeom prst="rect">
+            <a:avLst/>
+          </a:prstGeom>
+        </p:spPr>
+      </p:pic>
+      <p:sp>
+        <p:nvSpPr>
+          <p:cNvPr id="7" name="TextBox 6"/>
+          <p:cNvSpPr txBox="1"/>
+          <p:nvPr/>
+        </p:nvSpPr>
+        <p:spPr>
+          <a:xfrm>
+            <a:off x="777240" y="6144768"/>
+            <a:ext cx="10607040" cy="310896"/>
+          </a:xfrm>
+          <a:prstGeom prst="rect">
+            <a:avLst/>
+          </a:prstGeom>
+          <a:noFill/>
+        </p:spPr>
+        <p:txBody>
+          <a:bodyPr wrap="square" lIns="73152" rIns="73152" tIns="36576" bIns="36576">
+            <a:spAutoFit/>
+          </a:bodyPr>
+          <a:lstStyle/>
+          <a:p>
+            <a:pPr algn="ctr">
+              <a:spcAft>
+                <a:spcPts val="0"/>
+              </a:spcAft>
+              <a:defRPr sz="1100" b="1">
                 <a:solidFill>
                   <a:srgbClr val="2A8B5A"/>
                 </a:solidFill>
@@ -20865,58 +21386,7 @@
               </a:defRPr>
             </a:pPr>
             <a:r>
-              <a:t>완료 체크</a:t>
-            </a:r>
-            <a:br/>
-            <a:r>
-              <a:t>□ 명령이 오류 없이 실행된다.</a:t>
-            </a:r>
-            <a:br/>
-            <a:r>
-              <a:t>□ 기대한 파일·topic·frame·parameter 이름이 보인다.</a:t>
-            </a:r>
-            <a:br/>
-            <a:r>
-              <a:t>□ 값의 단위와 방향을 한 문장으로 설명할 수 있다.</a:t>
-            </a:r>
-          </a:p>
-        </p:txBody>
-      </p:sp>
-      <p:sp>
-        <p:nvSpPr>
-          <p:cNvPr id="9" name="TextBox 8"/>
-          <p:cNvSpPr txBox="1"/>
-          <p:nvPr/>
-        </p:nvSpPr>
-        <p:spPr>
-          <a:xfrm>
-            <a:off x="731520" y="5989320"/>
-            <a:ext cx="10789920" cy="237744"/>
-          </a:xfrm>
-          <a:prstGeom prst="rect">
-            <a:avLst/>
-          </a:prstGeom>
-          <a:noFill/>
-        </p:spPr>
-        <p:txBody>
-          <a:bodyPr wrap="square" lIns="73152" rIns="73152" tIns="36576" bIns="36576">
-            <a:spAutoFit/>
-          </a:bodyPr>
-          <a:lstStyle/>
-          <a:p>
-            <a:pPr algn="l">
-              <a:spcAft>
-                <a:spcPts val="0"/>
-              </a:spcAft>
-              <a:defRPr sz="1500" b="1">
-                <a:solidFill>
-                  <a:srgbClr val="122C4E"/>
-                </a:solidFill>
-                <a:latin typeface="Noto Sans CJK KR"/>
-              </a:defRPr>
-            </a:pPr>
-            <a:r>
-              <a:t>완료 조건: `ros2 control list_controllers`에서 joint_state_broadcaster와 diff_drive_controller가 모두 active이고 wheel joint state가 publish된다.</a:t>
+              <a:t>화면에서 확인: ① 명령/설정  ② 정상 출력 또는 화면  ③ 다음 검증 명령으로 재확인</a:t>
             </a:r>
           </a:p>
         </p:txBody>
@@ -20973,7 +21443,7 @@
               </a:defRPr>
             </a:pPr>
             <a:r>
-              <a:t>막히면: 증상 → 우선 확인 → 재검증</a:t>
+              <a:t>정상 결과: 실제 환경에서 확인한 출력</a:t>
             </a:r>
           </a:p>
         </p:txBody>
@@ -21012,7 +21482,7 @@
               </a:defRPr>
             </a:pPr>
             <a:r>
-              <a:t>오류 메시지를 숨기지 않고 같은 순서로 점검합니다.</a:t>
+              <a:t>실제 M16 격리 launch의 ros2 control 출력: 두 controller가 모두 active</a:t>
             </a:r>
           </a:p>
         </p:txBody>
@@ -21095,328 +21565,40 @@
           </a:p>
         </p:txBody>
       </p:sp>
-      <p:sp>
-        <p:nvSpPr>
-          <p:cNvPr id="6" name="Rectangle 5"/>
-          <p:cNvSpPr/>
-          <p:nvPr/>
-        </p:nvSpPr>
-        <p:spPr>
-          <a:xfrm>
-            <a:off x="566928" y="1188720"/>
-            <a:ext cx="11064240" cy="347472"/>
-          </a:xfrm>
-          <a:prstGeom prst="rect">
-            <a:avLst/>
-          </a:prstGeom>
-          <a:solidFill>
-            <a:srgbClr val="F4F7FB"/>
-          </a:solidFill>
-          <a:ln>
-            <a:solidFill>
-              <a:srgbClr val="F4F7FB"/>
-            </a:solidFill>
-          </a:ln>
-        </p:spPr>
-        <p:style>
-          <a:lnRef idx="1">
-            <a:schemeClr val="accent1"/>
-          </a:lnRef>
-          <a:fillRef idx="3">
-            <a:schemeClr val="accent1"/>
-          </a:fillRef>
-          <a:effectRef idx="2">
-            <a:schemeClr val="accent1"/>
-          </a:effectRef>
-          <a:fontRef idx="minor">
-            <a:schemeClr val="lt1"/>
-          </a:fontRef>
-        </p:style>
-        <p:txBody>
-          <a:bodyPr rtlCol="0" anchor="ctr" wrap="square" lIns="73152" rIns="73152" tIns="36576" bIns="36576"/>
-          <a:lstStyle/>
-          <a:p>
-            <a:pPr algn="l">
-              <a:spcAft>
-                <a:spcPts val="0"/>
-              </a:spcAft>
-              <a:defRPr sz="1300" b="1">
-                <a:solidFill>
-                  <a:srgbClr val="122C4E"/>
-                </a:solidFill>
-                <a:latin typeface="Noto Sans CJK KR"/>
-              </a:defRPr>
-            </a:pPr>
-            <a:r>
-              <a:t>현재 단계 오류 대응    |    현재 폴더 ~/ros2_curri/agv_ws    |    현재 터미널</a:t>
-            </a:r>
-          </a:p>
-        </p:txBody>
-      </p:sp>
-      <p:sp>
-        <p:nvSpPr>
-          <p:cNvPr id="7" name="Rounded Rectangle 6"/>
-          <p:cNvSpPr/>
-          <p:nvPr/>
-        </p:nvSpPr>
-        <p:spPr>
-          <a:xfrm>
-            <a:off x="694944" y="1755648"/>
-            <a:ext cx="10972800" cy="1115568"/>
-          </a:xfrm>
-          <a:prstGeom prst="roundRect">
-            <a:avLst/>
-          </a:prstGeom>
-          <a:solidFill>
-            <a:srgbClr val="FFF7F4"/>
-          </a:solidFill>
-          <a:ln>
-            <a:solidFill>
-              <a:srgbClr val="EDBEB4"/>
-            </a:solidFill>
-          </a:ln>
-        </p:spPr>
-        <p:style>
-          <a:lnRef idx="1">
-            <a:schemeClr val="accent1"/>
-          </a:lnRef>
-          <a:fillRef idx="3">
-            <a:schemeClr val="accent1"/>
-          </a:fillRef>
-          <a:effectRef idx="2">
-            <a:schemeClr val="accent1"/>
-          </a:effectRef>
-          <a:fontRef idx="minor">
-            <a:schemeClr val="lt1"/>
-          </a:fontRef>
-        </p:style>
-        <p:txBody>
-          <a:bodyPr rtlCol="0" anchor="ctr"/>
-          <a:lstStyle/>
-          <a:p>
-            <a:pPr algn="ctr"/>
-          </a:p>
-        </p:txBody>
-      </p:sp>
-      <p:sp>
-        <p:nvSpPr>
-          <p:cNvPr id="8" name="TextBox 7"/>
-          <p:cNvSpPr txBox="1"/>
-          <p:nvPr/>
-        </p:nvSpPr>
-        <p:spPr>
-          <a:xfrm>
-            <a:off x="896112" y="1901952"/>
-            <a:ext cx="2926080" cy="274320"/>
-          </a:xfrm>
-          <a:prstGeom prst="rect">
-            <a:avLst/>
-          </a:prstGeom>
-          <a:noFill/>
-        </p:spPr>
-        <p:txBody>
-          <a:bodyPr wrap="square" lIns="73152" rIns="73152" tIns="36576" bIns="36576">
-            <a:spAutoFit/>
-          </a:bodyPr>
-          <a:lstStyle/>
-          <a:p>
-            <a:pPr algn="l">
-              <a:spcAft>
-                <a:spcPts val="0"/>
-              </a:spcAft>
-              <a:defRPr sz="1800" b="1">
-                <a:solidFill>
-                  <a:srgbClr val="BE3B3B"/>
-                </a:solidFill>
-                <a:latin typeface="Noto Sans CJK KR"/>
-              </a:defRPr>
-            </a:pPr>
-            <a:r>
-              <a:t>증상 1: controller가 inactive</a:t>
-            </a:r>
-          </a:p>
-        </p:txBody>
-      </p:sp>
-      <p:sp>
-        <p:nvSpPr>
-          <p:cNvPr id="9" name="TextBox 8"/>
-          <p:cNvSpPr txBox="1"/>
-          <p:nvPr/>
-        </p:nvSpPr>
-        <p:spPr>
-          <a:xfrm>
-            <a:off x="3794760" y="1883664"/>
-            <a:ext cx="7543800" cy="621792"/>
-          </a:xfrm>
-          <a:prstGeom prst="rect">
-            <a:avLst/>
-          </a:prstGeom>
-          <a:noFill/>
-        </p:spPr>
-        <p:txBody>
-          <a:bodyPr wrap="square" lIns="73152" rIns="73152" tIns="36576" bIns="36576">
-            <a:spAutoFit/>
-          </a:bodyPr>
-          <a:lstStyle/>
-          <a:p>
-            <a:pPr algn="l">
-              <a:spcAft>
-                <a:spcPts val="0"/>
-              </a:spcAft>
-              <a:defRPr sz="1600" b="0">
-                <a:solidFill>
-                  <a:srgbClr val="122C4E"/>
-                </a:solidFill>
-                <a:latin typeface="Noto Sans CJK KR"/>
-              </a:defRPr>
-            </a:pPr>
-            <a:r>
-              <a:t>우선 확인: load/activate 순서와 YAML controller 이름을 확인한다.</a:t>
-            </a:r>
-            <a:br/>
-            <a:r>
-              <a:t>수정 후: ros2 control list_controllers -c /controller_manager</a:t>
-            </a:r>
-          </a:p>
-        </p:txBody>
-      </p:sp>
-      <p:sp>
-        <p:nvSpPr>
-          <p:cNvPr id="10" name="Rounded Rectangle 9"/>
-          <p:cNvSpPr/>
-          <p:nvPr/>
-        </p:nvSpPr>
-        <p:spPr>
-          <a:xfrm>
-            <a:off x="694944" y="3172968"/>
-            <a:ext cx="10972800" cy="1115568"/>
-          </a:xfrm>
-          <a:prstGeom prst="roundRect">
-            <a:avLst/>
-          </a:prstGeom>
-          <a:solidFill>
-            <a:srgbClr val="FFF7F4"/>
-          </a:solidFill>
-          <a:ln>
-            <a:solidFill>
-              <a:srgbClr val="EDBEB4"/>
-            </a:solidFill>
-          </a:ln>
-        </p:spPr>
-        <p:style>
-          <a:lnRef idx="1">
-            <a:schemeClr val="accent1"/>
-          </a:lnRef>
-          <a:fillRef idx="3">
-            <a:schemeClr val="accent1"/>
-          </a:fillRef>
-          <a:effectRef idx="2">
-            <a:schemeClr val="accent1"/>
-          </a:effectRef>
-          <a:fontRef idx="minor">
-            <a:schemeClr val="lt1"/>
-          </a:fontRef>
-        </p:style>
-        <p:txBody>
-          <a:bodyPr rtlCol="0" anchor="ctr"/>
-          <a:lstStyle/>
-          <a:p>
-            <a:pPr algn="ctr"/>
-          </a:p>
-        </p:txBody>
-      </p:sp>
-      <p:sp>
-        <p:nvSpPr>
-          <p:cNvPr id="11" name="TextBox 10"/>
-          <p:cNvSpPr txBox="1"/>
-          <p:nvPr/>
-        </p:nvSpPr>
-        <p:spPr>
-          <a:xfrm>
-            <a:off x="896112" y="3319272"/>
-            <a:ext cx="2926080" cy="274320"/>
-          </a:xfrm>
-          <a:prstGeom prst="rect">
-            <a:avLst/>
-          </a:prstGeom>
-          <a:noFill/>
-        </p:spPr>
-        <p:txBody>
-          <a:bodyPr wrap="square" lIns="73152" rIns="73152" tIns="36576" bIns="36576">
-            <a:spAutoFit/>
-          </a:bodyPr>
-          <a:lstStyle/>
-          <a:p>
-            <a:pPr algn="l">
-              <a:spcAft>
-                <a:spcPts val="0"/>
-              </a:spcAft>
-              <a:defRPr sz="1800" b="1">
-                <a:solidFill>
-                  <a:srgbClr val="BE3B3B"/>
-                </a:solidFill>
-                <a:latin typeface="Noto Sans CJK KR"/>
-              </a:defRPr>
-            </a:pPr>
-            <a:r>
-              <a:t>증상 2: joint를 찾을 수 없음</a:t>
-            </a:r>
-          </a:p>
-        </p:txBody>
-      </p:sp>
-      <p:sp>
-        <p:nvSpPr>
-          <p:cNvPr id="12" name="TextBox 11"/>
-          <p:cNvSpPr txBox="1"/>
-          <p:nvPr/>
-        </p:nvSpPr>
-        <p:spPr>
-          <a:xfrm>
-            <a:off x="3794760" y="3300984"/>
-            <a:ext cx="7543800" cy="621792"/>
-          </a:xfrm>
-          <a:prstGeom prst="rect">
-            <a:avLst/>
-          </a:prstGeom>
-          <a:noFill/>
-        </p:spPr>
-        <p:txBody>
-          <a:bodyPr wrap="square" lIns="73152" rIns="73152" tIns="36576" bIns="36576">
-            <a:spAutoFit/>
-          </a:bodyPr>
-          <a:lstStyle/>
-          <a:p>
-            <a:pPr algn="l">
-              <a:spcAft>
-                <a:spcPts val="0"/>
-              </a:spcAft>
-              <a:defRPr sz="1600" b="0">
-                <a:solidFill>
-                  <a:srgbClr val="122C4E"/>
-                </a:solidFill>
-                <a:latin typeface="Noto Sans CJK KR"/>
-              </a:defRPr>
-            </a:pPr>
-            <a:r>
-              <a:t>우선 확인: URDF/SDF joint 이름과 controller 목록을 한 글자씩 비교한다.</a:t>
-            </a:r>
-            <a:br/>
-            <a:r>
-              <a:t>수정 후: ros2 control list_controllers -c /controller_manager</a:t>
-            </a:r>
-          </a:p>
-        </p:txBody>
-      </p:sp>
-      <p:sp>
-        <p:nvSpPr>
-          <p:cNvPr id="13" name="TextBox 12"/>
-          <p:cNvSpPr txBox="1"/>
-          <p:nvPr/>
-        </p:nvSpPr>
-        <p:spPr>
-          <a:xfrm>
-            <a:off x="822960" y="5102352"/>
-            <a:ext cx="10607040" cy="402336"/>
+      <p:pic>
+        <p:nvPicPr>
+          <p:cNvPr id="6" name="Picture 5" descr="01_controller_active_actual.png"/>
+          <p:cNvPicPr>
+            <a:picLocks noChangeAspect="1"/>
+          </p:cNvPicPr>
+          <p:nvPr/>
+        </p:nvPicPr>
+        <p:blipFill>
+          <a:blip r:embed="rId2"/>
+          <a:stretch>
+            <a:fillRect/>
+          </a:stretch>
+        </p:blipFill>
+        <p:spPr>
+          <a:xfrm>
+            <a:off x="790956" y="1884338"/>
+            <a:ext cx="10607040" cy="3738546"/>
+          </a:xfrm>
+          <a:prstGeom prst="rect">
+            <a:avLst/>
+          </a:prstGeom>
+        </p:spPr>
+      </p:pic>
+      <p:sp>
+        <p:nvSpPr>
+          <p:cNvPr id="7" name="TextBox 6"/>
+          <p:cNvSpPr txBox="1"/>
+          <p:nvPr/>
+        </p:nvSpPr>
+        <p:spPr>
+          <a:xfrm>
+            <a:off x="777240" y="6144768"/>
+            <a:ext cx="10607040" cy="310896"/>
           </a:xfrm>
           <a:prstGeom prst="rect">
             <a:avLst/>
@@ -21433,15 +21615,15 @@
               <a:spcAft>
                 <a:spcPts val="0"/>
               </a:spcAft>
-              <a:defRPr sz="1800" b="1">
-                <a:solidFill>
-                  <a:srgbClr val="DB7E22"/>
-                </a:solidFill>
-                <a:latin typeface="Noto Sans CJK KR"/>
-              </a:defRPr>
-            </a:pPr>
-            <a:r>
-              <a:t>공통 순서: ① 현재 폴더 ② source ③ 파일 경로 ④ 이름/타입/단위 ⑤ build·source 후 재실행</a:t>
+              <a:defRPr sz="1100" b="1">
+                <a:solidFill>
+                  <a:srgbClr val="2A8B5A"/>
+                </a:solidFill>
+                <a:latin typeface="Noto Sans CJK KR"/>
+              </a:defRPr>
+            </a:pPr>
+            <a:r>
+              <a:t>화면에서 확인: 명령·설정과 화면의 topic·frame·결과 이름을 대조합니다.</a:t>
             </a:r>
           </a:p>
         </p:txBody>
@@ -21498,7 +21680,7 @@
               </a:defRPr>
             </a:pPr>
             <a:r>
-              <a:t>미니 실습: 값 하나를 바꾸고 결과를 비교한다</a:t>
+              <a:t>객관적 검증 명령으로 완료를 확인한다</a:t>
             </a:r>
           </a:p>
         </p:txBody>
@@ -21537,7 +21719,7 @@
               </a:defRPr>
             </a:pPr>
             <a:r>
-              <a:t>정상 결과를 만든 뒤에는 한 번에 하나의 값만 바꿉니다.</a:t>
+              <a:t>화면만 보지 말고 topic·frame·파일·parameter를 다시 확인합니다.</a:t>
             </a:r>
           </a:p>
         </p:txBody>
@@ -21673,7 +21855,7 @@
               </a:defRPr>
             </a:pPr>
             <a:r>
-              <a:t>현재 단계 미니 실습    |    현재 폴더 ~/ros2_curri/agv_ws    |    현재 터미널</a:t>
+              <a:t>현재 단계 검증    |    현재 폴더 ~/ros2_curri/agv_ws    |    현재 터미널</a:t>
             </a:r>
           </a:p>
         </p:txBody>
@@ -21686,18 +21868,18 @@
         </p:nvSpPr>
         <p:spPr>
           <a:xfrm>
-            <a:off x="749808" y="1874519"/>
-            <a:ext cx="10652760" cy="1993392"/>
+            <a:off x="658368" y="1755648"/>
+            <a:ext cx="10972800" cy="2148840"/>
           </a:xfrm>
           <a:prstGeom prst="roundRect">
             <a:avLst/>
           </a:prstGeom>
           <a:solidFill>
-            <a:srgbClr val="FFF8EB"/>
+            <a:srgbClr val="1D232D"/>
           </a:solidFill>
           <a:ln>
             <a:solidFill>
-              <a:srgbClr val="ECC680"/>
+              <a:srgbClr val="1D232D"/>
             </a:solidFill>
           </a:ln>
         </p:spPr>
@@ -21719,11 +21901,124 @@
           <a:bodyPr rtlCol="0" anchor="ctr" wrap="square" lIns="73152" rIns="73152" tIns="36576" bIns="36576"/>
           <a:lstStyle/>
           <a:p>
-            <a:pPr algn="ctr">
-              <a:spcAft>
-                <a:spcPts val="0"/>
-              </a:spcAft>
-              <a:defRPr sz="2300" b="1">
+            <a:pPr algn="l">
+              <a:spcAft>
+                <a:spcPts val="0"/>
+              </a:spcAft>
+              <a:defRPr sz="1600" b="0">
+                <a:solidFill>
+                  <a:srgbClr val="FFFFFF"/>
+                </a:solidFill>
+                <a:latin typeface="DejaVu Sans Mono"/>
+              </a:defRPr>
+            </a:pPr>
+            <a:r>
+              <a:t>ros2 control list_controllers -c /controller_manager</a:t>
+            </a:r>
+            <a:br/>
+            <a:r>
+              <a:t>ros2 topic echo /joint_states --once</a:t>
+            </a:r>
+          </a:p>
+        </p:txBody>
+      </p:sp>
+      <p:sp>
+        <p:nvSpPr>
+          <p:cNvPr id="8" name="Rounded Rectangle 7"/>
+          <p:cNvSpPr/>
+          <p:nvPr/>
+        </p:nvSpPr>
+        <p:spPr>
+          <a:xfrm>
+            <a:off x="658368" y="4206240"/>
+            <a:ext cx="10972800" cy="1554480"/>
+          </a:xfrm>
+          <a:prstGeom prst="roundRect">
+            <a:avLst/>
+          </a:prstGeom>
+          <a:solidFill>
+            <a:srgbClr val="F4F7FB"/>
+          </a:solidFill>
+          <a:ln>
+            <a:solidFill>
+              <a:srgbClr val="D1DFD5"/>
+            </a:solidFill>
+          </a:ln>
+        </p:spPr>
+        <p:style>
+          <a:lnRef idx="1">
+            <a:schemeClr val="accent1"/>
+          </a:lnRef>
+          <a:fillRef idx="3">
+            <a:schemeClr val="accent1"/>
+          </a:fillRef>
+          <a:effectRef idx="2">
+            <a:schemeClr val="accent1"/>
+          </a:effectRef>
+          <a:fontRef idx="minor">
+            <a:schemeClr val="lt1"/>
+          </a:fontRef>
+        </p:style>
+        <p:txBody>
+          <a:bodyPr rtlCol="0" anchor="ctr" wrap="square" lIns="73152" rIns="73152" tIns="36576" bIns="36576"/>
+          <a:lstStyle/>
+          <a:p>
+            <a:pPr algn="l">
+              <a:spcAft>
+                <a:spcPts val="0"/>
+              </a:spcAft>
+              <a:defRPr sz="1800" b="1">
+                <a:solidFill>
+                  <a:srgbClr val="2A8B5A"/>
+                </a:solidFill>
+                <a:latin typeface="Noto Sans CJK KR"/>
+              </a:defRPr>
+            </a:pPr>
+            <a:r>
+              <a:t>완료 체크</a:t>
+            </a:r>
+            <a:br/>
+            <a:r>
+              <a:t>□ 명령이 오류 없이 실행된다.</a:t>
+            </a:r>
+            <a:br/>
+            <a:r>
+              <a:t>□ 기대한 파일·topic·frame·parameter 이름이 보인다.</a:t>
+            </a:r>
+            <a:br/>
+            <a:r>
+              <a:t>□ 값의 단위와 방향을 한 문장으로 설명할 수 있다.</a:t>
+            </a:r>
+          </a:p>
+        </p:txBody>
+      </p:sp>
+      <p:sp>
+        <p:nvSpPr>
+          <p:cNvPr id="9" name="TextBox 8"/>
+          <p:cNvSpPr txBox="1"/>
+          <p:nvPr/>
+        </p:nvSpPr>
+        <p:spPr>
+          <a:xfrm>
+            <a:off x="731520" y="5989320"/>
+            <a:ext cx="10789920" cy="237744"/>
+          </a:xfrm>
+          <a:prstGeom prst="rect">
+            <a:avLst/>
+          </a:prstGeom>
+          <a:noFill/>
+        </p:spPr>
+        <p:txBody>
+          <a:bodyPr wrap="square" lIns="73152" rIns="73152" tIns="36576" bIns="36576">
+            <a:spAutoFit/>
+          </a:bodyPr>
+          <a:lstStyle/>
+          <a:p>
+            <a:pPr algn="l">
+              <a:spcAft>
+                <a:spcPts val="0"/>
+              </a:spcAft>
+              <a:defRPr sz="1500" b="1">
                 <a:solidFill>
                   <a:srgbClr val="122C4E"/>
                 </a:solidFill>
@@ -21731,46 +22026,7 @@
               </a:defRPr>
             </a:pPr>
             <a:r>
-              <a:t>controllers.yaml의 wheel_radius와 model.sdf의 wheel_radius가 모두 0.08 m인지 확인하고 한쪽만 바꿨을 때 생길 오차를 설명한다.</a:t>
-            </a:r>
-          </a:p>
-        </p:txBody>
-      </p:sp>
-      <p:sp>
-        <p:nvSpPr>
-          <p:cNvPr id="8" name="TextBox 7"/>
-          <p:cNvSpPr txBox="1"/>
-          <p:nvPr/>
-        </p:nvSpPr>
-        <p:spPr>
-          <a:xfrm>
-            <a:off x="877824" y="4590288"/>
-            <a:ext cx="10241280" cy="594360"/>
-          </a:xfrm>
-          <a:prstGeom prst="rect">
-            <a:avLst/>
-          </a:prstGeom>
-          <a:noFill/>
-        </p:spPr>
-        <p:txBody>
-          <a:bodyPr wrap="square" lIns="73152" rIns="73152" tIns="36576" bIns="36576">
-            <a:spAutoFit/>
-          </a:bodyPr>
-          <a:lstStyle/>
-          <a:p>
-            <a:pPr algn="ctr">
-              <a:spcAft>
-                <a:spcPts val="0"/>
-              </a:spcAft>
-              <a:defRPr sz="1900" b="1">
-                <a:solidFill>
-                  <a:srgbClr val="DB7E22"/>
-                </a:solidFill>
-                <a:latin typeface="Noto Sans CJK KR"/>
-              </a:defRPr>
-            </a:pPr>
-            <a:r>
-              <a:t>기록할 것: 바꾼 값(단위) · 기대한 변화 · 실제 출력/화면 · 원래 값으로 되돌린 결과</a:t>
+              <a:t>완료 조건: `ros2 control list_controllers`에서 joint_state_broadcaster와 diff_drive_controller가 모두 active이고 wheel joint state가 publish된다.</a:t>
             </a:r>
           </a:p>
         </p:txBody>
@@ -22160,7 +22416,7 @@
               </a:defRPr>
             </a:pPr>
             <a:r>
-              <a:t>체크포인트를 저장하고 다음 모듈로 넘긴다</a:t>
+              <a:t>막히면: 증상 → 우선 확인 → 재검증</a:t>
             </a:r>
           </a:p>
         </p:txBody>
@@ -22199,7 +22455,7 @@
               </a:defRPr>
             </a:pPr>
             <a:r>
-              <a:t>현재 Complete는 다음 Starter의 기준선입니다.</a:t>
+              <a:t>오류 메시지를 숨기지 않고 같은 순서로 점검합니다.</a:t>
             </a:r>
           </a:p>
         </p:txBody>
@@ -22335,7 +22591,7 @@
               </a:defRPr>
             </a:pPr>
             <a:r>
-              <a:t>현재 단계 체크포인트    |    현재 폴더 ~/ros2_curri/agv_ws    |    현재 터미널</a:t>
+              <a:t>현재 단계 오류 대응    |    현재 폴더 ~/ros2_curri/agv_ws    |    현재 터미널</a:t>
             </a:r>
           </a:p>
         </p:txBody>
@@ -22348,18 +22604,18 @@
         </p:nvSpPr>
         <p:spPr>
           <a:xfrm>
-            <a:off x="685800" y="1737360"/>
-            <a:ext cx="10972800" cy="3611880"/>
+            <a:off x="694944" y="1755648"/>
+            <a:ext cx="10972800" cy="1115568"/>
           </a:xfrm>
           <a:prstGeom prst="roundRect">
             <a:avLst/>
           </a:prstGeom>
           <a:solidFill>
-            <a:srgbClr val="F4F7FB"/>
+            <a:srgbClr val="FFF7F4"/>
           </a:solidFill>
           <a:ln>
             <a:solidFill>
-              <a:srgbClr val="D2DCE8"/>
+              <a:srgbClr val="EDBEB4"/>
             </a:solidFill>
           </a:ln>
         </p:spPr>
@@ -22393,25 +22649,64 @@
         </p:nvSpPr>
         <p:spPr>
           <a:xfrm>
-            <a:off x="896112" y="1993392"/>
-            <a:ext cx="10332720" cy="2971800"/>
-          </a:xfrm>
-          <a:prstGeom prst="rect">
-            <a:avLst/>
-          </a:prstGeom>
-          <a:noFill/>
-        </p:spPr>
-        <p:txBody>
-          <a:bodyPr wrap="square" lIns="109728" rIns="109728">
-            <a:spAutoFit/>
-          </a:bodyPr>
-          <a:lstStyle/>
-          <a:p>
-            <a:pPr>
-              <a:spcAft>
-                <a:spcPts val="800"/>
-              </a:spcAft>
-              <a:defRPr sz="1800">
+            <a:off x="896112" y="1901952"/>
+            <a:ext cx="2926080" cy="274320"/>
+          </a:xfrm>
+          <a:prstGeom prst="rect">
+            <a:avLst/>
+          </a:prstGeom>
+          <a:noFill/>
+        </p:spPr>
+        <p:txBody>
+          <a:bodyPr wrap="square" lIns="73152" rIns="73152" tIns="36576" bIns="36576">
+            <a:spAutoFit/>
+          </a:bodyPr>
+          <a:lstStyle/>
+          <a:p>
+            <a:pPr algn="l">
+              <a:spcAft>
+                <a:spcPts val="0"/>
+              </a:spcAft>
+              <a:defRPr sz="1800" b="1">
+                <a:solidFill>
+                  <a:srgbClr val="BE3B3B"/>
+                </a:solidFill>
+                <a:latin typeface="Noto Sans CJK KR"/>
+              </a:defRPr>
+            </a:pPr>
+            <a:r>
+              <a:t>증상 1: controller가 inactive</a:t>
+            </a:r>
+          </a:p>
+        </p:txBody>
+      </p:sp>
+      <p:sp>
+        <p:nvSpPr>
+          <p:cNvPr id="9" name="TextBox 8"/>
+          <p:cNvSpPr txBox="1"/>
+          <p:nvPr/>
+        </p:nvSpPr>
+        <p:spPr>
+          <a:xfrm>
+            <a:off x="3794760" y="1883664"/>
+            <a:ext cx="7543800" cy="621792"/>
+          </a:xfrm>
+          <a:prstGeom prst="rect">
+            <a:avLst/>
+          </a:prstGeom>
+          <a:noFill/>
+        </p:spPr>
+        <p:txBody>
+          <a:bodyPr wrap="square" lIns="73152" rIns="73152" tIns="36576" bIns="36576">
+            <a:spAutoFit/>
+          </a:bodyPr>
+          <a:lstStyle/>
+          <a:p>
+            <a:pPr algn="l">
+              <a:spcAft>
+                <a:spcPts val="0"/>
+              </a:spcAft>
+              <a:defRPr sz="1600" b="0">
                 <a:solidFill>
                   <a:srgbClr val="122C4E"/>
                 </a:solidFill>
@@ -22419,15 +22714,126 @@
               </a:defRPr>
             </a:pPr>
             <a:r>
-              <a:t>• □ 완료 화면: `ros2 control list_controllers`에서 joint_state_broadcaster와 diff_drive_controller가 모두 active이고 wheel joint state가 publish된다.</a:t>
-            </a:r>
-          </a:p>
-          <a:p>
-            <a:pPr>
-              <a:spcAft>
-                <a:spcPts val="800"/>
-              </a:spcAft>
-              <a:defRPr sz="1800">
+              <a:t>우선 확인: load/activate 순서와 YAML controller 이름을 확인한다.</a:t>
+            </a:r>
+            <a:br/>
+            <a:r>
+              <a:t>수정 후: ros2 control list_controllers -c /controller_manager</a:t>
+            </a:r>
+          </a:p>
+        </p:txBody>
+      </p:sp>
+      <p:sp>
+        <p:nvSpPr>
+          <p:cNvPr id="10" name="Rounded Rectangle 9"/>
+          <p:cNvSpPr/>
+          <p:nvPr/>
+        </p:nvSpPr>
+        <p:spPr>
+          <a:xfrm>
+            <a:off x="694944" y="3172968"/>
+            <a:ext cx="10972800" cy="1115568"/>
+          </a:xfrm>
+          <a:prstGeom prst="roundRect">
+            <a:avLst/>
+          </a:prstGeom>
+          <a:solidFill>
+            <a:srgbClr val="FFF7F4"/>
+          </a:solidFill>
+          <a:ln>
+            <a:solidFill>
+              <a:srgbClr val="EDBEB4"/>
+            </a:solidFill>
+          </a:ln>
+        </p:spPr>
+        <p:style>
+          <a:lnRef idx="1">
+            <a:schemeClr val="accent1"/>
+          </a:lnRef>
+          <a:fillRef idx="3">
+            <a:schemeClr val="accent1"/>
+          </a:fillRef>
+          <a:effectRef idx="2">
+            <a:schemeClr val="accent1"/>
+          </a:effectRef>
+          <a:fontRef idx="minor">
+            <a:schemeClr val="lt1"/>
+          </a:fontRef>
+        </p:style>
+        <p:txBody>
+          <a:bodyPr rtlCol="0" anchor="ctr"/>
+          <a:lstStyle/>
+          <a:p>
+            <a:pPr algn="ctr"/>
+          </a:p>
+        </p:txBody>
+      </p:sp>
+      <p:sp>
+        <p:nvSpPr>
+          <p:cNvPr id="11" name="TextBox 10"/>
+          <p:cNvSpPr txBox="1"/>
+          <p:nvPr/>
+        </p:nvSpPr>
+        <p:spPr>
+          <a:xfrm>
+            <a:off x="896112" y="3319272"/>
+            <a:ext cx="2926080" cy="274320"/>
+          </a:xfrm>
+          <a:prstGeom prst="rect">
+            <a:avLst/>
+          </a:prstGeom>
+          <a:noFill/>
+        </p:spPr>
+        <p:txBody>
+          <a:bodyPr wrap="square" lIns="73152" rIns="73152" tIns="36576" bIns="36576">
+            <a:spAutoFit/>
+          </a:bodyPr>
+          <a:lstStyle/>
+          <a:p>
+            <a:pPr algn="l">
+              <a:spcAft>
+                <a:spcPts val="0"/>
+              </a:spcAft>
+              <a:defRPr sz="1800" b="1">
+                <a:solidFill>
+                  <a:srgbClr val="BE3B3B"/>
+                </a:solidFill>
+                <a:latin typeface="Noto Sans CJK KR"/>
+              </a:defRPr>
+            </a:pPr>
+            <a:r>
+              <a:t>증상 2: joint를 찾을 수 없음</a:t>
+            </a:r>
+          </a:p>
+        </p:txBody>
+      </p:sp>
+      <p:sp>
+        <p:nvSpPr>
+          <p:cNvPr id="12" name="TextBox 11"/>
+          <p:cNvSpPr txBox="1"/>
+          <p:nvPr/>
+        </p:nvSpPr>
+        <p:spPr>
+          <a:xfrm>
+            <a:off x="3794760" y="3300984"/>
+            <a:ext cx="7543800" cy="621792"/>
+          </a:xfrm>
+          <a:prstGeom prst="rect">
+            <a:avLst/>
+          </a:prstGeom>
+          <a:noFill/>
+        </p:spPr>
+        <p:txBody>
+          <a:bodyPr wrap="square" lIns="73152" rIns="73152" tIns="36576" bIns="36576">
+            <a:spAutoFit/>
+          </a:bodyPr>
+          <a:lstStyle/>
+          <a:p>
+            <a:pPr algn="l">
+              <a:spcAft>
+                <a:spcPts val="0"/>
+              </a:spcAft>
+              <a:defRPr sz="1600" b="0">
                 <a:solidFill>
                   <a:srgbClr val="122C4E"/>
                 </a:solidFill>
@@ -22435,69 +22841,25 @@
               </a:defRPr>
             </a:pPr>
             <a:r>
-              <a:t>• □ Complete 파일: blocks/E_autonomy_logic/M16_ros2_control/complete/</a:t>
-            </a:r>
-          </a:p>
-          <a:p>
-            <a:pPr>
-              <a:spcAft>
-                <a:spcPts val="800"/>
-              </a:spcAft>
-              <a:defRPr sz="1800">
-                <a:solidFill>
-                  <a:srgbClr val="122C4E"/>
-                </a:solidFill>
-                <a:latin typeface="Noto Sans CJK KR"/>
-              </a:defRPr>
-            </a:pPr>
-            <a:r>
-              <a:t>• □ 정상 로그·캡처: logs/validation.log, screenshots/validation_terminal.png</a:t>
-            </a:r>
-          </a:p>
-          <a:p>
-            <a:pPr>
-              <a:spcAft>
-                <a:spcPts val="800"/>
-              </a:spcAft>
-              <a:defRPr sz="1800">
-                <a:solidFill>
-                  <a:srgbClr val="122C4E"/>
-                </a:solidFill>
-                <a:latin typeface="Noto Sans CJK KR"/>
-              </a:defRPr>
-            </a:pPr>
-            <a:r>
-              <a:t>• □ 버전 식별: CHECKSUM_or_TAG.txt의 SHA-256 manifest</a:t>
-            </a:r>
-          </a:p>
-          <a:p>
-            <a:pPr>
-              <a:spcAft>
-                <a:spcPts val="800"/>
-              </a:spcAft>
-              <a:defRPr sz="1800">
-                <a:solidFill>
-                  <a:srgbClr val="122C4E"/>
-                </a:solidFill>
-                <a:latin typeface="Noto Sans CJK KR"/>
-              </a:defRPr>
-            </a:pPr>
-            <a:r>
-              <a:t>• □ 다음 시작 조건: M17~M20 autonomy command</a:t>
-            </a:r>
-          </a:p>
-        </p:txBody>
-      </p:sp>
-      <p:sp>
-        <p:nvSpPr>
-          <p:cNvPr id="9" name="TextBox 8"/>
-          <p:cNvSpPr txBox="1"/>
-          <p:nvPr/>
-        </p:nvSpPr>
-        <p:spPr>
-          <a:xfrm>
-            <a:off x="868680" y="5596128"/>
-            <a:ext cx="10515600" cy="338328"/>
+              <a:t>우선 확인: URDF/SDF joint 이름과 controller 목록을 한 글자씩 비교한다.</a:t>
+            </a:r>
+            <a:br/>
+            <a:r>
+              <a:t>수정 후: ros2 control list_controllers -c /controller_manager</a:t>
+            </a:r>
+          </a:p>
+        </p:txBody>
+      </p:sp>
+      <p:sp>
+        <p:nvSpPr>
+          <p:cNvPr id="13" name="TextBox 12"/>
+          <p:cNvSpPr txBox="1"/>
+          <p:nvPr/>
+        </p:nvSpPr>
+        <p:spPr>
+          <a:xfrm>
+            <a:off x="822960" y="5102352"/>
+            <a:ext cx="10607040" cy="402336"/>
           </a:xfrm>
           <a:prstGeom prst="rect">
             <a:avLst/>
@@ -22514,15 +22876,15 @@
               <a:spcAft>
                 <a:spcPts val="0"/>
               </a:spcAft>
-              <a:defRPr sz="1700" b="1">
-                <a:solidFill>
-                  <a:srgbClr val="2A8B5A"/>
-                </a:solidFill>
-                <a:latin typeface="Noto Sans CJK KR"/>
-              </a:defRPr>
-            </a:pPr>
-            <a:r>
-              <a:t>다음 모듈을 시작하기 전, 이 슬라이드의 Complete와 다음 모듈의 Starter를 비교합니다.</a:t>
+              <a:defRPr sz="1800" b="1">
+                <a:solidFill>
+                  <a:srgbClr val="DB7E22"/>
+                </a:solidFill>
+                <a:latin typeface="Noto Sans CJK KR"/>
+              </a:defRPr>
+            </a:pPr>
+            <a:r>
+              <a:t>공통 순서: ① 현재 폴더 ② source ③ 파일 경로 ④ 이름/타입/단위 ⑤ build·source 후 재실행</a:t>
             </a:r>
           </a:p>
         </p:txBody>
@@ -22579,6 +22941,754 @@
               </a:defRPr>
             </a:pPr>
             <a:r>
+              <a:t>미니 실습: 값 하나를 바꾸고 결과를 비교한다</a:t>
+            </a:r>
+          </a:p>
+        </p:txBody>
+      </p:sp>
+      <p:sp>
+        <p:nvSpPr>
+          <p:cNvPr id="3" name="TextBox 2"/>
+          <p:cNvSpPr txBox="1"/>
+          <p:nvPr/>
+        </p:nvSpPr>
+        <p:spPr>
+          <a:xfrm>
+            <a:off x="603504" y="859536"/>
+            <a:ext cx="10698480" cy="292608"/>
+          </a:xfrm>
+          <a:prstGeom prst="rect">
+            <a:avLst/>
+          </a:prstGeom>
+          <a:noFill/>
+        </p:spPr>
+        <p:txBody>
+          <a:bodyPr wrap="square" lIns="73152" rIns="73152" tIns="36576" bIns="36576">
+            <a:spAutoFit/>
+          </a:bodyPr>
+          <a:lstStyle/>
+          <a:p>
+            <a:pPr algn="l">
+              <a:spcAft>
+                <a:spcPts val="0"/>
+              </a:spcAft>
+              <a:defRPr sz="1700" b="0">
+                <a:solidFill>
+                  <a:srgbClr val="5C6672"/>
+                </a:solidFill>
+                <a:latin typeface="Noto Sans CJK KR"/>
+              </a:defRPr>
+            </a:pPr>
+            <a:r>
+              <a:t>정상 결과를 만든 뒤에는 한 번에 하나의 값만 바꿉니다.</a:t>
+            </a:r>
+          </a:p>
+        </p:txBody>
+      </p:sp>
+      <p:sp>
+        <p:nvSpPr>
+          <p:cNvPr id="4" name="TextBox 3"/>
+          <p:cNvSpPr txBox="1"/>
+          <p:nvPr/>
+        </p:nvSpPr>
+        <p:spPr>
+          <a:xfrm>
+            <a:off x="530352" y="6510528"/>
+            <a:ext cx="7772400" cy="201168"/>
+          </a:xfrm>
+          <a:prstGeom prst="rect">
+            <a:avLst/>
+          </a:prstGeom>
+          <a:noFill/>
+        </p:spPr>
+        <p:txBody>
+          <a:bodyPr wrap="square" lIns="73152" rIns="73152" tIns="36576" bIns="36576">
+            <a:spAutoFit/>
+          </a:bodyPr>
+          <a:lstStyle/>
+          <a:p>
+            <a:pPr algn="l">
+              <a:spcAft>
+                <a:spcPts val="0"/>
+              </a:spcAft>
+              <a:defRPr sz="1000" b="0">
+                <a:solidFill>
+                  <a:srgbClr val="5C6672"/>
+                </a:solidFill>
+                <a:latin typeface="Noto Sans CJK KR"/>
+              </a:defRPr>
+            </a:pPr>
+            <a:r>
+              <a:t>ROS 2 Jazzy · Gazebo Harmonic · M16 · 따라 하기형 AGV 실습</a:t>
+            </a:r>
+          </a:p>
+        </p:txBody>
+      </p:sp>
+      <p:sp>
+        <p:nvSpPr>
+          <p:cNvPr id="5" name="TextBox 4"/>
+          <p:cNvSpPr txBox="1"/>
+          <p:nvPr/>
+        </p:nvSpPr>
+        <p:spPr>
+          <a:xfrm>
+            <a:off x="9144000" y="6510528"/>
+            <a:ext cx="2468880" cy="201168"/>
+          </a:xfrm>
+          <a:prstGeom prst="rect">
+            <a:avLst/>
+          </a:prstGeom>
+          <a:noFill/>
+        </p:spPr>
+        <p:txBody>
+          <a:bodyPr wrap="square" lIns="73152" rIns="73152" tIns="36576" bIns="36576">
+            <a:spAutoFit/>
+          </a:bodyPr>
+          <a:lstStyle/>
+          <a:p>
+            <a:pPr algn="r">
+              <a:spcAft>
+                <a:spcPts val="0"/>
+              </a:spcAft>
+              <a:defRPr sz="1000" b="0">
+                <a:solidFill>
+                  <a:srgbClr val="5C6672"/>
+                </a:solidFill>
+                <a:latin typeface="Noto Sans CJK KR"/>
+              </a:defRPr>
+            </a:pPr>
+            <a:r>
+              <a:t>명령·파일 경로는 슬라이드에서 복사 가능</a:t>
+            </a:r>
+          </a:p>
+        </p:txBody>
+      </p:sp>
+      <p:sp>
+        <p:nvSpPr>
+          <p:cNvPr id="6" name="Rectangle 5"/>
+          <p:cNvSpPr/>
+          <p:nvPr/>
+        </p:nvSpPr>
+        <p:spPr>
+          <a:xfrm>
+            <a:off x="566928" y="1188720"/>
+            <a:ext cx="11064240" cy="347472"/>
+          </a:xfrm>
+          <a:prstGeom prst="rect">
+            <a:avLst/>
+          </a:prstGeom>
+          <a:solidFill>
+            <a:srgbClr val="F4F7FB"/>
+          </a:solidFill>
+          <a:ln>
+            <a:solidFill>
+              <a:srgbClr val="F4F7FB"/>
+            </a:solidFill>
+          </a:ln>
+        </p:spPr>
+        <p:style>
+          <a:lnRef idx="1">
+            <a:schemeClr val="accent1"/>
+          </a:lnRef>
+          <a:fillRef idx="3">
+            <a:schemeClr val="accent1"/>
+          </a:fillRef>
+          <a:effectRef idx="2">
+            <a:schemeClr val="accent1"/>
+          </a:effectRef>
+          <a:fontRef idx="minor">
+            <a:schemeClr val="lt1"/>
+          </a:fontRef>
+        </p:style>
+        <p:txBody>
+          <a:bodyPr rtlCol="0" anchor="ctr" wrap="square" lIns="73152" rIns="73152" tIns="36576" bIns="36576"/>
+          <a:lstStyle/>
+          <a:p>
+            <a:pPr algn="l">
+              <a:spcAft>
+                <a:spcPts val="0"/>
+              </a:spcAft>
+              <a:defRPr sz="1300" b="1">
+                <a:solidFill>
+                  <a:srgbClr val="122C4E"/>
+                </a:solidFill>
+                <a:latin typeface="Noto Sans CJK KR"/>
+              </a:defRPr>
+            </a:pPr>
+            <a:r>
+              <a:t>현재 단계 미니 실습    |    현재 폴더 ~/ros2_curri/agv_ws    |    현재 터미널</a:t>
+            </a:r>
+          </a:p>
+        </p:txBody>
+      </p:sp>
+      <p:sp>
+        <p:nvSpPr>
+          <p:cNvPr id="7" name="Rounded Rectangle 6"/>
+          <p:cNvSpPr/>
+          <p:nvPr/>
+        </p:nvSpPr>
+        <p:spPr>
+          <a:xfrm>
+            <a:off x="749808" y="1874519"/>
+            <a:ext cx="10652760" cy="1993392"/>
+          </a:xfrm>
+          <a:prstGeom prst="roundRect">
+            <a:avLst/>
+          </a:prstGeom>
+          <a:solidFill>
+            <a:srgbClr val="FFF8EB"/>
+          </a:solidFill>
+          <a:ln>
+            <a:solidFill>
+              <a:srgbClr val="ECC680"/>
+            </a:solidFill>
+          </a:ln>
+        </p:spPr>
+        <p:style>
+          <a:lnRef idx="1">
+            <a:schemeClr val="accent1"/>
+          </a:lnRef>
+          <a:fillRef idx="3">
+            <a:schemeClr val="accent1"/>
+          </a:fillRef>
+          <a:effectRef idx="2">
+            <a:schemeClr val="accent1"/>
+          </a:effectRef>
+          <a:fontRef idx="minor">
+            <a:schemeClr val="lt1"/>
+          </a:fontRef>
+        </p:style>
+        <p:txBody>
+          <a:bodyPr rtlCol="0" anchor="ctr" wrap="square" lIns="73152" rIns="73152" tIns="36576" bIns="36576"/>
+          <a:lstStyle/>
+          <a:p>
+            <a:pPr algn="ctr">
+              <a:spcAft>
+                <a:spcPts val="0"/>
+              </a:spcAft>
+              <a:defRPr sz="2300" b="1">
+                <a:solidFill>
+                  <a:srgbClr val="122C4E"/>
+                </a:solidFill>
+                <a:latin typeface="Noto Sans CJK KR"/>
+              </a:defRPr>
+            </a:pPr>
+            <a:r>
+              <a:t>controllers.yaml의 wheel_radius와 model.sdf의 wheel_radius가 모두 0.08 m인지 확인하고 한쪽만 바꿨을 때 생길 오차를 설명한다.</a:t>
+            </a:r>
+          </a:p>
+        </p:txBody>
+      </p:sp>
+      <p:sp>
+        <p:nvSpPr>
+          <p:cNvPr id="8" name="TextBox 7"/>
+          <p:cNvSpPr txBox="1"/>
+          <p:nvPr/>
+        </p:nvSpPr>
+        <p:spPr>
+          <a:xfrm>
+            <a:off x="877824" y="4590288"/>
+            <a:ext cx="10241280" cy="594360"/>
+          </a:xfrm>
+          <a:prstGeom prst="rect">
+            <a:avLst/>
+          </a:prstGeom>
+          <a:noFill/>
+        </p:spPr>
+        <p:txBody>
+          <a:bodyPr wrap="square" lIns="73152" rIns="73152" tIns="36576" bIns="36576">
+            <a:spAutoFit/>
+          </a:bodyPr>
+          <a:lstStyle/>
+          <a:p>
+            <a:pPr algn="ctr">
+              <a:spcAft>
+                <a:spcPts val="0"/>
+              </a:spcAft>
+              <a:defRPr sz="1900" b="1">
+                <a:solidFill>
+                  <a:srgbClr val="DB7E22"/>
+                </a:solidFill>
+                <a:latin typeface="Noto Sans CJK KR"/>
+              </a:defRPr>
+            </a:pPr>
+            <a:r>
+              <a:t>기록할 것: 바꾼 값(단위) · 기대한 변화 · 실제 출력/화면 · 원래 값으로 되돌린 결과</a:t>
+            </a:r>
+          </a:p>
+        </p:txBody>
+      </p:sp>
+    </p:spTree>
+  </p:cSld>
+  <p:clrMapOvr>
+    <a:masterClrMapping/>
+  </p:clrMapOvr>
+</p:sld>
+</file>
+
+<file path=ppt/slides/slide42.xml><?xml version="1.0" encoding="utf-8"?>
+<p:sld xmlns:a="http://schemas.openxmlformats.org/drawingml/2006/main" xmlns:p="http://schemas.openxmlformats.org/presentationml/2006/main" xmlns:r="http://schemas.openxmlformats.org/officeDocument/2006/relationships">
+  <p:cSld>
+    <p:spTree>
+      <p:nvGrpSpPr>
+        <p:cNvPr id="1" name=""/>
+        <p:cNvGrpSpPr/>
+        <p:nvPr/>
+      </p:nvGrpSpPr>
+      <p:grpSpPr/>
+      <p:sp>
+        <p:nvSpPr>
+          <p:cNvPr id="2" name="TextBox 1"/>
+          <p:cNvSpPr txBox="1"/>
+          <p:nvPr/>
+        </p:nvSpPr>
+        <p:spPr>
+          <a:xfrm>
+            <a:off x="566928" y="347472"/>
+            <a:ext cx="10881360" cy="438912"/>
+          </a:xfrm>
+          <a:prstGeom prst="rect">
+            <a:avLst/>
+          </a:prstGeom>
+          <a:noFill/>
+        </p:spPr>
+        <p:txBody>
+          <a:bodyPr wrap="square" lIns="73152" rIns="73152" tIns="36576" bIns="36576">
+            <a:spAutoFit/>
+          </a:bodyPr>
+          <a:lstStyle/>
+          <a:p>
+            <a:pPr algn="l">
+              <a:spcAft>
+                <a:spcPts val="0"/>
+              </a:spcAft>
+              <a:defRPr sz="3200" b="1">
+                <a:solidFill>
+                  <a:srgbClr val="122C4E"/>
+                </a:solidFill>
+                <a:latin typeface="Noto Sans CJK KR"/>
+              </a:defRPr>
+            </a:pPr>
+            <a:r>
+              <a:t>체크포인트를 저장하고 다음 모듈로 넘긴다</a:t>
+            </a:r>
+          </a:p>
+        </p:txBody>
+      </p:sp>
+      <p:sp>
+        <p:nvSpPr>
+          <p:cNvPr id="3" name="TextBox 2"/>
+          <p:cNvSpPr txBox="1"/>
+          <p:nvPr/>
+        </p:nvSpPr>
+        <p:spPr>
+          <a:xfrm>
+            <a:off x="603504" y="859536"/>
+            <a:ext cx="10698480" cy="292608"/>
+          </a:xfrm>
+          <a:prstGeom prst="rect">
+            <a:avLst/>
+          </a:prstGeom>
+          <a:noFill/>
+        </p:spPr>
+        <p:txBody>
+          <a:bodyPr wrap="square" lIns="73152" rIns="73152" tIns="36576" bIns="36576">
+            <a:spAutoFit/>
+          </a:bodyPr>
+          <a:lstStyle/>
+          <a:p>
+            <a:pPr algn="l">
+              <a:spcAft>
+                <a:spcPts val="0"/>
+              </a:spcAft>
+              <a:defRPr sz="1700" b="0">
+                <a:solidFill>
+                  <a:srgbClr val="5C6672"/>
+                </a:solidFill>
+                <a:latin typeface="Noto Sans CJK KR"/>
+              </a:defRPr>
+            </a:pPr>
+            <a:r>
+              <a:t>현재 Complete는 다음 Starter의 기준선입니다.</a:t>
+            </a:r>
+          </a:p>
+        </p:txBody>
+      </p:sp>
+      <p:sp>
+        <p:nvSpPr>
+          <p:cNvPr id="4" name="TextBox 3"/>
+          <p:cNvSpPr txBox="1"/>
+          <p:nvPr/>
+        </p:nvSpPr>
+        <p:spPr>
+          <a:xfrm>
+            <a:off x="530352" y="6510528"/>
+            <a:ext cx="7772400" cy="201168"/>
+          </a:xfrm>
+          <a:prstGeom prst="rect">
+            <a:avLst/>
+          </a:prstGeom>
+          <a:noFill/>
+        </p:spPr>
+        <p:txBody>
+          <a:bodyPr wrap="square" lIns="73152" rIns="73152" tIns="36576" bIns="36576">
+            <a:spAutoFit/>
+          </a:bodyPr>
+          <a:lstStyle/>
+          <a:p>
+            <a:pPr algn="l">
+              <a:spcAft>
+                <a:spcPts val="0"/>
+              </a:spcAft>
+              <a:defRPr sz="1000" b="0">
+                <a:solidFill>
+                  <a:srgbClr val="5C6672"/>
+                </a:solidFill>
+                <a:latin typeface="Noto Sans CJK KR"/>
+              </a:defRPr>
+            </a:pPr>
+            <a:r>
+              <a:t>ROS 2 Jazzy · Gazebo Harmonic · M16 · 따라 하기형 AGV 실습</a:t>
+            </a:r>
+          </a:p>
+        </p:txBody>
+      </p:sp>
+      <p:sp>
+        <p:nvSpPr>
+          <p:cNvPr id="5" name="TextBox 4"/>
+          <p:cNvSpPr txBox="1"/>
+          <p:nvPr/>
+        </p:nvSpPr>
+        <p:spPr>
+          <a:xfrm>
+            <a:off x="9144000" y="6510528"/>
+            <a:ext cx="2468880" cy="201168"/>
+          </a:xfrm>
+          <a:prstGeom prst="rect">
+            <a:avLst/>
+          </a:prstGeom>
+          <a:noFill/>
+        </p:spPr>
+        <p:txBody>
+          <a:bodyPr wrap="square" lIns="73152" rIns="73152" tIns="36576" bIns="36576">
+            <a:spAutoFit/>
+          </a:bodyPr>
+          <a:lstStyle/>
+          <a:p>
+            <a:pPr algn="r">
+              <a:spcAft>
+                <a:spcPts val="0"/>
+              </a:spcAft>
+              <a:defRPr sz="1000" b="0">
+                <a:solidFill>
+                  <a:srgbClr val="5C6672"/>
+                </a:solidFill>
+                <a:latin typeface="Noto Sans CJK KR"/>
+              </a:defRPr>
+            </a:pPr>
+            <a:r>
+              <a:t>명령·파일 경로는 슬라이드에서 복사 가능</a:t>
+            </a:r>
+          </a:p>
+        </p:txBody>
+      </p:sp>
+      <p:sp>
+        <p:nvSpPr>
+          <p:cNvPr id="6" name="Rectangle 5"/>
+          <p:cNvSpPr/>
+          <p:nvPr/>
+        </p:nvSpPr>
+        <p:spPr>
+          <a:xfrm>
+            <a:off x="566928" y="1188720"/>
+            <a:ext cx="11064240" cy="347472"/>
+          </a:xfrm>
+          <a:prstGeom prst="rect">
+            <a:avLst/>
+          </a:prstGeom>
+          <a:solidFill>
+            <a:srgbClr val="F4F7FB"/>
+          </a:solidFill>
+          <a:ln>
+            <a:solidFill>
+              <a:srgbClr val="F4F7FB"/>
+            </a:solidFill>
+          </a:ln>
+        </p:spPr>
+        <p:style>
+          <a:lnRef idx="1">
+            <a:schemeClr val="accent1"/>
+          </a:lnRef>
+          <a:fillRef idx="3">
+            <a:schemeClr val="accent1"/>
+          </a:fillRef>
+          <a:effectRef idx="2">
+            <a:schemeClr val="accent1"/>
+          </a:effectRef>
+          <a:fontRef idx="minor">
+            <a:schemeClr val="lt1"/>
+          </a:fontRef>
+        </p:style>
+        <p:txBody>
+          <a:bodyPr rtlCol="0" anchor="ctr" wrap="square" lIns="73152" rIns="73152" tIns="36576" bIns="36576"/>
+          <a:lstStyle/>
+          <a:p>
+            <a:pPr algn="l">
+              <a:spcAft>
+                <a:spcPts val="0"/>
+              </a:spcAft>
+              <a:defRPr sz="1300" b="1">
+                <a:solidFill>
+                  <a:srgbClr val="122C4E"/>
+                </a:solidFill>
+                <a:latin typeface="Noto Sans CJK KR"/>
+              </a:defRPr>
+            </a:pPr>
+            <a:r>
+              <a:t>현재 단계 체크포인트    |    현재 폴더 ~/ros2_curri/agv_ws    |    현재 터미널</a:t>
+            </a:r>
+          </a:p>
+        </p:txBody>
+      </p:sp>
+      <p:sp>
+        <p:nvSpPr>
+          <p:cNvPr id="7" name="Rounded Rectangle 6"/>
+          <p:cNvSpPr/>
+          <p:nvPr/>
+        </p:nvSpPr>
+        <p:spPr>
+          <a:xfrm>
+            <a:off x="685800" y="1737360"/>
+            <a:ext cx="10972800" cy="3611880"/>
+          </a:xfrm>
+          <a:prstGeom prst="roundRect">
+            <a:avLst/>
+          </a:prstGeom>
+          <a:solidFill>
+            <a:srgbClr val="F4F7FB"/>
+          </a:solidFill>
+          <a:ln>
+            <a:solidFill>
+              <a:srgbClr val="D2DCE8"/>
+            </a:solidFill>
+          </a:ln>
+        </p:spPr>
+        <p:style>
+          <a:lnRef idx="1">
+            <a:schemeClr val="accent1"/>
+          </a:lnRef>
+          <a:fillRef idx="3">
+            <a:schemeClr val="accent1"/>
+          </a:fillRef>
+          <a:effectRef idx="2">
+            <a:schemeClr val="accent1"/>
+          </a:effectRef>
+          <a:fontRef idx="minor">
+            <a:schemeClr val="lt1"/>
+          </a:fontRef>
+        </p:style>
+        <p:txBody>
+          <a:bodyPr rtlCol="0" anchor="ctr"/>
+          <a:lstStyle/>
+          <a:p>
+            <a:pPr algn="ctr"/>
+          </a:p>
+        </p:txBody>
+      </p:sp>
+      <p:sp>
+        <p:nvSpPr>
+          <p:cNvPr id="8" name="TextBox 7"/>
+          <p:cNvSpPr txBox="1"/>
+          <p:nvPr/>
+        </p:nvSpPr>
+        <p:spPr>
+          <a:xfrm>
+            <a:off x="896112" y="1993392"/>
+            <a:ext cx="10332720" cy="2971800"/>
+          </a:xfrm>
+          <a:prstGeom prst="rect">
+            <a:avLst/>
+          </a:prstGeom>
+          <a:noFill/>
+        </p:spPr>
+        <p:txBody>
+          <a:bodyPr wrap="square" lIns="109728" rIns="109728">
+            <a:spAutoFit/>
+          </a:bodyPr>
+          <a:lstStyle/>
+          <a:p>
+            <a:pPr>
+              <a:spcAft>
+                <a:spcPts val="800"/>
+              </a:spcAft>
+              <a:defRPr sz="1800">
+                <a:solidFill>
+                  <a:srgbClr val="122C4E"/>
+                </a:solidFill>
+                <a:latin typeface="Noto Sans CJK KR"/>
+              </a:defRPr>
+            </a:pPr>
+            <a:r>
+              <a:t>• □ 완료 화면: `ros2 control list_controllers`에서 joint_state_broadcaster와 diff_drive_controller가 모두 active이고 wheel joint state가 publish된다.</a:t>
+            </a:r>
+          </a:p>
+          <a:p>
+            <a:pPr>
+              <a:spcAft>
+                <a:spcPts val="800"/>
+              </a:spcAft>
+              <a:defRPr sz="1800">
+                <a:solidFill>
+                  <a:srgbClr val="122C4E"/>
+                </a:solidFill>
+                <a:latin typeface="Noto Sans CJK KR"/>
+              </a:defRPr>
+            </a:pPr>
+            <a:r>
+              <a:t>• □ Complete 파일: blocks/E_autonomy_logic/M16_ros2_control/complete/</a:t>
+            </a:r>
+          </a:p>
+          <a:p>
+            <a:pPr>
+              <a:spcAft>
+                <a:spcPts val="800"/>
+              </a:spcAft>
+              <a:defRPr sz="1800">
+                <a:solidFill>
+                  <a:srgbClr val="122C4E"/>
+                </a:solidFill>
+                <a:latin typeface="Noto Sans CJK KR"/>
+              </a:defRPr>
+            </a:pPr>
+            <a:r>
+              <a:t>• □ 정상 로그·캡처: logs/validation.log, screenshots/validation_terminal.png</a:t>
+            </a:r>
+          </a:p>
+          <a:p>
+            <a:pPr>
+              <a:spcAft>
+                <a:spcPts val="800"/>
+              </a:spcAft>
+              <a:defRPr sz="1800">
+                <a:solidFill>
+                  <a:srgbClr val="122C4E"/>
+                </a:solidFill>
+                <a:latin typeface="Noto Sans CJK KR"/>
+              </a:defRPr>
+            </a:pPr>
+            <a:r>
+              <a:t>• □ 버전 식별: CHECKSUM_or_TAG.txt의 SHA-256 manifest</a:t>
+            </a:r>
+          </a:p>
+          <a:p>
+            <a:pPr>
+              <a:spcAft>
+                <a:spcPts val="800"/>
+              </a:spcAft>
+              <a:defRPr sz="1800">
+                <a:solidFill>
+                  <a:srgbClr val="122C4E"/>
+                </a:solidFill>
+                <a:latin typeface="Noto Sans CJK KR"/>
+              </a:defRPr>
+            </a:pPr>
+            <a:r>
+              <a:t>• □ 다음 시작 조건: M17~M20 autonomy command</a:t>
+            </a:r>
+          </a:p>
+        </p:txBody>
+      </p:sp>
+      <p:sp>
+        <p:nvSpPr>
+          <p:cNvPr id="9" name="TextBox 8"/>
+          <p:cNvSpPr txBox="1"/>
+          <p:nvPr/>
+        </p:nvSpPr>
+        <p:spPr>
+          <a:xfrm>
+            <a:off x="868680" y="5596128"/>
+            <a:ext cx="10515600" cy="338328"/>
+          </a:xfrm>
+          <a:prstGeom prst="rect">
+            <a:avLst/>
+          </a:prstGeom>
+          <a:noFill/>
+        </p:spPr>
+        <p:txBody>
+          <a:bodyPr wrap="square" lIns="73152" rIns="73152" tIns="36576" bIns="36576">
+            <a:spAutoFit/>
+          </a:bodyPr>
+          <a:lstStyle/>
+          <a:p>
+            <a:pPr algn="ctr">
+              <a:spcAft>
+                <a:spcPts val="0"/>
+              </a:spcAft>
+              <a:defRPr sz="1700" b="1">
+                <a:solidFill>
+                  <a:srgbClr val="2A8B5A"/>
+                </a:solidFill>
+                <a:latin typeface="Noto Sans CJK KR"/>
+              </a:defRPr>
+            </a:pPr>
+            <a:r>
+              <a:t>다음 모듈을 시작하기 전, 이 슬라이드의 Complete와 다음 모듈의 Starter를 비교합니다.</a:t>
+            </a:r>
+          </a:p>
+        </p:txBody>
+      </p:sp>
+    </p:spTree>
+  </p:cSld>
+  <p:clrMapOvr>
+    <a:masterClrMapping/>
+  </p:clrMapOvr>
+</p:sld>
+</file>
+
+<file path=ppt/slides/slide43.xml><?xml version="1.0" encoding="utf-8"?>
+<p:sld xmlns:a="http://schemas.openxmlformats.org/drawingml/2006/main" xmlns:p="http://schemas.openxmlformats.org/presentationml/2006/main" xmlns:r="http://schemas.openxmlformats.org/officeDocument/2006/relationships">
+  <p:cSld>
+    <p:spTree>
+      <p:nvGrpSpPr>
+        <p:cNvPr id="1" name=""/>
+        <p:cNvGrpSpPr/>
+        <p:nvPr/>
+      </p:nvGrpSpPr>
+      <p:grpSpPr/>
+      <p:sp>
+        <p:nvSpPr>
+          <p:cNvPr id="2" name="TextBox 1"/>
+          <p:cNvSpPr txBox="1"/>
+          <p:nvPr/>
+        </p:nvSpPr>
+        <p:spPr>
+          <a:xfrm>
+            <a:off x="566928" y="347472"/>
+            <a:ext cx="10881360" cy="438912"/>
+          </a:xfrm>
+          <a:prstGeom prst="rect">
+            <a:avLst/>
+          </a:prstGeom>
+          <a:noFill/>
+        </p:spPr>
+        <p:txBody>
+          <a:bodyPr wrap="square" lIns="73152" rIns="73152" tIns="36576" bIns="36576">
+            <a:spAutoFit/>
+          </a:bodyPr>
+          <a:lstStyle/>
+          <a:p>
+            <a:pPr algn="l">
+              <a:spcAft>
+                <a:spcPts val="0"/>
+              </a:spcAft>
+              <a:defRPr sz="3200" b="1">
+                <a:solidFill>
+                  <a:srgbClr val="122C4E"/>
+                </a:solidFill>
+                <a:latin typeface="Noto Sans CJK KR"/>
+              </a:defRPr>
+            </a:pPr>
+            <a:r>
               <a:t>공식 참고 자료</a:t>
             </a:r>
           </a:p>
@@ -23947,7 +25057,7 @@
               </a:defRPr>
             </a:pPr>
             <a:r>
-              <a:t>controller YAML을 작성한다</a:t>
+              <a:t>코드/설정이 실제로 만드는 것 (1/2)</a:t>
             </a:r>
           </a:p>
         </p:txBody>
@@ -23986,7 +25096,7 @@
               </a:defRPr>
             </a:pPr>
             <a:r>
-              <a:t>한 장에는 한 행동만 수행합니다.</a:t>
+              <a:t>파일을 입력하기 전에 ‘무엇을 만들고 어디서 볼지’를 먼저 연결합니다.</a:t>
             </a:r>
           </a:p>
         </p:txBody>
@@ -24122,109 +25232,31 @@
               </a:defRPr>
             </a:pPr>
             <a:r>
-              <a:t>현재 단계 1/2    |    현재 폴더 ~/ros2_curri/agv_ws    |    현재 터미널</a:t>
-            </a:r>
-          </a:p>
-        </p:txBody>
-      </p:sp>
-      <p:sp>
-        <p:nvSpPr>
-          <p:cNvPr id="7" name="TextBox 6"/>
-          <p:cNvSpPr txBox="1"/>
-          <p:nvPr/>
-        </p:nvSpPr>
-        <p:spPr>
-          <a:xfrm>
-            <a:off x="676656" y="1764792"/>
-            <a:ext cx="1828800" cy="347472"/>
-          </a:xfrm>
-          <a:prstGeom prst="rect">
-            <a:avLst/>
-          </a:prstGeom>
-          <a:noFill/>
-        </p:spPr>
-        <p:txBody>
-          <a:bodyPr wrap="square" lIns="73152" rIns="73152" tIns="36576" bIns="36576">
-            <a:spAutoFit/>
-          </a:bodyPr>
-          <a:lstStyle/>
-          <a:p>
-            <a:pPr algn="l">
-              <a:spcAft>
-                <a:spcPts val="0"/>
-              </a:spcAft>
-              <a:defRPr sz="1800" b="1">
-                <a:solidFill>
-                  <a:srgbClr val="225B9B"/>
-                </a:solidFill>
-                <a:latin typeface="Noto Sans CJK KR"/>
-              </a:defRPr>
-            </a:pPr>
-            <a:r>
-              <a:t>왜 하는가</a:t>
-            </a:r>
-          </a:p>
-        </p:txBody>
-      </p:sp>
-      <p:sp>
-        <p:nvSpPr>
-          <p:cNvPr id="8" name="TextBox 7"/>
-          <p:cNvSpPr txBox="1"/>
-          <p:nvPr/>
-        </p:nvSpPr>
-        <p:spPr>
-          <a:xfrm>
-            <a:off x="676656" y="2103120"/>
-            <a:ext cx="10789920" cy="512064"/>
-          </a:xfrm>
-          <a:prstGeom prst="rect">
-            <a:avLst/>
-          </a:prstGeom>
-          <a:noFill/>
-        </p:spPr>
-        <p:txBody>
-          <a:bodyPr wrap="square" lIns="73152" rIns="73152" tIns="36576" bIns="36576">
-            <a:spAutoFit/>
-          </a:bodyPr>
-          <a:lstStyle/>
-          <a:p>
-            <a:pPr algn="l">
-              <a:spcAft>
-                <a:spcPts val="0"/>
-              </a:spcAft>
-              <a:defRPr sz="2000" b="0">
-                <a:solidFill>
-                  <a:srgbClr val="122C4E"/>
-                </a:solidFill>
-                <a:latin typeface="Noto Sans CJK KR"/>
-              </a:defRPr>
-            </a:pPr>
-            <a:r>
-              <a:t>controller type과 wheel parameter는 URDF/SDF joint 이름과 같아야 한다.</a:t>
-            </a:r>
-          </a:p>
-        </p:txBody>
-      </p:sp>
-      <p:sp>
-        <p:nvSpPr>
-          <p:cNvPr id="9" name="Rounded Rectangle 8"/>
+              <a:t>현재 단계 파일 역할    |    현재 폴더 ~/ros2_curri/agv_ws    |    현재 터미널</a:t>
+            </a:r>
+          </a:p>
+        </p:txBody>
+      </p:sp>
+      <p:sp>
+        <p:nvSpPr>
+          <p:cNvPr id="7" name="Rounded Rectangle 6"/>
           <p:cNvSpPr/>
           <p:nvPr/>
         </p:nvSpPr>
         <p:spPr>
           <a:xfrm>
-            <a:off x="676656" y="2871216"/>
-            <a:ext cx="10835640" cy="2331720"/>
+            <a:off x="640080" y="1627632"/>
+            <a:ext cx="10972800" cy="2048256"/>
           </a:xfrm>
           <a:prstGeom prst="roundRect">
             <a:avLst/>
           </a:prstGeom>
           <a:solidFill>
-            <a:srgbClr val="1D232D"/>
+            <a:srgbClr val="F4F7FB"/>
           </a:solidFill>
           <a:ln>
             <a:solidFill>
-              <a:srgbClr val="1D232D"/>
+              <a:srgbClr val="CCDBEB"/>
             </a:solidFill>
           </a:ln>
         </p:spPr>
@@ -24243,26 +25275,87 @@
           </a:fontRef>
         </p:style>
         <p:txBody>
-          <a:bodyPr rtlCol="0" anchor="ctr" wrap="square" lIns="73152" rIns="73152" tIns="36576" bIns="36576"/>
-          <a:lstStyle/>
-          <a:p>
-            <a:pPr algn="l">
-              <a:spcAft>
-                <a:spcPts val="0"/>
-              </a:spcAft>
-              <a:defRPr sz="1600" b="0">
-                <a:solidFill>
-                  <a:srgbClr val="FFFFFF"/>
+          <a:bodyPr rtlCol="0" anchor="ctr"/>
+          <a:lstStyle/>
+          <a:p>
+            <a:pPr algn="ctr"/>
+          </a:p>
+        </p:txBody>
+      </p:sp>
+      <p:sp>
+        <p:nvSpPr>
+          <p:cNvPr id="8" name="TextBox 7"/>
+          <p:cNvSpPr txBox="1"/>
+          <p:nvPr/>
+        </p:nvSpPr>
+        <p:spPr>
+          <a:xfrm>
+            <a:off x="850392" y="1764792"/>
+            <a:ext cx="10424160" cy="256032"/>
+          </a:xfrm>
+          <a:prstGeom prst="rect">
+            <a:avLst/>
+          </a:prstGeom>
+          <a:noFill/>
+        </p:spPr>
+        <p:txBody>
+          <a:bodyPr wrap="square" lIns="73152" rIns="73152" tIns="36576" bIns="36576">
+            <a:spAutoFit/>
+          </a:bodyPr>
+          <a:lstStyle/>
+          <a:p>
+            <a:pPr algn="l">
+              <a:spcAft>
+                <a:spcPts val="0"/>
+              </a:spcAft>
+              <a:defRPr sz="1300" b="1">
+                <a:solidFill>
+                  <a:srgbClr val="225B9B"/>
                 </a:solidFill>
                 <a:latin typeface="DejaVu Sans Mono"/>
               </a:defRPr>
             </a:pPr>
             <a:r>
-              <a:t>nano ~/ros2_curri/agv_ws/src/agv_control/config/controllers.yaml</a:t>
-            </a:r>
-            <a:br/>
-            <a:r>
-              <a:t>ros2 pkg prefix gz_ros2_control</a:t>
+              <a:t>~/ros2_curri/agv_ws/src/agv_control/config/controllers.yaml</a:t>
+            </a:r>
+          </a:p>
+        </p:txBody>
+      </p:sp>
+      <p:sp>
+        <p:nvSpPr>
+          <p:cNvPr id="9" name="TextBox 8"/>
+          <p:cNvSpPr txBox="1"/>
+          <p:nvPr/>
+        </p:nvSpPr>
+        <p:spPr>
+          <a:xfrm>
+            <a:off x="868680" y="2130552"/>
+            <a:ext cx="1234440" cy="228600"/>
+          </a:xfrm>
+          <a:prstGeom prst="rect">
+            <a:avLst/>
+          </a:prstGeom>
+          <a:noFill/>
+        </p:spPr>
+        <p:txBody>
+          <a:bodyPr wrap="square" lIns="73152" rIns="73152" tIns="36576" bIns="36576">
+            <a:spAutoFit/>
+          </a:bodyPr>
+          <a:lstStyle/>
+          <a:p>
+            <a:pPr algn="l">
+              <a:spcAft>
+                <a:spcPts val="0"/>
+              </a:spcAft>
+              <a:defRPr sz="1500" b="1">
+                <a:solidFill>
+                  <a:srgbClr val="2A8B5A"/>
+                </a:solidFill>
+                <a:latin typeface="Noto Sans CJK KR"/>
+              </a:defRPr>
+            </a:pPr>
+            <a:r>
+              <a:t>만드는 것</a:t>
             </a:r>
           </a:p>
         </p:txBody>
@@ -24275,25 +25368,308 @@
         </p:nvSpPr>
         <p:spPr>
           <a:xfrm>
-            <a:off x="768096" y="5468112"/>
-            <a:ext cx="1143000" cy="256032"/>
-          </a:xfrm>
-          <a:prstGeom prst="rect">
-            <a:avLst/>
-          </a:prstGeom>
-          <a:noFill/>
-        </p:spPr>
-        <p:txBody>
-          <a:bodyPr wrap="square" lIns="73152" rIns="73152" tIns="36576" bIns="36576">
-            <a:spAutoFit/>
-          </a:bodyPr>
-          <a:lstStyle/>
-          <a:p>
-            <a:pPr algn="l">
-              <a:spcAft>
-                <a:spcPts val="0"/>
-              </a:spcAft>
-              <a:defRPr sz="1800" b="1">
+            <a:off x="1975104" y="2112264"/>
+            <a:ext cx="9189720" cy="274320"/>
+          </a:xfrm>
+          <a:prstGeom prst="rect">
+            <a:avLst/>
+          </a:prstGeom>
+          <a:noFill/>
+        </p:spPr>
+        <p:txBody>
+          <a:bodyPr wrap="square" lIns="73152" rIns="73152" tIns="36576" bIns="36576">
+            <a:spAutoFit/>
+          </a:bodyPr>
+          <a:lstStyle/>
+          <a:p>
+            <a:pPr algn="l">
+              <a:spcAft>
+                <a:spcPts val="0"/>
+              </a:spcAft>
+              <a:defRPr sz="1500" b="0">
+                <a:solidFill>
+                  <a:srgbClr val="122C4E"/>
+                </a:solidFill>
+                <a:latin typeface="Noto Sans CJK KR"/>
+              </a:defRPr>
+            </a:pPr>
+            <a:r>
+              <a:t>실행 시 읽히는 ROS 2 설정값</a:t>
+            </a:r>
+          </a:p>
+        </p:txBody>
+      </p:sp>
+      <p:sp>
+        <p:nvSpPr>
+          <p:cNvPr id="11" name="TextBox 10"/>
+          <p:cNvSpPr txBox="1"/>
+          <p:nvPr/>
+        </p:nvSpPr>
+        <p:spPr>
+          <a:xfrm>
+            <a:off x="868680" y="2505456"/>
+            <a:ext cx="1234440" cy="228600"/>
+          </a:xfrm>
+          <a:prstGeom prst="rect">
+            <a:avLst/>
+          </a:prstGeom>
+          <a:noFill/>
+        </p:spPr>
+        <p:txBody>
+          <a:bodyPr wrap="square" lIns="73152" rIns="73152" tIns="36576" bIns="36576">
+            <a:spAutoFit/>
+          </a:bodyPr>
+          <a:lstStyle/>
+          <a:p>
+            <a:pPr algn="l">
+              <a:spcAft>
+                <a:spcPts val="0"/>
+              </a:spcAft>
+              <a:defRPr sz="1500" b="1">
+                <a:solidFill>
+                  <a:srgbClr val="DB7E22"/>
+                </a:solidFill>
+                <a:latin typeface="Noto Sans CJK KR"/>
+              </a:defRPr>
+            </a:pPr>
+            <a:r>
+              <a:t>코드 읽기</a:t>
+            </a:r>
+          </a:p>
+        </p:txBody>
+      </p:sp>
+      <p:sp>
+        <p:nvSpPr>
+          <p:cNvPr id="12" name="TextBox 11"/>
+          <p:cNvSpPr txBox="1"/>
+          <p:nvPr/>
+        </p:nvSpPr>
+        <p:spPr>
+          <a:xfrm>
+            <a:off x="1975104" y="2487168"/>
+            <a:ext cx="9189720" cy="301752"/>
+          </a:xfrm>
+          <a:prstGeom prst="rect">
+            <a:avLst/>
+          </a:prstGeom>
+          <a:noFill/>
+        </p:spPr>
+        <p:txBody>
+          <a:bodyPr wrap="square" lIns="73152" rIns="73152" tIns="36576" bIns="36576">
+            <a:spAutoFit/>
+          </a:bodyPr>
+          <a:lstStyle/>
+          <a:p>
+            <a:pPr algn="l">
+              <a:spcAft>
+                <a:spcPts val="0"/>
+              </a:spcAft>
+              <a:defRPr sz="1400" b="0">
+                <a:solidFill>
+                  <a:srgbClr val="122C4E"/>
+                </a:solidFill>
+                <a:latin typeface="Noto Sans CJK KR"/>
+              </a:defRPr>
+            </a:pPr>
+            <a:r>
+              <a:t>이름 → type/value → launch에서 전달되는 위치를 비교한다.</a:t>
+            </a:r>
+          </a:p>
+        </p:txBody>
+      </p:sp>
+      <p:sp>
+        <p:nvSpPr>
+          <p:cNvPr id="13" name="TextBox 12"/>
+          <p:cNvSpPr txBox="1"/>
+          <p:nvPr/>
+        </p:nvSpPr>
+        <p:spPr>
+          <a:xfrm>
+            <a:off x="868680" y="2889504"/>
+            <a:ext cx="1234440" cy="228600"/>
+          </a:xfrm>
+          <a:prstGeom prst="rect">
+            <a:avLst/>
+          </a:prstGeom>
+          <a:noFill/>
+        </p:spPr>
+        <p:txBody>
+          <a:bodyPr wrap="square" lIns="73152" rIns="73152" tIns="36576" bIns="36576">
+            <a:spAutoFit/>
+          </a:bodyPr>
+          <a:lstStyle/>
+          <a:p>
+            <a:pPr algn="l">
+              <a:spcAft>
+                <a:spcPts val="0"/>
+              </a:spcAft>
+              <a:defRPr sz="1500" b="1">
+                <a:solidFill>
+                  <a:srgbClr val="225B9B"/>
+                </a:solidFill>
+                <a:latin typeface="Noto Sans CJK KR"/>
+              </a:defRPr>
+            </a:pPr>
+            <a:r>
+              <a:t>사용/확인</a:t>
+            </a:r>
+          </a:p>
+        </p:txBody>
+      </p:sp>
+      <p:sp>
+        <p:nvSpPr>
+          <p:cNvPr id="14" name="TextBox 13"/>
+          <p:cNvSpPr txBox="1"/>
+          <p:nvPr/>
+        </p:nvSpPr>
+        <p:spPr>
+          <a:xfrm>
+            <a:off x="1975104" y="2871216"/>
+            <a:ext cx="9189720" cy="512064"/>
+          </a:xfrm>
+          <a:prstGeom prst="rect">
+            <a:avLst/>
+          </a:prstGeom>
+          <a:noFill/>
+        </p:spPr>
+        <p:txBody>
+          <a:bodyPr wrap="square" lIns="73152" rIns="73152" tIns="36576" bIns="36576">
+            <a:spAutoFit/>
+          </a:bodyPr>
+          <a:lstStyle/>
+          <a:p>
+            <a:pPr algn="l">
+              <a:spcAft>
+                <a:spcPts val="0"/>
+              </a:spcAft>
+              <a:defRPr sz="1300" b="0">
+                <a:solidFill>
+                  <a:srgbClr val="122C4E"/>
+                </a:solidFill>
+                <a:latin typeface="Noto Sans CJK KR"/>
+              </a:defRPr>
+            </a:pPr>
+            <a:r>
+              <a:t>사용: launch 실행 뒤 ros2 param/topic 명령으로 확인한다.</a:t>
+            </a:r>
+            <a:br/>
+            <a:r>
+              <a:t>화면/출력: terminal의 parameter/topic 출력</a:t>
+            </a:r>
+          </a:p>
+        </p:txBody>
+      </p:sp>
+      <p:sp>
+        <p:nvSpPr>
+          <p:cNvPr id="15" name="Rounded Rectangle 14"/>
+          <p:cNvSpPr/>
+          <p:nvPr/>
+        </p:nvSpPr>
+        <p:spPr>
+          <a:xfrm>
+            <a:off x="640080" y="3941063"/>
+            <a:ext cx="10972800" cy="2048256"/>
+          </a:xfrm>
+          <a:prstGeom prst="roundRect">
+            <a:avLst/>
+          </a:prstGeom>
+          <a:solidFill>
+            <a:srgbClr val="F4F7FB"/>
+          </a:solidFill>
+          <a:ln>
+            <a:solidFill>
+              <a:srgbClr val="CCDBEB"/>
+            </a:solidFill>
+          </a:ln>
+        </p:spPr>
+        <p:style>
+          <a:lnRef idx="1">
+            <a:schemeClr val="accent1"/>
+          </a:lnRef>
+          <a:fillRef idx="3">
+            <a:schemeClr val="accent1"/>
+          </a:fillRef>
+          <a:effectRef idx="2">
+            <a:schemeClr val="accent1"/>
+          </a:effectRef>
+          <a:fontRef idx="minor">
+            <a:schemeClr val="lt1"/>
+          </a:fontRef>
+        </p:style>
+        <p:txBody>
+          <a:bodyPr rtlCol="0" anchor="ctr"/>
+          <a:lstStyle/>
+          <a:p>
+            <a:pPr algn="ctr"/>
+          </a:p>
+        </p:txBody>
+      </p:sp>
+      <p:sp>
+        <p:nvSpPr>
+          <p:cNvPr id="16" name="TextBox 15"/>
+          <p:cNvSpPr txBox="1"/>
+          <p:nvPr/>
+        </p:nvSpPr>
+        <p:spPr>
+          <a:xfrm>
+            <a:off x="850392" y="4078224"/>
+            <a:ext cx="10424160" cy="256032"/>
+          </a:xfrm>
+          <a:prstGeom prst="rect">
+            <a:avLst/>
+          </a:prstGeom>
+          <a:noFill/>
+        </p:spPr>
+        <p:txBody>
+          <a:bodyPr wrap="square" lIns="73152" rIns="73152" tIns="36576" bIns="36576">
+            <a:spAutoFit/>
+          </a:bodyPr>
+          <a:lstStyle/>
+          <a:p>
+            <a:pPr algn="l">
+              <a:spcAft>
+                <a:spcPts val="0"/>
+              </a:spcAft>
+              <a:defRPr sz="1300" b="1">
+                <a:solidFill>
+                  <a:srgbClr val="225B9B"/>
+                </a:solidFill>
+                <a:latin typeface="DejaVu Sans Mono"/>
+              </a:defRPr>
+            </a:pPr>
+            <a:r>
+              <a:t>~/ros2_curri/agv_ws/src/agv_description/urdf/agv_ros2_control.urdf.xacro</a:t>
+            </a:r>
+          </a:p>
+        </p:txBody>
+      </p:sp>
+      <p:sp>
+        <p:nvSpPr>
+          <p:cNvPr id="17" name="TextBox 16"/>
+          <p:cNvSpPr txBox="1"/>
+          <p:nvPr/>
+        </p:nvSpPr>
+        <p:spPr>
+          <a:xfrm>
+            <a:off x="868680" y="4443983"/>
+            <a:ext cx="1234440" cy="228600"/>
+          </a:xfrm>
+          <a:prstGeom prst="rect">
+            <a:avLst/>
+          </a:prstGeom>
+          <a:noFill/>
+        </p:spPr>
+        <p:txBody>
+          <a:bodyPr wrap="square" lIns="73152" rIns="73152" tIns="36576" bIns="36576">
+            <a:spAutoFit/>
+          </a:bodyPr>
+          <a:lstStyle/>
+          <a:p>
+            <a:pPr algn="l">
+              <a:spcAft>
+                <a:spcPts val="0"/>
+              </a:spcAft>
+              <a:defRPr sz="1500" b="1">
                 <a:solidFill>
                   <a:srgbClr val="2A8B5A"/>
                 </a:solidFill>
@@ -24301,38 +25677,38 @@
               </a:defRPr>
             </a:pPr>
             <a:r>
-              <a:t>확인</a:t>
-            </a:r>
-          </a:p>
-        </p:txBody>
-      </p:sp>
-      <p:sp>
-        <p:nvSpPr>
-          <p:cNvPr id="11" name="TextBox 10"/>
-          <p:cNvSpPr txBox="1"/>
-          <p:nvPr/>
-        </p:nvSpPr>
-        <p:spPr>
-          <a:xfrm>
-            <a:off x="768096" y="5742432"/>
-            <a:ext cx="10561320" cy="347472"/>
-          </a:xfrm>
-          <a:prstGeom prst="rect">
-            <a:avLst/>
-          </a:prstGeom>
-          <a:noFill/>
-        </p:spPr>
-        <p:txBody>
-          <a:bodyPr wrap="square" lIns="73152" rIns="73152" tIns="36576" bIns="36576">
-            <a:spAutoFit/>
-          </a:bodyPr>
-          <a:lstStyle/>
-          <a:p>
-            <a:pPr algn="l">
-              <a:spcAft>
-                <a:spcPts val="0"/>
-              </a:spcAft>
-              <a:defRPr sz="1800" b="0">
+              <a:t>만드는 것</a:t>
+            </a:r>
+          </a:p>
+        </p:txBody>
+      </p:sp>
+      <p:sp>
+        <p:nvSpPr>
+          <p:cNvPr id="18" name="TextBox 17"/>
+          <p:cNvSpPr txBox="1"/>
+          <p:nvPr/>
+        </p:nvSpPr>
+        <p:spPr>
+          <a:xfrm>
+            <a:off x="1975104" y="4425696"/>
+            <a:ext cx="9189720" cy="274320"/>
+          </a:xfrm>
+          <a:prstGeom prst="rect">
+            <a:avLst/>
+          </a:prstGeom>
+          <a:noFill/>
+        </p:spPr>
+        <p:txBody>
+          <a:bodyPr wrap="square" lIns="73152" rIns="73152" tIns="36576" bIns="36576">
+            <a:spAutoFit/>
+          </a:bodyPr>
+          <a:lstStyle/>
+          <a:p>
+            <a:pPr algn="l">
+              <a:spcAft>
+                <a:spcPts val="0"/>
+              </a:spcAft>
+              <a:defRPr sz="1500" b="0">
                 <a:solidFill>
                   <a:srgbClr val="122C4E"/>
                 </a:solidFill>
@@ -24340,7 +25716,167 @@
               </a:defRPr>
             </a:pPr>
             <a:r>
-              <a:t>명령의 출력에서 topic·frame·파일 이름 또는 성공 메시지를 찾으면 이 단계가 완료됩니다.</a:t>
+              <a:t>로봇 또는 Gazebo 환경의 구조·물리·sensor 설정</a:t>
+            </a:r>
+          </a:p>
+        </p:txBody>
+      </p:sp>
+      <p:sp>
+        <p:nvSpPr>
+          <p:cNvPr id="19" name="TextBox 18"/>
+          <p:cNvSpPr txBox="1"/>
+          <p:nvPr/>
+        </p:nvSpPr>
+        <p:spPr>
+          <a:xfrm>
+            <a:off x="868680" y="4818888"/>
+            <a:ext cx="1234440" cy="228600"/>
+          </a:xfrm>
+          <a:prstGeom prst="rect">
+            <a:avLst/>
+          </a:prstGeom>
+          <a:noFill/>
+        </p:spPr>
+        <p:txBody>
+          <a:bodyPr wrap="square" lIns="73152" rIns="73152" tIns="36576" bIns="36576">
+            <a:spAutoFit/>
+          </a:bodyPr>
+          <a:lstStyle/>
+          <a:p>
+            <a:pPr algn="l">
+              <a:spcAft>
+                <a:spcPts val="0"/>
+              </a:spcAft>
+              <a:defRPr sz="1500" b="1">
+                <a:solidFill>
+                  <a:srgbClr val="DB7E22"/>
+                </a:solidFill>
+                <a:latin typeface="Noto Sans CJK KR"/>
+              </a:defRPr>
+            </a:pPr>
+            <a:r>
+              <a:t>코드 읽기</a:t>
+            </a:r>
+          </a:p>
+        </p:txBody>
+      </p:sp>
+      <p:sp>
+        <p:nvSpPr>
+          <p:cNvPr id="20" name="TextBox 19"/>
+          <p:cNvSpPr txBox="1"/>
+          <p:nvPr/>
+        </p:nvSpPr>
+        <p:spPr>
+          <a:xfrm>
+            <a:off x="1975104" y="4800600"/>
+            <a:ext cx="9189720" cy="301752"/>
+          </a:xfrm>
+          <a:prstGeom prst="rect">
+            <a:avLst/>
+          </a:prstGeom>
+          <a:noFill/>
+        </p:spPr>
+        <p:txBody>
+          <a:bodyPr wrap="square" lIns="73152" rIns="73152" tIns="36576" bIns="36576">
+            <a:spAutoFit/>
+          </a:bodyPr>
+          <a:lstStyle/>
+          <a:p>
+            <a:pPr algn="l">
+              <a:spcAft>
+                <a:spcPts val="0"/>
+              </a:spcAft>
+              <a:defRPr sz="1400" b="0">
+                <a:solidFill>
+                  <a:srgbClr val="122C4E"/>
+                </a:solidFill>
+                <a:latin typeface="Noto Sans CJK KR"/>
+              </a:defRPr>
+            </a:pPr>
+            <a:r>
+              <a:t>link/model → geometry → joint/sensor/plugin 순서로 읽는다.</a:t>
+            </a:r>
+          </a:p>
+        </p:txBody>
+      </p:sp>
+      <p:sp>
+        <p:nvSpPr>
+          <p:cNvPr id="21" name="TextBox 20"/>
+          <p:cNvSpPr txBox="1"/>
+          <p:nvPr/>
+        </p:nvSpPr>
+        <p:spPr>
+          <a:xfrm>
+            <a:off x="868680" y="5202936"/>
+            <a:ext cx="1234440" cy="228600"/>
+          </a:xfrm>
+          <a:prstGeom prst="rect">
+            <a:avLst/>
+          </a:prstGeom>
+          <a:noFill/>
+        </p:spPr>
+        <p:txBody>
+          <a:bodyPr wrap="square" lIns="73152" rIns="73152" tIns="36576" bIns="36576">
+            <a:spAutoFit/>
+          </a:bodyPr>
+          <a:lstStyle/>
+          <a:p>
+            <a:pPr algn="l">
+              <a:spcAft>
+                <a:spcPts val="0"/>
+              </a:spcAft>
+              <a:defRPr sz="1500" b="1">
+                <a:solidFill>
+                  <a:srgbClr val="225B9B"/>
+                </a:solidFill>
+                <a:latin typeface="Noto Sans CJK KR"/>
+              </a:defRPr>
+            </a:pPr>
+            <a:r>
+              <a:t>사용/확인</a:t>
+            </a:r>
+          </a:p>
+        </p:txBody>
+      </p:sp>
+      <p:sp>
+        <p:nvSpPr>
+          <p:cNvPr id="22" name="TextBox 21"/>
+          <p:cNvSpPr txBox="1"/>
+          <p:nvPr/>
+        </p:nvSpPr>
+        <p:spPr>
+          <a:xfrm>
+            <a:off x="1975104" y="5184648"/>
+            <a:ext cx="9189720" cy="512064"/>
+          </a:xfrm>
+          <a:prstGeom prst="rect">
+            <a:avLst/>
+          </a:prstGeom>
+          <a:noFill/>
+        </p:spPr>
+        <p:txBody>
+          <a:bodyPr wrap="square" lIns="73152" rIns="73152" tIns="36576" bIns="36576">
+            <a:spAutoFit/>
+          </a:bodyPr>
+          <a:lstStyle/>
+          <a:p>
+            <a:pPr algn="l">
+              <a:spcAft>
+                <a:spcPts val="0"/>
+              </a:spcAft>
+              <a:defRPr sz="1300" b="0">
+                <a:solidFill>
+                  <a:srgbClr val="122C4E"/>
+                </a:solidFill>
+                <a:latin typeface="Noto Sans CJK KR"/>
+              </a:defRPr>
+            </a:pPr>
+            <a:r>
+              <a:t>사용: 문법 검사 뒤 Gazebo/RViz에서 열어 본다.</a:t>
+            </a:r>
+            <a:br/>
+            <a:r>
+              <a:t>화면/출력: terminal 검사 결과와 3D 화면</a:t>
             </a:r>
           </a:p>
         </p:txBody>
@@ -24397,7 +25933,7 @@
               </a:defRPr>
             </a:pPr>
             <a:r>
-              <a:t>실제 controller를 활성화한다</a:t>
+              <a:t>코드/설정이 실제로 만드는 것 (2/2)</a:t>
             </a:r>
           </a:p>
         </p:txBody>
@@ -24436,7 +25972,7 @@
               </a:defRPr>
             </a:pPr>
             <a:r>
-              <a:t>한 장에는 한 행동만 수행합니다.</a:t>
+              <a:t>파일을 입력하기 전에 ‘무엇을 만들고 어디서 볼지’를 먼저 연결합니다.</a:t>
             </a:r>
           </a:p>
         </p:txBody>
@@ -24572,109 +26108,31 @@
               </a:defRPr>
             </a:pPr>
             <a:r>
-              <a:t>현재 단계 2/2    |    현재 폴더 ~/ros2_curri/agv_ws    |    새 터미널</a:t>
-            </a:r>
-          </a:p>
-        </p:txBody>
-      </p:sp>
-      <p:sp>
-        <p:nvSpPr>
-          <p:cNvPr id="7" name="TextBox 6"/>
-          <p:cNvSpPr txBox="1"/>
-          <p:nvPr/>
-        </p:nvSpPr>
-        <p:spPr>
-          <a:xfrm>
-            <a:off x="676656" y="1764792"/>
-            <a:ext cx="1828800" cy="347472"/>
-          </a:xfrm>
-          <a:prstGeom prst="rect">
-            <a:avLst/>
-          </a:prstGeom>
-          <a:noFill/>
-        </p:spPr>
-        <p:txBody>
-          <a:bodyPr wrap="square" lIns="73152" rIns="73152" tIns="36576" bIns="36576">
-            <a:spAutoFit/>
-          </a:bodyPr>
-          <a:lstStyle/>
-          <a:p>
-            <a:pPr algn="l">
-              <a:spcAft>
-                <a:spcPts val="0"/>
-              </a:spcAft>
-              <a:defRPr sz="1800" b="1">
-                <a:solidFill>
-                  <a:srgbClr val="225B9B"/>
-                </a:solidFill>
-                <a:latin typeface="Noto Sans CJK KR"/>
-              </a:defRPr>
-            </a:pPr>
-            <a:r>
-              <a:t>왜 하는가</a:t>
-            </a:r>
-          </a:p>
-        </p:txBody>
-      </p:sp>
-      <p:sp>
-        <p:nvSpPr>
-          <p:cNvPr id="8" name="TextBox 7"/>
-          <p:cNvSpPr txBox="1"/>
-          <p:nvPr/>
-        </p:nvSpPr>
-        <p:spPr>
-          <a:xfrm>
-            <a:off x="676656" y="2103120"/>
-            <a:ext cx="10789920" cy="512064"/>
-          </a:xfrm>
-          <a:prstGeom prst="rect">
-            <a:avLst/>
-          </a:prstGeom>
-          <a:noFill/>
-        </p:spPr>
-        <p:txBody>
-          <a:bodyPr wrap="square" lIns="73152" rIns="73152" tIns="36576" bIns="36576">
-            <a:spAutoFit/>
-          </a:bodyPr>
-          <a:lstStyle/>
-          <a:p>
-            <a:pPr algn="l">
-              <a:spcAft>
-                <a:spcPts val="0"/>
-              </a:spcAft>
-              <a:defRPr sz="2000" b="0">
-                <a:solidFill>
-                  <a:srgbClr val="122C4E"/>
-                </a:solidFill>
-                <a:latin typeface="Noto Sans CJK KR"/>
-              </a:defRPr>
-            </a:pPr>
-            <a:r>
-              <a:t>M16은 M09 native DiffDrive와 별도 launch를 사용한다. plugin이 controller_manager를 만들고 spawner가 두 controller를 active로 전환한다.</a:t>
-            </a:r>
-          </a:p>
-        </p:txBody>
-      </p:sp>
-      <p:sp>
-        <p:nvSpPr>
-          <p:cNvPr id="9" name="Rounded Rectangle 8"/>
+              <a:t>현재 단계 파일 역할    |    현재 폴더 ~/ros2_curri/agv_ws    |    현재 터미널</a:t>
+            </a:r>
+          </a:p>
+        </p:txBody>
+      </p:sp>
+      <p:sp>
+        <p:nvSpPr>
+          <p:cNvPr id="7" name="Rounded Rectangle 6"/>
           <p:cNvSpPr/>
           <p:nvPr/>
         </p:nvSpPr>
         <p:spPr>
           <a:xfrm>
-            <a:off x="676656" y="2871216"/>
-            <a:ext cx="10835640" cy="2331720"/>
+            <a:off x="640080" y="1627632"/>
+            <a:ext cx="10972800" cy="2048256"/>
           </a:xfrm>
           <a:prstGeom prst="roundRect">
             <a:avLst/>
           </a:prstGeom>
           <a:solidFill>
-            <a:srgbClr val="1D232D"/>
+            <a:srgbClr val="F4F7FB"/>
           </a:solidFill>
           <a:ln>
             <a:solidFill>
-              <a:srgbClr val="1D232D"/>
+              <a:srgbClr val="CCDBEB"/>
             </a:solidFill>
           </a:ln>
         </p:spPr>
@@ -24693,30 +26151,87 @@
           </a:fontRef>
         </p:style>
         <p:txBody>
-          <a:bodyPr rtlCol="0" anchor="ctr" wrap="square" lIns="73152" rIns="73152" tIns="36576" bIns="36576"/>
-          <a:lstStyle/>
-          <a:p>
-            <a:pPr algn="l">
-              <a:spcAft>
-                <a:spcPts val="0"/>
-              </a:spcAft>
-              <a:defRPr sz="1600" b="0">
-                <a:solidFill>
-                  <a:srgbClr val="FFFFFF"/>
+          <a:bodyPr rtlCol="0" anchor="ctr"/>
+          <a:lstStyle/>
+          <a:p>
+            <a:pPr algn="ctr"/>
+          </a:p>
+        </p:txBody>
+      </p:sp>
+      <p:sp>
+        <p:nvSpPr>
+          <p:cNvPr id="8" name="TextBox 7"/>
+          <p:cNvSpPr txBox="1"/>
+          <p:nvPr/>
+        </p:nvSpPr>
+        <p:spPr>
+          <a:xfrm>
+            <a:off x="850392" y="1764792"/>
+            <a:ext cx="10424160" cy="256032"/>
+          </a:xfrm>
+          <a:prstGeom prst="rect">
+            <a:avLst/>
+          </a:prstGeom>
+          <a:noFill/>
+        </p:spPr>
+        <p:txBody>
+          <a:bodyPr wrap="square" lIns="73152" rIns="73152" tIns="36576" bIns="36576">
+            <a:spAutoFit/>
+          </a:bodyPr>
+          <a:lstStyle/>
+          <a:p>
+            <a:pPr algn="l">
+              <a:spcAft>
+                <a:spcPts val="0"/>
+              </a:spcAft>
+              <a:defRPr sz="1300" b="1">
+                <a:solidFill>
+                  <a:srgbClr val="225B9B"/>
                 </a:solidFill>
                 <a:latin typeface="DejaVu Sans Mono"/>
               </a:defRPr>
             </a:pPr>
             <a:r>
-              <a:t>ros2 launch agv_gazebo ros2_control.launch.py</a:t>
-            </a:r>
-            <a:br/>
-            <a:r>
-              <a:t># 새 터미널</a:t>
-            </a:r>
-            <a:br/>
-            <a:r>
-              <a:t>ros2 control list_controllers -c /controller_manager</a:t>
+              <a:t>~/ros2_curri/agv_ws/src/agv_gazebo/models/agv_ros2_control/model.sdf</a:t>
+            </a:r>
+          </a:p>
+        </p:txBody>
+      </p:sp>
+      <p:sp>
+        <p:nvSpPr>
+          <p:cNvPr id="9" name="TextBox 8"/>
+          <p:cNvSpPr txBox="1"/>
+          <p:nvPr/>
+        </p:nvSpPr>
+        <p:spPr>
+          <a:xfrm>
+            <a:off x="868680" y="2130552"/>
+            <a:ext cx="1234440" cy="228600"/>
+          </a:xfrm>
+          <a:prstGeom prst="rect">
+            <a:avLst/>
+          </a:prstGeom>
+          <a:noFill/>
+        </p:spPr>
+        <p:txBody>
+          <a:bodyPr wrap="square" lIns="73152" rIns="73152" tIns="36576" bIns="36576">
+            <a:spAutoFit/>
+          </a:bodyPr>
+          <a:lstStyle/>
+          <a:p>
+            <a:pPr algn="l">
+              <a:spcAft>
+                <a:spcPts val="0"/>
+              </a:spcAft>
+              <a:defRPr sz="1500" b="1">
+                <a:solidFill>
+                  <a:srgbClr val="2A8B5A"/>
+                </a:solidFill>
+                <a:latin typeface="Noto Sans CJK KR"/>
+              </a:defRPr>
+            </a:pPr>
+            <a:r>
+              <a:t>만드는 것</a:t>
             </a:r>
           </a:p>
         </p:txBody>
@@ -24729,25 +26244,308 @@
         </p:nvSpPr>
         <p:spPr>
           <a:xfrm>
-            <a:off x="768096" y="5468112"/>
-            <a:ext cx="1143000" cy="256032"/>
-          </a:xfrm>
-          <a:prstGeom prst="rect">
-            <a:avLst/>
-          </a:prstGeom>
-          <a:noFill/>
-        </p:spPr>
-        <p:txBody>
-          <a:bodyPr wrap="square" lIns="73152" rIns="73152" tIns="36576" bIns="36576">
-            <a:spAutoFit/>
-          </a:bodyPr>
-          <a:lstStyle/>
-          <a:p>
-            <a:pPr algn="l">
-              <a:spcAft>
-                <a:spcPts val="0"/>
-              </a:spcAft>
-              <a:defRPr sz="1800" b="1">
+            <a:off x="1975104" y="2112264"/>
+            <a:ext cx="9189720" cy="274320"/>
+          </a:xfrm>
+          <a:prstGeom prst="rect">
+            <a:avLst/>
+          </a:prstGeom>
+          <a:noFill/>
+        </p:spPr>
+        <p:txBody>
+          <a:bodyPr wrap="square" lIns="73152" rIns="73152" tIns="36576" bIns="36576">
+            <a:spAutoFit/>
+          </a:bodyPr>
+          <a:lstStyle/>
+          <a:p>
+            <a:pPr algn="l">
+              <a:spcAft>
+                <a:spcPts val="0"/>
+              </a:spcAft>
+              <a:defRPr sz="1500" b="0">
+                <a:solidFill>
+                  <a:srgbClr val="122C4E"/>
+                </a:solidFill>
+                <a:latin typeface="Noto Sans CJK KR"/>
+              </a:defRPr>
+            </a:pPr>
+            <a:r>
+              <a:t>로봇 또는 Gazebo 환경의 구조·물리·sensor 설정</a:t>
+            </a:r>
+          </a:p>
+        </p:txBody>
+      </p:sp>
+      <p:sp>
+        <p:nvSpPr>
+          <p:cNvPr id="11" name="TextBox 10"/>
+          <p:cNvSpPr txBox="1"/>
+          <p:nvPr/>
+        </p:nvSpPr>
+        <p:spPr>
+          <a:xfrm>
+            <a:off x="868680" y="2505456"/>
+            <a:ext cx="1234440" cy="228600"/>
+          </a:xfrm>
+          <a:prstGeom prst="rect">
+            <a:avLst/>
+          </a:prstGeom>
+          <a:noFill/>
+        </p:spPr>
+        <p:txBody>
+          <a:bodyPr wrap="square" lIns="73152" rIns="73152" tIns="36576" bIns="36576">
+            <a:spAutoFit/>
+          </a:bodyPr>
+          <a:lstStyle/>
+          <a:p>
+            <a:pPr algn="l">
+              <a:spcAft>
+                <a:spcPts val="0"/>
+              </a:spcAft>
+              <a:defRPr sz="1500" b="1">
+                <a:solidFill>
+                  <a:srgbClr val="DB7E22"/>
+                </a:solidFill>
+                <a:latin typeface="Noto Sans CJK KR"/>
+              </a:defRPr>
+            </a:pPr>
+            <a:r>
+              <a:t>코드 읽기</a:t>
+            </a:r>
+          </a:p>
+        </p:txBody>
+      </p:sp>
+      <p:sp>
+        <p:nvSpPr>
+          <p:cNvPr id="12" name="TextBox 11"/>
+          <p:cNvSpPr txBox="1"/>
+          <p:nvPr/>
+        </p:nvSpPr>
+        <p:spPr>
+          <a:xfrm>
+            <a:off x="1975104" y="2487168"/>
+            <a:ext cx="9189720" cy="301752"/>
+          </a:xfrm>
+          <a:prstGeom prst="rect">
+            <a:avLst/>
+          </a:prstGeom>
+          <a:noFill/>
+        </p:spPr>
+        <p:txBody>
+          <a:bodyPr wrap="square" lIns="73152" rIns="73152" tIns="36576" bIns="36576">
+            <a:spAutoFit/>
+          </a:bodyPr>
+          <a:lstStyle/>
+          <a:p>
+            <a:pPr algn="l">
+              <a:spcAft>
+                <a:spcPts val="0"/>
+              </a:spcAft>
+              <a:defRPr sz="1400" b="0">
+                <a:solidFill>
+                  <a:srgbClr val="122C4E"/>
+                </a:solidFill>
+                <a:latin typeface="Noto Sans CJK KR"/>
+              </a:defRPr>
+            </a:pPr>
+            <a:r>
+              <a:t>link/model → geometry → joint/sensor/plugin 순서로 읽는다.</a:t>
+            </a:r>
+          </a:p>
+        </p:txBody>
+      </p:sp>
+      <p:sp>
+        <p:nvSpPr>
+          <p:cNvPr id="13" name="TextBox 12"/>
+          <p:cNvSpPr txBox="1"/>
+          <p:nvPr/>
+        </p:nvSpPr>
+        <p:spPr>
+          <a:xfrm>
+            <a:off x="868680" y="2889504"/>
+            <a:ext cx="1234440" cy="228600"/>
+          </a:xfrm>
+          <a:prstGeom prst="rect">
+            <a:avLst/>
+          </a:prstGeom>
+          <a:noFill/>
+        </p:spPr>
+        <p:txBody>
+          <a:bodyPr wrap="square" lIns="73152" rIns="73152" tIns="36576" bIns="36576">
+            <a:spAutoFit/>
+          </a:bodyPr>
+          <a:lstStyle/>
+          <a:p>
+            <a:pPr algn="l">
+              <a:spcAft>
+                <a:spcPts val="0"/>
+              </a:spcAft>
+              <a:defRPr sz="1500" b="1">
+                <a:solidFill>
+                  <a:srgbClr val="225B9B"/>
+                </a:solidFill>
+                <a:latin typeface="Noto Sans CJK KR"/>
+              </a:defRPr>
+            </a:pPr>
+            <a:r>
+              <a:t>사용/확인</a:t>
+            </a:r>
+          </a:p>
+        </p:txBody>
+      </p:sp>
+      <p:sp>
+        <p:nvSpPr>
+          <p:cNvPr id="14" name="TextBox 13"/>
+          <p:cNvSpPr txBox="1"/>
+          <p:nvPr/>
+        </p:nvSpPr>
+        <p:spPr>
+          <a:xfrm>
+            <a:off x="1975104" y="2871216"/>
+            <a:ext cx="9189720" cy="512064"/>
+          </a:xfrm>
+          <a:prstGeom prst="rect">
+            <a:avLst/>
+          </a:prstGeom>
+          <a:noFill/>
+        </p:spPr>
+        <p:txBody>
+          <a:bodyPr wrap="square" lIns="73152" rIns="73152" tIns="36576" bIns="36576">
+            <a:spAutoFit/>
+          </a:bodyPr>
+          <a:lstStyle/>
+          <a:p>
+            <a:pPr algn="l">
+              <a:spcAft>
+                <a:spcPts val="0"/>
+              </a:spcAft>
+              <a:defRPr sz="1300" b="0">
+                <a:solidFill>
+                  <a:srgbClr val="122C4E"/>
+                </a:solidFill>
+                <a:latin typeface="Noto Sans CJK KR"/>
+              </a:defRPr>
+            </a:pPr>
+            <a:r>
+              <a:t>사용: 문법 검사 뒤 Gazebo/RViz에서 열어 본다.</a:t>
+            </a:r>
+            <a:br/>
+            <a:r>
+              <a:t>화면/출력: terminal 검사 결과와 3D 화면</a:t>
+            </a:r>
+          </a:p>
+        </p:txBody>
+      </p:sp>
+      <p:sp>
+        <p:nvSpPr>
+          <p:cNvPr id="15" name="Rounded Rectangle 14"/>
+          <p:cNvSpPr/>
+          <p:nvPr/>
+        </p:nvSpPr>
+        <p:spPr>
+          <a:xfrm>
+            <a:off x="640080" y="3941063"/>
+            <a:ext cx="10972800" cy="2048256"/>
+          </a:xfrm>
+          <a:prstGeom prst="roundRect">
+            <a:avLst/>
+          </a:prstGeom>
+          <a:solidFill>
+            <a:srgbClr val="F4F7FB"/>
+          </a:solidFill>
+          <a:ln>
+            <a:solidFill>
+              <a:srgbClr val="CCDBEB"/>
+            </a:solidFill>
+          </a:ln>
+        </p:spPr>
+        <p:style>
+          <a:lnRef idx="1">
+            <a:schemeClr val="accent1"/>
+          </a:lnRef>
+          <a:fillRef idx="3">
+            <a:schemeClr val="accent1"/>
+          </a:fillRef>
+          <a:effectRef idx="2">
+            <a:schemeClr val="accent1"/>
+          </a:effectRef>
+          <a:fontRef idx="minor">
+            <a:schemeClr val="lt1"/>
+          </a:fontRef>
+        </p:style>
+        <p:txBody>
+          <a:bodyPr rtlCol="0" anchor="ctr"/>
+          <a:lstStyle/>
+          <a:p>
+            <a:pPr algn="ctr"/>
+          </a:p>
+        </p:txBody>
+      </p:sp>
+      <p:sp>
+        <p:nvSpPr>
+          <p:cNvPr id="16" name="TextBox 15"/>
+          <p:cNvSpPr txBox="1"/>
+          <p:nvPr/>
+        </p:nvSpPr>
+        <p:spPr>
+          <a:xfrm>
+            <a:off x="850392" y="4078224"/>
+            <a:ext cx="10424160" cy="256032"/>
+          </a:xfrm>
+          <a:prstGeom prst="rect">
+            <a:avLst/>
+          </a:prstGeom>
+          <a:noFill/>
+        </p:spPr>
+        <p:txBody>
+          <a:bodyPr wrap="square" lIns="73152" rIns="73152" tIns="36576" bIns="36576">
+            <a:spAutoFit/>
+          </a:bodyPr>
+          <a:lstStyle/>
+          <a:p>
+            <a:pPr algn="l">
+              <a:spcAft>
+                <a:spcPts val="0"/>
+              </a:spcAft>
+              <a:defRPr sz="1300" b="1">
+                <a:solidFill>
+                  <a:srgbClr val="225B9B"/>
+                </a:solidFill>
+                <a:latin typeface="DejaVu Sans Mono"/>
+              </a:defRPr>
+            </a:pPr>
+            <a:r>
+              <a:t>~/ros2_curri/agv_ws/src/agv_gazebo/launch/ros2_control.launch.py</a:t>
+            </a:r>
+          </a:p>
+        </p:txBody>
+      </p:sp>
+      <p:sp>
+        <p:nvSpPr>
+          <p:cNvPr id="17" name="TextBox 16"/>
+          <p:cNvSpPr txBox="1"/>
+          <p:nvPr/>
+        </p:nvSpPr>
+        <p:spPr>
+          <a:xfrm>
+            <a:off x="868680" y="4443983"/>
+            <a:ext cx="1234440" cy="228600"/>
+          </a:xfrm>
+          <a:prstGeom prst="rect">
+            <a:avLst/>
+          </a:prstGeom>
+          <a:noFill/>
+        </p:spPr>
+        <p:txBody>
+          <a:bodyPr wrap="square" lIns="73152" rIns="73152" tIns="36576" bIns="36576">
+            <a:spAutoFit/>
+          </a:bodyPr>
+          <a:lstStyle/>
+          <a:p>
+            <a:pPr algn="l">
+              <a:spcAft>
+                <a:spcPts val="0"/>
+              </a:spcAft>
+              <a:defRPr sz="1500" b="1">
                 <a:solidFill>
                   <a:srgbClr val="2A8B5A"/>
                 </a:solidFill>
@@ -24755,38 +26553,38 @@
               </a:defRPr>
             </a:pPr>
             <a:r>
-              <a:t>확인</a:t>
-            </a:r>
-          </a:p>
-        </p:txBody>
-      </p:sp>
-      <p:sp>
-        <p:nvSpPr>
-          <p:cNvPr id="11" name="TextBox 10"/>
-          <p:cNvSpPr txBox="1"/>
-          <p:nvPr/>
-        </p:nvSpPr>
-        <p:spPr>
-          <a:xfrm>
-            <a:off x="768096" y="5742432"/>
-            <a:ext cx="10561320" cy="347472"/>
-          </a:xfrm>
-          <a:prstGeom prst="rect">
-            <a:avLst/>
-          </a:prstGeom>
-          <a:noFill/>
-        </p:spPr>
-        <p:txBody>
-          <a:bodyPr wrap="square" lIns="73152" rIns="73152" tIns="36576" bIns="36576">
-            <a:spAutoFit/>
-          </a:bodyPr>
-          <a:lstStyle/>
-          <a:p>
-            <a:pPr algn="l">
-              <a:spcAft>
-                <a:spcPts val="0"/>
-              </a:spcAft>
-              <a:defRPr sz="1800" b="0">
+              <a:t>만드는 것</a:t>
+            </a:r>
+          </a:p>
+        </p:txBody>
+      </p:sp>
+      <p:sp>
+        <p:nvSpPr>
+          <p:cNvPr id="18" name="TextBox 17"/>
+          <p:cNvSpPr txBox="1"/>
+          <p:nvPr/>
+        </p:nvSpPr>
+        <p:spPr>
+          <a:xfrm>
+            <a:off x="1975104" y="4425696"/>
+            <a:ext cx="9189720" cy="274320"/>
+          </a:xfrm>
+          <a:prstGeom prst="rect">
+            <a:avLst/>
+          </a:prstGeom>
+          <a:noFill/>
+        </p:spPr>
+        <p:txBody>
+          <a:bodyPr wrap="square" lIns="73152" rIns="73152" tIns="36576" bIns="36576">
+            <a:spAutoFit/>
+          </a:bodyPr>
+          <a:lstStyle/>
+          <a:p>
+            <a:pPr algn="l">
+              <a:spcAft>
+                <a:spcPts val="0"/>
+              </a:spcAft>
+              <a:defRPr sz="1500" b="0">
                 <a:solidFill>
                   <a:srgbClr val="122C4E"/>
                 </a:solidFill>
@@ -24794,7 +26592,167 @@
               </a:defRPr>
             </a:pPr>
             <a:r>
-              <a:t>명령의 출력에서 topic·frame·파일 이름 또는 성공 메시지를 찾으면 이 단계가 완료됩니다.</a:t>
+              <a:t>여러 ROS 2 node를 시작 순서대로 조립하는 launch 파일</a:t>
+            </a:r>
+          </a:p>
+        </p:txBody>
+      </p:sp>
+      <p:sp>
+        <p:nvSpPr>
+          <p:cNvPr id="19" name="TextBox 18"/>
+          <p:cNvSpPr txBox="1"/>
+          <p:nvPr/>
+        </p:nvSpPr>
+        <p:spPr>
+          <a:xfrm>
+            <a:off x="868680" y="4818888"/>
+            <a:ext cx="1234440" cy="228600"/>
+          </a:xfrm>
+          <a:prstGeom prst="rect">
+            <a:avLst/>
+          </a:prstGeom>
+          <a:noFill/>
+        </p:spPr>
+        <p:txBody>
+          <a:bodyPr wrap="square" lIns="73152" rIns="73152" tIns="36576" bIns="36576">
+            <a:spAutoFit/>
+          </a:bodyPr>
+          <a:lstStyle/>
+          <a:p>
+            <a:pPr algn="l">
+              <a:spcAft>
+                <a:spcPts val="0"/>
+              </a:spcAft>
+              <a:defRPr sz="1500" b="1">
+                <a:solidFill>
+                  <a:srgbClr val="DB7E22"/>
+                </a:solidFill>
+                <a:latin typeface="Noto Sans CJK KR"/>
+              </a:defRPr>
+            </a:pPr>
+            <a:r>
+              <a:t>코드 읽기</a:t>
+            </a:r>
+          </a:p>
+        </p:txBody>
+      </p:sp>
+      <p:sp>
+        <p:nvSpPr>
+          <p:cNvPr id="20" name="TextBox 19"/>
+          <p:cNvSpPr txBox="1"/>
+          <p:nvPr/>
+        </p:nvSpPr>
+        <p:spPr>
+          <a:xfrm>
+            <a:off x="1975104" y="4800600"/>
+            <a:ext cx="9189720" cy="301752"/>
+          </a:xfrm>
+          <a:prstGeom prst="rect">
+            <a:avLst/>
+          </a:prstGeom>
+          <a:noFill/>
+        </p:spPr>
+        <p:txBody>
+          <a:bodyPr wrap="square" lIns="73152" rIns="73152" tIns="36576" bIns="36576">
+            <a:spAutoFit/>
+          </a:bodyPr>
+          <a:lstStyle/>
+          <a:p>
+            <a:pPr algn="l">
+              <a:spcAft>
+                <a:spcPts val="0"/>
+              </a:spcAft>
+              <a:defRPr sz="1400" b="0">
+                <a:solidFill>
+                  <a:srgbClr val="122C4E"/>
+                </a:solidFill>
+                <a:latin typeface="Noto Sans CJK KR"/>
+              </a:defRPr>
+            </a:pPr>
+            <a:r>
+              <a:t>launch argument → Node → parameters/config 순서로 읽는다.</a:t>
+            </a:r>
+          </a:p>
+        </p:txBody>
+      </p:sp>
+      <p:sp>
+        <p:nvSpPr>
+          <p:cNvPr id="21" name="TextBox 20"/>
+          <p:cNvSpPr txBox="1"/>
+          <p:nvPr/>
+        </p:nvSpPr>
+        <p:spPr>
+          <a:xfrm>
+            <a:off x="868680" y="5202936"/>
+            <a:ext cx="1234440" cy="228600"/>
+          </a:xfrm>
+          <a:prstGeom prst="rect">
+            <a:avLst/>
+          </a:prstGeom>
+          <a:noFill/>
+        </p:spPr>
+        <p:txBody>
+          <a:bodyPr wrap="square" lIns="73152" rIns="73152" tIns="36576" bIns="36576">
+            <a:spAutoFit/>
+          </a:bodyPr>
+          <a:lstStyle/>
+          <a:p>
+            <a:pPr algn="l">
+              <a:spcAft>
+                <a:spcPts val="0"/>
+              </a:spcAft>
+              <a:defRPr sz="1500" b="1">
+                <a:solidFill>
+                  <a:srgbClr val="225B9B"/>
+                </a:solidFill>
+                <a:latin typeface="Noto Sans CJK KR"/>
+              </a:defRPr>
+            </a:pPr>
+            <a:r>
+              <a:t>사용/확인</a:t>
+            </a:r>
+          </a:p>
+        </p:txBody>
+      </p:sp>
+      <p:sp>
+        <p:nvSpPr>
+          <p:cNvPr id="22" name="TextBox 21"/>
+          <p:cNvSpPr txBox="1"/>
+          <p:nvPr/>
+        </p:nvSpPr>
+        <p:spPr>
+          <a:xfrm>
+            <a:off x="1975104" y="5184648"/>
+            <a:ext cx="9189720" cy="512064"/>
+          </a:xfrm>
+          <a:prstGeom prst="rect">
+            <a:avLst/>
+          </a:prstGeom>
+          <a:noFill/>
+        </p:spPr>
+        <p:txBody>
+          <a:bodyPr wrap="square" lIns="73152" rIns="73152" tIns="36576" bIns="36576">
+            <a:spAutoFit/>
+          </a:bodyPr>
+          <a:lstStyle/>
+          <a:p>
+            <a:pPr algn="l">
+              <a:spcAft>
+                <a:spcPts val="0"/>
+              </a:spcAft>
+              <a:defRPr sz="1300" b="0">
+                <a:solidFill>
+                  <a:srgbClr val="122C4E"/>
+                </a:solidFill>
+                <a:latin typeface="Noto Sans CJK KR"/>
+              </a:defRPr>
+            </a:pPr>
+            <a:r>
+              <a:t>사용: ros2 launch로 실행한다.</a:t>
+            </a:r>
+            <a:br/>
+            <a:r>
+              <a:t>화면/출력: terminal의 실행 node와 topic</a:t>
             </a:r>
           </a:p>
         </p:txBody>
@@ -24851,7 +26809,7 @@
               </a:defRPr>
             </a:pPr>
             <a:r>
-              <a:t>파일을 새로 만들고 저장한다 (1/2)</a:t>
+              <a:t>controller YAML을 작성한다</a:t>
             </a:r>
           </a:p>
         </p:txBody>
@@ -24890,7 +26848,7 @@
               </a:defRPr>
             </a:pPr>
             <a:r>
-              <a:t>~/ros2_curri/agv_ws/src/agv_control/config/controllers.yaml</a:t>
+              <a:t>한 장에는 한 행동만 수행합니다.</a:t>
             </a:r>
           </a:p>
         </p:txBody>
@@ -25026,7 +26984,7 @@
               </a:defRPr>
             </a:pPr>
             <a:r>
-              <a:t>현재 단계 3/5    |    현재 폴더 ~/ros2_curri/agv_ws    |    현재 터미널</a:t>
+              <a:t>현재 단계 1/2    |    현재 폴더 ~/ros2_curri/agv_ws    |    현재 터미널</a:t>
             </a:r>
           </a:p>
         </p:txBody>
@@ -25039,25 +26997,64 @@
         </p:nvSpPr>
         <p:spPr>
           <a:xfrm>
-            <a:off x="658368" y="1627632"/>
-            <a:ext cx="10972800" cy="256032"/>
-          </a:xfrm>
-          <a:prstGeom prst="rect">
-            <a:avLst/>
-          </a:prstGeom>
-          <a:noFill/>
-        </p:spPr>
-        <p:txBody>
-          <a:bodyPr wrap="square" lIns="73152" rIns="73152" tIns="36576" bIns="36576">
-            <a:spAutoFit/>
-          </a:bodyPr>
-          <a:lstStyle/>
-          <a:p>
-            <a:pPr algn="l">
-              <a:spcAft>
-                <a:spcPts val="0"/>
-              </a:spcAft>
-              <a:defRPr sz="1500" b="1">
+            <a:off x="676656" y="1764792"/>
+            <a:ext cx="1828800" cy="347472"/>
+          </a:xfrm>
+          <a:prstGeom prst="rect">
+            <a:avLst/>
+          </a:prstGeom>
+          <a:noFill/>
+        </p:spPr>
+        <p:txBody>
+          <a:bodyPr wrap="square" lIns="73152" rIns="73152" tIns="36576" bIns="36576">
+            <a:spAutoFit/>
+          </a:bodyPr>
+          <a:lstStyle/>
+          <a:p>
+            <a:pPr algn="l">
+              <a:spcAft>
+                <a:spcPts val="0"/>
+              </a:spcAft>
+              <a:defRPr sz="1800" b="1">
+                <a:solidFill>
+                  <a:srgbClr val="225B9B"/>
+                </a:solidFill>
+                <a:latin typeface="Noto Sans CJK KR"/>
+              </a:defRPr>
+            </a:pPr>
+            <a:r>
+              <a:t>왜 하는가</a:t>
+            </a:r>
+          </a:p>
+        </p:txBody>
+      </p:sp>
+      <p:sp>
+        <p:nvSpPr>
+          <p:cNvPr id="8" name="TextBox 7"/>
+          <p:cNvSpPr txBox="1"/>
+          <p:nvPr/>
+        </p:nvSpPr>
+        <p:spPr>
+          <a:xfrm>
+            <a:off x="676656" y="2103120"/>
+            <a:ext cx="10789920" cy="512064"/>
+          </a:xfrm>
+          <a:prstGeom prst="rect">
+            <a:avLst/>
+          </a:prstGeom>
+          <a:noFill/>
+        </p:spPr>
+        <p:txBody>
+          <a:bodyPr wrap="square" lIns="73152" rIns="73152" tIns="36576" bIns="36576">
+            <a:spAutoFit/>
+          </a:bodyPr>
+          <a:lstStyle/>
+          <a:p>
+            <a:pPr algn="l">
+              <a:spcAft>
+                <a:spcPts val="0"/>
+              </a:spcAft>
+              <a:defRPr sz="2000" b="0">
                 <a:solidFill>
                   <a:srgbClr val="122C4E"/>
                 </a:solidFill>
@@ -25065,85 +27062,23 @@
               </a:defRPr>
             </a:pPr>
             <a:r>
-              <a:t>이번 단계: 파일의 전체 내용을 중간 생략 없이 작성합니다. 아래 줄 범위를 끝까지 입력하세요.</a:t>
-            </a:r>
-          </a:p>
-        </p:txBody>
-      </p:sp>
-      <p:sp>
-        <p:nvSpPr>
-          <p:cNvPr id="8" name="Rectangle 7"/>
+              <a:t>controller type과 wheel parameter는 URDF/SDF joint 이름과 같아야 한다.</a:t>
+            </a:r>
+          </a:p>
+        </p:txBody>
+      </p:sp>
+      <p:sp>
+        <p:nvSpPr>
+          <p:cNvPr id="9" name="Rounded Rectangle 8"/>
           <p:cNvSpPr/>
           <p:nvPr/>
         </p:nvSpPr>
         <p:spPr>
           <a:xfrm>
-            <a:off x="658368" y="1956816"/>
-            <a:ext cx="10972800" cy="603504"/>
-          </a:xfrm>
-          <a:prstGeom prst="rect">
-            <a:avLst/>
-          </a:prstGeom>
-          <a:solidFill>
-            <a:srgbClr val="F4F7FB"/>
-          </a:solidFill>
-          <a:ln>
-            <a:solidFill>
-              <a:srgbClr val="F4F7FB"/>
-            </a:solidFill>
-          </a:ln>
-        </p:spPr>
-        <p:style>
-          <a:lnRef idx="1">
-            <a:schemeClr val="accent1"/>
-          </a:lnRef>
-          <a:fillRef idx="3">
-            <a:schemeClr val="accent1"/>
-          </a:fillRef>
-          <a:effectRef idx="2">
-            <a:schemeClr val="accent1"/>
-          </a:effectRef>
-          <a:fontRef idx="minor">
-            <a:schemeClr val="lt1"/>
-          </a:fontRef>
-        </p:style>
-        <p:txBody>
-          <a:bodyPr rtlCol="0" anchor="ctr" wrap="square" lIns="73152" rIns="73152" tIns="36576" bIns="36576"/>
-          <a:lstStyle/>
-          <a:p>
-            <a:pPr algn="l">
-              <a:spcAft>
-                <a:spcPts val="0"/>
-              </a:spcAft>
-              <a:defRPr sz="1400" b="0">
-                <a:solidFill>
-                  <a:srgbClr val="122C4E"/>
-                </a:solidFill>
-                <a:latin typeface="DejaVu Sans Mono"/>
-              </a:defRPr>
-            </a:pPr>
-            <a:r>
-              <a:t>파일 생성: mkdir -p ~/ros2_curri/agv_ws/src/agv_control/config</a:t>
-            </a:r>
-            <a:br/>
-            <a:r>
-              <a:t>파일 열기: nano ~/ros2_curri/agv_ws/src/agv_control/config/controllers.yaml</a:t>
-            </a:r>
-          </a:p>
-        </p:txBody>
-      </p:sp>
-      <p:sp>
-        <p:nvSpPr>
-          <p:cNvPr id="9" name="Rectangle 8"/>
-          <p:cNvSpPr/>
-          <p:nvPr/>
-        </p:nvSpPr>
-        <p:spPr>
-          <a:xfrm>
-            <a:off x="658368" y="2706624"/>
-            <a:ext cx="10972800" cy="3364992"/>
-          </a:xfrm>
-          <a:prstGeom prst="rect">
+            <a:off x="676656" y="2871216"/>
+            <a:ext cx="10835640" cy="2331720"/>
+          </a:xfrm>
+          <a:prstGeom prst="roundRect">
             <a:avLst/>
           </a:prstGeom>
           <a:solidFill>
@@ -25170,14 +27105,14 @@
           </a:fontRef>
         </p:style>
         <p:txBody>
-          <a:bodyPr rtlCol="0" anchor="ctr" wrap="square" lIns="164592" rIns="164592" tIns="109728" bIns="36576"/>
-          <a:lstStyle/>
-          <a:p>
-            <a:pPr algn="l">
-              <a:spcAft>
-                <a:spcPts val="0"/>
-              </a:spcAft>
-              <a:defRPr sz="1400" b="0">
+          <a:bodyPr rtlCol="0" anchor="ctr" wrap="square" lIns="73152" rIns="73152" tIns="36576" bIns="36576"/>
+          <a:lstStyle/>
+          <a:p>
+            <a:pPr algn="l">
+              <a:spcAft>
+                <a:spcPts val="0"/>
+              </a:spcAft>
+              <a:defRPr sz="1600" b="0">
                 <a:solidFill>
                   <a:srgbClr val="FFFFFF"/>
                 </a:solidFill>
@@ -25185,51 +27120,11 @@
               </a:defRPr>
             </a:pPr>
             <a:r>
-              <a:t>controller_manager:</a:t>
-            </a:r>
-            <a:br/>
-            <a:r>
-              <a:t>  ros__parameters:</a:t>
-            </a:r>
-            <a:br/>
-            <a:r>
-              <a:t>    update_rate: 50</a:t>
-            </a:r>
-            <a:br/>
-            <a:r>
-              <a:t>    joint_state_broadcaster:</a:t>
-            </a:r>
-            <a:br/>
-            <a:r>
-              <a:t>      type: joint_state_broadcaster/JointStateBroadcaster</a:t>
-            </a:r>
-            <a:br/>
-            <a:r>
-              <a:t>    diff_drive_controller:</a:t>
-            </a:r>
-            <a:br/>
-            <a:r>
-              <a:t>      type: diff_drive_controller/DiffDriveController</a:t>
-            </a:r>
-            <a:br/>
-            <a:r>
-              <a:t>diff_drive_controller:</a:t>
-            </a:r>
-            <a:br/>
-            <a:r>
-              <a:t>  ros__parameters:</a:t>
-            </a:r>
-            <a:br/>
-            <a:r>
-              <a:t>    left_wheel_names: [left_wheel_joint]</a:t>
-            </a:r>
-            <a:br/>
-            <a:r>
-              <a:t>    right_wheel_names: [right_wheel_joint]</a:t>
-            </a:r>
-            <a:br/>
-            <a:r>
-              <a:t>    wheel_separation: 0.38</a:t>
+              <a:t>nano ~/ros2_curri/agv_ws/src/agv_control/config/controllers.yaml</a:t>
+            </a:r>
+            <a:br/>
+            <a:r>
+              <a:t>ros2 pkg prefix gz_ros2_control</a:t>
             </a:r>
           </a:p>
         </p:txBody>
@@ -25242,33 +27137,72 @@
         </p:nvSpPr>
         <p:spPr>
           <a:xfrm>
-            <a:off x="749808" y="6181344"/>
-            <a:ext cx="10789920" cy="201168"/>
-          </a:xfrm>
-          <a:prstGeom prst="rect">
-            <a:avLst/>
-          </a:prstGeom>
-          <a:noFill/>
-        </p:spPr>
-        <p:txBody>
-          <a:bodyPr wrap="square" lIns="73152" rIns="73152" tIns="36576" bIns="36576">
-            <a:spAutoFit/>
-          </a:bodyPr>
-          <a:lstStyle/>
-          <a:p>
-            <a:pPr algn="l">
-              <a:spcAft>
-                <a:spcPts val="0"/>
-              </a:spcAft>
-              <a:defRPr sz="1000" b="0">
-                <a:solidFill>
-                  <a:srgbClr val="5C6672"/>
-                </a:solidFill>
-                <a:latin typeface="Noto Sans CJK KR"/>
-              </a:defRPr>
-            </a:pPr>
-            <a:r>
-              <a:t>파일 전체 1/2 · 이 슬라이드 다음에 같은 파일의 나머지 줄이 이어집니다.</a:t>
+            <a:off x="768096" y="5468112"/>
+            <a:ext cx="1143000" cy="256032"/>
+          </a:xfrm>
+          <a:prstGeom prst="rect">
+            <a:avLst/>
+          </a:prstGeom>
+          <a:noFill/>
+        </p:spPr>
+        <p:txBody>
+          <a:bodyPr wrap="square" lIns="73152" rIns="73152" tIns="36576" bIns="36576">
+            <a:spAutoFit/>
+          </a:bodyPr>
+          <a:lstStyle/>
+          <a:p>
+            <a:pPr algn="l">
+              <a:spcAft>
+                <a:spcPts val="0"/>
+              </a:spcAft>
+              <a:defRPr sz="1800" b="1">
+                <a:solidFill>
+                  <a:srgbClr val="2A8B5A"/>
+                </a:solidFill>
+                <a:latin typeface="Noto Sans CJK KR"/>
+              </a:defRPr>
+            </a:pPr>
+            <a:r>
+              <a:t>확인</a:t>
+            </a:r>
+          </a:p>
+        </p:txBody>
+      </p:sp>
+      <p:sp>
+        <p:nvSpPr>
+          <p:cNvPr id="11" name="TextBox 10"/>
+          <p:cNvSpPr txBox="1"/>
+          <p:nvPr/>
+        </p:nvSpPr>
+        <p:spPr>
+          <a:xfrm>
+            <a:off x="768096" y="5742432"/>
+            <a:ext cx="10561320" cy="347472"/>
+          </a:xfrm>
+          <a:prstGeom prst="rect">
+            <a:avLst/>
+          </a:prstGeom>
+          <a:noFill/>
+        </p:spPr>
+        <p:txBody>
+          <a:bodyPr wrap="square" lIns="73152" rIns="73152" tIns="36576" bIns="36576">
+            <a:spAutoFit/>
+          </a:bodyPr>
+          <a:lstStyle/>
+          <a:p>
+            <a:pPr algn="l">
+              <a:spcAft>
+                <a:spcPts val="0"/>
+              </a:spcAft>
+              <a:defRPr sz="1800" b="0">
+                <a:solidFill>
+                  <a:srgbClr val="122C4E"/>
+                </a:solidFill>
+                <a:latin typeface="Noto Sans CJK KR"/>
+              </a:defRPr>
+            </a:pPr>
+            <a:r>
+              <a:t>명령의 출력에서 topic·frame·파일 이름 또는 성공 메시지를 찾으면 이 단계가 완료됩니다.</a:t>
             </a:r>
           </a:p>
         </p:txBody>

--- a/blocks/E_autonomy_logic/M16_ros2_control/M16_ros2_control_gz_ros2_control.pptx
+++ b/blocks/E_autonomy_logic/M16_ros2_control/M16_ros2_control_gz_ros2_control.pptx
@@ -9012,7 +9012,7 @@
               <a:spcAft>
                 <a:spcPts val="0"/>
               </a:spcAft>
-              <a:defRPr sz="1800" b="1">
+              <a:defRPr sz="1400" b="1">
                 <a:solidFill>
                   <a:srgbClr val="FFFFFF"/>
                 </a:solidFill>
@@ -9020,7 +9020,7 @@
               </a:defRPr>
             </a:pPr>
             <a:r>
-              <a:t>M16 · Block E · ROS 2 + Gazebo Sim AGV</a:t>
+              <a:t>ROS 2 기반 AGV End-to-End 개발 커리큘럼 · M16 · Block E</a:t>
             </a:r>
           </a:p>
         </p:txBody>
@@ -9230,7 +9230,7 @@
               <a:spcAft>
                 <a:spcPts val="0"/>
               </a:spcAft>
-              <a:defRPr sz="1000" b="0">
+              <a:defRPr sz="900" b="0">
                 <a:solidFill>
                   <a:srgbClr val="5C6672"/>
                 </a:solidFill>
@@ -9238,7 +9238,7 @@
               </a:defRPr>
             </a:pPr>
             <a:r>
-              <a:t>ROS 2 Jazzy · Gazebo Harmonic · M16 · 따라 하기형 AGV 실습</a:t>
+              <a:t>ROS 2 기반 AGV End-to-End 개발 커리큘럼 · M16 · Block E</a:t>
             </a:r>
           </a:p>
         </p:txBody>
@@ -9404,7 +9404,7 @@
               <a:spcAft>
                 <a:spcPts val="0"/>
               </a:spcAft>
-              <a:defRPr sz="1000" b="0">
+              <a:defRPr sz="900" b="0">
                 <a:solidFill>
                   <a:srgbClr val="5C6672"/>
                 </a:solidFill>
@@ -9412,7 +9412,7 @@
               </a:defRPr>
             </a:pPr>
             <a:r>
-              <a:t>ROS 2 Jazzy · Gazebo Harmonic · M16 · 따라 하기형 AGV 실습</a:t>
+              <a:t>ROS 2 기반 AGV End-to-End 개발 커리큘럼 · M16 · Block E</a:t>
             </a:r>
           </a:p>
         </p:txBody>
@@ -10280,7 +10280,7 @@
               <a:spcAft>
                 <a:spcPts val="0"/>
               </a:spcAft>
-              <a:defRPr sz="1000" b="0">
+              <a:defRPr sz="900" b="0">
                 <a:solidFill>
                   <a:srgbClr val="5C6672"/>
                 </a:solidFill>
@@ -10288,7 +10288,7 @@
               </a:defRPr>
             </a:pPr>
             <a:r>
-              <a:t>ROS 2 Jazzy · Gazebo Harmonic · M16 · 따라 하기형 AGV 실습</a:t>
+              <a:t>ROS 2 기반 AGV End-to-End 개발 커리큘럼 · M16 · Block E</a:t>
             </a:r>
           </a:p>
         </p:txBody>
@@ -10808,7 +10808,7 @@
               <a:spcAft>
                 <a:spcPts val="0"/>
               </a:spcAft>
-              <a:defRPr sz="1000" b="0">
+              <a:defRPr sz="900" b="0">
                 <a:solidFill>
                   <a:srgbClr val="5C6672"/>
                 </a:solidFill>
@@ -10816,7 +10816,7 @@
               </a:defRPr>
             </a:pPr>
             <a:r>
-              <a:t>ROS 2 Jazzy · Gazebo Harmonic · M16 · 따라 하기형 AGV 실습</a:t>
+              <a:t>ROS 2 기반 AGV End-to-End 개발 커리큘럼 · M16 · Block E</a:t>
             </a:r>
           </a:p>
         </p:txBody>
@@ -11597,7 +11597,7 @@
               <a:spcAft>
                 <a:spcPts val="0"/>
               </a:spcAft>
-              <a:defRPr sz="1000" b="0">
+              <a:defRPr sz="900" b="0">
                 <a:solidFill>
                   <a:srgbClr val="5C6672"/>
                 </a:solidFill>
@@ -11605,7 +11605,7 @@
               </a:defRPr>
             </a:pPr>
             <a:r>
-              <a:t>ROS 2 Jazzy · Gazebo Harmonic · M16 · 따라 하기형 AGV 실습</a:t>
+              <a:t>ROS 2 기반 AGV End-to-End 개발 커리큘럼 · M16 · Block E</a:t>
             </a:r>
           </a:p>
         </p:txBody>
@@ -12166,7 +12166,7 @@
               <a:spcAft>
                 <a:spcPts val="0"/>
               </a:spcAft>
-              <a:defRPr sz="1000" b="0">
+              <a:defRPr sz="900" b="0">
                 <a:solidFill>
                   <a:srgbClr val="5C6672"/>
                 </a:solidFill>
@@ -12174,7 +12174,7 @@
               </a:defRPr>
             </a:pPr>
             <a:r>
-              <a:t>ROS 2 Jazzy · Gazebo Harmonic · M16 · 따라 하기형 AGV 실습</a:t>
+              <a:t>ROS 2 기반 AGV End-to-End 개발 커리큘럼 · M16 · Block E</a:t>
             </a:r>
           </a:p>
         </p:txBody>
@@ -12640,7 +12640,7 @@
               <a:spcAft>
                 <a:spcPts val="0"/>
               </a:spcAft>
-              <a:defRPr sz="1000" b="0">
+              <a:defRPr sz="900" b="0">
                 <a:solidFill>
                   <a:srgbClr val="5C6672"/>
                 </a:solidFill>
@@ -12648,7 +12648,7 @@
               </a:defRPr>
             </a:pPr>
             <a:r>
-              <a:t>ROS 2 Jazzy · Gazebo Harmonic · M16 · 따라 하기형 AGV 실습</a:t>
+              <a:t>ROS 2 기반 AGV End-to-End 개발 커리큘럼 · M16 · Block E</a:t>
             </a:r>
           </a:p>
         </p:txBody>
@@ -13082,7 +13082,7 @@
               <a:spcAft>
                 <a:spcPts val="0"/>
               </a:spcAft>
-              <a:defRPr sz="1000" b="0">
+              <a:defRPr sz="900" b="0">
                 <a:solidFill>
                   <a:srgbClr val="5C6672"/>
                 </a:solidFill>
@@ -13090,7 +13090,7 @@
               </a:defRPr>
             </a:pPr>
             <a:r>
-              <a:t>ROS 2 Jazzy · Gazebo Harmonic · M16 · 따라 하기형 AGV 실습</a:t>
+              <a:t>ROS 2 기반 AGV End-to-End 개발 커리큘럼 · M16 · Block E</a:t>
             </a:r>
           </a:p>
         </p:txBody>
@@ -13610,7 +13610,7 @@
               <a:spcAft>
                 <a:spcPts val="0"/>
               </a:spcAft>
-              <a:defRPr sz="1000" b="0">
+              <a:defRPr sz="900" b="0">
                 <a:solidFill>
                   <a:srgbClr val="5C6672"/>
                 </a:solidFill>
@@ -13618,7 +13618,7 @@
               </a:defRPr>
             </a:pPr>
             <a:r>
-              <a:t>ROS 2 Jazzy · Gazebo Harmonic · M16 · 따라 하기형 AGV 실습</a:t>
+              <a:t>ROS 2 기반 AGV End-to-End 개발 커리큘럼 · M16 · Block E</a:t>
             </a:r>
           </a:p>
         </p:txBody>
@@ -14403,7 +14403,7 @@
               <a:spcAft>
                 <a:spcPts val="0"/>
               </a:spcAft>
-              <a:defRPr sz="1000" b="0">
+              <a:defRPr sz="900" b="0">
                 <a:solidFill>
                   <a:srgbClr val="5C6672"/>
                 </a:solidFill>
@@ -14411,7 +14411,7 @@
               </a:defRPr>
             </a:pPr>
             <a:r>
-              <a:t>ROS 2 Jazzy · Gazebo Harmonic · M16 · 따라 하기형 AGV 실습</a:t>
+              <a:t>ROS 2 기반 AGV End-to-End 개발 커리큘럼 · M16 · Block E</a:t>
             </a:r>
           </a:p>
         </p:txBody>
@@ -15192,7 +15192,7 @@
               <a:spcAft>
                 <a:spcPts val="0"/>
               </a:spcAft>
-              <a:defRPr sz="1000" b="0">
+              <a:defRPr sz="900" b="0">
                 <a:solidFill>
                   <a:srgbClr val="5C6672"/>
                 </a:solidFill>
@@ -15200,7 +15200,7 @@
               </a:defRPr>
             </a:pPr>
             <a:r>
-              <a:t>ROS 2 Jazzy · Gazebo Harmonic · M16 · 따라 하기형 AGV 실습</a:t>
+              <a:t>ROS 2 기반 AGV End-to-End 개발 커리큘럼 · M16 · Block E</a:t>
             </a:r>
           </a:p>
         </p:txBody>
@@ -15666,7 +15666,7 @@
               <a:spcAft>
                 <a:spcPts val="0"/>
               </a:spcAft>
-              <a:defRPr sz="1000" b="0">
+              <a:defRPr sz="900" b="0">
                 <a:solidFill>
                   <a:srgbClr val="5C6672"/>
                 </a:solidFill>
@@ -15674,7 +15674,7 @@
               </a:defRPr>
             </a:pPr>
             <a:r>
-              <a:t>ROS 2 Jazzy · Gazebo Harmonic · M16 · 따라 하기형 AGV 실습</a:t>
+              <a:t>ROS 2 기반 AGV End-to-End 개발 커리큘럼 · M16 · Block E</a:t>
             </a:r>
           </a:p>
         </p:txBody>
@@ -16127,7 +16127,7 @@
               <a:spcAft>
                 <a:spcPts val="0"/>
               </a:spcAft>
-              <a:defRPr sz="1000" b="0">
+              <a:defRPr sz="900" b="0">
                 <a:solidFill>
                   <a:srgbClr val="5C6672"/>
                 </a:solidFill>
@@ -16135,7 +16135,7 @@
               </a:defRPr>
             </a:pPr>
             <a:r>
-              <a:t>ROS 2 Jazzy · Gazebo Harmonic · M16 · 따라 하기형 AGV 실습</a:t>
+              <a:t>ROS 2 기반 AGV End-to-End 개발 커리큘럼 · M16 · Block E</a:t>
             </a:r>
           </a:p>
         </p:txBody>
@@ -16601,7 +16601,7 @@
               <a:spcAft>
                 <a:spcPts val="0"/>
               </a:spcAft>
-              <a:defRPr sz="1000" b="0">
+              <a:defRPr sz="900" b="0">
                 <a:solidFill>
                   <a:srgbClr val="5C6672"/>
                 </a:solidFill>
@@ -16609,7 +16609,7 @@
               </a:defRPr>
             </a:pPr>
             <a:r>
-              <a:t>ROS 2 Jazzy · Gazebo Harmonic · M16 · 따라 하기형 AGV 실습</a:t>
+              <a:t>ROS 2 기반 AGV End-to-End 개발 커리큘럼 · M16 · Block E</a:t>
             </a:r>
           </a:p>
         </p:txBody>
@@ -17075,7 +17075,7 @@
               <a:spcAft>
                 <a:spcPts val="0"/>
               </a:spcAft>
-              <a:defRPr sz="1000" b="0">
+              <a:defRPr sz="900" b="0">
                 <a:solidFill>
                   <a:srgbClr val="5C6672"/>
                 </a:solidFill>
@@ -17083,7 +17083,7 @@
               </a:defRPr>
             </a:pPr>
             <a:r>
-              <a:t>ROS 2 Jazzy · Gazebo Harmonic · M16 · 따라 하기형 AGV 실습</a:t>
+              <a:t>ROS 2 기반 AGV End-to-End 개발 커리큘럼 · M16 · Block E</a:t>
             </a:r>
           </a:p>
         </p:txBody>
@@ -17549,7 +17549,7 @@
               <a:spcAft>
                 <a:spcPts val="0"/>
               </a:spcAft>
-              <a:defRPr sz="1000" b="0">
+              <a:defRPr sz="900" b="0">
                 <a:solidFill>
                   <a:srgbClr val="5C6672"/>
                 </a:solidFill>
@@ -17557,7 +17557,7 @@
               </a:defRPr>
             </a:pPr>
             <a:r>
-              <a:t>ROS 2 Jazzy · Gazebo Harmonic · M16 · 따라 하기형 AGV 실습</a:t>
+              <a:t>ROS 2 기반 AGV End-to-End 개발 커리큘럼 · M16 · Block E</a:t>
             </a:r>
           </a:p>
         </p:txBody>
@@ -17984,7 +17984,7 @@
               <a:spcAft>
                 <a:spcPts val="0"/>
               </a:spcAft>
-              <a:defRPr sz="1000" b="0">
+              <a:defRPr sz="900" b="0">
                 <a:solidFill>
                   <a:srgbClr val="5C6672"/>
                 </a:solidFill>
@@ -17992,7 +17992,7 @@
               </a:defRPr>
             </a:pPr>
             <a:r>
-              <a:t>ROS 2 Jazzy · Gazebo Harmonic · M16 · 따라 하기형 AGV 실습</a:t>
+              <a:t>ROS 2 기반 AGV End-to-End 개발 커리큘럼 · M16 · Block E</a:t>
             </a:r>
           </a:p>
         </p:txBody>
@@ -18512,7 +18512,7 @@
               <a:spcAft>
                 <a:spcPts val="0"/>
               </a:spcAft>
-              <a:defRPr sz="1000" b="0">
+              <a:defRPr sz="900" b="0">
                 <a:solidFill>
                   <a:srgbClr val="5C6672"/>
                 </a:solidFill>
@@ -18520,7 +18520,7 @@
               </a:defRPr>
             </a:pPr>
             <a:r>
-              <a:t>ROS 2 Jazzy · Gazebo Harmonic · M16 · 따라 하기형 AGV 실습</a:t>
+              <a:t>ROS 2 기반 AGV End-to-End 개발 커리큘럼 · M16 · Block E</a:t>
             </a:r>
           </a:p>
         </p:txBody>
@@ -19301,7 +19301,7 @@
               <a:spcAft>
                 <a:spcPts val="0"/>
               </a:spcAft>
-              <a:defRPr sz="1000" b="0">
+              <a:defRPr sz="900" b="0">
                 <a:solidFill>
                   <a:srgbClr val="5C6672"/>
                 </a:solidFill>
@@ -19309,7 +19309,7 @@
               </a:defRPr>
             </a:pPr>
             <a:r>
-              <a:t>ROS 2 Jazzy · Gazebo Harmonic · M16 · 따라 하기형 AGV 실습</a:t>
+              <a:t>ROS 2 기반 AGV End-to-End 개발 커리큘럼 · M16 · Block E</a:t>
             </a:r>
           </a:p>
         </p:txBody>
@@ -20090,7 +20090,7 @@
               <a:spcAft>
                 <a:spcPts val="0"/>
               </a:spcAft>
-              <a:defRPr sz="1000" b="0">
+              <a:defRPr sz="900" b="0">
                 <a:solidFill>
                   <a:srgbClr val="5C6672"/>
                 </a:solidFill>
@@ -20098,7 +20098,7 @@
               </a:defRPr>
             </a:pPr>
             <a:r>
-              <a:t>ROS 2 Jazzy · Gazebo Harmonic · M16 · 따라 하기형 AGV 실습</a:t>
+              <a:t>ROS 2 기반 AGV End-to-End 개발 커리큘럼 · M16 · Block E</a:t>
             </a:r>
           </a:p>
         </p:txBody>
@@ -20879,7 +20879,7 @@
               <a:spcAft>
                 <a:spcPts val="0"/>
               </a:spcAft>
-              <a:defRPr sz="1000" b="0">
+              <a:defRPr sz="900" b="0">
                 <a:solidFill>
                   <a:srgbClr val="5C6672"/>
                 </a:solidFill>
@@ -20887,7 +20887,7 @@
               </a:defRPr>
             </a:pPr>
             <a:r>
-              <a:t>ROS 2 Jazzy · Gazebo Harmonic · M16 · 따라 하기형 AGV 실습</a:t>
+              <a:t>ROS 2 기반 AGV End-to-End 개발 커리큘럼 · M16 · Block E</a:t>
             </a:r>
           </a:p>
         </p:txBody>
@@ -21448,7 +21448,7 @@
               <a:spcAft>
                 <a:spcPts val="0"/>
               </a:spcAft>
-              <a:defRPr sz="1000" b="0">
+              <a:defRPr sz="900" b="0">
                 <a:solidFill>
                   <a:srgbClr val="5C6672"/>
                 </a:solidFill>
@@ -21456,7 +21456,7 @@
               </a:defRPr>
             </a:pPr>
             <a:r>
-              <a:t>ROS 2 Jazzy · Gazebo Harmonic · M16 · 따라 하기형 AGV 실습</a:t>
+              <a:t>ROS 2 기반 AGV End-to-End 개발 커리큘럼 · M16 · Block E</a:t>
             </a:r>
           </a:p>
         </p:txBody>
@@ -21922,7 +21922,7 @@
               <a:spcAft>
                 <a:spcPts val="0"/>
               </a:spcAft>
-              <a:defRPr sz="1000" b="0">
+              <a:defRPr sz="900" b="0">
                 <a:solidFill>
                   <a:srgbClr val="5C6672"/>
                 </a:solidFill>
@@ -21930,7 +21930,7 @@
               </a:defRPr>
             </a:pPr>
             <a:r>
-              <a:t>ROS 2 Jazzy · Gazebo Harmonic · M16 · 따라 하기형 AGV 실습</a:t>
+              <a:t>ROS 2 기반 AGV End-to-End 개발 커리큘럼 · M16 · Block E</a:t>
             </a:r>
           </a:p>
         </p:txBody>
@@ -22341,7 +22341,7 @@
               <a:spcAft>
                 <a:spcPts val="0"/>
               </a:spcAft>
-              <a:defRPr sz="1000" b="0">
+              <a:defRPr sz="900" b="0">
                 <a:solidFill>
                   <a:srgbClr val="5C6672"/>
                 </a:solidFill>
@@ -22349,7 +22349,7 @@
               </a:defRPr>
             </a:pPr>
             <a:r>
-              <a:t>ROS 2 Jazzy · Gazebo Harmonic · M16 · 따라 하기형 AGV 실습</a:t>
+              <a:t>ROS 2 기반 AGV End-to-End 개발 커리큘럼 · M16 · Block E</a:t>
             </a:r>
           </a:p>
         </p:txBody>
@@ -22815,7 +22815,7 @@
               <a:spcAft>
                 <a:spcPts val="0"/>
               </a:spcAft>
-              <a:defRPr sz="1000" b="0">
+              <a:defRPr sz="900" b="0">
                 <a:solidFill>
                   <a:srgbClr val="5C6672"/>
                 </a:solidFill>
@@ -22823,7 +22823,7 @@
               </a:defRPr>
             </a:pPr>
             <a:r>
-              <a:t>ROS 2 Jazzy · Gazebo Harmonic · M16 · 따라 하기형 AGV 실습</a:t>
+              <a:t>ROS 2 기반 AGV End-to-End 개발 커리큘럼 · M16 · Block E</a:t>
             </a:r>
           </a:p>
         </p:txBody>
@@ -23289,7 +23289,7 @@
               <a:spcAft>
                 <a:spcPts val="0"/>
               </a:spcAft>
-              <a:defRPr sz="1000" b="0">
+              <a:defRPr sz="900" b="0">
                 <a:solidFill>
                   <a:srgbClr val="5C6672"/>
                 </a:solidFill>
@@ -23297,7 +23297,7 @@
               </a:defRPr>
             </a:pPr>
             <a:r>
-              <a:t>ROS 2 Jazzy · Gazebo Harmonic · M16 · 따라 하기형 AGV 실습</a:t>
+              <a:t>ROS 2 기반 AGV End-to-End 개발 커리큘럼 · M16 · Block E</a:t>
             </a:r>
           </a:p>
         </p:txBody>
@@ -23763,7 +23763,7 @@
               <a:spcAft>
                 <a:spcPts val="0"/>
               </a:spcAft>
-              <a:defRPr sz="1000" b="0">
+              <a:defRPr sz="900" b="0">
                 <a:solidFill>
                   <a:srgbClr val="5C6672"/>
                 </a:solidFill>
@@ -23771,7 +23771,7 @@
               </a:defRPr>
             </a:pPr>
             <a:r>
-              <a:t>ROS 2 Jazzy · Gazebo Harmonic · M16 · 따라 하기형 AGV 실습</a:t>
+              <a:t>ROS 2 기반 AGV End-to-End 개발 커리큘럼 · M16 · Block E</a:t>
             </a:r>
           </a:p>
         </p:txBody>
@@ -24237,7 +24237,7 @@
               <a:spcAft>
                 <a:spcPts val="0"/>
               </a:spcAft>
-              <a:defRPr sz="1000" b="0">
+              <a:defRPr sz="900" b="0">
                 <a:solidFill>
                   <a:srgbClr val="5C6672"/>
                 </a:solidFill>
@@ -24245,7 +24245,7 @@
               </a:defRPr>
             </a:pPr>
             <a:r>
-              <a:t>ROS 2 Jazzy · Gazebo Harmonic · M16 · 따라 하기형 AGV 실습</a:t>
+              <a:t>ROS 2 기반 AGV End-to-End 개발 커리큘럼 · M16 · Block E</a:t>
             </a:r>
           </a:p>
         </p:txBody>
@@ -24711,7 +24711,7 @@
               <a:spcAft>
                 <a:spcPts val="0"/>
               </a:spcAft>
-              <a:defRPr sz="1000" b="0">
+              <a:defRPr sz="900" b="0">
                 <a:solidFill>
                   <a:srgbClr val="5C6672"/>
                 </a:solidFill>
@@ -24719,7 +24719,7 @@
               </a:defRPr>
             </a:pPr>
             <a:r>
-              <a:t>ROS 2 Jazzy · Gazebo Harmonic · M16 · 따라 하기형 AGV 실습</a:t>
+              <a:t>ROS 2 기반 AGV End-to-End 개발 커리큘럼 · M16 · Block E</a:t>
             </a:r>
           </a:p>
         </p:txBody>
@@ -25185,7 +25185,7 @@
               <a:spcAft>
                 <a:spcPts val="0"/>
               </a:spcAft>
-              <a:defRPr sz="1000" b="0">
+              <a:defRPr sz="900" b="0">
                 <a:solidFill>
                   <a:srgbClr val="5C6672"/>
                 </a:solidFill>
@@ -25193,7 +25193,7 @@
               </a:defRPr>
             </a:pPr>
             <a:r>
-              <a:t>ROS 2 Jazzy · Gazebo Harmonic · M16 · 따라 하기형 AGV 실습</a:t>
+              <a:t>ROS 2 기반 AGV End-to-End 개발 커리큘럼 · M16 · Block E</a:t>
             </a:r>
           </a:p>
         </p:txBody>
@@ -25659,7 +25659,7 @@
               <a:spcAft>
                 <a:spcPts val="0"/>
               </a:spcAft>
-              <a:defRPr sz="1000" b="0">
+              <a:defRPr sz="900" b="0">
                 <a:solidFill>
                   <a:srgbClr val="5C6672"/>
                 </a:solidFill>
@@ -25667,7 +25667,7 @@
               </a:defRPr>
             </a:pPr>
             <a:r>
-              <a:t>ROS 2 Jazzy · Gazebo Harmonic · M16 · 따라 하기형 AGV 실습</a:t>
+              <a:t>ROS 2 기반 AGV End-to-End 개발 커리큘럼 · M16 · Block E</a:t>
             </a:r>
           </a:p>
         </p:txBody>
@@ -26133,7 +26133,7 @@
               <a:spcAft>
                 <a:spcPts val="0"/>
               </a:spcAft>
-              <a:defRPr sz="1000" b="0">
+              <a:defRPr sz="900" b="0">
                 <a:solidFill>
                   <a:srgbClr val="5C6672"/>
                 </a:solidFill>
@@ -26141,7 +26141,7 @@
               </a:defRPr>
             </a:pPr>
             <a:r>
-              <a:t>ROS 2 Jazzy · Gazebo Harmonic · M16 · 따라 하기형 AGV 실습</a:t>
+              <a:t>ROS 2 기반 AGV End-to-End 개발 커리큘럼 · M16 · Block E</a:t>
             </a:r>
           </a:p>
         </p:txBody>
@@ -26607,7 +26607,7 @@
               <a:spcAft>
                 <a:spcPts val="0"/>
               </a:spcAft>
-              <a:defRPr sz="1000" b="0">
+              <a:defRPr sz="900" b="0">
                 <a:solidFill>
                   <a:srgbClr val="5C6672"/>
                 </a:solidFill>
@@ -26615,7 +26615,7 @@
               </a:defRPr>
             </a:pPr>
             <a:r>
-              <a:t>ROS 2 Jazzy · Gazebo Harmonic · M16 · 따라 하기형 AGV 실습</a:t>
+              <a:t>ROS 2 기반 AGV End-to-End 개발 커리큘럼 · M16 · Block E</a:t>
             </a:r>
           </a:p>
         </p:txBody>
@@ -27081,7 +27081,7 @@
               <a:spcAft>
                 <a:spcPts val="0"/>
               </a:spcAft>
-              <a:defRPr sz="1000" b="0">
+              <a:defRPr sz="900" b="0">
                 <a:solidFill>
                   <a:srgbClr val="5C6672"/>
                 </a:solidFill>
@@ -27089,7 +27089,7 @@
               </a:defRPr>
             </a:pPr>
             <a:r>
-              <a:t>ROS 2 Jazzy · Gazebo Harmonic · M16 · 따라 하기형 AGV 실습</a:t>
+              <a:t>ROS 2 기반 AGV End-to-End 개발 커리큘럼 · M16 · Block E</a:t>
             </a:r>
           </a:p>
         </p:txBody>
@@ -27414,7 +27414,7 @@
               <a:spcAft>
                 <a:spcPts val="0"/>
               </a:spcAft>
-              <a:defRPr sz="1000" b="0">
+              <a:defRPr sz="900" b="0">
                 <a:solidFill>
                   <a:srgbClr val="5C6672"/>
                 </a:solidFill>
@@ -27422,7 +27422,7 @@
               </a:defRPr>
             </a:pPr>
             <a:r>
-              <a:t>ROS 2 Jazzy · Gazebo Harmonic · M16 · 따라 하기형 AGV 실습</a:t>
+              <a:t>ROS 2 기반 AGV End-to-End 개발 커리큘럼 · M16 · Block E</a:t>
             </a:r>
           </a:p>
         </p:txBody>
@@ -27888,7 +27888,7 @@
               <a:spcAft>
                 <a:spcPts val="0"/>
               </a:spcAft>
-              <a:defRPr sz="1000" b="0">
+              <a:defRPr sz="900" b="0">
                 <a:solidFill>
                   <a:srgbClr val="5C6672"/>
                 </a:solidFill>
@@ -27896,7 +27896,7 @@
               </a:defRPr>
             </a:pPr>
             <a:r>
-              <a:t>ROS 2 Jazzy · Gazebo Harmonic · M16 · 따라 하기형 AGV 실습</a:t>
+              <a:t>ROS 2 기반 AGV End-to-End 개발 커리큘럼 · M16 · Block E</a:t>
             </a:r>
           </a:p>
         </p:txBody>
@@ -28362,7 +28362,7 @@
               <a:spcAft>
                 <a:spcPts val="0"/>
               </a:spcAft>
-              <a:defRPr sz="1000" b="0">
+              <a:defRPr sz="900" b="0">
                 <a:solidFill>
                   <a:srgbClr val="5C6672"/>
                 </a:solidFill>
@@ -28370,7 +28370,7 @@
               </a:defRPr>
             </a:pPr>
             <a:r>
-              <a:t>ROS 2 Jazzy · Gazebo Harmonic · M16 · 따라 하기형 AGV 실습</a:t>
+              <a:t>ROS 2 기반 AGV End-to-End 개발 커리큘럼 · M16 · Block E</a:t>
             </a:r>
           </a:p>
         </p:txBody>
@@ -28836,7 +28836,7 @@
               <a:spcAft>
                 <a:spcPts val="0"/>
               </a:spcAft>
-              <a:defRPr sz="1000" b="0">
+              <a:defRPr sz="900" b="0">
                 <a:solidFill>
                   <a:srgbClr val="5C6672"/>
                 </a:solidFill>
@@ -28844,7 +28844,7 @@
               </a:defRPr>
             </a:pPr>
             <a:r>
-              <a:t>ROS 2 Jazzy · Gazebo Harmonic · M16 · 따라 하기형 AGV 실습</a:t>
+              <a:t>ROS 2 기반 AGV End-to-End 개발 커리큘럼 · M16 · Block E</a:t>
             </a:r>
           </a:p>
         </p:txBody>
@@ -29291,7 +29291,7 @@
               <a:spcAft>
                 <a:spcPts val="0"/>
               </a:spcAft>
-              <a:defRPr sz="1000" b="0">
+              <a:defRPr sz="900" b="0">
                 <a:solidFill>
                   <a:srgbClr val="5C6672"/>
                 </a:solidFill>
@@ -29299,7 +29299,7 @@
               </a:defRPr>
             </a:pPr>
             <a:r>
-              <a:t>ROS 2 Jazzy · Gazebo Harmonic · M16 · 따라 하기형 AGV 실습</a:t>
+              <a:t>ROS 2 기반 AGV End-to-End 개발 커리큘럼 · M16 · Block E</a:t>
             </a:r>
           </a:p>
         </p:txBody>
@@ -29819,7 +29819,7 @@
               <a:spcAft>
                 <a:spcPts val="0"/>
               </a:spcAft>
-              <a:defRPr sz="1000" b="0">
+              <a:defRPr sz="900" b="0">
                 <a:solidFill>
                   <a:srgbClr val="5C6672"/>
                 </a:solidFill>
@@ -29827,7 +29827,7 @@
               </a:defRPr>
             </a:pPr>
             <a:r>
-              <a:t>ROS 2 Jazzy · Gazebo Harmonic · M16 · 따라 하기형 AGV 실습</a:t>
+              <a:t>ROS 2 기반 AGV End-to-End 개발 커리큘럼 · M16 · Block E</a:t>
             </a:r>
           </a:p>
         </p:txBody>
@@ -30608,7 +30608,7 @@
               <a:spcAft>
                 <a:spcPts val="0"/>
               </a:spcAft>
-              <a:defRPr sz="1000" b="0">
+              <a:defRPr sz="900" b="0">
                 <a:solidFill>
                   <a:srgbClr val="5C6672"/>
                 </a:solidFill>
@@ -30616,7 +30616,7 @@
               </a:defRPr>
             </a:pPr>
             <a:r>
-              <a:t>ROS 2 Jazzy · Gazebo Harmonic · M16 · 따라 하기형 AGV 실습</a:t>
+              <a:t>ROS 2 기반 AGV End-to-End 개발 커리큘럼 · M16 · Block E</a:t>
             </a:r>
           </a:p>
         </p:txBody>
@@ -31409,7 +31409,7 @@
               <a:spcAft>
                 <a:spcPts val="0"/>
               </a:spcAft>
-              <a:defRPr sz="1000" b="0">
+              <a:defRPr sz="900" b="0">
                 <a:solidFill>
                   <a:srgbClr val="5C6672"/>
                 </a:solidFill>
@@ -31417,7 +31417,7 @@
               </a:defRPr>
             </a:pPr>
             <a:r>
-              <a:t>ROS 2 Jazzy · Gazebo Harmonic · M16 · 따라 하기형 AGV 실습</a:t>
+              <a:t>ROS 2 기반 AGV End-to-End 개발 커리큘럼 · M16 · Block E</a:t>
             </a:r>
           </a:p>
         </p:txBody>
@@ -31982,7 +31982,7 @@
               <a:spcAft>
                 <a:spcPts val="0"/>
               </a:spcAft>
-              <a:defRPr sz="1000" b="0">
+              <a:defRPr sz="900" b="0">
                 <a:solidFill>
                   <a:srgbClr val="5C6672"/>
                 </a:solidFill>
@@ -31990,7 +31990,7 @@
               </a:defRPr>
             </a:pPr>
             <a:r>
-              <a:t>ROS 2 Jazzy · Gazebo Harmonic · M16 · 따라 하기형 AGV 실습</a:t>
+              <a:t>ROS 2 기반 AGV End-to-End 개발 커리큘럼 · M16 · Block E</a:t>
             </a:r>
           </a:p>
         </p:txBody>
@@ -32453,7 +32453,7 @@
               <a:spcAft>
                 <a:spcPts val="0"/>
               </a:spcAft>
-              <a:defRPr sz="1000" b="0">
+              <a:defRPr sz="900" b="0">
                 <a:solidFill>
                   <a:srgbClr val="5C6672"/>
                 </a:solidFill>
@@ -32461,7 +32461,7 @@
               </a:defRPr>
             </a:pPr>
             <a:r>
-              <a:t>ROS 2 Jazzy · Gazebo Harmonic · M16 · 따라 하기형 AGV 실습</a:t>
+              <a:t>ROS 2 기반 AGV End-to-End 개발 커리큘럼 · M16 · Block E</a:t>
             </a:r>
           </a:p>
         </p:txBody>
@@ -32927,7 +32927,7 @@
               <a:spcAft>
                 <a:spcPts val="0"/>
               </a:spcAft>
-              <a:defRPr sz="1000" b="0">
+              <a:defRPr sz="900" b="0">
                 <a:solidFill>
                   <a:srgbClr val="5C6672"/>
                 </a:solidFill>
@@ -32935,7 +32935,7 @@
               </a:defRPr>
             </a:pPr>
             <a:r>
-              <a:t>ROS 2 Jazzy · Gazebo Harmonic · M16 · 따라 하기형 AGV 실습</a:t>
+              <a:t>ROS 2 기반 AGV End-to-End 개발 커리큘럼 · M16 · Block E</a:t>
             </a:r>
           </a:p>
         </p:txBody>
@@ -33567,7 +33567,7 @@
               <a:spcAft>
                 <a:spcPts val="0"/>
               </a:spcAft>
-              <a:defRPr sz="1000" b="0">
+              <a:defRPr sz="900" b="0">
                 <a:solidFill>
                   <a:srgbClr val="5C6672"/>
                 </a:solidFill>
@@ -33575,7 +33575,7 @@
               </a:defRPr>
             </a:pPr>
             <a:r>
-              <a:t>ROS 2 Jazzy · Gazebo Harmonic · M16 · 따라 하기형 AGV 실습</a:t>
+              <a:t>ROS 2 기반 AGV End-to-End 개발 커리큘럼 · M16 · Block E</a:t>
             </a:r>
           </a:p>
         </p:txBody>
@@ -34033,7 +34033,7 @@
               <a:spcAft>
                 <a:spcPts val="0"/>
               </a:spcAft>
-              <a:defRPr sz="1000" b="0">
+              <a:defRPr sz="900" b="0">
                 <a:solidFill>
                   <a:srgbClr val="5C6672"/>
                 </a:solidFill>
@@ -34041,7 +34041,7 @@
               </a:defRPr>
             </a:pPr>
             <a:r>
-              <a:t>ROS 2 Jazzy · Gazebo Harmonic · M16 · 따라 하기형 AGV 실습</a:t>
+              <a:t>ROS 2 기반 AGV End-to-End 개발 커리큘럼 · M16 · Block E</a:t>
             </a:r>
           </a:p>
         </p:txBody>
@@ -34483,7 +34483,7 @@
               <a:spcAft>
                 <a:spcPts val="0"/>
               </a:spcAft>
-              <a:defRPr sz="1000" b="0">
+              <a:defRPr sz="900" b="0">
                 <a:solidFill>
                   <a:srgbClr val="5C6672"/>
                 </a:solidFill>
@@ -34491,7 +34491,7 @@
               </a:defRPr>
             </a:pPr>
             <a:r>
-              <a:t>ROS 2 Jazzy · Gazebo Harmonic · M16 · 따라 하기형 AGV 실습</a:t>
+              <a:t>ROS 2 기반 AGV End-to-End 개발 커리큘럼 · M16 · Block E</a:t>
             </a:r>
           </a:p>
         </p:txBody>
@@ -34937,7 +34937,7 @@
               <a:spcAft>
                 <a:spcPts val="0"/>
               </a:spcAft>
-              <a:defRPr sz="1000" b="0">
+              <a:defRPr sz="900" b="0">
                 <a:solidFill>
                   <a:srgbClr val="5C6672"/>
                 </a:solidFill>
@@ -34945,7 +34945,7 @@
               </a:defRPr>
             </a:pPr>
             <a:r>
-              <a:t>ROS 2 Jazzy · Gazebo Harmonic · M16 · 따라 하기형 AGV 실습</a:t>
+              <a:t>ROS 2 기반 AGV End-to-End 개발 커리큘럼 · M16 · Block E</a:t>
             </a:r>
           </a:p>
         </p:txBody>
@@ -35313,7 +35313,7 @@
               <a:spcAft>
                 <a:spcPts val="0"/>
               </a:spcAft>
-              <a:defRPr sz="1000" b="0">
+              <a:defRPr sz="900" b="0">
                 <a:solidFill>
                   <a:srgbClr val="5C6672"/>
                 </a:solidFill>
@@ -35321,7 +35321,7 @@
               </a:defRPr>
             </a:pPr>
             <a:r>
-              <a:t>ROS 2 Jazzy · Gazebo Harmonic · M16 · 따라 하기형 AGV 실습</a:t>
+              <a:t>ROS 2 기반 AGV End-to-End 개발 커리큘럼 · M16 · Block E</a:t>
             </a:r>
           </a:p>
         </p:txBody>
@@ -35550,7 +35550,7 @@
               <a:spcAft>
                 <a:spcPts val="0"/>
               </a:spcAft>
-              <a:defRPr sz="1000" b="0">
+              <a:defRPr sz="900" b="0">
                 <a:solidFill>
                   <a:srgbClr val="5C6672"/>
                 </a:solidFill>
@@ -35558,7 +35558,7 @@
               </a:defRPr>
             </a:pPr>
             <a:r>
-              <a:t>ROS 2 Jazzy · Gazebo Harmonic · M16 · 따라 하기형 AGV 실습</a:t>
+              <a:t>ROS 2 기반 AGV End-to-End 개발 커리큘럼 · M16 · Block E</a:t>
             </a:r>
           </a:p>
         </p:txBody>
@@ -35953,7 +35953,7 @@
               <a:spcAft>
                 <a:spcPts val="0"/>
               </a:spcAft>
-              <a:defRPr sz="1000" b="0">
+              <a:defRPr sz="900" b="0">
                 <a:solidFill>
                   <a:srgbClr val="5C6672"/>
                 </a:solidFill>
@@ -35961,7 +35961,7 @@
               </a:defRPr>
             </a:pPr>
             <a:r>
-              <a:t>ROS 2 Jazzy · Gazebo Harmonic · M16 · 따라 하기형 AGV 실습</a:t>
+              <a:t>ROS 2 기반 AGV End-to-End 개발 커리큘럼 · M16 · Block E</a:t>
             </a:r>
           </a:p>
         </p:txBody>
@@ -36478,7 +36478,7 @@
               <a:spcAft>
                 <a:spcPts val="0"/>
               </a:spcAft>
-              <a:defRPr sz="1000" b="0">
+              <a:defRPr sz="900" b="0">
                 <a:solidFill>
                   <a:srgbClr val="5C6672"/>
                 </a:solidFill>
@@ -36486,7 +36486,7 @@
               </a:defRPr>
             </a:pPr>
             <a:r>
-              <a:t>ROS 2 Jazzy · Gazebo Harmonic · M16 · 따라 하기형 AGV 실습</a:t>
+              <a:t>ROS 2 기반 AGV End-to-End 개발 커리큘럼 · M16 · Block E</a:t>
             </a:r>
           </a:p>
         </p:txBody>
@@ -36862,7 +36862,7 @@
               <a:spcAft>
                 <a:spcPts val="0"/>
               </a:spcAft>
-              <a:defRPr sz="1000" b="0">
+              <a:defRPr sz="900" b="0">
                 <a:solidFill>
                   <a:srgbClr val="5C6672"/>
                 </a:solidFill>
@@ -36870,7 +36870,7 @@
               </a:defRPr>
             </a:pPr>
             <a:r>
-              <a:t>ROS 2 Jazzy · Gazebo Harmonic · M16 · 따라 하기형 AGV 실습</a:t>
+              <a:t>ROS 2 기반 AGV End-to-End 개발 커리큘럼 · M16 · Block E</a:t>
             </a:r>
           </a:p>
         </p:txBody>
@@ -37191,7 +37191,7 @@
               <a:spcAft>
                 <a:spcPts val="0"/>
               </a:spcAft>
-              <a:defRPr sz="1000" b="0">
+              <a:defRPr sz="900" b="0">
                 <a:solidFill>
                   <a:srgbClr val="5C6672"/>
                 </a:solidFill>
@@ -37199,7 +37199,7 @@
               </a:defRPr>
             </a:pPr>
             <a:r>
-              <a:t>ROS 2 Jazzy · Gazebo Harmonic · M16 · 따라 하기형 AGV 실습</a:t>
+              <a:t>ROS 2 기반 AGV End-to-End 개발 커리큘럼 · M16 · Block E</a:t>
             </a:r>
           </a:p>
         </p:txBody>
@@ -37610,7 +37610,7 @@
               <a:spcAft>
                 <a:spcPts val="0"/>
               </a:spcAft>
-              <a:defRPr sz="1000" b="0">
+              <a:defRPr sz="900" b="0">
                 <a:solidFill>
                   <a:srgbClr val="5C6672"/>
                 </a:solidFill>
@@ -37618,7 +37618,7 @@
               </a:defRPr>
             </a:pPr>
             <a:r>
-              <a:t>ROS 2 Jazzy · Gazebo Harmonic · M16 · 따라 하기형 AGV 실습</a:t>
+              <a:t>ROS 2 기반 AGV End-to-End 개발 커리큘럼 · M16 · Block E</a:t>
             </a:r>
           </a:p>
         </p:txBody>
@@ -37847,7 +37847,7 @@
               <a:spcAft>
                 <a:spcPts val="0"/>
               </a:spcAft>
-              <a:defRPr sz="1000" b="0">
+              <a:defRPr sz="900" b="0">
                 <a:solidFill>
                   <a:srgbClr val="5C6672"/>
                 </a:solidFill>
@@ -37855,7 +37855,7 @@
               </a:defRPr>
             </a:pPr>
             <a:r>
-              <a:t>ROS 2 Jazzy · Gazebo Harmonic · M16 · 따라 하기형 AGV 실습</a:t>
+              <a:t>ROS 2 기반 AGV End-to-End 개발 커리큘럼 · M16 · Block E</a:t>
             </a:r>
           </a:p>
         </p:txBody>
@@ -38378,7 +38378,7 @@
               <a:spcAft>
                 <a:spcPts val="0"/>
               </a:spcAft>
-              <a:defRPr sz="1000" b="0">
+              <a:defRPr sz="900" b="0">
                 <a:solidFill>
                   <a:srgbClr val="5C6672"/>
                 </a:solidFill>
@@ -38386,7 +38386,7 @@
               </a:defRPr>
             </a:pPr>
             <a:r>
-              <a:t>ROS 2 Jazzy · Gazebo Harmonic · M16 · 따라 하기형 AGV 실습</a:t>
+              <a:t>ROS 2 기반 AGV End-to-End 개발 커리큘럼 · M16 · Block E</a:t>
             </a:r>
           </a:p>
         </p:txBody>
@@ -38928,7 +38928,7 @@
               <a:spcAft>
                 <a:spcPts val="0"/>
               </a:spcAft>
-              <a:defRPr sz="1000" b="0">
+              <a:defRPr sz="900" b="0">
                 <a:solidFill>
                   <a:srgbClr val="5C6672"/>
                 </a:solidFill>
@@ -38936,7 +38936,7 @@
               </a:defRPr>
             </a:pPr>
             <a:r>
-              <a:t>ROS 2 Jazzy · Gazebo Harmonic · M16 · 따라 하기형 AGV 실습</a:t>
+              <a:t>ROS 2 기반 AGV End-to-End 개발 커리큘럼 · M16 · Block E</a:t>
             </a:r>
           </a:p>
         </p:txBody>
@@ -39215,7 +39215,7 @@
               <a:spcAft>
                 <a:spcPts val="0"/>
               </a:spcAft>
-              <a:defRPr sz="1000" b="0">
+              <a:defRPr sz="900" b="0">
                 <a:solidFill>
                   <a:srgbClr val="5C6672"/>
                 </a:solidFill>
@@ -39223,7 +39223,7 @@
               </a:defRPr>
             </a:pPr>
             <a:r>
-              <a:t>ROS 2 Jazzy · Gazebo Harmonic · M16 · 따라 하기형 AGV 실습</a:t>
+              <a:t>ROS 2 기반 AGV End-to-End 개발 커리큘럼 · M16 · Block E</a:t>
             </a:r>
           </a:p>
         </p:txBody>

--- a/blocks/E_autonomy_logic/M16_ros2_control/M16_ros2_control_gz_ros2_control.pptx
+++ b/blocks/E_autonomy_logic/M16_ros2_control/M16_ros2_control_gz_ros2_control.pptx
@@ -65,6 +65,7 @@
     <p:sldId id="313" r:id="rId65"/>
     <p:sldId id="314" r:id="rId66"/>
     <p:sldId id="315" r:id="rId67"/>
+    <p:sldId id="316" r:id="rId68"/>
   </p:sldIdLst>
   <p:sldSz cx="12191999" cy="6858000" type="screen4x3"/>
   <p:notesSz cx="6858000" cy="9144000"/>
@@ -4816,17 +4817,43 @@
           <a:lstStyle/>
           <a:p>
             <a:r>
-              <a:t>[설명] M16은 M09 native DiffDrive와 별도 launch를 사용한다. plugin이 controller_manager를 만들고 spawner가 두 controller를 active로 전환한다.</a:t>
-            </a:r>
-          </a:p>
-          <a:p>
-            <a:r>
-              <a:t>[실행] ros2 launch agv_gazebo ros2_control.launch.py</a:t>
-            </a:r>
-          </a:p>
-          <a:p>
-            <a:r>
-              <a:t># 새 터미널</a:t>
+              <a:t>[설명] M16은 M09 native DiffDrive와 별도 launch를 사용한다. 터미널 1이 controller_manager를 유지하는 동안 터미널 2에서 controller 상태를 확인한다.</a:t>
+            </a:r>
+          </a:p>
+          <a:p>
+            <a:r>
+              <a:t>[실행] # 터미널 1</a:t>
+            </a:r>
+          </a:p>
+          <a:p>
+            <a:r>
+              <a:t>source /opt/ros/jazzy/setup.bash</a:t>
+            </a:r>
+          </a:p>
+          <a:p>
+            <a:r>
+              <a:t>source ~/ros2_curri/my_agv_ws/install/setup.bash</a:t>
+            </a:r>
+          </a:p>
+          <a:p>
+            <a:r>
+              <a:t>ros2 launch agv_gazebo ros2_control.launch.py</a:t>
+            </a:r>
+          </a:p>
+          <a:p/>
+          <a:p>
+            <a:r>
+              <a:t># 터미널 2</a:t>
+            </a:r>
+          </a:p>
+          <a:p>
+            <a:r>
+              <a:t>source /opt/ros/jazzy/setup.bash</a:t>
+            </a:r>
+          </a:p>
+          <a:p>
+            <a:r>
+              <a:t>source ~/ros2_curri/my_agv_ws/install/setup.bash</a:t>
             </a:r>
           </a:p>
           <a:p>
@@ -4921,7 +4948,17 @@
           </a:p>
           <a:p>
             <a:r>
-              <a:t>[실행] source ~/ros2_curri/my_agv_ws/install/setup.bash</a:t>
+              <a:t>[실행] # 터미널 1</a:t>
+            </a:r>
+          </a:p>
+          <a:p>
+            <a:r>
+              <a:t>source /opt/ros/jazzy/setup.bash</a:t>
+            </a:r>
+          </a:p>
+          <a:p>
+            <a:r>
+              <a:t>source ~/ros2_curri/my_agv_ws/install/setup.bash</a:t>
             </a:r>
           </a:p>
           <a:p>
@@ -4929,9 +4966,25 @@
               <a:t>ros2 launch agv_gazebo ros2_control.launch.py</a:t>
             </a:r>
           </a:p>
-          <a:p>
-            <a:r>
-              <a:t># 새 터미널: ros2 control list_controllers -c /controller_manager</a:t>
+          <a:p/>
+          <a:p>
+            <a:r>
+              <a:t># 터미널 2</a:t>
+            </a:r>
+          </a:p>
+          <a:p>
+            <a:r>
+              <a:t>source /opt/ros/jazzy/setup.bash</a:t>
+            </a:r>
+          </a:p>
+          <a:p>
+            <a:r>
+              <a:t>source ~/ros2_curri/my_agv_ws/install/setup.bash</a:t>
+            </a:r>
+          </a:p>
+          <a:p>
+            <a:r>
+              <a:t>ros2 control list_controllers -c /controller_manager</a:t>
             </a:r>
           </a:p>
           <a:p>
@@ -5026,7 +5079,7 @@
           </a:p>
           <a:p>
             <a:r>
-              <a:t>[확인] ① 명령/설정  ② 정상 출력 또는 화면  ③ 다음 검증 명령으로 재확인</a:t>
+              <a:t>[확인] 명령·설정과 화면의 topic·frame·결과 이름을 대조합니다.</a:t>
             </a:r>
           </a:p>
           <a:p>
@@ -5106,22 +5159,17 @@
           <a:lstStyle/>
           <a:p>
             <a:r>
-              <a:t>[설명] 검증 명령은 GUI 결과와 별도로 실행해 재현 가능한 완료 기준을 만든다.</a:t>
-            </a:r>
-          </a:p>
-          <a:p>
-            <a:r>
-              <a:t>[실행] ros2 control list_controllers -c /controller_manager</a:t>
-            </a:r>
-          </a:p>
-          <a:p>
-            <a:r>
-              <a:t>ros2 topic echo /joint_states --once</a:t>
-            </a:r>
-          </a:p>
-          <a:p>
-            <a:r>
-              <a:t>[확인] `ros2 control list_controllers`에서 joint_state_broadcaster와 diff_drive_controller가 모두 active이고 wheel joint state가 publish된다.</a:t>
+              <a:t>[설명] 실제 Ubuntu/ROS 2 환경에서 생성한 검증 화면이다.</a:t>
+            </a:r>
+          </a:p>
+          <a:p>
+            <a:r>
+              <a:t>[실행] 슬라이드의 명령 또는 파일 작성 단계를 진행한다.</a:t>
+            </a:r>
+          </a:p>
+          <a:p>
+            <a:r>
+              <a:t>[확인] ① 명령/설정  ② 정상 출력 또는 화면  ③ 다음 검증 명령으로 재확인</a:t>
             </a:r>
           </a:p>
           <a:p>
@@ -5201,17 +5249,22 @@
           <a:lstStyle/>
           <a:p>
             <a:r>
-              <a:t>[설명] 오류를 대신 해결하지 말고 증상부터 우선 확인 순서대로 교육생이 실행하게 한다.</a:t>
-            </a:r>
-          </a:p>
-          <a:p>
-            <a:r>
-              <a:t>[실행] 슬라이드의 명령 또는 파일 작성 단계를 진행한다.</a:t>
-            </a:r>
-          </a:p>
-          <a:p>
-            <a:r>
-              <a:t>[확인] 수정 뒤 첫 검증 명령을 다시 실행한다.</a:t>
+              <a:t>[설명] 검증 명령은 GUI 결과와 별도로 실행해 재현 가능한 완료 기준을 만든다.</a:t>
+            </a:r>
+          </a:p>
+          <a:p>
+            <a:r>
+              <a:t>[실행] ros2 control list_controllers -c /controller_manager</a:t>
+            </a:r>
+          </a:p>
+          <a:p>
+            <a:r>
+              <a:t>ros2 topic echo /joint_states --once</a:t>
+            </a:r>
+          </a:p>
+          <a:p>
+            <a:r>
+              <a:t>[확인] `ros2 control list_controllers`에서 joint_state_broadcaster와 diff_drive_controller가 모두 active이고 wheel joint state가 publish된다.</a:t>
             </a:r>
           </a:p>
           <a:p>
@@ -5221,7 +5274,7 @@
           </a:p>
           <a:p>
             <a:r>
-              <a:t>[오류] 슬라이드의 두 대표 오류를 먼저 사용한다.</a:t>
+              <a:t>[오류] 오류가 나면 현재 폴더, source, 파일 경로를 먼저 확인한다.</a:t>
             </a:r>
           </a:p>
         </p:txBody>
@@ -5291,37 +5344,17 @@
           <a:lstStyle/>
           <a:p>
             <a:r>
-              <a:t>[설명] Complete는 정답 복사본이 아니라 막혔을 때 비교·복구하는 안전망이다.</a:t>
-            </a:r>
-          </a:p>
-          <a:p>
-            <a:r>
-              <a:t>[실행] cd ~/ros2_curri</a:t>
-            </a:r>
-          </a:p>
-          <a:p>
-            <a:r>
-              <a:t>diff -ru my_agv_ws/src blocks/E_autonomy_logic/M16_ros2_control/complete/agv_ws/src || true</a:t>
-            </a:r>
-          </a:p>
-          <a:p>
-            <a:r>
-              <a:t>cp -a my_agv_ws/src my_agv_ws/src_before_M16</a:t>
-            </a:r>
-          </a:p>
-          <a:p>
-            <a:r>
-              <a:t>cp -a blocks/E_autonomy_logic/M16_ros2_control/complete/agv_ws/src/. my_agv_ws/src/</a:t>
-            </a:r>
-          </a:p>
-          <a:p>
-            <a:r>
-              <a:t>cd my_agv_ws &amp;&amp; colcon build --symlink-install &amp;&amp; source install/setup.bash</a:t>
-            </a:r>
-          </a:p>
-          <a:p>
-            <a:r>
-              <a:t>[확인] diff에서 내 파일과 Complete의 차이를 설명할 수 있다.</a:t>
+              <a:t>[설명] 오류를 대신 해결하지 말고 증상부터 우선 확인 순서대로 교육생이 실행하게 한다.</a:t>
+            </a:r>
+          </a:p>
+          <a:p>
+            <a:r>
+              <a:t>[실행] 슬라이드의 명령 또는 파일 작성 단계를 진행한다.</a:t>
+            </a:r>
+          </a:p>
+          <a:p>
+            <a:r>
+              <a:t>[확인] 수정 뒤 첫 검증 명령을 다시 실행한다.</a:t>
             </a:r>
           </a:p>
           <a:p>
@@ -5331,7 +5364,7 @@
           </a:p>
           <a:p>
             <a:r>
-              <a:t>[오류] 오류가 나면 현재 폴더, source, 파일 경로를 먼저 확인한다.</a:t>
+              <a:t>[오류] 슬라이드의 두 대표 오류를 먼저 사용한다.</a:t>
             </a:r>
           </a:p>
         </p:txBody>
@@ -5401,17 +5434,37 @@
           <a:lstStyle/>
           <a:p>
             <a:r>
-              <a:t>[설명] 교육생이 직접 한 값만 바꿔 원인과 결과를 연결하게 한다.</a:t>
-            </a:r>
-          </a:p>
-          <a:p>
-            <a:r>
-              <a:t>[실행] 슬라이드의 명령 또는 파일 작성 단계를 진행한다.</a:t>
-            </a:r>
-          </a:p>
-          <a:p>
-            <a:r>
-              <a:t>[확인] 원래 값과 변경 값을 모두 기록한다.</a:t>
+              <a:t>[설명] Complete는 정답 복사본이 아니라 막혔을 때 비교·복구하는 안전망이다.</a:t>
+            </a:r>
+          </a:p>
+          <a:p>
+            <a:r>
+              <a:t>[실행] cd ~/ros2_curri</a:t>
+            </a:r>
+          </a:p>
+          <a:p>
+            <a:r>
+              <a:t>diff -ru my_agv_ws/src blocks/E_autonomy_logic/M16_ros2_control/complete/agv_ws/src || true</a:t>
+            </a:r>
+          </a:p>
+          <a:p>
+            <a:r>
+              <a:t>cp -a my_agv_ws/src my_agv_ws/src_before_M16</a:t>
+            </a:r>
+          </a:p>
+          <a:p>
+            <a:r>
+              <a:t>cp -a blocks/E_autonomy_logic/M16_ros2_control/complete/agv_ws/src/. my_agv_ws/src/</a:t>
+            </a:r>
+          </a:p>
+          <a:p>
+            <a:r>
+              <a:t>cd my_agv_ws &amp;&amp; colcon build --symlink-install &amp;&amp; source install/setup.bash</a:t>
+            </a:r>
+          </a:p>
+          <a:p>
+            <a:r>
+              <a:t>[확인] diff에서 내 파일과 Complete의 차이를 설명할 수 있다.</a:t>
             </a:r>
           </a:p>
           <a:p>
@@ -5491,7 +5544,7 @@
           <a:lstStyle/>
           <a:p>
             <a:r>
-              <a:t>[설명] 교육생이 자신의 workspace·캡처·로그를 저장했는지 확인하고 다음 모듈의 시작 상태를 읽는다.</a:t>
+              <a:t>[설명] 교육생이 직접 한 값만 바꿔 원인과 결과를 연결하게 한다.</a:t>
             </a:r>
           </a:p>
           <a:p>
@@ -5501,7 +5554,7 @@
           </a:p>
           <a:p>
             <a:r>
-              <a:t>[확인] M17~M20 autonomy command 시작 조건을 말할 수 있다.</a:t>
+              <a:t>[확인] 원래 값과 변경 값을 모두 기록한다.</a:t>
             </a:r>
           </a:p>
           <a:p>
@@ -5627,6 +5680,96 @@
 </file>
 
 <file path=ppt/notesSlides/notesSlide60.xml><?xml version="1.0" encoding="utf-8"?>
+<p:notes xmlns:a="http://schemas.openxmlformats.org/drawingml/2006/main" xmlns:p="http://schemas.openxmlformats.org/presentationml/2006/main" xmlns:r="http://schemas.openxmlformats.org/officeDocument/2006/relationships">
+  <p:cSld>
+    <p:spTree>
+      <p:nvGrpSpPr>
+        <p:cNvPr id="1" name=""/>
+        <p:cNvGrpSpPr/>
+        <p:nvPr/>
+      </p:nvGrpSpPr>
+      <p:grpSpPr>
+        <a:xfrm>
+          <a:off x="0" y="0"/>
+          <a:ext cx="0" cy="0"/>
+          <a:chOff x="0" y="0"/>
+          <a:chExt cx="0" cy="0"/>
+        </a:xfrm>
+      </p:grpSpPr>
+      <p:sp>
+        <p:nvSpPr>
+          <p:cNvPr id="2" name="Slide Image Placeholder 1"/>
+          <p:cNvSpPr>
+            <a:spLocks noGrp="1"/>
+          </p:cNvSpPr>
+          <p:nvPr>
+            <p:ph type="sldImg" idx="2"/>
+          </p:nvPr>
+        </p:nvSpPr>
+        <p:spPr/>
+      </p:sp>
+      <p:sp>
+        <p:nvSpPr>
+          <p:cNvPr id="3" name="Notes Placeholder 2"/>
+          <p:cNvSpPr>
+            <a:spLocks noGrp="1"/>
+          </p:cNvSpPr>
+          <p:nvPr>
+            <p:ph type="body" idx="3" sz="quarter"/>
+          </p:nvPr>
+        </p:nvSpPr>
+        <p:spPr/>
+        <p:txBody>
+          <a:bodyPr/>
+          <a:lstStyle/>
+          <a:p>
+            <a:r>
+              <a:t>[설명] 교육생이 자신의 workspace·캡처·로그를 저장했는지 확인하고 다음 모듈의 시작 상태를 읽는다.</a:t>
+            </a:r>
+          </a:p>
+          <a:p>
+            <a:r>
+              <a:t>[실행] 슬라이드의 명령 또는 파일 작성 단계를 진행한다.</a:t>
+            </a:r>
+          </a:p>
+          <a:p>
+            <a:r>
+              <a:t>[확인] M17~M20 autonomy command 시작 조건을 말할 수 있다.</a:t>
+            </a:r>
+          </a:p>
+          <a:p>
+            <a:r>
+              <a:t>[멈춤] 교육생이 현재 체크포인트를 통과할 때까지 기다린다.</a:t>
+            </a:r>
+          </a:p>
+          <a:p>
+            <a:r>
+              <a:t>[오류] 오류가 나면 현재 폴더, source, 파일 경로를 먼저 확인한다.</a:t>
+            </a:r>
+          </a:p>
+        </p:txBody>
+      </p:sp>
+      <p:sp>
+        <p:nvSpPr>
+          <p:cNvPr id="4" name="Slide Number Placeholder 3"/>
+          <p:cNvSpPr>
+            <a:spLocks noGrp="1"/>
+          </p:cNvSpPr>
+          <p:nvPr>
+            <p:ph type="sldNum" idx="5" sz="quarter"/>
+          </p:nvPr>
+        </p:nvSpPr>
+        <p:spPr/>
+      </p:sp>
+    </p:spTree>
+  </p:cSld>
+  <p:clrMapOvr>
+    <a:masterClrMapping/>
+  </p:clrMapOvr>
+</p:notes>
+</file>
+
+<file path=ppt/notesSlides/notesSlide61.xml><?xml version="1.0" encoding="utf-8"?>
 <p:notes xmlns:a="http://schemas.openxmlformats.org/drawingml/2006/main" xmlns:p="http://schemas.openxmlformats.org/presentationml/2006/main" xmlns:r="http://schemas.openxmlformats.org/officeDocument/2006/relationships">
   <p:cSld>
     <p:spTree>
@@ -10584,7 +10727,7 @@
           </a:fontRef>
         </p:style>
         <p:txBody>
-          <a:bodyPr rtlCol="0" anchor="ctr" wrap="square" lIns="73152" rIns="73152" tIns="36576" bIns="36576"/>
+          <a:bodyPr rtlCol="0" anchor="ctr" wrap="square" lIns="109728" rIns="109728" tIns="73152" bIns="73152"/>
           <a:lstStyle/>
           <a:p>
             <a:pPr algn="l">
@@ -10601,7 +10744,19 @@
             <a:r>
               <a:t>mkdir -p ~/ros2_curri/my_agv_ws/src/agv_control/config</a:t>
             </a:r>
-            <a:br/>
+          </a:p>
+          <a:p>
+            <a:pPr algn="l">
+              <a:spcAft>
+                <a:spcPts val="0"/>
+              </a:spcAft>
+              <a:defRPr sz="1600" b="0">
+                <a:solidFill>
+                  <a:srgbClr val="FFFFFF"/>
+                </a:solidFill>
+                <a:latin typeface="DejaVu Sans Mono"/>
+              </a:defRPr>
+            </a:pPr>
             <a:r>
               <a:t>nano ~/ros2_curri/my_agv_ws/src/agv_control/config/controllers.yaml</a:t>
             </a:r>
@@ -12415,7 +12570,7 @@
           </a:fontRef>
         </p:style>
         <p:txBody>
-          <a:bodyPr rtlCol="0" anchor="ctr" wrap="square" lIns="164592" rIns="164592" tIns="109728" bIns="36576"/>
+          <a:bodyPr rtlCol="0" anchor="ctr" wrap="square" lIns="164592" rIns="164592" tIns="109728" bIns="73152"/>
           <a:lstStyle/>
           <a:p>
             <a:pPr algn="l">
@@ -12432,47 +12587,179 @@
             <a:r>
               <a:t>controller_manager:</a:t>
             </a:r>
-            <a:br/>
+          </a:p>
+          <a:p>
+            <a:pPr algn="l">
+              <a:spcAft>
+                <a:spcPts val="0"/>
+              </a:spcAft>
+              <a:defRPr sz="1400" b="0">
+                <a:solidFill>
+                  <a:srgbClr val="FFFFFF"/>
+                </a:solidFill>
+                <a:latin typeface="DejaVu Sans Mono"/>
+              </a:defRPr>
+            </a:pPr>
             <a:r>
               <a:t>  ros__parameters:</a:t>
             </a:r>
-            <a:br/>
+          </a:p>
+          <a:p>
+            <a:pPr algn="l">
+              <a:spcAft>
+                <a:spcPts val="0"/>
+              </a:spcAft>
+              <a:defRPr sz="1400" b="0">
+                <a:solidFill>
+                  <a:srgbClr val="FFFFFF"/>
+                </a:solidFill>
+                <a:latin typeface="DejaVu Sans Mono"/>
+              </a:defRPr>
+            </a:pPr>
             <a:r>
               <a:t>    update_rate: 50</a:t>
             </a:r>
-            <a:br/>
+          </a:p>
+          <a:p>
+            <a:pPr algn="l">
+              <a:spcAft>
+                <a:spcPts val="0"/>
+              </a:spcAft>
+              <a:defRPr sz="1400" b="0">
+                <a:solidFill>
+                  <a:srgbClr val="FFFFFF"/>
+                </a:solidFill>
+                <a:latin typeface="DejaVu Sans Mono"/>
+              </a:defRPr>
+            </a:pPr>
             <a:r>
               <a:t>    joint_state_broadcaster:</a:t>
             </a:r>
-            <a:br/>
+          </a:p>
+          <a:p>
+            <a:pPr algn="l">
+              <a:spcAft>
+                <a:spcPts val="0"/>
+              </a:spcAft>
+              <a:defRPr sz="1400" b="0">
+                <a:solidFill>
+                  <a:srgbClr val="FFFFFF"/>
+                </a:solidFill>
+                <a:latin typeface="DejaVu Sans Mono"/>
+              </a:defRPr>
+            </a:pPr>
             <a:r>
               <a:t>      type: joint_state_broadcaster/JointStateBroadcaster</a:t>
             </a:r>
-            <a:br/>
+          </a:p>
+          <a:p>
+            <a:pPr algn="l">
+              <a:spcAft>
+                <a:spcPts val="0"/>
+              </a:spcAft>
+              <a:defRPr sz="1400" b="0">
+                <a:solidFill>
+                  <a:srgbClr val="FFFFFF"/>
+                </a:solidFill>
+                <a:latin typeface="DejaVu Sans Mono"/>
+              </a:defRPr>
+            </a:pPr>
             <a:r>
               <a:t>    diff_drive_controller:</a:t>
             </a:r>
-            <a:br/>
+          </a:p>
+          <a:p>
+            <a:pPr algn="l">
+              <a:spcAft>
+                <a:spcPts val="0"/>
+              </a:spcAft>
+              <a:defRPr sz="1400" b="0">
+                <a:solidFill>
+                  <a:srgbClr val="FFFFFF"/>
+                </a:solidFill>
+                <a:latin typeface="DejaVu Sans Mono"/>
+              </a:defRPr>
+            </a:pPr>
             <a:r>
               <a:t>      type: diff_drive_controller/DiffDriveController</a:t>
             </a:r>
-            <a:br/>
+          </a:p>
+          <a:p>
+            <a:pPr algn="l">
+              <a:spcAft>
+                <a:spcPts val="0"/>
+              </a:spcAft>
+              <a:defRPr sz="1400" b="0">
+                <a:solidFill>
+                  <a:srgbClr val="FFFFFF"/>
+                </a:solidFill>
+                <a:latin typeface="DejaVu Sans Mono"/>
+              </a:defRPr>
+            </a:pPr>
             <a:r>
               <a:t>diff_drive_controller:</a:t>
             </a:r>
-            <a:br/>
+          </a:p>
+          <a:p>
+            <a:pPr algn="l">
+              <a:spcAft>
+                <a:spcPts val="0"/>
+              </a:spcAft>
+              <a:defRPr sz="1400" b="0">
+                <a:solidFill>
+                  <a:srgbClr val="FFFFFF"/>
+                </a:solidFill>
+                <a:latin typeface="DejaVu Sans Mono"/>
+              </a:defRPr>
+            </a:pPr>
             <a:r>
               <a:t>  ros__parameters:</a:t>
             </a:r>
-            <a:br/>
+          </a:p>
+          <a:p>
+            <a:pPr algn="l">
+              <a:spcAft>
+                <a:spcPts val="0"/>
+              </a:spcAft>
+              <a:defRPr sz="1400" b="0">
+                <a:solidFill>
+                  <a:srgbClr val="FFFFFF"/>
+                </a:solidFill>
+                <a:latin typeface="DejaVu Sans Mono"/>
+              </a:defRPr>
+            </a:pPr>
             <a:r>
               <a:t>    left_wheel_names: [left_wheel_joint]</a:t>
             </a:r>
-            <a:br/>
+          </a:p>
+          <a:p>
+            <a:pPr algn="l">
+              <a:spcAft>
+                <a:spcPts val="0"/>
+              </a:spcAft>
+              <a:defRPr sz="1400" b="0">
+                <a:solidFill>
+                  <a:srgbClr val="FFFFFF"/>
+                </a:solidFill>
+                <a:latin typeface="DejaVu Sans Mono"/>
+              </a:defRPr>
+            </a:pPr>
             <a:r>
               <a:t>    right_wheel_names: [right_wheel_joint]</a:t>
             </a:r>
-            <a:br/>
+          </a:p>
+          <a:p>
+            <a:pPr algn="l">
+              <a:spcAft>
+                <a:spcPts val="0"/>
+              </a:spcAft>
+              <a:defRPr sz="1400" b="0">
+                <a:solidFill>
+                  <a:srgbClr val="FFFFFF"/>
+                </a:solidFill>
+                <a:latin typeface="DejaVu Sans Mono"/>
+              </a:defRPr>
+            </a:pPr>
             <a:r>
               <a:t>    wheel_separation: 0.38</a:t>
             </a:r>
@@ -12889,7 +13176,7 @@
           </a:fontRef>
         </p:style>
         <p:txBody>
-          <a:bodyPr rtlCol="0" anchor="ctr" wrap="square" lIns="164592" rIns="164592" tIns="109728" bIns="36576"/>
+          <a:bodyPr rtlCol="0" anchor="ctr" wrap="square" lIns="164592" rIns="164592" tIns="109728" bIns="73152"/>
           <a:lstStyle/>
           <a:p>
             <a:pPr algn="l">
@@ -12906,15 +13193,51 @@
             <a:r>
               <a:t>    wheel_radius: 0.08</a:t>
             </a:r>
-            <a:br/>
+          </a:p>
+          <a:p>
+            <a:pPr algn="l">
+              <a:spcAft>
+                <a:spcPts val="0"/>
+              </a:spcAft>
+              <a:defRPr sz="1400" b="0">
+                <a:solidFill>
+                  <a:srgbClr val="FFFFFF"/>
+                </a:solidFill>
+                <a:latin typeface="DejaVu Sans Mono"/>
+              </a:defRPr>
+            </a:pPr>
             <a:r>
               <a:t>    base_frame_id: base_link</a:t>
             </a:r>
-            <a:br/>
+          </a:p>
+          <a:p>
+            <a:pPr algn="l">
+              <a:spcAft>
+                <a:spcPts val="0"/>
+              </a:spcAft>
+              <a:defRPr sz="1400" b="0">
+                <a:solidFill>
+                  <a:srgbClr val="FFFFFF"/>
+                </a:solidFill>
+                <a:latin typeface="DejaVu Sans Mono"/>
+              </a:defRPr>
+            </a:pPr>
             <a:r>
               <a:t>    odom_frame_id: odom</a:t>
             </a:r>
-            <a:br/>
+          </a:p>
+          <a:p>
+            <a:pPr algn="l">
+              <a:spcAft>
+                <a:spcPts val="0"/>
+              </a:spcAft>
+              <a:defRPr sz="1400" b="0">
+                <a:solidFill>
+                  <a:srgbClr val="FFFFFF"/>
+                </a:solidFill>
+                <a:latin typeface="DejaVu Sans Mono"/>
+              </a:defRPr>
+            </a:pPr>
             <a:r>
               <a:t>    publish_rate: 50.0</a:t>
             </a:r>
@@ -13386,7 +13709,7 @@
           </a:fontRef>
         </p:style>
         <p:txBody>
-          <a:bodyPr rtlCol="0" anchor="ctr" wrap="square" lIns="73152" rIns="73152" tIns="36576" bIns="36576"/>
+          <a:bodyPr rtlCol="0" anchor="ctr" wrap="square" lIns="109728" rIns="109728" tIns="73152" bIns="73152"/>
           <a:lstStyle/>
           <a:p>
             <a:pPr algn="l">
@@ -13403,7 +13726,19 @@
             <a:r>
               <a:t>mkdir -p ~/ros2_curri/my_agv_ws/src/agv_description/urdf</a:t>
             </a:r>
-            <a:br/>
+          </a:p>
+          <a:p>
+            <a:pPr algn="l">
+              <a:spcAft>
+                <a:spcPts val="0"/>
+              </a:spcAft>
+              <a:defRPr sz="1600" b="0">
+                <a:solidFill>
+                  <a:srgbClr val="FFFFFF"/>
+                </a:solidFill>
+                <a:latin typeface="DejaVu Sans Mono"/>
+              </a:defRPr>
+            </a:pPr>
             <a:r>
               <a:t>nano ~/ros2_curri/my_agv_ws/src/agv_description/urdf/agv_ros2_control.urdf.xacro</a:t>
             </a:r>
@@ -15441,7 +15776,7 @@
           </a:fontRef>
         </p:style>
         <p:txBody>
-          <a:bodyPr rtlCol="0" anchor="ctr" wrap="square" lIns="164592" rIns="164592" tIns="109728" bIns="36576"/>
+          <a:bodyPr rtlCol="0" anchor="ctr" wrap="square" lIns="164592" rIns="164592" tIns="109728" bIns="73152"/>
           <a:lstStyle/>
           <a:p>
             <a:pPr algn="l">
@@ -15458,47 +15793,179 @@
             <a:r>
               <a:t>&lt;?xml version="1.0" ?&gt;</a:t>
             </a:r>
-            <a:br/>
+          </a:p>
+          <a:p>
+            <a:pPr algn="l">
+              <a:spcAft>
+                <a:spcPts val="0"/>
+              </a:spcAft>
+              <a:defRPr sz="1400" b="0">
+                <a:solidFill>
+                  <a:srgbClr val="FFFFFF"/>
+                </a:solidFill>
+                <a:latin typeface="DejaVu Sans Mono"/>
+              </a:defRPr>
+            </a:pPr>
             <a:r>
               <a:t>&lt;!-- M16 controller description. Gazebo uses model.sdf for physics; this URDF gives</a:t>
             </a:r>
-            <a:br/>
+          </a:p>
+          <a:p>
+            <a:pPr algn="l">
+              <a:spcAft>
+                <a:spcPts val="0"/>
+              </a:spcAft>
+              <a:defRPr sz="1400" b="0">
+                <a:solidFill>
+                  <a:srgbClr val="FFFFFF"/>
+                </a:solidFill>
+                <a:latin typeface="DejaVu Sans Mono"/>
+              </a:defRPr>
+            </a:pPr>
             <a:r>
               <a:t>  controller_manager its interfaces and RViz the matching joint tree. --&gt;</a:t>
             </a:r>
-            <a:br/>
+          </a:p>
+          <a:p>
+            <a:pPr algn="l">
+              <a:spcAft>
+                <a:spcPts val="0"/>
+              </a:spcAft>
+              <a:defRPr sz="1400" b="0">
+                <a:solidFill>
+                  <a:srgbClr val="FFFFFF"/>
+                </a:solidFill>
+                <a:latin typeface="DejaVu Sans Mono"/>
+              </a:defRPr>
+            </a:pPr>
             <a:r>
               <a:t>&lt;robot xmlns:xacro="http://www.ros.org/wiki/xacro" name="agv_ros2_control"&gt;</a:t>
             </a:r>
-            <a:br/>
+          </a:p>
+          <a:p>
+            <a:pPr algn="l">
+              <a:spcAft>
+                <a:spcPts val="0"/>
+              </a:spcAft>
+              <a:defRPr sz="1400" b="0">
+                <a:solidFill>
+                  <a:srgbClr val="FFFFFF"/>
+                </a:solidFill>
+                <a:latin typeface="DejaVu Sans Mono"/>
+              </a:defRPr>
+            </a:pPr>
             <a:r>
               <a:t>  </a:t>
             </a:r>
-            <a:br/>
+          </a:p>
+          <a:p>
+            <a:pPr algn="l">
+              <a:spcAft>
+                <a:spcPts val="0"/>
+              </a:spcAft>
+              <a:defRPr sz="1400" b="0">
+                <a:solidFill>
+                  <a:srgbClr val="FFFFFF"/>
+                </a:solidFill>
+                <a:latin typeface="DejaVu Sans Mono"/>
+              </a:defRPr>
+            </a:pPr>
             <a:r>
               <a:t>  </a:t>
             </a:r>
-            <a:br/>
+          </a:p>
+          <a:p>
+            <a:pPr algn="l">
+              <a:spcAft>
+                <a:spcPts val="0"/>
+              </a:spcAft>
+              <a:defRPr sz="1400" b="0">
+                <a:solidFill>
+                  <a:srgbClr val="FFFFFF"/>
+                </a:solidFill>
+                <a:latin typeface="DejaVu Sans Mono"/>
+              </a:defRPr>
+            </a:pPr>
             <a:r>
               <a:t>  &lt;link name="base_link"/&gt;</a:t>
             </a:r>
-            <a:br/>
+          </a:p>
+          <a:p>
+            <a:pPr algn="l">
+              <a:spcAft>
+                <a:spcPts val="0"/>
+              </a:spcAft>
+              <a:defRPr sz="1400" b="0">
+                <a:solidFill>
+                  <a:srgbClr val="FFFFFF"/>
+                </a:solidFill>
+                <a:latin typeface="DejaVu Sans Mono"/>
+              </a:defRPr>
+            </a:pPr>
             <a:r>
               <a:t>  &lt;link name="left_wheel_link"/&gt;</a:t>
             </a:r>
-            <a:br/>
+          </a:p>
+          <a:p>
+            <a:pPr algn="l">
+              <a:spcAft>
+                <a:spcPts val="0"/>
+              </a:spcAft>
+              <a:defRPr sz="1400" b="0">
+                <a:solidFill>
+                  <a:srgbClr val="FFFFFF"/>
+                </a:solidFill>
+                <a:latin typeface="DejaVu Sans Mono"/>
+              </a:defRPr>
+            </a:pPr>
             <a:r>
               <a:t>  &lt;link name="right_wheel_link"/&gt;</a:t>
             </a:r>
-            <a:br/>
+          </a:p>
+          <a:p>
+            <a:pPr algn="l">
+              <a:spcAft>
+                <a:spcPts val="0"/>
+              </a:spcAft>
+              <a:defRPr sz="1400" b="0">
+                <a:solidFill>
+                  <a:srgbClr val="FFFFFF"/>
+                </a:solidFill>
+                <a:latin typeface="DejaVu Sans Mono"/>
+              </a:defRPr>
+            </a:pPr>
             <a:r>
               <a:t>  </a:t>
             </a:r>
-            <a:br/>
+          </a:p>
+          <a:p>
+            <a:pPr algn="l">
+              <a:spcAft>
+                <a:spcPts val="0"/>
+              </a:spcAft>
+              <a:defRPr sz="1400" b="0">
+                <a:solidFill>
+                  <a:srgbClr val="FFFFFF"/>
+                </a:solidFill>
+                <a:latin typeface="DejaVu Sans Mono"/>
+              </a:defRPr>
+            </a:pPr>
             <a:r>
               <a:t>  </a:t>
             </a:r>
-            <a:br/>
+          </a:p>
+          <a:p>
+            <a:pPr algn="l">
+              <a:spcAft>
+                <a:spcPts val="0"/>
+              </a:spcAft>
+              <a:defRPr sz="1400" b="0">
+                <a:solidFill>
+                  <a:srgbClr val="FFFFFF"/>
+                </a:solidFill>
+                <a:latin typeface="DejaVu Sans Mono"/>
+              </a:defRPr>
+            </a:pPr>
             <a:r>
               <a:t>  &lt;joint name="left_wheel_joint" type="continuous"&gt;</a:t>
             </a:r>
@@ -16376,7 +16843,7 @@
           </a:fontRef>
         </p:style>
         <p:txBody>
-          <a:bodyPr rtlCol="0" anchor="ctr" wrap="square" lIns="164592" rIns="164592" tIns="109728" bIns="36576"/>
+          <a:bodyPr rtlCol="0" anchor="ctr" wrap="square" lIns="164592" rIns="164592" tIns="109728" bIns="73152"/>
           <a:lstStyle/>
           <a:p>
             <a:pPr algn="l">
@@ -16393,47 +16860,179 @@
             <a:r>
               <a:t>    &lt;parent link="base_link"/&gt;</a:t>
             </a:r>
-            <a:br/>
+          </a:p>
+          <a:p>
+            <a:pPr algn="l">
+              <a:spcAft>
+                <a:spcPts val="0"/>
+              </a:spcAft>
+              <a:defRPr sz="1400" b="0">
+                <a:solidFill>
+                  <a:srgbClr val="FFFFFF"/>
+                </a:solidFill>
+                <a:latin typeface="DejaVu Sans Mono"/>
+              </a:defRPr>
+            </a:pPr>
             <a:r>
               <a:t>    &lt;child link="left_wheel_link"/&gt;</a:t>
             </a:r>
-            <a:br/>
+          </a:p>
+          <a:p>
+            <a:pPr algn="l">
+              <a:spcAft>
+                <a:spcPts val="0"/>
+              </a:spcAft>
+              <a:defRPr sz="1400" b="0">
+                <a:solidFill>
+                  <a:srgbClr val="FFFFFF"/>
+                </a:solidFill>
+                <a:latin typeface="DejaVu Sans Mono"/>
+              </a:defRPr>
+            </a:pPr>
             <a:r>
               <a:t>    &lt;origin xyz="0 0.19 -0.08"/&gt;</a:t>
             </a:r>
-            <a:br/>
+          </a:p>
+          <a:p>
+            <a:pPr algn="l">
+              <a:spcAft>
+                <a:spcPts val="0"/>
+              </a:spcAft>
+              <a:defRPr sz="1400" b="0">
+                <a:solidFill>
+                  <a:srgbClr val="FFFFFF"/>
+                </a:solidFill>
+                <a:latin typeface="DejaVu Sans Mono"/>
+              </a:defRPr>
+            </a:pPr>
             <a:r>
               <a:t>    &lt;axis xyz="0 1 0"/&gt;</a:t>
             </a:r>
-            <a:br/>
+          </a:p>
+          <a:p>
+            <a:pPr algn="l">
+              <a:spcAft>
+                <a:spcPts val="0"/>
+              </a:spcAft>
+              <a:defRPr sz="1400" b="0">
+                <a:solidFill>
+                  <a:srgbClr val="FFFFFF"/>
+                </a:solidFill>
+                <a:latin typeface="DejaVu Sans Mono"/>
+              </a:defRPr>
+            </a:pPr>
             <a:r>
               <a:t>  &lt;/joint&gt;</a:t>
             </a:r>
-            <a:br/>
+          </a:p>
+          <a:p>
+            <a:pPr algn="l">
+              <a:spcAft>
+                <a:spcPts val="0"/>
+              </a:spcAft>
+              <a:defRPr sz="1400" b="0">
+                <a:solidFill>
+                  <a:srgbClr val="FFFFFF"/>
+                </a:solidFill>
+                <a:latin typeface="DejaVu Sans Mono"/>
+              </a:defRPr>
+            </a:pPr>
             <a:r>
               <a:t>  </a:t>
             </a:r>
-            <a:br/>
+          </a:p>
+          <a:p>
+            <a:pPr algn="l">
+              <a:spcAft>
+                <a:spcPts val="0"/>
+              </a:spcAft>
+              <a:defRPr sz="1400" b="0">
+                <a:solidFill>
+                  <a:srgbClr val="FFFFFF"/>
+                </a:solidFill>
+                <a:latin typeface="DejaVu Sans Mono"/>
+              </a:defRPr>
+            </a:pPr>
             <a:r>
               <a:t>  </a:t>
             </a:r>
-            <a:br/>
+          </a:p>
+          <a:p>
+            <a:pPr algn="l">
+              <a:spcAft>
+                <a:spcPts val="0"/>
+              </a:spcAft>
+              <a:defRPr sz="1400" b="0">
+                <a:solidFill>
+                  <a:srgbClr val="FFFFFF"/>
+                </a:solidFill>
+                <a:latin typeface="DejaVu Sans Mono"/>
+              </a:defRPr>
+            </a:pPr>
             <a:r>
               <a:t>  &lt;joint name="right_wheel_joint" type="continuous"&gt;</a:t>
             </a:r>
-            <a:br/>
+          </a:p>
+          <a:p>
+            <a:pPr algn="l">
+              <a:spcAft>
+                <a:spcPts val="0"/>
+              </a:spcAft>
+              <a:defRPr sz="1400" b="0">
+                <a:solidFill>
+                  <a:srgbClr val="FFFFFF"/>
+                </a:solidFill>
+                <a:latin typeface="DejaVu Sans Mono"/>
+              </a:defRPr>
+            </a:pPr>
             <a:r>
               <a:t>    &lt;parent link="base_link"/&gt;</a:t>
             </a:r>
-            <a:br/>
+          </a:p>
+          <a:p>
+            <a:pPr algn="l">
+              <a:spcAft>
+                <a:spcPts val="0"/>
+              </a:spcAft>
+              <a:defRPr sz="1400" b="0">
+                <a:solidFill>
+                  <a:srgbClr val="FFFFFF"/>
+                </a:solidFill>
+                <a:latin typeface="DejaVu Sans Mono"/>
+              </a:defRPr>
+            </a:pPr>
             <a:r>
               <a:t>    &lt;child link="right_wheel_link"/&gt;</a:t>
             </a:r>
-            <a:br/>
+          </a:p>
+          <a:p>
+            <a:pPr algn="l">
+              <a:spcAft>
+                <a:spcPts val="0"/>
+              </a:spcAft>
+              <a:defRPr sz="1400" b="0">
+                <a:solidFill>
+                  <a:srgbClr val="FFFFFF"/>
+                </a:solidFill>
+                <a:latin typeface="DejaVu Sans Mono"/>
+              </a:defRPr>
+            </a:pPr>
             <a:r>
               <a:t>    &lt;origin xyz="0 -0.19 -0.08"/&gt;</a:t>
             </a:r>
-            <a:br/>
+          </a:p>
+          <a:p>
+            <a:pPr algn="l">
+              <a:spcAft>
+                <a:spcPts val="0"/>
+              </a:spcAft>
+              <a:defRPr sz="1400" b="0">
+                <a:solidFill>
+                  <a:srgbClr val="FFFFFF"/>
+                </a:solidFill>
+                <a:latin typeface="DejaVu Sans Mono"/>
+              </a:defRPr>
+            </a:pPr>
             <a:r>
               <a:t>    &lt;axis xyz="0 1 0"/&gt;</a:t>
             </a:r>
@@ -16850,7 +17449,7 @@
           </a:fontRef>
         </p:style>
         <p:txBody>
-          <a:bodyPr rtlCol="0" anchor="ctr" wrap="square" lIns="164592" rIns="164592" tIns="109728" bIns="36576"/>
+          <a:bodyPr rtlCol="0" anchor="ctr" wrap="square" lIns="164592" rIns="164592" tIns="109728" bIns="73152"/>
           <a:lstStyle/>
           <a:p>
             <a:pPr algn="l">
@@ -16867,47 +17466,179 @@
             <a:r>
               <a:t>  &lt;/joint&gt;</a:t>
             </a:r>
-            <a:br/>
+          </a:p>
+          <a:p>
+            <a:pPr algn="l">
+              <a:spcAft>
+                <a:spcPts val="0"/>
+              </a:spcAft>
+              <a:defRPr sz="1400" b="0">
+                <a:solidFill>
+                  <a:srgbClr val="FFFFFF"/>
+                </a:solidFill>
+                <a:latin typeface="DejaVu Sans Mono"/>
+              </a:defRPr>
+            </a:pPr>
             <a:r>
               <a:t>  </a:t>
             </a:r>
-            <a:br/>
+          </a:p>
+          <a:p>
+            <a:pPr algn="l">
+              <a:spcAft>
+                <a:spcPts val="0"/>
+              </a:spcAft>
+              <a:defRPr sz="1400" b="0">
+                <a:solidFill>
+                  <a:srgbClr val="FFFFFF"/>
+                </a:solidFill>
+                <a:latin typeface="DejaVu Sans Mono"/>
+              </a:defRPr>
+            </a:pPr>
             <a:r>
               <a:t>  </a:t>
             </a:r>
-            <a:br/>
+          </a:p>
+          <a:p>
+            <a:pPr algn="l">
+              <a:spcAft>
+                <a:spcPts val="0"/>
+              </a:spcAft>
+              <a:defRPr sz="1400" b="0">
+                <a:solidFill>
+                  <a:srgbClr val="FFFFFF"/>
+                </a:solidFill>
+                <a:latin typeface="DejaVu Sans Mono"/>
+              </a:defRPr>
+            </a:pPr>
             <a:r>
               <a:t>  &lt;ros2_control name="GazeboSimSystem" type="system"&gt;</a:t>
             </a:r>
-            <a:br/>
+          </a:p>
+          <a:p>
+            <a:pPr algn="l">
+              <a:spcAft>
+                <a:spcPts val="0"/>
+              </a:spcAft>
+              <a:defRPr sz="1400" b="0">
+                <a:solidFill>
+                  <a:srgbClr val="FFFFFF"/>
+                </a:solidFill>
+                <a:latin typeface="DejaVu Sans Mono"/>
+              </a:defRPr>
+            </a:pPr>
             <a:r>
               <a:t>    &lt;hardware&gt;</a:t>
             </a:r>
-            <a:br/>
+          </a:p>
+          <a:p>
+            <a:pPr algn="l">
+              <a:spcAft>
+                <a:spcPts val="0"/>
+              </a:spcAft>
+              <a:defRPr sz="1400" b="0">
+                <a:solidFill>
+                  <a:srgbClr val="FFFFFF"/>
+                </a:solidFill>
+                <a:latin typeface="DejaVu Sans Mono"/>
+              </a:defRPr>
+            </a:pPr>
             <a:r>
               <a:t>      &lt;plugin&gt;gz_ros2_control/GazeboSimSystem&lt;/plugin&gt;</a:t>
             </a:r>
-            <a:br/>
+          </a:p>
+          <a:p>
+            <a:pPr algn="l">
+              <a:spcAft>
+                <a:spcPts val="0"/>
+              </a:spcAft>
+              <a:defRPr sz="1400" b="0">
+                <a:solidFill>
+                  <a:srgbClr val="FFFFFF"/>
+                </a:solidFill>
+                <a:latin typeface="DejaVu Sans Mono"/>
+              </a:defRPr>
+            </a:pPr>
             <a:r>
               <a:t>    &lt;/hardware&gt;</a:t>
             </a:r>
-            <a:br/>
+          </a:p>
+          <a:p>
+            <a:pPr algn="l">
+              <a:spcAft>
+                <a:spcPts val="0"/>
+              </a:spcAft>
+              <a:defRPr sz="1400" b="0">
+                <a:solidFill>
+                  <a:srgbClr val="FFFFFF"/>
+                </a:solidFill>
+                <a:latin typeface="DejaVu Sans Mono"/>
+              </a:defRPr>
+            </a:pPr>
             <a:r>
               <a:t>    &lt;joint name="left_wheel_joint"&gt;</a:t>
             </a:r>
-            <a:br/>
+          </a:p>
+          <a:p>
+            <a:pPr algn="l">
+              <a:spcAft>
+                <a:spcPts val="0"/>
+              </a:spcAft>
+              <a:defRPr sz="1400" b="0">
+                <a:solidFill>
+                  <a:srgbClr val="FFFFFF"/>
+                </a:solidFill>
+                <a:latin typeface="DejaVu Sans Mono"/>
+              </a:defRPr>
+            </a:pPr>
             <a:r>
               <a:t>      &lt;command_interface name="velocity"&gt;</a:t>
             </a:r>
-            <a:br/>
+          </a:p>
+          <a:p>
+            <a:pPr algn="l">
+              <a:spcAft>
+                <a:spcPts val="0"/>
+              </a:spcAft>
+              <a:defRPr sz="1400" b="0">
+                <a:solidFill>
+                  <a:srgbClr val="FFFFFF"/>
+                </a:solidFill>
+                <a:latin typeface="DejaVu Sans Mono"/>
+              </a:defRPr>
+            </a:pPr>
             <a:r>
               <a:t>        &lt;param name="min"&gt;-20&lt;/param&gt;</a:t>
             </a:r>
-            <a:br/>
+          </a:p>
+          <a:p>
+            <a:pPr algn="l">
+              <a:spcAft>
+                <a:spcPts val="0"/>
+              </a:spcAft>
+              <a:defRPr sz="1400" b="0">
+                <a:solidFill>
+                  <a:srgbClr val="FFFFFF"/>
+                </a:solidFill>
+                <a:latin typeface="DejaVu Sans Mono"/>
+              </a:defRPr>
+            </a:pPr>
             <a:r>
               <a:t>        &lt;param name="max"&gt;20&lt;/param&gt;</a:t>
             </a:r>
-            <a:br/>
+          </a:p>
+          <a:p>
+            <a:pPr algn="l">
+              <a:spcAft>
+                <a:spcPts val="0"/>
+              </a:spcAft>
+              <a:defRPr sz="1400" b="0">
+                <a:solidFill>
+                  <a:srgbClr val="FFFFFF"/>
+                </a:solidFill>
+                <a:latin typeface="DejaVu Sans Mono"/>
+              </a:defRPr>
+            </a:pPr>
             <a:r>
               <a:t>      &lt;/command_interface&gt;</a:t>
             </a:r>
@@ -17324,7 +18055,7 @@
           </a:fontRef>
         </p:style>
         <p:txBody>
-          <a:bodyPr rtlCol="0" anchor="ctr" wrap="square" lIns="164592" rIns="164592" tIns="109728" bIns="36576"/>
+          <a:bodyPr rtlCol="0" anchor="ctr" wrap="square" lIns="164592" rIns="164592" tIns="109728" bIns="73152"/>
           <a:lstStyle/>
           <a:p>
             <a:pPr algn="l">
@@ -17341,47 +18072,179 @@
             <a:r>
               <a:t>      &lt;state_interface name="position"/&gt;</a:t>
             </a:r>
-            <a:br/>
+          </a:p>
+          <a:p>
+            <a:pPr algn="l">
+              <a:spcAft>
+                <a:spcPts val="0"/>
+              </a:spcAft>
+              <a:defRPr sz="1400" b="0">
+                <a:solidFill>
+                  <a:srgbClr val="FFFFFF"/>
+                </a:solidFill>
+                <a:latin typeface="DejaVu Sans Mono"/>
+              </a:defRPr>
+            </a:pPr>
             <a:r>
               <a:t>      &lt;state_interface name="velocity"/&gt;</a:t>
             </a:r>
-            <a:br/>
+          </a:p>
+          <a:p>
+            <a:pPr algn="l">
+              <a:spcAft>
+                <a:spcPts val="0"/>
+              </a:spcAft>
+              <a:defRPr sz="1400" b="0">
+                <a:solidFill>
+                  <a:srgbClr val="FFFFFF"/>
+                </a:solidFill>
+                <a:latin typeface="DejaVu Sans Mono"/>
+              </a:defRPr>
+            </a:pPr>
             <a:r>
               <a:t>    &lt;/joint&gt;</a:t>
             </a:r>
-            <a:br/>
+          </a:p>
+          <a:p>
+            <a:pPr algn="l">
+              <a:spcAft>
+                <a:spcPts val="0"/>
+              </a:spcAft>
+              <a:defRPr sz="1400" b="0">
+                <a:solidFill>
+                  <a:srgbClr val="FFFFFF"/>
+                </a:solidFill>
+                <a:latin typeface="DejaVu Sans Mono"/>
+              </a:defRPr>
+            </a:pPr>
             <a:r>
               <a:t>    &lt;joint name="right_wheel_joint"&gt;</a:t>
             </a:r>
-            <a:br/>
+          </a:p>
+          <a:p>
+            <a:pPr algn="l">
+              <a:spcAft>
+                <a:spcPts val="0"/>
+              </a:spcAft>
+              <a:defRPr sz="1400" b="0">
+                <a:solidFill>
+                  <a:srgbClr val="FFFFFF"/>
+                </a:solidFill>
+                <a:latin typeface="DejaVu Sans Mono"/>
+              </a:defRPr>
+            </a:pPr>
             <a:r>
               <a:t>      &lt;command_interface name="velocity"&gt;</a:t>
             </a:r>
-            <a:br/>
+          </a:p>
+          <a:p>
+            <a:pPr algn="l">
+              <a:spcAft>
+                <a:spcPts val="0"/>
+              </a:spcAft>
+              <a:defRPr sz="1400" b="0">
+                <a:solidFill>
+                  <a:srgbClr val="FFFFFF"/>
+                </a:solidFill>
+                <a:latin typeface="DejaVu Sans Mono"/>
+              </a:defRPr>
+            </a:pPr>
             <a:r>
               <a:t>        &lt;param name="min"&gt;-20&lt;/param&gt;</a:t>
             </a:r>
-            <a:br/>
+          </a:p>
+          <a:p>
+            <a:pPr algn="l">
+              <a:spcAft>
+                <a:spcPts val="0"/>
+              </a:spcAft>
+              <a:defRPr sz="1400" b="0">
+                <a:solidFill>
+                  <a:srgbClr val="FFFFFF"/>
+                </a:solidFill>
+                <a:latin typeface="DejaVu Sans Mono"/>
+              </a:defRPr>
+            </a:pPr>
             <a:r>
               <a:t>        &lt;param name="max"&gt;20&lt;/param&gt;</a:t>
             </a:r>
-            <a:br/>
+          </a:p>
+          <a:p>
+            <a:pPr algn="l">
+              <a:spcAft>
+                <a:spcPts val="0"/>
+              </a:spcAft>
+              <a:defRPr sz="1400" b="0">
+                <a:solidFill>
+                  <a:srgbClr val="FFFFFF"/>
+                </a:solidFill>
+                <a:latin typeface="DejaVu Sans Mono"/>
+              </a:defRPr>
+            </a:pPr>
             <a:r>
               <a:t>      &lt;/command_interface&gt;</a:t>
             </a:r>
-            <a:br/>
+          </a:p>
+          <a:p>
+            <a:pPr algn="l">
+              <a:spcAft>
+                <a:spcPts val="0"/>
+              </a:spcAft>
+              <a:defRPr sz="1400" b="0">
+                <a:solidFill>
+                  <a:srgbClr val="FFFFFF"/>
+                </a:solidFill>
+                <a:latin typeface="DejaVu Sans Mono"/>
+              </a:defRPr>
+            </a:pPr>
             <a:r>
               <a:t>      &lt;state_interface name="position"/&gt;</a:t>
             </a:r>
-            <a:br/>
+          </a:p>
+          <a:p>
+            <a:pPr algn="l">
+              <a:spcAft>
+                <a:spcPts val="0"/>
+              </a:spcAft>
+              <a:defRPr sz="1400" b="0">
+                <a:solidFill>
+                  <a:srgbClr val="FFFFFF"/>
+                </a:solidFill>
+                <a:latin typeface="DejaVu Sans Mono"/>
+              </a:defRPr>
+            </a:pPr>
             <a:r>
               <a:t>      &lt;state_interface name="velocity"/&gt;</a:t>
             </a:r>
-            <a:br/>
+          </a:p>
+          <a:p>
+            <a:pPr algn="l">
+              <a:spcAft>
+                <a:spcPts val="0"/>
+              </a:spcAft>
+              <a:defRPr sz="1400" b="0">
+                <a:solidFill>
+                  <a:srgbClr val="FFFFFF"/>
+                </a:solidFill>
+                <a:latin typeface="DejaVu Sans Mono"/>
+              </a:defRPr>
+            </a:pPr>
             <a:r>
               <a:t>    &lt;/joint&gt;</a:t>
             </a:r>
-            <a:br/>
+          </a:p>
+          <a:p>
+            <a:pPr algn="l">
+              <a:spcAft>
+                <a:spcPts val="0"/>
+              </a:spcAft>
+              <a:defRPr sz="1400" b="0">
+                <a:solidFill>
+                  <a:srgbClr val="FFFFFF"/>
+                </a:solidFill>
+                <a:latin typeface="DejaVu Sans Mono"/>
+              </a:defRPr>
+            </a:pPr>
             <a:r>
               <a:t>  &lt;/ros2_control&gt;</a:t>
             </a:r>
@@ -17798,7 +18661,7 @@
           </a:fontRef>
         </p:style>
         <p:txBody>
-          <a:bodyPr rtlCol="0" anchor="ctr" wrap="square" lIns="164592" rIns="164592" tIns="109728" bIns="36576"/>
+          <a:bodyPr rtlCol="0" anchor="ctr" wrap="square" lIns="164592" rIns="164592" tIns="109728" bIns="73152"/>
           <a:lstStyle/>
           <a:p>
             <a:pPr algn="l">
@@ -17815,8 +18678,32 @@
             <a:r>
               <a:t>  </a:t>
             </a:r>
-            <a:br/>
-            <a:br/>
+          </a:p>
+          <a:p>
+            <a:pPr algn="l">
+              <a:spcAft>
+                <a:spcPts val="0"/>
+              </a:spcAft>
+              <a:defRPr sz="1400" b="0">
+                <a:solidFill>
+                  <a:srgbClr val="FFFFFF"/>
+                </a:solidFill>
+                <a:latin typeface="DejaVu Sans Mono"/>
+              </a:defRPr>
+            </a:pPr>
+          </a:p>
+          <a:p>
+            <a:pPr algn="l">
+              <a:spcAft>
+                <a:spcPts val="0"/>
+              </a:spcAft>
+              <a:defRPr sz="1400" b="0">
+                <a:solidFill>
+                  <a:srgbClr val="FFFFFF"/>
+                </a:solidFill>
+                <a:latin typeface="DejaVu Sans Mono"/>
+              </a:defRPr>
+            </a:pPr>
             <a:r>
               <a:t>&lt;/robot&gt;</a:t>
             </a:r>
@@ -18288,7 +19175,7 @@
           </a:fontRef>
         </p:style>
         <p:txBody>
-          <a:bodyPr rtlCol="0" anchor="ctr" wrap="square" lIns="73152" rIns="73152" tIns="36576" bIns="36576"/>
+          <a:bodyPr rtlCol="0" anchor="ctr" wrap="square" lIns="109728" rIns="109728" tIns="73152" bIns="73152"/>
           <a:lstStyle/>
           <a:p>
             <a:pPr algn="l">
@@ -18305,7 +19192,19 @@
             <a:r>
               <a:t>mkdir -p ~/ros2_curri/my_agv_ws/src/agv_gazebo/models/agv_ros2_control</a:t>
             </a:r>
-            <a:br/>
+          </a:p>
+          <a:p>
+            <a:pPr algn="l">
+              <a:spcAft>
+                <a:spcPts val="0"/>
+              </a:spcAft>
+              <a:defRPr sz="1600" b="0">
+                <a:solidFill>
+                  <a:srgbClr val="FFFFFF"/>
+                </a:solidFill>
+                <a:latin typeface="DejaVu Sans Mono"/>
+              </a:defRPr>
+            </a:pPr>
             <a:r>
               <a:t>nano ~/ros2_curri/my_agv_ws/src/agv_gazebo/models/agv_ros2_control/model.sdf</a:t>
             </a:r>
@@ -21697,7 +22596,7 @@
           </a:fontRef>
         </p:style>
         <p:txBody>
-          <a:bodyPr rtlCol="0" anchor="ctr" wrap="square" lIns="164592" rIns="164592" tIns="109728" bIns="36576"/>
+          <a:bodyPr rtlCol="0" anchor="ctr" wrap="square" lIns="164592" rIns="164592" tIns="109728" bIns="73152"/>
           <a:lstStyle/>
           <a:p>
             <a:pPr algn="l">
@@ -21714,47 +22613,179 @@
             <a:r>
               <a:t>&lt;?xml version="1.0" ?&gt;</a:t>
             </a:r>
-            <a:br/>
+          </a:p>
+          <a:p>
+            <a:pPr algn="l">
+              <a:spcAft>
+                <a:spcPts val="0"/>
+              </a:spcAft>
+              <a:defRPr sz="1400" b="0">
+                <a:solidFill>
+                  <a:srgbClr val="FFFFFF"/>
+                </a:solidFill>
+                <a:latin typeface="DejaVu Sans Mono"/>
+              </a:defRPr>
+            </a:pPr>
             <a:r>
               <a:t>&lt;!-- M16-only model: gz_ros2_control owns wheel velocity commands. No native DiffDrive</a:t>
             </a:r>
-            <a:br/>
+          </a:p>
+          <a:p>
+            <a:pPr algn="l">
+              <a:spcAft>
+                <a:spcPts val="0"/>
+              </a:spcAft>
+              <a:defRPr sz="1400" b="0">
+                <a:solidFill>
+                  <a:srgbClr val="FFFFFF"/>
+                </a:solidFill>
+                <a:latin typeface="DejaVu Sans Mono"/>
+              </a:defRPr>
+            </a:pPr>
             <a:r>
               <a:t>  plugin is present. --&gt;</a:t>
             </a:r>
-            <a:br/>
+          </a:p>
+          <a:p>
+            <a:pPr algn="l">
+              <a:spcAft>
+                <a:spcPts val="0"/>
+              </a:spcAft>
+              <a:defRPr sz="1400" b="0">
+                <a:solidFill>
+                  <a:srgbClr val="FFFFFF"/>
+                </a:solidFill>
+                <a:latin typeface="DejaVu Sans Mono"/>
+              </a:defRPr>
+            </a:pPr>
             <a:r>
               <a:t>&lt;sdf version="1.10"&gt;</a:t>
             </a:r>
-            <a:br/>
+          </a:p>
+          <a:p>
+            <a:pPr algn="l">
+              <a:spcAft>
+                <a:spcPts val="0"/>
+              </a:spcAft>
+              <a:defRPr sz="1400" b="0">
+                <a:solidFill>
+                  <a:srgbClr val="FFFFFF"/>
+                </a:solidFill>
+                <a:latin typeface="DejaVu Sans Mono"/>
+              </a:defRPr>
+            </a:pPr>
             <a:r>
               <a:t>  </a:t>
             </a:r>
-            <a:br/>
+          </a:p>
+          <a:p>
+            <a:pPr algn="l">
+              <a:spcAft>
+                <a:spcPts val="0"/>
+              </a:spcAft>
+              <a:defRPr sz="1400" b="0">
+                <a:solidFill>
+                  <a:srgbClr val="FFFFFF"/>
+                </a:solidFill>
+                <a:latin typeface="DejaVu Sans Mono"/>
+              </a:defRPr>
+            </a:pPr>
             <a:r>
               <a:t>  </a:t>
             </a:r>
-            <a:br/>
+          </a:p>
+          <a:p>
+            <a:pPr algn="l">
+              <a:spcAft>
+                <a:spcPts val="0"/>
+              </a:spcAft>
+              <a:defRPr sz="1400" b="0">
+                <a:solidFill>
+                  <a:srgbClr val="FFFFFF"/>
+                </a:solidFill>
+                <a:latin typeface="DejaVu Sans Mono"/>
+              </a:defRPr>
+            </a:pPr>
             <a:r>
               <a:t>  &lt;model name="agv_ros2_control"&gt;</a:t>
             </a:r>
-            <a:br/>
+          </a:p>
+          <a:p>
+            <a:pPr algn="l">
+              <a:spcAft>
+                <a:spcPts val="0"/>
+              </a:spcAft>
+              <a:defRPr sz="1400" b="0">
+                <a:solidFill>
+                  <a:srgbClr val="FFFFFF"/>
+                </a:solidFill>
+                <a:latin typeface="DejaVu Sans Mono"/>
+              </a:defRPr>
+            </a:pPr>
             <a:r>
               <a:t>    </a:t>
             </a:r>
-            <a:br/>
+          </a:p>
+          <a:p>
+            <a:pPr algn="l">
+              <a:spcAft>
+                <a:spcPts val="0"/>
+              </a:spcAft>
+              <a:defRPr sz="1400" b="0">
+                <a:solidFill>
+                  <a:srgbClr val="FFFFFF"/>
+                </a:solidFill>
+                <a:latin typeface="DejaVu Sans Mono"/>
+              </a:defRPr>
+            </a:pPr>
             <a:r>
               <a:t>    </a:t>
             </a:r>
-            <a:br/>
+          </a:p>
+          <a:p>
+            <a:pPr algn="l">
+              <a:spcAft>
+                <a:spcPts val="0"/>
+              </a:spcAft>
+              <a:defRPr sz="1400" b="0">
+                <a:solidFill>
+                  <a:srgbClr val="FFFFFF"/>
+                </a:solidFill>
+                <a:latin typeface="DejaVu Sans Mono"/>
+              </a:defRPr>
+            </a:pPr>
             <a:r>
               <a:t>    &lt;link name="base_link"&gt;</a:t>
             </a:r>
-            <a:br/>
+          </a:p>
+          <a:p>
+            <a:pPr algn="l">
+              <a:spcAft>
+                <a:spcPts val="0"/>
+              </a:spcAft>
+              <a:defRPr sz="1400" b="0">
+                <a:solidFill>
+                  <a:srgbClr val="FFFFFF"/>
+                </a:solidFill>
+                <a:latin typeface="DejaVu Sans Mono"/>
+              </a:defRPr>
+            </a:pPr>
             <a:r>
               <a:t>      &lt;pose&gt;0 0 0.16 0 0 0&lt;/pose&gt;</a:t>
             </a:r>
-            <a:br/>
+          </a:p>
+          <a:p>
+            <a:pPr algn="l">
+              <a:spcAft>
+                <a:spcPts val="0"/>
+              </a:spcAft>
+              <a:defRPr sz="1400" b="0">
+                <a:solidFill>
+                  <a:srgbClr val="FFFFFF"/>
+                </a:solidFill>
+                <a:latin typeface="DejaVu Sans Mono"/>
+              </a:defRPr>
+            </a:pPr>
             <a:r>
               <a:t>      &lt;inertial&gt;</a:t>
             </a:r>
@@ -22590,7 +23621,7 @@
           </a:fontRef>
         </p:style>
         <p:txBody>
-          <a:bodyPr rtlCol="0" anchor="ctr" wrap="square" lIns="164592" rIns="164592" tIns="109728" bIns="36576"/>
+          <a:bodyPr rtlCol="0" anchor="ctr" wrap="square" lIns="164592" rIns="164592" tIns="109728" bIns="73152"/>
           <a:lstStyle/>
           <a:p>
             <a:pPr algn="l">
@@ -22607,47 +23638,179 @@
             <a:r>
               <a:t>        &lt;mass&gt;12.0&lt;/mass&gt;</a:t>
             </a:r>
-            <a:br/>
+          </a:p>
+          <a:p>
+            <a:pPr algn="l">
+              <a:spcAft>
+                <a:spcPts val="0"/>
+              </a:spcAft>
+              <a:defRPr sz="1400" b="0">
+                <a:solidFill>
+                  <a:srgbClr val="FFFFFF"/>
+                </a:solidFill>
+                <a:latin typeface="DejaVu Sans Mono"/>
+              </a:defRPr>
+            </a:pPr>
             <a:r>
               <a:t>        &lt;inertia&gt;</a:t>
             </a:r>
-            <a:br/>
+          </a:p>
+          <a:p>
+            <a:pPr algn="l">
+              <a:spcAft>
+                <a:spcPts val="0"/>
+              </a:spcAft>
+              <a:defRPr sz="1400" b="0">
+                <a:solidFill>
+                  <a:srgbClr val="FFFFFF"/>
+                </a:solidFill>
+                <a:latin typeface="DejaVu Sans Mono"/>
+              </a:defRPr>
+            </a:pPr>
             <a:r>
               <a:t>          &lt;ixx&gt;0.20&lt;/ixx&gt;</a:t>
             </a:r>
-            <a:br/>
+          </a:p>
+          <a:p>
+            <a:pPr algn="l">
+              <a:spcAft>
+                <a:spcPts val="0"/>
+              </a:spcAft>
+              <a:defRPr sz="1400" b="0">
+                <a:solidFill>
+                  <a:srgbClr val="FFFFFF"/>
+                </a:solidFill>
+                <a:latin typeface="DejaVu Sans Mono"/>
+              </a:defRPr>
+            </a:pPr>
             <a:r>
               <a:t>          &lt;iyy&gt;0.40&lt;/iyy&gt;</a:t>
             </a:r>
-            <a:br/>
+          </a:p>
+          <a:p>
+            <a:pPr algn="l">
+              <a:spcAft>
+                <a:spcPts val="0"/>
+              </a:spcAft>
+              <a:defRPr sz="1400" b="0">
+                <a:solidFill>
+                  <a:srgbClr val="FFFFFF"/>
+                </a:solidFill>
+                <a:latin typeface="DejaVu Sans Mono"/>
+              </a:defRPr>
+            </a:pPr>
             <a:r>
               <a:t>          &lt;izz&gt;0.50&lt;/izz&gt;</a:t>
             </a:r>
-            <a:br/>
+          </a:p>
+          <a:p>
+            <a:pPr algn="l">
+              <a:spcAft>
+                <a:spcPts val="0"/>
+              </a:spcAft>
+              <a:defRPr sz="1400" b="0">
+                <a:solidFill>
+                  <a:srgbClr val="FFFFFF"/>
+                </a:solidFill>
+                <a:latin typeface="DejaVu Sans Mono"/>
+              </a:defRPr>
+            </a:pPr>
             <a:r>
               <a:t>        &lt;/inertia&gt;</a:t>
             </a:r>
-            <a:br/>
+          </a:p>
+          <a:p>
+            <a:pPr algn="l">
+              <a:spcAft>
+                <a:spcPts val="0"/>
+              </a:spcAft>
+              <a:defRPr sz="1400" b="0">
+                <a:solidFill>
+                  <a:srgbClr val="FFFFFF"/>
+                </a:solidFill>
+                <a:latin typeface="DejaVu Sans Mono"/>
+              </a:defRPr>
+            </a:pPr>
             <a:r>
               <a:t>      &lt;/inertial&gt;</a:t>
             </a:r>
-            <a:br/>
+          </a:p>
+          <a:p>
+            <a:pPr algn="l">
+              <a:spcAft>
+                <a:spcPts val="0"/>
+              </a:spcAft>
+              <a:defRPr sz="1400" b="0">
+                <a:solidFill>
+                  <a:srgbClr val="FFFFFF"/>
+                </a:solidFill>
+                <a:latin typeface="DejaVu Sans Mono"/>
+              </a:defRPr>
+            </a:pPr>
             <a:r>
               <a:t>      &lt;visual name="body"&gt;</a:t>
             </a:r>
-            <a:br/>
+          </a:p>
+          <a:p>
+            <a:pPr algn="l">
+              <a:spcAft>
+                <a:spcPts val="0"/>
+              </a:spcAft>
+              <a:defRPr sz="1400" b="0">
+                <a:solidFill>
+                  <a:srgbClr val="FFFFFF"/>
+                </a:solidFill>
+                <a:latin typeface="DejaVu Sans Mono"/>
+              </a:defRPr>
+            </a:pPr>
             <a:r>
               <a:t>        &lt;geometry&gt;</a:t>
             </a:r>
-            <a:br/>
+          </a:p>
+          <a:p>
+            <a:pPr algn="l">
+              <a:spcAft>
+                <a:spcPts val="0"/>
+              </a:spcAft>
+              <a:defRPr sz="1400" b="0">
+                <a:solidFill>
+                  <a:srgbClr val="FFFFFF"/>
+                </a:solidFill>
+                <a:latin typeface="DejaVu Sans Mono"/>
+              </a:defRPr>
+            </a:pPr>
             <a:r>
               <a:t>          &lt;box&gt;</a:t>
             </a:r>
-            <a:br/>
+          </a:p>
+          <a:p>
+            <a:pPr algn="l">
+              <a:spcAft>
+                <a:spcPts val="0"/>
+              </a:spcAft>
+              <a:defRPr sz="1400" b="0">
+                <a:solidFill>
+                  <a:srgbClr val="FFFFFF"/>
+                </a:solidFill>
+                <a:latin typeface="DejaVu Sans Mono"/>
+              </a:defRPr>
+            </a:pPr>
             <a:r>
               <a:t>            &lt;size&gt;0.60 0.42 0.16&lt;/size&gt;</a:t>
             </a:r>
-            <a:br/>
+          </a:p>
+          <a:p>
+            <a:pPr algn="l">
+              <a:spcAft>
+                <a:spcPts val="0"/>
+              </a:spcAft>
+              <a:defRPr sz="1400" b="0">
+                <a:solidFill>
+                  <a:srgbClr val="FFFFFF"/>
+                </a:solidFill>
+                <a:latin typeface="DejaVu Sans Mono"/>
+              </a:defRPr>
+            </a:pPr>
             <a:r>
               <a:t>          &lt;/box&gt;</a:t>
             </a:r>
@@ -23064,7 +24227,7 @@
           </a:fontRef>
         </p:style>
         <p:txBody>
-          <a:bodyPr rtlCol="0" anchor="ctr" wrap="square" lIns="164592" rIns="164592" tIns="109728" bIns="36576"/>
+          <a:bodyPr rtlCol="0" anchor="ctr" wrap="square" lIns="164592" rIns="164592" tIns="109728" bIns="73152"/>
           <a:lstStyle/>
           <a:p>
             <a:pPr algn="l">
@@ -23081,47 +24244,179 @@
             <a:r>
               <a:t>        &lt;/geometry&gt;</a:t>
             </a:r>
-            <a:br/>
+          </a:p>
+          <a:p>
+            <a:pPr algn="l">
+              <a:spcAft>
+                <a:spcPts val="0"/>
+              </a:spcAft>
+              <a:defRPr sz="1400" b="0">
+                <a:solidFill>
+                  <a:srgbClr val="FFFFFF"/>
+                </a:solidFill>
+                <a:latin typeface="DejaVu Sans Mono"/>
+              </a:defRPr>
+            </a:pPr>
             <a:r>
               <a:t>        &lt;material&gt;</a:t>
             </a:r>
-            <a:br/>
+          </a:p>
+          <a:p>
+            <a:pPr algn="l">
+              <a:spcAft>
+                <a:spcPts val="0"/>
+              </a:spcAft>
+              <a:defRPr sz="1400" b="0">
+                <a:solidFill>
+                  <a:srgbClr val="FFFFFF"/>
+                </a:solidFill>
+                <a:latin typeface="DejaVu Sans Mono"/>
+              </a:defRPr>
+            </a:pPr>
             <a:r>
               <a:t>          &lt;diffuse&gt;0.10 0.35 0.80 1&lt;/diffuse&gt;</a:t>
             </a:r>
-            <a:br/>
+          </a:p>
+          <a:p>
+            <a:pPr algn="l">
+              <a:spcAft>
+                <a:spcPts val="0"/>
+              </a:spcAft>
+              <a:defRPr sz="1400" b="0">
+                <a:solidFill>
+                  <a:srgbClr val="FFFFFF"/>
+                </a:solidFill>
+                <a:latin typeface="DejaVu Sans Mono"/>
+              </a:defRPr>
+            </a:pPr>
             <a:r>
               <a:t>        &lt;/material&gt;</a:t>
             </a:r>
-            <a:br/>
+          </a:p>
+          <a:p>
+            <a:pPr algn="l">
+              <a:spcAft>
+                <a:spcPts val="0"/>
+              </a:spcAft>
+              <a:defRPr sz="1400" b="0">
+                <a:solidFill>
+                  <a:srgbClr val="FFFFFF"/>
+                </a:solidFill>
+                <a:latin typeface="DejaVu Sans Mono"/>
+              </a:defRPr>
+            </a:pPr>
             <a:r>
               <a:t>      &lt;/visual&gt;</a:t>
             </a:r>
-            <a:br/>
+          </a:p>
+          <a:p>
+            <a:pPr algn="l">
+              <a:spcAft>
+                <a:spcPts val="0"/>
+              </a:spcAft>
+              <a:defRPr sz="1400" b="0">
+                <a:solidFill>
+                  <a:srgbClr val="FFFFFF"/>
+                </a:solidFill>
+                <a:latin typeface="DejaVu Sans Mono"/>
+              </a:defRPr>
+            </a:pPr>
             <a:r>
               <a:t>      &lt;collision name="body_collision"&gt;</a:t>
             </a:r>
-            <a:br/>
+          </a:p>
+          <a:p>
+            <a:pPr algn="l">
+              <a:spcAft>
+                <a:spcPts val="0"/>
+              </a:spcAft>
+              <a:defRPr sz="1400" b="0">
+                <a:solidFill>
+                  <a:srgbClr val="FFFFFF"/>
+                </a:solidFill>
+                <a:latin typeface="DejaVu Sans Mono"/>
+              </a:defRPr>
+            </a:pPr>
             <a:r>
               <a:t>        &lt;geometry&gt;</a:t>
             </a:r>
-            <a:br/>
+          </a:p>
+          <a:p>
+            <a:pPr algn="l">
+              <a:spcAft>
+                <a:spcPts val="0"/>
+              </a:spcAft>
+              <a:defRPr sz="1400" b="0">
+                <a:solidFill>
+                  <a:srgbClr val="FFFFFF"/>
+                </a:solidFill>
+                <a:latin typeface="DejaVu Sans Mono"/>
+              </a:defRPr>
+            </a:pPr>
             <a:r>
               <a:t>          &lt;box&gt;</a:t>
             </a:r>
-            <a:br/>
+          </a:p>
+          <a:p>
+            <a:pPr algn="l">
+              <a:spcAft>
+                <a:spcPts val="0"/>
+              </a:spcAft>
+              <a:defRPr sz="1400" b="0">
+                <a:solidFill>
+                  <a:srgbClr val="FFFFFF"/>
+                </a:solidFill>
+                <a:latin typeface="DejaVu Sans Mono"/>
+              </a:defRPr>
+            </a:pPr>
             <a:r>
               <a:t>            &lt;size&gt;0.60 0.42 0.16&lt;/size&gt;</a:t>
             </a:r>
-            <a:br/>
+          </a:p>
+          <a:p>
+            <a:pPr algn="l">
+              <a:spcAft>
+                <a:spcPts val="0"/>
+              </a:spcAft>
+              <a:defRPr sz="1400" b="0">
+                <a:solidFill>
+                  <a:srgbClr val="FFFFFF"/>
+                </a:solidFill>
+                <a:latin typeface="DejaVu Sans Mono"/>
+              </a:defRPr>
+            </a:pPr>
             <a:r>
               <a:t>          &lt;/box&gt;</a:t>
             </a:r>
-            <a:br/>
+          </a:p>
+          <a:p>
+            <a:pPr algn="l">
+              <a:spcAft>
+                <a:spcPts val="0"/>
+              </a:spcAft>
+              <a:defRPr sz="1400" b="0">
+                <a:solidFill>
+                  <a:srgbClr val="FFFFFF"/>
+                </a:solidFill>
+                <a:latin typeface="DejaVu Sans Mono"/>
+              </a:defRPr>
+            </a:pPr>
             <a:r>
               <a:t>        &lt;/geometry&gt;</a:t>
             </a:r>
-            <a:br/>
+          </a:p>
+          <a:p>
+            <a:pPr algn="l">
+              <a:spcAft>
+                <a:spcPts val="0"/>
+              </a:spcAft>
+              <a:defRPr sz="1400" b="0">
+                <a:solidFill>
+                  <a:srgbClr val="FFFFFF"/>
+                </a:solidFill>
+                <a:latin typeface="DejaVu Sans Mono"/>
+              </a:defRPr>
+            </a:pPr>
             <a:r>
               <a:t>      &lt;/collision&gt;</a:t>
             </a:r>
@@ -23538,7 +24833,7 @@
           </a:fontRef>
         </p:style>
         <p:txBody>
-          <a:bodyPr rtlCol="0" anchor="ctr" wrap="square" lIns="164592" rIns="164592" tIns="109728" bIns="36576"/>
+          <a:bodyPr rtlCol="0" anchor="ctr" wrap="square" lIns="164592" rIns="164592" tIns="109728" bIns="73152"/>
           <a:lstStyle/>
           <a:p>
             <a:pPr algn="l">
@@ -23555,47 +24850,179 @@
             <a:r>
               <a:t>    &lt;/link&gt;</a:t>
             </a:r>
-            <a:br/>
+          </a:p>
+          <a:p>
+            <a:pPr algn="l">
+              <a:spcAft>
+                <a:spcPts val="0"/>
+              </a:spcAft>
+              <a:defRPr sz="1400" b="0">
+                <a:solidFill>
+                  <a:srgbClr val="FFFFFF"/>
+                </a:solidFill>
+                <a:latin typeface="DejaVu Sans Mono"/>
+              </a:defRPr>
+            </a:pPr>
             <a:r>
               <a:t>    </a:t>
             </a:r>
-            <a:br/>
+          </a:p>
+          <a:p>
+            <a:pPr algn="l">
+              <a:spcAft>
+                <a:spcPts val="0"/>
+              </a:spcAft>
+              <a:defRPr sz="1400" b="0">
+                <a:solidFill>
+                  <a:srgbClr val="FFFFFF"/>
+                </a:solidFill>
+                <a:latin typeface="DejaVu Sans Mono"/>
+              </a:defRPr>
+            </a:pPr>
             <a:r>
               <a:t>    </a:t>
             </a:r>
-            <a:br/>
+          </a:p>
+          <a:p>
+            <a:pPr algn="l">
+              <a:spcAft>
+                <a:spcPts val="0"/>
+              </a:spcAft>
+              <a:defRPr sz="1400" b="0">
+                <a:solidFill>
+                  <a:srgbClr val="FFFFFF"/>
+                </a:solidFill>
+                <a:latin typeface="DejaVu Sans Mono"/>
+              </a:defRPr>
+            </a:pPr>
             <a:r>
               <a:t>    &lt;link name="left_wheel_link"&gt;</a:t>
             </a:r>
-            <a:br/>
+          </a:p>
+          <a:p>
+            <a:pPr algn="l">
+              <a:spcAft>
+                <a:spcPts val="0"/>
+              </a:spcAft>
+              <a:defRPr sz="1400" b="0">
+                <a:solidFill>
+                  <a:srgbClr val="FFFFFF"/>
+                </a:solidFill>
+                <a:latin typeface="DejaVu Sans Mono"/>
+              </a:defRPr>
+            </a:pPr>
             <a:r>
               <a:t>      &lt;pose relative_to="base_link"&gt;0 0.19 -0.08 1.5708 0 0&lt;/pose&gt;</a:t>
             </a:r>
-            <a:br/>
+          </a:p>
+          <a:p>
+            <a:pPr algn="l">
+              <a:spcAft>
+                <a:spcPts val="0"/>
+              </a:spcAft>
+              <a:defRPr sz="1400" b="0">
+                <a:solidFill>
+                  <a:srgbClr val="FFFFFF"/>
+                </a:solidFill>
+                <a:latin typeface="DejaVu Sans Mono"/>
+              </a:defRPr>
+            </a:pPr>
             <a:r>
               <a:t>      &lt;inertial&gt;</a:t>
             </a:r>
-            <a:br/>
+          </a:p>
+          <a:p>
+            <a:pPr algn="l">
+              <a:spcAft>
+                <a:spcPts val="0"/>
+              </a:spcAft>
+              <a:defRPr sz="1400" b="0">
+                <a:solidFill>
+                  <a:srgbClr val="FFFFFF"/>
+                </a:solidFill>
+                <a:latin typeface="DejaVu Sans Mono"/>
+              </a:defRPr>
+            </a:pPr>
             <a:r>
               <a:t>        &lt;mass&gt;0.6&lt;/mass&gt;</a:t>
             </a:r>
-            <a:br/>
+          </a:p>
+          <a:p>
+            <a:pPr algn="l">
+              <a:spcAft>
+                <a:spcPts val="0"/>
+              </a:spcAft>
+              <a:defRPr sz="1400" b="0">
+                <a:solidFill>
+                  <a:srgbClr val="FFFFFF"/>
+                </a:solidFill>
+                <a:latin typeface="DejaVu Sans Mono"/>
+              </a:defRPr>
+            </a:pPr>
             <a:r>
               <a:t>        &lt;inertia&gt;</a:t>
             </a:r>
-            <a:br/>
+          </a:p>
+          <a:p>
+            <a:pPr algn="l">
+              <a:spcAft>
+                <a:spcPts val="0"/>
+              </a:spcAft>
+              <a:defRPr sz="1400" b="0">
+                <a:solidFill>
+                  <a:srgbClr val="FFFFFF"/>
+                </a:solidFill>
+                <a:latin typeface="DejaVu Sans Mono"/>
+              </a:defRPr>
+            </a:pPr>
             <a:r>
               <a:t>          &lt;ixx&gt;0.002&lt;/ixx&gt;</a:t>
             </a:r>
-            <a:br/>
+          </a:p>
+          <a:p>
+            <a:pPr algn="l">
+              <a:spcAft>
+                <a:spcPts val="0"/>
+              </a:spcAft>
+              <a:defRPr sz="1400" b="0">
+                <a:solidFill>
+                  <a:srgbClr val="FFFFFF"/>
+                </a:solidFill>
+                <a:latin typeface="DejaVu Sans Mono"/>
+              </a:defRPr>
+            </a:pPr>
             <a:r>
               <a:t>          &lt;iyy&gt;0.002&lt;/iyy&gt;</a:t>
             </a:r>
-            <a:br/>
+          </a:p>
+          <a:p>
+            <a:pPr algn="l">
+              <a:spcAft>
+                <a:spcPts val="0"/>
+              </a:spcAft>
+              <a:defRPr sz="1400" b="0">
+                <a:solidFill>
+                  <a:srgbClr val="FFFFFF"/>
+                </a:solidFill>
+                <a:latin typeface="DejaVu Sans Mono"/>
+              </a:defRPr>
+            </a:pPr>
             <a:r>
               <a:t>          &lt;izz&gt;0.001&lt;/izz&gt;</a:t>
             </a:r>
-            <a:br/>
+          </a:p>
+          <a:p>
+            <a:pPr algn="l">
+              <a:spcAft>
+                <a:spcPts val="0"/>
+              </a:spcAft>
+              <a:defRPr sz="1400" b="0">
+                <a:solidFill>
+                  <a:srgbClr val="FFFFFF"/>
+                </a:solidFill>
+                <a:latin typeface="DejaVu Sans Mono"/>
+              </a:defRPr>
+            </a:pPr>
             <a:r>
               <a:t>        &lt;/inertia&gt;</a:t>
             </a:r>
@@ -24012,7 +25439,7 @@
           </a:fontRef>
         </p:style>
         <p:txBody>
-          <a:bodyPr rtlCol="0" anchor="ctr" wrap="square" lIns="164592" rIns="164592" tIns="109728" bIns="36576"/>
+          <a:bodyPr rtlCol="0" anchor="ctr" wrap="square" lIns="164592" rIns="164592" tIns="109728" bIns="73152"/>
           <a:lstStyle/>
           <a:p>
             <a:pPr algn="l">
@@ -24029,47 +25456,179 @@
             <a:r>
               <a:t>      &lt;/inertial&gt;</a:t>
             </a:r>
-            <a:br/>
+          </a:p>
+          <a:p>
+            <a:pPr algn="l">
+              <a:spcAft>
+                <a:spcPts val="0"/>
+              </a:spcAft>
+              <a:defRPr sz="1400" b="0">
+                <a:solidFill>
+                  <a:srgbClr val="FFFFFF"/>
+                </a:solidFill>
+                <a:latin typeface="DejaVu Sans Mono"/>
+              </a:defRPr>
+            </a:pPr>
             <a:r>
               <a:t>      &lt;visual name="wheel"&gt;</a:t>
             </a:r>
-            <a:br/>
+          </a:p>
+          <a:p>
+            <a:pPr algn="l">
+              <a:spcAft>
+                <a:spcPts val="0"/>
+              </a:spcAft>
+              <a:defRPr sz="1400" b="0">
+                <a:solidFill>
+                  <a:srgbClr val="FFFFFF"/>
+                </a:solidFill>
+                <a:latin typeface="DejaVu Sans Mono"/>
+              </a:defRPr>
+            </a:pPr>
             <a:r>
               <a:t>        &lt;geometry&gt;</a:t>
             </a:r>
-            <a:br/>
+          </a:p>
+          <a:p>
+            <a:pPr algn="l">
+              <a:spcAft>
+                <a:spcPts val="0"/>
+              </a:spcAft>
+              <a:defRPr sz="1400" b="0">
+                <a:solidFill>
+                  <a:srgbClr val="FFFFFF"/>
+                </a:solidFill>
+                <a:latin typeface="DejaVu Sans Mono"/>
+              </a:defRPr>
+            </a:pPr>
             <a:r>
               <a:t>          &lt;cylinder&gt;</a:t>
             </a:r>
-            <a:br/>
+          </a:p>
+          <a:p>
+            <a:pPr algn="l">
+              <a:spcAft>
+                <a:spcPts val="0"/>
+              </a:spcAft>
+              <a:defRPr sz="1400" b="0">
+                <a:solidFill>
+                  <a:srgbClr val="FFFFFF"/>
+                </a:solidFill>
+                <a:latin typeface="DejaVu Sans Mono"/>
+              </a:defRPr>
+            </a:pPr>
             <a:r>
               <a:t>            &lt;radius&gt;0.08&lt;/radius&gt;</a:t>
             </a:r>
-            <a:br/>
+          </a:p>
+          <a:p>
+            <a:pPr algn="l">
+              <a:spcAft>
+                <a:spcPts val="0"/>
+              </a:spcAft>
+              <a:defRPr sz="1400" b="0">
+                <a:solidFill>
+                  <a:srgbClr val="FFFFFF"/>
+                </a:solidFill>
+                <a:latin typeface="DejaVu Sans Mono"/>
+              </a:defRPr>
+            </a:pPr>
             <a:r>
               <a:t>            &lt;length&gt;0.05&lt;/length&gt;</a:t>
             </a:r>
-            <a:br/>
+          </a:p>
+          <a:p>
+            <a:pPr algn="l">
+              <a:spcAft>
+                <a:spcPts val="0"/>
+              </a:spcAft>
+              <a:defRPr sz="1400" b="0">
+                <a:solidFill>
+                  <a:srgbClr val="FFFFFF"/>
+                </a:solidFill>
+                <a:latin typeface="DejaVu Sans Mono"/>
+              </a:defRPr>
+            </a:pPr>
             <a:r>
               <a:t>          &lt;/cylinder&gt;</a:t>
             </a:r>
-            <a:br/>
+          </a:p>
+          <a:p>
+            <a:pPr algn="l">
+              <a:spcAft>
+                <a:spcPts val="0"/>
+              </a:spcAft>
+              <a:defRPr sz="1400" b="0">
+                <a:solidFill>
+                  <a:srgbClr val="FFFFFF"/>
+                </a:solidFill>
+                <a:latin typeface="DejaVu Sans Mono"/>
+              </a:defRPr>
+            </a:pPr>
             <a:r>
               <a:t>        &lt;/geometry&gt;</a:t>
             </a:r>
-            <a:br/>
+          </a:p>
+          <a:p>
+            <a:pPr algn="l">
+              <a:spcAft>
+                <a:spcPts val="0"/>
+              </a:spcAft>
+              <a:defRPr sz="1400" b="0">
+                <a:solidFill>
+                  <a:srgbClr val="FFFFFF"/>
+                </a:solidFill>
+                <a:latin typeface="DejaVu Sans Mono"/>
+              </a:defRPr>
+            </a:pPr>
             <a:r>
               <a:t>      &lt;/visual&gt;</a:t>
             </a:r>
-            <a:br/>
+          </a:p>
+          <a:p>
+            <a:pPr algn="l">
+              <a:spcAft>
+                <a:spcPts val="0"/>
+              </a:spcAft>
+              <a:defRPr sz="1400" b="0">
+                <a:solidFill>
+                  <a:srgbClr val="FFFFFF"/>
+                </a:solidFill>
+                <a:latin typeface="DejaVu Sans Mono"/>
+              </a:defRPr>
+            </a:pPr>
             <a:r>
               <a:t>      &lt;collision name="collision"&gt;</a:t>
             </a:r>
-            <a:br/>
+          </a:p>
+          <a:p>
+            <a:pPr algn="l">
+              <a:spcAft>
+                <a:spcPts val="0"/>
+              </a:spcAft>
+              <a:defRPr sz="1400" b="0">
+                <a:solidFill>
+                  <a:srgbClr val="FFFFFF"/>
+                </a:solidFill>
+                <a:latin typeface="DejaVu Sans Mono"/>
+              </a:defRPr>
+            </a:pPr>
             <a:r>
               <a:t>        &lt;geometry&gt;</a:t>
             </a:r>
-            <a:br/>
+          </a:p>
+          <a:p>
+            <a:pPr algn="l">
+              <a:spcAft>
+                <a:spcPts val="0"/>
+              </a:spcAft>
+              <a:defRPr sz="1400" b="0">
+                <a:solidFill>
+                  <a:srgbClr val="FFFFFF"/>
+                </a:solidFill>
+                <a:latin typeface="DejaVu Sans Mono"/>
+              </a:defRPr>
+            </a:pPr>
             <a:r>
               <a:t>          &lt;cylinder&gt;</a:t>
             </a:r>
@@ -24486,7 +26045,7 @@
           </a:fontRef>
         </p:style>
         <p:txBody>
-          <a:bodyPr rtlCol="0" anchor="ctr" wrap="square" lIns="164592" rIns="164592" tIns="109728" bIns="36576"/>
+          <a:bodyPr rtlCol="0" anchor="ctr" wrap="square" lIns="164592" rIns="164592" tIns="109728" bIns="73152"/>
           <a:lstStyle/>
           <a:p>
             <a:pPr algn="l">
@@ -24503,47 +26062,179 @@
             <a:r>
               <a:t>            &lt;radius&gt;0.08&lt;/radius&gt;</a:t>
             </a:r>
-            <a:br/>
+          </a:p>
+          <a:p>
+            <a:pPr algn="l">
+              <a:spcAft>
+                <a:spcPts val="0"/>
+              </a:spcAft>
+              <a:defRPr sz="1400" b="0">
+                <a:solidFill>
+                  <a:srgbClr val="FFFFFF"/>
+                </a:solidFill>
+                <a:latin typeface="DejaVu Sans Mono"/>
+              </a:defRPr>
+            </a:pPr>
             <a:r>
               <a:t>            &lt;length&gt;0.05&lt;/length&gt;</a:t>
             </a:r>
-            <a:br/>
+          </a:p>
+          <a:p>
+            <a:pPr algn="l">
+              <a:spcAft>
+                <a:spcPts val="0"/>
+              </a:spcAft>
+              <a:defRPr sz="1400" b="0">
+                <a:solidFill>
+                  <a:srgbClr val="FFFFFF"/>
+                </a:solidFill>
+                <a:latin typeface="DejaVu Sans Mono"/>
+              </a:defRPr>
+            </a:pPr>
             <a:r>
               <a:t>          &lt;/cylinder&gt;</a:t>
             </a:r>
-            <a:br/>
+          </a:p>
+          <a:p>
+            <a:pPr algn="l">
+              <a:spcAft>
+                <a:spcPts val="0"/>
+              </a:spcAft>
+              <a:defRPr sz="1400" b="0">
+                <a:solidFill>
+                  <a:srgbClr val="FFFFFF"/>
+                </a:solidFill>
+                <a:latin typeface="DejaVu Sans Mono"/>
+              </a:defRPr>
+            </a:pPr>
             <a:r>
               <a:t>        &lt;/geometry&gt;</a:t>
             </a:r>
-            <a:br/>
+          </a:p>
+          <a:p>
+            <a:pPr algn="l">
+              <a:spcAft>
+                <a:spcPts val="0"/>
+              </a:spcAft>
+              <a:defRPr sz="1400" b="0">
+                <a:solidFill>
+                  <a:srgbClr val="FFFFFF"/>
+                </a:solidFill>
+                <a:latin typeface="DejaVu Sans Mono"/>
+              </a:defRPr>
+            </a:pPr>
             <a:r>
               <a:t>        &lt;surface&gt;</a:t>
             </a:r>
-            <a:br/>
+          </a:p>
+          <a:p>
+            <a:pPr algn="l">
+              <a:spcAft>
+                <a:spcPts val="0"/>
+              </a:spcAft>
+              <a:defRPr sz="1400" b="0">
+                <a:solidFill>
+                  <a:srgbClr val="FFFFFF"/>
+                </a:solidFill>
+                <a:latin typeface="DejaVu Sans Mono"/>
+              </a:defRPr>
+            </a:pPr>
             <a:r>
               <a:t>          &lt;friction&gt;</a:t>
             </a:r>
-            <a:br/>
+          </a:p>
+          <a:p>
+            <a:pPr algn="l">
+              <a:spcAft>
+                <a:spcPts val="0"/>
+              </a:spcAft>
+              <a:defRPr sz="1400" b="0">
+                <a:solidFill>
+                  <a:srgbClr val="FFFFFF"/>
+                </a:solidFill>
+                <a:latin typeface="DejaVu Sans Mono"/>
+              </a:defRPr>
+            </a:pPr>
             <a:r>
               <a:t>            &lt;ode&gt;</a:t>
             </a:r>
-            <a:br/>
+          </a:p>
+          <a:p>
+            <a:pPr algn="l">
+              <a:spcAft>
+                <a:spcPts val="0"/>
+              </a:spcAft>
+              <a:defRPr sz="1400" b="0">
+                <a:solidFill>
+                  <a:srgbClr val="FFFFFF"/>
+                </a:solidFill>
+                <a:latin typeface="DejaVu Sans Mono"/>
+              </a:defRPr>
+            </a:pPr>
             <a:r>
               <a:t>              &lt;mu&gt;1.0&lt;/mu&gt;</a:t>
             </a:r>
-            <a:br/>
+          </a:p>
+          <a:p>
+            <a:pPr algn="l">
+              <a:spcAft>
+                <a:spcPts val="0"/>
+              </a:spcAft>
+              <a:defRPr sz="1400" b="0">
+                <a:solidFill>
+                  <a:srgbClr val="FFFFFF"/>
+                </a:solidFill>
+                <a:latin typeface="DejaVu Sans Mono"/>
+              </a:defRPr>
+            </a:pPr>
             <a:r>
               <a:t>              &lt;mu2&gt;1.0&lt;/mu2&gt;</a:t>
             </a:r>
-            <a:br/>
+          </a:p>
+          <a:p>
+            <a:pPr algn="l">
+              <a:spcAft>
+                <a:spcPts val="0"/>
+              </a:spcAft>
+              <a:defRPr sz="1400" b="0">
+                <a:solidFill>
+                  <a:srgbClr val="FFFFFF"/>
+                </a:solidFill>
+                <a:latin typeface="DejaVu Sans Mono"/>
+              </a:defRPr>
+            </a:pPr>
             <a:r>
               <a:t>            &lt;/ode&gt;</a:t>
             </a:r>
-            <a:br/>
+          </a:p>
+          <a:p>
+            <a:pPr algn="l">
+              <a:spcAft>
+                <a:spcPts val="0"/>
+              </a:spcAft>
+              <a:defRPr sz="1400" b="0">
+                <a:solidFill>
+                  <a:srgbClr val="FFFFFF"/>
+                </a:solidFill>
+                <a:latin typeface="DejaVu Sans Mono"/>
+              </a:defRPr>
+            </a:pPr>
             <a:r>
               <a:t>          &lt;/friction&gt;</a:t>
             </a:r>
-            <a:br/>
+          </a:p>
+          <a:p>
+            <a:pPr algn="l">
+              <a:spcAft>
+                <a:spcPts val="0"/>
+              </a:spcAft>
+              <a:defRPr sz="1400" b="0">
+                <a:solidFill>
+                  <a:srgbClr val="FFFFFF"/>
+                </a:solidFill>
+                <a:latin typeface="DejaVu Sans Mono"/>
+              </a:defRPr>
+            </a:pPr>
             <a:r>
               <a:t>        &lt;/surface&gt;</a:t>
             </a:r>
@@ -24960,7 +26651,7 @@
           </a:fontRef>
         </p:style>
         <p:txBody>
-          <a:bodyPr rtlCol="0" anchor="ctr" wrap="square" lIns="164592" rIns="164592" tIns="109728" bIns="36576"/>
+          <a:bodyPr rtlCol="0" anchor="ctr" wrap="square" lIns="164592" rIns="164592" tIns="109728" bIns="73152"/>
           <a:lstStyle/>
           <a:p>
             <a:pPr algn="l">
@@ -24977,47 +26668,179 @@
             <a:r>
               <a:t>      &lt;/collision&gt;</a:t>
             </a:r>
-            <a:br/>
+          </a:p>
+          <a:p>
+            <a:pPr algn="l">
+              <a:spcAft>
+                <a:spcPts val="0"/>
+              </a:spcAft>
+              <a:defRPr sz="1400" b="0">
+                <a:solidFill>
+                  <a:srgbClr val="FFFFFF"/>
+                </a:solidFill>
+                <a:latin typeface="DejaVu Sans Mono"/>
+              </a:defRPr>
+            </a:pPr>
             <a:r>
               <a:t>    &lt;/link&gt;</a:t>
             </a:r>
-            <a:br/>
+          </a:p>
+          <a:p>
+            <a:pPr algn="l">
+              <a:spcAft>
+                <a:spcPts val="0"/>
+              </a:spcAft>
+              <a:defRPr sz="1400" b="0">
+                <a:solidFill>
+                  <a:srgbClr val="FFFFFF"/>
+                </a:solidFill>
+                <a:latin typeface="DejaVu Sans Mono"/>
+              </a:defRPr>
+            </a:pPr>
             <a:r>
               <a:t>    </a:t>
             </a:r>
-            <a:br/>
+          </a:p>
+          <a:p>
+            <a:pPr algn="l">
+              <a:spcAft>
+                <a:spcPts val="0"/>
+              </a:spcAft>
+              <a:defRPr sz="1400" b="0">
+                <a:solidFill>
+                  <a:srgbClr val="FFFFFF"/>
+                </a:solidFill>
+                <a:latin typeface="DejaVu Sans Mono"/>
+              </a:defRPr>
+            </a:pPr>
             <a:r>
               <a:t>    </a:t>
             </a:r>
-            <a:br/>
+          </a:p>
+          <a:p>
+            <a:pPr algn="l">
+              <a:spcAft>
+                <a:spcPts val="0"/>
+              </a:spcAft>
+              <a:defRPr sz="1400" b="0">
+                <a:solidFill>
+                  <a:srgbClr val="FFFFFF"/>
+                </a:solidFill>
+                <a:latin typeface="DejaVu Sans Mono"/>
+              </a:defRPr>
+            </a:pPr>
             <a:r>
               <a:t>    &lt;link name="right_wheel_link"&gt;</a:t>
             </a:r>
-            <a:br/>
+          </a:p>
+          <a:p>
+            <a:pPr algn="l">
+              <a:spcAft>
+                <a:spcPts val="0"/>
+              </a:spcAft>
+              <a:defRPr sz="1400" b="0">
+                <a:solidFill>
+                  <a:srgbClr val="FFFFFF"/>
+                </a:solidFill>
+                <a:latin typeface="DejaVu Sans Mono"/>
+              </a:defRPr>
+            </a:pPr>
             <a:r>
               <a:t>      &lt;pose relative_to="base_link"&gt;0 -0.19 -0.08 1.5708 0 0&lt;/pose&gt;</a:t>
             </a:r>
-            <a:br/>
+          </a:p>
+          <a:p>
+            <a:pPr algn="l">
+              <a:spcAft>
+                <a:spcPts val="0"/>
+              </a:spcAft>
+              <a:defRPr sz="1400" b="0">
+                <a:solidFill>
+                  <a:srgbClr val="FFFFFF"/>
+                </a:solidFill>
+                <a:latin typeface="DejaVu Sans Mono"/>
+              </a:defRPr>
+            </a:pPr>
             <a:r>
               <a:t>      &lt;inertial&gt;</a:t>
             </a:r>
-            <a:br/>
+          </a:p>
+          <a:p>
+            <a:pPr algn="l">
+              <a:spcAft>
+                <a:spcPts val="0"/>
+              </a:spcAft>
+              <a:defRPr sz="1400" b="0">
+                <a:solidFill>
+                  <a:srgbClr val="FFFFFF"/>
+                </a:solidFill>
+                <a:latin typeface="DejaVu Sans Mono"/>
+              </a:defRPr>
+            </a:pPr>
             <a:r>
               <a:t>        &lt;mass&gt;0.6&lt;/mass&gt;</a:t>
             </a:r>
-            <a:br/>
+          </a:p>
+          <a:p>
+            <a:pPr algn="l">
+              <a:spcAft>
+                <a:spcPts val="0"/>
+              </a:spcAft>
+              <a:defRPr sz="1400" b="0">
+                <a:solidFill>
+                  <a:srgbClr val="FFFFFF"/>
+                </a:solidFill>
+                <a:latin typeface="DejaVu Sans Mono"/>
+              </a:defRPr>
+            </a:pPr>
             <a:r>
               <a:t>        &lt;inertia&gt;</a:t>
             </a:r>
-            <a:br/>
+          </a:p>
+          <a:p>
+            <a:pPr algn="l">
+              <a:spcAft>
+                <a:spcPts val="0"/>
+              </a:spcAft>
+              <a:defRPr sz="1400" b="0">
+                <a:solidFill>
+                  <a:srgbClr val="FFFFFF"/>
+                </a:solidFill>
+                <a:latin typeface="DejaVu Sans Mono"/>
+              </a:defRPr>
+            </a:pPr>
             <a:r>
               <a:t>          &lt;ixx&gt;0.002&lt;/ixx&gt;</a:t>
             </a:r>
-            <a:br/>
+          </a:p>
+          <a:p>
+            <a:pPr algn="l">
+              <a:spcAft>
+                <a:spcPts val="0"/>
+              </a:spcAft>
+              <a:defRPr sz="1400" b="0">
+                <a:solidFill>
+                  <a:srgbClr val="FFFFFF"/>
+                </a:solidFill>
+                <a:latin typeface="DejaVu Sans Mono"/>
+              </a:defRPr>
+            </a:pPr>
             <a:r>
               <a:t>          &lt;iyy&gt;0.002&lt;/iyy&gt;</a:t>
             </a:r>
-            <a:br/>
+          </a:p>
+          <a:p>
+            <a:pPr algn="l">
+              <a:spcAft>
+                <a:spcPts val="0"/>
+              </a:spcAft>
+              <a:defRPr sz="1400" b="0">
+                <a:solidFill>
+                  <a:srgbClr val="FFFFFF"/>
+                </a:solidFill>
+                <a:latin typeface="DejaVu Sans Mono"/>
+              </a:defRPr>
+            </a:pPr>
             <a:r>
               <a:t>          &lt;izz&gt;0.001&lt;/izz&gt;</a:t>
             </a:r>
@@ -25434,7 +27257,7 @@
           </a:fontRef>
         </p:style>
         <p:txBody>
-          <a:bodyPr rtlCol="0" anchor="ctr" wrap="square" lIns="164592" rIns="164592" tIns="109728" bIns="36576"/>
+          <a:bodyPr rtlCol="0" anchor="ctr" wrap="square" lIns="164592" rIns="164592" tIns="109728" bIns="73152"/>
           <a:lstStyle/>
           <a:p>
             <a:pPr algn="l">
@@ -25451,47 +27274,179 @@
             <a:r>
               <a:t>        &lt;/inertia&gt;</a:t>
             </a:r>
-            <a:br/>
+          </a:p>
+          <a:p>
+            <a:pPr algn="l">
+              <a:spcAft>
+                <a:spcPts val="0"/>
+              </a:spcAft>
+              <a:defRPr sz="1400" b="0">
+                <a:solidFill>
+                  <a:srgbClr val="FFFFFF"/>
+                </a:solidFill>
+                <a:latin typeface="DejaVu Sans Mono"/>
+              </a:defRPr>
+            </a:pPr>
             <a:r>
               <a:t>      &lt;/inertial&gt;</a:t>
             </a:r>
-            <a:br/>
+          </a:p>
+          <a:p>
+            <a:pPr algn="l">
+              <a:spcAft>
+                <a:spcPts val="0"/>
+              </a:spcAft>
+              <a:defRPr sz="1400" b="0">
+                <a:solidFill>
+                  <a:srgbClr val="FFFFFF"/>
+                </a:solidFill>
+                <a:latin typeface="DejaVu Sans Mono"/>
+              </a:defRPr>
+            </a:pPr>
             <a:r>
               <a:t>      &lt;visual name="wheel"&gt;</a:t>
             </a:r>
-            <a:br/>
+          </a:p>
+          <a:p>
+            <a:pPr algn="l">
+              <a:spcAft>
+                <a:spcPts val="0"/>
+              </a:spcAft>
+              <a:defRPr sz="1400" b="0">
+                <a:solidFill>
+                  <a:srgbClr val="FFFFFF"/>
+                </a:solidFill>
+                <a:latin typeface="DejaVu Sans Mono"/>
+              </a:defRPr>
+            </a:pPr>
             <a:r>
               <a:t>        &lt;geometry&gt;</a:t>
             </a:r>
-            <a:br/>
+          </a:p>
+          <a:p>
+            <a:pPr algn="l">
+              <a:spcAft>
+                <a:spcPts val="0"/>
+              </a:spcAft>
+              <a:defRPr sz="1400" b="0">
+                <a:solidFill>
+                  <a:srgbClr val="FFFFFF"/>
+                </a:solidFill>
+                <a:latin typeface="DejaVu Sans Mono"/>
+              </a:defRPr>
+            </a:pPr>
             <a:r>
               <a:t>          &lt;cylinder&gt;</a:t>
             </a:r>
-            <a:br/>
+          </a:p>
+          <a:p>
+            <a:pPr algn="l">
+              <a:spcAft>
+                <a:spcPts val="0"/>
+              </a:spcAft>
+              <a:defRPr sz="1400" b="0">
+                <a:solidFill>
+                  <a:srgbClr val="FFFFFF"/>
+                </a:solidFill>
+                <a:latin typeface="DejaVu Sans Mono"/>
+              </a:defRPr>
+            </a:pPr>
             <a:r>
               <a:t>            &lt;radius&gt;0.08&lt;/radius&gt;</a:t>
             </a:r>
-            <a:br/>
+          </a:p>
+          <a:p>
+            <a:pPr algn="l">
+              <a:spcAft>
+                <a:spcPts val="0"/>
+              </a:spcAft>
+              <a:defRPr sz="1400" b="0">
+                <a:solidFill>
+                  <a:srgbClr val="FFFFFF"/>
+                </a:solidFill>
+                <a:latin typeface="DejaVu Sans Mono"/>
+              </a:defRPr>
+            </a:pPr>
             <a:r>
               <a:t>            &lt;length&gt;0.05&lt;/length&gt;</a:t>
             </a:r>
-            <a:br/>
+          </a:p>
+          <a:p>
+            <a:pPr algn="l">
+              <a:spcAft>
+                <a:spcPts val="0"/>
+              </a:spcAft>
+              <a:defRPr sz="1400" b="0">
+                <a:solidFill>
+                  <a:srgbClr val="FFFFFF"/>
+                </a:solidFill>
+                <a:latin typeface="DejaVu Sans Mono"/>
+              </a:defRPr>
+            </a:pPr>
             <a:r>
               <a:t>          &lt;/cylinder&gt;</a:t>
             </a:r>
-            <a:br/>
+          </a:p>
+          <a:p>
+            <a:pPr algn="l">
+              <a:spcAft>
+                <a:spcPts val="0"/>
+              </a:spcAft>
+              <a:defRPr sz="1400" b="0">
+                <a:solidFill>
+                  <a:srgbClr val="FFFFFF"/>
+                </a:solidFill>
+                <a:latin typeface="DejaVu Sans Mono"/>
+              </a:defRPr>
+            </a:pPr>
             <a:r>
               <a:t>        &lt;/geometry&gt;</a:t>
             </a:r>
-            <a:br/>
+          </a:p>
+          <a:p>
+            <a:pPr algn="l">
+              <a:spcAft>
+                <a:spcPts val="0"/>
+              </a:spcAft>
+              <a:defRPr sz="1400" b="0">
+                <a:solidFill>
+                  <a:srgbClr val="FFFFFF"/>
+                </a:solidFill>
+                <a:latin typeface="DejaVu Sans Mono"/>
+              </a:defRPr>
+            </a:pPr>
             <a:r>
               <a:t>      &lt;/visual&gt;</a:t>
             </a:r>
-            <a:br/>
+          </a:p>
+          <a:p>
+            <a:pPr algn="l">
+              <a:spcAft>
+                <a:spcPts val="0"/>
+              </a:spcAft>
+              <a:defRPr sz="1400" b="0">
+                <a:solidFill>
+                  <a:srgbClr val="FFFFFF"/>
+                </a:solidFill>
+                <a:latin typeface="DejaVu Sans Mono"/>
+              </a:defRPr>
+            </a:pPr>
             <a:r>
               <a:t>      &lt;collision name="collision"&gt;</a:t>
             </a:r>
-            <a:br/>
+          </a:p>
+          <a:p>
+            <a:pPr algn="l">
+              <a:spcAft>
+                <a:spcPts val="0"/>
+              </a:spcAft>
+              <a:defRPr sz="1400" b="0">
+                <a:solidFill>
+                  <a:srgbClr val="FFFFFF"/>
+                </a:solidFill>
+                <a:latin typeface="DejaVu Sans Mono"/>
+              </a:defRPr>
+            </a:pPr>
             <a:r>
               <a:t>        &lt;geometry&gt;</a:t>
             </a:r>
@@ -25908,7 +27863,7 @@
           </a:fontRef>
         </p:style>
         <p:txBody>
-          <a:bodyPr rtlCol="0" anchor="ctr" wrap="square" lIns="164592" rIns="164592" tIns="109728" bIns="36576"/>
+          <a:bodyPr rtlCol="0" anchor="ctr" wrap="square" lIns="164592" rIns="164592" tIns="109728" bIns="73152"/>
           <a:lstStyle/>
           <a:p>
             <a:pPr algn="l">
@@ -25925,47 +27880,179 @@
             <a:r>
               <a:t>          &lt;cylinder&gt;</a:t>
             </a:r>
-            <a:br/>
+          </a:p>
+          <a:p>
+            <a:pPr algn="l">
+              <a:spcAft>
+                <a:spcPts val="0"/>
+              </a:spcAft>
+              <a:defRPr sz="1400" b="0">
+                <a:solidFill>
+                  <a:srgbClr val="FFFFFF"/>
+                </a:solidFill>
+                <a:latin typeface="DejaVu Sans Mono"/>
+              </a:defRPr>
+            </a:pPr>
             <a:r>
               <a:t>            &lt;radius&gt;0.08&lt;/radius&gt;</a:t>
             </a:r>
-            <a:br/>
+          </a:p>
+          <a:p>
+            <a:pPr algn="l">
+              <a:spcAft>
+                <a:spcPts val="0"/>
+              </a:spcAft>
+              <a:defRPr sz="1400" b="0">
+                <a:solidFill>
+                  <a:srgbClr val="FFFFFF"/>
+                </a:solidFill>
+                <a:latin typeface="DejaVu Sans Mono"/>
+              </a:defRPr>
+            </a:pPr>
             <a:r>
               <a:t>            &lt;length&gt;0.05&lt;/length&gt;</a:t>
             </a:r>
-            <a:br/>
+          </a:p>
+          <a:p>
+            <a:pPr algn="l">
+              <a:spcAft>
+                <a:spcPts val="0"/>
+              </a:spcAft>
+              <a:defRPr sz="1400" b="0">
+                <a:solidFill>
+                  <a:srgbClr val="FFFFFF"/>
+                </a:solidFill>
+                <a:latin typeface="DejaVu Sans Mono"/>
+              </a:defRPr>
+            </a:pPr>
             <a:r>
               <a:t>          &lt;/cylinder&gt;</a:t>
             </a:r>
-            <a:br/>
+          </a:p>
+          <a:p>
+            <a:pPr algn="l">
+              <a:spcAft>
+                <a:spcPts val="0"/>
+              </a:spcAft>
+              <a:defRPr sz="1400" b="0">
+                <a:solidFill>
+                  <a:srgbClr val="FFFFFF"/>
+                </a:solidFill>
+                <a:latin typeface="DejaVu Sans Mono"/>
+              </a:defRPr>
+            </a:pPr>
             <a:r>
               <a:t>        &lt;/geometry&gt;</a:t>
             </a:r>
-            <a:br/>
+          </a:p>
+          <a:p>
+            <a:pPr algn="l">
+              <a:spcAft>
+                <a:spcPts val="0"/>
+              </a:spcAft>
+              <a:defRPr sz="1400" b="0">
+                <a:solidFill>
+                  <a:srgbClr val="FFFFFF"/>
+                </a:solidFill>
+                <a:latin typeface="DejaVu Sans Mono"/>
+              </a:defRPr>
+            </a:pPr>
             <a:r>
               <a:t>        &lt;surface&gt;</a:t>
             </a:r>
-            <a:br/>
+          </a:p>
+          <a:p>
+            <a:pPr algn="l">
+              <a:spcAft>
+                <a:spcPts val="0"/>
+              </a:spcAft>
+              <a:defRPr sz="1400" b="0">
+                <a:solidFill>
+                  <a:srgbClr val="FFFFFF"/>
+                </a:solidFill>
+                <a:latin typeface="DejaVu Sans Mono"/>
+              </a:defRPr>
+            </a:pPr>
             <a:r>
               <a:t>          &lt;friction&gt;</a:t>
             </a:r>
-            <a:br/>
+          </a:p>
+          <a:p>
+            <a:pPr algn="l">
+              <a:spcAft>
+                <a:spcPts val="0"/>
+              </a:spcAft>
+              <a:defRPr sz="1400" b="0">
+                <a:solidFill>
+                  <a:srgbClr val="FFFFFF"/>
+                </a:solidFill>
+                <a:latin typeface="DejaVu Sans Mono"/>
+              </a:defRPr>
+            </a:pPr>
             <a:r>
               <a:t>            &lt;ode&gt;</a:t>
             </a:r>
-            <a:br/>
+          </a:p>
+          <a:p>
+            <a:pPr algn="l">
+              <a:spcAft>
+                <a:spcPts val="0"/>
+              </a:spcAft>
+              <a:defRPr sz="1400" b="0">
+                <a:solidFill>
+                  <a:srgbClr val="FFFFFF"/>
+                </a:solidFill>
+                <a:latin typeface="DejaVu Sans Mono"/>
+              </a:defRPr>
+            </a:pPr>
             <a:r>
               <a:t>              &lt;mu&gt;1.0&lt;/mu&gt;</a:t>
             </a:r>
-            <a:br/>
+          </a:p>
+          <a:p>
+            <a:pPr algn="l">
+              <a:spcAft>
+                <a:spcPts val="0"/>
+              </a:spcAft>
+              <a:defRPr sz="1400" b="0">
+                <a:solidFill>
+                  <a:srgbClr val="FFFFFF"/>
+                </a:solidFill>
+                <a:latin typeface="DejaVu Sans Mono"/>
+              </a:defRPr>
+            </a:pPr>
             <a:r>
               <a:t>              &lt;mu2&gt;1.0&lt;/mu2&gt;</a:t>
             </a:r>
-            <a:br/>
+          </a:p>
+          <a:p>
+            <a:pPr algn="l">
+              <a:spcAft>
+                <a:spcPts val="0"/>
+              </a:spcAft>
+              <a:defRPr sz="1400" b="0">
+                <a:solidFill>
+                  <a:srgbClr val="FFFFFF"/>
+                </a:solidFill>
+                <a:latin typeface="DejaVu Sans Mono"/>
+              </a:defRPr>
+            </a:pPr>
             <a:r>
               <a:t>            &lt;/ode&gt;</a:t>
             </a:r>
-            <a:br/>
+          </a:p>
+          <a:p>
+            <a:pPr algn="l">
+              <a:spcAft>
+                <a:spcPts val="0"/>
+              </a:spcAft>
+              <a:defRPr sz="1400" b="0">
+                <a:solidFill>
+                  <a:srgbClr val="FFFFFF"/>
+                </a:solidFill>
+                <a:latin typeface="DejaVu Sans Mono"/>
+              </a:defRPr>
+            </a:pPr>
             <a:r>
               <a:t>          &lt;/friction&gt;</a:t>
             </a:r>
@@ -26382,7 +28469,7 @@
           </a:fontRef>
         </p:style>
         <p:txBody>
-          <a:bodyPr rtlCol="0" anchor="ctr" wrap="square" lIns="164592" rIns="164592" tIns="109728" bIns="36576"/>
+          <a:bodyPr rtlCol="0" anchor="ctr" wrap="square" lIns="164592" rIns="164592" tIns="109728" bIns="73152"/>
           <a:lstStyle/>
           <a:p>
             <a:pPr algn="l">
@@ -26399,47 +28486,179 @@
             <a:r>
               <a:t>        &lt;/surface&gt;</a:t>
             </a:r>
-            <a:br/>
+          </a:p>
+          <a:p>
+            <a:pPr algn="l">
+              <a:spcAft>
+                <a:spcPts val="0"/>
+              </a:spcAft>
+              <a:defRPr sz="1400" b="0">
+                <a:solidFill>
+                  <a:srgbClr val="FFFFFF"/>
+                </a:solidFill>
+                <a:latin typeface="DejaVu Sans Mono"/>
+              </a:defRPr>
+            </a:pPr>
             <a:r>
               <a:t>      &lt;/collision&gt;</a:t>
             </a:r>
-            <a:br/>
+          </a:p>
+          <a:p>
+            <a:pPr algn="l">
+              <a:spcAft>
+                <a:spcPts val="0"/>
+              </a:spcAft>
+              <a:defRPr sz="1400" b="0">
+                <a:solidFill>
+                  <a:srgbClr val="FFFFFF"/>
+                </a:solidFill>
+                <a:latin typeface="DejaVu Sans Mono"/>
+              </a:defRPr>
+            </a:pPr>
             <a:r>
               <a:t>    &lt;/link&gt;</a:t>
             </a:r>
-            <a:br/>
+          </a:p>
+          <a:p>
+            <a:pPr algn="l">
+              <a:spcAft>
+                <a:spcPts val="0"/>
+              </a:spcAft>
+              <a:defRPr sz="1400" b="0">
+                <a:solidFill>
+                  <a:srgbClr val="FFFFFF"/>
+                </a:solidFill>
+                <a:latin typeface="DejaVu Sans Mono"/>
+              </a:defRPr>
+            </a:pPr>
             <a:r>
               <a:t>    </a:t>
             </a:r>
-            <a:br/>
+          </a:p>
+          <a:p>
+            <a:pPr algn="l">
+              <a:spcAft>
+                <a:spcPts val="0"/>
+              </a:spcAft>
+              <a:defRPr sz="1400" b="0">
+                <a:solidFill>
+                  <a:srgbClr val="FFFFFF"/>
+                </a:solidFill>
+                <a:latin typeface="DejaVu Sans Mono"/>
+              </a:defRPr>
+            </a:pPr>
             <a:r>
               <a:t>    </a:t>
             </a:r>
-            <a:br/>
+          </a:p>
+          <a:p>
+            <a:pPr algn="l">
+              <a:spcAft>
+                <a:spcPts val="0"/>
+              </a:spcAft>
+              <a:defRPr sz="1400" b="0">
+                <a:solidFill>
+                  <a:srgbClr val="FFFFFF"/>
+                </a:solidFill>
+                <a:latin typeface="DejaVu Sans Mono"/>
+              </a:defRPr>
+            </a:pPr>
             <a:r>
               <a:t>    &lt;joint name="left_wheel_joint" type="revolute"&gt;</a:t>
             </a:r>
-            <a:br/>
+          </a:p>
+          <a:p>
+            <a:pPr algn="l">
+              <a:spcAft>
+                <a:spcPts val="0"/>
+              </a:spcAft>
+              <a:defRPr sz="1400" b="0">
+                <a:solidFill>
+                  <a:srgbClr val="FFFFFF"/>
+                </a:solidFill>
+                <a:latin typeface="DejaVu Sans Mono"/>
+              </a:defRPr>
+            </a:pPr>
             <a:r>
               <a:t>      &lt;parent&gt;base_link&lt;/parent&gt;</a:t>
             </a:r>
-            <a:br/>
+          </a:p>
+          <a:p>
+            <a:pPr algn="l">
+              <a:spcAft>
+                <a:spcPts val="0"/>
+              </a:spcAft>
+              <a:defRPr sz="1400" b="0">
+                <a:solidFill>
+                  <a:srgbClr val="FFFFFF"/>
+                </a:solidFill>
+                <a:latin typeface="DejaVu Sans Mono"/>
+              </a:defRPr>
+            </a:pPr>
             <a:r>
               <a:t>      &lt;child&gt;left_wheel_link&lt;/child&gt;</a:t>
             </a:r>
-            <a:br/>
+          </a:p>
+          <a:p>
+            <a:pPr algn="l">
+              <a:spcAft>
+                <a:spcPts val="0"/>
+              </a:spcAft>
+              <a:defRPr sz="1400" b="0">
+                <a:solidFill>
+                  <a:srgbClr val="FFFFFF"/>
+                </a:solidFill>
+                <a:latin typeface="DejaVu Sans Mono"/>
+              </a:defRPr>
+            </a:pPr>
             <a:r>
               <a:t>      &lt;axis&gt;</a:t>
             </a:r>
-            <a:br/>
+          </a:p>
+          <a:p>
+            <a:pPr algn="l">
+              <a:spcAft>
+                <a:spcPts val="0"/>
+              </a:spcAft>
+              <a:defRPr sz="1400" b="0">
+                <a:solidFill>
+                  <a:srgbClr val="FFFFFF"/>
+                </a:solidFill>
+                <a:latin typeface="DejaVu Sans Mono"/>
+              </a:defRPr>
+            </a:pPr>
             <a:r>
               <a:t>        &lt;xyz&gt;0 1 0&lt;/xyz&gt;</a:t>
             </a:r>
-            <a:br/>
+          </a:p>
+          <a:p>
+            <a:pPr algn="l">
+              <a:spcAft>
+                <a:spcPts val="0"/>
+              </a:spcAft>
+              <a:defRPr sz="1400" b="0">
+                <a:solidFill>
+                  <a:srgbClr val="FFFFFF"/>
+                </a:solidFill>
+                <a:latin typeface="DejaVu Sans Mono"/>
+              </a:defRPr>
+            </a:pPr>
             <a:r>
               <a:t>        &lt;limit&gt;</a:t>
             </a:r>
-            <a:br/>
+          </a:p>
+          <a:p>
+            <a:pPr algn="l">
+              <a:spcAft>
+                <a:spcPts val="0"/>
+              </a:spcAft>
+              <a:defRPr sz="1400" b="0">
+                <a:solidFill>
+                  <a:srgbClr val="FFFFFF"/>
+                </a:solidFill>
+                <a:latin typeface="DejaVu Sans Mono"/>
+              </a:defRPr>
+            </a:pPr>
             <a:r>
               <a:t>          &lt;lower&gt;-1e16&lt;/lower&gt;</a:t>
             </a:r>
@@ -26856,7 +29075,7 @@
           </a:fontRef>
         </p:style>
         <p:txBody>
-          <a:bodyPr rtlCol="0" anchor="ctr" wrap="square" lIns="164592" rIns="164592" tIns="109728" bIns="36576"/>
+          <a:bodyPr rtlCol="0" anchor="ctr" wrap="square" lIns="164592" rIns="164592" tIns="109728" bIns="73152"/>
           <a:lstStyle/>
           <a:p>
             <a:pPr algn="l">
@@ -26873,47 +29092,179 @@
             <a:r>
               <a:t>          &lt;upper&gt;1e16&lt;/upper&gt;</a:t>
             </a:r>
-            <a:br/>
+          </a:p>
+          <a:p>
+            <a:pPr algn="l">
+              <a:spcAft>
+                <a:spcPts val="0"/>
+              </a:spcAft>
+              <a:defRPr sz="1400" b="0">
+                <a:solidFill>
+                  <a:srgbClr val="FFFFFF"/>
+                </a:solidFill>
+                <a:latin typeface="DejaVu Sans Mono"/>
+              </a:defRPr>
+            </a:pPr>
             <a:r>
               <a:t>        &lt;/limit&gt;</a:t>
             </a:r>
-            <a:br/>
+          </a:p>
+          <a:p>
+            <a:pPr algn="l">
+              <a:spcAft>
+                <a:spcPts val="0"/>
+              </a:spcAft>
+              <a:defRPr sz="1400" b="0">
+                <a:solidFill>
+                  <a:srgbClr val="FFFFFF"/>
+                </a:solidFill>
+                <a:latin typeface="DejaVu Sans Mono"/>
+              </a:defRPr>
+            </a:pPr>
             <a:r>
               <a:t>      &lt;/axis&gt;</a:t>
             </a:r>
-            <a:br/>
+          </a:p>
+          <a:p>
+            <a:pPr algn="l">
+              <a:spcAft>
+                <a:spcPts val="0"/>
+              </a:spcAft>
+              <a:defRPr sz="1400" b="0">
+                <a:solidFill>
+                  <a:srgbClr val="FFFFFF"/>
+                </a:solidFill>
+                <a:latin typeface="DejaVu Sans Mono"/>
+              </a:defRPr>
+            </a:pPr>
             <a:r>
               <a:t>    &lt;/joint&gt;</a:t>
             </a:r>
-            <a:br/>
+          </a:p>
+          <a:p>
+            <a:pPr algn="l">
+              <a:spcAft>
+                <a:spcPts val="0"/>
+              </a:spcAft>
+              <a:defRPr sz="1400" b="0">
+                <a:solidFill>
+                  <a:srgbClr val="FFFFFF"/>
+                </a:solidFill>
+                <a:latin typeface="DejaVu Sans Mono"/>
+              </a:defRPr>
+            </a:pPr>
             <a:r>
               <a:t>    </a:t>
             </a:r>
-            <a:br/>
+          </a:p>
+          <a:p>
+            <a:pPr algn="l">
+              <a:spcAft>
+                <a:spcPts val="0"/>
+              </a:spcAft>
+              <a:defRPr sz="1400" b="0">
+                <a:solidFill>
+                  <a:srgbClr val="FFFFFF"/>
+                </a:solidFill>
+                <a:latin typeface="DejaVu Sans Mono"/>
+              </a:defRPr>
+            </a:pPr>
             <a:r>
               <a:t>    </a:t>
             </a:r>
-            <a:br/>
+          </a:p>
+          <a:p>
+            <a:pPr algn="l">
+              <a:spcAft>
+                <a:spcPts val="0"/>
+              </a:spcAft>
+              <a:defRPr sz="1400" b="0">
+                <a:solidFill>
+                  <a:srgbClr val="FFFFFF"/>
+                </a:solidFill>
+                <a:latin typeface="DejaVu Sans Mono"/>
+              </a:defRPr>
+            </a:pPr>
             <a:r>
               <a:t>    &lt;joint name="right_wheel_joint" type="revolute"&gt;</a:t>
             </a:r>
-            <a:br/>
+          </a:p>
+          <a:p>
+            <a:pPr algn="l">
+              <a:spcAft>
+                <a:spcPts val="0"/>
+              </a:spcAft>
+              <a:defRPr sz="1400" b="0">
+                <a:solidFill>
+                  <a:srgbClr val="FFFFFF"/>
+                </a:solidFill>
+                <a:latin typeface="DejaVu Sans Mono"/>
+              </a:defRPr>
+            </a:pPr>
             <a:r>
               <a:t>      &lt;parent&gt;base_link&lt;/parent&gt;</a:t>
             </a:r>
-            <a:br/>
+          </a:p>
+          <a:p>
+            <a:pPr algn="l">
+              <a:spcAft>
+                <a:spcPts val="0"/>
+              </a:spcAft>
+              <a:defRPr sz="1400" b="0">
+                <a:solidFill>
+                  <a:srgbClr val="FFFFFF"/>
+                </a:solidFill>
+                <a:latin typeface="DejaVu Sans Mono"/>
+              </a:defRPr>
+            </a:pPr>
             <a:r>
               <a:t>      &lt;child&gt;right_wheel_link&lt;/child&gt;</a:t>
             </a:r>
-            <a:br/>
+          </a:p>
+          <a:p>
+            <a:pPr algn="l">
+              <a:spcAft>
+                <a:spcPts val="0"/>
+              </a:spcAft>
+              <a:defRPr sz="1400" b="0">
+                <a:solidFill>
+                  <a:srgbClr val="FFFFFF"/>
+                </a:solidFill>
+                <a:latin typeface="DejaVu Sans Mono"/>
+              </a:defRPr>
+            </a:pPr>
             <a:r>
               <a:t>      &lt;axis&gt;</a:t>
             </a:r>
-            <a:br/>
+          </a:p>
+          <a:p>
+            <a:pPr algn="l">
+              <a:spcAft>
+                <a:spcPts val="0"/>
+              </a:spcAft>
+              <a:defRPr sz="1400" b="0">
+                <a:solidFill>
+                  <a:srgbClr val="FFFFFF"/>
+                </a:solidFill>
+                <a:latin typeface="DejaVu Sans Mono"/>
+              </a:defRPr>
+            </a:pPr>
             <a:r>
               <a:t>        &lt;xyz&gt;0 1 0&lt;/xyz&gt;</a:t>
             </a:r>
-            <a:br/>
+          </a:p>
+          <a:p>
+            <a:pPr algn="l">
+              <a:spcAft>
+                <a:spcPts val="0"/>
+              </a:spcAft>
+              <a:defRPr sz="1400" b="0">
+                <a:solidFill>
+                  <a:srgbClr val="FFFFFF"/>
+                </a:solidFill>
+                <a:latin typeface="DejaVu Sans Mono"/>
+              </a:defRPr>
+            </a:pPr>
             <a:r>
               <a:t>        &lt;limit&gt;</a:t>
             </a:r>
@@ -27663,7 +30014,7 @@
           </a:fontRef>
         </p:style>
         <p:txBody>
-          <a:bodyPr rtlCol="0" anchor="ctr" wrap="square" lIns="164592" rIns="164592" tIns="109728" bIns="36576"/>
+          <a:bodyPr rtlCol="0" anchor="ctr" wrap="square" lIns="164592" rIns="164592" tIns="109728" bIns="73152"/>
           <a:lstStyle/>
           <a:p>
             <a:pPr algn="l">
@@ -27680,47 +30031,179 @@
             <a:r>
               <a:t>          &lt;lower&gt;-1e16&lt;/lower&gt;</a:t>
             </a:r>
-            <a:br/>
+          </a:p>
+          <a:p>
+            <a:pPr algn="l">
+              <a:spcAft>
+                <a:spcPts val="0"/>
+              </a:spcAft>
+              <a:defRPr sz="1400" b="0">
+                <a:solidFill>
+                  <a:srgbClr val="FFFFFF"/>
+                </a:solidFill>
+                <a:latin typeface="DejaVu Sans Mono"/>
+              </a:defRPr>
+            </a:pPr>
             <a:r>
               <a:t>          &lt;upper&gt;1e16&lt;/upper&gt;</a:t>
             </a:r>
-            <a:br/>
+          </a:p>
+          <a:p>
+            <a:pPr algn="l">
+              <a:spcAft>
+                <a:spcPts val="0"/>
+              </a:spcAft>
+              <a:defRPr sz="1400" b="0">
+                <a:solidFill>
+                  <a:srgbClr val="FFFFFF"/>
+                </a:solidFill>
+                <a:latin typeface="DejaVu Sans Mono"/>
+              </a:defRPr>
+            </a:pPr>
             <a:r>
               <a:t>        &lt;/limit&gt;</a:t>
             </a:r>
-            <a:br/>
+          </a:p>
+          <a:p>
+            <a:pPr algn="l">
+              <a:spcAft>
+                <a:spcPts val="0"/>
+              </a:spcAft>
+              <a:defRPr sz="1400" b="0">
+                <a:solidFill>
+                  <a:srgbClr val="FFFFFF"/>
+                </a:solidFill>
+                <a:latin typeface="DejaVu Sans Mono"/>
+              </a:defRPr>
+            </a:pPr>
             <a:r>
               <a:t>      &lt;/axis&gt;</a:t>
             </a:r>
-            <a:br/>
+          </a:p>
+          <a:p>
+            <a:pPr algn="l">
+              <a:spcAft>
+                <a:spcPts val="0"/>
+              </a:spcAft>
+              <a:defRPr sz="1400" b="0">
+                <a:solidFill>
+                  <a:srgbClr val="FFFFFF"/>
+                </a:solidFill>
+                <a:latin typeface="DejaVu Sans Mono"/>
+              </a:defRPr>
+            </a:pPr>
             <a:r>
               <a:t>    &lt;/joint&gt;</a:t>
             </a:r>
-            <a:br/>
+          </a:p>
+          <a:p>
+            <a:pPr algn="l">
+              <a:spcAft>
+                <a:spcPts val="0"/>
+              </a:spcAft>
+              <a:defRPr sz="1400" b="0">
+                <a:solidFill>
+                  <a:srgbClr val="FFFFFF"/>
+                </a:solidFill>
+                <a:latin typeface="DejaVu Sans Mono"/>
+              </a:defRPr>
+            </a:pPr>
             <a:r>
               <a:t>    </a:t>
             </a:r>
-            <a:br/>
+          </a:p>
+          <a:p>
+            <a:pPr algn="l">
+              <a:spcAft>
+                <a:spcPts val="0"/>
+              </a:spcAft>
+              <a:defRPr sz="1400" b="0">
+                <a:solidFill>
+                  <a:srgbClr val="FFFFFF"/>
+                </a:solidFill>
+                <a:latin typeface="DejaVu Sans Mono"/>
+              </a:defRPr>
+            </a:pPr>
             <a:r>
               <a:t>    </a:t>
             </a:r>
-            <a:br/>
+          </a:p>
+          <a:p>
+            <a:pPr algn="l">
+              <a:spcAft>
+                <a:spcPts val="0"/>
+              </a:spcAft>
+              <a:defRPr sz="1400" b="0">
+                <a:solidFill>
+                  <a:srgbClr val="FFFFFF"/>
+                </a:solidFill>
+                <a:latin typeface="DejaVu Sans Mono"/>
+              </a:defRPr>
+            </a:pPr>
             <a:r>
               <a:t>    &lt;ros2_control name="GazeboSimSystem" type="system"&gt;</a:t>
             </a:r>
-            <a:br/>
+          </a:p>
+          <a:p>
+            <a:pPr algn="l">
+              <a:spcAft>
+                <a:spcPts val="0"/>
+              </a:spcAft>
+              <a:defRPr sz="1400" b="0">
+                <a:solidFill>
+                  <a:srgbClr val="FFFFFF"/>
+                </a:solidFill>
+                <a:latin typeface="DejaVu Sans Mono"/>
+              </a:defRPr>
+            </a:pPr>
             <a:r>
               <a:t>      &lt;hardware&gt;</a:t>
             </a:r>
-            <a:br/>
+          </a:p>
+          <a:p>
+            <a:pPr algn="l">
+              <a:spcAft>
+                <a:spcPts val="0"/>
+              </a:spcAft>
+              <a:defRPr sz="1400" b="0">
+                <a:solidFill>
+                  <a:srgbClr val="FFFFFF"/>
+                </a:solidFill>
+                <a:latin typeface="DejaVu Sans Mono"/>
+              </a:defRPr>
+            </a:pPr>
             <a:r>
               <a:t>        &lt;plugin&gt;gz_ros2_control/GazeboSimSystem&lt;/plugin&gt;</a:t>
             </a:r>
-            <a:br/>
+          </a:p>
+          <a:p>
+            <a:pPr algn="l">
+              <a:spcAft>
+                <a:spcPts val="0"/>
+              </a:spcAft>
+              <a:defRPr sz="1400" b="0">
+                <a:solidFill>
+                  <a:srgbClr val="FFFFFF"/>
+                </a:solidFill>
+                <a:latin typeface="DejaVu Sans Mono"/>
+              </a:defRPr>
+            </a:pPr>
             <a:r>
               <a:t>      &lt;/hardware&gt;</a:t>
             </a:r>
-            <a:br/>
+          </a:p>
+          <a:p>
+            <a:pPr algn="l">
+              <a:spcAft>
+                <a:spcPts val="0"/>
+              </a:spcAft>
+              <a:defRPr sz="1400" b="0">
+                <a:solidFill>
+                  <a:srgbClr val="FFFFFF"/>
+                </a:solidFill>
+                <a:latin typeface="DejaVu Sans Mono"/>
+              </a:defRPr>
+            </a:pPr>
             <a:r>
               <a:t>      &lt;joint name="left_wheel_joint"&gt;</a:t>
             </a:r>
@@ -28137,7 +30620,7 @@
           </a:fontRef>
         </p:style>
         <p:txBody>
-          <a:bodyPr rtlCol="0" anchor="ctr" wrap="square" lIns="164592" rIns="164592" tIns="109728" bIns="36576"/>
+          <a:bodyPr rtlCol="0" anchor="ctr" wrap="square" lIns="164592" rIns="164592" tIns="109728" bIns="73152"/>
           <a:lstStyle/>
           <a:p>
             <a:pPr algn="l">
@@ -28154,47 +30637,179 @@
             <a:r>
               <a:t>        &lt;command_interface name="velocity"&gt;</a:t>
             </a:r>
-            <a:br/>
+          </a:p>
+          <a:p>
+            <a:pPr algn="l">
+              <a:spcAft>
+                <a:spcPts val="0"/>
+              </a:spcAft>
+              <a:defRPr sz="1400" b="0">
+                <a:solidFill>
+                  <a:srgbClr val="FFFFFF"/>
+                </a:solidFill>
+                <a:latin typeface="DejaVu Sans Mono"/>
+              </a:defRPr>
+            </a:pPr>
             <a:r>
               <a:t>          &lt;param name="min"&gt;-20&lt;/param&gt;</a:t>
             </a:r>
-            <a:br/>
+          </a:p>
+          <a:p>
+            <a:pPr algn="l">
+              <a:spcAft>
+                <a:spcPts val="0"/>
+              </a:spcAft>
+              <a:defRPr sz="1400" b="0">
+                <a:solidFill>
+                  <a:srgbClr val="FFFFFF"/>
+                </a:solidFill>
+                <a:latin typeface="DejaVu Sans Mono"/>
+              </a:defRPr>
+            </a:pPr>
             <a:r>
               <a:t>          &lt;param name="max"&gt;20&lt;/param&gt;</a:t>
             </a:r>
-            <a:br/>
+          </a:p>
+          <a:p>
+            <a:pPr algn="l">
+              <a:spcAft>
+                <a:spcPts val="0"/>
+              </a:spcAft>
+              <a:defRPr sz="1400" b="0">
+                <a:solidFill>
+                  <a:srgbClr val="FFFFFF"/>
+                </a:solidFill>
+                <a:latin typeface="DejaVu Sans Mono"/>
+              </a:defRPr>
+            </a:pPr>
             <a:r>
               <a:t>        &lt;/command_interface&gt;</a:t>
             </a:r>
-            <a:br/>
+          </a:p>
+          <a:p>
+            <a:pPr algn="l">
+              <a:spcAft>
+                <a:spcPts val="0"/>
+              </a:spcAft>
+              <a:defRPr sz="1400" b="0">
+                <a:solidFill>
+                  <a:srgbClr val="FFFFFF"/>
+                </a:solidFill>
+                <a:latin typeface="DejaVu Sans Mono"/>
+              </a:defRPr>
+            </a:pPr>
             <a:r>
               <a:t>        &lt;state_interface name="position"/&gt;</a:t>
             </a:r>
-            <a:br/>
+          </a:p>
+          <a:p>
+            <a:pPr algn="l">
+              <a:spcAft>
+                <a:spcPts val="0"/>
+              </a:spcAft>
+              <a:defRPr sz="1400" b="0">
+                <a:solidFill>
+                  <a:srgbClr val="FFFFFF"/>
+                </a:solidFill>
+                <a:latin typeface="DejaVu Sans Mono"/>
+              </a:defRPr>
+            </a:pPr>
             <a:r>
               <a:t>        &lt;state_interface name="velocity"/&gt;</a:t>
             </a:r>
-            <a:br/>
+          </a:p>
+          <a:p>
+            <a:pPr algn="l">
+              <a:spcAft>
+                <a:spcPts val="0"/>
+              </a:spcAft>
+              <a:defRPr sz="1400" b="0">
+                <a:solidFill>
+                  <a:srgbClr val="FFFFFF"/>
+                </a:solidFill>
+                <a:latin typeface="DejaVu Sans Mono"/>
+              </a:defRPr>
+            </a:pPr>
             <a:r>
               <a:t>      &lt;/joint&gt;</a:t>
             </a:r>
-            <a:br/>
+          </a:p>
+          <a:p>
+            <a:pPr algn="l">
+              <a:spcAft>
+                <a:spcPts val="0"/>
+              </a:spcAft>
+              <a:defRPr sz="1400" b="0">
+                <a:solidFill>
+                  <a:srgbClr val="FFFFFF"/>
+                </a:solidFill>
+                <a:latin typeface="DejaVu Sans Mono"/>
+              </a:defRPr>
+            </a:pPr>
             <a:r>
               <a:t>      &lt;joint name="right_wheel_joint"&gt;</a:t>
             </a:r>
-            <a:br/>
+          </a:p>
+          <a:p>
+            <a:pPr algn="l">
+              <a:spcAft>
+                <a:spcPts val="0"/>
+              </a:spcAft>
+              <a:defRPr sz="1400" b="0">
+                <a:solidFill>
+                  <a:srgbClr val="FFFFFF"/>
+                </a:solidFill>
+                <a:latin typeface="DejaVu Sans Mono"/>
+              </a:defRPr>
+            </a:pPr>
             <a:r>
               <a:t>        &lt;command_interface name="velocity"&gt;</a:t>
             </a:r>
-            <a:br/>
+          </a:p>
+          <a:p>
+            <a:pPr algn="l">
+              <a:spcAft>
+                <a:spcPts val="0"/>
+              </a:spcAft>
+              <a:defRPr sz="1400" b="0">
+                <a:solidFill>
+                  <a:srgbClr val="FFFFFF"/>
+                </a:solidFill>
+                <a:latin typeface="DejaVu Sans Mono"/>
+              </a:defRPr>
+            </a:pPr>
             <a:r>
               <a:t>          &lt;param name="min"&gt;-20&lt;/param&gt;</a:t>
             </a:r>
-            <a:br/>
+          </a:p>
+          <a:p>
+            <a:pPr algn="l">
+              <a:spcAft>
+                <a:spcPts val="0"/>
+              </a:spcAft>
+              <a:defRPr sz="1400" b="0">
+                <a:solidFill>
+                  <a:srgbClr val="FFFFFF"/>
+                </a:solidFill>
+                <a:latin typeface="DejaVu Sans Mono"/>
+              </a:defRPr>
+            </a:pPr>
             <a:r>
               <a:t>          &lt;param name="max"&gt;20&lt;/param&gt;</a:t>
             </a:r>
-            <a:br/>
+          </a:p>
+          <a:p>
+            <a:pPr algn="l">
+              <a:spcAft>
+                <a:spcPts val="0"/>
+              </a:spcAft>
+              <a:defRPr sz="1400" b="0">
+                <a:solidFill>
+                  <a:srgbClr val="FFFFFF"/>
+                </a:solidFill>
+                <a:latin typeface="DejaVu Sans Mono"/>
+              </a:defRPr>
+            </a:pPr>
             <a:r>
               <a:t>        &lt;/command_interface&gt;</a:t>
             </a:r>
@@ -28611,7 +31226,7 @@
           </a:fontRef>
         </p:style>
         <p:txBody>
-          <a:bodyPr rtlCol="0" anchor="ctr" wrap="square" lIns="164592" rIns="164592" tIns="109728" bIns="36576"/>
+          <a:bodyPr rtlCol="0" anchor="ctr" wrap="square" lIns="164592" rIns="164592" tIns="109728" bIns="73152"/>
           <a:lstStyle/>
           <a:p>
             <a:pPr algn="l">
@@ -28628,47 +31243,179 @@
             <a:r>
               <a:t>        &lt;state_interface name="position"/&gt;</a:t>
             </a:r>
-            <a:br/>
+          </a:p>
+          <a:p>
+            <a:pPr algn="l">
+              <a:spcAft>
+                <a:spcPts val="0"/>
+              </a:spcAft>
+              <a:defRPr sz="1400" b="0">
+                <a:solidFill>
+                  <a:srgbClr val="FFFFFF"/>
+                </a:solidFill>
+                <a:latin typeface="DejaVu Sans Mono"/>
+              </a:defRPr>
+            </a:pPr>
             <a:r>
               <a:t>        &lt;state_interface name="velocity"/&gt;</a:t>
             </a:r>
-            <a:br/>
+          </a:p>
+          <a:p>
+            <a:pPr algn="l">
+              <a:spcAft>
+                <a:spcPts val="0"/>
+              </a:spcAft>
+              <a:defRPr sz="1400" b="0">
+                <a:solidFill>
+                  <a:srgbClr val="FFFFFF"/>
+                </a:solidFill>
+                <a:latin typeface="DejaVu Sans Mono"/>
+              </a:defRPr>
+            </a:pPr>
             <a:r>
               <a:t>      &lt;/joint&gt;</a:t>
             </a:r>
-            <a:br/>
+          </a:p>
+          <a:p>
+            <a:pPr algn="l">
+              <a:spcAft>
+                <a:spcPts val="0"/>
+              </a:spcAft>
+              <a:defRPr sz="1400" b="0">
+                <a:solidFill>
+                  <a:srgbClr val="FFFFFF"/>
+                </a:solidFill>
+                <a:latin typeface="DejaVu Sans Mono"/>
+              </a:defRPr>
+            </a:pPr>
             <a:r>
               <a:t>    &lt;/ros2_control&gt;</a:t>
             </a:r>
-            <a:br/>
+          </a:p>
+          <a:p>
+            <a:pPr algn="l">
+              <a:spcAft>
+                <a:spcPts val="0"/>
+              </a:spcAft>
+              <a:defRPr sz="1400" b="0">
+                <a:solidFill>
+                  <a:srgbClr val="FFFFFF"/>
+                </a:solidFill>
+                <a:latin typeface="DejaVu Sans Mono"/>
+              </a:defRPr>
+            </a:pPr>
             <a:r>
               <a:t>    </a:t>
             </a:r>
-            <a:br/>
+          </a:p>
+          <a:p>
+            <a:pPr algn="l">
+              <a:spcAft>
+                <a:spcPts val="0"/>
+              </a:spcAft>
+              <a:defRPr sz="1400" b="0">
+                <a:solidFill>
+                  <a:srgbClr val="FFFFFF"/>
+                </a:solidFill>
+                <a:latin typeface="DejaVu Sans Mono"/>
+              </a:defRPr>
+            </a:pPr>
             <a:r>
               <a:t>    </a:t>
             </a:r>
-            <a:br/>
+          </a:p>
+          <a:p>
+            <a:pPr algn="l">
+              <a:spcAft>
+                <a:spcPts val="0"/>
+              </a:spcAft>
+              <a:defRPr sz="1400" b="0">
+                <a:solidFill>
+                  <a:srgbClr val="FFFFFF"/>
+                </a:solidFill>
+                <a:latin typeface="DejaVu Sans Mono"/>
+              </a:defRPr>
+            </a:pPr>
             <a:r>
               <a:t>    &lt;!-- The course workspace is fixed at ~/ros2_curri/agv_ws; run colcon build before</a:t>
             </a:r>
-            <a:br/>
+          </a:p>
+          <a:p>
+            <a:pPr algn="l">
+              <a:spcAft>
+                <a:spcPts val="0"/>
+              </a:spcAft>
+              <a:defRPr sz="1400" b="0">
+                <a:solidFill>
+                  <a:srgbClr val="FFFFFF"/>
+                </a:solidFill>
+                <a:latin typeface="DejaVu Sans Mono"/>
+              </a:defRPr>
+            </a:pPr>
             <a:r>
               <a:t>      this M16 launch. --&gt;</a:t>
             </a:r>
-            <a:br/>
+          </a:p>
+          <a:p>
+            <a:pPr algn="l">
+              <a:spcAft>
+                <a:spcPts val="0"/>
+              </a:spcAft>
+              <a:defRPr sz="1400" b="0">
+                <a:solidFill>
+                  <a:srgbClr val="FFFFFF"/>
+                </a:solidFill>
+                <a:latin typeface="DejaVu Sans Mono"/>
+              </a:defRPr>
+            </a:pPr>
             <a:r>
               <a:t>    </a:t>
             </a:r>
-            <a:br/>
+          </a:p>
+          <a:p>
+            <a:pPr algn="l">
+              <a:spcAft>
+                <a:spcPts val="0"/>
+              </a:spcAft>
+              <a:defRPr sz="1400" b="0">
+                <a:solidFill>
+                  <a:srgbClr val="FFFFFF"/>
+                </a:solidFill>
+                <a:latin typeface="DejaVu Sans Mono"/>
+              </a:defRPr>
+            </a:pPr>
             <a:r>
               <a:t>    </a:t>
             </a:r>
-            <a:br/>
+          </a:p>
+          <a:p>
+            <a:pPr algn="l">
+              <a:spcAft>
+                <a:spcPts val="0"/>
+              </a:spcAft>
+              <a:defRPr sz="1400" b="0">
+                <a:solidFill>
+                  <a:srgbClr val="FFFFFF"/>
+                </a:solidFill>
+                <a:latin typeface="DejaVu Sans Mono"/>
+              </a:defRPr>
+            </a:pPr>
             <a:r>
               <a:t>    &lt;plugin filename="libgz_ros2_control-system.so"</a:t>
             </a:r>
-            <a:br/>
+          </a:p>
+          <a:p>
+            <a:pPr algn="l">
+              <a:spcAft>
+                <a:spcPts val="0"/>
+              </a:spcAft>
+              <a:defRPr sz="1400" b="0">
+                <a:solidFill>
+                  <a:srgbClr val="FFFFFF"/>
+                </a:solidFill>
+                <a:latin typeface="DejaVu Sans Mono"/>
+              </a:defRPr>
+            </a:pPr>
             <a:r>
               <a:t>      name="gz_ros2_control::GazeboSimROS2ControlPlugin"&gt;</a:t>
             </a:r>
@@ -29085,7 +31832,7 @@
           </a:fontRef>
         </p:style>
         <p:txBody>
-          <a:bodyPr rtlCol="0" anchor="ctr" wrap="square" lIns="164592" rIns="164592" tIns="109728" bIns="36576"/>
+          <a:bodyPr rtlCol="0" anchor="ctr" wrap="square" lIns="164592" rIns="164592" tIns="109728" bIns="73152"/>
           <a:lstStyle/>
           <a:p>
             <a:pPr algn="l">
@@ -29102,28 +31849,112 @@
             <a:r>
               <a:t>      &lt;parameters&gt;/home/lab4090/ros2_curri/agv_ws/install/agv_control/share/agv_control/config/controllers.yaml&lt;/parameters&gt;</a:t>
             </a:r>
-            <a:br/>
+          </a:p>
+          <a:p>
+            <a:pPr algn="l">
+              <a:spcAft>
+                <a:spcPts val="0"/>
+              </a:spcAft>
+              <a:defRPr sz="1400" b="0">
+                <a:solidFill>
+                  <a:srgbClr val="FFFFFF"/>
+                </a:solidFill>
+                <a:latin typeface="DejaVu Sans Mono"/>
+              </a:defRPr>
+            </a:pPr>
             <a:r>
               <a:t>    &lt;/plugin&gt;</a:t>
             </a:r>
-            <a:br/>
+          </a:p>
+          <a:p>
+            <a:pPr algn="l">
+              <a:spcAft>
+                <a:spcPts val="0"/>
+              </a:spcAft>
+              <a:defRPr sz="1400" b="0">
+                <a:solidFill>
+                  <a:srgbClr val="FFFFFF"/>
+                </a:solidFill>
+                <a:latin typeface="DejaVu Sans Mono"/>
+              </a:defRPr>
+            </a:pPr>
             <a:r>
               <a:t>    </a:t>
             </a:r>
-            <a:br/>
+          </a:p>
+          <a:p>
+            <a:pPr algn="l">
+              <a:spcAft>
+                <a:spcPts val="0"/>
+              </a:spcAft>
+              <a:defRPr sz="1400" b="0">
+                <a:solidFill>
+                  <a:srgbClr val="FFFFFF"/>
+                </a:solidFill>
+                <a:latin typeface="DejaVu Sans Mono"/>
+              </a:defRPr>
+            </a:pPr>
             <a:r>
               <a:t>  </a:t>
             </a:r>
-            <a:br/>
+          </a:p>
+          <a:p>
+            <a:pPr algn="l">
+              <a:spcAft>
+                <a:spcPts val="0"/>
+              </a:spcAft>
+              <a:defRPr sz="1400" b="0">
+                <a:solidFill>
+                  <a:srgbClr val="FFFFFF"/>
+                </a:solidFill>
+                <a:latin typeface="DejaVu Sans Mono"/>
+              </a:defRPr>
+            </a:pPr>
             <a:r>
               <a:t>  &lt;/model&gt;</a:t>
             </a:r>
-            <a:br/>
+          </a:p>
+          <a:p>
+            <a:pPr algn="l">
+              <a:spcAft>
+                <a:spcPts val="0"/>
+              </a:spcAft>
+              <a:defRPr sz="1400" b="0">
+                <a:solidFill>
+                  <a:srgbClr val="FFFFFF"/>
+                </a:solidFill>
+                <a:latin typeface="DejaVu Sans Mono"/>
+              </a:defRPr>
+            </a:pPr>
             <a:r>
               <a:t>  </a:t>
             </a:r>
-            <a:br/>
-            <a:br/>
+          </a:p>
+          <a:p>
+            <a:pPr algn="l">
+              <a:spcAft>
+                <a:spcPts val="0"/>
+              </a:spcAft>
+              <a:defRPr sz="1400" b="0">
+                <a:solidFill>
+                  <a:srgbClr val="FFFFFF"/>
+                </a:solidFill>
+                <a:latin typeface="DejaVu Sans Mono"/>
+              </a:defRPr>
+            </a:pPr>
+          </a:p>
+          <a:p>
+            <a:pPr algn="l">
+              <a:spcAft>
+                <a:spcPts val="0"/>
+              </a:spcAft>
+              <a:defRPr sz="1400" b="0">
+                <a:solidFill>
+                  <a:srgbClr val="FFFFFF"/>
+                </a:solidFill>
+                <a:latin typeface="DejaVu Sans Mono"/>
+              </a:defRPr>
+            </a:pPr>
             <a:r>
               <a:t>&lt;/sdf&gt;</a:t>
             </a:r>
@@ -29595,7 +32426,7 @@
           </a:fontRef>
         </p:style>
         <p:txBody>
-          <a:bodyPr rtlCol="0" anchor="ctr" wrap="square" lIns="73152" rIns="73152" tIns="36576" bIns="36576"/>
+          <a:bodyPr rtlCol="0" anchor="ctr" wrap="square" lIns="109728" rIns="109728" tIns="73152" bIns="73152"/>
           <a:lstStyle/>
           <a:p>
             <a:pPr algn="l">
@@ -29612,7 +32443,19 @@
             <a:r>
               <a:t>mkdir -p ~/ros2_curri/my_agv_ws/src/agv_gazebo/launch</a:t>
             </a:r>
-            <a:br/>
+          </a:p>
+          <a:p>
+            <a:pPr algn="l">
+              <a:spcAft>
+                <a:spcPts val="0"/>
+              </a:spcAft>
+              <a:defRPr sz="1600" b="0">
+                <a:solidFill>
+                  <a:srgbClr val="FFFFFF"/>
+                </a:solidFill>
+                <a:latin typeface="DejaVu Sans Mono"/>
+              </a:defRPr>
+            </a:pPr>
             <a:r>
               <a:t>nano ~/ros2_curri/my_agv_ws/src/agv_gazebo/launch/ros2_control.launch.py</a:t>
             </a:r>
@@ -32231,7 +35074,7 @@
           </a:fontRef>
         </p:style>
         <p:txBody>
-          <a:bodyPr rtlCol="0" anchor="ctr" wrap="square" lIns="164592" rIns="164592" tIns="109728" bIns="36576"/>
+          <a:bodyPr rtlCol="0" anchor="ctr" wrap="square" lIns="164592" rIns="164592" tIns="109728" bIns="73152"/>
           <a:lstStyle/>
           <a:p>
             <a:pPr algn="l">
@@ -32248,44 +35091,176 @@
             <a:r>
               <a:t>"""M16 isolated launch: gz_ros2_control, two active controllers, and a physical AGV."""</a:t>
             </a:r>
-            <a:br/>
+          </a:p>
+          <a:p>
+            <a:pPr algn="l">
+              <a:spcAft>
+                <a:spcPts val="0"/>
+              </a:spcAft>
+              <a:defRPr sz="1400" b="0">
+                <a:solidFill>
+                  <a:srgbClr val="FFFFFF"/>
+                </a:solidFill>
+                <a:latin typeface="DejaVu Sans Mono"/>
+              </a:defRPr>
+            </a:pPr>
             <a:r>
               <a:t>import os</a:t>
             </a:r>
-            <a:br/>
+          </a:p>
+          <a:p>
+            <a:pPr algn="l">
+              <a:spcAft>
+                <a:spcPts val="0"/>
+              </a:spcAft>
+              <a:defRPr sz="1400" b="0">
+                <a:solidFill>
+                  <a:srgbClr val="FFFFFF"/>
+                </a:solidFill>
+                <a:latin typeface="DejaVu Sans Mono"/>
+              </a:defRPr>
+            </a:pPr>
             <a:r>
               <a:t>from ament_index_python.packages import get_package_share_directory</a:t>
             </a:r>
-            <a:br/>
+          </a:p>
+          <a:p>
+            <a:pPr algn="l">
+              <a:spcAft>
+                <a:spcPts val="0"/>
+              </a:spcAft>
+              <a:defRPr sz="1400" b="0">
+                <a:solidFill>
+                  <a:srgbClr val="FFFFFF"/>
+                </a:solidFill>
+                <a:latin typeface="DejaVu Sans Mono"/>
+              </a:defRPr>
+            </a:pPr>
             <a:r>
               <a:t>from launch import LaunchDescription</a:t>
             </a:r>
-            <a:br/>
+          </a:p>
+          <a:p>
+            <a:pPr algn="l">
+              <a:spcAft>
+                <a:spcPts val="0"/>
+              </a:spcAft>
+              <a:defRPr sz="1400" b="0">
+                <a:solidFill>
+                  <a:srgbClr val="FFFFFF"/>
+                </a:solidFill>
+                <a:latin typeface="DejaVu Sans Mono"/>
+              </a:defRPr>
+            </a:pPr>
             <a:r>
               <a:t>from launch.actions import IncludeLaunchDescription, RegisterEventHandler, SetEnvironmentVariable, TimerAction</a:t>
             </a:r>
-            <a:br/>
+          </a:p>
+          <a:p>
+            <a:pPr algn="l">
+              <a:spcAft>
+                <a:spcPts val="0"/>
+              </a:spcAft>
+              <a:defRPr sz="1400" b="0">
+                <a:solidFill>
+                  <a:srgbClr val="FFFFFF"/>
+                </a:solidFill>
+                <a:latin typeface="DejaVu Sans Mono"/>
+              </a:defRPr>
+            </a:pPr>
             <a:r>
               <a:t>from launch.event_handlers import OnProcessExit</a:t>
             </a:r>
-            <a:br/>
+          </a:p>
+          <a:p>
+            <a:pPr algn="l">
+              <a:spcAft>
+                <a:spcPts val="0"/>
+              </a:spcAft>
+              <a:defRPr sz="1400" b="0">
+                <a:solidFill>
+                  <a:srgbClr val="FFFFFF"/>
+                </a:solidFill>
+                <a:latin typeface="DejaVu Sans Mono"/>
+              </a:defRPr>
+            </a:pPr>
             <a:r>
               <a:t>from launch.launch_description_sources import PythonLaunchDescriptionSource</a:t>
             </a:r>
-            <a:br/>
+          </a:p>
+          <a:p>
+            <a:pPr algn="l">
+              <a:spcAft>
+                <a:spcPts val="0"/>
+              </a:spcAft>
+              <a:defRPr sz="1400" b="0">
+                <a:solidFill>
+                  <a:srgbClr val="FFFFFF"/>
+                </a:solidFill>
+                <a:latin typeface="DejaVu Sans Mono"/>
+              </a:defRPr>
+            </a:pPr>
             <a:r>
               <a:t>from launch.substitutions import Command</a:t>
             </a:r>
-            <a:br/>
+          </a:p>
+          <a:p>
+            <a:pPr algn="l">
+              <a:spcAft>
+                <a:spcPts val="0"/>
+              </a:spcAft>
+              <a:defRPr sz="1400" b="0">
+                <a:solidFill>
+                  <a:srgbClr val="FFFFFF"/>
+                </a:solidFill>
+                <a:latin typeface="DejaVu Sans Mono"/>
+              </a:defRPr>
+            </a:pPr>
             <a:r>
               <a:t>from launch_ros.actions import Node</a:t>
             </a:r>
-            <a:br/>
+          </a:p>
+          <a:p>
+            <a:pPr algn="l">
+              <a:spcAft>
+                <a:spcPts val="0"/>
+              </a:spcAft>
+              <a:defRPr sz="1400" b="0">
+                <a:solidFill>
+                  <a:srgbClr val="FFFFFF"/>
+                </a:solidFill>
+                <a:latin typeface="DejaVu Sans Mono"/>
+              </a:defRPr>
+            </a:pPr>
             <a:r>
               <a:t>from launch_ros.parameter_descriptions import ParameterValue</a:t>
             </a:r>
-            <a:br/>
-            <a:br/>
+          </a:p>
+          <a:p>
+            <a:pPr algn="l">
+              <a:spcAft>
+                <a:spcPts val="0"/>
+              </a:spcAft>
+              <a:defRPr sz="1400" b="0">
+                <a:solidFill>
+                  <a:srgbClr val="FFFFFF"/>
+                </a:solidFill>
+                <a:latin typeface="DejaVu Sans Mono"/>
+              </a:defRPr>
+            </a:pPr>
+          </a:p>
+          <a:p>
+            <a:pPr algn="l">
+              <a:spcAft>
+                <a:spcPts val="0"/>
+              </a:spcAft>
+              <a:defRPr sz="1400" b="0">
+                <a:solidFill>
+                  <a:srgbClr val="FFFFFF"/>
+                </a:solidFill>
+                <a:latin typeface="DejaVu Sans Mono"/>
+              </a:defRPr>
+            </a:pPr>
             <a:r>
               <a:t>def generate_launch_description():</a:t>
             </a:r>
@@ -32702,7 +35677,7 @@
           </a:fontRef>
         </p:style>
         <p:txBody>
-          <a:bodyPr rtlCol="0" anchor="ctr" wrap="square" lIns="164592" rIns="164592" tIns="109728" bIns="36576"/>
+          <a:bodyPr rtlCol="0" anchor="ctr" wrap="square" lIns="164592" rIns="164592" tIns="109728" bIns="73152"/>
           <a:lstStyle/>
           <a:p>
             <a:pPr algn="l">
@@ -32719,47 +35694,179 @@
             <a:r>
               <a:t>    gazebo = get_package_share_directory('agv_gazebo')</a:t>
             </a:r>
-            <a:br/>
+          </a:p>
+          <a:p>
+            <a:pPr algn="l">
+              <a:spcAft>
+                <a:spcPts val="0"/>
+              </a:spcAft>
+              <a:defRPr sz="1400" b="0">
+                <a:solidFill>
+                  <a:srgbClr val="FFFFFF"/>
+                </a:solidFill>
+                <a:latin typeface="DejaVu Sans Mono"/>
+              </a:defRPr>
+            </a:pPr>
             <a:r>
               <a:t>    models = os.path.join(gazebo, 'models')</a:t>
             </a:r>
-            <a:br/>
+          </a:p>
+          <a:p>
+            <a:pPr algn="l">
+              <a:spcAft>
+                <a:spcPts val="0"/>
+              </a:spcAft>
+              <a:defRPr sz="1400" b="0">
+                <a:solidFill>
+                  <a:srgbClr val="FFFFFF"/>
+                </a:solidFill>
+                <a:latin typeface="DejaVu Sans Mono"/>
+              </a:defRPr>
+            </a:pPr>
             <a:r>
               <a:t>    world = os.path.join(gazebo, 'worlds', 'warehouse_ros2_control.sdf')</a:t>
             </a:r>
-            <a:br/>
+          </a:p>
+          <a:p>
+            <a:pPr algn="l">
+              <a:spcAft>
+                <a:spcPts val="0"/>
+              </a:spcAft>
+              <a:defRPr sz="1400" b="0">
+                <a:solidFill>
+                  <a:srgbClr val="FFFFFF"/>
+                </a:solidFill>
+                <a:latin typeface="DejaVu Sans Mono"/>
+              </a:defRPr>
+            </a:pPr>
             <a:r>
               <a:t>    description = get_package_share_directory('agv_description')</a:t>
             </a:r>
-            <a:br/>
+          </a:p>
+          <a:p>
+            <a:pPr algn="l">
+              <a:spcAft>
+                <a:spcPts val="0"/>
+              </a:spcAft>
+              <a:defRPr sz="1400" b="0">
+                <a:solidFill>
+                  <a:srgbClr val="FFFFFF"/>
+                </a:solidFill>
+                <a:latin typeface="DejaVu Sans Mono"/>
+              </a:defRPr>
+            </a:pPr>
             <a:r>
               <a:t>    gz_launch = os.path.join(get_package_share_directory('ros_gz_sim'), 'launch', 'gz_sim.launch.py')</a:t>
             </a:r>
-            <a:br/>
+          </a:p>
+          <a:p>
+            <a:pPr algn="l">
+              <a:spcAft>
+                <a:spcPts val="0"/>
+              </a:spcAft>
+              <a:defRPr sz="1400" b="0">
+                <a:solidFill>
+                  <a:srgbClr val="FFFFFF"/>
+                </a:solidFill>
+                <a:latin typeface="DejaVu Sans Mono"/>
+              </a:defRPr>
+            </a:pPr>
             <a:r>
               <a:t>    previous = os.environ.get('GZ_SIM_RESOURCE_PATH', '')</a:t>
             </a:r>
-            <a:br/>
+          </a:p>
+          <a:p>
+            <a:pPr algn="l">
+              <a:spcAft>
+                <a:spcPts val="0"/>
+              </a:spcAft>
+              <a:defRPr sz="1400" b="0">
+                <a:solidFill>
+                  <a:srgbClr val="FFFFFF"/>
+                </a:solidFill>
+                <a:latin typeface="DejaVu Sans Mono"/>
+              </a:defRPr>
+            </a:pPr>
             <a:r>
               <a:t>    simulator = IncludeLaunchDescription(PythonLaunchDescriptionSource(gz_launch),</a:t>
             </a:r>
-            <a:br/>
+          </a:p>
+          <a:p>
+            <a:pPr algn="l">
+              <a:spcAft>
+                <a:spcPts val="0"/>
+              </a:spcAft>
+              <a:defRPr sz="1400" b="0">
+                <a:solidFill>
+                  <a:srgbClr val="FFFFFF"/>
+                </a:solidFill>
+                <a:latin typeface="DejaVu Sans Mono"/>
+              </a:defRPr>
+            </a:pPr>
             <a:r>
               <a:t>        launch_arguments={'gz_args': '-r ' + world}.items())</a:t>
             </a:r>
-            <a:br/>
+          </a:p>
+          <a:p>
+            <a:pPr algn="l">
+              <a:spcAft>
+                <a:spcPts val="0"/>
+              </a:spcAft>
+              <a:defRPr sz="1400" b="0">
+                <a:solidFill>
+                  <a:srgbClr val="FFFFFF"/>
+                </a:solidFill>
+                <a:latin typeface="DejaVu Sans Mono"/>
+              </a:defRPr>
+            </a:pPr>
             <a:r>
               <a:t>    robot_description = ParameterValue(Command(['xacro ', os.path.join(description, 'urdf',</a:t>
             </a:r>
-            <a:br/>
+          </a:p>
+          <a:p>
+            <a:pPr algn="l">
+              <a:spcAft>
+                <a:spcPts val="0"/>
+              </a:spcAft>
+              <a:defRPr sz="1400" b="0">
+                <a:solidFill>
+                  <a:srgbClr val="FFFFFF"/>
+                </a:solidFill>
+                <a:latin typeface="DejaVu Sans Mono"/>
+              </a:defRPr>
+            </a:pPr>
             <a:r>
               <a:t>         'agv_ros2_control.urdf.xacro')]), value_type=str)</a:t>
             </a:r>
-            <a:br/>
+          </a:p>
+          <a:p>
+            <a:pPr algn="l">
+              <a:spcAft>
+                <a:spcPts val="0"/>
+              </a:spcAft>
+              <a:defRPr sz="1400" b="0">
+                <a:solidFill>
+                  <a:srgbClr val="FFFFFF"/>
+                </a:solidFill>
+                <a:latin typeface="DejaVu Sans Mono"/>
+              </a:defRPr>
+            </a:pPr>
             <a:r>
               <a:t>    jsb = Node(package='controller_manager', executable='spawner', arguments=['joint_state_broadcaster',</a:t>
             </a:r>
-            <a:br/>
+          </a:p>
+          <a:p>
+            <a:pPr algn="l">
+              <a:spcAft>
+                <a:spcPts val="0"/>
+              </a:spcAft>
+              <a:defRPr sz="1400" b="0">
+                <a:solidFill>
+                  <a:srgbClr val="FFFFFF"/>
+                </a:solidFill>
+                <a:latin typeface="DejaVu Sans Mono"/>
+              </a:defRPr>
+            </a:pPr>
             <a:r>
               <a:t>         '-c', '/controller_manager'], output='screen')</a:t>
             </a:r>
@@ -33816,7 +36923,7 @@
           </a:fontRef>
         </p:style>
         <p:txBody>
-          <a:bodyPr rtlCol="0" anchor="ctr" wrap="square" lIns="164592" rIns="164592" tIns="109728" bIns="36576"/>
+          <a:bodyPr rtlCol="0" anchor="ctr" wrap="square" lIns="164592" rIns="164592" tIns="109728" bIns="73152"/>
           <a:lstStyle/>
           <a:p>
             <a:pPr algn="l">
@@ -33833,39 +36940,147 @@
             <a:r>
               <a:t>    drive = Node(package='controller_manager', executable='spawner', arguments=['diff_drive_controller',</a:t>
             </a:r>
-            <a:br/>
+          </a:p>
+          <a:p>
+            <a:pPr algn="l">
+              <a:spcAft>
+                <a:spcPts val="0"/>
+              </a:spcAft>
+              <a:defRPr sz="1400" b="0">
+                <a:solidFill>
+                  <a:srgbClr val="FFFFFF"/>
+                </a:solidFill>
+                <a:latin typeface="DejaVu Sans Mono"/>
+              </a:defRPr>
+            </a:pPr>
             <a:r>
               <a:t>         '-c', '/controller_manager'], output='screen')</a:t>
             </a:r>
-            <a:br/>
+          </a:p>
+          <a:p>
+            <a:pPr algn="l">
+              <a:spcAft>
+                <a:spcPts val="0"/>
+              </a:spcAft>
+              <a:defRPr sz="1400" b="0">
+                <a:solidFill>
+                  <a:srgbClr val="FFFFFF"/>
+                </a:solidFill>
+                <a:latin typeface="DejaVu Sans Mono"/>
+              </a:defRPr>
+            </a:pPr>
             <a:r>
               <a:t>    return LaunchDescription([SetEnvironmentVariable('GZ_SIM_RESOURCE_PATH',</a:t>
             </a:r>
-            <a:br/>
+          </a:p>
+          <a:p>
+            <a:pPr algn="l">
+              <a:spcAft>
+                <a:spcPts val="0"/>
+              </a:spcAft>
+              <a:defRPr sz="1400" b="0">
+                <a:solidFill>
+                  <a:srgbClr val="FFFFFF"/>
+                </a:solidFill>
+                <a:latin typeface="DejaVu Sans Mono"/>
+              </a:defRPr>
+            </a:pPr>
             <a:r>
               <a:t>        models + (':' + previous if previous else '')), simulator, Node(package='robot_state_publisher',</a:t>
             </a:r>
-            <a:br/>
+          </a:p>
+          <a:p>
+            <a:pPr algn="l">
+              <a:spcAft>
+                <a:spcPts val="0"/>
+              </a:spcAft>
+              <a:defRPr sz="1400" b="0">
+                <a:solidFill>
+                  <a:srgbClr val="FFFFFF"/>
+                </a:solidFill>
+                <a:latin typeface="DejaVu Sans Mono"/>
+              </a:defRPr>
+            </a:pPr>
             <a:r>
               <a:t>         executable='robot_state_publisher',</a:t>
             </a:r>
-            <a:br/>
+          </a:p>
+          <a:p>
+            <a:pPr algn="l">
+              <a:spcAft>
+                <a:spcPts val="0"/>
+              </a:spcAft>
+              <a:defRPr sz="1400" b="0">
+                <a:solidFill>
+                  <a:srgbClr val="FFFFFF"/>
+                </a:solidFill>
+                <a:latin typeface="DejaVu Sans Mono"/>
+              </a:defRPr>
+            </a:pPr>
             <a:r>
               <a:t>        parameters=[{'robot_description': robot_description, 'use_sim_time': True}],</a:t>
             </a:r>
-            <a:br/>
+          </a:p>
+          <a:p>
+            <a:pPr algn="l">
+              <a:spcAft>
+                <a:spcPts val="0"/>
+              </a:spcAft>
+              <a:defRPr sz="1400" b="0">
+                <a:solidFill>
+                  <a:srgbClr val="FFFFFF"/>
+                </a:solidFill>
+                <a:latin typeface="DejaVu Sans Mono"/>
+              </a:defRPr>
+            </a:pPr>
             <a:r>
               <a:t>        output='screen'), Node(package='ros_gz_bridge', executable='parameter_bridge',</a:t>
             </a:r>
-            <a:br/>
+          </a:p>
+          <a:p>
+            <a:pPr algn="l">
+              <a:spcAft>
+                <a:spcPts val="0"/>
+              </a:spcAft>
+              <a:defRPr sz="1400" b="0">
+                <a:solidFill>
+                  <a:srgbClr val="FFFFFF"/>
+                </a:solidFill>
+                <a:latin typeface="DejaVu Sans Mono"/>
+              </a:defRPr>
+            </a:pPr>
             <a:r>
               <a:t>        arguments=['/clock@rosgraph_msgs/msg/Clock[gz.msgs.Clock'], output='screen'),</a:t>
             </a:r>
-            <a:br/>
+          </a:p>
+          <a:p>
+            <a:pPr algn="l">
+              <a:spcAft>
+                <a:spcPts val="0"/>
+              </a:spcAft>
+              <a:defRPr sz="1400" b="0">
+                <a:solidFill>
+                  <a:srgbClr val="FFFFFF"/>
+                </a:solidFill>
+                <a:latin typeface="DejaVu Sans Mono"/>
+              </a:defRPr>
+            </a:pPr>
             <a:r>
               <a:t>        TimerAction(period=6.0, actions=[jsb]),</a:t>
             </a:r>
-            <a:br/>
+          </a:p>
+          <a:p>
+            <a:pPr algn="l">
+              <a:spcAft>
+                <a:spcPts val="0"/>
+              </a:spcAft>
+              <a:defRPr sz="1400" b="0">
+                <a:solidFill>
+                  <a:srgbClr val="FFFFFF"/>
+                </a:solidFill>
+                <a:latin typeface="DejaVu Sans Mono"/>
+              </a:defRPr>
+            </a:pPr>
             <a:r>
               <a:t>        RegisterEventHandler(OnProcessExit(target_action=jsb, on_exit=[drive]))])</a:t>
             </a:r>
@@ -34138,7 +37353,7 @@
               </a:defRPr>
             </a:pPr>
             <a:r>
-              <a:t>현재 단계 실행 1/2    |    현재 폴더 ~/ros2_curri/my_agv_ws    |    현재 터미널</a:t>
+              <a:t>현재 단계 실행 1/2    |    현재 폴더 ~/ros2_curri/my_agv_ws    |    터미널 1</a:t>
             </a:r>
           </a:p>
         </p:txBody>
@@ -34151,25 +37366,25 @@
         </p:nvSpPr>
         <p:spPr>
           <a:xfrm>
-            <a:off x="676656" y="1764792"/>
-            <a:ext cx="1828800" cy="347472"/>
-          </a:xfrm>
-          <a:prstGeom prst="rect">
-            <a:avLst/>
-          </a:prstGeom>
-          <a:noFill/>
-        </p:spPr>
-        <p:txBody>
-          <a:bodyPr wrap="square" lIns="73152" rIns="73152" tIns="36576" bIns="36576">
-            <a:spAutoFit/>
-          </a:bodyPr>
-          <a:lstStyle/>
-          <a:p>
-            <a:pPr algn="l">
-              <a:spcAft>
-                <a:spcPts val="0"/>
-              </a:spcAft>
-              <a:defRPr sz="1800" b="1">
+            <a:off x="676656" y="1719072"/>
+            <a:ext cx="1691640" cy="274320"/>
+          </a:xfrm>
+          <a:prstGeom prst="rect">
+            <a:avLst/>
+          </a:prstGeom>
+          <a:noFill/>
+        </p:spPr>
+        <p:txBody>
+          <a:bodyPr wrap="square" lIns="73152" rIns="73152" tIns="36576" bIns="36576">
+            <a:spAutoFit/>
+          </a:bodyPr>
+          <a:lstStyle/>
+          <a:p>
+            <a:pPr algn="l">
+              <a:spcAft>
+                <a:spcPts val="0"/>
+              </a:spcAft>
+              <a:defRPr sz="1700" b="1">
                 <a:solidFill>
                   <a:srgbClr val="225B9B"/>
                 </a:solidFill>
@@ -34177,7 +37392,7 @@
               </a:defRPr>
             </a:pPr>
             <a:r>
-              <a:t>왜 하는가</a:t>
+              <a:t>명령의 목적</a:t>
             </a:r>
           </a:p>
         </p:txBody>
@@ -34190,7 +37405,7 @@
         </p:nvSpPr>
         <p:spPr>
           <a:xfrm>
-            <a:off x="676656" y="2103120"/>
+            <a:off x="676656" y="2002536"/>
             <a:ext cx="10789920" cy="512064"/>
           </a:xfrm>
           <a:prstGeom prst="rect">
@@ -34208,7 +37423,7 @@
               <a:spcAft>
                 <a:spcPts val="0"/>
               </a:spcAft>
-              <a:defRPr sz="2000" b="0">
+              <a:defRPr sz="1800" b="0">
                 <a:solidFill>
                   <a:srgbClr val="122C4E"/>
                 </a:solidFill>
@@ -34223,14 +37438,53 @@
       </p:sp>
       <p:sp>
         <p:nvSpPr>
-          <p:cNvPr id="9" name="Rounded Rectangle 8"/>
+          <p:cNvPr id="9" name="TextBox 8"/>
+          <p:cNvSpPr txBox="1"/>
+          <p:nvPr/>
+        </p:nvSpPr>
+        <p:spPr>
+          <a:xfrm>
+            <a:off x="676656" y="2816352"/>
+            <a:ext cx="10835640" cy="256032"/>
+          </a:xfrm>
+          <a:prstGeom prst="rect">
+            <a:avLst/>
+          </a:prstGeom>
+          <a:noFill/>
+        </p:spPr>
+        <p:txBody>
+          <a:bodyPr wrap="square" lIns="73152" rIns="73152" tIns="36576" bIns="36576">
+            <a:spAutoFit/>
+          </a:bodyPr>
+          <a:lstStyle/>
+          <a:p>
+            <a:pPr algn="ctr">
+              <a:spcAft>
+                <a:spcPts val="0"/>
+              </a:spcAft>
+              <a:defRPr sz="1600" b="1">
+                <a:solidFill>
+                  <a:srgbClr val="225B9B"/>
+                </a:solidFill>
+                <a:latin typeface="Noto Sans CJK KR"/>
+              </a:defRPr>
+            </a:pPr>
+            <a:r>
+              <a:t>터미널 1 — 아래 검은 블록은 명령만 복사합니다.</a:t>
+            </a:r>
+          </a:p>
+        </p:txBody>
+      </p:sp>
+      <p:sp>
+        <p:nvSpPr>
+          <p:cNvPr id="10" name="Rounded Rectangle 9"/>
           <p:cNvSpPr/>
           <p:nvPr/>
         </p:nvSpPr>
         <p:spPr>
           <a:xfrm>
-            <a:off x="676656" y="2871216"/>
-            <a:ext cx="10835640" cy="2331720"/>
+            <a:off x="676656" y="3154680"/>
+            <a:ext cx="10835640" cy="1938528"/>
           </a:xfrm>
           <a:prstGeom prst="roundRect">
             <a:avLst/>
@@ -34259,7 +37513,7 @@
           </a:fontRef>
         </p:style>
         <p:txBody>
-          <a:bodyPr rtlCol="0" anchor="ctr" wrap="square" lIns="73152" rIns="73152" tIns="36576" bIns="36576"/>
+          <a:bodyPr rtlCol="0" anchor="ctr" wrap="square" lIns="109728" rIns="109728" tIns="73152" bIns="73152"/>
           <a:lstStyle/>
           <a:p>
             <a:pPr algn="l">
@@ -34276,7 +37530,19 @@
             <a:r>
               <a:t>nano ~/ros2_curri/my_agv_ws/src/agv_control/config/controllers.yaml</a:t>
             </a:r>
-            <a:br/>
+          </a:p>
+          <a:p>
+            <a:pPr algn="l">
+              <a:spcAft>
+                <a:spcPts val="0"/>
+              </a:spcAft>
+              <a:defRPr sz="1600" b="0">
+                <a:solidFill>
+                  <a:srgbClr val="FFFFFF"/>
+                </a:solidFill>
+                <a:latin typeface="DejaVu Sans Mono"/>
+              </a:defRPr>
+            </a:pPr>
             <a:r>
               <a:t>ros2 pkg prefix gz_ros2_control</a:t>
             </a:r>
@@ -34285,31 +37551,31 @@
       </p:sp>
       <p:sp>
         <p:nvSpPr>
-          <p:cNvPr id="10" name="TextBox 9"/>
-          <p:cNvSpPr txBox="1"/>
-          <p:nvPr/>
-        </p:nvSpPr>
-        <p:spPr>
-          <a:xfrm>
-            <a:off x="768096" y="5468112"/>
-            <a:ext cx="1143000" cy="256032"/>
-          </a:xfrm>
-          <a:prstGeom prst="rect">
-            <a:avLst/>
-          </a:prstGeom>
-          <a:noFill/>
-        </p:spPr>
-        <p:txBody>
-          <a:bodyPr wrap="square" lIns="73152" rIns="73152" tIns="36576" bIns="36576">
-            <a:spAutoFit/>
-          </a:bodyPr>
-          <a:lstStyle/>
-          <a:p>
-            <a:pPr algn="l">
-              <a:spcAft>
-                <a:spcPts val="0"/>
-              </a:spcAft>
-              <a:defRPr sz="1800" b="1">
+          <p:cNvPr id="11" name="TextBox 10"/>
+          <p:cNvSpPr txBox="1"/>
+          <p:nvPr/>
+        </p:nvSpPr>
+        <p:spPr>
+          <a:xfrm>
+            <a:off x="768096" y="5276088"/>
+            <a:ext cx="10561320" cy="384048"/>
+          </a:xfrm>
+          <a:prstGeom prst="rect">
+            <a:avLst/>
+          </a:prstGeom>
+          <a:noFill/>
+        </p:spPr>
+        <p:txBody>
+          <a:bodyPr wrap="square" lIns="73152" rIns="73152" tIns="36576" bIns="36576">
+            <a:spAutoFit/>
+          </a:bodyPr>
+          <a:lstStyle/>
+          <a:p>
+            <a:pPr algn="ctr">
+              <a:spcAft>
+                <a:spcPts val="0"/>
+              </a:spcAft>
+              <a:defRPr sz="1500" b="1">
                 <a:solidFill>
                   <a:srgbClr val="2A8B5A"/>
                 </a:solidFill>
@@ -34317,38 +37583,38 @@
               </a:defRPr>
             </a:pPr>
             <a:r>
-              <a:t>확인</a:t>
-            </a:r>
-          </a:p>
-        </p:txBody>
-      </p:sp>
-      <p:sp>
-        <p:nvSpPr>
-          <p:cNvPr id="11" name="TextBox 10"/>
-          <p:cNvSpPr txBox="1"/>
-          <p:nvPr/>
-        </p:nvSpPr>
-        <p:spPr>
-          <a:xfrm>
-            <a:off x="768096" y="5742432"/>
-            <a:ext cx="10561320" cy="347472"/>
-          </a:xfrm>
-          <a:prstGeom prst="rect">
-            <a:avLst/>
-          </a:prstGeom>
-          <a:noFill/>
-        </p:spPr>
-        <p:txBody>
-          <a:bodyPr wrap="square" lIns="73152" rIns="73152" tIns="36576" bIns="36576">
-            <a:spAutoFit/>
-          </a:bodyPr>
-          <a:lstStyle/>
-          <a:p>
-            <a:pPr algn="l">
-              <a:spcAft>
-                <a:spcPts val="0"/>
-              </a:spcAft>
-              <a:defRPr sz="1800" b="0">
+              <a:t>터미널 1 역할: 터미널 1에서 이 명령만 그대로 복사해 실행합니다.</a:t>
+            </a:r>
+          </a:p>
+        </p:txBody>
+      </p:sp>
+      <p:sp>
+        <p:nvSpPr>
+          <p:cNvPr id="12" name="TextBox 11"/>
+          <p:cNvSpPr txBox="1"/>
+          <p:nvPr/>
+        </p:nvSpPr>
+        <p:spPr>
+          <a:xfrm>
+            <a:off x="768096" y="5916168"/>
+            <a:ext cx="10561320" cy="292608"/>
+          </a:xfrm>
+          <a:prstGeom prst="rect">
+            <a:avLst/>
+          </a:prstGeom>
+          <a:noFill/>
+        </p:spPr>
+        <p:txBody>
+          <a:bodyPr wrap="square" lIns="73152" rIns="73152" tIns="36576" bIns="36576">
+            <a:spAutoFit/>
+          </a:bodyPr>
+          <a:lstStyle/>
+          <a:p>
+            <a:pPr algn="ctr">
+              <a:spcAft>
+                <a:spcPts val="0"/>
+              </a:spcAft>
+              <a:defRPr sz="1500" b="1">
                 <a:solidFill>
                   <a:srgbClr val="122C4E"/>
                 </a:solidFill>
@@ -34356,7 +37622,7 @@
               </a:defRPr>
             </a:pPr>
             <a:r>
-              <a:t>출력에서 topic·frame·파일 이름 또는 성공 메시지를 찾고, 맞지 않으면 다음 파일로 가지 않습니다.</a:t>
+              <a:t>확인: 출력에서 topic·frame·파일 이름 또는 성공 메시지를 찾고, 맞지 않으면 다음 파일로 가지 않습니다.</a:t>
             </a:r>
           </a:p>
         </p:txBody>
@@ -34588,7 +37854,7 @@
               </a:defRPr>
             </a:pPr>
             <a:r>
-              <a:t>현재 단계 실행 2/2    |    현재 폴더 ~/ros2_curri/my_agv_ws    |    새 터미널</a:t>
+              <a:t>현재 단계 실행 2/2    |    현재 폴더 ~/ros2_curri/my_agv_ws    |    터미널 1 + 2</a:t>
             </a:r>
           </a:p>
         </p:txBody>
@@ -34601,25 +37867,25 @@
         </p:nvSpPr>
         <p:spPr>
           <a:xfrm>
-            <a:off x="676656" y="1764792"/>
-            <a:ext cx="1828800" cy="347472"/>
-          </a:xfrm>
-          <a:prstGeom prst="rect">
-            <a:avLst/>
-          </a:prstGeom>
-          <a:noFill/>
-        </p:spPr>
-        <p:txBody>
-          <a:bodyPr wrap="square" lIns="73152" rIns="73152" tIns="36576" bIns="36576">
-            <a:spAutoFit/>
-          </a:bodyPr>
-          <a:lstStyle/>
-          <a:p>
-            <a:pPr algn="l">
-              <a:spcAft>
-                <a:spcPts val="0"/>
-              </a:spcAft>
-              <a:defRPr sz="1800" b="1">
+            <a:off x="676656" y="1719072"/>
+            <a:ext cx="1691640" cy="274320"/>
+          </a:xfrm>
+          <a:prstGeom prst="rect">
+            <a:avLst/>
+          </a:prstGeom>
+          <a:noFill/>
+        </p:spPr>
+        <p:txBody>
+          <a:bodyPr wrap="square" lIns="73152" rIns="73152" tIns="36576" bIns="36576">
+            <a:spAutoFit/>
+          </a:bodyPr>
+          <a:lstStyle/>
+          <a:p>
+            <a:pPr algn="l">
+              <a:spcAft>
+                <a:spcPts val="0"/>
+              </a:spcAft>
+              <a:defRPr sz="1700" b="1">
                 <a:solidFill>
                   <a:srgbClr val="225B9B"/>
                 </a:solidFill>
@@ -34627,7 +37893,7 @@
               </a:defRPr>
             </a:pPr>
             <a:r>
-              <a:t>왜 하는가</a:t>
+              <a:t>명령의 목적</a:t>
             </a:r>
           </a:p>
         </p:txBody>
@@ -34640,7 +37906,7 @@
         </p:nvSpPr>
         <p:spPr>
           <a:xfrm>
-            <a:off x="676656" y="2103120"/>
+            <a:off x="676656" y="2002536"/>
             <a:ext cx="10789920" cy="512064"/>
           </a:xfrm>
           <a:prstGeom prst="rect">
@@ -34658,7 +37924,7 @@
               <a:spcAft>
                 <a:spcPts val="0"/>
               </a:spcAft>
-              <a:defRPr sz="2000" b="0">
+              <a:defRPr sz="1800" b="0">
                 <a:solidFill>
                   <a:srgbClr val="122C4E"/>
                 </a:solidFill>
@@ -34666,21 +37932,99 @@
               </a:defRPr>
             </a:pPr>
             <a:r>
-              <a:t>M16은 M09 native DiffDrive와 별도 launch를 사용한다. plugin이 controller_manager를 만들고 spawner가 두 controller를 active로 전환한다.</a:t>
-            </a:r>
-          </a:p>
-        </p:txBody>
-      </p:sp>
-      <p:sp>
-        <p:nvSpPr>
-          <p:cNvPr id="9" name="Rounded Rectangle 8"/>
+              <a:t>M16은 M09 native DiffDrive와 별도 launch를 사용한다. 터미널 1이 controller_manager를 유지하는 동안 터미널 2에서 controller 상태를 확인한다.</a:t>
+            </a:r>
+          </a:p>
+        </p:txBody>
+      </p:sp>
+      <p:sp>
+        <p:nvSpPr>
+          <p:cNvPr id="9" name="TextBox 8"/>
+          <p:cNvSpPr txBox="1"/>
+          <p:nvPr/>
+        </p:nvSpPr>
+        <p:spPr>
+          <a:xfrm>
+            <a:off x="676656" y="2679192"/>
+            <a:ext cx="10789920" cy="237744"/>
+          </a:xfrm>
+          <a:prstGeom prst="rect">
+            <a:avLst/>
+          </a:prstGeom>
+          <a:noFill/>
+        </p:spPr>
+        <p:txBody>
+          <a:bodyPr wrap="square" lIns="73152" rIns="73152" tIns="36576" bIns="36576">
+            <a:spAutoFit/>
+          </a:bodyPr>
+          <a:lstStyle/>
+          <a:p>
+            <a:pPr algn="ctr">
+              <a:spcAft>
+                <a:spcPts val="0"/>
+              </a:spcAft>
+              <a:defRPr sz="1400" b="1">
+                <a:solidFill>
+                  <a:srgbClr val="DB7E22"/>
+                </a:solidFill>
+                <a:latin typeface="Noto Sans CJK KR"/>
+              </a:defRPr>
+            </a:pPr>
+            <a:r>
+              <a:t>두 터미널은 동시에 필요합니다. 각 검은 블록에는 그대로 복사할 명령만 들어 있습니다.</a:t>
+            </a:r>
+          </a:p>
+        </p:txBody>
+      </p:sp>
+      <p:sp>
+        <p:nvSpPr>
+          <p:cNvPr id="10" name="TextBox 9"/>
+          <p:cNvSpPr txBox="1"/>
+          <p:nvPr/>
+        </p:nvSpPr>
+        <p:spPr>
+          <a:xfrm>
+            <a:off x="676656" y="3017520"/>
+            <a:ext cx="5138928" cy="256032"/>
+          </a:xfrm>
+          <a:prstGeom prst="rect">
+            <a:avLst/>
+          </a:prstGeom>
+          <a:noFill/>
+        </p:spPr>
+        <p:txBody>
+          <a:bodyPr wrap="square" lIns="73152" rIns="73152" tIns="36576" bIns="36576">
+            <a:spAutoFit/>
+          </a:bodyPr>
+          <a:lstStyle/>
+          <a:p>
+            <a:pPr algn="ctr">
+              <a:spcAft>
+                <a:spcPts val="0"/>
+              </a:spcAft>
+              <a:defRPr sz="1600" b="1">
+                <a:solidFill>
+                  <a:srgbClr val="225B9B"/>
+                </a:solidFill>
+                <a:latin typeface="Noto Sans CJK KR"/>
+              </a:defRPr>
+            </a:pPr>
+            <a:r>
+              <a:t>터미널 1 — 명령만 복사</a:t>
+            </a:r>
+          </a:p>
+        </p:txBody>
+      </p:sp>
+      <p:sp>
+        <p:nvSpPr>
+          <p:cNvPr id="11" name="Rounded Rectangle 10"/>
           <p:cNvSpPr/>
           <p:nvPr/>
         </p:nvSpPr>
         <p:spPr>
           <a:xfrm>
-            <a:off x="676656" y="2871216"/>
-            <a:ext cx="10835640" cy="2331720"/>
+            <a:off x="676656" y="3328416"/>
+            <a:ext cx="5138928" cy="1700784"/>
           </a:xfrm>
           <a:prstGeom prst="roundRect">
             <a:avLst/>
@@ -34709,14 +38053,14 @@
           </a:fontRef>
         </p:style>
         <p:txBody>
-          <a:bodyPr rtlCol="0" anchor="ctr" wrap="square" lIns="73152" rIns="73152" tIns="36576" bIns="36576"/>
-          <a:lstStyle/>
-          <a:p>
-            <a:pPr algn="l">
-              <a:spcAft>
-                <a:spcPts val="0"/>
-              </a:spcAft>
-              <a:defRPr sz="1600" b="0">
+          <a:bodyPr rtlCol="0" anchor="ctr" wrap="square" lIns="109728" rIns="109728" tIns="73152" bIns="73152"/>
+          <a:lstStyle/>
+          <a:p>
+            <a:pPr algn="l">
+              <a:spcAft>
+                <a:spcPts val="0"/>
+              </a:spcAft>
+              <a:defRPr sz="1400" b="0">
                 <a:solidFill>
                   <a:srgbClr val="FFFFFF"/>
                 </a:solidFill>
@@ -34724,13 +38068,205 @@
               </a:defRPr>
             </a:pPr>
             <a:r>
+              <a:t>source /opt/ros/jazzy/setup.bash</a:t>
+            </a:r>
+          </a:p>
+          <a:p>
+            <a:pPr algn="l">
+              <a:spcAft>
+                <a:spcPts val="0"/>
+              </a:spcAft>
+              <a:defRPr sz="1400" b="0">
+                <a:solidFill>
+                  <a:srgbClr val="FFFFFF"/>
+                </a:solidFill>
+                <a:latin typeface="DejaVu Sans Mono"/>
+              </a:defRPr>
+            </a:pPr>
+            <a:r>
+              <a:t>source ~/ros2_curri/my_agv_ws/install/setup.bash</a:t>
+            </a:r>
+          </a:p>
+          <a:p>
+            <a:pPr algn="l">
+              <a:spcAft>
+                <a:spcPts val="0"/>
+              </a:spcAft>
+              <a:defRPr sz="1400" b="0">
+                <a:solidFill>
+                  <a:srgbClr val="FFFFFF"/>
+                </a:solidFill>
+                <a:latin typeface="DejaVu Sans Mono"/>
+              </a:defRPr>
+            </a:pPr>
+            <a:r>
               <a:t>ros2 launch agv_gazebo ros2_control.launch.py</a:t>
             </a:r>
-            <a:br/>
-            <a:r>
-              <a:t># 새 터미널</a:t>
-            </a:r>
-            <a:br/>
+          </a:p>
+        </p:txBody>
+      </p:sp>
+      <p:sp>
+        <p:nvSpPr>
+          <p:cNvPr id="12" name="TextBox 11"/>
+          <p:cNvSpPr txBox="1"/>
+          <p:nvPr/>
+        </p:nvSpPr>
+        <p:spPr>
+          <a:xfrm>
+            <a:off x="749808" y="5166360"/>
+            <a:ext cx="4992624" cy="438912"/>
+          </a:xfrm>
+          <a:prstGeom prst="rect">
+            <a:avLst/>
+          </a:prstGeom>
+          <a:noFill/>
+        </p:spPr>
+        <p:txBody>
+          <a:bodyPr wrap="square" lIns="73152" rIns="73152" tIns="36576" bIns="36576">
+            <a:spAutoFit/>
+          </a:bodyPr>
+          <a:lstStyle/>
+          <a:p>
+            <a:pPr algn="ctr">
+              <a:spcAft>
+                <a:spcPts val="0"/>
+              </a:spcAft>
+              <a:defRPr sz="1300" b="1">
+                <a:solidFill>
+                  <a:srgbClr val="2A8B5A"/>
+                </a:solidFill>
+                <a:latin typeface="Noto Sans CJK KR"/>
+              </a:defRPr>
+            </a:pPr>
+            <a:r>
+              <a:t>터미널 1 역할: 시뮬레이터·bridge·node를 먼저 시작한 뒤 이 창은 종료하지 않고 둡니다.</a:t>
+            </a:r>
+          </a:p>
+        </p:txBody>
+      </p:sp>
+      <p:sp>
+        <p:nvSpPr>
+          <p:cNvPr id="13" name="TextBox 12"/>
+          <p:cNvSpPr txBox="1"/>
+          <p:nvPr/>
+        </p:nvSpPr>
+        <p:spPr>
+          <a:xfrm>
+            <a:off x="6190488" y="3017520"/>
+            <a:ext cx="5138928" cy="256032"/>
+          </a:xfrm>
+          <a:prstGeom prst="rect">
+            <a:avLst/>
+          </a:prstGeom>
+          <a:noFill/>
+        </p:spPr>
+        <p:txBody>
+          <a:bodyPr wrap="square" lIns="73152" rIns="73152" tIns="36576" bIns="36576">
+            <a:spAutoFit/>
+          </a:bodyPr>
+          <a:lstStyle/>
+          <a:p>
+            <a:pPr algn="ctr">
+              <a:spcAft>
+                <a:spcPts val="0"/>
+              </a:spcAft>
+              <a:defRPr sz="1600" b="1">
+                <a:solidFill>
+                  <a:srgbClr val="225B9B"/>
+                </a:solidFill>
+                <a:latin typeface="Noto Sans CJK KR"/>
+              </a:defRPr>
+            </a:pPr>
+            <a:r>
+              <a:t>터미널 2 — 명령만 복사</a:t>
+            </a:r>
+          </a:p>
+        </p:txBody>
+      </p:sp>
+      <p:sp>
+        <p:nvSpPr>
+          <p:cNvPr id="14" name="Rounded Rectangle 13"/>
+          <p:cNvSpPr/>
+          <p:nvPr/>
+        </p:nvSpPr>
+        <p:spPr>
+          <a:xfrm>
+            <a:off x="6190488" y="3328416"/>
+            <a:ext cx="5138928" cy="1700784"/>
+          </a:xfrm>
+          <a:prstGeom prst="roundRect">
+            <a:avLst/>
+          </a:prstGeom>
+          <a:solidFill>
+            <a:srgbClr val="1D232D"/>
+          </a:solidFill>
+          <a:ln>
+            <a:solidFill>
+              <a:srgbClr val="1D232D"/>
+            </a:solidFill>
+          </a:ln>
+        </p:spPr>
+        <p:style>
+          <a:lnRef idx="1">
+            <a:schemeClr val="accent1"/>
+          </a:lnRef>
+          <a:fillRef idx="3">
+            <a:schemeClr val="accent1"/>
+          </a:fillRef>
+          <a:effectRef idx="2">
+            <a:schemeClr val="accent1"/>
+          </a:effectRef>
+          <a:fontRef idx="minor">
+            <a:schemeClr val="lt1"/>
+          </a:fontRef>
+        </p:style>
+        <p:txBody>
+          <a:bodyPr rtlCol="0" anchor="ctr" wrap="square" lIns="109728" rIns="109728" tIns="73152" bIns="73152"/>
+          <a:lstStyle/>
+          <a:p>
+            <a:pPr algn="l">
+              <a:spcAft>
+                <a:spcPts val="0"/>
+              </a:spcAft>
+              <a:defRPr sz="1400" b="0">
+                <a:solidFill>
+                  <a:srgbClr val="FFFFFF"/>
+                </a:solidFill>
+                <a:latin typeface="DejaVu Sans Mono"/>
+              </a:defRPr>
+            </a:pPr>
+            <a:r>
+              <a:t>source /opt/ros/jazzy/setup.bash</a:t>
+            </a:r>
+          </a:p>
+          <a:p>
+            <a:pPr algn="l">
+              <a:spcAft>
+                <a:spcPts val="0"/>
+              </a:spcAft>
+              <a:defRPr sz="1400" b="0">
+                <a:solidFill>
+                  <a:srgbClr val="FFFFFF"/>
+                </a:solidFill>
+                <a:latin typeface="DejaVu Sans Mono"/>
+              </a:defRPr>
+            </a:pPr>
+            <a:r>
+              <a:t>source ~/ros2_curri/my_agv_ws/install/setup.bash</a:t>
+            </a:r>
+          </a:p>
+          <a:p>
+            <a:pPr algn="l">
+              <a:spcAft>
+                <a:spcPts val="0"/>
+              </a:spcAft>
+              <a:defRPr sz="1400" b="0">
+                <a:solidFill>
+                  <a:srgbClr val="FFFFFF"/>
+                </a:solidFill>
+                <a:latin typeface="DejaVu Sans Mono"/>
+              </a:defRPr>
+            </a:pPr>
             <a:r>
               <a:t>ros2 control list_controllers -c /controller_manager</a:t>
             </a:r>
@@ -34739,31 +38275,31 @@
       </p:sp>
       <p:sp>
         <p:nvSpPr>
-          <p:cNvPr id="10" name="TextBox 9"/>
-          <p:cNvSpPr txBox="1"/>
-          <p:nvPr/>
-        </p:nvSpPr>
-        <p:spPr>
-          <a:xfrm>
-            <a:off x="768096" y="5468112"/>
-            <a:ext cx="1143000" cy="256032"/>
-          </a:xfrm>
-          <a:prstGeom prst="rect">
-            <a:avLst/>
-          </a:prstGeom>
-          <a:noFill/>
-        </p:spPr>
-        <p:txBody>
-          <a:bodyPr wrap="square" lIns="73152" rIns="73152" tIns="36576" bIns="36576">
-            <a:spAutoFit/>
-          </a:bodyPr>
-          <a:lstStyle/>
-          <a:p>
-            <a:pPr algn="l">
-              <a:spcAft>
-                <a:spcPts val="0"/>
-              </a:spcAft>
-              <a:defRPr sz="1800" b="1">
+          <p:cNvPr id="15" name="TextBox 14"/>
+          <p:cNvSpPr txBox="1"/>
+          <p:nvPr/>
+        </p:nvSpPr>
+        <p:spPr>
+          <a:xfrm>
+            <a:off x="6263640" y="5166360"/>
+            <a:ext cx="4992624" cy="438912"/>
+          </a:xfrm>
+          <a:prstGeom prst="rect">
+            <a:avLst/>
+          </a:prstGeom>
+          <a:noFill/>
+        </p:spPr>
+        <p:txBody>
+          <a:bodyPr wrap="square" lIns="73152" rIns="73152" tIns="36576" bIns="36576">
+            <a:spAutoFit/>
+          </a:bodyPr>
+          <a:lstStyle/>
+          <a:p>
+            <a:pPr algn="ctr">
+              <a:spcAft>
+                <a:spcPts val="0"/>
+              </a:spcAft>
+              <a:defRPr sz="1300" b="1">
                 <a:solidFill>
                   <a:srgbClr val="2A8B5A"/>
                 </a:solidFill>
@@ -34771,38 +38307,38 @@
               </a:defRPr>
             </a:pPr>
             <a:r>
-              <a:t>확인</a:t>
-            </a:r>
-          </a:p>
-        </p:txBody>
-      </p:sp>
-      <p:sp>
-        <p:nvSpPr>
-          <p:cNvPr id="11" name="TextBox 10"/>
-          <p:cNvSpPr txBox="1"/>
-          <p:nvPr/>
-        </p:nvSpPr>
-        <p:spPr>
-          <a:xfrm>
-            <a:off x="768096" y="5742432"/>
-            <a:ext cx="10561320" cy="347472"/>
-          </a:xfrm>
-          <a:prstGeom prst="rect">
-            <a:avLst/>
-          </a:prstGeom>
-          <a:noFill/>
-        </p:spPr>
-        <p:txBody>
-          <a:bodyPr wrap="square" lIns="73152" rIns="73152" tIns="36576" bIns="36576">
-            <a:spAutoFit/>
-          </a:bodyPr>
-          <a:lstStyle/>
-          <a:p>
-            <a:pPr algn="l">
-              <a:spcAft>
-                <a:spcPts val="0"/>
-              </a:spcAft>
-              <a:defRPr sz="1800" b="0">
+              <a:t>터미널 2 역할: 다른 터미널의 실행 결과를 이 창에서 관찰·검증합니다.</a:t>
+            </a:r>
+          </a:p>
+        </p:txBody>
+      </p:sp>
+      <p:sp>
+        <p:nvSpPr>
+          <p:cNvPr id="16" name="TextBox 15"/>
+          <p:cNvSpPr txBox="1"/>
+          <p:nvPr/>
+        </p:nvSpPr>
+        <p:spPr>
+          <a:xfrm>
+            <a:off x="768096" y="5916168"/>
+            <a:ext cx="10561320" cy="292608"/>
+          </a:xfrm>
+          <a:prstGeom prst="rect">
+            <a:avLst/>
+          </a:prstGeom>
+          <a:noFill/>
+        </p:spPr>
+        <p:txBody>
+          <a:bodyPr wrap="square" lIns="73152" rIns="73152" tIns="36576" bIns="36576">
+            <a:spAutoFit/>
+          </a:bodyPr>
+          <a:lstStyle/>
+          <a:p>
+            <a:pPr algn="ctr">
+              <a:spcAft>
+                <a:spcPts val="0"/>
+              </a:spcAft>
+              <a:defRPr sz="1500" b="1">
                 <a:solidFill>
                   <a:srgbClr val="122C4E"/>
                 </a:solidFill>
@@ -34810,7 +38346,7 @@
               </a:defRPr>
             </a:pPr>
             <a:r>
-              <a:t>출력에서 topic·frame·파일 이름 또는 성공 메시지를 찾고, 맞지 않으면 다음 파일로 가지 않습니다.</a:t>
+              <a:t>확인: 출력에서 topic·frame·파일 이름 또는 성공 메시지를 찾고, 맞지 않으면 다음 파일로 가지 않습니다.</a:t>
             </a:r>
           </a:p>
         </p:txBody>
@@ -35042,21 +38578,177 @@
               </a:defRPr>
             </a:pPr>
             <a:r>
-              <a:t>현재 단계 실행    |    현재 폴더 ~/ros2_curri/my_agv_ws    |    현재 터미널</a:t>
-            </a:r>
-          </a:p>
-        </p:txBody>
-      </p:sp>
-      <p:sp>
-        <p:nvSpPr>
-          <p:cNvPr id="7" name="Rounded Rectangle 6"/>
+              <a:t>현재 단계 실행    |    현재 폴더 ~/ros2_curri/my_agv_ws    |    터미널 1 + 2</a:t>
+            </a:r>
+          </a:p>
+        </p:txBody>
+      </p:sp>
+      <p:sp>
+        <p:nvSpPr>
+          <p:cNvPr id="7" name="TextBox 6"/>
+          <p:cNvSpPr txBox="1"/>
+          <p:nvPr/>
+        </p:nvSpPr>
+        <p:spPr>
+          <a:xfrm>
+            <a:off x="676656" y="1719072"/>
+            <a:ext cx="1691640" cy="274320"/>
+          </a:xfrm>
+          <a:prstGeom prst="rect">
+            <a:avLst/>
+          </a:prstGeom>
+          <a:noFill/>
+        </p:spPr>
+        <p:txBody>
+          <a:bodyPr wrap="square" lIns="73152" rIns="73152" tIns="36576" bIns="36576">
+            <a:spAutoFit/>
+          </a:bodyPr>
+          <a:lstStyle/>
+          <a:p>
+            <a:pPr algn="l">
+              <a:spcAft>
+                <a:spcPts val="0"/>
+              </a:spcAft>
+              <a:defRPr sz="1700" b="1">
+                <a:solidFill>
+                  <a:srgbClr val="225B9B"/>
+                </a:solidFill>
+                <a:latin typeface="Noto Sans CJK KR"/>
+              </a:defRPr>
+            </a:pPr>
+            <a:r>
+              <a:t>명령의 목적</a:t>
+            </a:r>
+          </a:p>
+        </p:txBody>
+      </p:sp>
+      <p:sp>
+        <p:nvSpPr>
+          <p:cNvPr id="8" name="TextBox 7"/>
+          <p:cNvSpPr txBox="1"/>
+          <p:nvPr/>
+        </p:nvSpPr>
+        <p:spPr>
+          <a:xfrm>
+            <a:off x="676656" y="2002536"/>
+            <a:ext cx="10789920" cy="512064"/>
+          </a:xfrm>
+          <a:prstGeom prst="rect">
+            <a:avLst/>
+          </a:prstGeom>
+          <a:noFill/>
+        </p:spPr>
+        <p:txBody>
+          <a:bodyPr wrap="square" lIns="73152" rIns="73152" tIns="36576" bIns="36576">
+            <a:spAutoFit/>
+          </a:bodyPr>
+          <a:lstStyle/>
+          <a:p>
+            <a:pPr algn="l">
+              <a:spcAft>
+                <a:spcPts val="0"/>
+              </a:spcAft>
+              <a:defRPr sz="1800" b="0">
+                <a:solidFill>
+                  <a:srgbClr val="122C4E"/>
+                </a:solidFill>
+                <a:latin typeface="Noto Sans CJK KR"/>
+              </a:defRPr>
+            </a:pPr>
+            <a:r>
+              <a:t>명령 순서를 바꾸지 않습니다. build가 끝난 뒤 source하고, 마지막 명령으로 node·Gazebo·RViz를 실행합니다.</a:t>
+            </a:r>
+          </a:p>
+        </p:txBody>
+      </p:sp>
+      <p:sp>
+        <p:nvSpPr>
+          <p:cNvPr id="9" name="TextBox 8"/>
+          <p:cNvSpPr txBox="1"/>
+          <p:nvPr/>
+        </p:nvSpPr>
+        <p:spPr>
+          <a:xfrm>
+            <a:off x="676656" y="2679192"/>
+            <a:ext cx="10789920" cy="237744"/>
+          </a:xfrm>
+          <a:prstGeom prst="rect">
+            <a:avLst/>
+          </a:prstGeom>
+          <a:noFill/>
+        </p:spPr>
+        <p:txBody>
+          <a:bodyPr wrap="square" lIns="73152" rIns="73152" tIns="36576" bIns="36576">
+            <a:spAutoFit/>
+          </a:bodyPr>
+          <a:lstStyle/>
+          <a:p>
+            <a:pPr algn="ctr">
+              <a:spcAft>
+                <a:spcPts val="0"/>
+              </a:spcAft>
+              <a:defRPr sz="1400" b="1">
+                <a:solidFill>
+                  <a:srgbClr val="DB7E22"/>
+                </a:solidFill>
+                <a:latin typeface="Noto Sans CJK KR"/>
+              </a:defRPr>
+            </a:pPr>
+            <a:r>
+              <a:t>두 터미널은 동시에 필요합니다. 각 검은 블록에는 그대로 복사할 명령만 들어 있습니다.</a:t>
+            </a:r>
+          </a:p>
+        </p:txBody>
+      </p:sp>
+      <p:sp>
+        <p:nvSpPr>
+          <p:cNvPr id="10" name="TextBox 9"/>
+          <p:cNvSpPr txBox="1"/>
+          <p:nvPr/>
+        </p:nvSpPr>
+        <p:spPr>
+          <a:xfrm>
+            <a:off x="676656" y="3017520"/>
+            <a:ext cx="5138928" cy="256032"/>
+          </a:xfrm>
+          <a:prstGeom prst="rect">
+            <a:avLst/>
+          </a:prstGeom>
+          <a:noFill/>
+        </p:spPr>
+        <p:txBody>
+          <a:bodyPr wrap="square" lIns="73152" rIns="73152" tIns="36576" bIns="36576">
+            <a:spAutoFit/>
+          </a:bodyPr>
+          <a:lstStyle/>
+          <a:p>
+            <a:pPr algn="ctr">
+              <a:spcAft>
+                <a:spcPts val="0"/>
+              </a:spcAft>
+              <a:defRPr sz="1600" b="1">
+                <a:solidFill>
+                  <a:srgbClr val="225B9B"/>
+                </a:solidFill>
+                <a:latin typeface="Noto Sans CJK KR"/>
+              </a:defRPr>
+            </a:pPr>
+            <a:r>
+              <a:t>터미널 1 — 명령만 복사</a:t>
+            </a:r>
+          </a:p>
+        </p:txBody>
+      </p:sp>
+      <p:sp>
+        <p:nvSpPr>
+          <p:cNvPr id="11" name="Rounded Rectangle 10"/>
           <p:cNvSpPr/>
           <p:nvPr/>
         </p:nvSpPr>
         <p:spPr>
           <a:xfrm>
-            <a:off x="658368" y="1700784"/>
-            <a:ext cx="10972800" cy="3182112"/>
+            <a:off x="676656" y="3328416"/>
+            <a:ext cx="5138928" cy="1700784"/>
           </a:xfrm>
           <a:prstGeom prst="roundRect">
             <a:avLst/>
@@ -35085,14 +38777,14 @@
           </a:fontRef>
         </p:style>
         <p:txBody>
-          <a:bodyPr rtlCol="0" anchor="ctr" wrap="square" lIns="73152" rIns="73152" tIns="36576" bIns="36576"/>
-          <a:lstStyle/>
-          <a:p>
-            <a:pPr algn="l">
-              <a:spcAft>
-                <a:spcPts val="0"/>
-              </a:spcAft>
-              <a:defRPr sz="1600" b="0">
+          <a:bodyPr rtlCol="0" anchor="ctr" wrap="square" lIns="109728" rIns="109728" tIns="73152" bIns="73152"/>
+          <a:lstStyle/>
+          <a:p>
+            <a:pPr algn="l">
+              <a:spcAft>
+                <a:spcPts val="0"/>
+              </a:spcAft>
+              <a:defRPr sz="1400" b="0">
                 <a:solidFill>
                   <a:srgbClr val="FFFFFF"/>
                 </a:solidFill>
@@ -35100,46 +38792,70 @@
               </a:defRPr>
             </a:pPr>
             <a:r>
+              <a:t>source /opt/ros/jazzy/setup.bash</a:t>
+            </a:r>
+          </a:p>
+          <a:p>
+            <a:pPr algn="l">
+              <a:spcAft>
+                <a:spcPts val="0"/>
+              </a:spcAft>
+              <a:defRPr sz="1400" b="0">
+                <a:solidFill>
+                  <a:srgbClr val="FFFFFF"/>
+                </a:solidFill>
+                <a:latin typeface="DejaVu Sans Mono"/>
+              </a:defRPr>
+            </a:pPr>
+            <a:r>
               <a:t>source ~/ros2_curri/my_agv_ws/install/setup.bash</a:t>
             </a:r>
-            <a:br/>
+          </a:p>
+          <a:p>
+            <a:pPr algn="l">
+              <a:spcAft>
+                <a:spcPts val="0"/>
+              </a:spcAft>
+              <a:defRPr sz="1400" b="0">
+                <a:solidFill>
+                  <a:srgbClr val="FFFFFF"/>
+                </a:solidFill>
+                <a:latin typeface="DejaVu Sans Mono"/>
+              </a:defRPr>
+            </a:pPr>
             <a:r>
               <a:t>ros2 launch agv_gazebo ros2_control.launch.py</a:t>
             </a:r>
-            <a:br/>
-            <a:r>
-              <a:t># 새 터미널: ros2 control list_controllers -c /controller_manager</a:t>
-            </a:r>
-          </a:p>
-        </p:txBody>
-      </p:sp>
-      <p:sp>
-        <p:nvSpPr>
-          <p:cNvPr id="8" name="TextBox 7"/>
-          <p:cNvSpPr txBox="1"/>
-          <p:nvPr/>
-        </p:nvSpPr>
-        <p:spPr>
-          <a:xfrm>
-            <a:off x="786384" y="5239512"/>
-            <a:ext cx="1261872" cy="237744"/>
-          </a:xfrm>
-          <a:prstGeom prst="rect">
-            <a:avLst/>
-          </a:prstGeom>
-          <a:noFill/>
-        </p:spPr>
-        <p:txBody>
-          <a:bodyPr wrap="square" lIns="73152" rIns="73152" tIns="36576" bIns="36576">
-            <a:spAutoFit/>
-          </a:bodyPr>
-          <a:lstStyle/>
-          <a:p>
-            <a:pPr algn="l">
-              <a:spcAft>
-                <a:spcPts val="0"/>
-              </a:spcAft>
-              <a:defRPr sz="1800" b="1">
+          </a:p>
+        </p:txBody>
+      </p:sp>
+      <p:sp>
+        <p:nvSpPr>
+          <p:cNvPr id="12" name="TextBox 11"/>
+          <p:cNvSpPr txBox="1"/>
+          <p:nvPr/>
+        </p:nvSpPr>
+        <p:spPr>
+          <a:xfrm>
+            <a:off x="749808" y="5166360"/>
+            <a:ext cx="4992624" cy="438912"/>
+          </a:xfrm>
+          <a:prstGeom prst="rect">
+            <a:avLst/>
+          </a:prstGeom>
+          <a:noFill/>
+        </p:spPr>
+        <p:txBody>
+          <a:bodyPr wrap="square" lIns="73152" rIns="73152" tIns="36576" bIns="36576">
+            <a:spAutoFit/>
+          </a:bodyPr>
+          <a:lstStyle/>
+          <a:p>
+            <a:pPr algn="ctr">
+              <a:spcAft>
+                <a:spcPts val="0"/>
+              </a:spcAft>
+              <a:defRPr sz="1300" b="1">
                 <a:solidFill>
                   <a:srgbClr val="2A8B5A"/>
                 </a:solidFill>
@@ -35147,38 +38863,206 @@
               </a:defRPr>
             </a:pPr>
             <a:r>
-              <a:t>확인 기준</a:t>
-            </a:r>
-          </a:p>
-        </p:txBody>
-      </p:sp>
-      <p:sp>
-        <p:nvSpPr>
-          <p:cNvPr id="9" name="TextBox 8"/>
-          <p:cNvSpPr txBox="1"/>
-          <p:nvPr/>
-        </p:nvSpPr>
-        <p:spPr>
-          <a:xfrm>
-            <a:off x="786384" y="5532120"/>
-            <a:ext cx="10469880" cy="420624"/>
-          </a:xfrm>
-          <a:prstGeom prst="rect">
-            <a:avLst/>
-          </a:prstGeom>
-          <a:noFill/>
-        </p:spPr>
-        <p:txBody>
-          <a:bodyPr wrap="square" lIns="73152" rIns="73152" tIns="36576" bIns="36576">
-            <a:spAutoFit/>
-          </a:bodyPr>
-          <a:lstStyle/>
-          <a:p>
-            <a:pPr algn="l">
-              <a:spcAft>
-                <a:spcPts val="0"/>
-              </a:spcAft>
-              <a:defRPr sz="1800" b="0">
+              <a:t>터미널 1 역할: 시뮬레이터·bridge·node를 먼저 시작한 뒤 이 창은 종료하지 않고 둡니다.</a:t>
+            </a:r>
+          </a:p>
+        </p:txBody>
+      </p:sp>
+      <p:sp>
+        <p:nvSpPr>
+          <p:cNvPr id="13" name="TextBox 12"/>
+          <p:cNvSpPr txBox="1"/>
+          <p:nvPr/>
+        </p:nvSpPr>
+        <p:spPr>
+          <a:xfrm>
+            <a:off x="6190488" y="3017520"/>
+            <a:ext cx="5138928" cy="256032"/>
+          </a:xfrm>
+          <a:prstGeom prst="rect">
+            <a:avLst/>
+          </a:prstGeom>
+          <a:noFill/>
+        </p:spPr>
+        <p:txBody>
+          <a:bodyPr wrap="square" lIns="73152" rIns="73152" tIns="36576" bIns="36576">
+            <a:spAutoFit/>
+          </a:bodyPr>
+          <a:lstStyle/>
+          <a:p>
+            <a:pPr algn="ctr">
+              <a:spcAft>
+                <a:spcPts val="0"/>
+              </a:spcAft>
+              <a:defRPr sz="1600" b="1">
+                <a:solidFill>
+                  <a:srgbClr val="225B9B"/>
+                </a:solidFill>
+                <a:latin typeface="Noto Sans CJK KR"/>
+              </a:defRPr>
+            </a:pPr>
+            <a:r>
+              <a:t>터미널 2 — 명령만 복사</a:t>
+            </a:r>
+          </a:p>
+        </p:txBody>
+      </p:sp>
+      <p:sp>
+        <p:nvSpPr>
+          <p:cNvPr id="14" name="Rounded Rectangle 13"/>
+          <p:cNvSpPr/>
+          <p:nvPr/>
+        </p:nvSpPr>
+        <p:spPr>
+          <a:xfrm>
+            <a:off x="6190488" y="3328416"/>
+            <a:ext cx="5138928" cy="1700784"/>
+          </a:xfrm>
+          <a:prstGeom prst="roundRect">
+            <a:avLst/>
+          </a:prstGeom>
+          <a:solidFill>
+            <a:srgbClr val="1D232D"/>
+          </a:solidFill>
+          <a:ln>
+            <a:solidFill>
+              <a:srgbClr val="1D232D"/>
+            </a:solidFill>
+          </a:ln>
+        </p:spPr>
+        <p:style>
+          <a:lnRef idx="1">
+            <a:schemeClr val="accent1"/>
+          </a:lnRef>
+          <a:fillRef idx="3">
+            <a:schemeClr val="accent1"/>
+          </a:fillRef>
+          <a:effectRef idx="2">
+            <a:schemeClr val="accent1"/>
+          </a:effectRef>
+          <a:fontRef idx="minor">
+            <a:schemeClr val="lt1"/>
+          </a:fontRef>
+        </p:style>
+        <p:txBody>
+          <a:bodyPr rtlCol="0" anchor="ctr" wrap="square" lIns="109728" rIns="109728" tIns="73152" bIns="73152"/>
+          <a:lstStyle/>
+          <a:p>
+            <a:pPr algn="l">
+              <a:spcAft>
+                <a:spcPts val="0"/>
+              </a:spcAft>
+              <a:defRPr sz="1400" b="0">
+                <a:solidFill>
+                  <a:srgbClr val="FFFFFF"/>
+                </a:solidFill>
+                <a:latin typeface="DejaVu Sans Mono"/>
+              </a:defRPr>
+            </a:pPr>
+            <a:r>
+              <a:t>source /opt/ros/jazzy/setup.bash</a:t>
+            </a:r>
+          </a:p>
+          <a:p>
+            <a:pPr algn="l">
+              <a:spcAft>
+                <a:spcPts val="0"/>
+              </a:spcAft>
+              <a:defRPr sz="1400" b="0">
+                <a:solidFill>
+                  <a:srgbClr val="FFFFFF"/>
+                </a:solidFill>
+                <a:latin typeface="DejaVu Sans Mono"/>
+              </a:defRPr>
+            </a:pPr>
+            <a:r>
+              <a:t>source ~/ros2_curri/my_agv_ws/install/setup.bash</a:t>
+            </a:r>
+          </a:p>
+          <a:p>
+            <a:pPr algn="l">
+              <a:spcAft>
+                <a:spcPts val="0"/>
+              </a:spcAft>
+              <a:defRPr sz="1400" b="0">
+                <a:solidFill>
+                  <a:srgbClr val="FFFFFF"/>
+                </a:solidFill>
+                <a:latin typeface="DejaVu Sans Mono"/>
+              </a:defRPr>
+            </a:pPr>
+            <a:r>
+              <a:t>ros2 control list_controllers -c /controller_manager</a:t>
+            </a:r>
+          </a:p>
+        </p:txBody>
+      </p:sp>
+      <p:sp>
+        <p:nvSpPr>
+          <p:cNvPr id="15" name="TextBox 14"/>
+          <p:cNvSpPr txBox="1"/>
+          <p:nvPr/>
+        </p:nvSpPr>
+        <p:spPr>
+          <a:xfrm>
+            <a:off x="6263640" y="5166360"/>
+            <a:ext cx="4992624" cy="438912"/>
+          </a:xfrm>
+          <a:prstGeom prst="rect">
+            <a:avLst/>
+          </a:prstGeom>
+          <a:noFill/>
+        </p:spPr>
+        <p:txBody>
+          <a:bodyPr wrap="square" lIns="73152" rIns="73152" tIns="36576" bIns="36576">
+            <a:spAutoFit/>
+          </a:bodyPr>
+          <a:lstStyle/>
+          <a:p>
+            <a:pPr algn="ctr">
+              <a:spcAft>
+                <a:spcPts val="0"/>
+              </a:spcAft>
+              <a:defRPr sz="1300" b="1">
+                <a:solidFill>
+                  <a:srgbClr val="2A8B5A"/>
+                </a:solidFill>
+                <a:latin typeface="Noto Sans CJK KR"/>
+              </a:defRPr>
+            </a:pPr>
+            <a:r>
+              <a:t>터미널 2 역할: 다른 터미널의 실행 결과를 이 창에서 관찰·검증합니다.</a:t>
+            </a:r>
+          </a:p>
+        </p:txBody>
+      </p:sp>
+      <p:sp>
+        <p:nvSpPr>
+          <p:cNvPr id="16" name="TextBox 15"/>
+          <p:cNvSpPr txBox="1"/>
+          <p:nvPr/>
+        </p:nvSpPr>
+        <p:spPr>
+          <a:xfrm>
+            <a:off x="768096" y="5916168"/>
+            <a:ext cx="10561320" cy="292608"/>
+          </a:xfrm>
+          <a:prstGeom prst="rect">
+            <a:avLst/>
+          </a:prstGeom>
+          <a:noFill/>
+        </p:spPr>
+        <p:txBody>
+          <a:bodyPr wrap="square" lIns="73152" rIns="73152" tIns="36576" bIns="36576">
+            <a:spAutoFit/>
+          </a:bodyPr>
+          <a:lstStyle/>
+          <a:p>
+            <a:pPr algn="ctr">
+              <a:spcAft>
+                <a:spcPts val="0"/>
+              </a:spcAft>
+              <a:defRPr sz="1500" b="1">
                 <a:solidFill>
                   <a:srgbClr val="122C4E"/>
                 </a:solidFill>
@@ -35186,7 +39070,7 @@
               </a:defRPr>
             </a:pPr>
             <a:r>
-              <a:t>`ros2 control list_controllers`에서 joint_state_broadcaster와 diff_drive_controller가 모두 active이고 wheel joint state가 publish된다.</a:t>
+              <a:t>확인: `ros2 control list_controllers`에서 joint_state_broadcaster와 diff_drive_controller가 모두 active이고 wheel joint state가 publish된다.</a:t>
             </a:r>
           </a:p>
         </p:txBody>
@@ -35282,7 +39166,7 @@
               </a:defRPr>
             </a:pPr>
             <a:r>
-              <a:t>실제 ROS 2 환경의 파일·패키지·구성 검증 로그</a:t>
+              <a:t>실제 M16 격리 launch의 ros2 control 출력: 두 controller가 모두 active</a:t>
             </a:r>
           </a:p>
         </p:txBody>
@@ -35367,7 +39251,7 @@
       </p:sp>
       <p:pic>
         <p:nvPicPr>
-          <p:cNvPr id="6" name="Picture 5" descr="validation_terminal.png"/>
+          <p:cNvPr id="6" name="Picture 5" descr="01_controller_active_actual.png"/>
           <p:cNvPicPr>
             <a:picLocks noChangeAspect="1"/>
           </p:cNvPicPr>
@@ -35381,8 +39265,8 @@
         </p:blipFill>
         <p:spPr>
           <a:xfrm>
-            <a:off x="1246187" y="1353312"/>
-            <a:ext cx="9696576" cy="4800600"/>
+            <a:off x="790956" y="1884338"/>
+            <a:ext cx="10607040" cy="3738546"/>
           </a:xfrm>
           <a:prstGeom prst="rect">
             <a:avLst/>
@@ -35423,7 +39307,7 @@
               </a:defRPr>
             </a:pPr>
             <a:r>
-              <a:t>화면에서 확인: ① 명령/설정  ② 정상 출력 또는 화면  ③ 다음 검증 명령으로 재확인</a:t>
+              <a:t>화면에서 확인: 명령·설정과 화면의 topic·frame·결과 이름을 대조합니다.</a:t>
             </a:r>
           </a:p>
         </p:txBody>
@@ -35480,7 +39364,7 @@
               </a:defRPr>
             </a:pPr>
             <a:r>
-              <a:t>객관적 검증 명령으로 완료를 확인한다</a:t>
+              <a:t>정상 결과: 실제 환경에서 확인한 출력</a:t>
             </a:r>
           </a:p>
         </p:txBody>
@@ -35519,7 +39403,7 @@
               </a:defRPr>
             </a:pPr>
             <a:r>
-              <a:t>화면만 보지 말고 topic·frame·파일·parameter를 다시 확인합니다.</a:t>
+              <a:t>실제 ROS 2 환경의 파일·패키지·구성 검증 로그</a:t>
             </a:r>
           </a:p>
         </p:txBody>
@@ -35602,172 +39486,57 @@
           </a:p>
         </p:txBody>
       </p:sp>
-      <p:sp>
-        <p:nvSpPr>
-          <p:cNvPr id="6" name="Rectangle 5"/>
-          <p:cNvSpPr/>
-          <p:nvPr/>
-        </p:nvSpPr>
-        <p:spPr>
-          <a:xfrm>
-            <a:off x="566928" y="1188720"/>
-            <a:ext cx="11064240" cy="347472"/>
-          </a:xfrm>
-          <a:prstGeom prst="rect">
-            <a:avLst/>
-          </a:prstGeom>
-          <a:solidFill>
-            <a:srgbClr val="F4F7FB"/>
-          </a:solidFill>
-          <a:ln>
-            <a:solidFill>
-              <a:srgbClr val="F4F7FB"/>
-            </a:solidFill>
-          </a:ln>
-        </p:spPr>
-        <p:style>
-          <a:lnRef idx="1">
-            <a:schemeClr val="accent1"/>
-          </a:lnRef>
-          <a:fillRef idx="3">
-            <a:schemeClr val="accent1"/>
-          </a:fillRef>
-          <a:effectRef idx="2">
-            <a:schemeClr val="accent1"/>
-          </a:effectRef>
-          <a:fontRef idx="minor">
-            <a:schemeClr val="lt1"/>
-          </a:fontRef>
-        </p:style>
-        <p:txBody>
-          <a:bodyPr rtlCol="0" anchor="ctr" wrap="square" lIns="73152" rIns="73152" tIns="36576" bIns="36576"/>
-          <a:lstStyle/>
-          <a:p>
-            <a:pPr algn="l">
-              <a:spcAft>
-                <a:spcPts val="0"/>
-              </a:spcAft>
-              <a:defRPr sz="1300" b="1">
-                <a:solidFill>
-                  <a:srgbClr val="122C4E"/>
-                </a:solidFill>
-                <a:latin typeface="Noto Sans CJK KR"/>
-              </a:defRPr>
-            </a:pPr>
-            <a:r>
-              <a:t>현재 단계 검증    |    현재 폴더 ~/ros2_curri/my_agv_ws    |    현재 터미널</a:t>
-            </a:r>
-          </a:p>
-        </p:txBody>
-      </p:sp>
-      <p:sp>
-        <p:nvSpPr>
-          <p:cNvPr id="7" name="Rounded Rectangle 6"/>
-          <p:cNvSpPr/>
-          <p:nvPr/>
-        </p:nvSpPr>
-        <p:spPr>
-          <a:xfrm>
-            <a:off x="658368" y="1755648"/>
-            <a:ext cx="10972800" cy="2148840"/>
-          </a:xfrm>
-          <a:prstGeom prst="roundRect">
-            <a:avLst/>
-          </a:prstGeom>
-          <a:solidFill>
-            <a:srgbClr val="1D232D"/>
-          </a:solidFill>
-          <a:ln>
-            <a:solidFill>
-              <a:srgbClr val="1D232D"/>
-            </a:solidFill>
-          </a:ln>
-        </p:spPr>
-        <p:style>
-          <a:lnRef idx="1">
-            <a:schemeClr val="accent1"/>
-          </a:lnRef>
-          <a:fillRef idx="3">
-            <a:schemeClr val="accent1"/>
-          </a:fillRef>
-          <a:effectRef idx="2">
-            <a:schemeClr val="accent1"/>
-          </a:effectRef>
-          <a:fontRef idx="minor">
-            <a:schemeClr val="lt1"/>
-          </a:fontRef>
-        </p:style>
-        <p:txBody>
-          <a:bodyPr rtlCol="0" anchor="ctr" wrap="square" lIns="73152" rIns="73152" tIns="36576" bIns="36576"/>
-          <a:lstStyle/>
-          <a:p>
-            <a:pPr algn="l">
-              <a:spcAft>
-                <a:spcPts val="0"/>
-              </a:spcAft>
-              <a:defRPr sz="1600" b="0">
-                <a:solidFill>
-                  <a:srgbClr val="FFFFFF"/>
-                </a:solidFill>
-                <a:latin typeface="DejaVu Sans Mono"/>
-              </a:defRPr>
-            </a:pPr>
-            <a:r>
-              <a:t>ros2 control list_controllers -c /controller_manager</a:t>
-            </a:r>
-            <a:br/>
-            <a:r>
-              <a:t>ros2 topic echo /joint_states --once</a:t>
-            </a:r>
-          </a:p>
-        </p:txBody>
-      </p:sp>
-      <p:sp>
-        <p:nvSpPr>
-          <p:cNvPr id="8" name="Rounded Rectangle 7"/>
-          <p:cNvSpPr/>
-          <p:nvPr/>
-        </p:nvSpPr>
-        <p:spPr>
-          <a:xfrm>
-            <a:off x="658368" y="4206240"/>
-            <a:ext cx="10972800" cy="1554480"/>
-          </a:xfrm>
-          <a:prstGeom prst="roundRect">
-            <a:avLst/>
-          </a:prstGeom>
-          <a:solidFill>
-            <a:srgbClr val="F4F7FB"/>
-          </a:solidFill>
-          <a:ln>
-            <a:solidFill>
-              <a:srgbClr val="D1DFD5"/>
-            </a:solidFill>
-          </a:ln>
-        </p:spPr>
-        <p:style>
-          <a:lnRef idx="1">
-            <a:schemeClr val="accent1"/>
-          </a:lnRef>
-          <a:fillRef idx="3">
-            <a:schemeClr val="accent1"/>
-          </a:fillRef>
-          <a:effectRef idx="2">
-            <a:schemeClr val="accent1"/>
-          </a:effectRef>
-          <a:fontRef idx="minor">
-            <a:schemeClr val="lt1"/>
-          </a:fontRef>
-        </p:style>
-        <p:txBody>
-          <a:bodyPr rtlCol="0" anchor="ctr" wrap="square" lIns="73152" rIns="73152" tIns="36576" bIns="36576"/>
-          <a:lstStyle/>
-          <a:p>
-            <a:pPr algn="l">
-              <a:spcAft>
-                <a:spcPts val="0"/>
-              </a:spcAft>
-              <a:defRPr sz="1800" b="1">
+      <p:pic>
+        <p:nvPicPr>
+          <p:cNvPr id="6" name="Picture 5" descr="validation_terminal.png"/>
+          <p:cNvPicPr>
+            <a:picLocks noChangeAspect="1"/>
+          </p:cNvPicPr>
+          <p:nvPr/>
+        </p:nvPicPr>
+        <p:blipFill>
+          <a:blip r:embed="rId2"/>
+          <a:stretch>
+            <a:fillRect/>
+          </a:stretch>
+        </p:blipFill>
+        <p:spPr>
+          <a:xfrm>
+            <a:off x="1246187" y="1353312"/>
+            <a:ext cx="9696576" cy="4800600"/>
+          </a:xfrm>
+          <a:prstGeom prst="rect">
+            <a:avLst/>
+          </a:prstGeom>
+        </p:spPr>
+      </p:pic>
+      <p:sp>
+        <p:nvSpPr>
+          <p:cNvPr id="7" name="TextBox 6"/>
+          <p:cNvSpPr txBox="1"/>
+          <p:nvPr/>
+        </p:nvSpPr>
+        <p:spPr>
+          <a:xfrm>
+            <a:off x="777240" y="6144768"/>
+            <a:ext cx="10607040" cy="310896"/>
+          </a:xfrm>
+          <a:prstGeom prst="rect">
+            <a:avLst/>
+          </a:prstGeom>
+          <a:noFill/>
+        </p:spPr>
+        <p:txBody>
+          <a:bodyPr wrap="square" lIns="73152" rIns="73152" tIns="36576" bIns="36576">
+            <a:spAutoFit/>
+          </a:bodyPr>
+          <a:lstStyle/>
+          <a:p>
+            <a:pPr algn="ctr">
+              <a:spcAft>
+                <a:spcPts val="0"/>
+              </a:spcAft>
+              <a:defRPr sz="1100" b="1">
                 <a:solidFill>
                   <a:srgbClr val="2A8B5A"/>
                 </a:solidFill>
@@ -35775,58 +39544,7 @@
               </a:defRPr>
             </a:pPr>
             <a:r>
-              <a:t>완료 체크</a:t>
-            </a:r>
-            <a:br/>
-            <a:r>
-              <a:t>□ 명령이 오류 없이 실행된다.</a:t>
-            </a:r>
-            <a:br/>
-            <a:r>
-              <a:t>□ 기대한 파일·topic·frame·parameter 이름이 보인다.</a:t>
-            </a:r>
-            <a:br/>
-            <a:r>
-              <a:t>□ 값의 단위와 방향을 한 문장으로 설명할 수 있다.</a:t>
-            </a:r>
-          </a:p>
-        </p:txBody>
-      </p:sp>
-      <p:sp>
-        <p:nvSpPr>
-          <p:cNvPr id="9" name="TextBox 8"/>
-          <p:cNvSpPr txBox="1"/>
-          <p:nvPr/>
-        </p:nvSpPr>
-        <p:spPr>
-          <a:xfrm>
-            <a:off x="731520" y="5989320"/>
-            <a:ext cx="10789920" cy="237744"/>
-          </a:xfrm>
-          <a:prstGeom prst="rect">
-            <a:avLst/>
-          </a:prstGeom>
-          <a:noFill/>
-        </p:spPr>
-        <p:txBody>
-          <a:bodyPr wrap="square" lIns="73152" rIns="73152" tIns="36576" bIns="36576">
-            <a:spAutoFit/>
-          </a:bodyPr>
-          <a:lstStyle/>
-          <a:p>
-            <a:pPr algn="l">
-              <a:spcAft>
-                <a:spcPts val="0"/>
-              </a:spcAft>
-              <a:defRPr sz="1500" b="1">
-                <a:solidFill>
-                  <a:srgbClr val="122C4E"/>
-                </a:solidFill>
-                <a:latin typeface="Noto Sans CJK KR"/>
-              </a:defRPr>
-            </a:pPr>
-            <a:r>
-              <a:t>완료 조건: `ros2 control list_controllers`에서 joint_state_broadcaster와 diff_drive_controller가 모두 active이고 wheel joint state가 publish된다.</a:t>
+              <a:t>화면에서 확인: ① 명령/설정  ② 정상 출력 또는 화면  ③ 다음 검증 명령으로 재확인</a:t>
             </a:r>
           </a:p>
         </p:txBody>
@@ -35883,7 +39601,7 @@
               </a:defRPr>
             </a:pPr>
             <a:r>
-              <a:t>막히면: 증상 → 우선 확인 → 재검증</a:t>
+              <a:t>객관적 검증 명령으로 완료를 확인한다</a:t>
             </a:r>
           </a:p>
         </p:txBody>
@@ -35922,7 +39640,7 @@
               </a:defRPr>
             </a:pPr>
             <a:r>
-              <a:t>오류 메시지를 숨기지 않고 같은 순서로 점검합니다.</a:t>
+              <a:t>화면만 보지 말고 topic·frame·파일·parameter를 다시 확인합니다.</a:t>
             </a:r>
           </a:p>
         </p:txBody>
@@ -36058,7 +39776,7 @@
               </a:defRPr>
             </a:pPr>
             <a:r>
-              <a:t>현재 단계 오류 대응    |    현재 폴더 ~/ros2_curri/my_agv_ws    |    현재 터미널</a:t>
+              <a:t>현재 단계 검증    |    현재 폴더 ~/ros2_curri/my_agv_ws    |    현재 터미널</a:t>
             </a:r>
           </a:p>
         </p:txBody>
@@ -36071,18 +39789,18 @@
         </p:nvSpPr>
         <p:spPr>
           <a:xfrm>
-            <a:off x="694944" y="1755648"/>
-            <a:ext cx="10972800" cy="1115568"/>
+            <a:off x="658368" y="1755648"/>
+            <a:ext cx="10972800" cy="2148840"/>
           </a:xfrm>
           <a:prstGeom prst="roundRect">
             <a:avLst/>
           </a:prstGeom>
           <a:solidFill>
-            <a:srgbClr val="FFF7F4"/>
+            <a:srgbClr val="1D232D"/>
           </a:solidFill>
           <a:ln>
             <a:solidFill>
-              <a:srgbClr val="EDBEB4"/>
+              <a:srgbClr val="1D232D"/>
             </a:solidFill>
           </a:ln>
         </p:spPr>
@@ -36101,72 +39819,7 @@
           </a:fontRef>
         </p:style>
         <p:txBody>
-          <a:bodyPr rtlCol="0" anchor="ctr"/>
-          <a:lstStyle/>
-          <a:p>
-            <a:pPr algn="ctr"/>
-          </a:p>
-        </p:txBody>
-      </p:sp>
-      <p:sp>
-        <p:nvSpPr>
-          <p:cNvPr id="8" name="TextBox 7"/>
-          <p:cNvSpPr txBox="1"/>
-          <p:nvPr/>
-        </p:nvSpPr>
-        <p:spPr>
-          <a:xfrm>
-            <a:off x="896112" y="1901952"/>
-            <a:ext cx="2926080" cy="274320"/>
-          </a:xfrm>
-          <a:prstGeom prst="rect">
-            <a:avLst/>
-          </a:prstGeom>
-          <a:noFill/>
-        </p:spPr>
-        <p:txBody>
-          <a:bodyPr wrap="square" lIns="73152" rIns="73152" tIns="36576" bIns="36576">
-            <a:spAutoFit/>
-          </a:bodyPr>
-          <a:lstStyle/>
-          <a:p>
-            <a:pPr algn="l">
-              <a:spcAft>
-                <a:spcPts val="0"/>
-              </a:spcAft>
-              <a:defRPr sz="1800" b="1">
-                <a:solidFill>
-                  <a:srgbClr val="BE3B3B"/>
-                </a:solidFill>
-                <a:latin typeface="Noto Sans CJK KR"/>
-              </a:defRPr>
-            </a:pPr>
-            <a:r>
-              <a:t>증상 1: controller가 inactive</a:t>
-            </a:r>
-          </a:p>
-        </p:txBody>
-      </p:sp>
-      <p:sp>
-        <p:nvSpPr>
-          <p:cNvPr id="9" name="TextBox 8"/>
-          <p:cNvSpPr txBox="1"/>
-          <p:nvPr/>
-        </p:nvSpPr>
-        <p:spPr>
-          <a:xfrm>
-            <a:off x="3794760" y="1883664"/>
-            <a:ext cx="7543800" cy="621792"/>
-          </a:xfrm>
-          <a:prstGeom prst="rect">
-            <a:avLst/>
-          </a:prstGeom>
-          <a:noFill/>
-        </p:spPr>
-        <p:txBody>
-          <a:bodyPr wrap="square" lIns="73152" rIns="73152" tIns="36576" bIns="36576">
-            <a:spAutoFit/>
-          </a:bodyPr>
+          <a:bodyPr rtlCol="0" anchor="ctr" wrap="square" lIns="109728" rIns="109728" tIns="73152" bIns="73152"/>
           <a:lstStyle/>
           <a:p>
             <a:pPr algn="l">
@@ -36175,41 +39828,53 @@
               </a:spcAft>
               <a:defRPr sz="1600" b="0">
                 <a:solidFill>
-                  <a:srgbClr val="122C4E"/>
-                </a:solidFill>
-                <a:latin typeface="Noto Sans CJK KR"/>
-              </a:defRPr>
-            </a:pPr>
-            <a:r>
-              <a:t>우선 확인: load/activate 순서와 YAML controller 이름을 확인한다.</a:t>
-            </a:r>
-            <a:br/>
-            <a:r>
-              <a:t>수정 후: ros2 control list_controllers -c /controller_manager</a:t>
-            </a:r>
-          </a:p>
-        </p:txBody>
-      </p:sp>
-      <p:sp>
-        <p:nvSpPr>
-          <p:cNvPr id="10" name="Rounded Rectangle 9"/>
+                  <a:srgbClr val="FFFFFF"/>
+                </a:solidFill>
+                <a:latin typeface="DejaVu Sans Mono"/>
+              </a:defRPr>
+            </a:pPr>
+            <a:r>
+              <a:t>ros2 control list_controllers -c /controller_manager</a:t>
+            </a:r>
+          </a:p>
+          <a:p>
+            <a:pPr algn="l">
+              <a:spcAft>
+                <a:spcPts val="0"/>
+              </a:spcAft>
+              <a:defRPr sz="1600" b="0">
+                <a:solidFill>
+                  <a:srgbClr val="FFFFFF"/>
+                </a:solidFill>
+                <a:latin typeface="DejaVu Sans Mono"/>
+              </a:defRPr>
+            </a:pPr>
+            <a:r>
+              <a:t>ros2 topic echo /joint_states --once</a:t>
+            </a:r>
+          </a:p>
+        </p:txBody>
+      </p:sp>
+      <p:sp>
+        <p:nvSpPr>
+          <p:cNvPr id="8" name="Rounded Rectangle 7"/>
           <p:cNvSpPr/>
           <p:nvPr/>
         </p:nvSpPr>
         <p:spPr>
           <a:xfrm>
-            <a:off x="694944" y="3172968"/>
-            <a:ext cx="10972800" cy="1115568"/>
+            <a:off x="658368" y="4206240"/>
+            <a:ext cx="10972800" cy="1554480"/>
           </a:xfrm>
           <a:prstGeom prst="roundRect">
             <a:avLst/>
           </a:prstGeom>
           <a:solidFill>
-            <a:srgbClr val="FFF7F4"/>
+            <a:srgbClr val="F4F7FB"/>
           </a:solidFill>
           <a:ln>
             <a:solidFill>
-              <a:srgbClr val="EDBEB4"/>
+              <a:srgbClr val="D1DFD5"/>
             </a:solidFill>
           </a:ln>
         </p:spPr>
@@ -36228,33 +39893,7 @@
           </a:fontRef>
         </p:style>
         <p:txBody>
-          <a:bodyPr rtlCol="0" anchor="ctr"/>
-          <a:lstStyle/>
-          <a:p>
-            <a:pPr algn="ctr"/>
-          </a:p>
-        </p:txBody>
-      </p:sp>
-      <p:sp>
-        <p:nvSpPr>
-          <p:cNvPr id="11" name="TextBox 10"/>
-          <p:cNvSpPr txBox="1"/>
-          <p:nvPr/>
-        </p:nvSpPr>
-        <p:spPr>
-          <a:xfrm>
-            <a:off x="896112" y="3319272"/>
-            <a:ext cx="2926080" cy="274320"/>
-          </a:xfrm>
-          <a:prstGeom prst="rect">
-            <a:avLst/>
-          </a:prstGeom>
-          <a:noFill/>
-        </p:spPr>
-        <p:txBody>
-          <a:bodyPr wrap="square" lIns="73152" rIns="73152" tIns="36576" bIns="36576">
-            <a:spAutoFit/>
-          </a:bodyPr>
+          <a:bodyPr rtlCol="0" anchor="ctr" wrap="square" lIns="73152" rIns="73152" tIns="36576" bIns="36576"/>
           <a:lstStyle/>
           <a:p>
             <a:pPr algn="l">
@@ -36263,44 +39902,56 @@
               </a:spcAft>
               <a:defRPr sz="1800" b="1">
                 <a:solidFill>
-                  <a:srgbClr val="BE3B3B"/>
-                </a:solidFill>
-                <a:latin typeface="Noto Sans CJK KR"/>
-              </a:defRPr>
-            </a:pPr>
-            <a:r>
-              <a:t>증상 2: joint를 찾을 수 없음</a:t>
-            </a:r>
-          </a:p>
-        </p:txBody>
-      </p:sp>
-      <p:sp>
-        <p:nvSpPr>
-          <p:cNvPr id="12" name="TextBox 11"/>
-          <p:cNvSpPr txBox="1"/>
-          <p:nvPr/>
-        </p:nvSpPr>
-        <p:spPr>
-          <a:xfrm>
-            <a:off x="3794760" y="3300984"/>
-            <a:ext cx="7543800" cy="621792"/>
-          </a:xfrm>
-          <a:prstGeom prst="rect">
-            <a:avLst/>
-          </a:prstGeom>
-          <a:noFill/>
-        </p:spPr>
-        <p:txBody>
-          <a:bodyPr wrap="square" lIns="73152" rIns="73152" tIns="36576" bIns="36576">
-            <a:spAutoFit/>
-          </a:bodyPr>
-          <a:lstStyle/>
-          <a:p>
-            <a:pPr algn="l">
-              <a:spcAft>
-                <a:spcPts val="0"/>
-              </a:spcAft>
-              <a:defRPr sz="1600" b="0">
+                  <a:srgbClr val="2A8B5A"/>
+                </a:solidFill>
+                <a:latin typeface="Noto Sans CJK KR"/>
+              </a:defRPr>
+            </a:pPr>
+            <a:r>
+              <a:t>완료 체크</a:t>
+            </a:r>
+            <a:br/>
+            <a:r>
+              <a:t>□ 명령이 오류 없이 실행된다.</a:t>
+            </a:r>
+            <a:br/>
+            <a:r>
+              <a:t>□ 기대한 파일·topic·frame·parameter 이름이 보인다.</a:t>
+            </a:r>
+            <a:br/>
+            <a:r>
+              <a:t>□ 값의 단위와 방향을 한 문장으로 설명할 수 있다.</a:t>
+            </a:r>
+          </a:p>
+        </p:txBody>
+      </p:sp>
+      <p:sp>
+        <p:nvSpPr>
+          <p:cNvPr id="9" name="TextBox 8"/>
+          <p:cNvSpPr txBox="1"/>
+          <p:nvPr/>
+        </p:nvSpPr>
+        <p:spPr>
+          <a:xfrm>
+            <a:off x="731520" y="5989320"/>
+            <a:ext cx="10789920" cy="237744"/>
+          </a:xfrm>
+          <a:prstGeom prst="rect">
+            <a:avLst/>
+          </a:prstGeom>
+          <a:noFill/>
+        </p:spPr>
+        <p:txBody>
+          <a:bodyPr wrap="square" lIns="73152" rIns="73152" tIns="36576" bIns="36576">
+            <a:spAutoFit/>
+          </a:bodyPr>
+          <a:lstStyle/>
+          <a:p>
+            <a:pPr algn="l">
+              <a:spcAft>
+                <a:spcPts val="0"/>
+              </a:spcAft>
+              <a:defRPr sz="1500" b="1">
                 <a:solidFill>
                   <a:srgbClr val="122C4E"/>
                 </a:solidFill>
@@ -36308,50 +39959,7 @@
               </a:defRPr>
             </a:pPr>
             <a:r>
-              <a:t>우선 확인: URDF/SDF joint 이름과 controller 목록을 한 글자씩 비교한다.</a:t>
-            </a:r>
-            <a:br/>
-            <a:r>
-              <a:t>수정 후: ros2 control list_controllers -c /controller_manager</a:t>
-            </a:r>
-          </a:p>
-        </p:txBody>
-      </p:sp>
-      <p:sp>
-        <p:nvSpPr>
-          <p:cNvPr id="13" name="TextBox 12"/>
-          <p:cNvSpPr txBox="1"/>
-          <p:nvPr/>
-        </p:nvSpPr>
-        <p:spPr>
-          <a:xfrm>
-            <a:off x="822960" y="5102352"/>
-            <a:ext cx="10607040" cy="402336"/>
-          </a:xfrm>
-          <a:prstGeom prst="rect">
-            <a:avLst/>
-          </a:prstGeom>
-          <a:noFill/>
-        </p:spPr>
-        <p:txBody>
-          <a:bodyPr wrap="square" lIns="73152" rIns="73152" tIns="36576" bIns="36576">
-            <a:spAutoFit/>
-          </a:bodyPr>
-          <a:lstStyle/>
-          <a:p>
-            <a:pPr algn="ctr">
-              <a:spcAft>
-                <a:spcPts val="0"/>
-              </a:spcAft>
-              <a:defRPr sz="1800" b="1">
-                <a:solidFill>
-                  <a:srgbClr val="DB7E22"/>
-                </a:solidFill>
-                <a:latin typeface="Noto Sans CJK KR"/>
-              </a:defRPr>
-            </a:pPr>
-            <a:r>
-              <a:t>공통 순서: ① 현재 폴더 ② source ③ 파일 경로 ④ 이름/타입/단위 ⑤ build·source 후 재실행</a:t>
+              <a:t>완료 조건: `ros2 control list_controllers`에서 joint_state_broadcaster와 diff_drive_controller가 모두 active이고 wheel joint state가 publish된다.</a:t>
             </a:r>
           </a:p>
         </p:txBody>
@@ -36408,7 +40016,7 @@
               </a:defRPr>
             </a:pPr>
             <a:r>
-              <a:t>막혔을 때만: Complete를 복구용으로 사용한다</a:t>
+              <a:t>막히면: 증상 → 우선 확인 → 재검증</a:t>
             </a:r>
           </a:p>
         </p:txBody>
@@ -36447,7 +40055,7 @@
               </a:defRPr>
             </a:pPr>
             <a:r>
-              <a:t>이 슬라이드가 먼저가 아닙니다. 직접 입력·실행을 시도한 뒤에만 내 파일과 Complete를 비교합니다.</a:t>
+              <a:t>오류 메시지를 숨기지 않고 같은 순서로 점검합니다.</a:t>
             </a:r>
           </a:p>
         </p:txBody>
@@ -36583,70 +40191,31 @@
               </a:defRPr>
             </a:pPr>
             <a:r>
-              <a:t>현재 단계 복구용 Complete    |    현재 폴더 ~/ros2_curri    |    현재 터미널</a:t>
-            </a:r>
-          </a:p>
-        </p:txBody>
-      </p:sp>
-      <p:sp>
-        <p:nvSpPr>
-          <p:cNvPr id="7" name="TextBox 6"/>
-          <p:cNvSpPr txBox="1"/>
-          <p:nvPr/>
-        </p:nvSpPr>
-        <p:spPr>
-          <a:xfrm>
-            <a:off x="713232" y="1664208"/>
-            <a:ext cx="10698480" cy="402336"/>
-          </a:xfrm>
-          <a:prstGeom prst="rect">
-            <a:avLst/>
-          </a:prstGeom>
-          <a:noFill/>
-        </p:spPr>
-        <p:txBody>
-          <a:bodyPr wrap="square" lIns="73152" rIns="73152" tIns="36576" bIns="36576">
-            <a:spAutoFit/>
-          </a:bodyPr>
-          <a:lstStyle/>
-          <a:p>
-            <a:pPr algn="ctr">
-              <a:spcAft>
-                <a:spcPts val="0"/>
-              </a:spcAft>
-              <a:defRPr sz="1800" b="1">
-                <a:solidFill>
-                  <a:srgbClr val="DB7E22"/>
-                </a:solidFill>
-                <a:latin typeface="Noto Sans CJK KR"/>
-              </a:defRPr>
-            </a:pPr>
-            <a:r>
-              <a:t>권장 순서: ① 내 오류를 확인  ② Complete와 diff  ③ 꼭 필요할 때만 backup 후 복사</a:t>
-            </a:r>
-          </a:p>
-        </p:txBody>
-      </p:sp>
-      <p:sp>
-        <p:nvSpPr>
-          <p:cNvPr id="8" name="Rounded Rectangle 7"/>
+              <a:t>현재 단계 오류 대응    |    현재 폴더 ~/ros2_curri/my_agv_ws    |    현재 터미널</a:t>
+            </a:r>
+          </a:p>
+        </p:txBody>
+      </p:sp>
+      <p:sp>
+        <p:nvSpPr>
+          <p:cNvPr id="7" name="Rounded Rectangle 6"/>
           <p:cNvSpPr/>
           <p:nvPr/>
         </p:nvSpPr>
         <p:spPr>
           <a:xfrm>
-            <a:off x="676656" y="2423160"/>
-            <a:ext cx="10881360" cy="2606040"/>
+            <a:off x="694944" y="1755648"/>
+            <a:ext cx="10972800" cy="1115568"/>
           </a:xfrm>
           <a:prstGeom prst="roundRect">
             <a:avLst/>
           </a:prstGeom>
           <a:solidFill>
-            <a:srgbClr val="1D232D"/>
+            <a:srgbClr val="FFF7F4"/>
           </a:solidFill>
           <a:ln>
             <a:solidFill>
-              <a:srgbClr val="1D232D"/>
+              <a:srgbClr val="EDBEB4"/>
             </a:solidFill>
           </a:ln>
         </p:spPr>
@@ -36665,52 +40234,232 @@
           </a:fontRef>
         </p:style>
         <p:txBody>
-          <a:bodyPr rtlCol="0" anchor="ctr" wrap="square" lIns="73152" rIns="73152" tIns="36576" bIns="36576"/>
-          <a:lstStyle/>
-          <a:p>
-            <a:pPr algn="l">
-              <a:spcAft>
-                <a:spcPts val="0"/>
-              </a:spcAft>
-              <a:defRPr sz="1400" b="0">
-                <a:solidFill>
-                  <a:srgbClr val="FFFFFF"/>
-                </a:solidFill>
-                <a:latin typeface="DejaVu Sans Mono"/>
-              </a:defRPr>
-            </a:pPr>
-            <a:r>
-              <a:t>cd ~/ros2_curri</a:t>
+          <a:bodyPr rtlCol="0" anchor="ctr"/>
+          <a:lstStyle/>
+          <a:p>
+            <a:pPr algn="ctr"/>
+          </a:p>
+        </p:txBody>
+      </p:sp>
+      <p:sp>
+        <p:nvSpPr>
+          <p:cNvPr id="8" name="TextBox 7"/>
+          <p:cNvSpPr txBox="1"/>
+          <p:nvPr/>
+        </p:nvSpPr>
+        <p:spPr>
+          <a:xfrm>
+            <a:off x="896112" y="1901952"/>
+            <a:ext cx="2926080" cy="274320"/>
+          </a:xfrm>
+          <a:prstGeom prst="rect">
+            <a:avLst/>
+          </a:prstGeom>
+          <a:noFill/>
+        </p:spPr>
+        <p:txBody>
+          <a:bodyPr wrap="square" lIns="73152" rIns="73152" tIns="36576" bIns="36576">
+            <a:spAutoFit/>
+          </a:bodyPr>
+          <a:lstStyle/>
+          <a:p>
+            <a:pPr algn="l">
+              <a:spcAft>
+                <a:spcPts val="0"/>
+              </a:spcAft>
+              <a:defRPr sz="1800" b="1">
+                <a:solidFill>
+                  <a:srgbClr val="BE3B3B"/>
+                </a:solidFill>
+                <a:latin typeface="Noto Sans CJK KR"/>
+              </a:defRPr>
+            </a:pPr>
+            <a:r>
+              <a:t>증상 1: controller가 inactive</a:t>
+            </a:r>
+          </a:p>
+        </p:txBody>
+      </p:sp>
+      <p:sp>
+        <p:nvSpPr>
+          <p:cNvPr id="9" name="TextBox 8"/>
+          <p:cNvSpPr txBox="1"/>
+          <p:nvPr/>
+        </p:nvSpPr>
+        <p:spPr>
+          <a:xfrm>
+            <a:off x="3794760" y="1883664"/>
+            <a:ext cx="7543800" cy="621792"/>
+          </a:xfrm>
+          <a:prstGeom prst="rect">
+            <a:avLst/>
+          </a:prstGeom>
+          <a:noFill/>
+        </p:spPr>
+        <p:txBody>
+          <a:bodyPr wrap="square" lIns="73152" rIns="73152" tIns="36576" bIns="36576">
+            <a:spAutoFit/>
+          </a:bodyPr>
+          <a:lstStyle/>
+          <a:p>
+            <a:pPr algn="l">
+              <a:spcAft>
+                <a:spcPts val="0"/>
+              </a:spcAft>
+              <a:defRPr sz="1600" b="0">
+                <a:solidFill>
+                  <a:srgbClr val="122C4E"/>
+                </a:solidFill>
+                <a:latin typeface="Noto Sans CJK KR"/>
+              </a:defRPr>
+            </a:pPr>
+            <a:r>
+              <a:t>우선 확인: load/activate 순서와 YAML controller 이름을 확인한다.</a:t>
             </a:r>
             <a:br/>
             <a:r>
-              <a:t>diff -ru my_agv_ws/src blocks/E_autonomy_logic/M16_ros2_control/complete/agv_ws/src || true</a:t>
+              <a:t>수정 후: ros2 control list_controllers -c /controller_manager</a:t>
+            </a:r>
+          </a:p>
+        </p:txBody>
+      </p:sp>
+      <p:sp>
+        <p:nvSpPr>
+          <p:cNvPr id="10" name="Rounded Rectangle 9"/>
+          <p:cNvSpPr/>
+          <p:nvPr/>
+        </p:nvSpPr>
+        <p:spPr>
+          <a:xfrm>
+            <a:off x="694944" y="3172968"/>
+            <a:ext cx="10972800" cy="1115568"/>
+          </a:xfrm>
+          <a:prstGeom prst="roundRect">
+            <a:avLst/>
+          </a:prstGeom>
+          <a:solidFill>
+            <a:srgbClr val="FFF7F4"/>
+          </a:solidFill>
+          <a:ln>
+            <a:solidFill>
+              <a:srgbClr val="EDBEB4"/>
+            </a:solidFill>
+          </a:ln>
+        </p:spPr>
+        <p:style>
+          <a:lnRef idx="1">
+            <a:schemeClr val="accent1"/>
+          </a:lnRef>
+          <a:fillRef idx="3">
+            <a:schemeClr val="accent1"/>
+          </a:fillRef>
+          <a:effectRef idx="2">
+            <a:schemeClr val="accent1"/>
+          </a:effectRef>
+          <a:fontRef idx="minor">
+            <a:schemeClr val="lt1"/>
+          </a:fontRef>
+        </p:style>
+        <p:txBody>
+          <a:bodyPr rtlCol="0" anchor="ctr"/>
+          <a:lstStyle/>
+          <a:p>
+            <a:pPr algn="ctr"/>
+          </a:p>
+        </p:txBody>
+      </p:sp>
+      <p:sp>
+        <p:nvSpPr>
+          <p:cNvPr id="11" name="TextBox 10"/>
+          <p:cNvSpPr txBox="1"/>
+          <p:nvPr/>
+        </p:nvSpPr>
+        <p:spPr>
+          <a:xfrm>
+            <a:off x="896112" y="3319272"/>
+            <a:ext cx="2926080" cy="274320"/>
+          </a:xfrm>
+          <a:prstGeom prst="rect">
+            <a:avLst/>
+          </a:prstGeom>
+          <a:noFill/>
+        </p:spPr>
+        <p:txBody>
+          <a:bodyPr wrap="square" lIns="73152" rIns="73152" tIns="36576" bIns="36576">
+            <a:spAutoFit/>
+          </a:bodyPr>
+          <a:lstStyle/>
+          <a:p>
+            <a:pPr algn="l">
+              <a:spcAft>
+                <a:spcPts val="0"/>
+              </a:spcAft>
+              <a:defRPr sz="1800" b="1">
+                <a:solidFill>
+                  <a:srgbClr val="BE3B3B"/>
+                </a:solidFill>
+                <a:latin typeface="Noto Sans CJK KR"/>
+              </a:defRPr>
+            </a:pPr>
+            <a:r>
+              <a:t>증상 2: joint를 찾을 수 없음</a:t>
+            </a:r>
+          </a:p>
+        </p:txBody>
+      </p:sp>
+      <p:sp>
+        <p:nvSpPr>
+          <p:cNvPr id="12" name="TextBox 11"/>
+          <p:cNvSpPr txBox="1"/>
+          <p:nvPr/>
+        </p:nvSpPr>
+        <p:spPr>
+          <a:xfrm>
+            <a:off x="3794760" y="3300984"/>
+            <a:ext cx="7543800" cy="621792"/>
+          </a:xfrm>
+          <a:prstGeom prst="rect">
+            <a:avLst/>
+          </a:prstGeom>
+          <a:noFill/>
+        </p:spPr>
+        <p:txBody>
+          <a:bodyPr wrap="square" lIns="73152" rIns="73152" tIns="36576" bIns="36576">
+            <a:spAutoFit/>
+          </a:bodyPr>
+          <a:lstStyle/>
+          <a:p>
+            <a:pPr algn="l">
+              <a:spcAft>
+                <a:spcPts val="0"/>
+              </a:spcAft>
+              <a:defRPr sz="1600" b="0">
+                <a:solidFill>
+                  <a:srgbClr val="122C4E"/>
+                </a:solidFill>
+                <a:latin typeface="Noto Sans CJK KR"/>
+              </a:defRPr>
+            </a:pPr>
+            <a:r>
+              <a:t>우선 확인: URDF/SDF joint 이름과 controller 목록을 한 글자씩 비교한다.</a:t>
             </a:r>
             <a:br/>
             <a:r>
-              <a:t>cp -a my_agv_ws/src my_agv_ws/src_before_M16</a:t>
-            </a:r>
-            <a:br/>
-            <a:r>
-              <a:t>cp -a blocks/E_autonomy_logic/M16_ros2_control/complete/agv_ws/src/. my_agv_ws/src/</a:t>
-            </a:r>
-            <a:br/>
-            <a:r>
-              <a:t>cd my_agv_ws &amp;&amp; colcon build --symlink-install &amp;&amp; source install/setup.bash</a:t>
-            </a:r>
-          </a:p>
-        </p:txBody>
-      </p:sp>
-      <p:sp>
-        <p:nvSpPr>
-          <p:cNvPr id="9" name="TextBox 8"/>
-          <p:cNvSpPr txBox="1"/>
-          <p:nvPr/>
-        </p:nvSpPr>
-        <p:spPr>
-          <a:xfrm>
-            <a:off x="786384" y="5413248"/>
-            <a:ext cx="10424160" cy="429768"/>
+              <a:t>수정 후: ros2 control list_controllers -c /controller_manager</a:t>
+            </a:r>
+          </a:p>
+        </p:txBody>
+      </p:sp>
+      <p:sp>
+        <p:nvSpPr>
+          <p:cNvPr id="13" name="TextBox 12"/>
+          <p:cNvSpPr txBox="1"/>
+          <p:nvPr/>
+        </p:nvSpPr>
+        <p:spPr>
+          <a:xfrm>
+            <a:off x="822960" y="5102352"/>
+            <a:ext cx="10607040" cy="402336"/>
           </a:xfrm>
           <a:prstGeom prst="rect">
             <a:avLst/>
@@ -36727,15 +40476,15 @@
               <a:spcAft>
                 <a:spcPts val="0"/>
               </a:spcAft>
-              <a:defRPr sz="1700" b="1">
-                <a:solidFill>
-                  <a:srgbClr val="2A8B5A"/>
-                </a:solidFill>
-                <a:latin typeface="Noto Sans CJK KR"/>
-              </a:defRPr>
-            </a:pPr>
-            <a:r>
-              <a:t>복구 뒤에는 끝내지 말고, 내 파일과 Complete의 차이를 한 줄씩 설명한 뒤 다시 직접 입력해 봅니다.</a:t>
+              <a:defRPr sz="1800" b="1">
+                <a:solidFill>
+                  <a:srgbClr val="DB7E22"/>
+                </a:solidFill>
+                <a:latin typeface="Noto Sans CJK KR"/>
+              </a:defRPr>
+            </a:pPr>
+            <a:r>
+              <a:t>공통 순서: ① 현재 폴더 ② source ③ 파일 경로 ④ 이름/타입/단위 ⑤ build·source 후 재실행</a:t>
             </a:r>
           </a:p>
         </p:txBody>
@@ -36792,7 +40541,7 @@
               </a:defRPr>
             </a:pPr>
             <a:r>
-              <a:t>미니 실습: 값 하나를 바꾸고 결과를 비교한다</a:t>
+              <a:t>막혔을 때만: Complete를 복구용으로 사용한다</a:t>
             </a:r>
           </a:p>
         </p:txBody>
@@ -36831,7 +40580,7 @@
               </a:defRPr>
             </a:pPr>
             <a:r>
-              <a:t>정상 결과를 만든 뒤에는 한 번에 하나의 값만 바꿉니다.</a:t>
+              <a:t>이 슬라이드가 먼저가 아닙니다. 직접 입력·실행을 시도한 뒤에만 내 파일과 Complete를 비교합니다.</a:t>
             </a:r>
           </a:p>
         </p:txBody>
@@ -36967,31 +40716,70 @@
               </a:defRPr>
             </a:pPr>
             <a:r>
-              <a:t>현재 단계 미니 실습    |    현재 폴더 ~/ros2_curri/my_agv_ws    |    현재 터미널</a:t>
-            </a:r>
-          </a:p>
-        </p:txBody>
-      </p:sp>
-      <p:sp>
-        <p:nvSpPr>
-          <p:cNvPr id="7" name="Rounded Rectangle 6"/>
+              <a:t>현재 단계 복구용 Complete    |    현재 폴더 ~/ros2_curri    |    현재 터미널</a:t>
+            </a:r>
+          </a:p>
+        </p:txBody>
+      </p:sp>
+      <p:sp>
+        <p:nvSpPr>
+          <p:cNvPr id="7" name="TextBox 6"/>
+          <p:cNvSpPr txBox="1"/>
+          <p:nvPr/>
+        </p:nvSpPr>
+        <p:spPr>
+          <a:xfrm>
+            <a:off x="713232" y="1664208"/>
+            <a:ext cx="10698480" cy="402336"/>
+          </a:xfrm>
+          <a:prstGeom prst="rect">
+            <a:avLst/>
+          </a:prstGeom>
+          <a:noFill/>
+        </p:spPr>
+        <p:txBody>
+          <a:bodyPr wrap="square" lIns="73152" rIns="73152" tIns="36576" bIns="36576">
+            <a:spAutoFit/>
+          </a:bodyPr>
+          <a:lstStyle/>
+          <a:p>
+            <a:pPr algn="ctr">
+              <a:spcAft>
+                <a:spcPts val="0"/>
+              </a:spcAft>
+              <a:defRPr sz="1800" b="1">
+                <a:solidFill>
+                  <a:srgbClr val="DB7E22"/>
+                </a:solidFill>
+                <a:latin typeface="Noto Sans CJK KR"/>
+              </a:defRPr>
+            </a:pPr>
+            <a:r>
+              <a:t>권장 순서: ① 내 오류를 확인  ② Complete와 diff  ③ 꼭 필요할 때만 backup 후 복사</a:t>
+            </a:r>
+          </a:p>
+        </p:txBody>
+      </p:sp>
+      <p:sp>
+        <p:nvSpPr>
+          <p:cNvPr id="8" name="Rounded Rectangle 7"/>
           <p:cNvSpPr/>
           <p:nvPr/>
         </p:nvSpPr>
         <p:spPr>
           <a:xfrm>
-            <a:off x="749808" y="1874519"/>
-            <a:ext cx="10652760" cy="1993392"/>
+            <a:off x="676656" y="2423160"/>
+            <a:ext cx="10881360" cy="2606040"/>
           </a:xfrm>
           <a:prstGeom prst="roundRect">
             <a:avLst/>
           </a:prstGeom>
           <a:solidFill>
-            <a:srgbClr val="FFF8EB"/>
+            <a:srgbClr val="1D232D"/>
           </a:solidFill>
           <a:ln>
             <a:solidFill>
-              <a:srgbClr val="ECC680"/>
+              <a:srgbClr val="1D232D"/>
             </a:solidFill>
           </a:ln>
         </p:spPr>
@@ -37010,61 +40798,125 @@
           </a:fontRef>
         </p:style>
         <p:txBody>
-          <a:bodyPr rtlCol="0" anchor="ctr" wrap="square" lIns="73152" rIns="73152" tIns="36576" bIns="36576"/>
+          <a:bodyPr rtlCol="0" anchor="ctr" wrap="square" lIns="109728" rIns="109728" tIns="73152" bIns="73152"/>
+          <a:lstStyle/>
+          <a:p>
+            <a:pPr algn="l">
+              <a:spcAft>
+                <a:spcPts val="0"/>
+              </a:spcAft>
+              <a:defRPr sz="1400" b="0">
+                <a:solidFill>
+                  <a:srgbClr val="FFFFFF"/>
+                </a:solidFill>
+                <a:latin typeface="DejaVu Sans Mono"/>
+              </a:defRPr>
+            </a:pPr>
+            <a:r>
+              <a:t>cd ~/ros2_curri</a:t>
+            </a:r>
+          </a:p>
+          <a:p>
+            <a:pPr algn="l">
+              <a:spcAft>
+                <a:spcPts val="0"/>
+              </a:spcAft>
+              <a:defRPr sz="1400" b="0">
+                <a:solidFill>
+                  <a:srgbClr val="FFFFFF"/>
+                </a:solidFill>
+                <a:latin typeface="DejaVu Sans Mono"/>
+              </a:defRPr>
+            </a:pPr>
+            <a:r>
+              <a:t>diff -ru my_agv_ws/src blocks/E_autonomy_logic/M16_ros2_control/complete/agv_ws/src || true</a:t>
+            </a:r>
+          </a:p>
+          <a:p>
+            <a:pPr algn="l">
+              <a:spcAft>
+                <a:spcPts val="0"/>
+              </a:spcAft>
+              <a:defRPr sz="1400" b="0">
+                <a:solidFill>
+                  <a:srgbClr val="FFFFFF"/>
+                </a:solidFill>
+                <a:latin typeface="DejaVu Sans Mono"/>
+              </a:defRPr>
+            </a:pPr>
+            <a:r>
+              <a:t>cp -a my_agv_ws/src my_agv_ws/src_before_M16</a:t>
+            </a:r>
+          </a:p>
+          <a:p>
+            <a:pPr algn="l">
+              <a:spcAft>
+                <a:spcPts val="0"/>
+              </a:spcAft>
+              <a:defRPr sz="1400" b="0">
+                <a:solidFill>
+                  <a:srgbClr val="FFFFFF"/>
+                </a:solidFill>
+                <a:latin typeface="DejaVu Sans Mono"/>
+              </a:defRPr>
+            </a:pPr>
+            <a:r>
+              <a:t>cp -a blocks/E_autonomy_logic/M16_ros2_control/complete/agv_ws/src/. my_agv_ws/src/</a:t>
+            </a:r>
+          </a:p>
+          <a:p>
+            <a:pPr algn="l">
+              <a:spcAft>
+                <a:spcPts val="0"/>
+              </a:spcAft>
+              <a:defRPr sz="1400" b="0">
+                <a:solidFill>
+                  <a:srgbClr val="FFFFFF"/>
+                </a:solidFill>
+                <a:latin typeface="DejaVu Sans Mono"/>
+              </a:defRPr>
+            </a:pPr>
+            <a:r>
+              <a:t>cd my_agv_ws &amp;&amp; colcon build --symlink-install &amp;&amp; source install/setup.bash</a:t>
+            </a:r>
+          </a:p>
+        </p:txBody>
+      </p:sp>
+      <p:sp>
+        <p:nvSpPr>
+          <p:cNvPr id="9" name="TextBox 8"/>
+          <p:cNvSpPr txBox="1"/>
+          <p:nvPr/>
+        </p:nvSpPr>
+        <p:spPr>
+          <a:xfrm>
+            <a:off x="786384" y="5413248"/>
+            <a:ext cx="10424160" cy="429768"/>
+          </a:xfrm>
+          <a:prstGeom prst="rect">
+            <a:avLst/>
+          </a:prstGeom>
+          <a:noFill/>
+        </p:spPr>
+        <p:txBody>
+          <a:bodyPr wrap="square" lIns="73152" rIns="73152" tIns="36576" bIns="36576">
+            <a:spAutoFit/>
+          </a:bodyPr>
           <a:lstStyle/>
           <a:p>
             <a:pPr algn="ctr">
               <a:spcAft>
                 <a:spcPts val="0"/>
               </a:spcAft>
-              <a:defRPr sz="2300" b="1">
-                <a:solidFill>
-                  <a:srgbClr val="122C4E"/>
-                </a:solidFill>
-                <a:latin typeface="Noto Sans CJK KR"/>
-              </a:defRPr>
-            </a:pPr>
-            <a:r>
-              <a:t>controllers.yaml의 wheel_radius와 model.sdf의 wheel_radius가 모두 0.08 m인지 확인하고 한쪽만 바꿨을 때 생길 오차를 설명한다.</a:t>
-            </a:r>
-          </a:p>
-        </p:txBody>
-      </p:sp>
-      <p:sp>
-        <p:nvSpPr>
-          <p:cNvPr id="8" name="TextBox 7"/>
-          <p:cNvSpPr txBox="1"/>
-          <p:nvPr/>
-        </p:nvSpPr>
-        <p:spPr>
-          <a:xfrm>
-            <a:off x="877824" y="4590288"/>
-            <a:ext cx="10241280" cy="594360"/>
-          </a:xfrm>
-          <a:prstGeom prst="rect">
-            <a:avLst/>
-          </a:prstGeom>
-          <a:noFill/>
-        </p:spPr>
-        <p:txBody>
-          <a:bodyPr wrap="square" lIns="73152" rIns="73152" tIns="36576" bIns="36576">
-            <a:spAutoFit/>
-          </a:bodyPr>
-          <a:lstStyle/>
-          <a:p>
-            <a:pPr algn="ctr">
-              <a:spcAft>
-                <a:spcPts val="0"/>
-              </a:spcAft>
-              <a:defRPr sz="1900" b="1">
-                <a:solidFill>
-                  <a:srgbClr val="DB7E22"/>
-                </a:solidFill>
-                <a:latin typeface="Noto Sans CJK KR"/>
-              </a:defRPr>
-            </a:pPr>
-            <a:r>
-              <a:t>기록할 것: 바꾼 값(단위) · 기대한 변화 · 실제 출력/화면 · 원래 값으로 되돌린 결과</a:t>
+              <a:defRPr sz="1700" b="1">
+                <a:solidFill>
+                  <a:srgbClr val="2A8B5A"/>
+                </a:solidFill>
+                <a:latin typeface="Noto Sans CJK KR"/>
+              </a:defRPr>
+            </a:pPr>
+            <a:r>
+              <a:t>복구 뒤에는 끝내지 말고, 내 파일과 Complete의 차이를 한 줄씩 설명한 뒤 다시 직접 입력해 봅니다.</a:t>
             </a:r>
           </a:p>
         </p:txBody>
@@ -37121,7 +40973,7 @@
               </a:defRPr>
             </a:pPr>
             <a:r>
-              <a:t>내 프로젝트 체크포인트를 저장하고 다음 모듈로 넘긴다</a:t>
+              <a:t>미니 실습: 값 하나를 바꾸고 결과를 비교한다</a:t>
             </a:r>
           </a:p>
         </p:txBody>
@@ -37160,7 +41012,7 @@
               </a:defRPr>
             </a:pPr>
             <a:r>
-              <a:t>Complete는 복구용 비교 기준이고, 다음 단계는 내가 직접 만든 workspace에서 계속합니다.</a:t>
+              <a:t>정상 결과를 만든 뒤에는 한 번에 하나의 값만 바꿉니다.</a:t>
             </a:r>
           </a:p>
         </p:txBody>
@@ -37296,7 +41148,7 @@
               </a:defRPr>
             </a:pPr>
             <a:r>
-              <a:t>현재 단계 체크포인트    |    현재 폴더 ~/ros2_curri/my_agv_ws    |    현재 터미널</a:t>
+              <a:t>현재 단계 미니 실습    |    현재 폴더 ~/ros2_curri/my_agv_ws    |    현재 터미널</a:t>
             </a:r>
           </a:p>
         </p:txBody>
@@ -37309,18 +41161,18 @@
         </p:nvSpPr>
         <p:spPr>
           <a:xfrm>
-            <a:off x="685800" y="1737360"/>
-            <a:ext cx="10972800" cy="3611880"/>
+            <a:off x="749808" y="1874519"/>
+            <a:ext cx="10652760" cy="1993392"/>
           </a:xfrm>
           <a:prstGeom prst="roundRect">
             <a:avLst/>
           </a:prstGeom>
           <a:solidFill>
-            <a:srgbClr val="F4F7FB"/>
+            <a:srgbClr val="FFF8EB"/>
           </a:solidFill>
           <a:ln>
             <a:solidFill>
-              <a:srgbClr val="D2DCE8"/>
+              <a:srgbClr val="ECC680"/>
             </a:solidFill>
           </a:ln>
         </p:spPr>
@@ -37339,10 +41191,23 @@
           </a:fontRef>
         </p:style>
         <p:txBody>
-          <a:bodyPr rtlCol="0" anchor="ctr"/>
-          <a:lstStyle/>
-          <a:p>
-            <a:pPr algn="ctr"/>
+          <a:bodyPr rtlCol="0" anchor="ctr" wrap="square" lIns="73152" rIns="73152" tIns="36576" bIns="36576"/>
+          <a:lstStyle/>
+          <a:p>
+            <a:pPr algn="ctr">
+              <a:spcAft>
+                <a:spcPts val="0"/>
+              </a:spcAft>
+              <a:defRPr sz="2300" b="1">
+                <a:solidFill>
+                  <a:srgbClr val="122C4E"/>
+                </a:solidFill>
+                <a:latin typeface="Noto Sans CJK KR"/>
+              </a:defRPr>
+            </a:pPr>
+            <a:r>
+              <a:t>controllers.yaml의 wheel_radius와 model.sdf의 wheel_radius가 모두 0.08 m인지 확인하고 한쪽만 바꿨을 때 생길 오차를 설명한다.</a:t>
+            </a:r>
           </a:p>
         </p:txBody>
       </p:sp>
@@ -37354,111 +41219,8 @@
         </p:nvSpPr>
         <p:spPr>
           <a:xfrm>
-            <a:off x="896112" y="1993392"/>
-            <a:ext cx="10332720" cy="2971800"/>
-          </a:xfrm>
-          <a:prstGeom prst="rect">
-            <a:avLst/>
-          </a:prstGeom>
-          <a:noFill/>
-        </p:spPr>
-        <p:txBody>
-          <a:bodyPr wrap="square" lIns="109728" rIns="109728">
-            <a:spAutoFit/>
-          </a:bodyPr>
-          <a:lstStyle/>
-          <a:p>
-            <a:pPr>
-              <a:spcAft>
-                <a:spcPts val="800"/>
-              </a:spcAft>
-              <a:defRPr sz="1800">
-                <a:solidFill>
-                  <a:srgbClr val="122C4E"/>
-                </a:solidFill>
-                <a:latin typeface="Noto Sans CJK KR"/>
-              </a:defRPr>
-            </a:pPr>
-            <a:r>
-              <a:t>• □ 완료 화면: `ros2 control list_controllers`에서 joint_state_broadcaster와 diff_drive_controller가 모두 active이고 wheel joint state가 publish된다.</a:t>
-            </a:r>
-          </a:p>
-          <a:p>
-            <a:pPr>
-              <a:spcAft>
-                <a:spcPts val="800"/>
-              </a:spcAft>
-              <a:defRPr sz="1800">
-                <a:solidFill>
-                  <a:srgbClr val="122C4E"/>
-                </a:solidFill>
-                <a:latin typeface="Noto Sans CJK KR"/>
-              </a:defRPr>
-            </a:pPr>
-            <a:r>
-              <a:t>• □ 막혔을 때 비교할 Complete: blocks/E_autonomy_logic/M16_ros2_control/complete/</a:t>
-            </a:r>
-          </a:p>
-          <a:p>
-            <a:pPr>
-              <a:spcAft>
-                <a:spcPts val="800"/>
-              </a:spcAft>
-              <a:defRPr sz="1800">
-                <a:solidFill>
-                  <a:srgbClr val="122C4E"/>
-                </a:solidFill>
-                <a:latin typeface="Noto Sans CJK KR"/>
-              </a:defRPr>
-            </a:pPr>
-            <a:r>
-              <a:t>• □ 정상 로그·캡처: logs/validation.log, screenshots/validation_terminal.png</a:t>
-            </a:r>
-          </a:p>
-          <a:p>
-            <a:pPr>
-              <a:spcAft>
-                <a:spcPts val="800"/>
-              </a:spcAft>
-              <a:defRPr sz="1800">
-                <a:solidFill>
-                  <a:srgbClr val="122C4E"/>
-                </a:solidFill>
-                <a:latin typeface="Noto Sans CJK KR"/>
-              </a:defRPr>
-            </a:pPr>
-            <a:r>
-              <a:t>• □ 버전 식별: CHECKSUM_or_TAG.txt의 SHA-256 manifest</a:t>
-            </a:r>
-          </a:p>
-          <a:p>
-            <a:pPr>
-              <a:spcAft>
-                <a:spcPts val="800"/>
-              </a:spcAft>
-              <a:defRPr sz="1800">
-                <a:solidFill>
-                  <a:srgbClr val="122C4E"/>
-                </a:solidFill>
-                <a:latin typeface="Noto Sans CJK KR"/>
-              </a:defRPr>
-            </a:pPr>
-            <a:r>
-              <a:t>• □ 다음 시작 조건: M17~M20 autonomy command</a:t>
-            </a:r>
-          </a:p>
-        </p:txBody>
-      </p:sp>
-      <p:sp>
-        <p:nvSpPr>
-          <p:cNvPr id="9" name="TextBox 8"/>
-          <p:cNvSpPr txBox="1"/>
-          <p:nvPr/>
-        </p:nvSpPr>
-        <p:spPr>
-          <a:xfrm>
-            <a:off x="868680" y="5596128"/>
-            <a:ext cx="10515600" cy="338328"/>
+            <a:off x="877824" y="4590288"/>
+            <a:ext cx="10241280" cy="594360"/>
           </a:xfrm>
           <a:prstGeom prst="rect">
             <a:avLst/>
@@ -37475,15 +41237,15 @@
               <a:spcAft>
                 <a:spcPts val="0"/>
               </a:spcAft>
-              <a:defRPr sz="1700" b="1">
-                <a:solidFill>
-                  <a:srgbClr val="2A8B5A"/>
-                </a:solidFill>
-                <a:latin typeface="Noto Sans CJK KR"/>
-              </a:defRPr>
-            </a:pPr>
-            <a:r>
-              <a:t>다음 모듈을 시작하기 전, 내 src의 변경사항을 저장하고 현재 완료 조건을 다시 확인합니다.</a:t>
+              <a:defRPr sz="1900" b="1">
+                <a:solidFill>
+                  <a:srgbClr val="DB7E22"/>
+                </a:solidFill>
+                <a:latin typeface="Noto Sans CJK KR"/>
+              </a:defRPr>
+            </a:pPr>
+            <a:r>
+              <a:t>기록할 것: 바꾼 값(단위) · 기대한 변화 · 실제 출력/화면 · 원래 값으로 되돌린 결과</a:t>
             </a:r>
           </a:p>
         </p:txBody>
@@ -37734,6 +41496,425 @@
 </file>
 
 <file path=ppt/slides/slide60.xml><?xml version="1.0" encoding="utf-8"?>
+<p:sld xmlns:a="http://schemas.openxmlformats.org/drawingml/2006/main" xmlns:p="http://schemas.openxmlformats.org/presentationml/2006/main" xmlns:r="http://schemas.openxmlformats.org/officeDocument/2006/relationships">
+  <p:cSld>
+    <p:spTree>
+      <p:nvGrpSpPr>
+        <p:cNvPr id="1" name=""/>
+        <p:cNvGrpSpPr/>
+        <p:nvPr/>
+      </p:nvGrpSpPr>
+      <p:grpSpPr/>
+      <p:sp>
+        <p:nvSpPr>
+          <p:cNvPr id="2" name="TextBox 1"/>
+          <p:cNvSpPr txBox="1"/>
+          <p:nvPr/>
+        </p:nvSpPr>
+        <p:spPr>
+          <a:xfrm>
+            <a:off x="566928" y="347472"/>
+            <a:ext cx="10881360" cy="438912"/>
+          </a:xfrm>
+          <a:prstGeom prst="rect">
+            <a:avLst/>
+          </a:prstGeom>
+          <a:noFill/>
+        </p:spPr>
+        <p:txBody>
+          <a:bodyPr wrap="square" lIns="73152" rIns="73152" tIns="36576" bIns="36576">
+            <a:spAutoFit/>
+          </a:bodyPr>
+          <a:lstStyle/>
+          <a:p>
+            <a:pPr algn="l">
+              <a:spcAft>
+                <a:spcPts val="0"/>
+              </a:spcAft>
+              <a:defRPr sz="3200" b="1">
+                <a:solidFill>
+                  <a:srgbClr val="122C4E"/>
+                </a:solidFill>
+                <a:latin typeface="Noto Sans CJK KR"/>
+              </a:defRPr>
+            </a:pPr>
+            <a:r>
+              <a:t>내 프로젝트 체크포인트를 저장하고 다음 모듈로 넘긴다</a:t>
+            </a:r>
+          </a:p>
+        </p:txBody>
+      </p:sp>
+      <p:sp>
+        <p:nvSpPr>
+          <p:cNvPr id="3" name="TextBox 2"/>
+          <p:cNvSpPr txBox="1"/>
+          <p:nvPr/>
+        </p:nvSpPr>
+        <p:spPr>
+          <a:xfrm>
+            <a:off x="603504" y="859536"/>
+            <a:ext cx="10698480" cy="292608"/>
+          </a:xfrm>
+          <a:prstGeom prst="rect">
+            <a:avLst/>
+          </a:prstGeom>
+          <a:noFill/>
+        </p:spPr>
+        <p:txBody>
+          <a:bodyPr wrap="square" lIns="73152" rIns="73152" tIns="36576" bIns="36576">
+            <a:spAutoFit/>
+          </a:bodyPr>
+          <a:lstStyle/>
+          <a:p>
+            <a:pPr algn="l">
+              <a:spcAft>
+                <a:spcPts val="0"/>
+              </a:spcAft>
+              <a:defRPr sz="1700" b="0">
+                <a:solidFill>
+                  <a:srgbClr val="5C6672"/>
+                </a:solidFill>
+                <a:latin typeface="Noto Sans CJK KR"/>
+              </a:defRPr>
+            </a:pPr>
+            <a:r>
+              <a:t>Complete는 복구용 비교 기준이고, 다음 단계는 내가 직접 만든 workspace에서 계속합니다.</a:t>
+            </a:r>
+          </a:p>
+        </p:txBody>
+      </p:sp>
+      <p:sp>
+        <p:nvSpPr>
+          <p:cNvPr id="4" name="TextBox 3"/>
+          <p:cNvSpPr txBox="1"/>
+          <p:nvPr/>
+        </p:nvSpPr>
+        <p:spPr>
+          <a:xfrm>
+            <a:off x="530352" y="6510528"/>
+            <a:ext cx="7772400" cy="201168"/>
+          </a:xfrm>
+          <a:prstGeom prst="rect">
+            <a:avLst/>
+          </a:prstGeom>
+          <a:noFill/>
+        </p:spPr>
+        <p:txBody>
+          <a:bodyPr wrap="square" lIns="73152" rIns="73152" tIns="36576" bIns="36576">
+            <a:spAutoFit/>
+          </a:bodyPr>
+          <a:lstStyle/>
+          <a:p>
+            <a:pPr algn="l">
+              <a:spcAft>
+                <a:spcPts val="0"/>
+              </a:spcAft>
+              <a:defRPr sz="900" b="0">
+                <a:solidFill>
+                  <a:srgbClr val="5C6672"/>
+                </a:solidFill>
+                <a:latin typeface="Noto Sans CJK KR"/>
+              </a:defRPr>
+            </a:pPr>
+            <a:r>
+              <a:t>ROS 2 기반 AGV End-to-End 개발 커리큘럼 · M16 · Block E</a:t>
+            </a:r>
+          </a:p>
+        </p:txBody>
+      </p:sp>
+      <p:sp>
+        <p:nvSpPr>
+          <p:cNvPr id="5" name="TextBox 4"/>
+          <p:cNvSpPr txBox="1"/>
+          <p:nvPr/>
+        </p:nvSpPr>
+        <p:spPr>
+          <a:xfrm>
+            <a:off x="9144000" y="6510528"/>
+            <a:ext cx="2468880" cy="201168"/>
+          </a:xfrm>
+          <a:prstGeom prst="rect">
+            <a:avLst/>
+          </a:prstGeom>
+          <a:noFill/>
+        </p:spPr>
+        <p:txBody>
+          <a:bodyPr wrap="square" lIns="73152" rIns="73152" tIns="36576" bIns="36576">
+            <a:spAutoFit/>
+          </a:bodyPr>
+          <a:lstStyle/>
+          <a:p>
+            <a:pPr algn="r">
+              <a:spcAft>
+                <a:spcPts val="0"/>
+              </a:spcAft>
+              <a:defRPr sz="1000" b="0">
+                <a:solidFill>
+                  <a:srgbClr val="5C6672"/>
+                </a:solidFill>
+                <a:latin typeface="Noto Sans CJK KR"/>
+              </a:defRPr>
+            </a:pPr>
+            <a:r>
+              <a:t>명령·파일 경로는 슬라이드에서 복사 가능</a:t>
+            </a:r>
+          </a:p>
+        </p:txBody>
+      </p:sp>
+      <p:sp>
+        <p:nvSpPr>
+          <p:cNvPr id="6" name="Rectangle 5"/>
+          <p:cNvSpPr/>
+          <p:nvPr/>
+        </p:nvSpPr>
+        <p:spPr>
+          <a:xfrm>
+            <a:off x="566928" y="1188720"/>
+            <a:ext cx="11064240" cy="347472"/>
+          </a:xfrm>
+          <a:prstGeom prst="rect">
+            <a:avLst/>
+          </a:prstGeom>
+          <a:solidFill>
+            <a:srgbClr val="F4F7FB"/>
+          </a:solidFill>
+          <a:ln>
+            <a:solidFill>
+              <a:srgbClr val="F4F7FB"/>
+            </a:solidFill>
+          </a:ln>
+        </p:spPr>
+        <p:style>
+          <a:lnRef idx="1">
+            <a:schemeClr val="accent1"/>
+          </a:lnRef>
+          <a:fillRef idx="3">
+            <a:schemeClr val="accent1"/>
+          </a:fillRef>
+          <a:effectRef idx="2">
+            <a:schemeClr val="accent1"/>
+          </a:effectRef>
+          <a:fontRef idx="minor">
+            <a:schemeClr val="lt1"/>
+          </a:fontRef>
+        </p:style>
+        <p:txBody>
+          <a:bodyPr rtlCol="0" anchor="ctr" wrap="square" lIns="73152" rIns="73152" tIns="36576" bIns="36576"/>
+          <a:lstStyle/>
+          <a:p>
+            <a:pPr algn="l">
+              <a:spcAft>
+                <a:spcPts val="0"/>
+              </a:spcAft>
+              <a:defRPr sz="1300" b="1">
+                <a:solidFill>
+                  <a:srgbClr val="122C4E"/>
+                </a:solidFill>
+                <a:latin typeface="Noto Sans CJK KR"/>
+              </a:defRPr>
+            </a:pPr>
+            <a:r>
+              <a:t>현재 단계 체크포인트    |    현재 폴더 ~/ros2_curri/my_agv_ws    |    현재 터미널</a:t>
+            </a:r>
+          </a:p>
+        </p:txBody>
+      </p:sp>
+      <p:sp>
+        <p:nvSpPr>
+          <p:cNvPr id="7" name="Rounded Rectangle 6"/>
+          <p:cNvSpPr/>
+          <p:nvPr/>
+        </p:nvSpPr>
+        <p:spPr>
+          <a:xfrm>
+            <a:off x="685800" y="1737360"/>
+            <a:ext cx="10972800" cy="3611880"/>
+          </a:xfrm>
+          <a:prstGeom prst="roundRect">
+            <a:avLst/>
+          </a:prstGeom>
+          <a:solidFill>
+            <a:srgbClr val="F4F7FB"/>
+          </a:solidFill>
+          <a:ln>
+            <a:solidFill>
+              <a:srgbClr val="D2DCE8"/>
+            </a:solidFill>
+          </a:ln>
+        </p:spPr>
+        <p:style>
+          <a:lnRef idx="1">
+            <a:schemeClr val="accent1"/>
+          </a:lnRef>
+          <a:fillRef idx="3">
+            <a:schemeClr val="accent1"/>
+          </a:fillRef>
+          <a:effectRef idx="2">
+            <a:schemeClr val="accent1"/>
+          </a:effectRef>
+          <a:fontRef idx="minor">
+            <a:schemeClr val="lt1"/>
+          </a:fontRef>
+        </p:style>
+        <p:txBody>
+          <a:bodyPr rtlCol="0" anchor="ctr"/>
+          <a:lstStyle/>
+          <a:p>
+            <a:pPr algn="ctr"/>
+          </a:p>
+        </p:txBody>
+      </p:sp>
+      <p:sp>
+        <p:nvSpPr>
+          <p:cNvPr id="8" name="TextBox 7"/>
+          <p:cNvSpPr txBox="1"/>
+          <p:nvPr/>
+        </p:nvSpPr>
+        <p:spPr>
+          <a:xfrm>
+            <a:off x="896112" y="1993392"/>
+            <a:ext cx="10332720" cy="2971800"/>
+          </a:xfrm>
+          <a:prstGeom prst="rect">
+            <a:avLst/>
+          </a:prstGeom>
+          <a:noFill/>
+        </p:spPr>
+        <p:txBody>
+          <a:bodyPr wrap="square" lIns="109728" rIns="109728">
+            <a:spAutoFit/>
+          </a:bodyPr>
+          <a:lstStyle/>
+          <a:p>
+            <a:pPr>
+              <a:spcAft>
+                <a:spcPts val="800"/>
+              </a:spcAft>
+              <a:defRPr sz="1800">
+                <a:solidFill>
+                  <a:srgbClr val="122C4E"/>
+                </a:solidFill>
+                <a:latin typeface="Noto Sans CJK KR"/>
+              </a:defRPr>
+            </a:pPr>
+            <a:r>
+              <a:t>• □ 완료 화면: `ros2 control list_controllers`에서 joint_state_broadcaster와 diff_drive_controller가 모두 active이고 wheel joint state가 publish된다.</a:t>
+            </a:r>
+          </a:p>
+          <a:p>
+            <a:pPr>
+              <a:spcAft>
+                <a:spcPts val="800"/>
+              </a:spcAft>
+              <a:defRPr sz="1800">
+                <a:solidFill>
+                  <a:srgbClr val="122C4E"/>
+                </a:solidFill>
+                <a:latin typeface="Noto Sans CJK KR"/>
+              </a:defRPr>
+            </a:pPr>
+            <a:r>
+              <a:t>• □ 막혔을 때 비교할 Complete: blocks/E_autonomy_logic/M16_ros2_control/complete/</a:t>
+            </a:r>
+          </a:p>
+          <a:p>
+            <a:pPr>
+              <a:spcAft>
+                <a:spcPts val="800"/>
+              </a:spcAft>
+              <a:defRPr sz="1800">
+                <a:solidFill>
+                  <a:srgbClr val="122C4E"/>
+                </a:solidFill>
+                <a:latin typeface="Noto Sans CJK KR"/>
+              </a:defRPr>
+            </a:pPr>
+            <a:r>
+              <a:t>• □ 정상 로그·캡처: logs/validation.log, screenshots/validation_terminal.png</a:t>
+            </a:r>
+          </a:p>
+          <a:p>
+            <a:pPr>
+              <a:spcAft>
+                <a:spcPts val="800"/>
+              </a:spcAft>
+              <a:defRPr sz="1800">
+                <a:solidFill>
+                  <a:srgbClr val="122C4E"/>
+                </a:solidFill>
+                <a:latin typeface="Noto Sans CJK KR"/>
+              </a:defRPr>
+            </a:pPr>
+            <a:r>
+              <a:t>• □ 버전 식별: CHECKSUM_or_TAG.txt의 SHA-256 manifest</a:t>
+            </a:r>
+          </a:p>
+          <a:p>
+            <a:pPr>
+              <a:spcAft>
+                <a:spcPts val="800"/>
+              </a:spcAft>
+              <a:defRPr sz="1800">
+                <a:solidFill>
+                  <a:srgbClr val="122C4E"/>
+                </a:solidFill>
+                <a:latin typeface="Noto Sans CJK KR"/>
+              </a:defRPr>
+            </a:pPr>
+            <a:r>
+              <a:t>• □ 다음 시작 조건: M17~M20 autonomy command</a:t>
+            </a:r>
+          </a:p>
+        </p:txBody>
+      </p:sp>
+      <p:sp>
+        <p:nvSpPr>
+          <p:cNvPr id="9" name="TextBox 8"/>
+          <p:cNvSpPr txBox="1"/>
+          <p:nvPr/>
+        </p:nvSpPr>
+        <p:spPr>
+          <a:xfrm>
+            <a:off x="868680" y="5596128"/>
+            <a:ext cx="10515600" cy="338328"/>
+          </a:xfrm>
+          <a:prstGeom prst="rect">
+            <a:avLst/>
+          </a:prstGeom>
+          <a:noFill/>
+        </p:spPr>
+        <p:txBody>
+          <a:bodyPr wrap="square" lIns="73152" rIns="73152" tIns="36576" bIns="36576">
+            <a:spAutoFit/>
+          </a:bodyPr>
+          <a:lstStyle/>
+          <a:p>
+            <a:pPr algn="ctr">
+              <a:spcAft>
+                <a:spcPts val="0"/>
+              </a:spcAft>
+              <a:defRPr sz="1700" b="1">
+                <a:solidFill>
+                  <a:srgbClr val="2A8B5A"/>
+                </a:solidFill>
+                <a:latin typeface="Noto Sans CJK KR"/>
+              </a:defRPr>
+            </a:pPr>
+            <a:r>
+              <a:t>다음 모듈을 시작하기 전, 내 src의 변경사항을 저장하고 현재 완료 조건을 다시 확인합니다.</a:t>
+            </a:r>
+          </a:p>
+        </p:txBody>
+      </p:sp>
+    </p:spTree>
+  </p:cSld>
+  <p:clrMapOvr>
+    <a:masterClrMapping/>
+  </p:clrMapOvr>
+</p:sld>
+</file>
+
+<file path=ppt/slides/slide61.xml><?xml version="1.0" encoding="utf-8"?>
 <p:sld xmlns:a="http://schemas.openxmlformats.org/drawingml/2006/main" xmlns:p="http://schemas.openxmlformats.org/presentationml/2006/main" xmlns:r="http://schemas.openxmlformats.org/officeDocument/2006/relationships">
   <p:cSld>
     <p:spTree>
